--- a/docs/agent_html_preview_proposal.pptx
+++ b/docs/agent_html_preview_proposal.pptx
@@ -15,7 +15,6 @@
     <p:sldId id="263" r:id="rId14"/>
     <p:sldId id="264" r:id="rId15"/>
     <p:sldId id="265" r:id="rId16"/>
-    <p:sldId id="266" r:id="rId17"/>
   </p:sldIdLst>
   <p:sldSz cx="12191695" cy="6858000" type="screen4x3"/>
   <p:notesSz cx="6858000" cy="9144000"/>
@@ -3091,14 +3090,6 @@
 <file path=ppt/slides/slide1.xml><?xml version="1.0" encoding="utf-8"?>
 <p:sld xmlns:a="http://schemas.openxmlformats.org/drawingml/2006/main" xmlns:p="http://schemas.openxmlformats.org/presentationml/2006/main" xmlns:r="http://schemas.openxmlformats.org/officeDocument/2006/relationships">
   <p:cSld>
-    <p:bg>
-      <p:bgPr>
-        <a:solidFill>
-          <a:srgbClr val="0070C0"/>
-        </a:solidFill>
-        <a:effectLst/>
-      </p:bgPr>
-    </p:bg>
     <p:spTree>
       <p:nvGrpSpPr>
         <p:cNvPr id="1" name=""/>
@@ -3108,47 +3099,170 @@
       <p:grpSpPr/>
       <p:sp>
         <p:nvSpPr>
-          <p:cNvPr id="2" name="TextBox 1"/>
-          <p:cNvSpPr txBox="1"/>
-          <p:nvPr/>
-        </p:nvSpPr>
-        <p:spPr>
-          <a:xfrm>
-            <a:off x="731520" y="2194560"/>
-            <a:ext cx="10698480" cy="1371600"/>
+          <p:cNvPr id="2" name="Rectangle 1"/>
+          <p:cNvSpPr/>
+          <p:nvPr/>
+        </p:nvSpPr>
+        <p:spPr>
+          <a:xfrm>
+            <a:off x="0" y="0"/>
+            <a:ext cx="12191695" cy="6858000"/>
           </a:xfrm>
           <a:prstGeom prst="rect">
             <a:avLst/>
           </a:prstGeom>
+          <a:solidFill>
+            <a:srgbClr val="0F172A"/>
+          </a:solidFill>
+          <a:ln>
+            <a:noFill/>
+          </a:ln>
+        </p:spPr>
+        <p:style>
+          <a:lnRef idx="1">
+            <a:schemeClr val="accent1"/>
+          </a:lnRef>
+          <a:fillRef idx="3">
+            <a:schemeClr val="accent1"/>
+          </a:fillRef>
+          <a:effectRef idx="2">
+            <a:schemeClr val="accent1"/>
+          </a:effectRef>
+          <a:fontRef idx="minor">
+            <a:schemeClr val="lt1"/>
+          </a:fontRef>
+        </p:style>
+        <p:txBody>
+          <a:bodyPr rtlCol="0" anchor="ctr"/>
+          <a:lstStyle/>
+          <a:p>
+            <a:pPr algn="ctr"/>
+          </a:p>
+        </p:txBody>
+      </p:sp>
+      <p:sp>
+        <p:nvSpPr>
+          <p:cNvPr id="3" name="Rectangle 2"/>
+          <p:cNvSpPr/>
+          <p:nvPr/>
+        </p:nvSpPr>
+        <p:spPr>
+          <a:xfrm>
+            <a:off x="0" y="5394960"/>
+            <a:ext cx="12191695" cy="1463040"/>
+          </a:xfrm>
+          <a:prstGeom prst="rect">
+            <a:avLst/>
+          </a:prstGeom>
+          <a:solidFill>
+            <a:srgbClr val="0F766E"/>
+          </a:solidFill>
+          <a:ln>
+            <a:noFill/>
+          </a:ln>
+        </p:spPr>
+        <p:style>
+          <a:lnRef idx="1">
+            <a:schemeClr val="accent1"/>
+          </a:lnRef>
+          <a:fillRef idx="3">
+            <a:schemeClr val="accent1"/>
+          </a:fillRef>
+          <a:effectRef idx="2">
+            <a:schemeClr val="accent1"/>
+          </a:effectRef>
+          <a:fontRef idx="minor">
+            <a:schemeClr val="lt1"/>
+          </a:fontRef>
+        </p:style>
+        <p:txBody>
+          <a:bodyPr rtlCol="0" anchor="ctr"/>
+          <a:lstStyle/>
+          <a:p>
+            <a:pPr algn="ctr"/>
+          </a:p>
+        </p:txBody>
+      </p:sp>
+      <p:sp>
+        <p:nvSpPr>
+          <p:cNvPr id="4" name="TextBox 3"/>
+          <p:cNvSpPr txBox="1"/>
+          <p:nvPr/>
+        </p:nvSpPr>
+        <p:spPr>
+          <a:xfrm>
+            <a:off x="731520" y="1828800"/>
+            <a:ext cx="10515600" cy="2286000"/>
+          </a:xfrm>
+          <a:prstGeom prst="rect">
+            <a:avLst/>
+          </a:prstGeom>
           <a:noFill/>
         </p:spPr>
         <p:txBody>
-          <a:bodyPr wrap="none">
+          <a:bodyPr wrap="square">
             <a:spAutoFit/>
           </a:bodyPr>
           <a:lstStyle/>
           <a:p>
-            <a:pPr algn="l">
-              <a:defRPr sz="3400" b="1">
+            <a:r>
+              <a:rPr sz="3200" b="1">
                 <a:solidFill>
                   <a:srgbClr val="FFFFFF"/>
                 </a:solidFill>
-              </a:defRPr>
-            </a:pPr>
-            <a:r>
-              <a:t>Agent 生成 HTML 并在端侧显示</a:t>
-            </a:r>
-          </a:p>
-          <a:p>
-            <a:pPr algn="l">
-              <a:defRPr sz="2000">
+                <a:latin typeface="Calibri"/>
+              </a:rPr>
+              <a:t>Agent 对话内 HTML 生成与端侧呈现</a:t>
+            </a:r>
+          </a:p>
+          <a:p>
+            <a:pPr>
+              <a:spcBef>
+                <a:spcPts val="1400"/>
+              </a:spcBef>
+            </a:pPr>
+            <a:r>
+              <a:rPr sz="1800" b="0">
+                <a:solidFill>
+                  <a:srgbClr val="94A3B8"/>
+                </a:solidFill>
+                <a:latin typeface="Calibri"/>
+              </a:rPr>
+              <a:t>从能力拆解到竞品范式，再到可落地的双路径方案</a:t>
+            </a:r>
+          </a:p>
+        </p:txBody>
+      </p:sp>
+      <p:sp>
+        <p:nvSpPr>
+          <p:cNvPr id="5" name="TextBox 4"/>
+          <p:cNvSpPr txBox="1"/>
+          <p:nvPr/>
+        </p:nvSpPr>
+        <p:spPr>
+          <a:xfrm>
+            <a:off x="731520" y="5669280"/>
+            <a:ext cx="10515600" cy="914400"/>
+          </a:xfrm>
+          <a:prstGeom prst="rect">
+            <a:avLst/>
+          </a:prstGeom>
+          <a:noFill/>
+        </p:spPr>
+        <p:txBody>
+          <a:bodyPr wrap="square">
+            <a:spAutoFit/>
+          </a:bodyPr>
+          <a:lstStyle/>
+          <a:p>
+            <a:r>
+              <a:rPr sz="1400" b="0">
                 <a:solidFill>
                   <a:srgbClr val="FFFFFF"/>
                 </a:solidFill>
-              </a:defRPr>
-            </a:pPr>
-            <a:r>
-              <a:t>竞品调研 + 两条实现路径 + 落地建议</a:t>
+                <a:latin typeface="Calibri"/>
+              </a:rPr>
+              <a:t>技术分享  ·  系统方案  ·  实现路径建议</a:t>
             </a:r>
           </a:p>
         </p:txBody>
@@ -3180,13 +3294,13 @@
         <p:spPr>
           <a:xfrm>
             <a:off x="0" y="0"/>
-            <a:ext cx="12191695" cy="1005840"/>
+            <a:ext cx="12191695" cy="6858000"/>
           </a:xfrm>
           <a:prstGeom prst="rect">
             <a:avLst/>
           </a:prstGeom>
           <a:solidFill>
-            <a:srgbClr val="0070C0"/>
+            <a:srgbClr val="F8FAFC"/>
           </a:solidFill>
           <a:ln>
             <a:noFill/>
@@ -3207,211 +3321,29 @@
           </a:fontRef>
         </p:style>
         <p:txBody>
-          <a:bodyPr rtlCol="0" anchor="ctr" lIns="548640"/>
-          <a:lstStyle/>
-          <a:p>
-            <a:pPr algn="l">
-              <a:defRPr sz="2600" b="1">
-                <a:solidFill>
-                  <a:srgbClr val="FFFFFF"/>
-                </a:solidFill>
-              </a:defRPr>
-            </a:pPr>
-            <a:r>
-              <a:t>推荐实现路径（分两步）</a:t>
-            </a:r>
-          </a:p>
-        </p:txBody>
-      </p:sp>
-      <p:sp>
-        <p:nvSpPr>
-          <p:cNvPr id="3" name="TextBox 2"/>
-          <p:cNvSpPr txBox="1"/>
-          <p:nvPr/>
-        </p:nvSpPr>
-        <p:spPr>
-          <a:xfrm>
-            <a:off x="640080" y="1280160"/>
-            <a:ext cx="10881360" cy="5303520"/>
+          <a:bodyPr rtlCol="0" anchor="ctr"/>
+          <a:lstStyle/>
+          <a:p>
+            <a:pPr algn="ctr"/>
+          </a:p>
+        </p:txBody>
+      </p:sp>
+      <p:sp>
+        <p:nvSpPr>
+          <p:cNvPr id="3" name="Rectangle 2"/>
+          <p:cNvSpPr/>
+          <p:nvPr/>
+        </p:nvSpPr>
+        <p:spPr>
+          <a:xfrm>
+            <a:off x="0" y="0"/>
+            <a:ext cx="12191695" cy="960120"/>
           </a:xfrm>
           <a:prstGeom prst="rect">
             <a:avLst/>
           </a:prstGeom>
-          <a:noFill/>
-        </p:spPr>
-        <p:txBody>
-          <a:bodyPr wrap="square">
-            <a:spAutoFit/>
-          </a:bodyPr>
-          <a:lstStyle/>
-          <a:p>
-            <a:pPr>
-              <a:spcAft>
-                <a:spcPts val="1000"/>
-              </a:spcAft>
-              <a:defRPr sz="1800">
-                <a:solidFill>
-                  <a:srgbClr val="282828"/>
-                </a:solidFill>
-              </a:defRPr>
-            </a:pPr>
-            <a:r>
-              <a:t>第一期：下载后完整渲染。</a:t>
-            </a:r>
-          </a:p>
-          <a:p>
-            <a:pPr>
-              <a:spcAft>
-                <a:spcPts val="1000"/>
-              </a:spcAft>
-              <a:defRPr sz="1800">
-                <a:solidFill>
-                  <a:srgbClr val="282828"/>
-                </a:solidFill>
-              </a:defRPr>
-            </a:pPr>
-            <a:r>
-              <a:t>  1. 确认 write 同步 HTML 时 mime="text/html"&gt;。</a:t>
-            </a:r>
-          </a:p>
-          <a:p>
-            <a:pPr>
-              <a:spcAft>
-                <a:spcPts val="1000"/>
-              </a:spcAft>
-              <a:defRPr sz="1800">
-                <a:solidFill>
-                  <a:srgbClr val="282828"/>
-                </a:solidFill>
-              </a:defRPr>
-            </a:pPr>
-            <a:r>
-              <a:t>  2. 端侧加 HTML 预览卡片（iframe/WebView）。</a:t>
-            </a:r>
-          </a:p>
-          <a:p>
-            <a:pPr>
-              <a:spcAft>
-                <a:spcPts val="1000"/>
-              </a:spcAft>
-              <a:defRPr sz="1800">
-                <a:solidFill>
-                  <a:srgbClr val="282828"/>
-                </a:solidFill>
-              </a:defRPr>
-            </a:pPr>
-            <a:r>
-              <a:t>  3. 默认 sandbox="allow-scripts"，独立源。</a:t>
-            </a:r>
-          </a:p>
-          <a:p>
-            <a:pPr>
-              <a:spcAft>
-                <a:spcPts val="1000"/>
-              </a:spcAft>
-              <a:defRPr sz="1800">
-                <a:solidFill>
-                  <a:srgbClr val="282828"/>
-                </a:solidFill>
-              </a:defRPr>
-            </a:pPr>
-          </a:p>
-          <a:p>
-            <a:pPr>
-              <a:spcAft>
-                <a:spcPts val="1000"/>
-              </a:spcAft>
-              <a:defRPr sz="1800">
-                <a:solidFill>
-                  <a:srgbClr val="282828"/>
-                </a:solidFill>
-              </a:defRPr>
-            </a:pPr>
-            <a:r>
-              <a:t>第二期：流式增量渲染。</a:t>
-            </a:r>
-          </a:p>
-          <a:p>
-            <a:pPr>
-              <a:spcAft>
-                <a:spcPts val="1000"/>
-              </a:spcAft>
-              <a:defRPr sz="1800">
-                <a:solidFill>
-                  <a:srgbClr val="282828"/>
-                </a:solidFill>
-              </a:defRPr>
-            </a:pPr>
-            <a:r>
-              <a:t>  1. 增加 token 级推送通道。</a:t>
-            </a:r>
-          </a:p>
-          <a:p>
-            <a:pPr>
-              <a:spcAft>
-                <a:spcPts val="1000"/>
-              </a:spcAft>
-              <a:defRPr sz="1800">
-                <a:solidFill>
-                  <a:srgbClr val="282828"/>
-                </a:solidFill>
-              </a:defRPr>
-            </a:pPr>
-            <a:r>
-              <a:t>  2. 端侧 buffer 累积 + 安全刷新策略。</a:t>
-            </a:r>
-          </a:p>
-          <a:p>
-            <a:pPr>
-              <a:spcAft>
-                <a:spcPts val="1000"/>
-              </a:spcAft>
-              <a:defRPr sz="1800">
-                <a:solidFill>
-                  <a:srgbClr val="282828"/>
-                </a:solidFill>
-              </a:defRPr>
-            </a:pPr>
-            <a:r>
-              <a:t>  3. 和方案 A 并存，最终仍以稳定版为准。</a:t>
-            </a:r>
-          </a:p>
-        </p:txBody>
-      </p:sp>
-    </p:spTree>
-  </p:cSld>
-  <p:clrMapOvr>
-    <a:masterClrMapping/>
-  </p:clrMapOvr>
-</p:sld>
-</file>
-
-<file path=ppt/slides/slide11.xml><?xml version="1.0" encoding="utf-8"?>
-<p:sld xmlns:a="http://schemas.openxmlformats.org/drawingml/2006/main" xmlns:p="http://schemas.openxmlformats.org/presentationml/2006/main" xmlns:r="http://schemas.openxmlformats.org/officeDocument/2006/relationships">
-  <p:cSld>
-    <p:spTree>
-      <p:nvGrpSpPr>
-        <p:cNvPr id="1" name=""/>
-        <p:cNvGrpSpPr/>
-        <p:nvPr/>
-      </p:nvGrpSpPr>
-      <p:grpSpPr/>
-      <p:sp>
-        <p:nvSpPr>
-          <p:cNvPr id="2" name="Rectangle 1"/>
-          <p:cNvSpPr/>
-          <p:nvPr/>
-        </p:nvSpPr>
-        <p:spPr>
-          <a:xfrm>
-            <a:off x="0" y="0"/>
-            <a:ext cx="12191695" cy="1005840"/>
-          </a:xfrm>
-          <a:prstGeom prst="rect">
-            <a:avLst/>
-          </a:prstGeom>
           <a:solidFill>
-            <a:srgbClr val="0070C0"/>
+            <a:srgbClr val="0F172A"/>
           </a:solidFill>
           <a:ln>
             <a:noFill/>
@@ -3432,32 +3364,66 @@
           </a:fontRef>
         </p:style>
         <p:txBody>
-          <a:bodyPr rtlCol="0" anchor="ctr" lIns="548640"/>
-          <a:lstStyle/>
-          <a:p>
-            <a:pPr algn="l">
-              <a:defRPr sz="2600" b="1">
-                <a:solidFill>
-                  <a:srgbClr val="FFFFFF"/>
-                </a:solidFill>
-              </a:defRPr>
-            </a:pPr>
-            <a:r>
-              <a:t>总结</a:t>
-            </a:r>
-          </a:p>
-        </p:txBody>
-      </p:sp>
-      <p:sp>
-        <p:nvSpPr>
-          <p:cNvPr id="3" name="TextBox 2"/>
+          <a:bodyPr rtlCol="0" anchor="ctr"/>
+          <a:lstStyle/>
+          <a:p>
+            <a:pPr algn="ctr"/>
+          </a:p>
+        </p:txBody>
+      </p:sp>
+      <p:sp>
+        <p:nvSpPr>
+          <p:cNvPr id="4" name="Rectangle 3"/>
+          <p:cNvSpPr/>
+          <p:nvPr/>
+        </p:nvSpPr>
+        <p:spPr>
+          <a:xfrm>
+            <a:off x="0" y="960120"/>
+            <a:ext cx="12191695" cy="54864"/>
+          </a:xfrm>
+          <a:prstGeom prst="rect">
+            <a:avLst/>
+          </a:prstGeom>
+          <a:solidFill>
+            <a:srgbClr val="0D9488"/>
+          </a:solidFill>
+          <a:ln>
+            <a:noFill/>
+          </a:ln>
+        </p:spPr>
+        <p:style>
+          <a:lnRef idx="1">
+            <a:schemeClr val="accent1"/>
+          </a:lnRef>
+          <a:fillRef idx="3">
+            <a:schemeClr val="accent1"/>
+          </a:fillRef>
+          <a:effectRef idx="2">
+            <a:schemeClr val="accent1"/>
+          </a:effectRef>
+          <a:fontRef idx="minor">
+            <a:schemeClr val="lt1"/>
+          </a:fontRef>
+        </p:style>
+        <p:txBody>
+          <a:bodyPr rtlCol="0" anchor="ctr"/>
+          <a:lstStyle/>
+          <a:p>
+            <a:pPr algn="ctr"/>
+          </a:p>
+        </p:txBody>
+      </p:sp>
+      <p:sp>
+        <p:nvSpPr>
+          <p:cNvPr id="5" name="TextBox 4"/>
           <p:cNvSpPr txBox="1"/>
           <p:nvPr/>
         </p:nvSpPr>
         <p:spPr>
           <a:xfrm>
-            <a:off x="640080" y="1280160"/>
-            <a:ext cx="10881360" cy="5303520"/>
+            <a:off x="502920" y="201168"/>
+            <a:ext cx="11155680" cy="640080"/>
           </a:xfrm>
           <a:prstGeom prst="rect">
             <a:avLst/>
@@ -3470,63 +3436,198 @@
           </a:bodyPr>
           <a:lstStyle/>
           <a:p>
+            <a:r>
+              <a:rPr sz="2400" b="1">
+                <a:solidFill>
+                  <a:srgbClr val="FFFFFF"/>
+                </a:solidFill>
+                <a:latin typeface="Calibri"/>
+              </a:rPr>
+              <a:t>09  结论与建议</a:t>
+            </a:r>
+          </a:p>
+          <a:p>
+            <a:r>
+              <a:rPr sz="1200" b="0">
+                <a:solidFill>
+                  <a:srgbClr val="94A3B8"/>
+                </a:solidFill>
+                <a:latin typeface="Calibri"/>
+              </a:rPr>
+              <a:t>用最少改动打通「对话里看得见的网页」</a:t>
+            </a:r>
+          </a:p>
+        </p:txBody>
+      </p:sp>
+      <p:sp>
+        <p:nvSpPr>
+          <p:cNvPr id="6" name="TextBox 5"/>
+          <p:cNvSpPr txBox="1"/>
+          <p:nvPr/>
+        </p:nvSpPr>
+        <p:spPr>
+          <a:xfrm>
+            <a:off x="640080" y="1280160"/>
+            <a:ext cx="10972800" cy="5029200"/>
+          </a:xfrm>
+          <a:prstGeom prst="rect">
+            <a:avLst/>
+          </a:prstGeom>
+          <a:noFill/>
+        </p:spPr>
+        <p:txBody>
+          <a:bodyPr wrap="square">
+            <a:spAutoFit/>
+          </a:bodyPr>
+          <a:lstStyle/>
+          <a:p>
             <a:pPr>
               <a:spcAft>
-                <a:spcPts val="1000"/>
+                <a:spcPts val="1400"/>
               </a:spcAft>
-              <a:defRPr sz="1800">
-                <a:solidFill>
-                  <a:srgbClr val="282828"/>
-                </a:solidFill>
-              </a:defRPr>
-            </a:pPr>
-            <a:r>
-              <a:t>HTML 生成能力本质是 LLM 文本 + FS 落盘。</a:t>
+            </a:pPr>
+            <a:r>
+              <a:rPr sz="1600" b="1">
+                <a:solidFill>
+                  <a:srgbClr val="0D9488"/>
+                </a:solidFill>
+                <a:latin typeface="Calibri"/>
+              </a:rPr>
+              <a:t>定位  </a:t>
+            </a:r>
+            <a:r>
+              <a:rPr sz="1600" b="0">
+                <a:solidFill>
+                  <a:srgbClr val="334155"/>
+                </a:solidFill>
+                <a:latin typeface="Calibri"/>
+              </a:rPr>
+              <a:t>对标 Artifact/Widget，而不是一上来做全栈 App Builder。</a:t>
             </a:r>
           </a:p>
           <a:p>
             <a:pPr>
               <a:spcAft>
-                <a:spcPts val="1000"/>
+                <a:spcPts val="1400"/>
               </a:spcAft>
-              <a:defRPr sz="1800">
-                <a:solidFill>
-                  <a:srgbClr val="282828"/>
-                </a:solidFill>
-              </a:defRPr>
-            </a:pPr>
-            <a:r>
-              <a:t>我们已有 write + 云空间同步，缺的只是端侧渲染。</a:t>
+            </a:pPr>
+            <a:r>
+              <a:rPr sz="1600" b="1">
+                <a:solidFill>
+                  <a:srgbClr val="0D9488"/>
+                </a:solidFill>
+                <a:latin typeface="Calibri"/>
+              </a:rPr>
+              <a:t>真相  </a:t>
+            </a:r>
+            <a:r>
+              <a:rPr sz="1600" b="0">
+                <a:solidFill>
+                  <a:srgbClr val="334155"/>
+                </a:solidFill>
+                <a:latin typeface="Calibri"/>
+              </a:rPr>
+              <a:t>生成靠模型；write+云空间已解决分发；缺口在端侧安全渲染。</a:t>
             </a:r>
           </a:p>
           <a:p>
             <a:pPr>
               <a:spcAft>
-                <a:spcPts val="1000"/>
+                <a:spcPts val="1400"/>
               </a:spcAft>
-              <a:defRPr sz="1800">
-                <a:solidFill>
-                  <a:srgbClr val="282828"/>
-                </a:solidFill>
-              </a:defRPr>
-            </a:pPr>
-            <a:r>
-              <a:t>先稳后快：先上「下载后完整渲染」，再试水「流式增量」。</a:t>
+            </a:pPr>
+            <a:r>
+              <a:rPr sz="1600" b="1">
+                <a:solidFill>
+                  <a:srgbClr val="0D9488"/>
+                </a:solidFill>
+                <a:latin typeface="Calibri"/>
+              </a:rPr>
+              <a:t>默认方案  </a:t>
+            </a:r>
+            <a:r>
+              <a:rPr sz="1600" b="0">
+                <a:solidFill>
+                  <a:srgbClr val="334155"/>
+                </a:solidFill>
+                <a:latin typeface="Calibri"/>
+              </a:rPr>
+              <a:t>路径 A：同步完成后下载全文，sandbox iframe/WebView 一次渲染。</a:t>
             </a:r>
           </a:p>
           <a:p>
             <a:pPr>
               <a:spcAft>
-                <a:spcPts val="1000"/>
+                <a:spcPts val="1400"/>
               </a:spcAft>
-              <a:defRPr sz="1800">
-                <a:solidFill>
-                  <a:srgbClr val="282828"/>
-                </a:solidFill>
-              </a:defRPr>
-            </a:pPr>
-            <a:r>
-              <a:t>安全默认：iframe/WebView sandbox、避免 allow-same-origin、收紧外链。</a:t>
+            </a:pPr>
+            <a:r>
+              <a:rPr sz="1600" b="1">
+                <a:solidFill>
+                  <a:srgbClr val="0D9488"/>
+                </a:solidFill>
+                <a:latin typeface="Calibri"/>
+              </a:rPr>
+              <a:t>增强方案  </a:t>
+            </a:r>
+            <a:r>
+              <a:rPr sz="1600" b="0">
+                <a:solidFill>
+                  <a:srgbClr val="334155"/>
+                </a:solidFill>
+                <a:latin typeface="Calibri"/>
+              </a:rPr>
+              <a:t>路径 B：流式粗预览提升体感，定稿仍落盘；勿替代 A。</a:t>
+            </a:r>
+          </a:p>
+          <a:p>
+            <a:pPr>
+              <a:spcAft>
+                <a:spcPts val="1400"/>
+              </a:spcAft>
+            </a:pPr>
+            <a:r>
+              <a:rPr sz="1600" b="1">
+                <a:solidFill>
+                  <a:srgbClr val="0D9488"/>
+                </a:solidFill>
+                <a:latin typeface="Calibri"/>
+              </a:rPr>
+              <a:t>安全底线  </a:t>
+            </a:r>
+            <a:r>
+              <a:rPr sz="1600" b="0">
+                <a:solidFill>
+                  <a:srgbClr val="334155"/>
+                </a:solidFill>
+                <a:latin typeface="Calibri"/>
+              </a:rPr>
+              <a:t>模型 HTML 当不可信内容；allow-scripts，慎开 allow-same-origin。</a:t>
+            </a:r>
+          </a:p>
+          <a:p>
+            <a:pPr>
+              <a:spcAft>
+                <a:spcPts val="1400"/>
+              </a:spcAft>
+            </a:pPr>
+            <a:r>
+              <a:rPr sz="1600" b="1">
+                <a:solidFill>
+                  <a:srgbClr val="0D9488"/>
+                </a:solidFill>
+                <a:latin typeface="Calibri"/>
+              </a:rPr>
+              <a:t>下一步  </a:t>
+            </a:r>
+            <a:r>
+              <a:rPr sz="1600" b="0">
+                <a:solidFill>
+                  <a:srgbClr val="334155"/>
+                </a:solidFill>
+                <a:latin typeface="Calibri"/>
+              </a:rPr>
+              <a:t>Phase 0 验通 → Phase 1 预览卡片上线 → 再评估是否做流式。</a:t>
             </a:r>
           </a:p>
         </p:txBody>
@@ -3558,13 +3659,13 @@
         <p:spPr>
           <a:xfrm>
             <a:off x="0" y="0"/>
-            <a:ext cx="12191695" cy="1005840"/>
+            <a:ext cx="12191695" cy="6858000"/>
           </a:xfrm>
           <a:prstGeom prst="rect">
             <a:avLst/>
           </a:prstGeom>
           <a:solidFill>
-            <a:srgbClr val="0070C0"/>
+            <a:srgbClr val="F8FAFC"/>
           </a:solidFill>
           <a:ln>
             <a:noFill/>
@@ -3585,32 +3686,109 @@
           </a:fontRef>
         </p:style>
         <p:txBody>
-          <a:bodyPr rtlCol="0" anchor="ctr" lIns="548640"/>
-          <a:lstStyle/>
-          <a:p>
-            <a:pPr algn="l">
-              <a:defRPr sz="2600" b="1">
-                <a:solidFill>
-                  <a:srgbClr val="FFFFFF"/>
-                </a:solidFill>
-              </a:defRPr>
-            </a:pPr>
-            <a:r>
-              <a:t>我们在讨论什么</a:t>
-            </a:r>
-          </a:p>
-        </p:txBody>
-      </p:sp>
-      <p:sp>
-        <p:nvSpPr>
-          <p:cNvPr id="3" name="TextBox 2"/>
+          <a:bodyPr rtlCol="0" anchor="ctr"/>
+          <a:lstStyle/>
+          <a:p>
+            <a:pPr algn="ctr"/>
+          </a:p>
+        </p:txBody>
+      </p:sp>
+      <p:sp>
+        <p:nvSpPr>
+          <p:cNvPr id="3" name="Rectangle 2"/>
+          <p:cNvSpPr/>
+          <p:nvPr/>
+        </p:nvSpPr>
+        <p:spPr>
+          <a:xfrm>
+            <a:off x="0" y="0"/>
+            <a:ext cx="12191695" cy="960120"/>
+          </a:xfrm>
+          <a:prstGeom prst="rect">
+            <a:avLst/>
+          </a:prstGeom>
+          <a:solidFill>
+            <a:srgbClr val="0F172A"/>
+          </a:solidFill>
+          <a:ln>
+            <a:noFill/>
+          </a:ln>
+        </p:spPr>
+        <p:style>
+          <a:lnRef idx="1">
+            <a:schemeClr val="accent1"/>
+          </a:lnRef>
+          <a:fillRef idx="3">
+            <a:schemeClr val="accent1"/>
+          </a:fillRef>
+          <a:effectRef idx="2">
+            <a:schemeClr val="accent1"/>
+          </a:effectRef>
+          <a:fontRef idx="minor">
+            <a:schemeClr val="lt1"/>
+          </a:fontRef>
+        </p:style>
+        <p:txBody>
+          <a:bodyPr rtlCol="0" anchor="ctr"/>
+          <a:lstStyle/>
+          <a:p>
+            <a:pPr algn="ctr"/>
+          </a:p>
+        </p:txBody>
+      </p:sp>
+      <p:sp>
+        <p:nvSpPr>
+          <p:cNvPr id="4" name="Rectangle 3"/>
+          <p:cNvSpPr/>
+          <p:nvPr/>
+        </p:nvSpPr>
+        <p:spPr>
+          <a:xfrm>
+            <a:off x="0" y="960120"/>
+            <a:ext cx="12191695" cy="54864"/>
+          </a:xfrm>
+          <a:prstGeom prst="rect">
+            <a:avLst/>
+          </a:prstGeom>
+          <a:solidFill>
+            <a:srgbClr val="0D9488"/>
+          </a:solidFill>
+          <a:ln>
+            <a:noFill/>
+          </a:ln>
+        </p:spPr>
+        <p:style>
+          <a:lnRef idx="1">
+            <a:schemeClr val="accent1"/>
+          </a:lnRef>
+          <a:fillRef idx="3">
+            <a:schemeClr val="accent1"/>
+          </a:fillRef>
+          <a:effectRef idx="2">
+            <a:schemeClr val="accent1"/>
+          </a:effectRef>
+          <a:fontRef idx="minor">
+            <a:schemeClr val="lt1"/>
+          </a:fontRef>
+        </p:style>
+        <p:txBody>
+          <a:bodyPr rtlCol="0" anchor="ctr"/>
+          <a:lstStyle/>
+          <a:p>
+            <a:pPr algn="ctr"/>
+          </a:p>
+        </p:txBody>
+      </p:sp>
+      <p:sp>
+        <p:nvSpPr>
+          <p:cNvPr id="5" name="TextBox 4"/>
           <p:cNvSpPr txBox="1"/>
           <p:nvPr/>
         </p:nvSpPr>
         <p:spPr>
           <a:xfrm>
-            <a:off x="640080" y="1280160"/>
-            <a:ext cx="10881360" cy="5303520"/>
+            <a:off x="502920" y="201168"/>
+            <a:ext cx="11155680" cy="640080"/>
           </a:xfrm>
           <a:prstGeom prst="rect">
             <a:avLst/>
@@ -3623,63 +3801,588 @@
           </a:bodyPr>
           <a:lstStyle/>
           <a:p>
-            <a:pPr>
-              <a:spcAft>
-                <a:spcPts val="1000"/>
-              </a:spcAft>
-              <a:defRPr sz="1800">
-                <a:solidFill>
-                  <a:srgbClr val="282828"/>
-                </a:solidFill>
-              </a:defRPr>
-            </a:pPr>
-            <a:r>
-              <a:t>用户期望：让 Agent 生成可交互页面，并在对话/端内直接看见。</a:t>
-            </a:r>
-          </a:p>
-          <a:p>
-            <a:pPr>
-              <a:spcAft>
-                <a:spcPts val="1000"/>
-              </a:spcAft>
-              <a:defRPr sz="1800">
-                <a:solidFill>
-                  <a:srgbClr val="282828"/>
-                </a:solidFill>
-              </a:defRPr>
-            </a:pPr>
-            <a:r>
-              <a:t>关键事实：HTML 不是工具写出来的，而是 LLM 文本生成能力。</a:t>
-            </a:r>
-          </a:p>
-          <a:p>
-            <a:pPr>
-              <a:spcAft>
-                <a:spcPts val="1000"/>
-              </a:spcAft>
-              <a:defRPr sz="1800">
-                <a:solidFill>
-                  <a:srgbClr val="282828"/>
-                </a:solidFill>
-              </a:defRPr>
-            </a:pPr>
-            <a:r>
-              <a:t>平台需要：落盘、同步、渲染容器（iframe/WebView）。</a:t>
-            </a:r>
-          </a:p>
-          <a:p>
-            <a:pPr>
-              <a:spcAft>
-                <a:spcPts val="1000"/>
-              </a:spcAft>
-              <a:defRPr sz="1800">
-                <a:solidFill>
-                  <a:srgbClr val="282828"/>
-                </a:solidFill>
-              </a:defRPr>
-            </a:pPr>
-            <a:r>
-              <a:t>本方案围绕 Web 控制台 + 华为云空间同步链路设计。</a:t>
+            <a:r>
+              <a:rPr sz="2400" b="1">
+                <a:solidFill>
+                  <a:srgbClr val="FFFFFF"/>
+                </a:solidFill>
+                <a:latin typeface="Calibri"/>
+              </a:rPr>
+              <a:t>01  先把问题说完整</a:t>
+            </a:r>
+          </a:p>
+          <a:p>
+            <a:r>
+              <a:rPr sz="1200" b="0">
+                <a:solidFill>
+                  <a:srgbClr val="94A3B8"/>
+                </a:solidFill>
+                <a:latin typeface="Calibri"/>
+              </a:rPr>
+              <a:t>不是「会不会写 HTML」，而是「对话产品里如何安全地生成、分发、呈现可执行内容」</a:t>
+            </a:r>
+          </a:p>
+        </p:txBody>
+      </p:sp>
+      <p:sp>
+        <p:nvSpPr>
+          <p:cNvPr id="6" name="Rounded Rectangle 5"/>
+          <p:cNvSpPr/>
+          <p:nvPr/>
+        </p:nvSpPr>
+        <p:spPr>
+          <a:xfrm>
+            <a:off x="457200" y="1280160"/>
+            <a:ext cx="3657600" cy="5029200"/>
+          </a:xfrm>
+          <a:prstGeom prst="roundRect">
+            <a:avLst>
+              <a:gd name="adj" fmla="val 8000"/>
+            </a:avLst>
+          </a:prstGeom>
+          <a:solidFill>
+            <a:srgbClr val="FFFFFF"/>
+          </a:solidFill>
+          <a:ln>
+            <a:solidFill>
+              <a:srgbClr val="E2E8F0"/>
+            </a:solidFill>
+          </a:ln>
+        </p:spPr>
+        <p:style>
+          <a:lnRef idx="1">
+            <a:schemeClr val="accent1"/>
+          </a:lnRef>
+          <a:fillRef idx="3">
+            <a:schemeClr val="accent1"/>
+          </a:fillRef>
+          <a:effectRef idx="2">
+            <a:schemeClr val="accent1"/>
+          </a:effectRef>
+          <a:fontRef idx="minor">
+            <a:schemeClr val="lt1"/>
+          </a:fontRef>
+        </p:style>
+        <p:txBody>
+          <a:bodyPr rtlCol="0" anchor="ctr"/>
+          <a:lstStyle/>
+          <a:p>
+            <a:pPr algn="ctr"/>
+          </a:p>
+        </p:txBody>
+      </p:sp>
+      <p:sp>
+        <p:nvSpPr>
+          <p:cNvPr id="7" name="TextBox 6"/>
+          <p:cNvSpPr txBox="1"/>
+          <p:nvPr/>
+        </p:nvSpPr>
+        <p:spPr>
+          <a:xfrm>
+            <a:off x="621792" y="1389888"/>
+            <a:ext cx="3383280" cy="4846320"/>
+          </a:xfrm>
+          <a:prstGeom prst="rect">
+            <a:avLst/>
+          </a:prstGeom>
+          <a:noFill/>
+        </p:spPr>
+        <p:txBody>
+          <a:bodyPr wrap="square">
+            <a:spAutoFit/>
+          </a:bodyPr>
+          <a:lstStyle/>
+          <a:p>
+            <a:r>
+              <a:rPr sz="1400" b="1">
+                <a:solidFill>
+                  <a:srgbClr val="0D9488"/>
+                </a:solidFill>
+                <a:latin typeface="Calibri"/>
+              </a:rPr>
+              <a:t>用户真正要的</a:t>
+            </a:r>
+          </a:p>
+          <a:p>
+            <a:pPr>
+              <a:spcBef>
+                <a:spcPts val="400"/>
+              </a:spcBef>
+            </a:pPr>
+            <a:r>
+              <a:rPr sz="1200" b="0">
+                <a:solidFill>
+                  <a:srgbClr val="334155"/>
+                </a:solidFill>
+                <a:latin typeface="Calibri"/>
+              </a:rPr>
+              <a:t>在对话里看到可点可交互的页面</a:t>
+            </a:r>
+          </a:p>
+          <a:p>
+            <a:pPr>
+              <a:spcBef>
+                <a:spcPts val="400"/>
+              </a:spcBef>
+            </a:pPr>
+            <a:r>
+              <a:rPr sz="1200" b="0">
+                <a:solidFill>
+                  <a:srgbClr val="334155"/>
+                </a:solidFill>
+                <a:latin typeface="Calibri"/>
+              </a:rPr>
+              <a:t>而不是一段只能复制的源码</a:t>
+            </a:r>
+          </a:p>
+          <a:p>
+            <a:pPr>
+              <a:spcBef>
+                <a:spcPts val="400"/>
+              </a:spcBef>
+            </a:pPr>
+            <a:r>
+              <a:rPr sz="1200" b="0">
+                <a:solidFill>
+                  <a:srgbClr val="334155"/>
+                </a:solidFill>
+                <a:latin typeface="Calibri"/>
+              </a:rPr>
+              <a:t>可刷新、可回看、最好可分享</a:t>
+            </a:r>
+          </a:p>
+          <a:p>
+            <a:pPr>
+              <a:spcBef>
+                <a:spcPts val="400"/>
+              </a:spcBef>
+            </a:pPr>
+            <a:r>
+              <a:rPr sz="1200" b="0">
+                <a:solidFill>
+                  <a:srgbClr val="334155"/>
+                </a:solidFill>
+                <a:latin typeface="Calibri"/>
+              </a:rPr>
+              <a:t/>
+            </a:r>
+          </a:p>
+          <a:p>
+            <a:pPr>
+              <a:spcBef>
+                <a:spcPts val="400"/>
+              </a:spcBef>
+            </a:pPr>
+            <a:r>
+              <a:rPr sz="1200" b="0">
+                <a:solidFill>
+                  <a:srgbClr val="334155"/>
+                </a:solidFill>
+                <a:latin typeface="Calibri"/>
+              </a:rPr>
+              <a:t>体验对标：</a:t>
+            </a:r>
+          </a:p>
+          <a:p>
+            <a:pPr>
+              <a:spcBef>
+                <a:spcPts val="400"/>
+              </a:spcBef>
+            </a:pPr>
+            <a:r>
+              <a:rPr sz="1200" b="0">
+                <a:solidFill>
+                  <a:srgbClr val="334155"/>
+                </a:solidFill>
+                <a:latin typeface="Calibri"/>
+              </a:rPr>
+              <a:t>Claude Artifacts / OpenClaw Widget</a:t>
+            </a:r>
+          </a:p>
+        </p:txBody>
+      </p:sp>
+      <p:sp>
+        <p:nvSpPr>
+          <p:cNvPr id="8" name="Rounded Rectangle 7"/>
+          <p:cNvSpPr/>
+          <p:nvPr/>
+        </p:nvSpPr>
+        <p:spPr>
+          <a:xfrm>
+            <a:off x="4297680" y="1280160"/>
+            <a:ext cx="3657600" cy="5029200"/>
+          </a:xfrm>
+          <a:prstGeom prst="roundRect">
+            <a:avLst>
+              <a:gd name="adj" fmla="val 8000"/>
+            </a:avLst>
+          </a:prstGeom>
+          <a:solidFill>
+            <a:srgbClr val="FFFFFF"/>
+          </a:solidFill>
+          <a:ln>
+            <a:solidFill>
+              <a:srgbClr val="E2E8F0"/>
+            </a:solidFill>
+          </a:ln>
+        </p:spPr>
+        <p:style>
+          <a:lnRef idx="1">
+            <a:schemeClr val="accent1"/>
+          </a:lnRef>
+          <a:fillRef idx="3">
+            <a:schemeClr val="accent1"/>
+          </a:fillRef>
+          <a:effectRef idx="2">
+            <a:schemeClr val="accent1"/>
+          </a:effectRef>
+          <a:fontRef idx="minor">
+            <a:schemeClr val="lt1"/>
+          </a:fontRef>
+        </p:style>
+        <p:txBody>
+          <a:bodyPr rtlCol="0" anchor="ctr"/>
+          <a:lstStyle/>
+          <a:p>
+            <a:pPr algn="ctr"/>
+          </a:p>
+        </p:txBody>
+      </p:sp>
+      <p:sp>
+        <p:nvSpPr>
+          <p:cNvPr id="9" name="TextBox 8"/>
+          <p:cNvSpPr txBox="1"/>
+          <p:nvPr/>
+        </p:nvSpPr>
+        <p:spPr>
+          <a:xfrm>
+            <a:off x="4462272" y="1389888"/>
+            <a:ext cx="3383280" cy="4846320"/>
+          </a:xfrm>
+          <a:prstGeom prst="rect">
+            <a:avLst/>
+          </a:prstGeom>
+          <a:noFill/>
+        </p:spPr>
+        <p:txBody>
+          <a:bodyPr wrap="square">
+            <a:spAutoFit/>
+          </a:bodyPr>
+          <a:lstStyle/>
+          <a:p>
+            <a:r>
+              <a:rPr sz="1400" b="1">
+                <a:solidFill>
+                  <a:srgbClr val="0D9488"/>
+                </a:solidFill>
+                <a:latin typeface="Calibri"/>
+              </a:rPr>
+              <a:t>容易误判的点</a:t>
+            </a:r>
+          </a:p>
+          <a:p>
+            <a:pPr>
+              <a:spcBef>
+                <a:spcPts val="400"/>
+              </a:spcBef>
+            </a:pPr>
+            <a:r>
+              <a:rPr sz="1200" b="0">
+                <a:solidFill>
+                  <a:srgbClr val="334155"/>
+                </a:solidFill>
+                <a:latin typeface="Calibri"/>
+              </a:rPr>
+              <a:t>× 需要一个 generate_html 神器</a:t>
+            </a:r>
+          </a:p>
+          <a:p>
+            <a:pPr>
+              <a:spcBef>
+                <a:spcPts val="400"/>
+              </a:spcBef>
+            </a:pPr>
+            <a:r>
+              <a:rPr sz="1200" b="0">
+                <a:solidFill>
+                  <a:srgbClr val="334155"/>
+                </a:solidFill>
+                <a:latin typeface="Calibri"/>
+              </a:rPr>
+              <a:t>× 云空间「不支持」= 存不了</a:t>
+            </a:r>
+          </a:p>
+          <a:p>
+            <a:pPr>
+              <a:spcBef>
+                <a:spcPts val="400"/>
+              </a:spcBef>
+            </a:pPr>
+            <a:r>
+              <a:rPr sz="1200" b="0">
+                <a:solidFill>
+                  <a:srgbClr val="334155"/>
+                </a:solidFill>
+                <a:latin typeface="Calibri"/>
+              </a:rPr>
+              <a:t>× 有 write 就等于能预览</a:t>
+            </a:r>
+          </a:p>
+          <a:p>
+            <a:pPr>
+              <a:spcBef>
+                <a:spcPts val="400"/>
+              </a:spcBef>
+            </a:pPr>
+            <a:r>
+              <a:rPr sz="1200" b="0">
+                <a:solidFill>
+                  <a:srgbClr val="334155"/>
+                </a:solidFill>
+                <a:latin typeface="Calibri"/>
+              </a:rPr>
+              <a:t>× 流式下发 = 必须上存储</a:t>
+            </a:r>
+          </a:p>
+          <a:p>
+            <a:pPr>
+              <a:spcBef>
+                <a:spcPts val="400"/>
+              </a:spcBef>
+            </a:pPr>
+            <a:r>
+              <a:rPr sz="1200" b="0">
+                <a:solidFill>
+                  <a:srgbClr val="334155"/>
+                </a:solidFill>
+                <a:latin typeface="Calibri"/>
+              </a:rPr>
+              <a:t/>
+            </a:r>
+          </a:p>
+          <a:p>
+            <a:pPr>
+              <a:spcBef>
+                <a:spcPts val="400"/>
+              </a:spcBef>
+            </a:pPr>
+            <a:r>
+              <a:rPr sz="1200" b="0">
+                <a:solidFill>
+                  <a:srgbClr val="334155"/>
+                </a:solidFill>
+                <a:latin typeface="Calibri"/>
+              </a:rPr>
+              <a:t>√ 生成是模型能力</a:t>
+            </a:r>
+          </a:p>
+          <a:p>
+            <a:pPr>
+              <a:spcBef>
+                <a:spcPts val="400"/>
+              </a:spcBef>
+            </a:pPr>
+            <a:r>
+              <a:rPr sz="1200" b="0">
+                <a:solidFill>
+                  <a:srgbClr val="334155"/>
+                </a:solidFill>
+                <a:latin typeface="Calibri"/>
+              </a:rPr>
+              <a:t>√ 呈现是端能力</a:t>
+            </a:r>
+          </a:p>
+          <a:p>
+            <a:pPr>
+              <a:spcBef>
+                <a:spcPts val="400"/>
+              </a:spcBef>
+            </a:pPr>
+            <a:r>
+              <a:rPr sz="1200" b="0">
+                <a:solidFill>
+                  <a:srgbClr val="334155"/>
+                </a:solidFill>
+                <a:latin typeface="Calibri"/>
+              </a:rPr>
+              <a:t>√ 同步是基础设施</a:t>
+            </a:r>
+          </a:p>
+        </p:txBody>
+      </p:sp>
+      <p:sp>
+        <p:nvSpPr>
+          <p:cNvPr id="10" name="Rounded Rectangle 9"/>
+          <p:cNvSpPr/>
+          <p:nvPr/>
+        </p:nvSpPr>
+        <p:spPr>
+          <a:xfrm>
+            <a:off x="8138160" y="1280160"/>
+            <a:ext cx="3566160" cy="5029200"/>
+          </a:xfrm>
+          <a:prstGeom prst="roundRect">
+            <a:avLst>
+              <a:gd name="adj" fmla="val 8000"/>
+            </a:avLst>
+          </a:prstGeom>
+          <a:solidFill>
+            <a:srgbClr val="FFFFFF"/>
+          </a:solidFill>
+          <a:ln>
+            <a:solidFill>
+              <a:srgbClr val="E2E8F0"/>
+            </a:solidFill>
+          </a:ln>
+        </p:spPr>
+        <p:style>
+          <a:lnRef idx="1">
+            <a:schemeClr val="accent1"/>
+          </a:lnRef>
+          <a:fillRef idx="3">
+            <a:schemeClr val="accent1"/>
+          </a:fillRef>
+          <a:effectRef idx="2">
+            <a:schemeClr val="accent1"/>
+          </a:effectRef>
+          <a:fontRef idx="minor">
+            <a:schemeClr val="lt1"/>
+          </a:fontRef>
+        </p:style>
+        <p:txBody>
+          <a:bodyPr rtlCol="0" anchor="ctr"/>
+          <a:lstStyle/>
+          <a:p>
+            <a:pPr algn="ctr"/>
+          </a:p>
+        </p:txBody>
+      </p:sp>
+      <p:sp>
+        <p:nvSpPr>
+          <p:cNvPr id="11" name="TextBox 10"/>
+          <p:cNvSpPr txBox="1"/>
+          <p:nvPr/>
+        </p:nvSpPr>
+        <p:spPr>
+          <a:xfrm>
+            <a:off x="8302752" y="1389888"/>
+            <a:ext cx="3291840" cy="4846320"/>
+          </a:xfrm>
+          <a:prstGeom prst="rect">
+            <a:avLst/>
+          </a:prstGeom>
+          <a:noFill/>
+        </p:spPr>
+        <p:txBody>
+          <a:bodyPr wrap="square">
+            <a:spAutoFit/>
+          </a:bodyPr>
+          <a:lstStyle/>
+          <a:p>
+            <a:r>
+              <a:rPr sz="1400" b="1">
+                <a:solidFill>
+                  <a:srgbClr val="0D9488"/>
+                </a:solidFill>
+                <a:latin typeface="Calibri"/>
+              </a:rPr>
+              <a:t>本次要讲清</a:t>
+            </a:r>
+          </a:p>
+          <a:p>
+            <a:pPr>
+              <a:spcBef>
+                <a:spcPts val="400"/>
+              </a:spcBef>
+            </a:pPr>
+            <a:r>
+              <a:rPr sz="1200" b="0">
+                <a:solidFill>
+                  <a:srgbClr val="334155"/>
+                </a:solidFill>
+                <a:latin typeface="Calibri"/>
+              </a:rPr>
+              <a:t>① 能力分层：生成→落盘→同步</a:t>
+            </a:r>
+          </a:p>
+          <a:p>
+            <a:pPr>
+              <a:spcBef>
+                <a:spcPts val="400"/>
+              </a:spcBef>
+            </a:pPr>
+            <a:r>
+              <a:rPr sz="1200" b="0">
+                <a:solidFill>
+                  <a:srgbClr val="334155"/>
+                </a:solidFill>
+                <a:latin typeface="Calibri"/>
+              </a:rPr>
+              <a:t>   →识别→渲染→安全→分享</a:t>
+            </a:r>
+          </a:p>
+          <a:p>
+            <a:pPr>
+              <a:spcBef>
+                <a:spcPts val="400"/>
+              </a:spcBef>
+            </a:pPr>
+            <a:r>
+              <a:rPr sz="1200" b="0">
+                <a:solidFill>
+                  <a:srgbClr val="334155"/>
+                </a:solidFill>
+                <a:latin typeface="Calibri"/>
+              </a:rPr>
+              <a:t>② 竞品四类范式与可抄点</a:t>
+            </a:r>
+          </a:p>
+          <a:p>
+            <a:pPr>
+              <a:spcBef>
+                <a:spcPts val="400"/>
+              </a:spcBef>
+            </a:pPr>
+            <a:r>
+              <a:rPr sz="1200" b="0">
+                <a:solidFill>
+                  <a:srgbClr val="334155"/>
+                </a:solidFill>
+                <a:latin typeface="Calibri"/>
+              </a:rPr>
+              <a:t>③ 我们已有链路与缺口</a:t>
+            </a:r>
+          </a:p>
+          <a:p>
+            <a:pPr>
+              <a:spcBef>
+                <a:spcPts val="400"/>
+              </a:spcBef>
+            </a:pPr>
+            <a:r>
+              <a:rPr sz="1200" b="0">
+                <a:solidFill>
+                  <a:srgbClr val="334155"/>
+                </a:solidFill>
+                <a:latin typeface="Calibri"/>
+              </a:rPr>
+              <a:t>④ 双路径：完整下载 vs 流式</a:t>
+            </a:r>
+          </a:p>
+          <a:p>
+            <a:pPr>
+              <a:spcBef>
+                <a:spcPts val="400"/>
+              </a:spcBef>
+            </a:pPr>
+            <a:r>
+              <a:rPr sz="1200" b="0">
+                <a:solidFill>
+                  <a:srgbClr val="334155"/>
+                </a:solidFill>
+                <a:latin typeface="Calibri"/>
+              </a:rPr>
+              <a:t>⑤ 安全边界与落地节奏</a:t>
             </a:r>
           </a:p>
         </p:txBody>
@@ -3711,13 +4414,13 @@
         <p:spPr>
           <a:xfrm>
             <a:off x="0" y="0"/>
-            <a:ext cx="12191695" cy="1005840"/>
+            <a:ext cx="12191695" cy="6858000"/>
           </a:xfrm>
           <a:prstGeom prst="rect">
             <a:avLst/>
           </a:prstGeom>
           <a:solidFill>
-            <a:srgbClr val="0070C0"/>
+            <a:srgbClr val="F8FAFC"/>
           </a:solidFill>
           <a:ln>
             <a:noFill/>
@@ -3738,32 +4441,109 @@
           </a:fontRef>
         </p:style>
         <p:txBody>
-          <a:bodyPr rtlCol="0" anchor="ctr" lIns="548640"/>
-          <a:lstStyle/>
-          <a:p>
-            <a:pPr algn="l">
-              <a:defRPr sz="2600" b="1">
-                <a:solidFill>
-                  <a:srgbClr val="FFFFFF"/>
-                </a:solidFill>
-              </a:defRPr>
-            </a:pPr>
-            <a:r>
-              <a:t>竞品怎么做：四类模式</a:t>
-            </a:r>
-          </a:p>
-        </p:txBody>
-      </p:sp>
-      <p:sp>
-        <p:nvSpPr>
-          <p:cNvPr id="3" name="TextBox 2"/>
+          <a:bodyPr rtlCol="0" anchor="ctr"/>
+          <a:lstStyle/>
+          <a:p>
+            <a:pPr algn="ctr"/>
+          </a:p>
+        </p:txBody>
+      </p:sp>
+      <p:sp>
+        <p:nvSpPr>
+          <p:cNvPr id="3" name="Rectangle 2"/>
+          <p:cNvSpPr/>
+          <p:nvPr/>
+        </p:nvSpPr>
+        <p:spPr>
+          <a:xfrm>
+            <a:off x="0" y="0"/>
+            <a:ext cx="12191695" cy="960120"/>
+          </a:xfrm>
+          <a:prstGeom prst="rect">
+            <a:avLst/>
+          </a:prstGeom>
+          <a:solidFill>
+            <a:srgbClr val="0F172A"/>
+          </a:solidFill>
+          <a:ln>
+            <a:noFill/>
+          </a:ln>
+        </p:spPr>
+        <p:style>
+          <a:lnRef idx="1">
+            <a:schemeClr val="accent1"/>
+          </a:lnRef>
+          <a:fillRef idx="3">
+            <a:schemeClr val="accent1"/>
+          </a:fillRef>
+          <a:effectRef idx="2">
+            <a:schemeClr val="accent1"/>
+          </a:effectRef>
+          <a:fontRef idx="minor">
+            <a:schemeClr val="lt1"/>
+          </a:fontRef>
+        </p:style>
+        <p:txBody>
+          <a:bodyPr rtlCol="0" anchor="ctr"/>
+          <a:lstStyle/>
+          <a:p>
+            <a:pPr algn="ctr"/>
+          </a:p>
+        </p:txBody>
+      </p:sp>
+      <p:sp>
+        <p:nvSpPr>
+          <p:cNvPr id="4" name="Rectangle 3"/>
+          <p:cNvSpPr/>
+          <p:nvPr/>
+        </p:nvSpPr>
+        <p:spPr>
+          <a:xfrm>
+            <a:off x="0" y="960120"/>
+            <a:ext cx="12191695" cy="54864"/>
+          </a:xfrm>
+          <a:prstGeom prst="rect">
+            <a:avLst/>
+          </a:prstGeom>
+          <a:solidFill>
+            <a:srgbClr val="0D9488"/>
+          </a:solidFill>
+          <a:ln>
+            <a:noFill/>
+          </a:ln>
+        </p:spPr>
+        <p:style>
+          <a:lnRef idx="1">
+            <a:schemeClr val="accent1"/>
+          </a:lnRef>
+          <a:fillRef idx="3">
+            <a:schemeClr val="accent1"/>
+          </a:fillRef>
+          <a:effectRef idx="2">
+            <a:schemeClr val="accent1"/>
+          </a:effectRef>
+          <a:fontRef idx="minor">
+            <a:schemeClr val="lt1"/>
+          </a:fontRef>
+        </p:style>
+        <p:txBody>
+          <a:bodyPr rtlCol="0" anchor="ctr"/>
+          <a:lstStyle/>
+          <a:p>
+            <a:pPr algn="ctr"/>
+          </a:p>
+        </p:txBody>
+      </p:sp>
+      <p:sp>
+        <p:nvSpPr>
+          <p:cNvPr id="5" name="TextBox 4"/>
           <p:cNvSpPr txBox="1"/>
           <p:nvPr/>
         </p:nvSpPr>
         <p:spPr>
           <a:xfrm>
-            <a:off x="640080" y="1280160"/>
-            <a:ext cx="10881360" cy="5303520"/>
+            <a:off x="502920" y="201168"/>
+            <a:ext cx="11155680" cy="640080"/>
           </a:xfrm>
           <a:prstGeom prst="rect">
             <a:avLst/>
@@ -3776,78 +4556,850 @@
           </a:bodyPr>
           <a:lstStyle/>
           <a:p>
-            <a:pPr>
-              <a:spcAft>
+            <a:r>
+              <a:rPr sz="2400" b="1">
+                <a:solidFill>
+                  <a:srgbClr val="FFFFFF"/>
+                </a:solidFill>
+                <a:latin typeface="Calibri"/>
+              </a:rPr>
+              <a:t>02  能力分层：支持 HTML 到底需要什么</a:t>
+            </a:r>
+          </a:p>
+          <a:p>
+            <a:r>
+              <a:rPr sz="1200" b="0">
+                <a:solidFill>
+                  <a:srgbClr val="94A3B8"/>
+                </a:solidFill>
+                <a:latin typeface="Calibri"/>
+              </a:rPr>
+              <a:t>把「能生成网页」拆成 7 层，缺哪层体验就断在哪层</a:t>
+            </a:r>
+          </a:p>
+        </p:txBody>
+      </p:sp>
+      <p:sp>
+        <p:nvSpPr>
+          <p:cNvPr id="6" name="Rounded Rectangle 5"/>
+          <p:cNvSpPr/>
+          <p:nvPr/>
+        </p:nvSpPr>
+        <p:spPr>
+          <a:xfrm>
+            <a:off x="411480" y="1417320"/>
+            <a:ext cx="1554480" cy="3840480"/>
+          </a:xfrm>
+          <a:prstGeom prst="roundRect">
+            <a:avLst>
+              <a:gd name="adj" fmla="val 10000"/>
+            </a:avLst>
+          </a:prstGeom>
+          <a:solidFill>
+            <a:srgbClr val="FFFFFF"/>
+          </a:solidFill>
+          <a:ln>
+            <a:solidFill>
+              <a:srgbClr val="0D9488"/>
+            </a:solidFill>
+          </a:ln>
+        </p:spPr>
+        <p:style>
+          <a:lnRef idx="1">
+            <a:schemeClr val="accent1"/>
+          </a:lnRef>
+          <a:fillRef idx="3">
+            <a:schemeClr val="accent1"/>
+          </a:fillRef>
+          <a:effectRef idx="2">
+            <a:schemeClr val="accent1"/>
+          </a:effectRef>
+          <a:fontRef idx="minor">
+            <a:schemeClr val="lt1"/>
+          </a:fontRef>
+        </p:style>
+        <p:txBody>
+          <a:bodyPr rtlCol="0" anchor="ctr"/>
+          <a:lstStyle/>
+          <a:p>
+            <a:pPr algn="ctr"/>
+          </a:p>
+        </p:txBody>
+      </p:sp>
+      <p:sp>
+        <p:nvSpPr>
+          <p:cNvPr id="7" name="TextBox 6"/>
+          <p:cNvSpPr txBox="1"/>
+          <p:nvPr/>
+        </p:nvSpPr>
+        <p:spPr>
+          <a:xfrm>
+            <a:off x="502920" y="1600200"/>
+            <a:ext cx="1371600" cy="3474720"/>
+          </a:xfrm>
+          <a:prstGeom prst="rect">
+            <a:avLst/>
+          </a:prstGeom>
+          <a:noFill/>
+        </p:spPr>
+        <p:txBody>
+          <a:bodyPr wrap="square">
+            <a:spAutoFit/>
+          </a:bodyPr>
+          <a:lstStyle/>
+          <a:p>
+            <a:r>
+              <a:rPr sz="1400" b="1">
+                <a:solidFill>
+                  <a:srgbClr val="0F172A"/>
+                </a:solidFill>
+                <a:latin typeface="Calibri"/>
+              </a:rPr>
+              <a:t>1. 生成</a:t>
+            </a:r>
+          </a:p>
+          <a:p>
+            <a:pPr>
+              <a:spcBef>
                 <a:spcPts val="1000"/>
-              </a:spcAft>
-              <a:defRPr sz="1800">
-                <a:solidFill>
-                  <a:srgbClr val="282828"/>
-                </a:solidFill>
-              </a:defRPr>
-            </a:pPr>
-            <a:r>
-              <a:t>1. Artifact 模式（Claude / OpenClaw）：单文件 HTML，侧栏 sandbox iframe 预览，可发布分享。</a:t>
-            </a:r>
-          </a:p>
-          <a:p>
-            <a:pPr>
-              <a:spcAft>
+              </a:spcBef>
+            </a:pPr>
+            <a:r>
+              <a:rPr sz="1100" b="0">
+                <a:solidFill>
+                  <a:srgbClr val="334155"/>
+                </a:solidFill>
+                <a:latin typeface="Calibri"/>
+              </a:rPr>
+              <a:t>LLM 产出 HTML/CSS/JS 文本</a:t>
+            </a:r>
+          </a:p>
+          <a:p>
+            <a:pPr>
+              <a:spcBef>
+                <a:spcPts val="1600"/>
+              </a:spcBef>
+            </a:pPr>
+            <a:r>
+              <a:rPr sz="1200" b="1">
+                <a:solidFill>
+                  <a:srgbClr val="0D9488"/>
+                </a:solidFill>
+                <a:latin typeface="Calibri"/>
+              </a:rPr>
+              <a:t>已有</a:t>
+            </a:r>
+          </a:p>
+        </p:txBody>
+      </p:sp>
+      <p:sp>
+        <p:nvSpPr>
+          <p:cNvPr id="8" name="Rounded Rectangle 7"/>
+          <p:cNvSpPr/>
+          <p:nvPr/>
+        </p:nvSpPr>
+        <p:spPr>
+          <a:xfrm>
+            <a:off x="2075688" y="1417320"/>
+            <a:ext cx="1554480" cy="3840480"/>
+          </a:xfrm>
+          <a:prstGeom prst="roundRect">
+            <a:avLst>
+              <a:gd name="adj" fmla="val 10000"/>
+            </a:avLst>
+          </a:prstGeom>
+          <a:solidFill>
+            <a:srgbClr val="FFFFFF"/>
+          </a:solidFill>
+          <a:ln>
+            <a:solidFill>
+              <a:srgbClr val="0D9488"/>
+            </a:solidFill>
+          </a:ln>
+        </p:spPr>
+        <p:style>
+          <a:lnRef idx="1">
+            <a:schemeClr val="accent1"/>
+          </a:lnRef>
+          <a:fillRef idx="3">
+            <a:schemeClr val="accent1"/>
+          </a:fillRef>
+          <a:effectRef idx="2">
+            <a:schemeClr val="accent1"/>
+          </a:effectRef>
+          <a:fontRef idx="minor">
+            <a:schemeClr val="lt1"/>
+          </a:fontRef>
+        </p:style>
+        <p:txBody>
+          <a:bodyPr rtlCol="0" anchor="ctr"/>
+          <a:lstStyle/>
+          <a:p>
+            <a:pPr algn="ctr"/>
+          </a:p>
+        </p:txBody>
+      </p:sp>
+      <p:sp>
+        <p:nvSpPr>
+          <p:cNvPr id="9" name="TextBox 8"/>
+          <p:cNvSpPr txBox="1"/>
+          <p:nvPr/>
+        </p:nvSpPr>
+        <p:spPr>
+          <a:xfrm>
+            <a:off x="2167128" y="1600200"/>
+            <a:ext cx="1371600" cy="3474720"/>
+          </a:xfrm>
+          <a:prstGeom prst="rect">
+            <a:avLst/>
+          </a:prstGeom>
+          <a:noFill/>
+        </p:spPr>
+        <p:txBody>
+          <a:bodyPr wrap="square">
+            <a:spAutoFit/>
+          </a:bodyPr>
+          <a:lstStyle/>
+          <a:p>
+            <a:r>
+              <a:rPr sz="1400" b="1">
+                <a:solidFill>
+                  <a:srgbClr val="0F172A"/>
+                </a:solidFill>
+                <a:latin typeface="Calibri"/>
+              </a:rPr>
+              <a:t>2. 落盘</a:t>
+            </a:r>
+          </a:p>
+          <a:p>
+            <a:pPr>
+              <a:spcBef>
                 <a:spcPts val="1000"/>
-              </a:spcAft>
-              <a:defRPr sz="1800">
-                <a:solidFill>
-                  <a:srgbClr val="282828"/>
-                </a:solidFill>
-              </a:defRPr>
-            </a:pPr>
-            <a:r>
-              <a:t>2. IDE 模式（Cursor）：HTML 当普通文件写入工作区，再启动本地服务或浏览器。</a:t>
-            </a:r>
-          </a:p>
-          <a:p>
-            <a:pPr>
-              <a:spcAft>
+              </a:spcBef>
+            </a:pPr>
+            <a:r>
+              <a:rPr sz="1100" b="0">
+                <a:solidFill>
+                  <a:srgbClr val="334155"/>
+                </a:solidFill>
+                <a:latin typeface="Calibri"/>
+              </a:rPr>
+              <a:t>write / edit 写入 workspace</a:t>
+            </a:r>
+          </a:p>
+          <a:p>
+            <a:pPr>
+              <a:spcBef>
+                <a:spcPts val="1600"/>
+              </a:spcBef>
+            </a:pPr>
+            <a:r>
+              <a:rPr sz="1200" b="1">
+                <a:solidFill>
+                  <a:srgbClr val="0D9488"/>
+                </a:solidFill>
+                <a:latin typeface="Calibri"/>
+              </a:rPr>
+              <a:t>已有</a:t>
+            </a:r>
+          </a:p>
+        </p:txBody>
+      </p:sp>
+      <p:sp>
+        <p:nvSpPr>
+          <p:cNvPr id="10" name="Rounded Rectangle 9"/>
+          <p:cNvSpPr/>
+          <p:nvPr/>
+        </p:nvSpPr>
+        <p:spPr>
+          <a:xfrm>
+            <a:off x="3739896" y="1417320"/>
+            <a:ext cx="1554480" cy="3840480"/>
+          </a:xfrm>
+          <a:prstGeom prst="roundRect">
+            <a:avLst>
+              <a:gd name="adj" fmla="val 10000"/>
+            </a:avLst>
+          </a:prstGeom>
+          <a:solidFill>
+            <a:srgbClr val="FFFFFF"/>
+          </a:solidFill>
+          <a:ln>
+            <a:solidFill>
+              <a:srgbClr val="0D9488"/>
+            </a:solidFill>
+          </a:ln>
+        </p:spPr>
+        <p:style>
+          <a:lnRef idx="1">
+            <a:schemeClr val="accent1"/>
+          </a:lnRef>
+          <a:fillRef idx="3">
+            <a:schemeClr val="accent1"/>
+          </a:fillRef>
+          <a:effectRef idx="2">
+            <a:schemeClr val="accent1"/>
+          </a:effectRef>
+          <a:fontRef idx="minor">
+            <a:schemeClr val="lt1"/>
+          </a:fontRef>
+        </p:style>
+        <p:txBody>
+          <a:bodyPr rtlCol="0" anchor="ctr"/>
+          <a:lstStyle/>
+          <a:p>
+            <a:pPr algn="ctr"/>
+          </a:p>
+        </p:txBody>
+      </p:sp>
+      <p:sp>
+        <p:nvSpPr>
+          <p:cNvPr id="11" name="TextBox 10"/>
+          <p:cNvSpPr txBox="1"/>
+          <p:nvPr/>
+        </p:nvSpPr>
+        <p:spPr>
+          <a:xfrm>
+            <a:off x="3831336" y="1600200"/>
+            <a:ext cx="1371600" cy="3474720"/>
+          </a:xfrm>
+          <a:prstGeom prst="rect">
+            <a:avLst/>
+          </a:prstGeom>
+          <a:noFill/>
+        </p:spPr>
+        <p:txBody>
+          <a:bodyPr wrap="square">
+            <a:spAutoFit/>
+          </a:bodyPr>
+          <a:lstStyle/>
+          <a:p>
+            <a:r>
+              <a:rPr sz="1400" b="1">
+                <a:solidFill>
+                  <a:srgbClr val="0F172A"/>
+                </a:solidFill>
+                <a:latin typeface="Calibri"/>
+              </a:rPr>
+              <a:t>3. 同步</a:t>
+            </a:r>
+          </a:p>
+          <a:p>
+            <a:pPr>
+              <a:spcBef>
                 <a:spcPts val="1000"/>
-              </a:spcAft>
-              <a:defRPr sz="1800">
-                <a:solidFill>
-                  <a:srgbClr val="282828"/>
-                </a:solidFill>
-              </a:defRPr>
-            </a:pPr>
-            <a:r>
-              <a:t>3. 全栈 App Builder（Manus / Lovable / Bolt）：生成工程 + 托管/WebContainer/真机预览。</a:t>
-            </a:r>
-          </a:p>
-          <a:p>
-            <a:pPr>
-              <a:spcAft>
+              </a:spcBef>
+            </a:pPr>
+            <a:r>
+              <a:rPr sz="1100" b="0">
+                <a:solidFill>
+                  <a:srgbClr val="334155"/>
+                </a:solidFill>
+                <a:latin typeface="Calibri"/>
+              </a:rPr>
+              <a:t>workspace → 华为云空间</a:t>
+            </a:r>
+          </a:p>
+          <a:p>
+            <a:pPr>
+              <a:spcBef>
+                <a:spcPts val="1600"/>
+              </a:spcBef>
+            </a:pPr>
+            <a:r>
+              <a:rPr sz="1200" b="1">
+                <a:solidFill>
+                  <a:srgbClr val="0D9488"/>
+                </a:solidFill>
+                <a:latin typeface="Calibri"/>
+              </a:rPr>
+              <a:t>已有</a:t>
+            </a:r>
+          </a:p>
+        </p:txBody>
+      </p:sp>
+      <p:sp>
+        <p:nvSpPr>
+          <p:cNvPr id="12" name="Rounded Rectangle 11"/>
+          <p:cNvSpPr/>
+          <p:nvPr/>
+        </p:nvSpPr>
+        <p:spPr>
+          <a:xfrm>
+            <a:off x="5404104" y="1417320"/>
+            <a:ext cx="1554480" cy="3840480"/>
+          </a:xfrm>
+          <a:prstGeom prst="roundRect">
+            <a:avLst>
+              <a:gd name="adj" fmla="val 10000"/>
+            </a:avLst>
+          </a:prstGeom>
+          <a:solidFill>
+            <a:srgbClr val="FFFFFF"/>
+          </a:solidFill>
+          <a:ln>
+            <a:solidFill>
+              <a:srgbClr val="E2E8F0"/>
+            </a:solidFill>
+          </a:ln>
+        </p:spPr>
+        <p:style>
+          <a:lnRef idx="1">
+            <a:schemeClr val="accent1"/>
+          </a:lnRef>
+          <a:fillRef idx="3">
+            <a:schemeClr val="accent1"/>
+          </a:fillRef>
+          <a:effectRef idx="2">
+            <a:schemeClr val="accent1"/>
+          </a:effectRef>
+          <a:fontRef idx="minor">
+            <a:schemeClr val="lt1"/>
+          </a:fontRef>
+        </p:style>
+        <p:txBody>
+          <a:bodyPr rtlCol="0" anchor="ctr"/>
+          <a:lstStyle/>
+          <a:p>
+            <a:pPr algn="ctr"/>
+          </a:p>
+        </p:txBody>
+      </p:sp>
+      <p:sp>
+        <p:nvSpPr>
+          <p:cNvPr id="13" name="TextBox 12"/>
+          <p:cNvSpPr txBox="1"/>
+          <p:nvPr/>
+        </p:nvSpPr>
+        <p:spPr>
+          <a:xfrm>
+            <a:off x="5495544" y="1600200"/>
+            <a:ext cx="1371600" cy="3474720"/>
+          </a:xfrm>
+          <a:prstGeom prst="rect">
+            <a:avLst/>
+          </a:prstGeom>
+          <a:noFill/>
+        </p:spPr>
+        <p:txBody>
+          <a:bodyPr wrap="square">
+            <a:spAutoFit/>
+          </a:bodyPr>
+          <a:lstStyle/>
+          <a:p>
+            <a:r>
+              <a:rPr sz="1400" b="1">
+                <a:solidFill>
+                  <a:srgbClr val="0F172A"/>
+                </a:solidFill>
+                <a:latin typeface="Calibri"/>
+              </a:rPr>
+              <a:t>4. 识别</a:t>
+            </a:r>
+          </a:p>
+          <a:p>
+            <a:pPr>
+              <a:spcBef>
                 <a:spcPts val="1000"/>
-              </a:spcAft>
-              <a:defRPr sz="1800">
-                <a:solidFill>
-                  <a:srgbClr val="282828"/>
-                </a:solidFill>
-              </a:defRPr>
-            </a:pPr>
-            <a:r>
-              <a:t>4. 文档 Canvas（ChatGPT Canvas）：侧重协作编辑，不跑 HTML 预览。</a:t>
-            </a:r>
-          </a:p>
-          <a:p>
-            <a:pPr>
-              <a:spcBef>
-                <a:spcPts val="1200"/>
-              </a:spcBef>
-              <a:defRPr sz="1400">
-                <a:solidFill>
-                  <a:srgbClr val="646464"/>
-                </a:solidFill>
-              </a:defRPr>
-            </a:pPr>
-            <a:r>
-              <a:t>我们优先对标 Artifact 模式：轻量、可预览、可分享。</a:t>
+              </a:spcBef>
+            </a:pPr>
+            <a:r>
+              <a:rPr sz="1100" b="0">
+                <a:solidFill>
+                  <a:srgbClr val="334155"/>
+                </a:solidFill>
+                <a:latin typeface="Calibri"/>
+              </a:rPr>
+              <a:t>MIME / 扩展名 / preview hint</a:t>
+            </a:r>
+          </a:p>
+          <a:p>
+            <a:pPr>
+              <a:spcBef>
+                <a:spcPts val="1600"/>
+              </a:spcBef>
+            </a:pPr>
+            <a:r>
+              <a:rPr sz="1200" b="1">
+                <a:solidFill>
+                  <a:srgbClr val="64748B"/>
+                </a:solidFill>
+                <a:latin typeface="Calibri"/>
+              </a:rPr>
+              <a:t>待补齐</a:t>
+            </a:r>
+          </a:p>
+        </p:txBody>
+      </p:sp>
+      <p:sp>
+        <p:nvSpPr>
+          <p:cNvPr id="14" name="Rounded Rectangle 13"/>
+          <p:cNvSpPr/>
+          <p:nvPr/>
+        </p:nvSpPr>
+        <p:spPr>
+          <a:xfrm>
+            <a:off x="7068312" y="1417320"/>
+            <a:ext cx="1554480" cy="3840480"/>
+          </a:xfrm>
+          <a:prstGeom prst="roundRect">
+            <a:avLst>
+              <a:gd name="adj" fmla="val 10000"/>
+            </a:avLst>
+          </a:prstGeom>
+          <a:solidFill>
+            <a:srgbClr val="FEF3C7"/>
+          </a:solidFill>
+          <a:ln>
+            <a:solidFill>
+              <a:srgbClr val="B45309"/>
+            </a:solidFill>
+          </a:ln>
+        </p:spPr>
+        <p:style>
+          <a:lnRef idx="1">
+            <a:schemeClr val="accent1"/>
+          </a:lnRef>
+          <a:fillRef idx="3">
+            <a:schemeClr val="accent1"/>
+          </a:fillRef>
+          <a:effectRef idx="2">
+            <a:schemeClr val="accent1"/>
+          </a:effectRef>
+          <a:fontRef idx="minor">
+            <a:schemeClr val="lt1"/>
+          </a:fontRef>
+        </p:style>
+        <p:txBody>
+          <a:bodyPr rtlCol="0" anchor="ctr"/>
+          <a:lstStyle/>
+          <a:p>
+            <a:pPr algn="ctr"/>
+          </a:p>
+        </p:txBody>
+      </p:sp>
+      <p:sp>
+        <p:nvSpPr>
+          <p:cNvPr id="15" name="TextBox 14"/>
+          <p:cNvSpPr txBox="1"/>
+          <p:nvPr/>
+        </p:nvSpPr>
+        <p:spPr>
+          <a:xfrm>
+            <a:off x="7159752" y="1600200"/>
+            <a:ext cx="1371600" cy="3474720"/>
+          </a:xfrm>
+          <a:prstGeom prst="rect">
+            <a:avLst/>
+          </a:prstGeom>
+          <a:noFill/>
+        </p:spPr>
+        <p:txBody>
+          <a:bodyPr wrap="square">
+            <a:spAutoFit/>
+          </a:bodyPr>
+          <a:lstStyle/>
+          <a:p>
+            <a:r>
+              <a:rPr sz="1400" b="1">
+                <a:solidFill>
+                  <a:srgbClr val="0F172A"/>
+                </a:solidFill>
+                <a:latin typeface="Calibri"/>
+              </a:rPr>
+              <a:t>5. 渲染</a:t>
+            </a:r>
+          </a:p>
+          <a:p>
+            <a:pPr>
+              <a:spcBef>
+                <a:spcPts val="1000"/>
+              </a:spcBef>
+            </a:pPr>
+            <a:r>
+              <a:rPr sz="1100" b="0">
+                <a:solidFill>
+                  <a:srgbClr val="334155"/>
+                </a:solidFill>
+                <a:latin typeface="Calibri"/>
+              </a:rPr>
+              <a:t>iframe（Web）/ WebView（原生）</a:t>
+            </a:r>
+          </a:p>
+          <a:p>
+            <a:pPr>
+              <a:spcBef>
+                <a:spcPts val="1600"/>
+              </a:spcBef>
+            </a:pPr>
+            <a:r>
+              <a:rPr sz="1200" b="1">
+                <a:solidFill>
+                  <a:srgbClr val="B45309"/>
+                </a:solidFill>
+                <a:latin typeface="Calibri"/>
+              </a:rPr>
+              <a:t>缺口</a:t>
+            </a:r>
+          </a:p>
+        </p:txBody>
+      </p:sp>
+      <p:sp>
+        <p:nvSpPr>
+          <p:cNvPr id="16" name="Rounded Rectangle 15"/>
+          <p:cNvSpPr/>
+          <p:nvPr/>
+        </p:nvSpPr>
+        <p:spPr>
+          <a:xfrm>
+            <a:off x="8732520" y="1417320"/>
+            <a:ext cx="1554480" cy="3840480"/>
+          </a:xfrm>
+          <a:prstGeom prst="roundRect">
+            <a:avLst>
+              <a:gd name="adj" fmla="val 10000"/>
+            </a:avLst>
+          </a:prstGeom>
+          <a:solidFill>
+            <a:srgbClr val="FEF3C7"/>
+          </a:solidFill>
+          <a:ln>
+            <a:solidFill>
+              <a:srgbClr val="B45309"/>
+            </a:solidFill>
+          </a:ln>
+        </p:spPr>
+        <p:style>
+          <a:lnRef idx="1">
+            <a:schemeClr val="accent1"/>
+          </a:lnRef>
+          <a:fillRef idx="3">
+            <a:schemeClr val="accent1"/>
+          </a:fillRef>
+          <a:effectRef idx="2">
+            <a:schemeClr val="accent1"/>
+          </a:effectRef>
+          <a:fontRef idx="minor">
+            <a:schemeClr val="lt1"/>
+          </a:fontRef>
+        </p:style>
+        <p:txBody>
+          <a:bodyPr rtlCol="0" anchor="ctr"/>
+          <a:lstStyle/>
+          <a:p>
+            <a:pPr algn="ctr"/>
+          </a:p>
+        </p:txBody>
+      </p:sp>
+      <p:sp>
+        <p:nvSpPr>
+          <p:cNvPr id="17" name="TextBox 16"/>
+          <p:cNvSpPr txBox="1"/>
+          <p:nvPr/>
+        </p:nvSpPr>
+        <p:spPr>
+          <a:xfrm>
+            <a:off x="8823960" y="1600200"/>
+            <a:ext cx="1371600" cy="3474720"/>
+          </a:xfrm>
+          <a:prstGeom prst="rect">
+            <a:avLst/>
+          </a:prstGeom>
+          <a:noFill/>
+        </p:spPr>
+        <p:txBody>
+          <a:bodyPr wrap="square">
+            <a:spAutoFit/>
+          </a:bodyPr>
+          <a:lstStyle/>
+          <a:p>
+            <a:r>
+              <a:rPr sz="1400" b="1">
+                <a:solidFill>
+                  <a:srgbClr val="0F172A"/>
+                </a:solidFill>
+                <a:latin typeface="Calibri"/>
+              </a:rPr>
+              <a:t>6. 安全</a:t>
+            </a:r>
+          </a:p>
+          <a:p>
+            <a:pPr>
+              <a:spcBef>
+                <a:spcPts val="1000"/>
+              </a:spcBef>
+            </a:pPr>
+            <a:r>
+              <a:rPr sz="1100" b="0">
+                <a:solidFill>
+                  <a:srgbClr val="334155"/>
+                </a:solidFill>
+                <a:latin typeface="Calibri"/>
+              </a:rPr>
+              <a:t>sandbox / CSP / 独立源</a:t>
+            </a:r>
+          </a:p>
+          <a:p>
+            <a:pPr>
+              <a:spcBef>
+                <a:spcPts val="1600"/>
+              </a:spcBef>
+            </a:pPr>
+            <a:r>
+              <a:rPr sz="1200" b="1">
+                <a:solidFill>
+                  <a:srgbClr val="B45309"/>
+                </a:solidFill>
+                <a:latin typeface="Calibri"/>
+              </a:rPr>
+              <a:t>缺口</a:t>
+            </a:r>
+          </a:p>
+        </p:txBody>
+      </p:sp>
+      <p:sp>
+        <p:nvSpPr>
+          <p:cNvPr id="18" name="Rounded Rectangle 17"/>
+          <p:cNvSpPr/>
+          <p:nvPr/>
+        </p:nvSpPr>
+        <p:spPr>
+          <a:xfrm>
+            <a:off x="10396728" y="1417320"/>
+            <a:ext cx="1554480" cy="3840480"/>
+          </a:xfrm>
+          <a:prstGeom prst="roundRect">
+            <a:avLst>
+              <a:gd name="adj" fmla="val 10000"/>
+            </a:avLst>
+          </a:prstGeom>
+          <a:solidFill>
+            <a:srgbClr val="FFFFFF"/>
+          </a:solidFill>
+          <a:ln>
+            <a:solidFill>
+              <a:srgbClr val="E2E8F0"/>
+            </a:solidFill>
+          </a:ln>
+        </p:spPr>
+        <p:style>
+          <a:lnRef idx="1">
+            <a:schemeClr val="accent1"/>
+          </a:lnRef>
+          <a:fillRef idx="3">
+            <a:schemeClr val="accent1"/>
+          </a:fillRef>
+          <a:effectRef idx="2">
+            <a:schemeClr val="accent1"/>
+          </a:effectRef>
+          <a:fontRef idx="minor">
+            <a:schemeClr val="lt1"/>
+          </a:fontRef>
+        </p:style>
+        <p:txBody>
+          <a:bodyPr rtlCol="0" anchor="ctr"/>
+          <a:lstStyle/>
+          <a:p>
+            <a:pPr algn="ctr"/>
+          </a:p>
+        </p:txBody>
+      </p:sp>
+      <p:sp>
+        <p:nvSpPr>
+          <p:cNvPr id="19" name="TextBox 18"/>
+          <p:cNvSpPr txBox="1"/>
+          <p:nvPr/>
+        </p:nvSpPr>
+        <p:spPr>
+          <a:xfrm>
+            <a:off x="10488168" y="1600200"/>
+            <a:ext cx="1371600" cy="3474720"/>
+          </a:xfrm>
+          <a:prstGeom prst="rect">
+            <a:avLst/>
+          </a:prstGeom>
+          <a:noFill/>
+        </p:spPr>
+        <p:txBody>
+          <a:bodyPr wrap="square">
+            <a:spAutoFit/>
+          </a:bodyPr>
+          <a:lstStyle/>
+          <a:p>
+            <a:r>
+              <a:rPr sz="1400" b="1">
+                <a:solidFill>
+                  <a:srgbClr val="0F172A"/>
+                </a:solidFill>
+                <a:latin typeface="Calibri"/>
+              </a:rPr>
+              <a:t>7. 分享</a:t>
+            </a:r>
+          </a:p>
+          <a:p>
+            <a:pPr>
+              <a:spcBef>
+                <a:spcPts val="1000"/>
+              </a:spcBef>
+            </a:pPr>
+            <a:r>
+              <a:rPr sz="1100" b="0">
+                <a:solidFill>
+                  <a:srgbClr val="334155"/>
+                </a:solidFill>
+                <a:latin typeface="Calibri"/>
+              </a:rPr>
+              <a:t>稳定 URL / TTL / 历史回放</a:t>
+            </a:r>
+          </a:p>
+          <a:p>
+            <a:pPr>
+              <a:spcBef>
+                <a:spcPts val="1600"/>
+              </a:spcBef>
+            </a:pPr>
+            <a:r>
+              <a:rPr sz="1200" b="1">
+                <a:solidFill>
+                  <a:srgbClr val="64748B"/>
+                </a:solidFill>
+                <a:latin typeface="Calibri"/>
+              </a:rPr>
+              <a:t>可选增强</a:t>
+            </a:r>
+          </a:p>
+        </p:txBody>
+      </p:sp>
+      <p:sp>
+        <p:nvSpPr>
+          <p:cNvPr id="20" name="TextBox 19"/>
+          <p:cNvSpPr txBox="1"/>
+          <p:nvPr/>
+        </p:nvSpPr>
+        <p:spPr>
+          <a:xfrm>
+            <a:off x="502920" y="5486400"/>
+            <a:ext cx="11155680" cy="1005840"/>
+          </a:xfrm>
+          <a:prstGeom prst="rect">
+            <a:avLst/>
+          </a:prstGeom>
+          <a:noFill/>
+        </p:spPr>
+        <p:txBody>
+          <a:bodyPr wrap="square">
+            <a:spAutoFit/>
+          </a:bodyPr>
+          <a:lstStyle/>
+          <a:p>
+            <a:r>
+              <a:rPr sz="1300" b="0">
+                <a:solidFill>
+                  <a:srgbClr val="334155"/>
+                </a:solidFill>
+                <a:latin typeface="Calibri"/>
+              </a:rPr>
+              <a:t>结论：我们不是从 0 做「生成 HTML」——生成/落盘/同步已通；产品断点在「识别 + 端侧安全渲染」。分享与流式是体验增强，不是第一期阻塞项。</a:t>
             </a:r>
           </a:p>
         </p:txBody>
@@ -3879,13 +5431,13 @@
         <p:spPr>
           <a:xfrm>
             <a:off x="0" y="0"/>
-            <a:ext cx="12191695" cy="1005840"/>
+            <a:ext cx="12191695" cy="6858000"/>
           </a:xfrm>
           <a:prstGeom prst="rect">
             <a:avLst/>
           </a:prstGeom>
           <a:solidFill>
-            <a:srgbClr val="0070C0"/>
+            <a:srgbClr val="F8FAFC"/>
           </a:solidFill>
           <a:ln>
             <a:noFill/>
@@ -3906,32 +5458,109 @@
           </a:fontRef>
         </p:style>
         <p:txBody>
-          <a:bodyPr rtlCol="0" anchor="ctr" lIns="548640"/>
-          <a:lstStyle/>
-          <a:p>
-            <a:pPr algn="l">
-              <a:defRPr sz="2600" b="1">
-                <a:solidFill>
-                  <a:srgbClr val="FFFFFF"/>
-                </a:solidFill>
-              </a:defRPr>
-            </a:pPr>
-            <a:r>
-              <a:t>竞品给我们的核心启示</a:t>
-            </a:r>
-          </a:p>
-        </p:txBody>
-      </p:sp>
-      <p:sp>
-        <p:nvSpPr>
-          <p:cNvPr id="3" name="TextBox 2"/>
+          <a:bodyPr rtlCol="0" anchor="ctr"/>
+          <a:lstStyle/>
+          <a:p>
+            <a:pPr algn="ctr"/>
+          </a:p>
+        </p:txBody>
+      </p:sp>
+      <p:sp>
+        <p:nvSpPr>
+          <p:cNvPr id="3" name="Rectangle 2"/>
+          <p:cNvSpPr/>
+          <p:nvPr/>
+        </p:nvSpPr>
+        <p:spPr>
+          <a:xfrm>
+            <a:off x="0" y="0"/>
+            <a:ext cx="12191695" cy="960120"/>
+          </a:xfrm>
+          <a:prstGeom prst="rect">
+            <a:avLst/>
+          </a:prstGeom>
+          <a:solidFill>
+            <a:srgbClr val="0F172A"/>
+          </a:solidFill>
+          <a:ln>
+            <a:noFill/>
+          </a:ln>
+        </p:spPr>
+        <p:style>
+          <a:lnRef idx="1">
+            <a:schemeClr val="accent1"/>
+          </a:lnRef>
+          <a:fillRef idx="3">
+            <a:schemeClr val="accent1"/>
+          </a:fillRef>
+          <a:effectRef idx="2">
+            <a:schemeClr val="accent1"/>
+          </a:effectRef>
+          <a:fontRef idx="minor">
+            <a:schemeClr val="lt1"/>
+          </a:fontRef>
+        </p:style>
+        <p:txBody>
+          <a:bodyPr rtlCol="0" anchor="ctr"/>
+          <a:lstStyle/>
+          <a:p>
+            <a:pPr algn="ctr"/>
+          </a:p>
+        </p:txBody>
+      </p:sp>
+      <p:sp>
+        <p:nvSpPr>
+          <p:cNvPr id="4" name="Rectangle 3"/>
+          <p:cNvSpPr/>
+          <p:nvPr/>
+        </p:nvSpPr>
+        <p:spPr>
+          <a:xfrm>
+            <a:off x="0" y="960120"/>
+            <a:ext cx="12191695" cy="54864"/>
+          </a:xfrm>
+          <a:prstGeom prst="rect">
+            <a:avLst/>
+          </a:prstGeom>
+          <a:solidFill>
+            <a:srgbClr val="0D9488"/>
+          </a:solidFill>
+          <a:ln>
+            <a:noFill/>
+          </a:ln>
+        </p:spPr>
+        <p:style>
+          <a:lnRef idx="1">
+            <a:schemeClr val="accent1"/>
+          </a:lnRef>
+          <a:fillRef idx="3">
+            <a:schemeClr val="accent1"/>
+          </a:fillRef>
+          <a:effectRef idx="2">
+            <a:schemeClr val="accent1"/>
+          </a:effectRef>
+          <a:fontRef idx="minor">
+            <a:schemeClr val="lt1"/>
+          </a:fontRef>
+        </p:style>
+        <p:txBody>
+          <a:bodyPr rtlCol="0" anchor="ctr"/>
+          <a:lstStyle/>
+          <a:p>
+            <a:pPr algn="ctr"/>
+          </a:p>
+        </p:txBody>
+      </p:sp>
+      <p:sp>
+        <p:nvSpPr>
+          <p:cNvPr id="5" name="TextBox 4"/>
           <p:cNvSpPr txBox="1"/>
           <p:nvPr/>
         </p:nvSpPr>
         <p:spPr>
           <a:xfrm>
-            <a:off x="640080" y="1280160"/>
-            <a:ext cx="10881360" cy="5303520"/>
+            <a:off x="502920" y="201168"/>
+            <a:ext cx="11155680" cy="640080"/>
           </a:xfrm>
           <a:prstGeom prst="rect">
             <a:avLst/>
@@ -3944,63 +5573,605 @@
           </a:bodyPr>
           <a:lstStyle/>
           <a:p>
-            <a:pPr>
-              <a:spcAft>
-                <a:spcPts val="1000"/>
-              </a:spcAft>
-              <a:defRPr sz="1800">
-                <a:solidFill>
-                  <a:srgbClr val="282828"/>
-                </a:solidFill>
-              </a:defRPr>
-            </a:pPr>
-            <a:r>
-              <a:t>生成靠 LLM，平台负责：落盘、同步、渲染、安全。</a:t>
-            </a:r>
-          </a:p>
-          <a:p>
-            <a:pPr>
-              <a:spcAft>
-                <a:spcPts val="1000"/>
-              </a:spcAft>
-              <a:defRPr sz="1800">
-                <a:solidFill>
-                  <a:srgbClr val="282828"/>
-                </a:solidFill>
-              </a:defRPr>
-            </a:pPr>
-            <a:r>
-              <a:t>预览必须是沙箱化：独立源、iframe sandbox、CSP。</a:t>
-            </a:r>
-          </a:p>
-          <a:p>
-            <a:pPr>
-              <a:spcAft>
-                <a:spcPts val="1000"/>
-              </a:spcAft>
-              <a:defRPr sz="1800">
-                <a:solidFill>
-                  <a:srgbClr val="282828"/>
-                </a:solidFill>
-              </a:defRPr>
-            </a:pPr>
-            <a:r>
-              <a:t>单文件小工具 → 直接预览；多文件工程 → 托管/静态发布。</a:t>
-            </a:r>
-          </a:p>
-          <a:p>
-            <a:pPr>
-              <a:spcAft>
-                <a:spcPts val="1000"/>
-              </a:spcAft>
-              <a:defRPr sz="1800">
-                <a:solidFill>
-                  <a:srgbClr val="282828"/>
-                </a:solidFill>
-              </a:defRPr>
-            </a:pPr>
-            <a:r>
-              <a:t>外网/数据访问默认收紧：CDN 白名单或平台代理。</a:t>
+            <a:r>
+              <a:rPr sz="2400" b="1">
+                <a:solidFill>
+                  <a:srgbClr val="FFFFFF"/>
+                </a:solidFill>
+                <a:latin typeface="Calibri"/>
+              </a:rPr>
+              <a:t>03  竞品范式：行业怎么解决同一问题</a:t>
+            </a:r>
+          </a:p>
+          <a:p>
+            <a:r>
+              <a:rPr sz="1200" b="0">
+                <a:solidFill>
+                  <a:srgbClr val="94A3B8"/>
+                </a:solidFill>
+                <a:latin typeface="Calibri"/>
+              </a:rPr>
+              <a:t>四种产品形态，对应四种「呈现」策略——抄对范式比抄功能名更重要</a:t>
+            </a:r>
+          </a:p>
+        </p:txBody>
+      </p:sp>
+      <p:sp>
+        <p:nvSpPr>
+          <p:cNvPr id="6" name="Rounded Rectangle 5"/>
+          <p:cNvSpPr/>
+          <p:nvPr/>
+        </p:nvSpPr>
+        <p:spPr>
+          <a:xfrm>
+            <a:off x="411480" y="1234440"/>
+            <a:ext cx="5577840" cy="2468880"/>
+          </a:xfrm>
+          <a:prstGeom prst="roundRect">
+            <a:avLst>
+              <a:gd name="adj" fmla="val 8000"/>
+            </a:avLst>
+          </a:prstGeom>
+          <a:solidFill>
+            <a:srgbClr val="FFFFFF"/>
+          </a:solidFill>
+          <a:ln>
+            <a:solidFill>
+              <a:srgbClr val="E2E8F0"/>
+            </a:solidFill>
+          </a:ln>
+        </p:spPr>
+        <p:style>
+          <a:lnRef idx="1">
+            <a:schemeClr val="accent1"/>
+          </a:lnRef>
+          <a:fillRef idx="3">
+            <a:schemeClr val="accent1"/>
+          </a:fillRef>
+          <a:effectRef idx="2">
+            <a:schemeClr val="accent1"/>
+          </a:effectRef>
+          <a:fontRef idx="minor">
+            <a:schemeClr val="lt1"/>
+          </a:fontRef>
+        </p:style>
+        <p:txBody>
+          <a:bodyPr rtlCol="0" anchor="ctr"/>
+          <a:lstStyle/>
+          <a:p>
+            <a:pPr algn="ctr"/>
+          </a:p>
+        </p:txBody>
+      </p:sp>
+      <p:sp>
+        <p:nvSpPr>
+          <p:cNvPr id="7" name="TextBox 6"/>
+          <p:cNvSpPr txBox="1"/>
+          <p:nvPr/>
+        </p:nvSpPr>
+        <p:spPr>
+          <a:xfrm>
+            <a:off x="576072" y="1344168"/>
+            <a:ext cx="5303520" cy="2286000"/>
+          </a:xfrm>
+          <a:prstGeom prst="rect">
+            <a:avLst/>
+          </a:prstGeom>
+          <a:noFill/>
+        </p:spPr>
+        <p:txBody>
+          <a:bodyPr wrap="square">
+            <a:spAutoFit/>
+          </a:bodyPr>
+          <a:lstStyle/>
+          <a:p>
+            <a:r>
+              <a:rPr sz="1400" b="1">
+                <a:solidFill>
+                  <a:srgbClr val="0D9488"/>
+                </a:solidFill>
+                <a:latin typeface="Calibri"/>
+              </a:rPr>
+              <a:t>A. Artifact / Widget（Claude · OpenClaw）</a:t>
+            </a:r>
+          </a:p>
+          <a:p>
+            <a:pPr>
+              <a:spcBef>
+                <a:spcPts val="400"/>
+              </a:spcBef>
+            </a:pPr>
+            <a:r>
+              <a:rPr sz="1200" b="0">
+                <a:solidFill>
+                  <a:srgbClr val="334155"/>
+                </a:solidFill>
+                <a:latin typeface="Calibri"/>
+              </a:rPr>
+              <a:t>单文件自包含页面 → 会话侧栏 sandbox 预览</a:t>
+            </a:r>
+          </a:p>
+          <a:p>
+            <a:pPr>
+              <a:spcBef>
+                <a:spcPts val="400"/>
+              </a:spcBef>
+            </a:pPr>
+            <a:r>
+              <a:rPr sz="1200" b="0">
+                <a:solidFill>
+                  <a:srgbClr val="334155"/>
+                </a:solidFill>
+                <a:latin typeface="Calibri"/>
+              </a:rPr>
+              <a:t>独立源 + 严 CSP；可 Publish / pin</a:t>
+            </a:r>
+          </a:p>
+          <a:p>
+            <a:pPr>
+              <a:spcBef>
+                <a:spcPts val="400"/>
+              </a:spcBef>
+            </a:pPr>
+            <a:r>
+              <a:rPr sz="1200" b="0">
+                <a:solidFill>
+                  <a:srgbClr val="334155"/>
+                </a:solidFill>
+                <a:latin typeface="Calibri"/>
+              </a:rPr>
+              <a:t>适合：计算器、图表、小工具、演示页</a:t>
+            </a:r>
+          </a:p>
+          <a:p>
+            <a:pPr>
+              <a:spcBef>
+                <a:spcPts val="400"/>
+              </a:spcBef>
+            </a:pPr>
+            <a:r>
+              <a:rPr sz="1200" b="0">
+                <a:solidFill>
+                  <a:srgbClr val="334155"/>
+                </a:solidFill>
+                <a:latin typeface="Calibri"/>
+              </a:rPr>
+              <a:t>可抄：show_widget 语义 + 沙箱 iframe</a:t>
+            </a:r>
+          </a:p>
+        </p:txBody>
+      </p:sp>
+      <p:sp>
+        <p:nvSpPr>
+          <p:cNvPr id="8" name="Rounded Rectangle 7"/>
+          <p:cNvSpPr/>
+          <p:nvPr/>
+        </p:nvSpPr>
+        <p:spPr>
+          <a:xfrm>
+            <a:off x="6172200" y="1234440"/>
+            <a:ext cx="5577840" cy="2468880"/>
+          </a:xfrm>
+          <a:prstGeom prst="roundRect">
+            <a:avLst>
+              <a:gd name="adj" fmla="val 8000"/>
+            </a:avLst>
+          </a:prstGeom>
+          <a:solidFill>
+            <a:srgbClr val="FFFFFF"/>
+          </a:solidFill>
+          <a:ln>
+            <a:solidFill>
+              <a:srgbClr val="E2E8F0"/>
+            </a:solidFill>
+          </a:ln>
+        </p:spPr>
+        <p:style>
+          <a:lnRef idx="1">
+            <a:schemeClr val="accent1"/>
+          </a:lnRef>
+          <a:fillRef idx="3">
+            <a:schemeClr val="accent1"/>
+          </a:fillRef>
+          <a:effectRef idx="2">
+            <a:schemeClr val="accent1"/>
+          </a:effectRef>
+          <a:fontRef idx="minor">
+            <a:schemeClr val="lt1"/>
+          </a:fontRef>
+        </p:style>
+        <p:txBody>
+          <a:bodyPr rtlCol="0" anchor="ctr"/>
+          <a:lstStyle/>
+          <a:p>
+            <a:pPr algn="ctr"/>
+          </a:p>
+        </p:txBody>
+      </p:sp>
+      <p:sp>
+        <p:nvSpPr>
+          <p:cNvPr id="9" name="TextBox 8"/>
+          <p:cNvSpPr txBox="1"/>
+          <p:nvPr/>
+        </p:nvSpPr>
+        <p:spPr>
+          <a:xfrm>
+            <a:off x="6336792" y="1344168"/>
+            <a:ext cx="5303520" cy="2286000"/>
+          </a:xfrm>
+          <a:prstGeom prst="rect">
+            <a:avLst/>
+          </a:prstGeom>
+          <a:noFill/>
+        </p:spPr>
+        <p:txBody>
+          <a:bodyPr wrap="square">
+            <a:spAutoFit/>
+          </a:bodyPr>
+          <a:lstStyle/>
+          <a:p>
+            <a:r>
+              <a:rPr sz="1400" b="1">
+                <a:solidFill>
+                  <a:srgbClr val="0D9488"/>
+                </a:solidFill>
+                <a:latin typeface="Calibri"/>
+              </a:rPr>
+              <a:t>B. IDE Agent（Cursor · Claude Code）</a:t>
+            </a:r>
+          </a:p>
+          <a:p>
+            <a:pPr>
+              <a:spcBef>
+                <a:spcPts val="400"/>
+              </a:spcBef>
+            </a:pPr>
+            <a:r>
+              <a:rPr sz="1200" b="0">
+                <a:solidFill>
+                  <a:srgbClr val="334155"/>
+                </a:solidFill>
+                <a:latin typeface="Calibri"/>
+              </a:rPr>
+              <a:t>HTML 即普通文件；FS + 终端 + 浏览器</a:t>
+            </a:r>
+          </a:p>
+          <a:p>
+            <a:pPr>
+              <a:spcBef>
+                <a:spcPts val="400"/>
+              </a:spcBef>
+            </a:pPr>
+            <a:r>
+              <a:rPr sz="1200" b="0">
+                <a:solidFill>
+                  <a:srgbClr val="334155"/>
+                </a:solidFill>
+                <a:latin typeface="Calibri"/>
+              </a:rPr>
+              <a:t>交付物是仓库/PR，不是聊天小部件</a:t>
+            </a:r>
+          </a:p>
+          <a:p>
+            <a:pPr>
+              <a:spcBef>
+                <a:spcPts val="400"/>
+              </a:spcBef>
+            </a:pPr>
+            <a:r>
+              <a:rPr sz="1200" b="0">
+                <a:solidFill>
+                  <a:srgbClr val="334155"/>
+                </a:solidFill>
+                <a:latin typeface="Calibri"/>
+              </a:rPr>
+              <a:t>适合：进真实代码库改前端</a:t>
+            </a:r>
+          </a:p>
+          <a:p>
+            <a:pPr>
+              <a:spcBef>
+                <a:spcPts val="400"/>
+              </a:spcBef>
+            </a:pPr>
+            <a:r>
+              <a:rPr sz="1200" b="0">
+                <a:solidFill>
+                  <a:srgbClr val="334155"/>
+                </a:solidFill>
+                <a:latin typeface="Calibri"/>
+              </a:rPr>
+              <a:t>可抄：复用 write，不强造 generate_html</a:t>
+            </a:r>
+          </a:p>
+        </p:txBody>
+      </p:sp>
+      <p:sp>
+        <p:nvSpPr>
+          <p:cNvPr id="10" name="Rounded Rectangle 9"/>
+          <p:cNvSpPr/>
+          <p:nvPr/>
+        </p:nvSpPr>
+        <p:spPr>
+          <a:xfrm>
+            <a:off x="411480" y="3886200"/>
+            <a:ext cx="5577840" cy="2468880"/>
+          </a:xfrm>
+          <a:prstGeom prst="roundRect">
+            <a:avLst>
+              <a:gd name="adj" fmla="val 8000"/>
+            </a:avLst>
+          </a:prstGeom>
+          <a:solidFill>
+            <a:srgbClr val="FFFFFF"/>
+          </a:solidFill>
+          <a:ln>
+            <a:solidFill>
+              <a:srgbClr val="E2E8F0"/>
+            </a:solidFill>
+          </a:ln>
+        </p:spPr>
+        <p:style>
+          <a:lnRef idx="1">
+            <a:schemeClr val="accent1"/>
+          </a:lnRef>
+          <a:fillRef idx="3">
+            <a:schemeClr val="accent1"/>
+          </a:fillRef>
+          <a:effectRef idx="2">
+            <a:schemeClr val="accent1"/>
+          </a:effectRef>
+          <a:fontRef idx="minor">
+            <a:schemeClr val="lt1"/>
+          </a:fontRef>
+        </p:style>
+        <p:txBody>
+          <a:bodyPr rtlCol="0" anchor="ctr"/>
+          <a:lstStyle/>
+          <a:p>
+            <a:pPr algn="ctr"/>
+          </a:p>
+        </p:txBody>
+      </p:sp>
+      <p:sp>
+        <p:nvSpPr>
+          <p:cNvPr id="11" name="TextBox 10"/>
+          <p:cNvSpPr txBox="1"/>
+          <p:nvPr/>
+        </p:nvSpPr>
+        <p:spPr>
+          <a:xfrm>
+            <a:off x="576072" y="3995928"/>
+            <a:ext cx="5303520" cy="2286000"/>
+          </a:xfrm>
+          <a:prstGeom prst="rect">
+            <a:avLst/>
+          </a:prstGeom>
+          <a:noFill/>
+        </p:spPr>
+        <p:txBody>
+          <a:bodyPr wrap="square">
+            <a:spAutoFit/>
+          </a:bodyPr>
+          <a:lstStyle/>
+          <a:p>
+            <a:r>
+              <a:rPr sz="1400" b="1">
+                <a:solidFill>
+                  <a:srgbClr val="0D9488"/>
+                </a:solidFill>
+                <a:latin typeface="Calibri"/>
+              </a:rPr>
+              <a:t>C. App Builder（Manus · Lovable · Bolt · v0）</a:t>
+            </a:r>
+          </a:p>
+          <a:p>
+            <a:pPr>
+              <a:spcBef>
+                <a:spcPts val="400"/>
+              </a:spcBef>
+            </a:pPr>
+            <a:r>
+              <a:rPr sz="1200" b="0">
+                <a:solidFill>
+                  <a:srgbClr val="334155"/>
+                </a:solidFill>
+                <a:latin typeface="Calibri"/>
+              </a:rPr>
+              <a:t>生成工程 + 托管预览 / WebContainer</a:t>
+            </a:r>
+          </a:p>
+          <a:p>
+            <a:pPr>
+              <a:spcBef>
+                <a:spcPts val="400"/>
+              </a:spcBef>
+            </a:pPr>
+            <a:r>
+              <a:rPr sz="1200" b="0">
+                <a:solidFill>
+                  <a:srgbClr val="334155"/>
+                </a:solidFill>
+                <a:latin typeface="Calibri"/>
+              </a:rPr>
+              <a:t>发布是一等能力（URL、visibility、版本）</a:t>
+            </a:r>
+          </a:p>
+          <a:p>
+            <a:pPr>
+              <a:spcBef>
+                <a:spcPts val="400"/>
+              </a:spcBef>
+            </a:pPr>
+            <a:r>
+              <a:rPr sz="1200" b="0">
+                <a:solidFill>
+                  <a:srgbClr val="334155"/>
+                </a:solidFill>
+                <a:latin typeface="Calibri"/>
+              </a:rPr>
+              <a:t>适合：Prompt → 可分享站点</a:t>
+            </a:r>
+          </a:p>
+          <a:p>
+            <a:pPr>
+              <a:spcBef>
+                <a:spcPts val="400"/>
+              </a:spcBef>
+            </a:pPr>
+            <a:r>
+              <a:rPr sz="1200" b="0">
+                <a:solidFill>
+                  <a:srgbClr val="334155"/>
+                </a:solidFill>
+                <a:latin typeface="Calibri"/>
+              </a:rPr>
+              <a:t>可抄：后期的 publish / TTL 预览域</a:t>
+            </a:r>
+          </a:p>
+        </p:txBody>
+      </p:sp>
+      <p:sp>
+        <p:nvSpPr>
+          <p:cNvPr id="12" name="Rounded Rectangle 11"/>
+          <p:cNvSpPr/>
+          <p:nvPr/>
+        </p:nvSpPr>
+        <p:spPr>
+          <a:xfrm>
+            <a:off x="6172200" y="3886200"/>
+            <a:ext cx="5577840" cy="2468880"/>
+          </a:xfrm>
+          <a:prstGeom prst="roundRect">
+            <a:avLst>
+              <a:gd name="adj" fmla="val 8000"/>
+            </a:avLst>
+          </a:prstGeom>
+          <a:solidFill>
+            <a:srgbClr val="FFFFFF"/>
+          </a:solidFill>
+          <a:ln>
+            <a:solidFill>
+              <a:srgbClr val="E2E8F0"/>
+            </a:solidFill>
+          </a:ln>
+        </p:spPr>
+        <p:style>
+          <a:lnRef idx="1">
+            <a:schemeClr val="accent1"/>
+          </a:lnRef>
+          <a:fillRef idx="3">
+            <a:schemeClr val="accent1"/>
+          </a:fillRef>
+          <a:effectRef idx="2">
+            <a:schemeClr val="accent1"/>
+          </a:effectRef>
+          <a:fontRef idx="minor">
+            <a:schemeClr val="lt1"/>
+          </a:fontRef>
+        </p:style>
+        <p:txBody>
+          <a:bodyPr rtlCol="0" anchor="ctr"/>
+          <a:lstStyle/>
+          <a:p>
+            <a:pPr algn="ctr"/>
+          </a:p>
+        </p:txBody>
+      </p:sp>
+      <p:sp>
+        <p:nvSpPr>
+          <p:cNvPr id="13" name="TextBox 12"/>
+          <p:cNvSpPr txBox="1"/>
+          <p:nvPr/>
+        </p:nvSpPr>
+        <p:spPr>
+          <a:xfrm>
+            <a:off x="6336792" y="3995928"/>
+            <a:ext cx="5303520" cy="2286000"/>
+          </a:xfrm>
+          <a:prstGeom prst="rect">
+            <a:avLst/>
+          </a:prstGeom>
+          <a:noFill/>
+        </p:spPr>
+        <p:txBody>
+          <a:bodyPr wrap="square">
+            <a:spAutoFit/>
+          </a:bodyPr>
+          <a:lstStyle/>
+          <a:p>
+            <a:r>
+              <a:rPr sz="1400" b="1">
+                <a:solidFill>
+                  <a:srgbClr val="0D9488"/>
+                </a:solidFill>
+                <a:latin typeface="Calibri"/>
+              </a:rPr>
+              <a:t>D. Doc Canvas（ChatGPT Canvas）</a:t>
+            </a:r>
+          </a:p>
+          <a:p>
+            <a:pPr>
+              <a:spcBef>
+                <a:spcPts val="400"/>
+              </a:spcBef>
+            </a:pPr>
+            <a:r>
+              <a:rPr sz="1200" b="0">
+                <a:solidFill>
+                  <a:srgbClr val="334155"/>
+                </a:solidFill>
+                <a:latin typeface="Calibri"/>
+              </a:rPr>
+              <a:t>侧栏协作改文档/代码</a:t>
+            </a:r>
+          </a:p>
+          <a:p>
+            <a:pPr>
+              <a:spcBef>
+                <a:spcPts val="400"/>
+              </a:spcBef>
+            </a:pPr>
+            <a:r>
+              <a:rPr sz="1200" b="0">
+                <a:solidFill>
+                  <a:srgbClr val="334155"/>
+                </a:solidFill>
+                <a:latin typeface="Calibri"/>
+              </a:rPr>
+              <a:t>不是 HTML runtime，不对齐本需求</a:t>
+            </a:r>
+          </a:p>
+          <a:p>
+            <a:pPr>
+              <a:spcBef>
+                <a:spcPts val="400"/>
+              </a:spcBef>
+            </a:pPr>
+            <a:r>
+              <a:rPr sz="1200" b="0">
+                <a:solidFill>
+                  <a:srgbClr val="334155"/>
+                </a:solidFill>
+                <a:latin typeface="Calibri"/>
+              </a:rPr>
+              <a:t>启示：别把「编辑面」当成「渲染面」</a:t>
+            </a:r>
+          </a:p>
+          <a:p>
+            <a:pPr>
+              <a:spcBef>
+                <a:spcPts val="400"/>
+              </a:spcBef>
+            </a:pPr>
+            <a:r>
+              <a:rPr sz="1200" b="0">
+                <a:solidFill>
+                  <a:srgbClr val="334155"/>
+                </a:solidFill>
+                <a:latin typeface="Calibri"/>
+              </a:rPr>
+              <a:t>我们应对标 A，必要时向 C 演进</a:t>
             </a:r>
           </a:p>
         </p:txBody>
@@ -4032,13 +6203,13 @@
         <p:spPr>
           <a:xfrm>
             <a:off x="0" y="0"/>
-            <a:ext cx="12191695" cy="1005840"/>
+            <a:ext cx="12191695" cy="6858000"/>
           </a:xfrm>
           <a:prstGeom prst="rect">
             <a:avLst/>
           </a:prstGeom>
           <a:solidFill>
-            <a:srgbClr val="0070C0"/>
+            <a:srgbClr val="F8FAFC"/>
           </a:solidFill>
           <a:ln>
             <a:noFill/>
@@ -4059,32 +6230,109 @@
           </a:fontRef>
         </p:style>
         <p:txBody>
-          <a:bodyPr rtlCol="0" anchor="ctr" lIns="548640"/>
-          <a:lstStyle/>
-          <a:p>
-            <a:pPr algn="l">
-              <a:defRPr sz="2600" b="1">
-                <a:solidFill>
-                  <a:srgbClr val="FFFFFF"/>
-                </a:solidFill>
-              </a:defRPr>
-            </a:pPr>
-            <a:r>
-              <a:t>我们现状：链路已具备</a:t>
-            </a:r>
-          </a:p>
-        </p:txBody>
-      </p:sp>
-      <p:sp>
-        <p:nvSpPr>
-          <p:cNvPr id="3" name="TextBox 2"/>
+          <a:bodyPr rtlCol="0" anchor="ctr"/>
+          <a:lstStyle/>
+          <a:p>
+            <a:pPr algn="ctr"/>
+          </a:p>
+        </p:txBody>
+      </p:sp>
+      <p:sp>
+        <p:nvSpPr>
+          <p:cNvPr id="3" name="Rectangle 2"/>
+          <p:cNvSpPr/>
+          <p:nvPr/>
+        </p:nvSpPr>
+        <p:spPr>
+          <a:xfrm>
+            <a:off x="0" y="0"/>
+            <a:ext cx="12191695" cy="960120"/>
+          </a:xfrm>
+          <a:prstGeom prst="rect">
+            <a:avLst/>
+          </a:prstGeom>
+          <a:solidFill>
+            <a:srgbClr val="0F172A"/>
+          </a:solidFill>
+          <a:ln>
+            <a:noFill/>
+          </a:ln>
+        </p:spPr>
+        <p:style>
+          <a:lnRef idx="1">
+            <a:schemeClr val="accent1"/>
+          </a:lnRef>
+          <a:fillRef idx="3">
+            <a:schemeClr val="accent1"/>
+          </a:fillRef>
+          <a:effectRef idx="2">
+            <a:schemeClr val="accent1"/>
+          </a:effectRef>
+          <a:fontRef idx="minor">
+            <a:schemeClr val="lt1"/>
+          </a:fontRef>
+        </p:style>
+        <p:txBody>
+          <a:bodyPr rtlCol="0" anchor="ctr"/>
+          <a:lstStyle/>
+          <a:p>
+            <a:pPr algn="ctr"/>
+          </a:p>
+        </p:txBody>
+      </p:sp>
+      <p:sp>
+        <p:nvSpPr>
+          <p:cNvPr id="4" name="Rectangle 3"/>
+          <p:cNvSpPr/>
+          <p:nvPr/>
+        </p:nvSpPr>
+        <p:spPr>
+          <a:xfrm>
+            <a:off x="0" y="960120"/>
+            <a:ext cx="12191695" cy="54864"/>
+          </a:xfrm>
+          <a:prstGeom prst="rect">
+            <a:avLst/>
+          </a:prstGeom>
+          <a:solidFill>
+            <a:srgbClr val="0D9488"/>
+          </a:solidFill>
+          <a:ln>
+            <a:noFill/>
+          </a:ln>
+        </p:spPr>
+        <p:style>
+          <a:lnRef idx="1">
+            <a:schemeClr val="accent1"/>
+          </a:lnRef>
+          <a:fillRef idx="3">
+            <a:schemeClr val="accent1"/>
+          </a:fillRef>
+          <a:effectRef idx="2">
+            <a:schemeClr val="accent1"/>
+          </a:effectRef>
+          <a:fontRef idx="minor">
+            <a:schemeClr val="lt1"/>
+          </a:fontRef>
+        </p:style>
+        <p:txBody>
+          <a:bodyPr rtlCol="0" anchor="ctr"/>
+          <a:lstStyle/>
+          <a:p>
+            <a:pPr algn="ctr"/>
+          </a:p>
+        </p:txBody>
+      </p:sp>
+      <p:sp>
+        <p:nvSpPr>
+          <p:cNvPr id="5" name="TextBox 4"/>
           <p:cNvSpPr txBox="1"/>
           <p:nvPr/>
         </p:nvSpPr>
         <p:spPr>
           <a:xfrm>
-            <a:off x="640080" y="1280160"/>
-            <a:ext cx="10881360" cy="5303520"/>
+            <a:off x="502920" y="201168"/>
+            <a:ext cx="11155680" cy="640080"/>
           </a:xfrm>
           <a:prstGeom prst="rect">
             <a:avLst/>
@@ -4097,78 +6345,493 @@
           </a:bodyPr>
           <a:lstStyle/>
           <a:p>
-            <a:pPr>
-              <a:spcAft>
-                <a:spcPts val="1000"/>
-              </a:spcAft>
-              <a:defRPr sz="1800">
-                <a:solidFill>
-                  <a:srgbClr val="282828"/>
-                </a:solidFill>
-              </a:defRPr>
-            </a:pPr>
-            <a:r>
-              <a:t>Agent 内置 write 工具 → workspace 文件。</a:t>
-            </a:r>
-          </a:p>
-          <a:p>
-            <a:pPr>
-              <a:spcAft>
-                <a:spcPts val="1000"/>
-              </a:spcAft>
-              <a:defRPr sz="1800">
-                <a:solidFill>
-                  <a:srgbClr val="282828"/>
-                </a:solidFill>
-              </a:defRPr>
-            </a:pPr>
-            <a:r>
-              <a:t>workspace 同步到华为云空间（KooDrive）。</a:t>
-            </a:r>
-          </a:p>
-          <a:p>
-            <a:pPr>
-              <a:spcAft>
-                <a:spcPts val="1000"/>
-              </a:spcAft>
-              <a:defRPr sz="1800">
-                <a:solidFill>
-                  <a:srgbClr val="282828"/>
-                </a:solidFill>
-              </a:defRPr>
-            </a:pPr>
-            <a:r>
-              <a:t>端侧通过云空间 REST API 下载文件。</a:t>
-            </a:r>
-          </a:p>
-          <a:p>
-            <a:pPr>
-              <a:spcAft>
-                <a:spcPts val="1000"/>
-              </a:spcAft>
-              <a:defRPr sz="1800">
-                <a:solidFill>
-                  <a:srgbClr val="282828"/>
-                </a:solidFill>
-              </a:defRPr>
-            </a:pPr>
-            <a:r>
-              <a:t>目前缺少：端侧 HTML 渲染容器 + 类型识别。</a:t>
-            </a:r>
-          </a:p>
-          <a:p>
-            <a:pPr>
-              <a:spcBef>
-                <a:spcPts val="1200"/>
-              </a:spcBef>
-              <a:defRPr sz="1400">
-                <a:solidFill>
-                  <a:srgbClr val="646464"/>
-                </a:solidFill>
-              </a:defRPr>
-            </a:pPr>
-            <a:r>
-              <a:t>不需要再造存储/上传，重点在「下载后如何安全地画出来」。</a:t>
+            <a:r>
+              <a:rPr sz="2400" b="1">
+                <a:solidFill>
+                  <a:srgbClr val="FFFFFF"/>
+                </a:solidFill>
+                <a:latin typeface="Calibri"/>
+              </a:rPr>
+              <a:t>04  我们的现状与目标架构</a:t>
+            </a:r>
+          </a:p>
+          <a:p>
+            <a:r>
+              <a:rPr sz="1200" b="0">
+                <a:solidFill>
+                  <a:srgbClr val="94A3B8"/>
+                </a:solidFill>
+                <a:latin typeface="Calibri"/>
+              </a:rPr>
+              <a:t>复用 write + 云空间；补齐「可预览」闭环，而不是新建一套存储</a:t>
+            </a:r>
+          </a:p>
+        </p:txBody>
+      </p:sp>
+      <p:sp>
+        <p:nvSpPr>
+          <p:cNvPr id="6" name="Rounded Rectangle 5"/>
+          <p:cNvSpPr/>
+          <p:nvPr/>
+        </p:nvSpPr>
+        <p:spPr>
+          <a:xfrm>
+            <a:off x="411480" y="1234440"/>
+            <a:ext cx="5577840" cy="3063240"/>
+          </a:xfrm>
+          <a:prstGeom prst="roundRect">
+            <a:avLst>
+              <a:gd name="adj" fmla="val 8000"/>
+            </a:avLst>
+          </a:prstGeom>
+          <a:solidFill>
+            <a:srgbClr val="FFFFFF"/>
+          </a:solidFill>
+          <a:ln>
+            <a:solidFill>
+              <a:srgbClr val="E2E8F0"/>
+            </a:solidFill>
+          </a:ln>
+        </p:spPr>
+        <p:style>
+          <a:lnRef idx="1">
+            <a:schemeClr val="accent1"/>
+          </a:lnRef>
+          <a:fillRef idx="3">
+            <a:schemeClr val="accent1"/>
+          </a:fillRef>
+          <a:effectRef idx="2">
+            <a:schemeClr val="accent1"/>
+          </a:effectRef>
+          <a:fontRef idx="minor">
+            <a:schemeClr val="lt1"/>
+          </a:fontRef>
+        </p:style>
+        <p:txBody>
+          <a:bodyPr rtlCol="0" anchor="ctr"/>
+          <a:lstStyle/>
+          <a:p>
+            <a:pPr algn="ctr"/>
+          </a:p>
+        </p:txBody>
+      </p:sp>
+      <p:sp>
+        <p:nvSpPr>
+          <p:cNvPr id="7" name="TextBox 6"/>
+          <p:cNvSpPr txBox="1"/>
+          <p:nvPr/>
+        </p:nvSpPr>
+        <p:spPr>
+          <a:xfrm>
+            <a:off x="576072" y="1344168"/>
+            <a:ext cx="5303520" cy="2880360"/>
+          </a:xfrm>
+          <a:prstGeom prst="rect">
+            <a:avLst/>
+          </a:prstGeom>
+          <a:noFill/>
+        </p:spPr>
+        <p:txBody>
+          <a:bodyPr wrap="square">
+            <a:spAutoFit/>
+          </a:bodyPr>
+          <a:lstStyle/>
+          <a:p>
+            <a:r>
+              <a:rPr sz="1400" b="1">
+                <a:solidFill>
+                  <a:srgbClr val="0D9488"/>
+                </a:solidFill>
+                <a:latin typeface="Calibri"/>
+              </a:rPr>
+              <a:t>现状链路（已通）</a:t>
+            </a:r>
+          </a:p>
+          <a:p>
+            <a:pPr>
+              <a:spcBef>
+                <a:spcPts val="400"/>
+              </a:spcBef>
+            </a:pPr>
+            <a:r>
+              <a:rPr sz="1200" b="0">
+                <a:solidFill>
+                  <a:srgbClr val="334155"/>
+                </a:solidFill>
+                <a:latin typeface="Calibri"/>
+              </a:rPr>
+              <a:t>Agent → write(path, content)</a:t>
+            </a:r>
+          </a:p>
+          <a:p>
+            <a:pPr>
+              <a:spcBef>
+                <a:spcPts val="400"/>
+              </a:spcBef>
+            </a:pPr>
+            <a:r>
+              <a:rPr sz="1200" b="0">
+                <a:solidFill>
+                  <a:srgbClr val="334155"/>
+                </a:solidFill>
+                <a:latin typeface="Calibri"/>
+              </a:rPr>
+              <a:t>→ workspace 落盘</a:t>
+            </a:r>
+          </a:p>
+          <a:p>
+            <a:pPr>
+              <a:spcBef>
+                <a:spcPts val="400"/>
+              </a:spcBef>
+            </a:pPr>
+            <a:r>
+              <a:rPr sz="1200" b="0">
+                <a:solidFill>
+                  <a:srgbClr val="334155"/>
+                </a:solidFill>
+                <a:latin typeface="Calibri"/>
+              </a:rPr>
+              <a:t>→ 同步华为云空间（KooDrive）</a:t>
+            </a:r>
+          </a:p>
+          <a:p>
+            <a:pPr>
+              <a:spcBef>
+                <a:spcPts val="400"/>
+              </a:spcBef>
+            </a:pPr>
+            <a:r>
+              <a:rPr sz="1200" b="0">
+                <a:solidFill>
+                  <a:srgbClr val="334155"/>
+                </a:solidFill>
+                <a:latin typeface="Calibri"/>
+              </a:rPr>
+              <a:t>→ 端 REST 按 file_id 下载</a:t>
+            </a:r>
+          </a:p>
+          <a:p>
+            <a:pPr>
+              <a:spcBef>
+                <a:spcPts val="400"/>
+              </a:spcBef>
+            </a:pPr>
+            <a:r>
+              <a:rPr sz="1200" b="0">
+                <a:solidFill>
+                  <a:srgbClr val="334155"/>
+                </a:solidFill>
+                <a:latin typeface="Calibri"/>
+              </a:rPr>
+              <a:t/>
+            </a:r>
+          </a:p>
+          <a:p>
+            <a:pPr>
+              <a:spcBef>
+                <a:spcPts val="400"/>
+              </a:spcBef>
+            </a:pPr>
+            <a:r>
+              <a:rPr sz="1200" b="0">
+                <a:solidFill>
+                  <a:srgbClr val="334155"/>
+                </a:solidFill>
+                <a:latin typeface="Calibri"/>
+              </a:rPr>
+              <a:t>断点：下载后当附件/源码，</a:t>
+            </a:r>
+          </a:p>
+          <a:p>
+            <a:pPr>
+              <a:spcBef>
+                <a:spcPts val="400"/>
+              </a:spcBef>
+            </a:pPr>
+            <a:r>
+              <a:rPr sz="1200" b="0">
+                <a:solidFill>
+                  <a:srgbClr val="334155"/>
+                </a:solidFill>
+                <a:latin typeface="Calibri"/>
+              </a:rPr>
+              <a:t>没有「这是网页，请画出来」的产品路径</a:t>
+            </a:r>
+          </a:p>
+        </p:txBody>
+      </p:sp>
+      <p:sp>
+        <p:nvSpPr>
+          <p:cNvPr id="8" name="Rounded Rectangle 7"/>
+          <p:cNvSpPr/>
+          <p:nvPr/>
+        </p:nvSpPr>
+        <p:spPr>
+          <a:xfrm>
+            <a:off x="6172200" y="1234440"/>
+            <a:ext cx="5577840" cy="3063240"/>
+          </a:xfrm>
+          <a:prstGeom prst="roundRect">
+            <a:avLst>
+              <a:gd name="adj" fmla="val 8000"/>
+            </a:avLst>
+          </a:prstGeom>
+          <a:solidFill>
+            <a:srgbClr val="FFFFFF"/>
+          </a:solidFill>
+          <a:ln>
+            <a:solidFill>
+              <a:srgbClr val="E2E8F0"/>
+            </a:solidFill>
+          </a:ln>
+        </p:spPr>
+        <p:style>
+          <a:lnRef idx="1">
+            <a:schemeClr val="accent1"/>
+          </a:lnRef>
+          <a:fillRef idx="3">
+            <a:schemeClr val="accent1"/>
+          </a:fillRef>
+          <a:effectRef idx="2">
+            <a:schemeClr val="accent1"/>
+          </a:effectRef>
+          <a:fontRef idx="minor">
+            <a:schemeClr val="lt1"/>
+          </a:fontRef>
+        </p:style>
+        <p:txBody>
+          <a:bodyPr rtlCol="0" anchor="ctr"/>
+          <a:lstStyle/>
+          <a:p>
+            <a:pPr algn="ctr"/>
+          </a:p>
+        </p:txBody>
+      </p:sp>
+      <p:sp>
+        <p:nvSpPr>
+          <p:cNvPr id="9" name="TextBox 8"/>
+          <p:cNvSpPr txBox="1"/>
+          <p:nvPr/>
+        </p:nvSpPr>
+        <p:spPr>
+          <a:xfrm>
+            <a:off x="6336792" y="1344168"/>
+            <a:ext cx="5303520" cy="2880360"/>
+          </a:xfrm>
+          <a:prstGeom prst="rect">
+            <a:avLst/>
+          </a:prstGeom>
+          <a:noFill/>
+        </p:spPr>
+        <p:txBody>
+          <a:bodyPr wrap="square">
+            <a:spAutoFit/>
+          </a:bodyPr>
+          <a:lstStyle/>
+          <a:p>
+            <a:r>
+              <a:rPr sz="1400" b="1">
+                <a:solidFill>
+                  <a:srgbClr val="0D9488"/>
+                </a:solidFill>
+                <a:latin typeface="Calibri"/>
+              </a:rPr>
+              <a:t>目标闭环（要补）</a:t>
+            </a:r>
+          </a:p>
+          <a:p>
+            <a:pPr>
+              <a:spcBef>
+                <a:spcPts val="400"/>
+              </a:spcBef>
+            </a:pPr>
+            <a:r>
+              <a:rPr sz="1200" b="0">
+                <a:solidFill>
+                  <a:srgbClr val="334155"/>
+                </a:solidFill>
+                <a:latin typeface="Calibri"/>
+              </a:rPr>
+              <a:t>write 返回：file_id + mime + sync_status</a:t>
+            </a:r>
+          </a:p>
+          <a:p>
+            <a:pPr>
+              <a:spcBef>
+                <a:spcPts val="400"/>
+              </a:spcBef>
+            </a:pPr>
+            <a:r>
+              <a:rPr sz="1200" b="0">
+                <a:solidFill>
+                  <a:srgbClr val="334155"/>
+                </a:solidFill>
+                <a:latin typeface="Calibri"/>
+              </a:rPr>
+              <a:t>运行时标记：previewable=html</a:t>
+            </a:r>
+          </a:p>
+          <a:p>
+            <a:pPr>
+              <a:spcBef>
+                <a:spcPts val="400"/>
+              </a:spcBef>
+            </a:pPr>
+            <a:r>
+              <a:rPr sz="1200" b="0">
+                <a:solidFill>
+                  <a:srgbClr val="334155"/>
+                </a:solidFill>
+                <a:latin typeface="Calibri"/>
+              </a:rPr>
+              <a:t>端：REST 取文本 → iframe/WebView 渲染</a:t>
+            </a:r>
+          </a:p>
+          <a:p>
+            <a:pPr>
+              <a:spcBef>
+                <a:spcPts val="400"/>
+              </a:spcBef>
+            </a:pPr>
+            <a:r>
+              <a:rPr sz="1200" b="0">
+                <a:solidFill>
+                  <a:srgbClr val="334155"/>
+                </a:solidFill>
+                <a:latin typeface="Calibri"/>
+              </a:rPr>
+              <a:t>安全：sandbox=allow-scripts（默不加 same-origin）</a:t>
+            </a:r>
+          </a:p>
+          <a:p>
+            <a:pPr>
+              <a:spcBef>
+                <a:spcPts val="400"/>
+              </a:spcBef>
+            </a:pPr>
+            <a:r>
+              <a:rPr sz="1200" b="0">
+                <a:solidFill>
+                  <a:srgbClr val="334155"/>
+                </a:solidFill>
+                <a:latin typeface="Calibri"/>
+              </a:rPr>
+              <a:t/>
+            </a:r>
+          </a:p>
+          <a:p>
+            <a:pPr>
+              <a:spcBef>
+                <a:spcPts val="400"/>
+              </a:spcBef>
+            </a:pPr>
+            <a:r>
+              <a:rPr sz="1200" b="0">
+                <a:solidFill>
+                  <a:srgbClr val="334155"/>
+                </a:solidFill>
+                <a:latin typeface="Calibri"/>
+              </a:rPr>
+              <a:t>可选：show_widget 薄封装（语义化触发预览）</a:t>
+            </a:r>
+          </a:p>
+          <a:p>
+            <a:pPr>
+              <a:spcBef>
+                <a:spcPts val="400"/>
+              </a:spcBef>
+            </a:pPr>
+            <a:r>
+              <a:rPr sz="1200" b="0">
+                <a:solidFill>
+                  <a:srgbClr val="334155"/>
+                </a:solidFill>
+                <a:latin typeface="Calibri"/>
+              </a:rPr>
+              <a:t>可选：流式粗预览；最终仍以完整版为准</a:t>
+            </a:r>
+          </a:p>
+        </p:txBody>
+      </p:sp>
+      <p:sp>
+        <p:nvSpPr>
+          <p:cNvPr id="10" name="TextBox 9"/>
+          <p:cNvSpPr txBox="1"/>
+          <p:nvPr/>
+        </p:nvSpPr>
+        <p:spPr>
+          <a:xfrm>
+            <a:off x="502920" y="4480560"/>
+            <a:ext cx="11155680" cy="2011680"/>
+          </a:xfrm>
+          <a:prstGeom prst="rect">
+            <a:avLst/>
+          </a:prstGeom>
+          <a:noFill/>
+        </p:spPr>
+        <p:txBody>
+          <a:bodyPr wrap="square">
+            <a:spAutoFit/>
+          </a:bodyPr>
+          <a:lstStyle/>
+          <a:p>
+            <a:r>
+              <a:rPr sz="1400" b="1">
+                <a:solidFill>
+                  <a:srgbClr val="0D9488"/>
+                </a:solidFill>
+                <a:latin typeface="Calibri"/>
+              </a:rPr>
+              <a:t>端到端目标流</a:t>
+            </a:r>
+          </a:p>
+          <a:p>
+            <a:pPr>
+              <a:spcBef>
+                <a:spcPts val="600"/>
+              </a:spcBef>
+            </a:pPr>
+            <a:r>
+              <a:rPr sz="1300" b="0">
+                <a:solidFill>
+                  <a:srgbClr val="334155"/>
+                </a:solidFill>
+                <a:latin typeface="Calibri"/>
+              </a:rPr>
+              <a:t>用户要交互页 → 模型生成 HTML → write 到 artifacts/*.html → 云空间同步就绪</a:t>
+            </a:r>
+          </a:p>
+          <a:p>
+            <a:pPr>
+              <a:spcBef>
+                <a:spcPts val="600"/>
+              </a:spcBef>
+            </a:pPr>
+            <a:r>
+              <a:rPr sz="1300" b="0">
+                <a:solidFill>
+                  <a:srgbClr val="334155"/>
+                </a:solidFill>
+                <a:latin typeface="Calibri"/>
+              </a:rPr>
+              <a:t>→ 工具结果带 file_id/mime → 端下载 → sandbox iframe/WebView 呈现 → 用户可交互</a:t>
+            </a:r>
+          </a:p>
+          <a:p>
+            <a:pPr>
+              <a:spcBef>
+                <a:spcPts val="600"/>
+              </a:spcBef>
+            </a:pPr>
+            <a:r>
+              <a:rPr sz="1300" b="0">
+                <a:solidFill>
+                  <a:srgbClr val="334155"/>
+                </a:solidFill>
+                <a:latin typeface="Calibri"/>
+              </a:rPr>
+              <a:t>→（可选）再次 write 覆盖 → 端刷新预览；（可选）对外分享仍用云空间 URL/签名链</a:t>
             </a:r>
           </a:p>
         </p:txBody>
@@ -4200,13 +6863,13 @@
         <p:spPr>
           <a:xfrm>
             <a:off x="0" y="0"/>
-            <a:ext cx="12191695" cy="1005840"/>
+            <a:ext cx="12191695" cy="6858000"/>
           </a:xfrm>
           <a:prstGeom prst="rect">
             <a:avLst/>
           </a:prstGeom>
           <a:solidFill>
-            <a:srgbClr val="0070C0"/>
+            <a:srgbClr val="F8FAFC"/>
           </a:solidFill>
           <a:ln>
             <a:noFill/>
@@ -4227,32 +6890,109 @@
           </a:fontRef>
         </p:style>
         <p:txBody>
-          <a:bodyPr rtlCol="0" anchor="ctr" lIns="548640"/>
-          <a:lstStyle/>
-          <a:p>
-            <a:pPr algn="l">
-              <a:defRPr sz="2600" b="1">
-                <a:solidFill>
-                  <a:srgbClr val="FFFFFF"/>
-                </a:solidFill>
-              </a:defRPr>
-            </a:pPr>
-            <a:r>
-              <a:t>方案 A：下载后完整渲染（推荐）</a:t>
-            </a:r>
-          </a:p>
-        </p:txBody>
-      </p:sp>
-      <p:sp>
-        <p:nvSpPr>
-          <p:cNvPr id="3" name="TextBox 2"/>
+          <a:bodyPr rtlCol="0" anchor="ctr"/>
+          <a:lstStyle/>
+          <a:p>
+            <a:pPr algn="ctr"/>
+          </a:p>
+        </p:txBody>
+      </p:sp>
+      <p:sp>
+        <p:nvSpPr>
+          <p:cNvPr id="3" name="Rectangle 2"/>
+          <p:cNvSpPr/>
+          <p:nvPr/>
+        </p:nvSpPr>
+        <p:spPr>
+          <a:xfrm>
+            <a:off x="0" y="0"/>
+            <a:ext cx="12191695" cy="960120"/>
+          </a:xfrm>
+          <a:prstGeom prst="rect">
+            <a:avLst/>
+          </a:prstGeom>
+          <a:solidFill>
+            <a:srgbClr val="0F172A"/>
+          </a:solidFill>
+          <a:ln>
+            <a:noFill/>
+          </a:ln>
+        </p:spPr>
+        <p:style>
+          <a:lnRef idx="1">
+            <a:schemeClr val="accent1"/>
+          </a:lnRef>
+          <a:fillRef idx="3">
+            <a:schemeClr val="accent1"/>
+          </a:fillRef>
+          <a:effectRef idx="2">
+            <a:schemeClr val="accent1"/>
+          </a:effectRef>
+          <a:fontRef idx="minor">
+            <a:schemeClr val="lt1"/>
+          </a:fontRef>
+        </p:style>
+        <p:txBody>
+          <a:bodyPr rtlCol="0" anchor="ctr"/>
+          <a:lstStyle/>
+          <a:p>
+            <a:pPr algn="ctr"/>
+          </a:p>
+        </p:txBody>
+      </p:sp>
+      <p:sp>
+        <p:nvSpPr>
+          <p:cNvPr id="4" name="Rectangle 3"/>
+          <p:cNvSpPr/>
+          <p:nvPr/>
+        </p:nvSpPr>
+        <p:spPr>
+          <a:xfrm>
+            <a:off x="0" y="960120"/>
+            <a:ext cx="12191695" cy="54864"/>
+          </a:xfrm>
+          <a:prstGeom prst="rect">
+            <a:avLst/>
+          </a:prstGeom>
+          <a:solidFill>
+            <a:srgbClr val="0D9488"/>
+          </a:solidFill>
+          <a:ln>
+            <a:noFill/>
+          </a:ln>
+        </p:spPr>
+        <p:style>
+          <a:lnRef idx="1">
+            <a:schemeClr val="accent1"/>
+          </a:lnRef>
+          <a:fillRef idx="3">
+            <a:schemeClr val="accent1"/>
+          </a:fillRef>
+          <a:effectRef idx="2">
+            <a:schemeClr val="accent1"/>
+          </a:effectRef>
+          <a:fontRef idx="minor">
+            <a:schemeClr val="lt1"/>
+          </a:fontRef>
+        </p:style>
+        <p:txBody>
+          <a:bodyPr rtlCol="0" anchor="ctr"/>
+          <a:lstStyle/>
+          <a:p>
+            <a:pPr algn="ctr"/>
+          </a:p>
+        </p:txBody>
+      </p:sp>
+      <p:sp>
+        <p:nvSpPr>
+          <p:cNvPr id="5" name="TextBox 4"/>
           <p:cNvSpPr txBox="1"/>
           <p:nvPr/>
         </p:nvSpPr>
         <p:spPr>
           <a:xfrm>
-            <a:off x="640080" y="1280160"/>
-            <a:ext cx="10881360" cy="5303520"/>
+            <a:off x="502920" y="201168"/>
+            <a:ext cx="11155680" cy="640080"/>
           </a:xfrm>
           <a:prstGeom prst="rect">
             <a:avLst/>
@@ -4265,63 +7005,587 @@
           </a:bodyPr>
           <a:lstStyle/>
           <a:p>
-            <a:pPr>
-              <a:spcAft>
-                <a:spcPts val="1000"/>
-              </a:spcAft>
-              <a:defRPr sz="1800">
-                <a:solidFill>
-                  <a:srgbClr val="282828"/>
-                </a:solidFill>
-              </a:defRPr>
-            </a:pPr>
-            <a:r>
-              <a:t>流程：Agent write → 同步云空间 → REST 下载 → 端侧 iframe 加载。</a:t>
-            </a:r>
-          </a:p>
-          <a:p>
-            <a:pPr>
-              <a:spcAft>
-                <a:spcPts val="1000"/>
-              </a:spcAft>
-              <a:defRPr sz="1800">
-                <a:solidFill>
-                  <a:srgbClr val="282828"/>
-                </a:solidFill>
-              </a:defRPr>
-            </a:pPr>
-            <a:r>
-              <a:t>优点：实现稳、无半截标签、脚本只执行一次、可分享/刷新。</a:t>
-            </a:r>
-          </a:p>
-          <a:p>
-            <a:pPr>
-              <a:spcAft>
-                <a:spcPts val="1000"/>
-              </a:spcAft>
-              <a:defRPr sz="1800">
-                <a:solidFill>
-                  <a:srgbClr val="282828"/>
-                </a:solidFill>
-              </a:defRPr>
-            </a:pPr>
-            <a:r>
-              <a:t>做法：下载 HTML 文本后，用 iframe srcdoc 或 WebView loadData。</a:t>
-            </a:r>
-          </a:p>
-          <a:p>
-            <a:pPr>
-              <a:spcAft>
-                <a:spcPts val="1000"/>
-              </a:spcAft>
-              <a:defRPr sz="1800">
-                <a:solidFill>
-                  <a:srgbClr val="282828"/>
-                </a:solidFill>
-              </a:defRPr>
-            </a:pPr>
-            <a:r>
-              <a:t>要求：Content-Type 为 text/html，或端按 .html 扩展名识别。</a:t>
+            <a:r>
+              <a:rPr sz="2400" b="1">
+                <a:solidFill>
+                  <a:srgbClr val="FFFFFF"/>
+                </a:solidFill>
+                <a:latin typeface="Calibri"/>
+              </a:rPr>
+              <a:t>05  两条渲染路径：完整下载 vs 流式增量</a:t>
+            </a:r>
+          </a:p>
+          <a:p>
+            <a:r>
+              <a:rPr sz="1200" b="0">
+                <a:solidFill>
+                  <a:srgbClr val="94A3B8"/>
+                </a:solidFill>
+                <a:latin typeface="Calibri"/>
+              </a:rPr>
+              <a:t>都要有渲染引擎；差别只在「何时把 HTML 喂给引擎」</a:t>
+            </a:r>
+          </a:p>
+        </p:txBody>
+      </p:sp>
+      <p:sp>
+        <p:nvSpPr>
+          <p:cNvPr id="6" name="Rounded Rectangle 5"/>
+          <p:cNvSpPr/>
+          <p:nvPr/>
+        </p:nvSpPr>
+        <p:spPr>
+          <a:xfrm>
+            <a:off x="411480" y="1234440"/>
+            <a:ext cx="5577840" cy="5029200"/>
+          </a:xfrm>
+          <a:prstGeom prst="roundRect">
+            <a:avLst>
+              <a:gd name="adj" fmla="val 8000"/>
+            </a:avLst>
+          </a:prstGeom>
+          <a:solidFill>
+            <a:srgbClr val="FFFFFF"/>
+          </a:solidFill>
+          <a:ln>
+            <a:solidFill>
+              <a:srgbClr val="E2E8F0"/>
+            </a:solidFill>
+          </a:ln>
+        </p:spPr>
+        <p:style>
+          <a:lnRef idx="1">
+            <a:schemeClr val="accent1"/>
+          </a:lnRef>
+          <a:fillRef idx="3">
+            <a:schemeClr val="accent1"/>
+          </a:fillRef>
+          <a:effectRef idx="2">
+            <a:schemeClr val="accent1"/>
+          </a:effectRef>
+          <a:fontRef idx="minor">
+            <a:schemeClr val="lt1"/>
+          </a:fontRef>
+        </p:style>
+        <p:txBody>
+          <a:bodyPr rtlCol="0" anchor="ctr"/>
+          <a:lstStyle/>
+          <a:p>
+            <a:pPr algn="ctr"/>
+          </a:p>
+        </p:txBody>
+      </p:sp>
+      <p:sp>
+        <p:nvSpPr>
+          <p:cNvPr id="7" name="TextBox 6"/>
+          <p:cNvSpPr txBox="1"/>
+          <p:nvPr/>
+        </p:nvSpPr>
+        <p:spPr>
+          <a:xfrm>
+            <a:off x="576072" y="1344168"/>
+            <a:ext cx="5303520" cy="4846320"/>
+          </a:xfrm>
+          <a:prstGeom prst="rect">
+            <a:avLst/>
+          </a:prstGeom>
+          <a:noFill/>
+        </p:spPr>
+        <p:txBody>
+          <a:bodyPr wrap="square">
+            <a:spAutoFit/>
+          </a:bodyPr>
+          <a:lstStyle/>
+          <a:p>
+            <a:r>
+              <a:rPr sz="1400" b="1">
+                <a:solidFill>
+                  <a:srgbClr val="0D9488"/>
+                </a:solidFill>
+                <a:latin typeface="Calibri"/>
+              </a:rPr>
+              <a:t>路径 A · 下载后完整渲染（推荐默认）</a:t>
+            </a:r>
+          </a:p>
+          <a:p>
+            <a:pPr>
+              <a:spcBef>
+                <a:spcPts val="400"/>
+              </a:spcBef>
+            </a:pPr>
+            <a:r>
+              <a:rPr sz="1200" b="0">
+                <a:solidFill>
+                  <a:srgbClr val="334155"/>
+                </a:solidFill>
+                <a:latin typeface="Calibri"/>
+              </a:rPr>
+              <a:t>时机：sync 完成 → REST 拉全文 → 一次加载</a:t>
+            </a:r>
+          </a:p>
+          <a:p>
+            <a:pPr>
+              <a:spcBef>
+                <a:spcPts val="400"/>
+              </a:spcBef>
+            </a:pPr>
+            <a:r>
+              <a:rPr sz="1200" b="0">
+                <a:solidFill>
+                  <a:srgbClr val="334155"/>
+                </a:solidFill>
+                <a:latin typeface="Calibri"/>
+              </a:rPr>
+              <a:t/>
+            </a:r>
+          </a:p>
+          <a:p>
+            <a:pPr>
+              <a:spcBef>
+                <a:spcPts val="400"/>
+              </a:spcBef>
+            </a:pPr>
+            <a:r>
+              <a:rPr sz="1200" b="0">
+                <a:solidFill>
+                  <a:srgbClr val="334155"/>
+                </a:solidFill>
+                <a:latin typeface="Calibri"/>
+              </a:rPr>
+              <a:t>优点</a:t>
+            </a:r>
+          </a:p>
+          <a:p>
+            <a:pPr>
+              <a:spcBef>
+                <a:spcPts val="400"/>
+              </a:spcBef>
+            </a:pPr>
+            <a:r>
+              <a:rPr sz="1200" b="0">
+                <a:solidFill>
+                  <a:srgbClr val="334155"/>
+                </a:solidFill>
+                <a:latin typeface="Calibri"/>
+              </a:rPr>
+              <a:t>· 标签完整，不易花屏</a:t>
+            </a:r>
+          </a:p>
+          <a:p>
+            <a:pPr>
+              <a:spcBef>
+                <a:spcPts val="400"/>
+              </a:spcBef>
+            </a:pPr>
+            <a:r>
+              <a:rPr sz="1200" b="0">
+                <a:solidFill>
+                  <a:srgbClr val="334155"/>
+                </a:solidFill>
+                <a:latin typeface="Calibri"/>
+              </a:rPr>
+              <a:t>· 脚本只执行一次</a:t>
+            </a:r>
+          </a:p>
+          <a:p>
+            <a:pPr>
+              <a:spcBef>
+                <a:spcPts val="400"/>
+              </a:spcBef>
+            </a:pPr>
+            <a:r>
+              <a:rPr sz="1200" b="0">
+                <a:solidFill>
+                  <a:srgbClr val="334155"/>
+                </a:solidFill>
+                <a:latin typeface="Calibri"/>
+              </a:rPr>
+              <a:t>· 天然可刷新 / 多端 / 回放</a:t>
+            </a:r>
+          </a:p>
+          <a:p>
+            <a:pPr>
+              <a:spcBef>
+                <a:spcPts val="400"/>
+              </a:spcBef>
+            </a:pPr>
+            <a:r>
+              <a:rPr sz="1200" b="0">
+                <a:solidFill>
+                  <a:srgbClr val="334155"/>
+                </a:solidFill>
+                <a:latin typeface="Calibri"/>
+              </a:rPr>
+              <a:t>· 与现有云空间模型零阻抗</a:t>
+            </a:r>
+          </a:p>
+          <a:p>
+            <a:pPr>
+              <a:spcBef>
+                <a:spcPts val="400"/>
+              </a:spcBef>
+            </a:pPr>
+            <a:r>
+              <a:rPr sz="1200" b="0">
+                <a:solidFill>
+                  <a:srgbClr val="334155"/>
+                </a:solidFill>
+                <a:latin typeface="Calibri"/>
+              </a:rPr>
+              <a:t/>
+            </a:r>
+          </a:p>
+          <a:p>
+            <a:pPr>
+              <a:spcBef>
+                <a:spcPts val="400"/>
+              </a:spcBef>
+            </a:pPr>
+            <a:r>
+              <a:rPr sz="1200" b="0">
+                <a:solidFill>
+                  <a:srgbClr val="334155"/>
+                </a:solidFill>
+                <a:latin typeface="Calibri"/>
+              </a:rPr>
+              <a:t>代价</a:t>
+            </a:r>
+          </a:p>
+          <a:p>
+            <a:pPr>
+              <a:spcBef>
+                <a:spcPts val="400"/>
+              </a:spcBef>
+            </a:pPr>
+            <a:r>
+              <a:rPr sz="1200" b="0">
+                <a:solidFill>
+                  <a:srgbClr val="334155"/>
+                </a:solidFill>
+                <a:latin typeface="Calibri"/>
+              </a:rPr>
+              <a:t>· 需等生成+同步结束才出画面</a:t>
+            </a:r>
+          </a:p>
+          <a:p>
+            <a:pPr>
+              <a:spcBef>
+                <a:spcPts val="400"/>
+              </a:spcBef>
+            </a:pPr>
+            <a:r>
+              <a:rPr sz="1200" b="0">
+                <a:solidFill>
+                  <a:srgbClr val="334155"/>
+                </a:solidFill>
+                <a:latin typeface="Calibri"/>
+              </a:rPr>
+              <a:t/>
+            </a:r>
+          </a:p>
+          <a:p>
+            <a:pPr>
+              <a:spcBef>
+                <a:spcPts val="400"/>
+              </a:spcBef>
+            </a:pPr>
+            <a:r>
+              <a:rPr sz="1200" b="0">
+                <a:solidFill>
+                  <a:srgbClr val="334155"/>
+                </a:solidFill>
+                <a:latin typeface="Calibri"/>
+              </a:rPr>
+              <a:t>适用：几乎所有一期场景</a:t>
+            </a:r>
+          </a:p>
+        </p:txBody>
+      </p:sp>
+      <p:sp>
+        <p:nvSpPr>
+          <p:cNvPr id="8" name="Rounded Rectangle 7"/>
+          <p:cNvSpPr/>
+          <p:nvPr/>
+        </p:nvSpPr>
+        <p:spPr>
+          <a:xfrm>
+            <a:off x="6172200" y="1234440"/>
+            <a:ext cx="5577840" cy="5029200"/>
+          </a:xfrm>
+          <a:prstGeom prst="roundRect">
+            <a:avLst>
+              <a:gd name="adj" fmla="val 8000"/>
+            </a:avLst>
+          </a:prstGeom>
+          <a:solidFill>
+            <a:srgbClr val="FFFFFF"/>
+          </a:solidFill>
+          <a:ln>
+            <a:solidFill>
+              <a:srgbClr val="E2E8F0"/>
+            </a:solidFill>
+          </a:ln>
+        </p:spPr>
+        <p:style>
+          <a:lnRef idx="1">
+            <a:schemeClr val="accent1"/>
+          </a:lnRef>
+          <a:fillRef idx="3">
+            <a:schemeClr val="accent1"/>
+          </a:fillRef>
+          <a:effectRef idx="2">
+            <a:schemeClr val="accent1"/>
+          </a:effectRef>
+          <a:fontRef idx="minor">
+            <a:schemeClr val="lt1"/>
+          </a:fontRef>
+        </p:style>
+        <p:txBody>
+          <a:bodyPr rtlCol="0" anchor="ctr"/>
+          <a:lstStyle/>
+          <a:p>
+            <a:pPr algn="ctr"/>
+          </a:p>
+        </p:txBody>
+      </p:sp>
+      <p:sp>
+        <p:nvSpPr>
+          <p:cNvPr id="9" name="TextBox 8"/>
+          <p:cNvSpPr txBox="1"/>
+          <p:nvPr/>
+        </p:nvSpPr>
+        <p:spPr>
+          <a:xfrm>
+            <a:off x="6336792" y="1344168"/>
+            <a:ext cx="5303520" cy="4846320"/>
+          </a:xfrm>
+          <a:prstGeom prst="rect">
+            <a:avLst/>
+          </a:prstGeom>
+          <a:noFill/>
+        </p:spPr>
+        <p:txBody>
+          <a:bodyPr wrap="square">
+            <a:spAutoFit/>
+          </a:bodyPr>
+          <a:lstStyle/>
+          <a:p>
+            <a:r>
+              <a:rPr sz="1400" b="1">
+                <a:solidFill>
+                  <a:srgbClr val="0D9488"/>
+                </a:solidFill>
+                <a:latin typeface="Calibri"/>
+              </a:rPr>
+              <a:t>路径 B · 流式边传边渲染（体验增强）</a:t>
+            </a:r>
+          </a:p>
+          <a:p>
+            <a:pPr>
+              <a:spcBef>
+                <a:spcPts val="400"/>
+              </a:spcBef>
+            </a:pPr>
+            <a:r>
+              <a:rPr sz="1200" b="0">
+                <a:solidFill>
+                  <a:srgbClr val="334155"/>
+                </a:solidFill>
+                <a:latin typeface="Calibri"/>
+              </a:rPr>
+              <a:t>时机：token/delta 推送 → buffer → 节流刷新</a:t>
+            </a:r>
+          </a:p>
+          <a:p>
+            <a:pPr>
+              <a:spcBef>
+                <a:spcPts val="400"/>
+              </a:spcBef>
+            </a:pPr>
+            <a:r>
+              <a:rPr sz="1200" b="0">
+                <a:solidFill>
+                  <a:srgbClr val="334155"/>
+                </a:solidFill>
+                <a:latin typeface="Calibri"/>
+              </a:rPr>
+              <a:t/>
+            </a:r>
+          </a:p>
+          <a:p>
+            <a:pPr>
+              <a:spcBef>
+                <a:spcPts val="400"/>
+              </a:spcBef>
+            </a:pPr>
+            <a:r>
+              <a:rPr sz="1200" b="0">
+                <a:solidFill>
+                  <a:srgbClr val="334155"/>
+                </a:solidFill>
+                <a:latin typeface="Calibri"/>
+              </a:rPr>
+              <a:t>优点</a:t>
+            </a:r>
+          </a:p>
+          <a:p>
+            <a:pPr>
+              <a:spcBef>
+                <a:spcPts val="400"/>
+              </a:spcBef>
+            </a:pPr>
+            <a:r>
+              <a:rPr sz="1200" b="0">
+                <a:solidFill>
+                  <a:srgbClr val="334155"/>
+                </a:solidFill>
+                <a:latin typeface="Calibri"/>
+              </a:rPr>
+              <a:t>· 首屏更早，体感像流式 Markdown</a:t>
+            </a:r>
+          </a:p>
+          <a:p>
+            <a:pPr>
+              <a:spcBef>
+                <a:spcPts val="400"/>
+              </a:spcBef>
+            </a:pPr>
+            <a:r>
+              <a:rPr sz="1200" b="0">
+                <a:solidFill>
+                  <a:srgbClr val="334155"/>
+                </a:solidFill>
+                <a:latin typeface="Calibri"/>
+              </a:rPr>
+              <a:t/>
+            </a:r>
+          </a:p>
+          <a:p>
+            <a:pPr>
+              <a:spcBef>
+                <a:spcPts val="400"/>
+              </a:spcBef>
+            </a:pPr>
+            <a:r>
+              <a:rPr sz="1200" b="0">
+                <a:solidFill>
+                  <a:srgbClr val="334155"/>
+                </a:solidFill>
+                <a:latin typeface="Calibri"/>
+              </a:rPr>
+              <a:t>挑战（比 Markdown 更挑）</a:t>
+            </a:r>
+          </a:p>
+          <a:p>
+            <a:pPr>
+              <a:spcBef>
+                <a:spcPts val="400"/>
+              </a:spcBef>
+            </a:pPr>
+            <a:r>
+              <a:rPr sz="1200" b="0">
+                <a:solidFill>
+                  <a:srgbClr val="334155"/>
+                </a:solidFill>
+                <a:latin typeface="Calibri"/>
+              </a:rPr>
+              <a:t>· 未闭合标签破坏 DOM</a:t>
+            </a:r>
+          </a:p>
+          <a:p>
+            <a:pPr>
+              <a:spcBef>
+                <a:spcPts val="400"/>
+              </a:spcBef>
+            </a:pPr>
+            <a:r>
+              <a:rPr sz="1200" b="0">
+                <a:solidFill>
+                  <a:srgbClr val="334155"/>
+                </a:solidFill>
+                <a:latin typeface="Calibri"/>
+              </a:rPr>
+              <a:t>· srcdoc 重设导致脚本重复跑</a:t>
+            </a:r>
+          </a:p>
+          <a:p>
+            <a:pPr>
+              <a:spcBef>
+                <a:spcPts val="400"/>
+              </a:spcBef>
+            </a:pPr>
+            <a:r>
+              <a:rPr sz="1200" b="0">
+                <a:solidFill>
+                  <a:srgbClr val="334155"/>
+                </a:solidFill>
+                <a:latin typeface="Calibri"/>
+              </a:rPr>
+              <a:t>· 需要独立推送通道与状态机</a:t>
+            </a:r>
+          </a:p>
+          <a:p>
+            <a:pPr>
+              <a:spcBef>
+                <a:spcPts val="400"/>
+              </a:spcBef>
+            </a:pPr>
+            <a:r>
+              <a:rPr sz="1200" b="0">
+                <a:solidFill>
+                  <a:srgbClr val="334155"/>
+                </a:solidFill>
+                <a:latin typeface="Calibri"/>
+              </a:rPr>
+              <a:t/>
+            </a:r>
+          </a:p>
+          <a:p>
+            <a:pPr>
+              <a:spcBef>
+                <a:spcPts val="400"/>
+              </a:spcBef>
+            </a:pPr>
+            <a:r>
+              <a:rPr sz="1200" b="0">
+                <a:solidFill>
+                  <a:srgbClr val="334155"/>
+                </a:solidFill>
+                <a:latin typeface="Calibri"/>
+              </a:rPr>
+              <a:t>建议策略</a:t>
+            </a:r>
+          </a:p>
+          <a:p>
+            <a:pPr>
+              <a:spcBef>
+                <a:spcPts val="400"/>
+              </a:spcBef>
+            </a:pPr>
+            <a:r>
+              <a:rPr sz="1200" b="0">
+                <a:solidFill>
+                  <a:srgbClr val="334155"/>
+                </a:solidFill>
+                <a:latin typeface="Calibri"/>
+              </a:rPr>
+              <a:t>· 结构可增量；脚本等 done</a:t>
+            </a:r>
+          </a:p>
+          <a:p>
+            <a:pPr>
+              <a:spcBef>
+                <a:spcPts val="400"/>
+              </a:spcBef>
+            </a:pPr>
+            <a:r>
+              <a:rPr sz="1200" b="0">
+                <a:solidFill>
+                  <a:srgbClr val="334155"/>
+                </a:solidFill>
+                <a:latin typeface="Calibri"/>
+              </a:rPr>
+              <a:t>· 最终仍 upload/write 定稿</a:t>
             </a:r>
           </a:p>
         </p:txBody>
@@ -4353,13 +7617,13 @@
         <p:spPr>
           <a:xfrm>
             <a:off x="0" y="0"/>
-            <a:ext cx="12191695" cy="1005840"/>
+            <a:ext cx="12191695" cy="6858000"/>
           </a:xfrm>
           <a:prstGeom prst="rect">
             <a:avLst/>
           </a:prstGeom>
           <a:solidFill>
-            <a:srgbClr val="0070C0"/>
+            <a:srgbClr val="F8FAFC"/>
           </a:solidFill>
           <a:ln>
             <a:noFill/>
@@ -4380,32 +7644,109 @@
           </a:fontRef>
         </p:style>
         <p:txBody>
-          <a:bodyPr rtlCol="0" anchor="ctr" lIns="548640"/>
-          <a:lstStyle/>
-          <a:p>
-            <a:pPr algn="l">
-              <a:defRPr sz="2600" b="1">
-                <a:solidFill>
-                  <a:srgbClr val="FFFFFF"/>
-                </a:solidFill>
-              </a:defRPr>
-            </a:pPr>
-            <a:r>
-              <a:t>方案 B：流式边传边渲染（二期优化）</a:t>
-            </a:r>
-          </a:p>
-        </p:txBody>
-      </p:sp>
-      <p:sp>
-        <p:nvSpPr>
-          <p:cNvPr id="3" name="TextBox 2"/>
+          <a:bodyPr rtlCol="0" anchor="ctr"/>
+          <a:lstStyle/>
+          <a:p>
+            <a:pPr algn="ctr"/>
+          </a:p>
+        </p:txBody>
+      </p:sp>
+      <p:sp>
+        <p:nvSpPr>
+          <p:cNvPr id="3" name="Rectangle 2"/>
+          <p:cNvSpPr/>
+          <p:nvPr/>
+        </p:nvSpPr>
+        <p:spPr>
+          <a:xfrm>
+            <a:off x="0" y="0"/>
+            <a:ext cx="12191695" cy="960120"/>
+          </a:xfrm>
+          <a:prstGeom prst="rect">
+            <a:avLst/>
+          </a:prstGeom>
+          <a:solidFill>
+            <a:srgbClr val="0F172A"/>
+          </a:solidFill>
+          <a:ln>
+            <a:noFill/>
+          </a:ln>
+        </p:spPr>
+        <p:style>
+          <a:lnRef idx="1">
+            <a:schemeClr val="accent1"/>
+          </a:lnRef>
+          <a:fillRef idx="3">
+            <a:schemeClr val="accent1"/>
+          </a:fillRef>
+          <a:effectRef idx="2">
+            <a:schemeClr val="accent1"/>
+          </a:effectRef>
+          <a:fontRef idx="minor">
+            <a:schemeClr val="lt1"/>
+          </a:fontRef>
+        </p:style>
+        <p:txBody>
+          <a:bodyPr rtlCol="0" anchor="ctr"/>
+          <a:lstStyle/>
+          <a:p>
+            <a:pPr algn="ctr"/>
+          </a:p>
+        </p:txBody>
+      </p:sp>
+      <p:sp>
+        <p:nvSpPr>
+          <p:cNvPr id="4" name="Rectangle 3"/>
+          <p:cNvSpPr/>
+          <p:nvPr/>
+        </p:nvSpPr>
+        <p:spPr>
+          <a:xfrm>
+            <a:off x="0" y="960120"/>
+            <a:ext cx="12191695" cy="54864"/>
+          </a:xfrm>
+          <a:prstGeom prst="rect">
+            <a:avLst/>
+          </a:prstGeom>
+          <a:solidFill>
+            <a:srgbClr val="0D9488"/>
+          </a:solidFill>
+          <a:ln>
+            <a:noFill/>
+          </a:ln>
+        </p:spPr>
+        <p:style>
+          <a:lnRef idx="1">
+            <a:schemeClr val="accent1"/>
+          </a:lnRef>
+          <a:fillRef idx="3">
+            <a:schemeClr val="accent1"/>
+          </a:fillRef>
+          <a:effectRef idx="2">
+            <a:schemeClr val="accent1"/>
+          </a:effectRef>
+          <a:fontRef idx="minor">
+            <a:schemeClr val="lt1"/>
+          </a:fontRef>
+        </p:style>
+        <p:txBody>
+          <a:bodyPr rtlCol="0" anchor="ctr"/>
+          <a:lstStyle/>
+          <a:p>
+            <a:pPr algn="ctr"/>
+          </a:p>
+        </p:txBody>
+      </p:sp>
+      <p:sp>
+        <p:nvSpPr>
+          <p:cNvPr id="5" name="TextBox 4"/>
           <p:cNvSpPr txBox="1"/>
           <p:nvPr/>
         </p:nvSpPr>
         <p:spPr>
           <a:xfrm>
-            <a:off x="640080" y="1280160"/>
-            <a:ext cx="10881360" cy="5303520"/>
+            <a:off x="502920" y="201168"/>
+            <a:ext cx="11155680" cy="640080"/>
           </a:xfrm>
           <a:prstGeom prst="rect">
             <a:avLst/>
@@ -4418,63 +7759,828 @@
           </a:bodyPr>
           <a:lstStyle/>
           <a:p>
-            <a:pPr>
-              <a:spcAft>
-                <a:spcPts val="1000"/>
-              </a:spcAft>
-              <a:defRPr sz="1800">
-                <a:solidFill>
-                  <a:srgbClr val="282828"/>
-                </a:solidFill>
-              </a:defRPr>
-            </a:pPr>
-            <a:r>
-              <a:t>流程：Agent 生成 token → 实时推送给端 → 端侧 buffer 累积 → 定时/完成后刷新 iframe。</a:t>
-            </a:r>
-          </a:p>
-          <a:p>
-            <a:pPr>
-              <a:spcAft>
-                <a:spcPts val="1000"/>
-              </a:spcAft>
-              <a:defRPr sz="1800">
-                <a:solidFill>
-                  <a:srgbClr val="282828"/>
-                </a:solidFill>
-              </a:defRPr>
-            </a:pPr>
-            <a:r>
-              <a:t>优点：首屏更早出现，体验接近流式 Markdown。</a:t>
-            </a:r>
-          </a:p>
-          <a:p>
-            <a:pPr>
-              <a:spcAft>
-                <a:spcPts val="1000"/>
-              </a:spcAft>
-              <a:defRPr sz="1800">
-                <a:solidFill>
-                  <a:srgbClr val="282828"/>
-                </a:solidFill>
-              </a:defRPr>
-            </a:pPr>
-            <a:r>
-              <a:t>挑战：未闭合标签会坏树、script 重复执行、闪烁。</a:t>
-            </a:r>
-          </a:p>
-          <a:p>
-            <a:pPr>
-              <a:spcAft>
-                <a:spcPts val="1000"/>
-              </a:spcAft>
-              <a:defRPr sz="1800">
-                <a:solidFill>
-                  <a:srgbClr val="282828"/>
-                </a:solidFill>
-              </a:defRPr>
-            </a:pPr>
-            <a:r>
-              <a:t>建议：先「收齐再渲染」做稳，再尝试「增量更新 + 脚本完成后执行」。</a:t>
+            <a:r>
+              <a:rPr sz="2400" b="1">
+                <a:solidFill>
+                  <a:srgbClr val="FFFFFF"/>
+                </a:solidFill>
+                <a:latin typeface="Calibri"/>
+              </a:rPr>
+              <a:t>06  关键概念与安全默认</a:t>
+            </a:r>
+          </a:p>
+          <a:p>
+            <a:r>
+              <a:rPr sz="1200" b="0">
+                <a:solidFill>
+                  <a:srgbClr val="94A3B8"/>
+                </a:solidFill>
+                <a:latin typeface="Calibri"/>
+              </a:rPr>
+              <a:t>MIME 决定「当什么打开」；iframe/WebView 决定「在哪画」；sandbox 决定「能闯多大祸」</a:t>
+            </a:r>
+          </a:p>
+        </p:txBody>
+      </p:sp>
+      <p:sp>
+        <p:nvSpPr>
+          <p:cNvPr id="6" name="Rounded Rectangle 5"/>
+          <p:cNvSpPr/>
+          <p:nvPr/>
+        </p:nvSpPr>
+        <p:spPr>
+          <a:xfrm>
+            <a:off x="411480" y="1234440"/>
+            <a:ext cx="3703320" cy="5029200"/>
+          </a:xfrm>
+          <a:prstGeom prst="roundRect">
+            <a:avLst>
+              <a:gd name="adj" fmla="val 8000"/>
+            </a:avLst>
+          </a:prstGeom>
+          <a:solidFill>
+            <a:srgbClr val="FFFFFF"/>
+          </a:solidFill>
+          <a:ln>
+            <a:solidFill>
+              <a:srgbClr val="E2E8F0"/>
+            </a:solidFill>
+          </a:ln>
+        </p:spPr>
+        <p:style>
+          <a:lnRef idx="1">
+            <a:schemeClr val="accent1"/>
+          </a:lnRef>
+          <a:fillRef idx="3">
+            <a:schemeClr val="accent1"/>
+          </a:fillRef>
+          <a:effectRef idx="2">
+            <a:schemeClr val="accent1"/>
+          </a:effectRef>
+          <a:fontRef idx="minor">
+            <a:schemeClr val="lt1"/>
+          </a:fontRef>
+        </p:style>
+        <p:txBody>
+          <a:bodyPr rtlCol="0" anchor="ctr"/>
+          <a:lstStyle/>
+          <a:p>
+            <a:pPr algn="ctr"/>
+          </a:p>
+        </p:txBody>
+      </p:sp>
+      <p:sp>
+        <p:nvSpPr>
+          <p:cNvPr id="7" name="TextBox 6"/>
+          <p:cNvSpPr txBox="1"/>
+          <p:nvPr/>
+        </p:nvSpPr>
+        <p:spPr>
+          <a:xfrm>
+            <a:off x="576072" y="1344168"/>
+            <a:ext cx="3429000" cy="4846320"/>
+          </a:xfrm>
+          <a:prstGeom prst="rect">
+            <a:avLst/>
+          </a:prstGeom>
+          <a:noFill/>
+        </p:spPr>
+        <p:txBody>
+          <a:bodyPr wrap="square">
+            <a:spAutoFit/>
+          </a:bodyPr>
+          <a:lstStyle/>
+          <a:p>
+            <a:r>
+              <a:rPr sz="1400" b="1">
+                <a:solidFill>
+                  <a:srgbClr val="0D9488"/>
+                </a:solidFill>
+                <a:latin typeface="Calibri"/>
+              </a:rPr>
+              <a:t>MIME（Content-Type）</a:t>
+            </a:r>
+          </a:p>
+          <a:p>
+            <a:pPr>
+              <a:spcBef>
+                <a:spcPts val="400"/>
+              </a:spcBef>
+            </a:pPr>
+            <a:r>
+              <a:rPr sz="1200" b="0">
+                <a:solidFill>
+                  <a:srgbClr val="334155"/>
+                </a:solidFill>
+                <a:latin typeface="Calibri"/>
+              </a:rPr>
+              <a:t>给字节贴类型标签</a:t>
+            </a:r>
+          </a:p>
+          <a:p>
+            <a:pPr>
+              <a:spcBef>
+                <a:spcPts val="400"/>
+              </a:spcBef>
+            </a:pPr>
+            <a:r>
+              <a:rPr sz="1200" b="0">
+                <a:solidFill>
+                  <a:srgbClr val="334155"/>
+                </a:solidFill>
+                <a:latin typeface="Calibri"/>
+              </a:rPr>
+              <a:t/>
+            </a:r>
+          </a:p>
+          <a:p>
+            <a:pPr>
+              <a:spcBef>
+                <a:spcPts val="400"/>
+              </a:spcBef>
+            </a:pPr>
+            <a:r>
+              <a:rPr sz="1200" b="0">
+                <a:solidFill>
+                  <a:srgbClr val="334155"/>
+                </a:solidFill>
+                <a:latin typeface="Calibri"/>
+              </a:rPr>
+              <a:t>text/html → 当网页渲染</a:t>
+            </a:r>
+          </a:p>
+          <a:p>
+            <a:pPr>
+              <a:spcBef>
+                <a:spcPts val="400"/>
+              </a:spcBef>
+            </a:pPr>
+            <a:r>
+              <a:rPr sz="1200" b="0">
+                <a:solidFill>
+                  <a:srgbClr val="334155"/>
+                </a:solidFill>
+                <a:latin typeface="Calibri"/>
+              </a:rPr>
+              <a:t>text/plain → 当纯文本</a:t>
+            </a:r>
+          </a:p>
+          <a:p>
+            <a:pPr>
+              <a:spcBef>
+                <a:spcPts val="400"/>
+              </a:spcBef>
+            </a:pPr>
+            <a:r>
+              <a:rPr sz="1200" b="0">
+                <a:solidFill>
+                  <a:srgbClr val="334155"/>
+                </a:solidFill>
+                <a:latin typeface="Calibri"/>
+              </a:rPr>
+              <a:t>octet-stream → 常当附件下载</a:t>
+            </a:r>
+          </a:p>
+          <a:p>
+            <a:pPr>
+              <a:spcBef>
+                <a:spcPts val="400"/>
+              </a:spcBef>
+            </a:pPr>
+            <a:r>
+              <a:rPr sz="1200" b="0">
+                <a:solidFill>
+                  <a:srgbClr val="334155"/>
+                </a:solidFill>
+                <a:latin typeface="Calibri"/>
+              </a:rPr>
+              <a:t/>
+            </a:r>
+          </a:p>
+          <a:p>
+            <a:pPr>
+              <a:spcBef>
+                <a:spcPts val="400"/>
+              </a:spcBef>
+            </a:pPr>
+            <a:r>
+              <a:rPr sz="1200" b="0">
+                <a:solidFill>
+                  <a:srgbClr val="334155"/>
+                </a:solidFill>
+                <a:latin typeface="Calibri"/>
+              </a:rPr>
+              <a:t>实践</a:t>
+            </a:r>
+          </a:p>
+          <a:p>
+            <a:pPr>
+              <a:spcBef>
+                <a:spcPts val="400"/>
+              </a:spcBef>
+            </a:pPr>
+            <a:r>
+              <a:rPr sz="1200" b="0">
+                <a:solidFill>
+                  <a:srgbClr val="334155"/>
+                </a:solidFill>
+                <a:latin typeface="Calibri"/>
+              </a:rPr>
+              <a:t>· write/同步带 mime=text/html</a:t>
+            </a:r>
+          </a:p>
+          <a:p>
+            <a:pPr>
+              <a:spcBef>
+                <a:spcPts val="400"/>
+              </a:spcBef>
+            </a:pPr>
+            <a:r>
+              <a:rPr sz="1200" b="0">
+                <a:solidFill>
+                  <a:srgbClr val="334155"/>
+                </a:solidFill>
+                <a:latin typeface="Calibri"/>
+              </a:rPr>
+              <a:t>· REST 尽量返回正确类型</a:t>
+            </a:r>
+          </a:p>
+          <a:p>
+            <a:pPr>
+              <a:spcBef>
+                <a:spcPts val="400"/>
+              </a:spcBef>
+            </a:pPr>
+            <a:r>
+              <a:rPr sz="1200" b="0">
+                <a:solidFill>
+                  <a:srgbClr val="334155"/>
+                </a:solidFill>
+                <a:latin typeface="Calibri"/>
+              </a:rPr>
+              <a:t>· 若云侧一律 octet-stream：</a:t>
+            </a:r>
+          </a:p>
+          <a:p>
+            <a:pPr>
+              <a:spcBef>
+                <a:spcPts val="400"/>
+              </a:spcBef>
+            </a:pPr>
+            <a:r>
+              <a:rPr sz="1200" b="0">
+                <a:solidFill>
+                  <a:srgbClr val="334155"/>
+                </a:solidFill>
+                <a:latin typeface="Calibri"/>
+              </a:rPr>
+              <a:t>  端按 .html 自行当 HTML 处理</a:t>
+            </a:r>
+          </a:p>
+        </p:txBody>
+      </p:sp>
+      <p:sp>
+        <p:nvSpPr>
+          <p:cNvPr id="8" name="Rounded Rectangle 7"/>
+          <p:cNvSpPr/>
+          <p:nvPr/>
+        </p:nvSpPr>
+        <p:spPr>
+          <a:xfrm>
+            <a:off x="4251960" y="1234440"/>
+            <a:ext cx="3703320" cy="5029200"/>
+          </a:xfrm>
+          <a:prstGeom prst="roundRect">
+            <a:avLst>
+              <a:gd name="adj" fmla="val 8000"/>
+            </a:avLst>
+          </a:prstGeom>
+          <a:solidFill>
+            <a:srgbClr val="FFFFFF"/>
+          </a:solidFill>
+          <a:ln>
+            <a:solidFill>
+              <a:srgbClr val="E2E8F0"/>
+            </a:solidFill>
+          </a:ln>
+        </p:spPr>
+        <p:style>
+          <a:lnRef idx="1">
+            <a:schemeClr val="accent1"/>
+          </a:lnRef>
+          <a:fillRef idx="3">
+            <a:schemeClr val="accent1"/>
+          </a:fillRef>
+          <a:effectRef idx="2">
+            <a:schemeClr val="accent1"/>
+          </a:effectRef>
+          <a:fontRef idx="minor">
+            <a:schemeClr val="lt1"/>
+          </a:fontRef>
+        </p:style>
+        <p:txBody>
+          <a:bodyPr rtlCol="0" anchor="ctr"/>
+          <a:lstStyle/>
+          <a:p>
+            <a:pPr algn="ctr"/>
+          </a:p>
+        </p:txBody>
+      </p:sp>
+      <p:sp>
+        <p:nvSpPr>
+          <p:cNvPr id="9" name="TextBox 8"/>
+          <p:cNvSpPr txBox="1"/>
+          <p:nvPr/>
+        </p:nvSpPr>
+        <p:spPr>
+          <a:xfrm>
+            <a:off x="4416552" y="1344168"/>
+            <a:ext cx="3429000" cy="4846320"/>
+          </a:xfrm>
+          <a:prstGeom prst="rect">
+            <a:avLst/>
+          </a:prstGeom>
+          <a:noFill/>
+        </p:spPr>
+        <p:txBody>
+          <a:bodyPr wrap="square">
+            <a:spAutoFit/>
+          </a:bodyPr>
+          <a:lstStyle/>
+          <a:p>
+            <a:r>
+              <a:rPr sz="1400" b="1">
+                <a:solidFill>
+                  <a:srgbClr val="0D9488"/>
+                </a:solidFill>
+                <a:latin typeface="Calibri"/>
+              </a:rPr>
+              <a:t>iframe / WebView</a:t>
+            </a:r>
+          </a:p>
+          <a:p>
+            <a:pPr>
+              <a:spcBef>
+                <a:spcPts val="400"/>
+              </a:spcBef>
+            </a:pPr>
+            <a:r>
+              <a:rPr sz="1200" b="0">
+                <a:solidFill>
+                  <a:srgbClr val="334155"/>
+                </a:solidFill>
+                <a:latin typeface="Calibri"/>
+              </a:rPr>
+              <a:t>同一类能力，不同载体</a:t>
+            </a:r>
+          </a:p>
+          <a:p>
+            <a:pPr>
+              <a:spcBef>
+                <a:spcPts val="400"/>
+              </a:spcBef>
+            </a:pPr>
+            <a:r>
+              <a:rPr sz="1200" b="0">
+                <a:solidFill>
+                  <a:srgbClr val="334155"/>
+                </a:solidFill>
+                <a:latin typeface="Calibri"/>
+              </a:rPr>
+              <a:t/>
+            </a:r>
+          </a:p>
+          <a:p>
+            <a:pPr>
+              <a:spcBef>
+                <a:spcPts val="400"/>
+              </a:spcBef>
+            </a:pPr>
+            <a:r>
+              <a:rPr sz="1200" b="0">
+                <a:solidFill>
+                  <a:srgbClr val="334155"/>
+                </a:solidFill>
+                <a:latin typeface="Calibri"/>
+              </a:rPr>
+              <a:t>Web 控制台 → iframe</a:t>
+            </a:r>
+          </a:p>
+          <a:p>
+            <a:pPr>
+              <a:spcBef>
+                <a:spcPts val="400"/>
+              </a:spcBef>
+            </a:pPr>
+            <a:r>
+              <a:rPr sz="1200" b="0">
+                <a:solidFill>
+                  <a:srgbClr val="334155"/>
+                </a:solidFill>
+                <a:latin typeface="Calibri"/>
+              </a:rPr>
+              <a:t>（页中嵌小网页）</a:t>
+            </a:r>
+          </a:p>
+          <a:p>
+            <a:pPr>
+              <a:spcBef>
+                <a:spcPts val="400"/>
+              </a:spcBef>
+            </a:pPr>
+            <a:r>
+              <a:rPr sz="1200" b="0">
+                <a:solidFill>
+                  <a:srgbClr val="334155"/>
+                </a:solidFill>
+                <a:latin typeface="Calibri"/>
+              </a:rPr>
+              <a:t/>
+            </a:r>
+          </a:p>
+          <a:p>
+            <a:pPr>
+              <a:spcBef>
+                <a:spcPts val="400"/>
+              </a:spcBef>
+            </a:pPr>
+            <a:r>
+              <a:rPr sz="1200" b="0">
+                <a:solidFill>
+                  <a:srgbClr val="334155"/>
+                </a:solidFill>
+                <a:latin typeface="Calibri"/>
+              </a:rPr>
+              <a:t>原生 App → WebView</a:t>
+            </a:r>
+          </a:p>
+          <a:p>
+            <a:pPr>
+              <a:spcBef>
+                <a:spcPts val="400"/>
+              </a:spcBef>
+            </a:pPr>
+            <a:r>
+              <a:rPr sz="1200" b="0">
+                <a:solidFill>
+                  <a:srgbClr val="334155"/>
+                </a:solidFill>
+                <a:latin typeface="Calibri"/>
+              </a:rPr>
+              <a:t>（App 内迷你浏览器）</a:t>
+            </a:r>
+          </a:p>
+          <a:p>
+            <a:pPr>
+              <a:spcBef>
+                <a:spcPts val="400"/>
+              </a:spcBef>
+            </a:pPr>
+            <a:r>
+              <a:rPr sz="1200" b="0">
+                <a:solidFill>
+                  <a:srgbClr val="334155"/>
+                </a:solidFill>
+                <a:latin typeface="Calibri"/>
+              </a:rPr>
+              <a:t/>
+            </a:r>
+          </a:p>
+          <a:p>
+            <a:pPr>
+              <a:spcBef>
+                <a:spcPts val="400"/>
+              </a:spcBef>
+            </a:pPr>
+            <a:r>
+              <a:rPr sz="1200" b="0">
+                <a:solidFill>
+                  <a:srgbClr val="334155"/>
+                </a:solidFill>
+                <a:latin typeface="Calibri"/>
+              </a:rPr>
+              <a:t>喂法</a:t>
+            </a:r>
+          </a:p>
+          <a:p>
+            <a:pPr>
+              <a:spcBef>
+                <a:spcPts val="400"/>
+              </a:spcBef>
+            </a:pPr>
+            <a:r>
+              <a:rPr sz="1200" b="0">
+                <a:solidFill>
+                  <a:srgbClr val="334155"/>
+                </a:solidFill>
+                <a:latin typeface="Calibri"/>
+              </a:rPr>
+              <a:t>· srcdoc / loadData（下载文本）</a:t>
+            </a:r>
+          </a:p>
+          <a:p>
+            <a:pPr>
+              <a:spcBef>
+                <a:spcPts val="400"/>
+              </a:spcBef>
+            </a:pPr>
+            <a:r>
+              <a:rPr sz="1200" b="0">
+                <a:solidFill>
+                  <a:srgbClr val="334155"/>
+                </a:solidFill>
+                <a:latin typeface="Calibri"/>
+              </a:rPr>
+              <a:t>· src / loadUrl（可打开的 URL）</a:t>
+            </a:r>
+          </a:p>
+          <a:p>
+            <a:pPr>
+              <a:spcBef>
+                <a:spcPts val="400"/>
+              </a:spcBef>
+            </a:pPr>
+            <a:r>
+              <a:rPr sz="1200" b="0">
+                <a:solidFill>
+                  <a:srgbClr val="334155"/>
+                </a:solidFill>
+                <a:latin typeface="Calibri"/>
+              </a:rPr>
+              <a:t/>
+            </a:r>
+          </a:p>
+          <a:p>
+            <a:pPr>
+              <a:spcBef>
+                <a:spcPts val="400"/>
+              </a:spcBef>
+            </a:pPr>
+            <a:r>
+              <a:rPr sz="1200" b="0">
+                <a:solidFill>
+                  <a:srgbClr val="334155"/>
+                </a:solidFill>
+                <a:latin typeface="Calibri"/>
+              </a:rPr>
+              <a:t>没有它们：只能下载或看源码</a:t>
+            </a:r>
+          </a:p>
+        </p:txBody>
+      </p:sp>
+      <p:sp>
+        <p:nvSpPr>
+          <p:cNvPr id="10" name="Rounded Rectangle 9"/>
+          <p:cNvSpPr/>
+          <p:nvPr/>
+        </p:nvSpPr>
+        <p:spPr>
+          <a:xfrm>
+            <a:off x="8092440" y="1234440"/>
+            <a:ext cx="3657600" cy="5029200"/>
+          </a:xfrm>
+          <a:prstGeom prst="roundRect">
+            <a:avLst>
+              <a:gd name="adj" fmla="val 8000"/>
+            </a:avLst>
+          </a:prstGeom>
+          <a:solidFill>
+            <a:srgbClr val="FFFFFF"/>
+          </a:solidFill>
+          <a:ln>
+            <a:solidFill>
+              <a:srgbClr val="E2E8F0"/>
+            </a:solidFill>
+          </a:ln>
+        </p:spPr>
+        <p:style>
+          <a:lnRef idx="1">
+            <a:schemeClr val="accent1"/>
+          </a:lnRef>
+          <a:fillRef idx="3">
+            <a:schemeClr val="accent1"/>
+          </a:fillRef>
+          <a:effectRef idx="2">
+            <a:schemeClr val="accent1"/>
+          </a:effectRef>
+          <a:fontRef idx="minor">
+            <a:schemeClr val="lt1"/>
+          </a:fontRef>
+        </p:style>
+        <p:txBody>
+          <a:bodyPr rtlCol="0" anchor="ctr"/>
+          <a:lstStyle/>
+          <a:p>
+            <a:pPr algn="ctr"/>
+          </a:p>
+        </p:txBody>
+      </p:sp>
+      <p:sp>
+        <p:nvSpPr>
+          <p:cNvPr id="11" name="TextBox 10"/>
+          <p:cNvSpPr txBox="1"/>
+          <p:nvPr/>
+        </p:nvSpPr>
+        <p:spPr>
+          <a:xfrm>
+            <a:off x="8257032" y="1344168"/>
+            <a:ext cx="3383280" cy="4846320"/>
+          </a:xfrm>
+          <a:prstGeom prst="rect">
+            <a:avLst/>
+          </a:prstGeom>
+          <a:noFill/>
+        </p:spPr>
+        <p:txBody>
+          <a:bodyPr wrap="square">
+            <a:spAutoFit/>
+          </a:bodyPr>
+          <a:lstStyle/>
+          <a:p>
+            <a:r>
+              <a:rPr sz="1400" b="1">
+                <a:solidFill>
+                  <a:srgbClr val="0D9488"/>
+                </a:solidFill>
+                <a:latin typeface="Calibri"/>
+              </a:rPr>
+              <a:t>安全默认</a:t>
+            </a:r>
+          </a:p>
+          <a:p>
+            <a:pPr>
+              <a:spcBef>
+                <a:spcPts val="400"/>
+              </a:spcBef>
+            </a:pPr>
+            <a:r>
+              <a:rPr sz="1200" b="0">
+                <a:solidFill>
+                  <a:srgbClr val="334155"/>
+                </a:solidFill>
+                <a:latin typeface="Calibri"/>
+              </a:rPr>
+              <a:t>HTML 来自模型 = 不可信</a:t>
+            </a:r>
+          </a:p>
+          <a:p>
+            <a:pPr>
+              <a:spcBef>
+                <a:spcPts val="400"/>
+              </a:spcBef>
+            </a:pPr>
+            <a:r>
+              <a:rPr sz="1200" b="0">
+                <a:solidFill>
+                  <a:srgbClr val="334155"/>
+                </a:solidFill>
+                <a:latin typeface="Calibri"/>
+              </a:rPr>
+              <a:t/>
+            </a:r>
+          </a:p>
+          <a:p>
+            <a:pPr>
+              <a:spcBef>
+                <a:spcPts val="400"/>
+              </a:spcBef>
+            </a:pPr>
+            <a:r>
+              <a:rPr sz="1200" b="0">
+                <a:solidFill>
+                  <a:srgbClr val="334155"/>
+                </a:solidFill>
+                <a:latin typeface="Calibri"/>
+              </a:rPr>
+              <a:t>sandbox=allow-scripts</a:t>
+            </a:r>
+          </a:p>
+          <a:p>
+            <a:pPr>
+              <a:spcBef>
+                <a:spcPts val="400"/>
+              </a:spcBef>
+            </a:pPr>
+            <a:r>
+              <a:rPr sz="1200" b="0">
+                <a:solidFill>
+                  <a:srgbClr val="334155"/>
+                </a:solidFill>
+                <a:latin typeface="Calibri"/>
+              </a:rPr>
+              <a:t>默认不加 allow-same-origin</a:t>
+            </a:r>
+          </a:p>
+          <a:p>
+            <a:pPr>
+              <a:spcBef>
+                <a:spcPts val="400"/>
+              </a:spcBef>
+            </a:pPr>
+            <a:r>
+              <a:rPr sz="1200" b="0">
+                <a:solidFill>
+                  <a:srgbClr val="334155"/>
+                </a:solidFill>
+                <a:latin typeface="Calibri"/>
+              </a:rPr>
+              <a:t/>
+            </a:r>
+          </a:p>
+          <a:p>
+            <a:pPr>
+              <a:spcBef>
+                <a:spcPts val="400"/>
+              </a:spcBef>
+            </a:pPr>
+            <a:r>
+              <a:rPr sz="1200" b="0">
+                <a:solidFill>
+                  <a:srgbClr val="334155"/>
+                </a:solidFill>
+                <a:latin typeface="Calibri"/>
+              </a:rPr>
+              <a:t>限制随意外链 / 白名单 CDN</a:t>
+            </a:r>
+          </a:p>
+          <a:p>
+            <a:pPr>
+              <a:spcBef>
+                <a:spcPts val="400"/>
+              </a:spcBef>
+            </a:pPr>
+            <a:r>
+              <a:rPr sz="1200" b="0">
+                <a:solidFill>
+                  <a:srgbClr val="334155"/>
+                </a:solidFill>
+                <a:latin typeface="Calibri"/>
+              </a:rPr>
+              <a:t>预览域与主站 cookie 隔离</a:t>
+            </a:r>
+          </a:p>
+          <a:p>
+            <a:pPr>
+              <a:spcBef>
+                <a:spcPts val="400"/>
+              </a:spcBef>
+            </a:pPr>
+            <a:r>
+              <a:rPr sz="1200" b="0">
+                <a:solidFill>
+                  <a:srgbClr val="334155"/>
+                </a:solidFill>
+                <a:latin typeface="Calibri"/>
+              </a:rPr>
+              <a:t/>
+            </a:r>
+          </a:p>
+          <a:p>
+            <a:pPr>
+              <a:spcBef>
+                <a:spcPts val="400"/>
+              </a:spcBef>
+            </a:pPr>
+            <a:r>
+              <a:rPr sz="1200" b="0">
+                <a:solidFill>
+                  <a:srgbClr val="334155"/>
+                </a:solidFill>
+                <a:latin typeface="Calibri"/>
+              </a:rPr>
+              <a:t>体积上限，敏感场景短 TTL</a:t>
+            </a:r>
+          </a:p>
+          <a:p>
+            <a:pPr>
+              <a:spcBef>
+                <a:spcPts val="400"/>
+              </a:spcBef>
+            </a:pPr>
+            <a:r>
+              <a:rPr sz="1200" b="0">
+                <a:solidFill>
+                  <a:srgbClr val="334155"/>
+                </a:solidFill>
+                <a:latin typeface="Calibri"/>
+              </a:rPr>
+              <a:t>需要时用 postMessage 桥</a:t>
+            </a:r>
+          </a:p>
+          <a:p>
+            <a:pPr>
+              <a:spcBef>
+                <a:spcPts val="400"/>
+              </a:spcBef>
+            </a:pPr>
+            <a:r>
+              <a:rPr sz="1200" b="0">
+                <a:solidFill>
+                  <a:srgbClr val="334155"/>
+                </a:solidFill>
+                <a:latin typeface="Calibri"/>
+              </a:rPr>
+              <a:t>而不是放开同源</a:t>
             </a:r>
           </a:p>
         </p:txBody>
@@ -4506,13 +8612,13 @@
         <p:spPr>
           <a:xfrm>
             <a:off x="0" y="0"/>
-            <a:ext cx="12191695" cy="1005840"/>
+            <a:ext cx="12191695" cy="6858000"/>
           </a:xfrm>
           <a:prstGeom prst="rect">
             <a:avLst/>
           </a:prstGeom>
           <a:solidFill>
-            <a:srgbClr val="0070C0"/>
+            <a:srgbClr val="F8FAFC"/>
           </a:solidFill>
           <a:ln>
             <a:noFill/>
@@ -4533,19 +8639,10 @@
           </a:fontRef>
         </p:style>
         <p:txBody>
-          <a:bodyPr rtlCol="0" anchor="ctr" lIns="548640"/>
-          <a:lstStyle/>
-          <a:p>
-            <a:pPr algn="l">
-              <a:defRPr sz="2600" b="1">
-                <a:solidFill>
-                  <a:srgbClr val="FFFFFF"/>
-                </a:solidFill>
-              </a:defRPr>
-            </a:pPr>
-            <a:r>
-              <a:t>方案 A 示例：Web 控制台 iframe 渲染</a:t>
-            </a:r>
+          <a:bodyPr rtlCol="0" anchor="ctr"/>
+          <a:lstStyle/>
+          <a:p>
+            <a:pPr algn="ctr"/>
           </a:p>
         </p:txBody>
       </p:sp>
@@ -4557,19 +8654,17 @@
         </p:nvSpPr>
         <p:spPr>
           <a:xfrm>
-            <a:off x="640080" y="1280160"/>
-            <a:ext cx="10881360" cy="4572000"/>
+            <a:off x="0" y="0"/>
+            <a:ext cx="12191695" cy="960120"/>
           </a:xfrm>
           <a:prstGeom prst="rect">
             <a:avLst/>
           </a:prstGeom>
           <a:solidFill>
-            <a:srgbClr val="F5F7FA"/>
+            <a:srgbClr val="0F172A"/>
           </a:solidFill>
           <a:ln>
-            <a:solidFill>
-              <a:srgbClr val="C8C8C8"/>
-            </a:solidFill>
+            <a:noFill/>
           </a:ln>
         </p:spPr>
         <p:style>
@@ -4587,22 +8682,215 @@
           </a:fontRef>
         </p:style>
         <p:txBody>
-          <a:bodyPr rtlCol="0" anchor="ctr" wrap="none"/>
-          <a:lstStyle/>
-          <a:p>
-            <a:pPr algn="ctr">
+          <a:bodyPr rtlCol="0" anchor="ctr"/>
+          <a:lstStyle/>
+          <a:p>
+            <a:pPr algn="ctr"/>
+          </a:p>
+        </p:txBody>
+      </p:sp>
+      <p:sp>
+        <p:nvSpPr>
+          <p:cNvPr id="4" name="Rectangle 3"/>
+          <p:cNvSpPr/>
+          <p:nvPr/>
+        </p:nvSpPr>
+        <p:spPr>
+          <a:xfrm>
+            <a:off x="0" y="960120"/>
+            <a:ext cx="12191695" cy="54864"/>
+          </a:xfrm>
+          <a:prstGeom prst="rect">
+            <a:avLst/>
+          </a:prstGeom>
+          <a:solidFill>
+            <a:srgbClr val="0D9488"/>
+          </a:solidFill>
+          <a:ln>
+            <a:noFill/>
+          </a:ln>
+        </p:spPr>
+        <p:style>
+          <a:lnRef idx="1">
+            <a:schemeClr val="accent1"/>
+          </a:lnRef>
+          <a:fillRef idx="3">
+            <a:schemeClr val="accent1"/>
+          </a:fillRef>
+          <a:effectRef idx="2">
+            <a:schemeClr val="accent1"/>
+          </a:effectRef>
+          <a:fontRef idx="minor">
+            <a:schemeClr val="lt1"/>
+          </a:fontRef>
+        </p:style>
+        <p:txBody>
+          <a:bodyPr rtlCol="0" anchor="ctr"/>
+          <a:lstStyle/>
+          <a:p>
+            <a:pPr algn="ctr"/>
+          </a:p>
+        </p:txBody>
+      </p:sp>
+      <p:sp>
+        <p:nvSpPr>
+          <p:cNvPr id="5" name="TextBox 4"/>
+          <p:cNvSpPr txBox="1"/>
+          <p:nvPr/>
+        </p:nvSpPr>
+        <p:spPr>
+          <a:xfrm>
+            <a:off x="502920" y="201168"/>
+            <a:ext cx="11155680" cy="640080"/>
+          </a:xfrm>
+          <a:prstGeom prst="rect">
+            <a:avLst/>
+          </a:prstGeom>
+          <a:noFill/>
+        </p:spPr>
+        <p:txBody>
+          <a:bodyPr wrap="square">
+            <a:spAutoFit/>
+          </a:bodyPr>
+          <a:lstStyle/>
+          <a:p>
+            <a:r>
+              <a:rPr sz="2400" b="1">
+                <a:solidFill>
+                  <a:srgbClr val="FFFFFF"/>
+                </a:solidFill>
+                <a:latin typeface="Calibri"/>
+              </a:rPr>
+              <a:t>07  建议契约与实现示例</a:t>
+            </a:r>
+          </a:p>
+          <a:p>
+            <a:r>
+              <a:rPr sz="1200" b="0">
+                <a:solidFill>
+                  <a:srgbClr val="94A3B8"/>
+                </a:solidFill>
+                <a:latin typeface="Calibri"/>
+              </a:rPr>
+              <a:t>工具层给足元数据；端侧只做「识别 → 下载 → 沙箱渲染」</a:t>
+            </a:r>
+          </a:p>
+        </p:txBody>
+      </p:sp>
+      <p:sp>
+        <p:nvSpPr>
+          <p:cNvPr id="6" name="TextBox 5"/>
+          <p:cNvSpPr txBox="1"/>
+          <p:nvPr/>
+        </p:nvSpPr>
+        <p:spPr>
+          <a:xfrm>
+            <a:off x="502920" y="1143000"/>
+            <a:ext cx="11155680" cy="411480"/>
+          </a:xfrm>
+          <a:prstGeom prst="rect">
+            <a:avLst/>
+          </a:prstGeom>
+          <a:noFill/>
+        </p:spPr>
+        <p:txBody>
+          <a:bodyPr wrap="square">
+            <a:spAutoFit/>
+          </a:bodyPr>
+          <a:lstStyle/>
+          <a:p>
+            <a:r>
+              <a:rPr sz="1300" b="1">
+                <a:solidFill>
+                  <a:srgbClr val="0D9488"/>
+                </a:solidFill>
+                <a:latin typeface="Calibri"/>
+              </a:rPr>
+              <a:t>write / 同步完成后的建议返回（示意）</a:t>
+            </a:r>
+          </a:p>
+        </p:txBody>
+      </p:sp>
+      <p:sp>
+        <p:nvSpPr>
+          <p:cNvPr id="7" name="Rounded Rectangle 6"/>
+          <p:cNvSpPr/>
+          <p:nvPr/>
+        </p:nvSpPr>
+        <p:spPr>
+          <a:xfrm>
+            <a:off x="411480" y="1554480"/>
+            <a:ext cx="5577840" cy="2148840"/>
+          </a:xfrm>
+          <a:prstGeom prst="roundRect">
+            <a:avLst>
+              <a:gd name="adj" fmla="val 4000"/>
+            </a:avLst>
+          </a:prstGeom>
+          <a:solidFill>
+            <a:srgbClr val="0F172A"/>
+          </a:solidFill>
+          <a:ln>
+            <a:noFill/>
+          </a:ln>
+        </p:spPr>
+        <p:style>
+          <a:lnRef idx="1">
+            <a:schemeClr val="accent1"/>
+          </a:lnRef>
+          <a:fillRef idx="3">
+            <a:schemeClr val="accent1"/>
+          </a:fillRef>
+          <a:effectRef idx="2">
+            <a:schemeClr val="accent1"/>
+          </a:effectRef>
+          <a:fontRef idx="minor">
+            <a:schemeClr val="lt1"/>
+          </a:fontRef>
+        </p:style>
+        <p:txBody>
+          <a:bodyPr rtlCol="0" anchor="ctr"/>
+          <a:lstStyle/>
+          <a:p>
+            <a:pPr algn="ctr"/>
+          </a:p>
+        </p:txBody>
+      </p:sp>
+      <p:sp>
+        <p:nvSpPr>
+          <p:cNvPr id="8" name="TextBox 7"/>
+          <p:cNvSpPr txBox="1"/>
+          <p:nvPr/>
+        </p:nvSpPr>
+        <p:spPr>
+          <a:xfrm>
+            <a:off x="612648" y="1691640"/>
+            <a:ext cx="5257800" cy="1920240"/>
+          </a:xfrm>
+          <a:prstGeom prst="rect">
+            <a:avLst/>
+          </a:prstGeom>
+          <a:noFill/>
+        </p:spPr>
+        <p:txBody>
+          <a:bodyPr wrap="square">
+            <a:spAutoFit/>
+          </a:bodyPr>
+          <a:lstStyle/>
+          <a:p>
+            <a:pPr>
               <a:spcAft>
                 <a:spcPts val="100"/>
               </a:spcAft>
-              <a:defRPr sz="1300">
-                <a:solidFill>
-                  <a:srgbClr val="323232"/>
+            </a:pPr>
+            <a:r>
+              <a:rPr sz="1100" b="0">
+                <a:solidFill>
+                  <a:srgbClr val="E2E8F0"/>
                 </a:solidFill>
                 <a:latin typeface="Consolas"/>
-              </a:defRPr>
-            </a:pPr>
-            <a:r>
-              <a:t>async function previewHtml(fileId) {</a:t>
+              </a:rPr>
+              <a:t>{</a:t>
             </a:r>
           </a:p>
           <a:p>
@@ -4610,15 +8898,15 @@
               <a:spcAft>
                 <a:spcPts val="100"/>
               </a:spcAft>
-              <a:defRPr sz="1300">
-                <a:solidFill>
-                  <a:srgbClr val="323232"/>
+            </a:pPr>
+            <a:r>
+              <a:rPr sz="1100" b="0">
+                <a:solidFill>
+                  <a:srgbClr val="E2E8F0"/>
                 </a:solidFill>
                 <a:latin typeface="Consolas"/>
-              </a:defRPr>
-            </a:pPr>
-            <a:r>
-              <a:t>  const res = await fetch(`/koodrive/files/${fileId}/content`);</a:t>
+              </a:rPr>
+              <a:t>  "path": "artifacts/demo/index.html",</a:t>
             </a:r>
           </a:p>
           <a:p>
@@ -4626,15 +8914,15 @@
               <a:spcAft>
                 <a:spcPts val="100"/>
               </a:spcAft>
-              <a:defRPr sz="1300">
-                <a:solidFill>
-                  <a:srgbClr val="323232"/>
+            </a:pPr>
+            <a:r>
+              <a:rPr sz="1100" b="0">
+                <a:solidFill>
+                  <a:srgbClr val="E2E8F0"/>
                 </a:solidFill>
                 <a:latin typeface="Consolas"/>
-              </a:defRPr>
-            </a:pPr>
-            <a:r>
-              <a:t>  const html = await res.text();</a:t>
+              </a:rPr>
+              <a:t>  "cloud_file_id": "f_xxx",</a:t>
             </a:r>
           </a:p>
           <a:p>
@@ -4642,15 +8930,15 @@
               <a:spcAft>
                 <a:spcPts val="100"/>
               </a:spcAft>
-              <a:defRPr sz="1300">
-                <a:solidFill>
-                  <a:srgbClr val="323232"/>
+            </a:pPr>
+            <a:r>
+              <a:rPr sz="1100" b="0">
+                <a:solidFill>
+                  <a:srgbClr val="E2E8F0"/>
                 </a:solidFill>
                 <a:latin typeface="Consolas"/>
-              </a:defRPr>
-            </a:pPr>
-            <a:r>
-              <a:t>  const iframe = document.createElement('iframe');</a:t>
+              </a:rPr>
+              <a:t>  "mime": "text/html",</a:t>
             </a:r>
           </a:p>
           <a:p>
@@ -4658,15 +8946,15 @@
               <a:spcAft>
                 <a:spcPts val="100"/>
               </a:spcAft>
-              <a:defRPr sz="1300">
-                <a:solidFill>
-                  <a:srgbClr val="323232"/>
+            </a:pPr>
+            <a:r>
+              <a:rPr sz="1100" b="0">
+                <a:solidFill>
+                  <a:srgbClr val="E2E8F0"/>
                 </a:solidFill>
                 <a:latin typeface="Consolas"/>
-              </a:defRPr>
-            </a:pPr>
-            <a:r>
-              <a:t>  iframe.sandbox = 'allow-scripts';</a:t>
+              </a:rPr>
+              <a:t>  "sync_status": "synced",</a:t>
             </a:r>
           </a:p>
           <a:p>
@@ -4674,15 +8962,15 @@
               <a:spcAft>
                 <a:spcPts val="100"/>
               </a:spcAft>
-              <a:defRPr sz="1300">
-                <a:solidFill>
-                  <a:srgbClr val="323232"/>
+            </a:pPr>
+            <a:r>
+              <a:rPr sz="1100" b="0">
+                <a:solidFill>
+                  <a:srgbClr val="E2E8F0"/>
                 </a:solidFill>
                 <a:latin typeface="Consolas"/>
-              </a:defRPr>
-            </a:pPr>
-            <a:r>
-              <a:t>  iframe.srcdoc = html;</a:t>
+              </a:rPr>
+              <a:t>  "preview": { "kind": "html", "entry": true }</a:t>
             </a:r>
           </a:p>
           <a:p>
@@ -4690,31 +8978,99 @@
               <a:spcAft>
                 <a:spcPts val="100"/>
               </a:spcAft>
-              <a:defRPr sz="1300">
-                <a:solidFill>
-                  <a:srgbClr val="323232"/>
+            </a:pPr>
+            <a:r>
+              <a:rPr sz="1100" b="0">
+                <a:solidFill>
+                  <a:srgbClr val="E2E8F0"/>
                 </a:solidFill>
                 <a:latin typeface="Consolas"/>
-              </a:defRPr>
-            </a:pPr>
-            <a:r>
-              <a:t>  iframe.style.width = '100%';</a:t>
-            </a:r>
-          </a:p>
+              </a:rPr>
+              <a:t>}</a:t>
+            </a:r>
+          </a:p>
+        </p:txBody>
+      </p:sp>
+      <p:sp>
+        <p:nvSpPr>
+          <p:cNvPr id="9" name="Rounded Rectangle 8"/>
+          <p:cNvSpPr/>
+          <p:nvPr/>
+        </p:nvSpPr>
+        <p:spPr>
+          <a:xfrm>
+            <a:off x="6172200" y="1554480"/>
+            <a:ext cx="5577840" cy="2148840"/>
+          </a:xfrm>
+          <a:prstGeom prst="roundRect">
+            <a:avLst>
+              <a:gd name="adj" fmla="val 4000"/>
+            </a:avLst>
+          </a:prstGeom>
+          <a:solidFill>
+            <a:srgbClr val="0F172A"/>
+          </a:solidFill>
+          <a:ln>
+            <a:noFill/>
+          </a:ln>
+        </p:spPr>
+        <p:style>
+          <a:lnRef idx="1">
+            <a:schemeClr val="accent1"/>
+          </a:lnRef>
+          <a:fillRef idx="3">
+            <a:schemeClr val="accent1"/>
+          </a:fillRef>
+          <a:effectRef idx="2">
+            <a:schemeClr val="accent1"/>
+          </a:effectRef>
+          <a:fontRef idx="minor">
+            <a:schemeClr val="lt1"/>
+          </a:fontRef>
+        </p:style>
+        <p:txBody>
+          <a:bodyPr rtlCol="0" anchor="ctr"/>
+          <a:lstStyle/>
+          <a:p>
+            <a:pPr algn="ctr"/>
+          </a:p>
+        </p:txBody>
+      </p:sp>
+      <p:sp>
+        <p:nvSpPr>
+          <p:cNvPr id="10" name="TextBox 9"/>
+          <p:cNvSpPr txBox="1"/>
+          <p:nvPr/>
+        </p:nvSpPr>
+        <p:spPr>
+          <a:xfrm>
+            <a:off x="6373368" y="1691640"/>
+            <a:ext cx="5257800" cy="1920240"/>
+          </a:xfrm>
+          <a:prstGeom prst="rect">
+            <a:avLst/>
+          </a:prstGeom>
+          <a:noFill/>
+        </p:spPr>
+        <p:txBody>
+          <a:bodyPr wrap="square">
+            <a:spAutoFit/>
+          </a:bodyPr>
+          <a:lstStyle/>
           <a:p>
             <a:pPr>
               <a:spcAft>
                 <a:spcPts val="100"/>
               </a:spcAft>
-              <a:defRPr sz="1300">
-                <a:solidFill>
-                  <a:srgbClr val="323232"/>
+            </a:pPr>
+            <a:r>
+              <a:rPr sz="1100" b="0">
+                <a:solidFill>
+                  <a:srgbClr val="E2E8F0"/>
                 </a:solidFill>
                 <a:latin typeface="Consolas"/>
-              </a:defRPr>
-            </a:pPr>
-            <a:r>
-              <a:t>  iframe.style.height = '400px';</a:t>
+              </a:rPr>
+              <a:t>// 路径 A：下载后一次渲染</a:t>
             </a:r>
           </a:p>
           <a:p>
@@ -4722,15 +9078,15 @@
               <a:spcAft>
                 <a:spcPts val="100"/>
               </a:spcAft>
-              <a:defRPr sz="1300">
-                <a:solidFill>
-                  <a:srgbClr val="323232"/>
+            </a:pPr>
+            <a:r>
+              <a:rPr sz="1100" b="0">
+                <a:solidFill>
+                  <a:srgbClr val="E2E8F0"/>
                 </a:solidFill>
                 <a:latin typeface="Consolas"/>
-              </a:defRPr>
-            </a:pPr>
-            <a:r>
-              <a:t>  document.querySelector('#preview-slot').appendChild(iframe);</a:t>
+              </a:rPr>
+              <a:t>const html = await downloadText(fileId);</a:t>
             </a:r>
           </a:p>
           <a:p>
@@ -4738,15 +9094,15 @@
               <a:spcAft>
                 <a:spcPts val="100"/>
               </a:spcAft>
-              <a:defRPr sz="1300">
-                <a:solidFill>
-                  <a:srgbClr val="323232"/>
+            </a:pPr>
+            <a:r>
+              <a:rPr sz="1100" b="0">
+                <a:solidFill>
+                  <a:srgbClr val="E2E8F0"/>
                 </a:solidFill>
                 <a:latin typeface="Consolas"/>
-              </a:defRPr>
-            </a:pPr>
-            <a:r>
-              <a:t>}</a:t>
+              </a:rPr>
+              <a:t>iframe.sandbox = "allow-scripts";</a:t>
             </a:r>
           </a:p>
           <a:p>
@@ -4754,42 +9110,93 @@
               <a:spcAft>
                 <a:spcPts val="100"/>
               </a:spcAft>
-              <a:defRPr sz="1300">
-                <a:solidFill>
-                  <a:srgbClr val="323232"/>
+            </a:pPr>
+            <a:r>
+              <a:rPr sz="1100" b="0">
+                <a:solidFill>
+                  <a:srgbClr val="E2E8F0"/>
                 </a:solidFill>
                 <a:latin typeface="Consolas"/>
-              </a:defRPr>
-            </a:pPr>
+              </a:rPr>
+              <a:t>iframe.srcdoc = html;</a:t>
+            </a:r>
           </a:p>
           <a:p>
             <a:pPr>
               <a:spcAft>
                 <a:spcPts val="100"/>
               </a:spcAft>
-              <a:defRPr sz="1300">
-                <a:solidFill>
-                  <a:srgbClr val="323232"/>
+            </a:pPr>
+            <a:r>
+              <a:rPr sz="1100" b="0">
+                <a:solidFill>
+                  <a:srgbClr val="E2E8F0"/>
                 </a:solidFill>
                 <a:latin typeface="Consolas"/>
-              </a:defRPr>
-            </a:pPr>
-            <a:r>
-              <a:t>// 触发：Agent write 成功后，向端发送 fileId + mime='text/html'</a:t>
-            </a:r>
-          </a:p>
-        </p:txBody>
-      </p:sp>
-      <p:sp>
-        <p:nvSpPr>
-          <p:cNvPr id="4" name="TextBox 3"/>
+              </a:rPr>
+              <a:t/>
+            </a:r>
+          </a:p>
+          <a:p>
+            <a:pPr>
+              <a:spcAft>
+                <a:spcPts val="100"/>
+              </a:spcAft>
+            </a:pPr>
+            <a:r>
+              <a:rPr sz="1100" b="0">
+                <a:solidFill>
+                  <a:srgbClr val="E2E8F0"/>
+                </a:solidFill>
+                <a:latin typeface="Consolas"/>
+              </a:rPr>
+              <a:t>// 路径 B：流式 buffer（节流）</a:t>
+            </a:r>
+          </a:p>
+          <a:p>
+            <a:pPr>
+              <a:spcAft>
+                <a:spcPts val="100"/>
+              </a:spcAft>
+            </a:pPr>
+            <a:r>
+              <a:rPr sz="1100" b="0">
+                <a:solidFill>
+                  <a:srgbClr val="E2E8F0"/>
+                </a:solidFill>
+                <a:latin typeface="Consolas"/>
+              </a:rPr>
+              <a:t>onDelta(t =&gt; { buf += t; schedulePaint(); })</a:t>
+            </a:r>
+          </a:p>
+          <a:p>
+            <a:pPr>
+              <a:spcAft>
+                <a:spcPts val="100"/>
+              </a:spcAft>
+            </a:pPr>
+            <a:r>
+              <a:rPr sz="1100" b="0">
+                <a:solidFill>
+                  <a:srgbClr val="E2E8F0"/>
+                </a:solidFill>
+                <a:latin typeface="Consolas"/>
+              </a:rPr>
+              <a:t>onDone(() =&gt; { iframe.srcdoc = buf; })</a:t>
+            </a:r>
+          </a:p>
+        </p:txBody>
+      </p:sp>
+      <p:sp>
+        <p:nvSpPr>
+          <p:cNvPr id="11" name="TextBox 10"/>
           <p:cNvSpPr txBox="1"/>
           <p:nvPr/>
         </p:nvSpPr>
         <p:spPr>
           <a:xfrm>
-            <a:off x="640080" y="5943600"/>
-            <a:ext cx="10881360" cy="548640"/>
+            <a:off x="502920" y="3886200"/>
+            <a:ext cx="11155680" cy="2560320"/>
           </a:xfrm>
           <a:prstGeom prst="rect">
             <a:avLst/>
@@ -4797,20 +9204,83 @@
           <a:noFill/>
         </p:spPr>
         <p:txBody>
-          <a:bodyPr wrap="none">
+          <a:bodyPr wrap="square">
             <a:spAutoFit/>
           </a:bodyPr>
           <a:lstStyle/>
           <a:p>
-            <a:pPr>
-              <a:defRPr sz="1400">
-                <a:solidFill>
-                  <a:srgbClr val="646464"/>
-                </a:solidFill>
-              </a:defRPr>
-            </a:pPr>
-            <a:r>
-              <a:t>要点：allow-scripts 允许交互，但默认不要 allow-same-origin。</a:t>
+            <a:r>
+              <a:rPr sz="1300" b="1">
+                <a:solidFill>
+                  <a:srgbClr val="0D9488"/>
+                </a:solidFill>
+                <a:latin typeface="Calibri"/>
+              </a:rPr>
+              <a:t>端侧最小产品行为</a:t>
+            </a:r>
+          </a:p>
+          <a:p>
+            <a:pPr>
+              <a:spcBef>
+                <a:spcPts val="600"/>
+              </a:spcBef>
+            </a:pPr>
+            <a:r>
+              <a:rPr sz="1300" b="0">
+                <a:solidFill>
+                  <a:srgbClr val="334155"/>
+                </a:solidFill>
+                <a:latin typeface="Calibri"/>
+              </a:rPr>
+              <a:t>1. 识别 preview.kind===html 或 path 以 .html/.htm 结尾 → 展示「预览卡片」，而不是纯附件行</a:t>
+            </a:r>
+          </a:p>
+          <a:p>
+            <a:pPr>
+              <a:spcBef>
+                <a:spcPts val="600"/>
+              </a:spcBef>
+            </a:pPr>
+            <a:r>
+              <a:rPr sz="1300" b="0">
+                <a:solidFill>
+                  <a:srgbClr val="334155"/>
+                </a:solidFill>
+                <a:latin typeface="Calibri"/>
+              </a:rPr>
+              <a:t>2. sync_status!==synced 时显示加载态；就绪后再 REST 拉正文</a:t>
+            </a:r>
+          </a:p>
+          <a:p>
+            <a:pPr>
+              <a:spcBef>
+                <a:spcPts val="600"/>
+              </a:spcBef>
+            </a:pPr>
+            <a:r>
+              <a:rPr sz="1300" b="0">
+                <a:solidFill>
+                  <a:srgbClr val="334155"/>
+                </a:solidFill>
+                <a:latin typeface="Calibri"/>
+              </a:rPr>
+              <a:t>3. Web 用 sandbox iframe；原生用 WebView loadData/loadUrl；失败则降级「下载 / 外开浏览器」</a:t>
+            </a:r>
+          </a:p>
+          <a:p>
+            <a:pPr>
+              <a:spcBef>
+                <a:spcPts val="600"/>
+              </a:spcBef>
+            </a:pPr>
+            <a:r>
+              <a:rPr sz="1300" b="0">
+                <a:solidFill>
+                  <a:srgbClr val="334155"/>
+                </a:solidFill>
+                <a:latin typeface="Calibri"/>
+              </a:rPr>
+              <a:t>4.（可选）show_widget({html|html_path|file_id})：对模型暴露「请展示」语义，内部仍走 write+同步</a:t>
             </a:r>
           </a:p>
         </p:txBody>
@@ -4842,13 +9312,13 @@
         <p:spPr>
           <a:xfrm>
             <a:off x="0" y="0"/>
-            <a:ext cx="12191695" cy="1005840"/>
+            <a:ext cx="12191695" cy="6858000"/>
           </a:xfrm>
           <a:prstGeom prst="rect">
             <a:avLst/>
           </a:prstGeom>
           <a:solidFill>
-            <a:srgbClr val="0070C0"/>
+            <a:srgbClr val="F8FAFC"/>
           </a:solidFill>
           <a:ln>
             <a:noFill/>
@@ -4869,19 +9339,10 @@
           </a:fontRef>
         </p:style>
         <p:txBody>
-          <a:bodyPr rtlCol="0" anchor="ctr" lIns="548640"/>
-          <a:lstStyle/>
-          <a:p>
-            <a:pPr algn="l">
-              <a:defRPr sz="2600" b="1">
-                <a:solidFill>
-                  <a:srgbClr val="FFFFFF"/>
-                </a:solidFill>
-              </a:defRPr>
-            </a:pPr>
-            <a:r>
-              <a:t>方案 B 示例：流式增量预览</a:t>
-            </a:r>
+          <a:bodyPr rtlCol="0" anchor="ctr"/>
+          <a:lstStyle/>
+          <a:p>
+            <a:pPr algn="ctr"/>
           </a:p>
         </p:txBody>
       </p:sp>
@@ -4893,19 +9354,17 @@
         </p:nvSpPr>
         <p:spPr>
           <a:xfrm>
-            <a:off x="640080" y="1280160"/>
-            <a:ext cx="10881360" cy="4572000"/>
+            <a:off x="0" y="0"/>
+            <a:ext cx="12191695" cy="960120"/>
           </a:xfrm>
           <a:prstGeom prst="rect">
             <a:avLst/>
           </a:prstGeom>
           <a:solidFill>
-            <a:srgbClr val="F5F7FA"/>
+            <a:srgbClr val="0F172A"/>
           </a:solidFill>
           <a:ln>
-            <a:solidFill>
-              <a:srgbClr val="C8C8C8"/>
-            </a:solidFill>
+            <a:noFill/>
           </a:ln>
         </p:spPr>
         <p:style>
@@ -4923,230 +9382,877 @@
           </a:fontRef>
         </p:style>
         <p:txBody>
-          <a:bodyPr rtlCol="0" anchor="ctr" wrap="none"/>
-          <a:lstStyle/>
-          <a:p>
-            <a:pPr algn="ctr">
-              <a:spcAft>
-                <a:spcPts val="100"/>
-              </a:spcAft>
-              <a:defRPr sz="1300">
-                <a:solidFill>
-                  <a:srgbClr val="323232"/>
-                </a:solidFill>
-                <a:latin typeface="Consolas"/>
-              </a:defRPr>
-            </a:pPr>
-            <a:r>
-              <a:t>let buffer = '';</a:t>
-            </a:r>
-          </a:p>
-          <a:p>
-            <a:pPr>
-              <a:spcAft>
-                <a:spcPts val="100"/>
-              </a:spcAft>
-              <a:defRPr sz="1300">
-                <a:solidFill>
-                  <a:srgbClr val="323232"/>
-                </a:solidFill>
-                <a:latin typeface="Consolas"/>
-              </a:defRPr>
-            </a:pPr>
-            <a:r>
-              <a:t>const iframe = document.createElement('iframe');</a:t>
-            </a:r>
-          </a:p>
-          <a:p>
-            <a:pPr>
-              <a:spcAft>
-                <a:spcPts val="100"/>
-              </a:spcAft>
-              <a:defRPr sz="1300">
-                <a:solidFill>
-                  <a:srgbClr val="323232"/>
-                </a:solidFill>
-                <a:latin typeface="Consolas"/>
-              </a:defRPr>
-            </a:pPr>
-            <a:r>
-              <a:t>iframe.sandbox = 'allow-scripts';</a:t>
-            </a:r>
-          </a:p>
-          <a:p>
-            <a:pPr>
-              <a:spcAft>
-                <a:spcPts val="100"/>
-              </a:spcAft>
-              <a:defRPr sz="1300">
-                <a:solidFill>
-                  <a:srgbClr val="323232"/>
-                </a:solidFill>
-                <a:latin typeface="Consolas"/>
-              </a:defRPr>
-            </a:pPr>
-            <a:r>
-              <a:t>document.body.appendChild(iframe);</a:t>
-            </a:r>
-          </a:p>
-          <a:p>
-            <a:pPr>
-              <a:spcAft>
-                <a:spcPts val="100"/>
-              </a:spcAft>
-              <a:defRPr sz="1300">
-                <a:solidFill>
-                  <a:srgbClr val="323232"/>
-                </a:solidFill>
-                <a:latin typeface="Consolas"/>
-              </a:defRPr>
-            </a:pPr>
-          </a:p>
-          <a:p>
-            <a:pPr>
-              <a:spcAft>
-                <a:spcPts val="100"/>
-              </a:spcAft>
-              <a:defRPr sz="1300">
-                <a:solidFill>
-                  <a:srgbClr val="323232"/>
-                </a:solidFill>
-                <a:latin typeface="Consolas"/>
-              </a:defRPr>
-            </a:pPr>
-            <a:r>
-              <a:t>eventSource.onmessage = (e) =&gt; {</a:t>
-            </a:r>
-          </a:p>
-          <a:p>
-            <a:pPr>
-              <a:spcAft>
-                <a:spcPts val="100"/>
-              </a:spcAft>
-              <a:defRPr sz="1300">
-                <a:solidFill>
-                  <a:srgbClr val="323232"/>
-                </a:solidFill>
-                <a:latin typeface="Consolas"/>
-              </a:defRPr>
-            </a:pPr>
-            <a:r>
-              <a:t>  buffer += e.data;</a:t>
-            </a:r>
-          </a:p>
-          <a:p>
-            <a:pPr>
-              <a:spcAft>
-                <a:spcPts val="100"/>
-              </a:spcAft>
-              <a:defRPr sz="1300">
-                <a:solidFill>
-                  <a:srgbClr val="323232"/>
-                </a:solidFill>
-                <a:latin typeface="Consolas"/>
-              </a:defRPr>
-            </a:pPr>
-            <a:r>
-              <a:t>  // 先渲染结构（脚本可等 done 后）</a:t>
-            </a:r>
-          </a:p>
-          <a:p>
-            <a:pPr>
-              <a:spcAft>
-                <a:spcPts val="100"/>
-              </a:spcAft>
-              <a:defRPr sz="1300">
-                <a:solidFill>
-                  <a:srgbClr val="323232"/>
-                </a:solidFill>
-                <a:latin typeface="Consolas"/>
-              </a:defRPr>
-            </a:pPr>
-            <a:r>
-              <a:t>  if (buffer.endsWith('&lt;/body&gt;') || e.last) {</a:t>
-            </a:r>
-          </a:p>
-          <a:p>
-            <a:pPr>
-              <a:spcAft>
-                <a:spcPts val="100"/>
-              </a:spcAft>
-              <a:defRPr sz="1300">
-                <a:solidFill>
-                  <a:srgbClr val="323232"/>
-                </a:solidFill>
-                <a:latin typeface="Consolas"/>
-              </a:defRPr>
-            </a:pPr>
-            <a:r>
-              <a:t>    iframe.srcdoc = buffer;</a:t>
-            </a:r>
-          </a:p>
-          <a:p>
-            <a:pPr>
-              <a:spcAft>
-                <a:spcPts val="100"/>
-              </a:spcAft>
-              <a:defRPr sz="1300">
-                <a:solidFill>
-                  <a:srgbClr val="323232"/>
-                </a:solidFill>
-                <a:latin typeface="Consolas"/>
-              </a:defRPr>
-            </a:pPr>
-            <a:r>
-              <a:t>  }</a:t>
-            </a:r>
-          </a:p>
-          <a:p>
-            <a:pPr>
-              <a:spcAft>
-                <a:spcPts val="100"/>
-              </a:spcAft>
-              <a:defRPr sz="1300">
-                <a:solidFill>
-                  <a:srgbClr val="323232"/>
-                </a:solidFill>
-                <a:latin typeface="Consolas"/>
-              </a:defRPr>
-            </a:pPr>
-            <a:r>
-              <a:t>};</a:t>
-            </a:r>
-          </a:p>
-        </p:txBody>
-      </p:sp>
-      <p:sp>
-        <p:nvSpPr>
-          <p:cNvPr id="4" name="TextBox 3"/>
-          <p:cNvSpPr txBox="1"/>
-          <p:nvPr/>
-        </p:nvSpPr>
-        <p:spPr>
-          <a:xfrm>
-            <a:off x="640080" y="5943600"/>
-            <a:ext cx="10881360" cy="548640"/>
+          <a:bodyPr rtlCol="0" anchor="ctr"/>
+          <a:lstStyle/>
+          <a:p>
+            <a:pPr algn="ctr"/>
+          </a:p>
+        </p:txBody>
+      </p:sp>
+      <p:sp>
+        <p:nvSpPr>
+          <p:cNvPr id="4" name="Rectangle 3"/>
+          <p:cNvSpPr/>
+          <p:nvPr/>
+        </p:nvSpPr>
+        <p:spPr>
+          <a:xfrm>
+            <a:off x="0" y="960120"/>
+            <a:ext cx="12191695" cy="54864"/>
           </a:xfrm>
           <a:prstGeom prst="rect">
             <a:avLst/>
           </a:prstGeom>
+          <a:solidFill>
+            <a:srgbClr val="0D9488"/>
+          </a:solidFill>
+          <a:ln>
+            <a:noFill/>
+          </a:ln>
+        </p:spPr>
+        <p:style>
+          <a:lnRef idx="1">
+            <a:schemeClr val="accent1"/>
+          </a:lnRef>
+          <a:fillRef idx="3">
+            <a:schemeClr val="accent1"/>
+          </a:fillRef>
+          <a:effectRef idx="2">
+            <a:schemeClr val="accent1"/>
+          </a:effectRef>
+          <a:fontRef idx="minor">
+            <a:schemeClr val="lt1"/>
+          </a:fontRef>
+        </p:style>
+        <p:txBody>
+          <a:bodyPr rtlCol="0" anchor="ctr"/>
+          <a:lstStyle/>
+          <a:p>
+            <a:pPr algn="ctr"/>
+          </a:p>
+        </p:txBody>
+      </p:sp>
+      <p:sp>
+        <p:nvSpPr>
+          <p:cNvPr id="5" name="TextBox 4"/>
+          <p:cNvSpPr txBox="1"/>
+          <p:nvPr/>
+        </p:nvSpPr>
+        <p:spPr>
+          <a:xfrm>
+            <a:off x="502920" y="201168"/>
+            <a:ext cx="11155680" cy="640080"/>
+          </a:xfrm>
+          <a:prstGeom prst="rect">
+            <a:avLst/>
+          </a:prstGeom>
           <a:noFill/>
         </p:spPr>
         <p:txBody>
-          <a:bodyPr wrap="none">
+          <a:bodyPr wrap="square">
             <a:spAutoFit/>
           </a:bodyPr>
           <a:lstStyle/>
           <a:p>
-            <a:pPr>
-              <a:defRPr sz="1400">
-                <a:solidFill>
-                  <a:srgbClr val="646464"/>
-                </a:solidFill>
-              </a:defRPr>
-            </a:pPr>
-            <a:r>
-              <a:t>要点：避免每 token 都刷新；建议按结构里程碑或完成后刷新。</a:t>
+            <a:r>
+              <a:rPr sz="2400" b="1">
+                <a:solidFill>
+                  <a:srgbClr val="FFFFFF"/>
+                </a:solidFill>
+                <a:latin typeface="Calibri"/>
+              </a:rPr>
+              <a:t>08  落地路径与优先级</a:t>
+            </a:r>
+          </a:p>
+          <a:p>
+            <a:r>
+              <a:rPr sz="1200" b="0">
+                <a:solidFill>
+                  <a:srgbClr val="94A3B8"/>
+                </a:solidFill>
+                <a:latin typeface="Calibri"/>
+              </a:rPr>
+              <a:t>先闭环可见，再优化体感，最后做分享与多文件</a:t>
+            </a:r>
+          </a:p>
+        </p:txBody>
+      </p:sp>
+      <p:sp>
+        <p:nvSpPr>
+          <p:cNvPr id="6" name="Rounded Rectangle 5"/>
+          <p:cNvSpPr/>
+          <p:nvPr/>
+        </p:nvSpPr>
+        <p:spPr>
+          <a:xfrm>
+            <a:off x="411480" y="1325880"/>
+            <a:ext cx="2743200" cy="4846320"/>
+          </a:xfrm>
+          <a:prstGeom prst="roundRect">
+            <a:avLst>
+              <a:gd name="adj" fmla="val 8000"/>
+            </a:avLst>
+          </a:prstGeom>
+          <a:solidFill>
+            <a:srgbClr val="FFFFFF"/>
+          </a:solidFill>
+          <a:ln>
+            <a:solidFill>
+              <a:srgbClr val="E2E8F0"/>
+            </a:solidFill>
+          </a:ln>
+        </p:spPr>
+        <p:style>
+          <a:lnRef idx="1">
+            <a:schemeClr val="accent1"/>
+          </a:lnRef>
+          <a:fillRef idx="3">
+            <a:schemeClr val="accent1"/>
+          </a:fillRef>
+          <a:effectRef idx="2">
+            <a:schemeClr val="accent1"/>
+          </a:effectRef>
+          <a:fontRef idx="minor">
+            <a:schemeClr val="lt1"/>
+          </a:fontRef>
+        </p:style>
+        <p:txBody>
+          <a:bodyPr rtlCol="0" anchor="ctr"/>
+          <a:lstStyle/>
+          <a:p>
+            <a:pPr algn="ctr"/>
+          </a:p>
+        </p:txBody>
+      </p:sp>
+      <p:sp>
+        <p:nvSpPr>
+          <p:cNvPr id="7" name="Rectangle 6"/>
+          <p:cNvSpPr/>
+          <p:nvPr/>
+        </p:nvSpPr>
+        <p:spPr>
+          <a:xfrm>
+            <a:off x="411480" y="1325880"/>
+            <a:ext cx="2743200" cy="640080"/>
+          </a:xfrm>
+          <a:prstGeom prst="rect">
+            <a:avLst/>
+          </a:prstGeom>
+          <a:solidFill>
+            <a:srgbClr val="0D9488"/>
+          </a:solidFill>
+          <a:ln>
+            <a:noFill/>
+          </a:ln>
+        </p:spPr>
+        <p:style>
+          <a:lnRef idx="1">
+            <a:schemeClr val="accent1"/>
+          </a:lnRef>
+          <a:fillRef idx="3">
+            <a:schemeClr val="accent1"/>
+          </a:fillRef>
+          <a:effectRef idx="2">
+            <a:schemeClr val="accent1"/>
+          </a:effectRef>
+          <a:fontRef idx="minor">
+            <a:schemeClr val="lt1"/>
+          </a:fontRef>
+        </p:style>
+        <p:txBody>
+          <a:bodyPr rtlCol="0" anchor="ctr"/>
+          <a:lstStyle/>
+          <a:p>
+            <a:pPr algn="ctr"/>
+          </a:p>
+        </p:txBody>
+      </p:sp>
+      <p:sp>
+        <p:nvSpPr>
+          <p:cNvPr id="8" name="TextBox 7"/>
+          <p:cNvSpPr txBox="1"/>
+          <p:nvPr/>
+        </p:nvSpPr>
+        <p:spPr>
+          <a:xfrm>
+            <a:off x="548640" y="1417320"/>
+            <a:ext cx="2468880" cy="457200"/>
+          </a:xfrm>
+          <a:prstGeom prst="rect">
+            <a:avLst/>
+          </a:prstGeom>
+          <a:noFill/>
+        </p:spPr>
+        <p:txBody>
+          <a:bodyPr wrap="square">
+            <a:spAutoFit/>
+          </a:bodyPr>
+          <a:lstStyle/>
+          <a:p>
+            <a:r>
+              <a:rPr sz="1300" b="1">
+                <a:solidFill>
+                  <a:srgbClr val="FFFFFF"/>
+                </a:solidFill>
+                <a:latin typeface="Calibri"/>
+              </a:rPr>
+              <a:t>Phase 0  对齐与验通</a:t>
+            </a:r>
+          </a:p>
+        </p:txBody>
+      </p:sp>
+      <p:sp>
+        <p:nvSpPr>
+          <p:cNvPr id="9" name="TextBox 8"/>
+          <p:cNvSpPr txBox="1"/>
+          <p:nvPr/>
+        </p:nvSpPr>
+        <p:spPr>
+          <a:xfrm>
+            <a:off x="576072" y="2148840"/>
+            <a:ext cx="2423160" cy="3749039"/>
+          </a:xfrm>
+          <a:prstGeom prst="rect">
+            <a:avLst/>
+          </a:prstGeom>
+          <a:noFill/>
+        </p:spPr>
+        <p:txBody>
+          <a:bodyPr wrap="square">
+            <a:spAutoFit/>
+          </a:bodyPr>
+          <a:lstStyle/>
+          <a:p>
+            <a:pPr>
+              <a:spcAft>
+                <a:spcPts val="1000"/>
+              </a:spcAft>
+            </a:pPr>
+            <a:r>
+              <a:rPr sz="1300" b="0">
+                <a:solidFill>
+                  <a:srgbClr val="334155"/>
+                </a:solidFill>
+                <a:latin typeface="Calibri"/>
+              </a:rPr>
+              <a:t>• 确认 write 已可写 .html</a:t>
+            </a:r>
+          </a:p>
+          <a:p>
+            <a:pPr>
+              <a:spcAft>
+                <a:spcPts val="1000"/>
+              </a:spcAft>
+            </a:pPr>
+            <a:r>
+              <a:rPr sz="1300" b="0">
+                <a:solidFill>
+                  <a:srgbClr val="334155"/>
+                </a:solidFill>
+                <a:latin typeface="Calibri"/>
+              </a:rPr>
+              <a:t>• 手工同步/下载一轮</a:t>
+            </a:r>
+          </a:p>
+          <a:p>
+            <a:pPr>
+              <a:spcAft>
+                <a:spcPts val="1000"/>
+              </a:spcAft>
+            </a:pPr>
+            <a:r>
+              <a:rPr sz="1300" b="0">
+                <a:solidFill>
+                  <a:srgbClr val="334155"/>
+                </a:solidFill>
+                <a:latin typeface="Calibri"/>
+              </a:rPr>
+              <a:t>• 确认 MIME 或扩展名策略</a:t>
+            </a:r>
+          </a:p>
+        </p:txBody>
+      </p:sp>
+      <p:sp>
+        <p:nvSpPr>
+          <p:cNvPr id="10" name="Rounded Rectangle 9"/>
+          <p:cNvSpPr/>
+          <p:nvPr/>
+        </p:nvSpPr>
+        <p:spPr>
+          <a:xfrm>
+            <a:off x="3337560" y="1325880"/>
+            <a:ext cx="2743200" cy="4846320"/>
+          </a:xfrm>
+          <a:prstGeom prst="roundRect">
+            <a:avLst>
+              <a:gd name="adj" fmla="val 8000"/>
+            </a:avLst>
+          </a:prstGeom>
+          <a:solidFill>
+            <a:srgbClr val="FFFFFF"/>
+          </a:solidFill>
+          <a:ln>
+            <a:solidFill>
+              <a:srgbClr val="E2E8F0"/>
+            </a:solidFill>
+          </a:ln>
+        </p:spPr>
+        <p:style>
+          <a:lnRef idx="1">
+            <a:schemeClr val="accent1"/>
+          </a:lnRef>
+          <a:fillRef idx="3">
+            <a:schemeClr val="accent1"/>
+          </a:fillRef>
+          <a:effectRef idx="2">
+            <a:schemeClr val="accent1"/>
+          </a:effectRef>
+          <a:fontRef idx="minor">
+            <a:schemeClr val="lt1"/>
+          </a:fontRef>
+        </p:style>
+        <p:txBody>
+          <a:bodyPr rtlCol="0" anchor="ctr"/>
+          <a:lstStyle/>
+          <a:p>
+            <a:pPr algn="ctr"/>
+          </a:p>
+        </p:txBody>
+      </p:sp>
+      <p:sp>
+        <p:nvSpPr>
+          <p:cNvPr id="11" name="Rectangle 10"/>
+          <p:cNvSpPr/>
+          <p:nvPr/>
+        </p:nvSpPr>
+        <p:spPr>
+          <a:xfrm>
+            <a:off x="3337560" y="1325880"/>
+            <a:ext cx="2743200" cy="640080"/>
+          </a:xfrm>
+          <a:prstGeom prst="rect">
+            <a:avLst/>
+          </a:prstGeom>
+          <a:solidFill>
+            <a:srgbClr val="0D9488"/>
+          </a:solidFill>
+          <a:ln>
+            <a:noFill/>
+          </a:ln>
+        </p:spPr>
+        <p:style>
+          <a:lnRef idx="1">
+            <a:schemeClr val="accent1"/>
+          </a:lnRef>
+          <a:fillRef idx="3">
+            <a:schemeClr val="accent1"/>
+          </a:fillRef>
+          <a:effectRef idx="2">
+            <a:schemeClr val="accent1"/>
+          </a:effectRef>
+          <a:fontRef idx="minor">
+            <a:schemeClr val="lt1"/>
+          </a:fontRef>
+        </p:style>
+        <p:txBody>
+          <a:bodyPr rtlCol="0" anchor="ctr"/>
+          <a:lstStyle/>
+          <a:p>
+            <a:pPr algn="ctr"/>
+          </a:p>
+        </p:txBody>
+      </p:sp>
+      <p:sp>
+        <p:nvSpPr>
+          <p:cNvPr id="12" name="TextBox 11"/>
+          <p:cNvSpPr txBox="1"/>
+          <p:nvPr/>
+        </p:nvSpPr>
+        <p:spPr>
+          <a:xfrm>
+            <a:off x="3474720" y="1417320"/>
+            <a:ext cx="2468880" cy="457200"/>
+          </a:xfrm>
+          <a:prstGeom prst="rect">
+            <a:avLst/>
+          </a:prstGeom>
+          <a:noFill/>
+        </p:spPr>
+        <p:txBody>
+          <a:bodyPr wrap="square">
+            <a:spAutoFit/>
+          </a:bodyPr>
+          <a:lstStyle/>
+          <a:p>
+            <a:r>
+              <a:rPr sz="1300" b="1">
+                <a:solidFill>
+                  <a:srgbClr val="FFFFFF"/>
+                </a:solidFill>
+                <a:latin typeface="Calibri"/>
+              </a:rPr>
+              <a:t>Phase 1  完整下载渲染</a:t>
+            </a:r>
+          </a:p>
+        </p:txBody>
+      </p:sp>
+      <p:sp>
+        <p:nvSpPr>
+          <p:cNvPr id="13" name="TextBox 12"/>
+          <p:cNvSpPr txBox="1"/>
+          <p:nvPr/>
+        </p:nvSpPr>
+        <p:spPr>
+          <a:xfrm>
+            <a:off x="3502152" y="2148840"/>
+            <a:ext cx="2423160" cy="3749039"/>
+          </a:xfrm>
+          <a:prstGeom prst="rect">
+            <a:avLst/>
+          </a:prstGeom>
+          <a:noFill/>
+        </p:spPr>
+        <p:txBody>
+          <a:bodyPr wrap="square">
+            <a:spAutoFit/>
+          </a:bodyPr>
+          <a:lstStyle/>
+          <a:p>
+            <a:pPr>
+              <a:spcAft>
+                <a:spcPts val="1000"/>
+              </a:spcAft>
+            </a:pPr>
+            <a:r>
+              <a:rPr sz="1300" b="0">
+                <a:solidFill>
+                  <a:srgbClr val="334155"/>
+                </a:solidFill>
+                <a:latin typeface="Calibri"/>
+              </a:rPr>
+              <a:t>• 工具返回 mime/file_id/hint</a:t>
+            </a:r>
+          </a:p>
+          <a:p>
+            <a:pPr>
+              <a:spcAft>
+                <a:spcPts val="1000"/>
+              </a:spcAft>
+            </a:pPr>
+            <a:r>
+              <a:rPr sz="1300" b="0">
+                <a:solidFill>
+                  <a:srgbClr val="334155"/>
+                </a:solidFill>
+                <a:latin typeface="Calibri"/>
+              </a:rPr>
+              <a:t>• 端预览卡片 + iframe/WebView</a:t>
+            </a:r>
+          </a:p>
+          <a:p>
+            <a:pPr>
+              <a:spcAft>
+                <a:spcPts val="1000"/>
+              </a:spcAft>
+            </a:pPr>
+            <a:r>
+              <a:rPr sz="1300" b="0">
+                <a:solidFill>
+                  <a:srgbClr val="334155"/>
+                </a:solidFill>
+                <a:latin typeface="Calibri"/>
+              </a:rPr>
+              <a:t>• sandbox 默认策略上线</a:t>
+            </a:r>
+          </a:p>
+        </p:txBody>
+      </p:sp>
+      <p:sp>
+        <p:nvSpPr>
+          <p:cNvPr id="14" name="Rounded Rectangle 13"/>
+          <p:cNvSpPr/>
+          <p:nvPr/>
+        </p:nvSpPr>
+        <p:spPr>
+          <a:xfrm>
+            <a:off x="6263640" y="1325880"/>
+            <a:ext cx="2743200" cy="4846320"/>
+          </a:xfrm>
+          <a:prstGeom prst="roundRect">
+            <a:avLst>
+              <a:gd name="adj" fmla="val 8000"/>
+            </a:avLst>
+          </a:prstGeom>
+          <a:solidFill>
+            <a:srgbClr val="FFFFFF"/>
+          </a:solidFill>
+          <a:ln>
+            <a:solidFill>
+              <a:srgbClr val="E2E8F0"/>
+            </a:solidFill>
+          </a:ln>
+        </p:spPr>
+        <p:style>
+          <a:lnRef idx="1">
+            <a:schemeClr val="accent1"/>
+          </a:lnRef>
+          <a:fillRef idx="3">
+            <a:schemeClr val="accent1"/>
+          </a:fillRef>
+          <a:effectRef idx="2">
+            <a:schemeClr val="accent1"/>
+          </a:effectRef>
+          <a:fontRef idx="minor">
+            <a:schemeClr val="lt1"/>
+          </a:fontRef>
+        </p:style>
+        <p:txBody>
+          <a:bodyPr rtlCol="0" anchor="ctr"/>
+          <a:lstStyle/>
+          <a:p>
+            <a:pPr algn="ctr"/>
+          </a:p>
+        </p:txBody>
+      </p:sp>
+      <p:sp>
+        <p:nvSpPr>
+          <p:cNvPr id="15" name="Rectangle 14"/>
+          <p:cNvSpPr/>
+          <p:nvPr/>
+        </p:nvSpPr>
+        <p:spPr>
+          <a:xfrm>
+            <a:off x="6263640" y="1325880"/>
+            <a:ext cx="2743200" cy="640080"/>
+          </a:xfrm>
+          <a:prstGeom prst="rect">
+            <a:avLst/>
+          </a:prstGeom>
+          <a:solidFill>
+            <a:srgbClr val="0F766E"/>
+          </a:solidFill>
+          <a:ln>
+            <a:noFill/>
+          </a:ln>
+        </p:spPr>
+        <p:style>
+          <a:lnRef idx="1">
+            <a:schemeClr val="accent1"/>
+          </a:lnRef>
+          <a:fillRef idx="3">
+            <a:schemeClr val="accent1"/>
+          </a:fillRef>
+          <a:effectRef idx="2">
+            <a:schemeClr val="accent1"/>
+          </a:effectRef>
+          <a:fontRef idx="minor">
+            <a:schemeClr val="lt1"/>
+          </a:fontRef>
+        </p:style>
+        <p:txBody>
+          <a:bodyPr rtlCol="0" anchor="ctr"/>
+          <a:lstStyle/>
+          <a:p>
+            <a:pPr algn="ctr"/>
+          </a:p>
+        </p:txBody>
+      </p:sp>
+      <p:sp>
+        <p:nvSpPr>
+          <p:cNvPr id="16" name="TextBox 15"/>
+          <p:cNvSpPr txBox="1"/>
+          <p:nvPr/>
+        </p:nvSpPr>
+        <p:spPr>
+          <a:xfrm>
+            <a:off x="6400800" y="1417320"/>
+            <a:ext cx="2468880" cy="457200"/>
+          </a:xfrm>
+          <a:prstGeom prst="rect">
+            <a:avLst/>
+          </a:prstGeom>
+          <a:noFill/>
+        </p:spPr>
+        <p:txBody>
+          <a:bodyPr wrap="square">
+            <a:spAutoFit/>
+          </a:bodyPr>
+          <a:lstStyle/>
+          <a:p>
+            <a:r>
+              <a:rPr sz="1300" b="1">
+                <a:solidFill>
+                  <a:srgbClr val="FFFFFF"/>
+                </a:solidFill>
+                <a:latin typeface="Calibri"/>
+              </a:rPr>
+              <a:t>Phase 2  体验与稳定</a:t>
+            </a:r>
+          </a:p>
+        </p:txBody>
+      </p:sp>
+      <p:sp>
+        <p:nvSpPr>
+          <p:cNvPr id="17" name="TextBox 16"/>
+          <p:cNvSpPr txBox="1"/>
+          <p:nvPr/>
+        </p:nvSpPr>
+        <p:spPr>
+          <a:xfrm>
+            <a:off x="6428232" y="2148840"/>
+            <a:ext cx="2423160" cy="3749039"/>
+          </a:xfrm>
+          <a:prstGeom prst="rect">
+            <a:avLst/>
+          </a:prstGeom>
+          <a:noFill/>
+        </p:spPr>
+        <p:txBody>
+          <a:bodyPr wrap="square">
+            <a:spAutoFit/>
+          </a:bodyPr>
+          <a:lstStyle/>
+          <a:p>
+            <a:pPr>
+              <a:spcAft>
+                <a:spcPts val="1000"/>
+              </a:spcAft>
+            </a:pPr>
+            <a:r>
+              <a:rPr sz="1300" b="0">
+                <a:solidFill>
+                  <a:srgbClr val="334155"/>
+                </a:solidFill>
+                <a:latin typeface="Calibri"/>
+              </a:rPr>
+              <a:t>• 同步就绪推送/轮询</a:t>
+            </a:r>
+          </a:p>
+          <a:p>
+            <a:pPr>
+              <a:spcAft>
+                <a:spcPts val="1000"/>
+              </a:spcAft>
+            </a:pPr>
+            <a:r>
+              <a:rPr sz="1300" b="0">
+                <a:solidFill>
+                  <a:srgbClr val="334155"/>
+                </a:solidFill>
+                <a:latin typeface="Calibri"/>
+              </a:rPr>
+              <a:t>• 刷新预览、错误降级</a:t>
+            </a:r>
+          </a:p>
+          <a:p>
+            <a:pPr>
+              <a:spcAft>
+                <a:spcPts val="1000"/>
+              </a:spcAft>
+            </a:pPr>
+            <a:r>
+              <a:rPr sz="1300" b="0">
+                <a:solidFill>
+                  <a:srgbClr val="334155"/>
+                </a:solidFill>
+                <a:latin typeface="Calibri"/>
+              </a:rPr>
+              <a:t>• 单文件内联 CSS/JS 约定</a:t>
+            </a:r>
+          </a:p>
+        </p:txBody>
+      </p:sp>
+      <p:sp>
+        <p:nvSpPr>
+          <p:cNvPr id="18" name="Rounded Rectangle 17"/>
+          <p:cNvSpPr/>
+          <p:nvPr/>
+        </p:nvSpPr>
+        <p:spPr>
+          <a:xfrm>
+            <a:off x="9189720" y="1325880"/>
+            <a:ext cx="2743200" cy="4846320"/>
+          </a:xfrm>
+          <a:prstGeom prst="roundRect">
+            <a:avLst>
+              <a:gd name="adj" fmla="val 8000"/>
+            </a:avLst>
+          </a:prstGeom>
+          <a:solidFill>
+            <a:srgbClr val="FFFFFF"/>
+          </a:solidFill>
+          <a:ln>
+            <a:solidFill>
+              <a:srgbClr val="E2E8F0"/>
+            </a:solidFill>
+          </a:ln>
+        </p:spPr>
+        <p:style>
+          <a:lnRef idx="1">
+            <a:schemeClr val="accent1"/>
+          </a:lnRef>
+          <a:fillRef idx="3">
+            <a:schemeClr val="accent1"/>
+          </a:fillRef>
+          <a:effectRef idx="2">
+            <a:schemeClr val="accent1"/>
+          </a:effectRef>
+          <a:fontRef idx="minor">
+            <a:schemeClr val="lt1"/>
+          </a:fontRef>
+        </p:style>
+        <p:txBody>
+          <a:bodyPr rtlCol="0" anchor="ctr"/>
+          <a:lstStyle/>
+          <a:p>
+            <a:pPr algn="ctr"/>
+          </a:p>
+        </p:txBody>
+      </p:sp>
+      <p:sp>
+        <p:nvSpPr>
+          <p:cNvPr id="19" name="Rectangle 18"/>
+          <p:cNvSpPr/>
+          <p:nvPr/>
+        </p:nvSpPr>
+        <p:spPr>
+          <a:xfrm>
+            <a:off x="9189720" y="1325880"/>
+            <a:ext cx="2743200" cy="640080"/>
+          </a:xfrm>
+          <a:prstGeom prst="rect">
+            <a:avLst/>
+          </a:prstGeom>
+          <a:solidFill>
+            <a:srgbClr val="64748B"/>
+          </a:solidFill>
+          <a:ln>
+            <a:noFill/>
+          </a:ln>
+        </p:spPr>
+        <p:style>
+          <a:lnRef idx="1">
+            <a:schemeClr val="accent1"/>
+          </a:lnRef>
+          <a:fillRef idx="3">
+            <a:schemeClr val="accent1"/>
+          </a:fillRef>
+          <a:effectRef idx="2">
+            <a:schemeClr val="accent1"/>
+          </a:effectRef>
+          <a:fontRef idx="minor">
+            <a:schemeClr val="lt1"/>
+          </a:fontRef>
+        </p:style>
+        <p:txBody>
+          <a:bodyPr rtlCol="0" anchor="ctr"/>
+          <a:lstStyle/>
+          <a:p>
+            <a:pPr algn="ctr"/>
+          </a:p>
+        </p:txBody>
+      </p:sp>
+      <p:sp>
+        <p:nvSpPr>
+          <p:cNvPr id="20" name="TextBox 19"/>
+          <p:cNvSpPr txBox="1"/>
+          <p:nvPr/>
+        </p:nvSpPr>
+        <p:spPr>
+          <a:xfrm>
+            <a:off x="9326880" y="1417320"/>
+            <a:ext cx="2468880" cy="457200"/>
+          </a:xfrm>
+          <a:prstGeom prst="rect">
+            <a:avLst/>
+          </a:prstGeom>
+          <a:noFill/>
+        </p:spPr>
+        <p:txBody>
+          <a:bodyPr wrap="square">
+            <a:spAutoFit/>
+          </a:bodyPr>
+          <a:lstStyle/>
+          <a:p>
+            <a:r>
+              <a:rPr sz="1300" b="1">
+                <a:solidFill>
+                  <a:srgbClr val="FFFFFF"/>
+                </a:solidFill>
+                <a:latin typeface="Calibri"/>
+              </a:rPr>
+              <a:t>Phase 3  流式 + 分享</a:t>
+            </a:r>
+          </a:p>
+        </p:txBody>
+      </p:sp>
+      <p:sp>
+        <p:nvSpPr>
+          <p:cNvPr id="21" name="TextBox 20"/>
+          <p:cNvSpPr txBox="1"/>
+          <p:nvPr/>
+        </p:nvSpPr>
+        <p:spPr>
+          <a:xfrm>
+            <a:off x="9354312" y="2148840"/>
+            <a:ext cx="2423160" cy="3749039"/>
+          </a:xfrm>
+          <a:prstGeom prst="rect">
+            <a:avLst/>
+          </a:prstGeom>
+          <a:noFill/>
+        </p:spPr>
+        <p:txBody>
+          <a:bodyPr wrap="square">
+            <a:spAutoFit/>
+          </a:bodyPr>
+          <a:lstStyle/>
+          <a:p>
+            <a:pPr>
+              <a:spcAft>
+                <a:spcPts val="1000"/>
+              </a:spcAft>
+            </a:pPr>
+            <a:r>
+              <a:rPr sz="1300" b="0">
+                <a:solidFill>
+                  <a:srgbClr val="334155"/>
+                </a:solidFill>
+                <a:latin typeface="Calibri"/>
+              </a:rPr>
+              <a:t>• delta 通道与节流渲染</a:t>
+            </a:r>
+          </a:p>
+          <a:p>
+            <a:pPr>
+              <a:spcAft>
+                <a:spcPts val="1000"/>
+              </a:spcAft>
+            </a:pPr>
+            <a:r>
+              <a:rPr sz="1300" b="0">
+                <a:solidFill>
+                  <a:srgbClr val="334155"/>
+                </a:solidFill>
+                <a:latin typeface="Calibri"/>
+              </a:rPr>
+              <a:t>• 脚本延后执行策略</a:t>
+            </a:r>
+          </a:p>
+          <a:p>
+            <a:pPr>
+              <a:spcAft>
+                <a:spcPts val="1000"/>
+              </a:spcAft>
+            </a:pPr>
+            <a:r>
+              <a:rPr sz="1300" b="0">
+                <a:solidFill>
+                  <a:srgbClr val="334155"/>
+                </a:solidFill>
+                <a:latin typeface="Calibri"/>
+              </a:rPr>
+              <a:t>• 签名 URL / TTL 分享</a:t>
             </a:r>
           </a:p>
         </p:txBody>

--- a/docs/agent_html_preview_proposal.pptx
+++ b/docs/agent_html_preview_proposal.pptx
@@ -13,8 +13,6 @@
     <p:sldId id="261" r:id="rId12"/>
     <p:sldId id="262" r:id="rId13"/>
     <p:sldId id="263" r:id="rId14"/>
-    <p:sldId id="264" r:id="rId15"/>
-    <p:sldId id="265" r:id="rId16"/>
   </p:sldIdLst>
   <p:sldSz cx="12191695" cy="6858000" type="screen4x3"/>
   <p:notesSz cx="6858000" cy="9144000"/>
@@ -3148,8 +3146,8 @@
         </p:nvSpPr>
         <p:spPr>
           <a:xfrm>
-            <a:off x="0" y="5394960"/>
-            <a:ext cx="12191695" cy="1463040"/>
+            <a:off x="0" y="5349240"/>
+            <a:ext cx="12191695" cy="1508760"/>
           </a:xfrm>
           <a:prstGeom prst="rect">
             <a:avLst/>
@@ -3191,8 +3189,8 @@
         </p:nvSpPr>
         <p:spPr>
           <a:xfrm>
-            <a:off x="731520" y="1828800"/>
-            <a:ext cx="10515600" cy="2286000"/>
+            <a:off x="640080" y="1920240"/>
+            <a:ext cx="10789920" cy="2286000"/>
           </a:xfrm>
           <a:prstGeom prst="rect">
             <a:avLst/>
@@ -3206,29 +3204,29 @@
           <a:lstStyle/>
           <a:p>
             <a:r>
-              <a:rPr sz="3200" b="1">
+              <a:rPr sz="3400" b="1">
                 <a:solidFill>
                   <a:srgbClr val="FFFFFF"/>
                 </a:solidFill>
                 <a:latin typeface="Calibri"/>
               </a:rPr>
-              <a:t>Agent 对话内 HTML 生成与端侧呈现</a:t>
+              <a:t>对话内 HTML 渲染方案</a:t>
             </a:r>
           </a:p>
           <a:p>
             <a:pPr>
               <a:spcBef>
-                <a:spcPts val="1400"/>
+                <a:spcPts val="1200"/>
               </a:spcBef>
             </a:pPr>
             <a:r>
-              <a:rPr sz="1800" b="0">
+              <a:rPr sz="1600" b="0">
                 <a:solidFill>
                   <a:srgbClr val="94A3B8"/>
                 </a:solidFill>
                 <a:latin typeface="Calibri"/>
               </a:rPr>
-              <a:t>从能力拆解到竞品范式，再到可落地的双路径方案</a:t>
+              <a:t>从健康报告场景出发：Skill 取数 → 图形化 HTML → 端侧安全呈现</a:t>
             </a:r>
           </a:p>
         </p:txBody>
@@ -3241,8 +3239,8 @@
         </p:nvSpPr>
         <p:spPr>
           <a:xfrm>
-            <a:off x="731520" y="5669280"/>
-            <a:ext cx="10515600" cy="914400"/>
+            <a:off x="640080" y="5669280"/>
+            <a:ext cx="10789920" cy="914400"/>
           </a:xfrm>
           <a:prstGeom prst="rect">
             <a:avLst/>
@@ -3256,378 +3254,13 @@
           <a:lstStyle/>
           <a:p>
             <a:r>
-              <a:rPr sz="1400" b="0">
+              <a:rPr sz="1300" b="0">
                 <a:solidFill>
                   <a:srgbClr val="FFFFFF"/>
                 </a:solidFill>
                 <a:latin typeface="Calibri"/>
               </a:rPr>
-              <a:t>技术分享  ·  系统方案  ·  实现路径建议</a:t>
-            </a:r>
-          </a:p>
-        </p:txBody>
-      </p:sp>
-    </p:spTree>
-  </p:cSld>
-  <p:clrMapOvr>
-    <a:masterClrMapping/>
-  </p:clrMapOvr>
-</p:sld>
-</file>
-
-<file path=ppt/slides/slide10.xml><?xml version="1.0" encoding="utf-8"?>
-<p:sld xmlns:a="http://schemas.openxmlformats.org/drawingml/2006/main" xmlns:p="http://schemas.openxmlformats.org/presentationml/2006/main" xmlns:r="http://schemas.openxmlformats.org/officeDocument/2006/relationships">
-  <p:cSld>
-    <p:spTree>
-      <p:nvGrpSpPr>
-        <p:cNvPr id="1" name=""/>
-        <p:cNvGrpSpPr/>
-        <p:nvPr/>
-      </p:nvGrpSpPr>
-      <p:grpSpPr/>
-      <p:sp>
-        <p:nvSpPr>
-          <p:cNvPr id="2" name="Rectangle 1"/>
-          <p:cNvSpPr/>
-          <p:nvPr/>
-        </p:nvSpPr>
-        <p:spPr>
-          <a:xfrm>
-            <a:off x="0" y="0"/>
-            <a:ext cx="12191695" cy="6858000"/>
-          </a:xfrm>
-          <a:prstGeom prst="rect">
-            <a:avLst/>
-          </a:prstGeom>
-          <a:solidFill>
-            <a:srgbClr val="F8FAFC"/>
-          </a:solidFill>
-          <a:ln>
-            <a:noFill/>
-          </a:ln>
-        </p:spPr>
-        <p:style>
-          <a:lnRef idx="1">
-            <a:schemeClr val="accent1"/>
-          </a:lnRef>
-          <a:fillRef idx="3">
-            <a:schemeClr val="accent1"/>
-          </a:fillRef>
-          <a:effectRef idx="2">
-            <a:schemeClr val="accent1"/>
-          </a:effectRef>
-          <a:fontRef idx="minor">
-            <a:schemeClr val="lt1"/>
-          </a:fontRef>
-        </p:style>
-        <p:txBody>
-          <a:bodyPr rtlCol="0" anchor="ctr"/>
-          <a:lstStyle/>
-          <a:p>
-            <a:pPr algn="ctr"/>
-          </a:p>
-        </p:txBody>
-      </p:sp>
-      <p:sp>
-        <p:nvSpPr>
-          <p:cNvPr id="3" name="Rectangle 2"/>
-          <p:cNvSpPr/>
-          <p:nvPr/>
-        </p:nvSpPr>
-        <p:spPr>
-          <a:xfrm>
-            <a:off x="0" y="0"/>
-            <a:ext cx="12191695" cy="960120"/>
-          </a:xfrm>
-          <a:prstGeom prst="rect">
-            <a:avLst/>
-          </a:prstGeom>
-          <a:solidFill>
-            <a:srgbClr val="0F172A"/>
-          </a:solidFill>
-          <a:ln>
-            <a:noFill/>
-          </a:ln>
-        </p:spPr>
-        <p:style>
-          <a:lnRef idx="1">
-            <a:schemeClr val="accent1"/>
-          </a:lnRef>
-          <a:fillRef idx="3">
-            <a:schemeClr val="accent1"/>
-          </a:fillRef>
-          <a:effectRef idx="2">
-            <a:schemeClr val="accent1"/>
-          </a:effectRef>
-          <a:fontRef idx="minor">
-            <a:schemeClr val="lt1"/>
-          </a:fontRef>
-        </p:style>
-        <p:txBody>
-          <a:bodyPr rtlCol="0" anchor="ctr"/>
-          <a:lstStyle/>
-          <a:p>
-            <a:pPr algn="ctr"/>
-          </a:p>
-        </p:txBody>
-      </p:sp>
-      <p:sp>
-        <p:nvSpPr>
-          <p:cNvPr id="4" name="Rectangle 3"/>
-          <p:cNvSpPr/>
-          <p:nvPr/>
-        </p:nvSpPr>
-        <p:spPr>
-          <a:xfrm>
-            <a:off x="0" y="960120"/>
-            <a:ext cx="12191695" cy="54864"/>
-          </a:xfrm>
-          <a:prstGeom prst="rect">
-            <a:avLst/>
-          </a:prstGeom>
-          <a:solidFill>
-            <a:srgbClr val="0D9488"/>
-          </a:solidFill>
-          <a:ln>
-            <a:noFill/>
-          </a:ln>
-        </p:spPr>
-        <p:style>
-          <a:lnRef idx="1">
-            <a:schemeClr val="accent1"/>
-          </a:lnRef>
-          <a:fillRef idx="3">
-            <a:schemeClr val="accent1"/>
-          </a:fillRef>
-          <a:effectRef idx="2">
-            <a:schemeClr val="accent1"/>
-          </a:effectRef>
-          <a:fontRef idx="minor">
-            <a:schemeClr val="lt1"/>
-          </a:fontRef>
-        </p:style>
-        <p:txBody>
-          <a:bodyPr rtlCol="0" anchor="ctr"/>
-          <a:lstStyle/>
-          <a:p>
-            <a:pPr algn="ctr"/>
-          </a:p>
-        </p:txBody>
-      </p:sp>
-      <p:sp>
-        <p:nvSpPr>
-          <p:cNvPr id="5" name="TextBox 4"/>
-          <p:cNvSpPr txBox="1"/>
-          <p:nvPr/>
-        </p:nvSpPr>
-        <p:spPr>
-          <a:xfrm>
-            <a:off x="502920" y="201168"/>
-            <a:ext cx="11155680" cy="640080"/>
-          </a:xfrm>
-          <a:prstGeom prst="rect">
-            <a:avLst/>
-          </a:prstGeom>
-          <a:noFill/>
-        </p:spPr>
-        <p:txBody>
-          <a:bodyPr wrap="square">
-            <a:spAutoFit/>
-          </a:bodyPr>
-          <a:lstStyle/>
-          <a:p>
-            <a:r>
-              <a:rPr sz="2400" b="1">
-                <a:solidFill>
-                  <a:srgbClr val="FFFFFF"/>
-                </a:solidFill>
-                <a:latin typeface="Calibri"/>
-              </a:rPr>
-              <a:t>09  结论与建议</a:t>
-            </a:r>
-          </a:p>
-          <a:p>
-            <a:r>
-              <a:rPr sz="1200" b="0">
-                <a:solidFill>
-                  <a:srgbClr val="94A3B8"/>
-                </a:solidFill>
-                <a:latin typeface="Calibri"/>
-              </a:rPr>
-              <a:t>用最少改动打通「对话里看得见的网页」</a:t>
-            </a:r>
-          </a:p>
-        </p:txBody>
-      </p:sp>
-      <p:sp>
-        <p:nvSpPr>
-          <p:cNvPr id="6" name="TextBox 5"/>
-          <p:cNvSpPr txBox="1"/>
-          <p:nvPr/>
-        </p:nvSpPr>
-        <p:spPr>
-          <a:xfrm>
-            <a:off x="640080" y="1280160"/>
-            <a:ext cx="10972800" cy="5029200"/>
-          </a:xfrm>
-          <a:prstGeom prst="rect">
-            <a:avLst/>
-          </a:prstGeom>
-          <a:noFill/>
-        </p:spPr>
-        <p:txBody>
-          <a:bodyPr wrap="square">
-            <a:spAutoFit/>
-          </a:bodyPr>
-          <a:lstStyle/>
-          <a:p>
-            <a:pPr>
-              <a:spcAft>
-                <a:spcPts val="1400"/>
-              </a:spcAft>
-            </a:pPr>
-            <a:r>
-              <a:rPr sz="1600" b="1">
-                <a:solidFill>
-                  <a:srgbClr val="0D9488"/>
-                </a:solidFill>
-                <a:latin typeface="Calibri"/>
-              </a:rPr>
-              <a:t>定位  </a:t>
-            </a:r>
-            <a:r>
-              <a:rPr sz="1600" b="0">
-                <a:solidFill>
-                  <a:srgbClr val="334155"/>
-                </a:solidFill>
-                <a:latin typeface="Calibri"/>
-              </a:rPr>
-              <a:t>对标 Artifact/Widget，而不是一上来做全栈 App Builder。</a:t>
-            </a:r>
-          </a:p>
-          <a:p>
-            <a:pPr>
-              <a:spcAft>
-                <a:spcPts val="1400"/>
-              </a:spcAft>
-            </a:pPr>
-            <a:r>
-              <a:rPr sz="1600" b="1">
-                <a:solidFill>
-                  <a:srgbClr val="0D9488"/>
-                </a:solidFill>
-                <a:latin typeface="Calibri"/>
-              </a:rPr>
-              <a:t>真相  </a:t>
-            </a:r>
-            <a:r>
-              <a:rPr sz="1600" b="0">
-                <a:solidFill>
-                  <a:srgbClr val="334155"/>
-                </a:solidFill>
-                <a:latin typeface="Calibri"/>
-              </a:rPr>
-              <a:t>生成靠模型；write+云空间已解决分发；缺口在端侧安全渲染。</a:t>
-            </a:r>
-          </a:p>
-          <a:p>
-            <a:pPr>
-              <a:spcAft>
-                <a:spcPts val="1400"/>
-              </a:spcAft>
-            </a:pPr>
-            <a:r>
-              <a:rPr sz="1600" b="1">
-                <a:solidFill>
-                  <a:srgbClr val="0D9488"/>
-                </a:solidFill>
-                <a:latin typeface="Calibri"/>
-              </a:rPr>
-              <a:t>默认方案  </a:t>
-            </a:r>
-            <a:r>
-              <a:rPr sz="1600" b="0">
-                <a:solidFill>
-                  <a:srgbClr val="334155"/>
-                </a:solidFill>
-                <a:latin typeface="Calibri"/>
-              </a:rPr>
-              <a:t>路径 A：同步完成后下载全文，sandbox iframe/WebView 一次渲染。</a:t>
-            </a:r>
-          </a:p>
-          <a:p>
-            <a:pPr>
-              <a:spcAft>
-                <a:spcPts val="1400"/>
-              </a:spcAft>
-            </a:pPr>
-            <a:r>
-              <a:rPr sz="1600" b="1">
-                <a:solidFill>
-                  <a:srgbClr val="0D9488"/>
-                </a:solidFill>
-                <a:latin typeface="Calibri"/>
-              </a:rPr>
-              <a:t>增强方案  </a:t>
-            </a:r>
-            <a:r>
-              <a:rPr sz="1600" b="0">
-                <a:solidFill>
-                  <a:srgbClr val="334155"/>
-                </a:solidFill>
-                <a:latin typeface="Calibri"/>
-              </a:rPr>
-              <a:t>路径 B：流式粗预览提升体感，定稿仍落盘；勿替代 A。</a:t>
-            </a:r>
-          </a:p>
-          <a:p>
-            <a:pPr>
-              <a:spcAft>
-                <a:spcPts val="1400"/>
-              </a:spcAft>
-            </a:pPr>
-            <a:r>
-              <a:rPr sz="1600" b="1">
-                <a:solidFill>
-                  <a:srgbClr val="0D9488"/>
-                </a:solidFill>
-                <a:latin typeface="Calibri"/>
-              </a:rPr>
-              <a:t>安全底线  </a:t>
-            </a:r>
-            <a:r>
-              <a:rPr sz="1600" b="0">
-                <a:solidFill>
-                  <a:srgbClr val="334155"/>
-                </a:solidFill>
-                <a:latin typeface="Calibri"/>
-              </a:rPr>
-              <a:t>模型 HTML 当不可信内容；allow-scripts，慎开 allow-same-origin。</a:t>
-            </a:r>
-          </a:p>
-          <a:p>
-            <a:pPr>
-              <a:spcAft>
-                <a:spcPts val="1400"/>
-              </a:spcAft>
-            </a:pPr>
-            <a:r>
-              <a:rPr sz="1600" b="1">
-                <a:solidFill>
-                  <a:srgbClr val="0D9488"/>
-                </a:solidFill>
-                <a:latin typeface="Calibri"/>
-              </a:rPr>
-              <a:t>下一步  </a:t>
-            </a:r>
-            <a:r>
-              <a:rPr sz="1600" b="0">
-                <a:solidFill>
-                  <a:srgbClr val="334155"/>
-                </a:solidFill>
-                <a:latin typeface="Calibri"/>
-              </a:rPr>
-              <a:t>Phase 0 验通 → Phase 1 预览卡片上线 → 再评估是否做流式。</a:t>
+              <a:t>问题定义  ·  能力路径  ·  竞品对比  ·  Gap  ·  三方案  ·  示例  ·  建议</a:t>
             </a:r>
           </a:p>
         </p:txBody>
@@ -3702,7 +3335,7 @@
         <p:spPr>
           <a:xfrm>
             <a:off x="0" y="0"/>
-            <a:ext cx="12191695" cy="960120"/>
+            <a:ext cx="12191695" cy="914400"/>
           </a:xfrm>
           <a:prstGeom prst="rect">
             <a:avLst/>
@@ -3744,8 +3377,8 @@
         </p:nvSpPr>
         <p:spPr>
           <a:xfrm>
-            <a:off x="0" y="960120"/>
-            <a:ext cx="12191695" cy="54864"/>
+            <a:off x="0" y="914400"/>
+            <a:ext cx="12191695" cy="45720"/>
           </a:xfrm>
           <a:prstGeom prst="rect">
             <a:avLst/>
@@ -3787,8 +3420,8 @@
         </p:nvSpPr>
         <p:spPr>
           <a:xfrm>
-            <a:off x="502920" y="201168"/>
-            <a:ext cx="11155680" cy="640080"/>
+            <a:off x="457200" y="201168"/>
+            <a:ext cx="11247120" cy="640080"/>
           </a:xfrm>
           <a:prstGeom prst="rect">
             <a:avLst/>
@@ -3802,24 +3435,24 @@
           <a:lstStyle/>
           <a:p>
             <a:r>
-              <a:rPr sz="2400" b="1">
+              <a:rPr sz="2200" b="1">
                 <a:solidFill>
                   <a:srgbClr val="FFFFFF"/>
                 </a:solidFill>
                 <a:latin typeface="Calibri"/>
               </a:rPr>
-              <a:t>01  先把问题说完整</a:t>
-            </a:r>
-          </a:p>
-          <a:p>
-            <a:r>
-              <a:rPr sz="1200" b="0">
+              <a:t>01  问题定义</a:t>
+            </a:r>
+          </a:p>
+          <a:p>
+            <a:r>
+              <a:rPr sz="1100" b="0">
                 <a:solidFill>
                   <a:srgbClr val="94A3B8"/>
                 </a:solidFill>
                 <a:latin typeface="Calibri"/>
               </a:rPr>
-              <a:t>不是「会不会写 HTML」，而是「对话产品里如何安全地生成、分发、呈现可执行内容」</a:t>
+              <a:t>需要在端侧对话中直接渲染并展示模型生成的 HTML 内容</a:t>
             </a:r>
           </a:p>
         </p:txBody>
@@ -3832,12 +3465,205 @@
         </p:nvSpPr>
         <p:spPr>
           <a:xfrm>
-            <a:off x="457200" y="1280160"/>
-            <a:ext cx="3657600" cy="5029200"/>
+            <a:off x="411480" y="1188720"/>
+            <a:ext cx="6858000" cy="3200400"/>
           </a:xfrm>
           <a:prstGeom prst="roundRect">
             <a:avLst>
-              <a:gd name="adj" fmla="val 8000"/>
+              <a:gd name="adj" fmla="val 6000"/>
+            </a:avLst>
+          </a:prstGeom>
+          <a:solidFill>
+            <a:srgbClr val="F0FDFA"/>
+          </a:solidFill>
+          <a:ln>
+            <a:solidFill>
+              <a:srgbClr val="E2E8F0"/>
+            </a:solidFill>
+          </a:ln>
+        </p:spPr>
+        <p:style>
+          <a:lnRef idx="1">
+            <a:schemeClr val="accent1"/>
+          </a:lnRef>
+          <a:fillRef idx="3">
+            <a:schemeClr val="accent1"/>
+          </a:fillRef>
+          <a:effectRef idx="2">
+            <a:schemeClr val="accent1"/>
+          </a:effectRef>
+          <a:fontRef idx="minor">
+            <a:schemeClr val="lt1"/>
+          </a:fontRef>
+        </p:style>
+        <p:txBody>
+          <a:bodyPr rtlCol="0" anchor="ctr"/>
+          <a:lstStyle/>
+          <a:p>
+            <a:pPr algn="ctr"/>
+          </a:p>
+        </p:txBody>
+      </p:sp>
+      <p:sp>
+        <p:nvSpPr>
+          <p:cNvPr id="7" name="TextBox 6"/>
+          <p:cNvSpPr txBox="1"/>
+          <p:nvPr/>
+        </p:nvSpPr>
+        <p:spPr>
+          <a:xfrm>
+            <a:off x="557784" y="1298448"/>
+            <a:ext cx="6601968" cy="3017520"/>
+          </a:xfrm>
+          <a:prstGeom prst="rect">
+            <a:avLst/>
+          </a:prstGeom>
+          <a:noFill/>
+        </p:spPr>
+        <p:txBody>
+          <a:bodyPr wrap="square">
+            <a:spAutoFit/>
+          </a:bodyPr>
+          <a:lstStyle/>
+          <a:p>
+            <a:r>
+              <a:rPr sz="1300" b="1">
+                <a:solidFill>
+                  <a:srgbClr val="0D9488"/>
+                </a:solidFill>
+                <a:latin typeface="Calibri"/>
+              </a:rPr>
+              <a:t>典型场景：个人健康分析报告</a:t>
+            </a:r>
+          </a:p>
+          <a:p>
+            <a:pPr>
+              <a:spcBef>
+                <a:spcPts val="300"/>
+              </a:spcBef>
+            </a:pPr>
+            <a:r>
+              <a:rPr sz="1100" b="0">
+                <a:solidFill>
+                  <a:srgbClr val="334155"/>
+                </a:solidFill>
+                <a:latin typeface="Calibri"/>
+              </a:rPr>
+              <a:t>用户：「帮我生成最近的个人健康分析报告」</a:t>
+            </a:r>
+          </a:p>
+          <a:p>
+            <a:pPr>
+              <a:spcBef>
+                <a:spcPts val="300"/>
+              </a:spcBef>
+            </a:pPr>
+            <a:r>
+              <a:rPr sz="1100" b="0">
+                <a:solidFill>
+                  <a:srgbClr val="334155"/>
+                </a:solidFill>
+                <a:latin typeface="Calibri"/>
+              </a:rPr>
+              <a:t/>
+            </a:r>
+          </a:p>
+          <a:p>
+            <a:pPr>
+              <a:spcBef>
+                <a:spcPts val="300"/>
+              </a:spcBef>
+            </a:pPr>
+            <a:r>
+              <a:rPr sz="1100" b="0">
+                <a:solidFill>
+                  <a:srgbClr val="334155"/>
+                </a:solidFill>
+                <a:latin typeface="Calibri"/>
+              </a:rPr>
+              <a:t>1. Agent 调用「运动健康数据」Skill 拉取指标</a:t>
+            </a:r>
+          </a:p>
+          <a:p>
+            <a:pPr>
+              <a:spcBef>
+                <a:spcPts val="300"/>
+              </a:spcBef>
+            </a:pPr>
+            <a:r>
+              <a:rPr sz="1100" b="0">
+                <a:solidFill>
+                  <a:srgbClr val="334155"/>
+                </a:solidFill>
+                <a:latin typeface="Calibri"/>
+              </a:rPr>
+              <a:t>2. 模型结合数据，用图表/卡片等图形化方式生成 HTML</a:t>
+            </a:r>
+          </a:p>
+          <a:p>
+            <a:pPr>
+              <a:spcBef>
+                <a:spcPts val="300"/>
+              </a:spcBef>
+            </a:pPr>
+            <a:r>
+              <a:rPr sz="1100" b="0">
+                <a:solidFill>
+                  <a:srgbClr val="334155"/>
+                </a:solidFill>
+                <a:latin typeface="Calibri"/>
+              </a:rPr>
+              <a:t>3. 在对话中直接展示可交互报告（而不是源码或附件）</a:t>
+            </a:r>
+          </a:p>
+          <a:p>
+            <a:pPr>
+              <a:spcBef>
+                <a:spcPts val="300"/>
+              </a:spcBef>
+            </a:pPr>
+            <a:r>
+              <a:rPr sz="1100" b="0">
+                <a:solidFill>
+                  <a:srgbClr val="334155"/>
+                </a:solidFill>
+                <a:latin typeface="Calibri"/>
+              </a:rPr>
+              <a:t/>
+            </a:r>
+          </a:p>
+          <a:p>
+            <a:pPr>
+              <a:spcBef>
+                <a:spcPts val="300"/>
+              </a:spcBef>
+            </a:pPr>
+            <a:r>
+              <a:rPr sz="1100" b="0">
+                <a:solidFill>
+                  <a:srgbClr val="334155"/>
+                </a:solidFill>
+                <a:latin typeface="Calibri"/>
+              </a:rPr>
+              <a:t>成功标准：会话内可见、可交互；无需下载后另开应用。</a:t>
+            </a:r>
+          </a:p>
+        </p:txBody>
+      </p:sp>
+      <p:sp>
+        <p:nvSpPr>
+          <p:cNvPr id="8" name="Rounded Rectangle 7"/>
+          <p:cNvSpPr/>
+          <p:nvPr/>
+        </p:nvSpPr>
+        <p:spPr>
+          <a:xfrm>
+            <a:off x="7452360" y="1188720"/>
+            <a:ext cx="4297680" cy="3200400"/>
+          </a:xfrm>
+          <a:prstGeom prst="roundRect">
+            <a:avLst>
+              <a:gd name="adj" fmla="val 6000"/>
             </a:avLst>
           </a:prstGeom>
           <a:solidFill>
@@ -3873,14 +3699,14 @@
       </p:sp>
       <p:sp>
         <p:nvSpPr>
-          <p:cNvPr id="7" name="TextBox 6"/>
+          <p:cNvPr id="9" name="TextBox 8"/>
           <p:cNvSpPr txBox="1"/>
           <p:nvPr/>
         </p:nvSpPr>
         <p:spPr>
           <a:xfrm>
-            <a:off x="621792" y="1389888"/>
-            <a:ext cx="3383280" cy="4846320"/>
+            <a:off x="7598664" y="1298448"/>
+            <a:ext cx="4041648" cy="3017520"/>
           </a:xfrm>
           <a:prstGeom prst="rect">
             <a:avLst/>
@@ -3894,127 +3720,143 @@
           <a:lstStyle/>
           <a:p>
             <a:r>
-              <a:rPr sz="1400" b="1">
+              <a:rPr sz="1300" b="1">
                 <a:solidFill>
                   <a:srgbClr val="0D9488"/>
                 </a:solidFill>
                 <a:latin typeface="Calibri"/>
               </a:rPr>
-              <a:t>用户真正要的</a:t>
+              <a:t>本质诉求</a:t>
             </a:r>
           </a:p>
           <a:p>
             <a:pPr>
               <a:spcBef>
-                <a:spcPts val="400"/>
+                <a:spcPts val="300"/>
               </a:spcBef>
             </a:pPr>
             <a:r>
-              <a:rPr sz="1200" b="0">
+              <a:rPr sz="1100" b="0">
                 <a:solidFill>
                   <a:srgbClr val="334155"/>
                 </a:solidFill>
                 <a:latin typeface="Calibri"/>
               </a:rPr>
-              <a:t>在对话里看到可点可交互的页面</a:t>
+              <a:t>不是「模型会不会写 HTML」</a:t>
             </a:r>
           </a:p>
           <a:p>
             <a:pPr>
               <a:spcBef>
-                <a:spcPts val="400"/>
+                <a:spcPts val="300"/>
               </a:spcBef>
             </a:pPr>
             <a:r>
-              <a:rPr sz="1200" b="0">
+              <a:rPr sz="1100" b="0">
                 <a:solidFill>
                   <a:srgbClr val="334155"/>
                 </a:solidFill>
                 <a:latin typeface="Calibri"/>
               </a:rPr>
-              <a:t>而不是一段只能复制的源码</a:t>
+              <a:t>而是「对话产品能否：</a:t>
             </a:r>
           </a:p>
           <a:p>
             <a:pPr>
               <a:spcBef>
-                <a:spcPts val="400"/>
+                <a:spcPts val="300"/>
               </a:spcBef>
             </a:pPr>
             <a:r>
-              <a:rPr sz="1200" b="0">
+              <a:rPr sz="1100" b="0">
                 <a:solidFill>
                   <a:srgbClr val="334155"/>
                 </a:solidFill>
                 <a:latin typeface="Calibri"/>
               </a:rPr>
-              <a:t>可刷新、可回看、最好可分享</a:t>
+              <a:t>  取数 → 可视化生成</a:t>
             </a:r>
           </a:p>
           <a:p>
             <a:pPr>
               <a:spcBef>
-                <a:spcPts val="400"/>
+                <a:spcPts val="300"/>
               </a:spcBef>
             </a:pPr>
             <a:r>
-              <a:rPr sz="1200" b="0">
+              <a:rPr sz="1100" b="0">
                 <a:solidFill>
                   <a:srgbClr val="334155"/>
                 </a:solidFill>
                 <a:latin typeface="Calibri"/>
               </a:rPr>
-              <a:t/>
+              <a:t>  → 端内安全渲染」</a:t>
             </a:r>
           </a:p>
           <a:p>
             <a:pPr>
               <a:spcBef>
-                <a:spcPts val="400"/>
+                <a:spcPts val="300"/>
               </a:spcBef>
             </a:pPr>
             <a:r>
-              <a:rPr sz="1200" b="0">
+              <a:rPr sz="1100" b="0">
                 <a:solidFill>
                   <a:srgbClr val="334155"/>
                 </a:solidFill>
                 <a:latin typeface="Calibri"/>
               </a:rPr>
-              <a:t>体验对标：</a:t>
+              <a:t/>
             </a:r>
           </a:p>
           <a:p>
             <a:pPr>
               <a:spcBef>
-                <a:spcPts val="400"/>
+                <a:spcPts val="300"/>
               </a:spcBef>
             </a:pPr>
             <a:r>
-              <a:rPr sz="1200" b="0">
+              <a:rPr sz="1100" b="0">
                 <a:solidFill>
                   <a:srgbClr val="334155"/>
                 </a:solidFill>
                 <a:latin typeface="Calibri"/>
               </a:rPr>
-              <a:t>Claude Artifacts / OpenClaw Widget</a:t>
-            </a:r>
-          </a:p>
-        </p:txBody>
-      </p:sp>
-      <p:sp>
-        <p:nvSpPr>
-          <p:cNvPr id="8" name="Rounded Rectangle 7"/>
+              <a:t>断点往往在最后一跳：</a:t>
+            </a:r>
+          </a:p>
+          <a:p>
+            <a:pPr>
+              <a:spcBef>
+                <a:spcPts val="300"/>
+              </a:spcBef>
+            </a:pPr>
+            <a:r>
+              <a:rPr sz="1100" b="0">
+                <a:solidFill>
+                  <a:srgbClr val="334155"/>
+                </a:solidFill>
+                <a:latin typeface="Calibri"/>
+              </a:rPr>
+              <a:t>渲染容器 + 类型识别 + 沙箱</a:t>
+            </a:r>
+          </a:p>
+        </p:txBody>
+      </p:sp>
+      <p:sp>
+        <p:nvSpPr>
+          <p:cNvPr id="10" name="Rounded Rectangle 9"/>
           <p:cNvSpPr/>
           <p:nvPr/>
         </p:nvSpPr>
         <p:spPr>
           <a:xfrm>
-            <a:off x="4297680" y="1280160"/>
-            <a:ext cx="3657600" cy="5029200"/>
+            <a:off x="411480" y="4572000"/>
+            <a:ext cx="11338560" cy="1920240"/>
           </a:xfrm>
           <a:prstGeom prst="roundRect">
             <a:avLst>
-              <a:gd name="adj" fmla="val 8000"/>
+              <a:gd name="adj" fmla="val 6000"/>
             </a:avLst>
           </a:prstGeom>
           <a:solidFill>
@@ -4050,14 +3892,14 @@
       </p:sp>
       <p:sp>
         <p:nvSpPr>
-          <p:cNvPr id="9" name="TextBox 8"/>
+          <p:cNvPr id="11" name="TextBox 10"/>
           <p:cNvSpPr txBox="1"/>
           <p:nvPr/>
         </p:nvSpPr>
         <p:spPr>
           <a:xfrm>
-            <a:off x="4462272" y="1389888"/>
-            <a:ext cx="3383280" cy="4846320"/>
+            <a:off x="557784" y="4681728"/>
+            <a:ext cx="11082528" cy="1737360"/>
           </a:xfrm>
           <a:prstGeom prst="rect">
             <a:avLst/>
@@ -4071,318 +3913,45 @@
           <a:lstStyle/>
           <a:p>
             <a:r>
-              <a:rPr sz="1400" b="1">
+              <a:rPr sz="1300" b="1">
                 <a:solidFill>
                   <a:srgbClr val="0D9488"/>
                 </a:solidFill>
                 <a:latin typeface="Calibri"/>
               </a:rPr>
-              <a:t>容易误判的点</a:t>
+              <a:t>本次要回答</a:t>
             </a:r>
           </a:p>
           <a:p>
             <a:pPr>
               <a:spcBef>
-                <a:spcPts val="400"/>
+                <a:spcPts val="300"/>
               </a:spcBef>
             </a:pPr>
             <a:r>
-              <a:rPr sz="1200" b="0">
+              <a:rPr sz="1100" b="0">
                 <a:solidFill>
                   <a:srgbClr val="334155"/>
                 </a:solidFill>
                 <a:latin typeface="Calibri"/>
               </a:rPr>
-              <a:t>× 需要一个 generate_html 神器</a:t>
+              <a:t>能力链上哪些已有、哪些缺口？竞品怎么做？我们与目标差在哪？</a:t>
             </a:r>
           </a:p>
           <a:p>
             <a:pPr>
               <a:spcBef>
-                <a:spcPts val="400"/>
+                <a:spcPts val="300"/>
               </a:spcBef>
             </a:pPr>
             <a:r>
-              <a:rPr sz="1200" b="0">
+              <a:rPr sz="1100" b="0">
                 <a:solidFill>
                   <a:srgbClr val="334155"/>
                 </a:solidFill>
                 <a:latin typeface="Calibri"/>
               </a:rPr>
-              <a:t>× 云空间「不支持」= 存不了</a:t>
-            </a:r>
-          </a:p>
-          <a:p>
-            <a:pPr>
-              <a:spcBef>
-                <a:spcPts val="400"/>
-              </a:spcBef>
-            </a:pPr>
-            <a:r>
-              <a:rPr sz="1200" b="0">
-                <a:solidFill>
-                  <a:srgbClr val="334155"/>
-                </a:solidFill>
-                <a:latin typeface="Calibri"/>
-              </a:rPr>
-              <a:t>× 有 write 就等于能预览</a:t>
-            </a:r>
-          </a:p>
-          <a:p>
-            <a:pPr>
-              <a:spcBef>
-                <a:spcPts val="400"/>
-              </a:spcBef>
-            </a:pPr>
-            <a:r>
-              <a:rPr sz="1200" b="0">
-                <a:solidFill>
-                  <a:srgbClr val="334155"/>
-                </a:solidFill>
-                <a:latin typeface="Calibri"/>
-              </a:rPr>
-              <a:t>× 流式下发 = 必须上存储</a:t>
-            </a:r>
-          </a:p>
-          <a:p>
-            <a:pPr>
-              <a:spcBef>
-                <a:spcPts val="400"/>
-              </a:spcBef>
-            </a:pPr>
-            <a:r>
-              <a:rPr sz="1200" b="0">
-                <a:solidFill>
-                  <a:srgbClr val="334155"/>
-                </a:solidFill>
-                <a:latin typeface="Calibri"/>
-              </a:rPr>
-              <a:t/>
-            </a:r>
-          </a:p>
-          <a:p>
-            <a:pPr>
-              <a:spcBef>
-                <a:spcPts val="400"/>
-              </a:spcBef>
-            </a:pPr>
-            <a:r>
-              <a:rPr sz="1200" b="0">
-                <a:solidFill>
-                  <a:srgbClr val="334155"/>
-                </a:solidFill>
-                <a:latin typeface="Calibri"/>
-              </a:rPr>
-              <a:t>√ 生成是模型能力</a:t>
-            </a:r>
-          </a:p>
-          <a:p>
-            <a:pPr>
-              <a:spcBef>
-                <a:spcPts val="400"/>
-              </a:spcBef>
-            </a:pPr>
-            <a:r>
-              <a:rPr sz="1200" b="0">
-                <a:solidFill>
-                  <a:srgbClr val="334155"/>
-                </a:solidFill>
-                <a:latin typeface="Calibri"/>
-              </a:rPr>
-              <a:t>√ 呈现是端能力</a:t>
-            </a:r>
-          </a:p>
-          <a:p>
-            <a:pPr>
-              <a:spcBef>
-                <a:spcPts val="400"/>
-              </a:spcBef>
-            </a:pPr>
-            <a:r>
-              <a:rPr sz="1200" b="0">
-                <a:solidFill>
-                  <a:srgbClr val="334155"/>
-                </a:solidFill>
-                <a:latin typeface="Calibri"/>
-              </a:rPr>
-              <a:t>√ 同步是基础设施</a:t>
-            </a:r>
-          </a:p>
-        </p:txBody>
-      </p:sp>
-      <p:sp>
-        <p:nvSpPr>
-          <p:cNvPr id="10" name="Rounded Rectangle 9"/>
-          <p:cNvSpPr/>
-          <p:nvPr/>
-        </p:nvSpPr>
-        <p:spPr>
-          <a:xfrm>
-            <a:off x="8138160" y="1280160"/>
-            <a:ext cx="3566160" cy="5029200"/>
-          </a:xfrm>
-          <a:prstGeom prst="roundRect">
-            <a:avLst>
-              <a:gd name="adj" fmla="val 8000"/>
-            </a:avLst>
-          </a:prstGeom>
-          <a:solidFill>
-            <a:srgbClr val="FFFFFF"/>
-          </a:solidFill>
-          <a:ln>
-            <a:solidFill>
-              <a:srgbClr val="E2E8F0"/>
-            </a:solidFill>
-          </a:ln>
-        </p:spPr>
-        <p:style>
-          <a:lnRef idx="1">
-            <a:schemeClr val="accent1"/>
-          </a:lnRef>
-          <a:fillRef idx="3">
-            <a:schemeClr val="accent1"/>
-          </a:fillRef>
-          <a:effectRef idx="2">
-            <a:schemeClr val="accent1"/>
-          </a:effectRef>
-          <a:fontRef idx="minor">
-            <a:schemeClr val="lt1"/>
-          </a:fontRef>
-        </p:style>
-        <p:txBody>
-          <a:bodyPr rtlCol="0" anchor="ctr"/>
-          <a:lstStyle/>
-          <a:p>
-            <a:pPr algn="ctr"/>
-          </a:p>
-        </p:txBody>
-      </p:sp>
-      <p:sp>
-        <p:nvSpPr>
-          <p:cNvPr id="11" name="TextBox 10"/>
-          <p:cNvSpPr txBox="1"/>
-          <p:nvPr/>
-        </p:nvSpPr>
-        <p:spPr>
-          <a:xfrm>
-            <a:off x="8302752" y="1389888"/>
-            <a:ext cx="3291840" cy="4846320"/>
-          </a:xfrm>
-          <a:prstGeom prst="rect">
-            <a:avLst/>
-          </a:prstGeom>
-          <a:noFill/>
-        </p:spPr>
-        <p:txBody>
-          <a:bodyPr wrap="square">
-            <a:spAutoFit/>
-          </a:bodyPr>
-          <a:lstStyle/>
-          <a:p>
-            <a:r>
-              <a:rPr sz="1400" b="1">
-                <a:solidFill>
-                  <a:srgbClr val="0D9488"/>
-                </a:solidFill>
-                <a:latin typeface="Calibri"/>
-              </a:rPr>
-              <a:t>本次要讲清</a:t>
-            </a:r>
-          </a:p>
-          <a:p>
-            <a:pPr>
-              <a:spcBef>
-                <a:spcPts val="400"/>
-              </a:spcBef>
-            </a:pPr>
-            <a:r>
-              <a:rPr sz="1200" b="0">
-                <a:solidFill>
-                  <a:srgbClr val="334155"/>
-                </a:solidFill>
-                <a:latin typeface="Calibri"/>
-              </a:rPr>
-              <a:t>① 能力分层：生成→落盘→同步</a:t>
-            </a:r>
-          </a:p>
-          <a:p>
-            <a:pPr>
-              <a:spcBef>
-                <a:spcPts val="400"/>
-              </a:spcBef>
-            </a:pPr>
-            <a:r>
-              <a:rPr sz="1200" b="0">
-                <a:solidFill>
-                  <a:srgbClr val="334155"/>
-                </a:solidFill>
-                <a:latin typeface="Calibri"/>
-              </a:rPr>
-              <a:t>   →识别→渲染→安全→分享</a:t>
-            </a:r>
-          </a:p>
-          <a:p>
-            <a:pPr>
-              <a:spcBef>
-                <a:spcPts val="400"/>
-              </a:spcBef>
-            </a:pPr>
-            <a:r>
-              <a:rPr sz="1200" b="0">
-                <a:solidFill>
-                  <a:srgbClr val="334155"/>
-                </a:solidFill>
-                <a:latin typeface="Calibri"/>
-              </a:rPr>
-              <a:t>② 竞品四类范式与可抄点</a:t>
-            </a:r>
-          </a:p>
-          <a:p>
-            <a:pPr>
-              <a:spcBef>
-                <a:spcPts val="400"/>
-              </a:spcBef>
-            </a:pPr>
-            <a:r>
-              <a:rPr sz="1200" b="0">
-                <a:solidFill>
-                  <a:srgbClr val="334155"/>
-                </a:solidFill>
-                <a:latin typeface="Calibri"/>
-              </a:rPr>
-              <a:t>③ 我们已有链路与缺口</a:t>
-            </a:r>
-          </a:p>
-          <a:p>
-            <a:pPr>
-              <a:spcBef>
-                <a:spcPts val="400"/>
-              </a:spcBef>
-            </a:pPr>
-            <a:r>
-              <a:rPr sz="1200" b="0">
-                <a:solidFill>
-                  <a:srgbClr val="334155"/>
-                </a:solidFill>
-                <a:latin typeface="Calibri"/>
-              </a:rPr>
-              <a:t>④ 双路径：完整下载 vs 流式</a:t>
-            </a:r>
-          </a:p>
-          <a:p>
-            <a:pPr>
-              <a:spcBef>
-                <a:spcPts val="400"/>
-              </a:spcBef>
-            </a:pPr>
-            <a:r>
-              <a:rPr sz="1200" b="0">
-                <a:solidFill>
-                  <a:srgbClr val="334155"/>
-                </a:solidFill>
-                <a:latin typeface="Calibri"/>
-              </a:rPr>
-              <a:t>⑤ 安全边界与落地节奏</a:t>
+              <a:t>下载后渲染 / 流式实时渲染 / 混合方案怎么选？如何落地与验收？</a:t>
             </a:r>
           </a:p>
         </p:txBody>
@@ -4457,7 +4026,7 @@
         <p:spPr>
           <a:xfrm>
             <a:off x="0" y="0"/>
-            <a:ext cx="12191695" cy="960120"/>
+            <a:ext cx="12191695" cy="914400"/>
           </a:xfrm>
           <a:prstGeom prst="rect">
             <a:avLst/>
@@ -4499,8 +4068,8 @@
         </p:nvSpPr>
         <p:spPr>
           <a:xfrm>
-            <a:off x="0" y="960120"/>
-            <a:ext cx="12191695" cy="54864"/>
+            <a:off x="0" y="914400"/>
+            <a:ext cx="12191695" cy="45720"/>
           </a:xfrm>
           <a:prstGeom prst="rect">
             <a:avLst/>
@@ -4542,8 +4111,8 @@
         </p:nvSpPr>
         <p:spPr>
           <a:xfrm>
-            <a:off x="502920" y="201168"/>
-            <a:ext cx="11155680" cy="640080"/>
+            <a:off x="457200" y="201168"/>
+            <a:ext cx="11247120" cy="640080"/>
           </a:xfrm>
           <a:prstGeom prst="rect">
             <a:avLst/>
@@ -4557,24 +4126,24 @@
           <a:lstStyle/>
           <a:p>
             <a:r>
-              <a:rPr sz="2400" b="1">
+              <a:rPr sz="2200" b="1">
                 <a:solidFill>
                   <a:srgbClr val="FFFFFF"/>
                 </a:solidFill>
                 <a:latin typeface="Calibri"/>
               </a:rPr>
-              <a:t>02  能力分层：支持 HTML 到底需要什么</a:t>
-            </a:r>
-          </a:p>
-          <a:p>
-            <a:r>
-              <a:rPr sz="1200" b="0">
+              <a:t>02  实现能力路径</a:t>
+            </a:r>
+          </a:p>
+          <a:p>
+            <a:r>
+              <a:rPr sz="1100" b="0">
                 <a:solidFill>
                   <a:srgbClr val="94A3B8"/>
                 </a:solidFill>
                 <a:latin typeface="Calibri"/>
               </a:rPr>
-              <a:t>把「能生成网页」拆成 7 层，缺哪层体验就断在哪层</a:t>
+              <a:t>生成 → 落盘 → 同步 → 渲染 → 安全 → 分享（标出已有 / 缺口）</a:t>
             </a:r>
           </a:p>
         </p:txBody>
@@ -4587,12 +4156,12 @@
         </p:nvSpPr>
         <p:spPr>
           <a:xfrm>
-            <a:off x="411480" y="1417320"/>
-            <a:ext cx="1554480" cy="3840480"/>
+            <a:off x="365760" y="1280160"/>
+            <a:ext cx="1828800" cy="3657600"/>
           </a:xfrm>
           <a:prstGeom prst="roundRect">
             <a:avLst>
-              <a:gd name="adj" fmla="val 10000"/>
+              <a:gd name="adj" fmla="val 8000"/>
             </a:avLst>
           </a:prstGeom>
           <a:solidFill>
@@ -4600,7 +4169,7 @@
           </a:solidFill>
           <a:ln>
             <a:solidFill>
-              <a:srgbClr val="0D9488"/>
+              <a:srgbClr val="047857"/>
             </a:solidFill>
           </a:ln>
         </p:spPr>
@@ -4628,14 +4197,57 @@
       </p:sp>
       <p:sp>
         <p:nvSpPr>
-          <p:cNvPr id="7" name="TextBox 6"/>
+          <p:cNvPr id="7" name="Oval 6"/>
+          <p:cNvSpPr/>
+          <p:nvPr/>
+        </p:nvSpPr>
+        <p:spPr>
+          <a:xfrm>
+            <a:off x="1005840" y="1463040"/>
+            <a:ext cx="502920" cy="502920"/>
+          </a:xfrm>
+          <a:prstGeom prst="ellipse">
+            <a:avLst/>
+          </a:prstGeom>
+          <a:solidFill>
+            <a:srgbClr val="047857"/>
+          </a:solidFill>
+          <a:ln>
+            <a:noFill/>
+          </a:ln>
+        </p:spPr>
+        <p:style>
+          <a:lnRef idx="1">
+            <a:schemeClr val="accent1"/>
+          </a:lnRef>
+          <a:fillRef idx="3">
+            <a:schemeClr val="accent1"/>
+          </a:fillRef>
+          <a:effectRef idx="2">
+            <a:schemeClr val="accent1"/>
+          </a:effectRef>
+          <a:fontRef idx="minor">
+            <a:schemeClr val="lt1"/>
+          </a:fontRef>
+        </p:style>
+        <p:txBody>
+          <a:bodyPr rtlCol="0" anchor="ctr"/>
+          <a:lstStyle/>
+          <a:p>
+            <a:pPr algn="ctr"/>
+          </a:p>
+        </p:txBody>
+      </p:sp>
+      <p:sp>
+        <p:nvSpPr>
+          <p:cNvPr id="8" name="TextBox 7"/>
           <p:cNvSpPr txBox="1"/>
           <p:nvPr/>
         </p:nvSpPr>
         <p:spPr>
           <a:xfrm>
-            <a:off x="502920" y="1600200"/>
-            <a:ext cx="1371600" cy="3474720"/>
+            <a:off x="1005840" y="1536192"/>
+            <a:ext cx="502920" cy="411480"/>
           </a:xfrm>
           <a:prstGeom prst="rect">
             <a:avLst/>
@@ -4648,20 +4260,56 @@
           </a:bodyPr>
           <a:lstStyle/>
           <a:p>
+            <a:pPr algn="ctr"/>
             <a:r>
               <a:rPr sz="1400" b="1">
                 <a:solidFill>
+                  <a:srgbClr val="FFFFFF"/>
+                </a:solidFill>
+                <a:latin typeface="Calibri"/>
+              </a:rPr>
+              <a:t>1</a:t>
+            </a:r>
+          </a:p>
+        </p:txBody>
+      </p:sp>
+      <p:sp>
+        <p:nvSpPr>
+          <p:cNvPr id="9" name="TextBox 8"/>
+          <p:cNvSpPr txBox="1"/>
+          <p:nvPr/>
+        </p:nvSpPr>
+        <p:spPr>
+          <a:xfrm>
+            <a:off x="475488" y="2148840"/>
+            <a:ext cx="1600200" cy="2560320"/>
+          </a:xfrm>
+          <a:prstGeom prst="rect">
+            <a:avLst/>
+          </a:prstGeom>
+          <a:noFill/>
+        </p:spPr>
+        <p:txBody>
+          <a:bodyPr wrap="square">
+            <a:spAutoFit/>
+          </a:bodyPr>
+          <a:lstStyle/>
+          <a:p>
+            <a:pPr algn="ctr"/>
+            <a:r>
+              <a:rPr sz="1600" b="1">
+                <a:solidFill>
                   <a:srgbClr val="0F172A"/>
                 </a:solidFill>
                 <a:latin typeface="Calibri"/>
               </a:rPr>
-              <a:t>1. 生成</a:t>
-            </a:r>
-          </a:p>
-          <a:p>
-            <a:pPr>
+              <a:t>生成</a:t>
+            </a:r>
+          </a:p>
+          <a:p>
+            <a:pPr algn="ctr">
               <a:spcBef>
-                <a:spcPts val="1000"/>
+                <a:spcPts val="400"/>
               </a:spcBef>
             </a:pPr>
             <a:r>
@@ -4671,19 +4319,35 @@
                 </a:solidFill>
                 <a:latin typeface="Calibri"/>
               </a:rPr>
-              <a:t>LLM 产出 HTML/CSS/JS 文本</a:t>
-            </a:r>
-          </a:p>
-          <a:p>
-            <a:pPr>
+              <a:t>LLM + Skill 取数</a:t>
+            </a:r>
+          </a:p>
+          <a:p>
+            <a:pPr algn="ctr">
               <a:spcBef>
-                <a:spcPts val="1600"/>
+                <a:spcPts val="400"/>
               </a:spcBef>
             </a:pPr>
             <a:r>
-              <a:rPr sz="1200" b="1">
-                <a:solidFill>
-                  <a:srgbClr val="0D9488"/>
+              <a:rPr sz="1100" b="0">
+                <a:solidFill>
+                  <a:srgbClr val="334155"/>
+                </a:solidFill>
+                <a:latin typeface="Calibri"/>
+              </a:rPr>
+              <a:t>产出可视化 HTML</a:t>
+            </a:r>
+          </a:p>
+          <a:p>
+            <a:pPr algn="ctr">
+              <a:spcBef>
+                <a:spcPts val="1400"/>
+              </a:spcBef>
+            </a:pPr>
+            <a:r>
+              <a:rPr sz="1300" b="1">
+                <a:solidFill>
+                  <a:srgbClr val="047857"/>
                 </a:solidFill>
                 <a:latin typeface="Calibri"/>
               </a:rPr>
@@ -4694,18 +4358,18 @@
       </p:sp>
       <p:sp>
         <p:nvSpPr>
-          <p:cNvPr id="8" name="Rounded Rectangle 7"/>
+          <p:cNvPr id="10" name="Rounded Rectangle 9"/>
           <p:cNvSpPr/>
           <p:nvPr/>
         </p:nvSpPr>
         <p:spPr>
           <a:xfrm>
-            <a:off x="2075688" y="1417320"/>
-            <a:ext cx="1554480" cy="3840480"/>
+            <a:off x="2331720" y="1280160"/>
+            <a:ext cx="1828800" cy="3657600"/>
           </a:xfrm>
           <a:prstGeom prst="roundRect">
             <a:avLst>
-              <a:gd name="adj" fmla="val 10000"/>
+              <a:gd name="adj" fmla="val 8000"/>
             </a:avLst>
           </a:prstGeom>
           <a:solidFill>
@@ -4713,7 +4377,7 @@
           </a:solidFill>
           <a:ln>
             <a:solidFill>
-              <a:srgbClr val="0D9488"/>
+              <a:srgbClr val="047857"/>
             </a:solidFill>
           </a:ln>
         </p:spPr>
@@ -4741,14 +4405,57 @@
       </p:sp>
       <p:sp>
         <p:nvSpPr>
-          <p:cNvPr id="9" name="TextBox 8"/>
+          <p:cNvPr id="11" name="Oval 10"/>
+          <p:cNvSpPr/>
+          <p:nvPr/>
+        </p:nvSpPr>
+        <p:spPr>
+          <a:xfrm>
+            <a:off x="2971800" y="1463040"/>
+            <a:ext cx="502920" cy="502920"/>
+          </a:xfrm>
+          <a:prstGeom prst="ellipse">
+            <a:avLst/>
+          </a:prstGeom>
+          <a:solidFill>
+            <a:srgbClr val="047857"/>
+          </a:solidFill>
+          <a:ln>
+            <a:noFill/>
+          </a:ln>
+        </p:spPr>
+        <p:style>
+          <a:lnRef idx="1">
+            <a:schemeClr val="accent1"/>
+          </a:lnRef>
+          <a:fillRef idx="3">
+            <a:schemeClr val="accent1"/>
+          </a:fillRef>
+          <a:effectRef idx="2">
+            <a:schemeClr val="accent1"/>
+          </a:effectRef>
+          <a:fontRef idx="minor">
+            <a:schemeClr val="lt1"/>
+          </a:fontRef>
+        </p:style>
+        <p:txBody>
+          <a:bodyPr rtlCol="0" anchor="ctr"/>
+          <a:lstStyle/>
+          <a:p>
+            <a:pPr algn="ctr"/>
+          </a:p>
+        </p:txBody>
+      </p:sp>
+      <p:sp>
+        <p:nvSpPr>
+          <p:cNvPr id="12" name="TextBox 11"/>
           <p:cNvSpPr txBox="1"/>
           <p:nvPr/>
         </p:nvSpPr>
         <p:spPr>
           <a:xfrm>
-            <a:off x="2167128" y="1600200"/>
-            <a:ext cx="1371600" cy="3474720"/>
+            <a:off x="2971800" y="1536192"/>
+            <a:ext cx="502920" cy="411480"/>
           </a:xfrm>
           <a:prstGeom prst="rect">
             <a:avLst/>
@@ -4761,20 +4468,56 @@
           </a:bodyPr>
           <a:lstStyle/>
           <a:p>
+            <a:pPr algn="ctr"/>
             <a:r>
               <a:rPr sz="1400" b="1">
                 <a:solidFill>
+                  <a:srgbClr val="FFFFFF"/>
+                </a:solidFill>
+                <a:latin typeface="Calibri"/>
+              </a:rPr>
+              <a:t>2</a:t>
+            </a:r>
+          </a:p>
+        </p:txBody>
+      </p:sp>
+      <p:sp>
+        <p:nvSpPr>
+          <p:cNvPr id="13" name="TextBox 12"/>
+          <p:cNvSpPr txBox="1"/>
+          <p:nvPr/>
+        </p:nvSpPr>
+        <p:spPr>
+          <a:xfrm>
+            <a:off x="2441448" y="2148840"/>
+            <a:ext cx="1600200" cy="2560320"/>
+          </a:xfrm>
+          <a:prstGeom prst="rect">
+            <a:avLst/>
+          </a:prstGeom>
+          <a:noFill/>
+        </p:spPr>
+        <p:txBody>
+          <a:bodyPr wrap="square">
+            <a:spAutoFit/>
+          </a:bodyPr>
+          <a:lstStyle/>
+          <a:p>
+            <a:pPr algn="ctr"/>
+            <a:r>
+              <a:rPr sz="1600" b="1">
+                <a:solidFill>
                   <a:srgbClr val="0F172A"/>
                 </a:solidFill>
                 <a:latin typeface="Calibri"/>
               </a:rPr>
-              <a:t>2. 落盘</a:t>
-            </a:r>
-          </a:p>
-          <a:p>
-            <a:pPr>
+              <a:t>落盘</a:t>
+            </a:r>
+          </a:p>
+          <a:p>
+            <a:pPr algn="ctr">
               <a:spcBef>
-                <a:spcPts val="1000"/>
+                <a:spcPts val="400"/>
               </a:spcBef>
             </a:pPr>
             <a:r>
@@ -4784,19 +4527,35 @@
                 </a:solidFill>
                 <a:latin typeface="Calibri"/>
               </a:rPr>
-              <a:t>write / edit 写入 workspace</a:t>
-            </a:r>
-          </a:p>
-          <a:p>
-            <a:pPr>
+              <a:t>write 写入</a:t>
+            </a:r>
+          </a:p>
+          <a:p>
+            <a:pPr algn="ctr">
               <a:spcBef>
-                <a:spcPts val="1600"/>
+                <a:spcPts val="400"/>
               </a:spcBef>
             </a:pPr>
             <a:r>
-              <a:rPr sz="1200" b="1">
-                <a:solidFill>
-                  <a:srgbClr val="0D9488"/>
+              <a:rPr sz="1100" b="0">
+                <a:solidFill>
+                  <a:srgbClr val="334155"/>
+                </a:solidFill>
+                <a:latin typeface="Calibri"/>
+              </a:rPr>
+              <a:t>workspace</a:t>
+            </a:r>
+          </a:p>
+          <a:p>
+            <a:pPr algn="ctr">
+              <a:spcBef>
+                <a:spcPts val="1400"/>
+              </a:spcBef>
+            </a:pPr>
+            <a:r>
+              <a:rPr sz="1300" b="1">
+                <a:solidFill>
+                  <a:srgbClr val="047857"/>
                 </a:solidFill>
                 <a:latin typeface="Calibri"/>
               </a:rPr>
@@ -4807,18 +4566,18 @@
       </p:sp>
       <p:sp>
         <p:nvSpPr>
-          <p:cNvPr id="10" name="Rounded Rectangle 9"/>
+          <p:cNvPr id="14" name="Rounded Rectangle 13"/>
           <p:cNvSpPr/>
           <p:nvPr/>
         </p:nvSpPr>
         <p:spPr>
           <a:xfrm>
-            <a:off x="3739896" y="1417320"/>
-            <a:ext cx="1554480" cy="3840480"/>
+            <a:off x="4297680" y="1280160"/>
+            <a:ext cx="1828800" cy="3657600"/>
           </a:xfrm>
           <a:prstGeom prst="roundRect">
             <a:avLst>
-              <a:gd name="adj" fmla="val 10000"/>
+              <a:gd name="adj" fmla="val 8000"/>
             </a:avLst>
           </a:prstGeom>
           <a:solidFill>
@@ -4826,7 +4585,7 @@
           </a:solidFill>
           <a:ln>
             <a:solidFill>
-              <a:srgbClr val="0D9488"/>
+              <a:srgbClr val="047857"/>
             </a:solidFill>
           </a:ln>
         </p:spPr>
@@ -4854,14 +4613,57 @@
       </p:sp>
       <p:sp>
         <p:nvSpPr>
-          <p:cNvPr id="11" name="TextBox 10"/>
+          <p:cNvPr id="15" name="Oval 14"/>
+          <p:cNvSpPr/>
+          <p:nvPr/>
+        </p:nvSpPr>
+        <p:spPr>
+          <a:xfrm>
+            <a:off x="4937760" y="1463040"/>
+            <a:ext cx="502920" cy="502920"/>
+          </a:xfrm>
+          <a:prstGeom prst="ellipse">
+            <a:avLst/>
+          </a:prstGeom>
+          <a:solidFill>
+            <a:srgbClr val="047857"/>
+          </a:solidFill>
+          <a:ln>
+            <a:noFill/>
+          </a:ln>
+        </p:spPr>
+        <p:style>
+          <a:lnRef idx="1">
+            <a:schemeClr val="accent1"/>
+          </a:lnRef>
+          <a:fillRef idx="3">
+            <a:schemeClr val="accent1"/>
+          </a:fillRef>
+          <a:effectRef idx="2">
+            <a:schemeClr val="accent1"/>
+          </a:effectRef>
+          <a:fontRef idx="minor">
+            <a:schemeClr val="lt1"/>
+          </a:fontRef>
+        </p:style>
+        <p:txBody>
+          <a:bodyPr rtlCol="0" anchor="ctr"/>
+          <a:lstStyle/>
+          <a:p>
+            <a:pPr algn="ctr"/>
+          </a:p>
+        </p:txBody>
+      </p:sp>
+      <p:sp>
+        <p:nvSpPr>
+          <p:cNvPr id="16" name="TextBox 15"/>
           <p:cNvSpPr txBox="1"/>
           <p:nvPr/>
         </p:nvSpPr>
         <p:spPr>
           <a:xfrm>
-            <a:off x="3831336" y="1600200"/>
-            <a:ext cx="1371600" cy="3474720"/>
+            <a:off x="4937760" y="1536192"/>
+            <a:ext cx="502920" cy="411480"/>
           </a:xfrm>
           <a:prstGeom prst="rect">
             <a:avLst/>
@@ -4874,20 +4676,56 @@
           </a:bodyPr>
           <a:lstStyle/>
           <a:p>
+            <a:pPr algn="ctr"/>
             <a:r>
               <a:rPr sz="1400" b="1">
                 <a:solidFill>
+                  <a:srgbClr val="FFFFFF"/>
+                </a:solidFill>
+                <a:latin typeface="Calibri"/>
+              </a:rPr>
+              <a:t>3</a:t>
+            </a:r>
+          </a:p>
+        </p:txBody>
+      </p:sp>
+      <p:sp>
+        <p:nvSpPr>
+          <p:cNvPr id="17" name="TextBox 16"/>
+          <p:cNvSpPr txBox="1"/>
+          <p:nvPr/>
+        </p:nvSpPr>
+        <p:spPr>
+          <a:xfrm>
+            <a:off x="4407408" y="2148840"/>
+            <a:ext cx="1600200" cy="2560320"/>
+          </a:xfrm>
+          <a:prstGeom prst="rect">
+            <a:avLst/>
+          </a:prstGeom>
+          <a:noFill/>
+        </p:spPr>
+        <p:txBody>
+          <a:bodyPr wrap="square">
+            <a:spAutoFit/>
+          </a:bodyPr>
+          <a:lstStyle/>
+          <a:p>
+            <a:pPr algn="ctr"/>
+            <a:r>
+              <a:rPr sz="1600" b="1">
+                <a:solidFill>
                   <a:srgbClr val="0F172A"/>
                 </a:solidFill>
                 <a:latin typeface="Calibri"/>
               </a:rPr>
-              <a:t>3. 同步</a:t>
-            </a:r>
-          </a:p>
-          <a:p>
-            <a:pPr>
+              <a:t>同步</a:t>
+            </a:r>
+          </a:p>
+          <a:p>
+            <a:pPr algn="ctr">
               <a:spcBef>
-                <a:spcPts val="1000"/>
+                <a:spcPts val="400"/>
               </a:spcBef>
             </a:pPr>
             <a:r>
@@ -4897,19 +4735,35 @@
                 </a:solidFill>
                 <a:latin typeface="Calibri"/>
               </a:rPr>
-              <a:t>workspace → 华为云空间</a:t>
-            </a:r>
-          </a:p>
-          <a:p>
-            <a:pPr>
+              <a:t>workspace →</a:t>
+            </a:r>
+          </a:p>
+          <a:p>
+            <a:pPr algn="ctr">
               <a:spcBef>
-                <a:spcPts val="1600"/>
+                <a:spcPts val="400"/>
               </a:spcBef>
             </a:pPr>
             <a:r>
-              <a:rPr sz="1200" b="1">
-                <a:solidFill>
-                  <a:srgbClr val="0D9488"/>
+              <a:rPr sz="1100" b="0">
+                <a:solidFill>
+                  <a:srgbClr val="334155"/>
+                </a:solidFill>
+                <a:latin typeface="Calibri"/>
+              </a:rPr>
+              <a:t>华为云空间</a:t>
+            </a:r>
+          </a:p>
+          <a:p>
+            <a:pPr algn="ctr">
+              <a:spcBef>
+                <a:spcPts val="1400"/>
+              </a:spcBef>
+            </a:pPr>
+            <a:r>
+              <a:rPr sz="1300" b="1">
+                <a:solidFill>
+                  <a:srgbClr val="047857"/>
                 </a:solidFill>
                 <a:latin typeface="Calibri"/>
               </a:rPr>
@@ -4920,18 +4774,434 @@
       </p:sp>
       <p:sp>
         <p:nvSpPr>
-          <p:cNvPr id="12" name="Rounded Rectangle 11"/>
+          <p:cNvPr id="18" name="Rounded Rectangle 17"/>
           <p:cNvSpPr/>
           <p:nvPr/>
         </p:nvSpPr>
         <p:spPr>
           <a:xfrm>
-            <a:off x="5404104" y="1417320"/>
-            <a:ext cx="1554480" cy="3840480"/>
+            <a:off x="6263639" y="1280160"/>
+            <a:ext cx="1828800" cy="3657600"/>
           </a:xfrm>
           <a:prstGeom prst="roundRect">
             <a:avLst>
-              <a:gd name="adj" fmla="val 10000"/>
+              <a:gd name="adj" fmla="val 8000"/>
+            </a:avLst>
+          </a:prstGeom>
+          <a:solidFill>
+            <a:srgbClr val="FFFBEB"/>
+          </a:solidFill>
+          <a:ln>
+            <a:solidFill>
+              <a:srgbClr val="B45309"/>
+            </a:solidFill>
+          </a:ln>
+        </p:spPr>
+        <p:style>
+          <a:lnRef idx="1">
+            <a:schemeClr val="accent1"/>
+          </a:lnRef>
+          <a:fillRef idx="3">
+            <a:schemeClr val="accent1"/>
+          </a:fillRef>
+          <a:effectRef idx="2">
+            <a:schemeClr val="accent1"/>
+          </a:effectRef>
+          <a:fontRef idx="minor">
+            <a:schemeClr val="lt1"/>
+          </a:fontRef>
+        </p:style>
+        <p:txBody>
+          <a:bodyPr rtlCol="0" anchor="ctr"/>
+          <a:lstStyle/>
+          <a:p>
+            <a:pPr algn="ctr"/>
+          </a:p>
+        </p:txBody>
+      </p:sp>
+      <p:sp>
+        <p:nvSpPr>
+          <p:cNvPr id="19" name="Oval 18"/>
+          <p:cNvSpPr/>
+          <p:nvPr/>
+        </p:nvSpPr>
+        <p:spPr>
+          <a:xfrm>
+            <a:off x="6903719" y="1463040"/>
+            <a:ext cx="502920" cy="502920"/>
+          </a:xfrm>
+          <a:prstGeom prst="ellipse">
+            <a:avLst/>
+          </a:prstGeom>
+          <a:solidFill>
+            <a:srgbClr val="B45309"/>
+          </a:solidFill>
+          <a:ln>
+            <a:noFill/>
+          </a:ln>
+        </p:spPr>
+        <p:style>
+          <a:lnRef idx="1">
+            <a:schemeClr val="accent1"/>
+          </a:lnRef>
+          <a:fillRef idx="3">
+            <a:schemeClr val="accent1"/>
+          </a:fillRef>
+          <a:effectRef idx="2">
+            <a:schemeClr val="accent1"/>
+          </a:effectRef>
+          <a:fontRef idx="minor">
+            <a:schemeClr val="lt1"/>
+          </a:fontRef>
+        </p:style>
+        <p:txBody>
+          <a:bodyPr rtlCol="0" anchor="ctr"/>
+          <a:lstStyle/>
+          <a:p>
+            <a:pPr algn="ctr"/>
+          </a:p>
+        </p:txBody>
+      </p:sp>
+      <p:sp>
+        <p:nvSpPr>
+          <p:cNvPr id="20" name="TextBox 19"/>
+          <p:cNvSpPr txBox="1"/>
+          <p:nvPr/>
+        </p:nvSpPr>
+        <p:spPr>
+          <a:xfrm>
+            <a:off x="6903719" y="1536192"/>
+            <a:ext cx="502920" cy="411480"/>
+          </a:xfrm>
+          <a:prstGeom prst="rect">
+            <a:avLst/>
+          </a:prstGeom>
+          <a:noFill/>
+        </p:spPr>
+        <p:txBody>
+          <a:bodyPr wrap="square">
+            <a:spAutoFit/>
+          </a:bodyPr>
+          <a:lstStyle/>
+          <a:p>
+            <a:pPr algn="ctr"/>
+            <a:r>
+              <a:rPr sz="1400" b="1">
+                <a:solidFill>
+                  <a:srgbClr val="FFFFFF"/>
+                </a:solidFill>
+                <a:latin typeface="Calibri"/>
+              </a:rPr>
+              <a:t>4</a:t>
+            </a:r>
+          </a:p>
+        </p:txBody>
+      </p:sp>
+      <p:sp>
+        <p:nvSpPr>
+          <p:cNvPr id="21" name="TextBox 20"/>
+          <p:cNvSpPr txBox="1"/>
+          <p:nvPr/>
+        </p:nvSpPr>
+        <p:spPr>
+          <a:xfrm>
+            <a:off x="6373367" y="2148840"/>
+            <a:ext cx="1600200" cy="2560320"/>
+          </a:xfrm>
+          <a:prstGeom prst="rect">
+            <a:avLst/>
+          </a:prstGeom>
+          <a:noFill/>
+        </p:spPr>
+        <p:txBody>
+          <a:bodyPr wrap="square">
+            <a:spAutoFit/>
+          </a:bodyPr>
+          <a:lstStyle/>
+          <a:p>
+            <a:pPr algn="ctr"/>
+            <a:r>
+              <a:rPr sz="1600" b="1">
+                <a:solidFill>
+                  <a:srgbClr val="0F172A"/>
+                </a:solidFill>
+                <a:latin typeface="Calibri"/>
+              </a:rPr>
+              <a:t>渲染</a:t>
+            </a:r>
+          </a:p>
+          <a:p>
+            <a:pPr algn="ctr">
+              <a:spcBef>
+                <a:spcPts val="400"/>
+              </a:spcBef>
+            </a:pPr>
+            <a:r>
+              <a:rPr sz="1100" b="0">
+                <a:solidFill>
+                  <a:srgbClr val="334155"/>
+                </a:solidFill>
+                <a:latin typeface="Calibri"/>
+              </a:rPr>
+              <a:t>iframe / WebView</a:t>
+            </a:r>
+          </a:p>
+          <a:p>
+            <a:pPr algn="ctr">
+              <a:spcBef>
+                <a:spcPts val="400"/>
+              </a:spcBef>
+            </a:pPr>
+            <a:r>
+              <a:rPr sz="1100" b="0">
+                <a:solidFill>
+                  <a:srgbClr val="334155"/>
+                </a:solidFill>
+                <a:latin typeface="Calibri"/>
+              </a:rPr>
+              <a:t>会话内展示</a:t>
+            </a:r>
+          </a:p>
+          <a:p>
+            <a:pPr algn="ctr">
+              <a:spcBef>
+                <a:spcPts val="1400"/>
+              </a:spcBef>
+            </a:pPr>
+            <a:r>
+              <a:rPr sz="1300" b="1">
+                <a:solidFill>
+                  <a:srgbClr val="B45309"/>
+                </a:solidFill>
+                <a:latin typeface="Calibri"/>
+              </a:rPr>
+              <a:t>缺口</a:t>
+            </a:r>
+          </a:p>
+        </p:txBody>
+      </p:sp>
+      <p:sp>
+        <p:nvSpPr>
+          <p:cNvPr id="22" name="Rounded Rectangle 21"/>
+          <p:cNvSpPr/>
+          <p:nvPr/>
+        </p:nvSpPr>
+        <p:spPr>
+          <a:xfrm>
+            <a:off x="8229600" y="1280160"/>
+            <a:ext cx="1828800" cy="3657600"/>
+          </a:xfrm>
+          <a:prstGeom prst="roundRect">
+            <a:avLst>
+              <a:gd name="adj" fmla="val 8000"/>
+            </a:avLst>
+          </a:prstGeom>
+          <a:solidFill>
+            <a:srgbClr val="FFFBEB"/>
+          </a:solidFill>
+          <a:ln>
+            <a:solidFill>
+              <a:srgbClr val="B45309"/>
+            </a:solidFill>
+          </a:ln>
+        </p:spPr>
+        <p:style>
+          <a:lnRef idx="1">
+            <a:schemeClr val="accent1"/>
+          </a:lnRef>
+          <a:fillRef idx="3">
+            <a:schemeClr val="accent1"/>
+          </a:fillRef>
+          <a:effectRef idx="2">
+            <a:schemeClr val="accent1"/>
+          </a:effectRef>
+          <a:fontRef idx="minor">
+            <a:schemeClr val="lt1"/>
+          </a:fontRef>
+        </p:style>
+        <p:txBody>
+          <a:bodyPr rtlCol="0" anchor="ctr"/>
+          <a:lstStyle/>
+          <a:p>
+            <a:pPr algn="ctr"/>
+          </a:p>
+        </p:txBody>
+      </p:sp>
+      <p:sp>
+        <p:nvSpPr>
+          <p:cNvPr id="23" name="Oval 22"/>
+          <p:cNvSpPr/>
+          <p:nvPr/>
+        </p:nvSpPr>
+        <p:spPr>
+          <a:xfrm>
+            <a:off x="8869680" y="1463040"/>
+            <a:ext cx="502920" cy="502920"/>
+          </a:xfrm>
+          <a:prstGeom prst="ellipse">
+            <a:avLst/>
+          </a:prstGeom>
+          <a:solidFill>
+            <a:srgbClr val="B45309"/>
+          </a:solidFill>
+          <a:ln>
+            <a:noFill/>
+          </a:ln>
+        </p:spPr>
+        <p:style>
+          <a:lnRef idx="1">
+            <a:schemeClr val="accent1"/>
+          </a:lnRef>
+          <a:fillRef idx="3">
+            <a:schemeClr val="accent1"/>
+          </a:fillRef>
+          <a:effectRef idx="2">
+            <a:schemeClr val="accent1"/>
+          </a:effectRef>
+          <a:fontRef idx="minor">
+            <a:schemeClr val="lt1"/>
+          </a:fontRef>
+        </p:style>
+        <p:txBody>
+          <a:bodyPr rtlCol="0" anchor="ctr"/>
+          <a:lstStyle/>
+          <a:p>
+            <a:pPr algn="ctr"/>
+          </a:p>
+        </p:txBody>
+      </p:sp>
+      <p:sp>
+        <p:nvSpPr>
+          <p:cNvPr id="24" name="TextBox 23"/>
+          <p:cNvSpPr txBox="1"/>
+          <p:nvPr/>
+        </p:nvSpPr>
+        <p:spPr>
+          <a:xfrm>
+            <a:off x="8869680" y="1536192"/>
+            <a:ext cx="502920" cy="411480"/>
+          </a:xfrm>
+          <a:prstGeom prst="rect">
+            <a:avLst/>
+          </a:prstGeom>
+          <a:noFill/>
+        </p:spPr>
+        <p:txBody>
+          <a:bodyPr wrap="square">
+            <a:spAutoFit/>
+          </a:bodyPr>
+          <a:lstStyle/>
+          <a:p>
+            <a:pPr algn="ctr"/>
+            <a:r>
+              <a:rPr sz="1400" b="1">
+                <a:solidFill>
+                  <a:srgbClr val="FFFFFF"/>
+                </a:solidFill>
+                <a:latin typeface="Calibri"/>
+              </a:rPr>
+              <a:t>5</a:t>
+            </a:r>
+          </a:p>
+        </p:txBody>
+      </p:sp>
+      <p:sp>
+        <p:nvSpPr>
+          <p:cNvPr id="25" name="TextBox 24"/>
+          <p:cNvSpPr txBox="1"/>
+          <p:nvPr/>
+        </p:nvSpPr>
+        <p:spPr>
+          <a:xfrm>
+            <a:off x="8339328" y="2148840"/>
+            <a:ext cx="1600200" cy="2560320"/>
+          </a:xfrm>
+          <a:prstGeom prst="rect">
+            <a:avLst/>
+          </a:prstGeom>
+          <a:noFill/>
+        </p:spPr>
+        <p:txBody>
+          <a:bodyPr wrap="square">
+            <a:spAutoFit/>
+          </a:bodyPr>
+          <a:lstStyle/>
+          <a:p>
+            <a:pPr algn="ctr"/>
+            <a:r>
+              <a:rPr sz="1600" b="1">
+                <a:solidFill>
+                  <a:srgbClr val="0F172A"/>
+                </a:solidFill>
+                <a:latin typeface="Calibri"/>
+              </a:rPr>
+              <a:t>安全</a:t>
+            </a:r>
+          </a:p>
+          <a:p>
+            <a:pPr algn="ctr">
+              <a:spcBef>
+                <a:spcPts val="400"/>
+              </a:spcBef>
+            </a:pPr>
+            <a:r>
+              <a:rPr sz="1100" b="0">
+                <a:solidFill>
+                  <a:srgbClr val="334155"/>
+                </a:solidFill>
+                <a:latin typeface="Calibri"/>
+              </a:rPr>
+              <a:t>sandbox / CSP</a:t>
+            </a:r>
+          </a:p>
+          <a:p>
+            <a:pPr algn="ctr">
+              <a:spcBef>
+                <a:spcPts val="400"/>
+              </a:spcBef>
+            </a:pPr>
+            <a:r>
+              <a:rPr sz="1100" b="0">
+                <a:solidFill>
+                  <a:srgbClr val="334155"/>
+                </a:solidFill>
+                <a:latin typeface="Calibri"/>
+              </a:rPr>
+              <a:t>不可信隔离</a:t>
+            </a:r>
+          </a:p>
+          <a:p>
+            <a:pPr algn="ctr">
+              <a:spcBef>
+                <a:spcPts val="1400"/>
+              </a:spcBef>
+            </a:pPr>
+            <a:r>
+              <a:rPr sz="1300" b="1">
+                <a:solidFill>
+                  <a:srgbClr val="B45309"/>
+                </a:solidFill>
+                <a:latin typeface="Calibri"/>
+              </a:rPr>
+              <a:t>缺口</a:t>
+            </a:r>
+          </a:p>
+        </p:txBody>
+      </p:sp>
+      <p:sp>
+        <p:nvSpPr>
+          <p:cNvPr id="26" name="Rounded Rectangle 25"/>
+          <p:cNvSpPr/>
+          <p:nvPr/>
+        </p:nvSpPr>
+        <p:spPr>
+          <a:xfrm>
+            <a:off x="10195560" y="1280160"/>
+            <a:ext cx="1828800" cy="3657600"/>
+          </a:xfrm>
+          <a:prstGeom prst="roundRect">
+            <a:avLst>
+              <a:gd name="adj" fmla="val 8000"/>
             </a:avLst>
           </a:prstGeom>
           <a:solidFill>
@@ -4939,7 +5209,7 @@
           </a:solidFill>
           <a:ln>
             <a:solidFill>
-              <a:srgbClr val="E2E8F0"/>
+              <a:srgbClr val="64748B"/>
             </a:solidFill>
           </a:ln>
         </p:spPr>
@@ -4967,93 +5237,23 @@
       </p:sp>
       <p:sp>
         <p:nvSpPr>
-          <p:cNvPr id="13" name="TextBox 12"/>
-          <p:cNvSpPr txBox="1"/>
+          <p:cNvPr id="27" name="Oval 26"/>
+          <p:cNvSpPr/>
           <p:nvPr/>
         </p:nvSpPr>
         <p:spPr>
           <a:xfrm>
-            <a:off x="5495544" y="1600200"/>
-            <a:ext cx="1371600" cy="3474720"/>
-          </a:xfrm>
-          <a:prstGeom prst="rect">
+            <a:off x="10835640" y="1463040"/>
+            <a:ext cx="502920" cy="502920"/>
+          </a:xfrm>
+          <a:prstGeom prst="ellipse">
             <a:avLst/>
           </a:prstGeom>
-          <a:noFill/>
-        </p:spPr>
-        <p:txBody>
-          <a:bodyPr wrap="square">
-            <a:spAutoFit/>
-          </a:bodyPr>
-          <a:lstStyle/>
-          <a:p>
-            <a:r>
-              <a:rPr sz="1400" b="1">
-                <a:solidFill>
-                  <a:srgbClr val="0F172A"/>
-                </a:solidFill>
-                <a:latin typeface="Calibri"/>
-              </a:rPr>
-              <a:t>4. 识别</a:t>
-            </a:r>
-          </a:p>
-          <a:p>
-            <a:pPr>
-              <a:spcBef>
-                <a:spcPts val="1000"/>
-              </a:spcBef>
-            </a:pPr>
-            <a:r>
-              <a:rPr sz="1100" b="0">
-                <a:solidFill>
-                  <a:srgbClr val="334155"/>
-                </a:solidFill>
-                <a:latin typeface="Calibri"/>
-              </a:rPr>
-              <a:t>MIME / 扩展名 / preview hint</a:t>
-            </a:r>
-          </a:p>
-          <a:p>
-            <a:pPr>
-              <a:spcBef>
-                <a:spcPts val="1600"/>
-              </a:spcBef>
-            </a:pPr>
-            <a:r>
-              <a:rPr sz="1200" b="1">
-                <a:solidFill>
-                  <a:srgbClr val="64748B"/>
-                </a:solidFill>
-                <a:latin typeface="Calibri"/>
-              </a:rPr>
-              <a:t>待补齐</a:t>
-            </a:r>
-          </a:p>
-        </p:txBody>
-      </p:sp>
-      <p:sp>
-        <p:nvSpPr>
-          <p:cNvPr id="14" name="Rounded Rectangle 13"/>
-          <p:cNvSpPr/>
-          <p:nvPr/>
-        </p:nvSpPr>
-        <p:spPr>
-          <a:xfrm>
-            <a:off x="7068312" y="1417320"/>
-            <a:ext cx="1554480" cy="3840480"/>
-          </a:xfrm>
-          <a:prstGeom prst="roundRect">
-            <a:avLst>
-              <a:gd name="adj" fmla="val 10000"/>
-            </a:avLst>
-          </a:prstGeom>
           <a:solidFill>
-            <a:srgbClr val="FEF3C7"/>
+            <a:srgbClr val="64748B"/>
           </a:solidFill>
           <a:ln>
-            <a:solidFill>
-              <a:srgbClr val="B45309"/>
-            </a:solidFill>
+            <a:noFill/>
           </a:ln>
         </p:spPr>
         <p:style>
@@ -5080,14 +5280,14 @@
       </p:sp>
       <p:sp>
         <p:nvSpPr>
-          <p:cNvPr id="15" name="TextBox 14"/>
+          <p:cNvPr id="28" name="TextBox 27"/>
           <p:cNvSpPr txBox="1"/>
           <p:nvPr/>
         </p:nvSpPr>
         <p:spPr>
           <a:xfrm>
-            <a:off x="7159752" y="1600200"/>
-            <a:ext cx="1371600" cy="3474720"/>
+            <a:off x="10835640" y="1536192"/>
+            <a:ext cx="502920" cy="411480"/>
           </a:xfrm>
           <a:prstGeom prst="rect">
             <a:avLst/>
@@ -5100,107 +5300,29 @@
           </a:bodyPr>
           <a:lstStyle/>
           <a:p>
+            <a:pPr algn="ctr"/>
             <a:r>
               <a:rPr sz="1400" b="1">
                 <a:solidFill>
-                  <a:srgbClr val="0F172A"/>
-                </a:solidFill>
-                <a:latin typeface="Calibri"/>
-              </a:rPr>
-              <a:t>5. 渲染</a:t>
-            </a:r>
-          </a:p>
-          <a:p>
-            <a:pPr>
-              <a:spcBef>
-                <a:spcPts val="1000"/>
-              </a:spcBef>
-            </a:pPr>
-            <a:r>
-              <a:rPr sz="1100" b="0">
-                <a:solidFill>
-                  <a:srgbClr val="334155"/>
-                </a:solidFill>
-                <a:latin typeface="Calibri"/>
-              </a:rPr>
-              <a:t>iframe（Web）/ WebView（原生）</a:t>
-            </a:r>
-          </a:p>
-          <a:p>
-            <a:pPr>
-              <a:spcBef>
-                <a:spcPts val="1600"/>
-              </a:spcBef>
-            </a:pPr>
-            <a:r>
-              <a:rPr sz="1200" b="1">
-                <a:solidFill>
-                  <a:srgbClr val="B45309"/>
-                </a:solidFill>
-                <a:latin typeface="Calibri"/>
-              </a:rPr>
-              <a:t>缺口</a:t>
-            </a:r>
-          </a:p>
-        </p:txBody>
-      </p:sp>
-      <p:sp>
-        <p:nvSpPr>
-          <p:cNvPr id="16" name="Rounded Rectangle 15"/>
-          <p:cNvSpPr/>
-          <p:nvPr/>
-        </p:nvSpPr>
-        <p:spPr>
-          <a:xfrm>
-            <a:off x="8732520" y="1417320"/>
-            <a:ext cx="1554480" cy="3840480"/>
-          </a:xfrm>
-          <a:prstGeom prst="roundRect">
-            <a:avLst>
-              <a:gd name="adj" fmla="val 10000"/>
-            </a:avLst>
-          </a:prstGeom>
-          <a:solidFill>
-            <a:srgbClr val="FEF3C7"/>
-          </a:solidFill>
-          <a:ln>
-            <a:solidFill>
-              <a:srgbClr val="B45309"/>
-            </a:solidFill>
-          </a:ln>
-        </p:spPr>
-        <p:style>
-          <a:lnRef idx="1">
-            <a:schemeClr val="accent1"/>
-          </a:lnRef>
-          <a:fillRef idx="3">
-            <a:schemeClr val="accent1"/>
-          </a:fillRef>
-          <a:effectRef idx="2">
-            <a:schemeClr val="accent1"/>
-          </a:effectRef>
-          <a:fontRef idx="minor">
-            <a:schemeClr val="lt1"/>
-          </a:fontRef>
-        </p:style>
-        <p:txBody>
-          <a:bodyPr rtlCol="0" anchor="ctr"/>
-          <a:lstStyle/>
-          <a:p>
-            <a:pPr algn="ctr"/>
-          </a:p>
-        </p:txBody>
-      </p:sp>
-      <p:sp>
-        <p:nvSpPr>
-          <p:cNvPr id="17" name="TextBox 16"/>
+                  <a:srgbClr val="FFFFFF"/>
+                </a:solidFill>
+                <a:latin typeface="Calibri"/>
+              </a:rPr>
+              <a:t>6</a:t>
+            </a:r>
+          </a:p>
+        </p:txBody>
+      </p:sp>
+      <p:sp>
+        <p:nvSpPr>
+          <p:cNvPr id="29" name="TextBox 28"/>
           <p:cNvSpPr txBox="1"/>
           <p:nvPr/>
         </p:nvSpPr>
         <p:spPr>
           <a:xfrm>
-            <a:off x="8823960" y="1600200"/>
-            <a:ext cx="1371600" cy="3474720"/>
+            <a:off x="10305288" y="2148840"/>
+            <a:ext cx="1600200" cy="2560320"/>
           </a:xfrm>
           <a:prstGeom prst="rect">
             <a:avLst/>
@@ -5213,20 +5335,21 @@
           </a:bodyPr>
           <a:lstStyle/>
           <a:p>
-            <a:r>
-              <a:rPr sz="1400" b="1">
+            <a:pPr algn="ctr"/>
+            <a:r>
+              <a:rPr sz="1600" b="1">
                 <a:solidFill>
                   <a:srgbClr val="0F172A"/>
                 </a:solidFill>
                 <a:latin typeface="Calibri"/>
               </a:rPr>
-              <a:t>6. 安全</a:t>
-            </a:r>
-          </a:p>
-          <a:p>
-            <a:pPr>
+              <a:t>分享</a:t>
+            </a:r>
+          </a:p>
+          <a:p>
+            <a:pPr algn="ctr">
               <a:spcBef>
-                <a:spcPts val="1000"/>
+                <a:spcPts val="400"/>
               </a:spcBef>
             </a:pPr>
             <a:r>
@@ -5236,84 +5359,53 @@
                 </a:solidFill>
                 <a:latin typeface="Calibri"/>
               </a:rPr>
-              <a:t>sandbox / CSP / 独立源</a:t>
-            </a:r>
-          </a:p>
-          <a:p>
-            <a:pPr>
+              <a:t>链接 / 回放</a:t>
+            </a:r>
+          </a:p>
+          <a:p>
+            <a:pPr algn="ctr">
               <a:spcBef>
-                <a:spcPts val="1600"/>
+                <a:spcPts val="400"/>
               </a:spcBef>
             </a:pPr>
             <a:r>
-              <a:rPr sz="1200" b="1">
-                <a:solidFill>
-                  <a:srgbClr val="B45309"/>
-                </a:solidFill>
-                <a:latin typeface="Calibri"/>
-              </a:rPr>
-              <a:t>缺口</a:t>
-            </a:r>
-          </a:p>
-        </p:txBody>
-      </p:sp>
-      <p:sp>
-        <p:nvSpPr>
-          <p:cNvPr id="18" name="Rounded Rectangle 17"/>
-          <p:cNvSpPr/>
-          <p:nvPr/>
-        </p:nvSpPr>
-        <p:spPr>
-          <a:xfrm>
-            <a:off x="10396728" y="1417320"/>
-            <a:ext cx="1554480" cy="3840480"/>
-          </a:xfrm>
-          <a:prstGeom prst="roundRect">
-            <a:avLst>
-              <a:gd name="adj" fmla="val 10000"/>
-            </a:avLst>
-          </a:prstGeom>
-          <a:solidFill>
-            <a:srgbClr val="FFFFFF"/>
-          </a:solidFill>
-          <a:ln>
-            <a:solidFill>
-              <a:srgbClr val="E2E8F0"/>
-            </a:solidFill>
-          </a:ln>
-        </p:spPr>
-        <p:style>
-          <a:lnRef idx="1">
-            <a:schemeClr val="accent1"/>
-          </a:lnRef>
-          <a:fillRef idx="3">
-            <a:schemeClr val="accent1"/>
-          </a:fillRef>
-          <a:effectRef idx="2">
-            <a:schemeClr val="accent1"/>
-          </a:effectRef>
-          <a:fontRef idx="minor">
-            <a:schemeClr val="lt1"/>
-          </a:fontRef>
-        </p:style>
-        <p:txBody>
-          <a:bodyPr rtlCol="0" anchor="ctr"/>
-          <a:lstStyle/>
-          <a:p>
-            <a:pPr algn="ctr"/>
-          </a:p>
-        </p:txBody>
-      </p:sp>
-      <p:sp>
-        <p:nvSpPr>
-          <p:cNvPr id="19" name="TextBox 18"/>
+              <a:rPr sz="1100" b="0">
+                <a:solidFill>
+                  <a:srgbClr val="334155"/>
+                </a:solidFill>
+                <a:latin typeface="Calibri"/>
+              </a:rPr>
+              <a:t>转发</a:t>
+            </a:r>
+          </a:p>
+          <a:p>
+            <a:pPr algn="ctr">
+              <a:spcBef>
+                <a:spcPts val="1400"/>
+              </a:spcBef>
+            </a:pPr>
+            <a:r>
+              <a:rPr sz="1300" b="1">
+                <a:solidFill>
+                  <a:srgbClr val="64748B"/>
+                </a:solidFill>
+                <a:latin typeface="Calibri"/>
+              </a:rPr>
+              <a:t>可选</a:t>
+            </a:r>
+          </a:p>
+        </p:txBody>
+      </p:sp>
+      <p:sp>
+        <p:nvSpPr>
+          <p:cNvPr id="30" name="TextBox 29"/>
           <p:cNvSpPr txBox="1"/>
           <p:nvPr/>
         </p:nvSpPr>
         <p:spPr>
           <a:xfrm>
-            <a:off x="10488168" y="1600200"/>
-            <a:ext cx="1371600" cy="3474720"/>
+            <a:off x="457200" y="5212080"/>
+            <a:ext cx="11247120" cy="1280160"/>
           </a:xfrm>
           <a:prstGeom prst="rect">
             <a:avLst/>
@@ -5327,79 +5419,29 @@
           <a:lstStyle/>
           <a:p>
             <a:r>
-              <a:rPr sz="1400" b="1">
-                <a:solidFill>
-                  <a:srgbClr val="0F172A"/>
-                </a:solidFill>
-                <a:latin typeface="Calibri"/>
-              </a:rPr>
-              <a:t>7. 分享</a:t>
+              <a:rPr sz="1400" b="0">
+                <a:solidFill>
+                  <a:srgbClr val="334155"/>
+                </a:solidFill>
+                <a:latin typeface="Calibri"/>
+              </a:rPr>
+              <a:t>结论：生成 / 落盘 / 同步已通；产品断点在「渲染 + 安全」。分享与流式体验是增强项，不阻塞第一期闭环。</a:t>
             </a:r>
           </a:p>
           <a:p>
             <a:pPr>
               <a:spcBef>
-                <a:spcPts val="1000"/>
+                <a:spcPts val="800"/>
               </a:spcBef>
             </a:pPr>
             <a:r>
-              <a:rPr sz="1100" b="0">
-                <a:solidFill>
-                  <a:srgbClr val="334155"/>
-                </a:solidFill>
-                <a:latin typeface="Calibri"/>
-              </a:rPr>
-              <a:t>稳定 URL / TTL / 历史回放</a:t>
-            </a:r>
-          </a:p>
-          <a:p>
-            <a:pPr>
-              <a:spcBef>
-                <a:spcPts val="1600"/>
-              </a:spcBef>
-            </a:pPr>
-            <a:r>
-              <a:rPr sz="1200" b="1">
+              <a:rPr sz="1200" b="0">
                 <a:solidFill>
                   <a:srgbClr val="64748B"/>
                 </a:solidFill>
                 <a:latin typeface="Calibri"/>
               </a:rPr>
-              <a:t>可选增强</a:t>
-            </a:r>
-          </a:p>
-        </p:txBody>
-      </p:sp>
-      <p:sp>
-        <p:nvSpPr>
-          <p:cNvPr id="20" name="TextBox 19"/>
-          <p:cNvSpPr txBox="1"/>
-          <p:nvPr/>
-        </p:nvSpPr>
-        <p:spPr>
-          <a:xfrm>
-            <a:off x="502920" y="5486400"/>
-            <a:ext cx="11155680" cy="1005840"/>
-          </a:xfrm>
-          <a:prstGeom prst="rect">
-            <a:avLst/>
-          </a:prstGeom>
-          <a:noFill/>
-        </p:spPr>
-        <p:txBody>
-          <a:bodyPr wrap="square">
-            <a:spAutoFit/>
-          </a:bodyPr>
-          <a:lstStyle/>
-          <a:p>
-            <a:r>
-              <a:rPr sz="1300" b="0">
-                <a:solidFill>
-                  <a:srgbClr val="334155"/>
-                </a:solidFill>
-                <a:latin typeface="Calibri"/>
-              </a:rPr>
-              <a:t>结论：我们不是从 0 做「生成 HTML」——生成/落盘/同步已通；产品断点在「识别 + 端侧安全渲染」。分享与流式是体验增强，不是第一期阻塞项。</a:t>
+              <a:t>健康报告场景映射：Skill 取数 ⊂ 生成层；图形化 HTML ⊂ 生成层；对话内看见 ⊂ 渲染层；防脚本越权 ⊂ 安全层。</a:t>
             </a:r>
           </a:p>
         </p:txBody>
@@ -5474,7 +5516,7 @@
         <p:spPr>
           <a:xfrm>
             <a:off x="0" y="0"/>
-            <a:ext cx="12191695" cy="960120"/>
+            <a:ext cx="12191695" cy="914400"/>
           </a:xfrm>
           <a:prstGeom prst="rect">
             <a:avLst/>
@@ -5516,8 +5558,8 @@
         </p:nvSpPr>
         <p:spPr>
           <a:xfrm>
-            <a:off x="0" y="960120"/>
-            <a:ext cx="12191695" cy="54864"/>
+            <a:off x="0" y="914400"/>
+            <a:ext cx="12191695" cy="45720"/>
           </a:xfrm>
           <a:prstGeom prst="rect">
             <a:avLst/>
@@ -5559,8 +5601,8 @@
         </p:nvSpPr>
         <p:spPr>
           <a:xfrm>
-            <a:off x="502920" y="201168"/>
-            <a:ext cx="11155680" cy="640080"/>
+            <a:off x="457200" y="201168"/>
+            <a:ext cx="11247120" cy="640080"/>
           </a:xfrm>
           <a:prstGeom prst="rect">
             <a:avLst/>
@@ -5574,75 +5616,1235 @@
           <a:lstStyle/>
           <a:p>
             <a:r>
-              <a:rPr sz="2400" b="1">
+              <a:rPr sz="2200" b="1">
                 <a:solidFill>
                   <a:srgbClr val="FFFFFF"/>
                 </a:solidFill>
                 <a:latin typeface="Calibri"/>
               </a:rPr>
-              <a:t>03  竞品范式：行业怎么解决同一问题</a:t>
-            </a:r>
-          </a:p>
-          <a:p>
-            <a:r>
-              <a:rPr sz="1200" b="0">
+              <a:t>03  竞品对比</a:t>
+            </a:r>
+          </a:p>
+          <a:p>
+            <a:r>
+              <a:rPr sz="1100" b="0">
                 <a:solidFill>
                   <a:srgbClr val="94A3B8"/>
                 </a:solidFill>
                 <a:latin typeface="Calibri"/>
               </a:rPr>
-              <a:t>四种产品形态，对应四种「呈现」策略——抄对范式比抄功能名更重要</a:t>
-            </a:r>
-          </a:p>
-        </p:txBody>
-      </p:sp>
-      <p:sp>
-        <p:nvSpPr>
-          <p:cNvPr id="6" name="Rounded Rectangle 5"/>
-          <p:cNvSpPr/>
+              <a:t>多维度看「对话内可视化 / HTML 呈现」——对标 Artifact/Widget，而非一上来做全栈 Builder</a:t>
+            </a:r>
+          </a:p>
+        </p:txBody>
+      </p:sp>
+      <p:graphicFrame>
+        <p:nvGraphicFramePr>
+          <p:cNvPr id="6" name="Table 5"/>
+          <p:cNvGraphicFramePr>
+            <a:graphicFrameLocks noGrp="1"/>
+          </p:cNvGraphicFramePr>
           <p:nvPr/>
-        </p:nvSpPr>
-        <p:spPr>
-          <a:xfrm>
-            <a:off x="411480" y="1234440"/>
-            <a:ext cx="5577840" cy="2468880"/>
-          </a:xfrm>
-          <a:prstGeom prst="roundRect">
-            <a:avLst>
-              <a:gd name="adj" fmla="val 8000"/>
-            </a:avLst>
-          </a:prstGeom>
-          <a:solidFill>
-            <a:srgbClr val="FFFFFF"/>
-          </a:solidFill>
-          <a:ln>
-            <a:solidFill>
-              <a:srgbClr val="E2E8F0"/>
-            </a:solidFill>
-          </a:ln>
-        </p:spPr>
-        <p:style>
-          <a:lnRef idx="1">
-            <a:schemeClr val="accent1"/>
-          </a:lnRef>
-          <a:fillRef idx="3">
-            <a:schemeClr val="accent1"/>
-          </a:fillRef>
-          <a:effectRef idx="2">
-            <a:schemeClr val="accent1"/>
-          </a:effectRef>
-          <a:fontRef idx="minor">
-            <a:schemeClr val="lt1"/>
-          </a:fontRef>
-        </p:style>
-        <p:txBody>
-          <a:bodyPr rtlCol="0" anchor="ctr"/>
-          <a:lstStyle/>
-          <a:p>
-            <a:pPr algn="ctr"/>
-          </a:p>
-        </p:txBody>
-      </p:sp>
+        </p:nvGraphicFramePr>
+        <p:xfrm>
+          <a:off x="274320" y="1143000"/>
+          <a:ext cx="11612880" cy="5029200"/>
+        </p:xfrm>
+        <a:graphic>
+          <a:graphicData uri="http://schemas.openxmlformats.org/drawingml/2006/table">
+            <a:tbl>
+              <a:tblPr firstRow="1" bandRow="1">
+                <a:tableStyleId>{5C22544A-7EE6-4342-B048-85BDC9FD1C3A}</a:tableStyleId>
+              </a:tblPr>
+              <a:tblGrid>
+                <a:gridCol w="1234440"/>
+                <a:gridCol w="1737360"/>
+                <a:gridCol w="1691640"/>
+                <a:gridCol w="1737360"/>
+                <a:gridCol w="1737360"/>
+                <a:gridCol w="1737360"/>
+                <a:gridCol w="1737360"/>
+              </a:tblGrid>
+              <a:tr h="718457">
+                <a:tc>
+                  <a:txBody>
+                    <a:bodyPr wrap="square"/>
+                    <a:lstStyle/>
+                    <a:p>
+                      <a:pPr algn="ctr"/>
+                      <a:r>
+                        <a:rPr sz="1000" b="1">
+                          <a:solidFill>
+                            <a:srgbClr val="FFFFFF"/>
+                          </a:solidFill>
+                          <a:latin typeface="Calibri"/>
+                        </a:rPr>
+                        <a:t>维度</a:t>
+                      </a:r>
+                    </a:p>
+                  </a:txBody>
+                  <a:tcPr>
+                    <a:solidFill>
+                      <a:srgbClr val="0F172A"/>
+                    </a:solidFill>
+                  </a:tcPr>
+                </a:tc>
+                <a:tc>
+                  <a:txBody>
+                    <a:bodyPr wrap="square"/>
+                    <a:lstStyle/>
+                    <a:p>
+                      <a:pPr algn="ctr"/>
+                      <a:r>
+                        <a:rPr sz="1000" b="1">
+                          <a:solidFill>
+                            <a:srgbClr val="FFFFFF"/>
+                          </a:solidFill>
+                          <a:latin typeface="Calibri"/>
+                        </a:rPr>
+                        <a:t>OpenClaw</a:t>
+                      </a:r>
+                    </a:p>
+                  </a:txBody>
+                  <a:tcPr>
+                    <a:solidFill>
+                      <a:srgbClr val="0F172A"/>
+                    </a:solidFill>
+                  </a:tcPr>
+                </a:tc>
+                <a:tc>
+                  <a:txBody>
+                    <a:bodyPr wrap="square"/>
+                    <a:lstStyle/>
+                    <a:p>
+                      <a:pPr algn="ctr"/>
+                      <a:r>
+                        <a:rPr sz="1000" b="1">
+                          <a:solidFill>
+                            <a:srgbClr val="FFFFFF"/>
+                          </a:solidFill>
+                          <a:latin typeface="Calibri"/>
+                        </a:rPr>
+                        <a:t>Cursor</a:t>
+                      </a:r>
+                    </a:p>
+                  </a:txBody>
+                  <a:tcPr>
+                    <a:solidFill>
+                      <a:srgbClr val="0F172A"/>
+                    </a:solidFill>
+                  </a:tcPr>
+                </a:tc>
+                <a:tc>
+                  <a:txBody>
+                    <a:bodyPr wrap="square"/>
+                    <a:lstStyle/>
+                    <a:p>
+                      <a:pPr algn="ctr"/>
+                      <a:r>
+                        <a:rPr sz="1000" b="1">
+                          <a:solidFill>
+                            <a:srgbClr val="FFFFFF"/>
+                          </a:solidFill>
+                          <a:latin typeface="Calibri"/>
+                        </a:rPr>
+                        <a:t>Claude</a:t>
+                      </a:r>
+                    </a:p>
+                  </a:txBody>
+                  <a:tcPr>
+                    <a:solidFill>
+                      <a:srgbClr val="0F172A"/>
+                    </a:solidFill>
+                  </a:tcPr>
+                </a:tc>
+                <a:tc>
+                  <a:txBody>
+                    <a:bodyPr wrap="square"/>
+                    <a:lstStyle/>
+                    <a:p>
+                      <a:pPr algn="ctr"/>
+                      <a:r>
+                        <a:rPr sz="1000" b="1">
+                          <a:solidFill>
+                            <a:srgbClr val="FFFFFF"/>
+                          </a:solidFill>
+                          <a:latin typeface="Calibri"/>
+                        </a:rPr>
+                        <a:t>Gemini</a:t>
+                      </a:r>
+                    </a:p>
+                  </a:txBody>
+                  <a:tcPr>
+                    <a:solidFill>
+                      <a:srgbClr val="0F172A"/>
+                    </a:solidFill>
+                  </a:tcPr>
+                </a:tc>
+                <a:tc>
+                  <a:txBody>
+                    <a:bodyPr wrap="square"/>
+                    <a:lstStyle/>
+                    <a:p>
+                      <a:pPr algn="ctr"/>
+                      <a:r>
+                        <a:rPr sz="1000" b="1">
+                          <a:solidFill>
+                            <a:srgbClr val="FFFFFF"/>
+                          </a:solidFill>
+                          <a:latin typeface="Calibri"/>
+                        </a:rPr>
+                        <a:t>ChatGPT</a:t>
+                      </a:r>
+                    </a:p>
+                  </a:txBody>
+                  <a:tcPr>
+                    <a:solidFill>
+                      <a:srgbClr val="0F172A"/>
+                    </a:solidFill>
+                  </a:tcPr>
+                </a:tc>
+                <a:tc>
+                  <a:txBody>
+                    <a:bodyPr wrap="square"/>
+                    <a:lstStyle/>
+                    <a:p>
+                      <a:pPr algn="ctr"/>
+                      <a:r>
+                        <a:rPr sz="1000" b="1">
+                          <a:solidFill>
+                            <a:srgbClr val="FFFFFF"/>
+                          </a:solidFill>
+                          <a:latin typeface="Calibri"/>
+                        </a:rPr>
+                        <a:t>Manus</a:t>
+                      </a:r>
+                    </a:p>
+                  </a:txBody>
+                  <a:tcPr>
+                    <a:solidFill>
+                      <a:srgbClr val="0F172A"/>
+                    </a:solidFill>
+                  </a:tcPr>
+                </a:tc>
+              </a:tr>
+              <a:tr h="718457">
+                <a:tc>
+                  <a:txBody>
+                    <a:bodyPr wrap="square"/>
+                    <a:lstStyle/>
+                    <a:p>
+                      <a:pPr algn="ctr"/>
+                      <a:r>
+                        <a:rPr sz="900" b="1">
+                          <a:solidFill>
+                            <a:srgbClr val="0F172A"/>
+                          </a:solidFill>
+                          <a:latin typeface="Calibri"/>
+                        </a:rPr>
+                        <a:t>对话内
+实时预览</a:t>
+                      </a:r>
+                    </a:p>
+                  </a:txBody>
+                  <a:tcPr>
+                    <a:solidFill>
+                      <a:srgbClr val="F0FDFA"/>
+                    </a:solidFill>
+                  </a:tcPr>
+                </a:tc>
+                <a:tc>
+                  <a:txBody>
+                    <a:bodyPr wrap="square"/>
+                    <a:lstStyle/>
+                    <a:p>
+                      <a:pPr algn="ctr"/>
+                      <a:r>
+                        <a:rPr sz="900" b="0">
+                          <a:solidFill>
+                            <a:srgbClr val="334155"/>
+                          </a:solidFill>
+                          <a:latin typeface="Calibri"/>
+                        </a:rPr>
+                        <a:t>强
+show_widget</a:t>
+                      </a:r>
+                    </a:p>
+                  </a:txBody>
+                  <a:tcPr>
+                    <a:solidFill>
+                      <a:srgbClr val="FFFFFF"/>
+                    </a:solidFill>
+                  </a:tcPr>
+                </a:tc>
+                <a:tc>
+                  <a:txBody>
+                    <a:bodyPr wrap="square"/>
+                    <a:lstStyle/>
+                    <a:p>
+                      <a:pPr algn="ctr"/>
+                      <a:r>
+                        <a:rPr sz="900" b="0">
+                          <a:solidFill>
+                            <a:srgbClr val="334155"/>
+                          </a:solidFill>
+                          <a:latin typeface="Calibri"/>
+                        </a:rPr>
+                        <a:t>弱*
+偏 IDE</a:t>
+                      </a:r>
+                    </a:p>
+                  </a:txBody>
+                  <a:tcPr>
+                    <a:solidFill>
+                      <a:srgbClr val="FFFFFF"/>
+                    </a:solidFill>
+                  </a:tcPr>
+                </a:tc>
+                <a:tc>
+                  <a:txBody>
+                    <a:bodyPr wrap="square"/>
+                    <a:lstStyle/>
+                    <a:p>
+                      <a:pPr algn="ctr"/>
+                      <a:r>
+                        <a:rPr sz="900" b="0">
+                          <a:solidFill>
+                            <a:srgbClr val="334155"/>
+                          </a:solidFill>
+                          <a:latin typeface="Calibri"/>
+                        </a:rPr>
+                        <a:t>强
+Artifacts</a:t>
+                      </a:r>
+                    </a:p>
+                  </a:txBody>
+                  <a:tcPr>
+                    <a:solidFill>
+                      <a:srgbClr val="FFFFFF"/>
+                    </a:solidFill>
+                  </a:tcPr>
+                </a:tc>
+                <a:tc>
+                  <a:txBody>
+                    <a:bodyPr wrap="square"/>
+                    <a:lstStyle/>
+                    <a:p>
+                      <a:pPr algn="ctr"/>
+                      <a:r>
+                        <a:rPr sz="900" b="0">
+                          <a:solidFill>
+                            <a:srgbClr val="334155"/>
+                          </a:solidFill>
+                          <a:latin typeface="Calibri"/>
+                        </a:rPr>
+                        <a:t>中～强
+Canvas 预览</a:t>
+                      </a:r>
+                    </a:p>
+                  </a:txBody>
+                  <a:tcPr>
+                    <a:solidFill>
+                      <a:srgbClr val="FFFFFF"/>
+                    </a:solidFill>
+                  </a:tcPr>
+                </a:tc>
+                <a:tc>
+                  <a:txBody>
+                    <a:bodyPr wrap="square"/>
+                    <a:lstStyle/>
+                    <a:p>
+                      <a:pPr algn="ctr"/>
+                      <a:r>
+                        <a:rPr sz="900" b="0">
+                          <a:solidFill>
+                            <a:srgbClr val="334155"/>
+                          </a:solidFill>
+                          <a:latin typeface="Calibri"/>
+                        </a:rPr>
+                        <a:t>中
+Canvas/
+部分预览</a:t>
+                      </a:r>
+                    </a:p>
+                  </a:txBody>
+                  <a:tcPr>
+                    <a:solidFill>
+                      <a:srgbClr val="FFFFFF"/>
+                    </a:solidFill>
+                  </a:tcPr>
+                </a:tc>
+                <a:tc>
+                  <a:txBody>
+                    <a:bodyPr wrap="square"/>
+                    <a:lstStyle/>
+                    <a:p>
+                      <a:pPr algn="ctr"/>
+                      <a:r>
+                        <a:rPr sz="900" b="0">
+                          <a:solidFill>
+                            <a:srgbClr val="334155"/>
+                          </a:solidFill>
+                          <a:latin typeface="Calibri"/>
+                        </a:rPr>
+                        <a:t>强
+托管预览</a:t>
+                      </a:r>
+                    </a:p>
+                  </a:txBody>
+                  <a:tcPr>
+                    <a:solidFill>
+                      <a:srgbClr val="FFFFFF"/>
+                    </a:solidFill>
+                  </a:tcPr>
+                </a:tc>
+              </a:tr>
+              <a:tr h="718457">
+                <a:tc>
+                  <a:txBody>
+                    <a:bodyPr wrap="square"/>
+                    <a:lstStyle/>
+                    <a:p>
+                      <a:pPr algn="ctr"/>
+                      <a:r>
+                        <a:rPr sz="900" b="1">
+                          <a:solidFill>
+                            <a:srgbClr val="0F172A"/>
+                          </a:solidFill>
+                          <a:latin typeface="Calibri"/>
+                        </a:rPr>
+                        <a:t>呈现形态</a:t>
+                      </a:r>
+                    </a:p>
+                  </a:txBody>
+                  <a:tcPr>
+                    <a:solidFill>
+                      <a:srgbClr val="F0FDFA"/>
+                    </a:solidFill>
+                  </a:tcPr>
+                </a:tc>
+                <a:tc>
+                  <a:txBody>
+                    <a:bodyPr wrap="square"/>
+                    <a:lstStyle/>
+                    <a:p>
+                      <a:pPr algn="ctr"/>
+                      <a:r>
+                        <a:rPr sz="900" b="0">
+                          <a:solidFill>
+                            <a:srgbClr val="334155"/>
+                          </a:solidFill>
+                          <a:latin typeface="Calibri"/>
+                        </a:rPr>
+                        <a:t>Widget/
+Canvas</a:t>
+                      </a:r>
+                    </a:p>
+                  </a:txBody>
+                  <a:tcPr>
+                    <a:solidFill>
+                      <a:srgbClr val="FFFFFF"/>
+                    </a:solidFill>
+                  </a:tcPr>
+                </a:tc>
+                <a:tc>
+                  <a:txBody>
+                    <a:bodyPr wrap="square"/>
+                    <a:lstStyle/>
+                    <a:p>
+                      <a:pPr algn="ctr"/>
+                      <a:r>
+                        <a:rPr sz="900" b="0">
+                          <a:solidFill>
+                            <a:srgbClr val="334155"/>
+                          </a:solidFill>
+                          <a:latin typeface="Calibri"/>
+                        </a:rPr>
+                        <a:t>工作区
+文件</a:t>
+                      </a:r>
+                    </a:p>
+                  </a:txBody>
+                  <a:tcPr>
+                    <a:solidFill>
+                      <a:srgbClr val="FFFFFF"/>
+                    </a:solidFill>
+                  </a:tcPr>
+                </a:tc>
+                <a:tc>
+                  <a:txBody>
+                    <a:bodyPr wrap="square"/>
+                    <a:lstStyle/>
+                    <a:p>
+                      <a:pPr algn="ctr"/>
+                      <a:r>
+                        <a:rPr sz="900" b="0">
+                          <a:solidFill>
+                            <a:srgbClr val="334155"/>
+                          </a:solidFill>
+                          <a:latin typeface="Calibri"/>
+                        </a:rPr>
+                        <a:t>侧栏
+Artifact</a:t>
+                      </a:r>
+                    </a:p>
+                  </a:txBody>
+                  <a:tcPr>
+                    <a:solidFill>
+                      <a:srgbClr val="FFFFFF"/>
+                    </a:solidFill>
+                  </a:tcPr>
+                </a:tc>
+                <a:tc>
+                  <a:txBody>
+                    <a:bodyPr wrap="square"/>
+                    <a:lstStyle/>
+                    <a:p>
+                      <a:pPr algn="ctr"/>
+                      <a:r>
+                        <a:rPr sz="900" b="0">
+                          <a:solidFill>
+                            <a:srgbClr val="334155"/>
+                          </a:solidFill>
+                          <a:latin typeface="Calibri"/>
+                        </a:rPr>
+                        <a:t>Canvas
+工作区</a:t>
+                      </a:r>
+                    </a:p>
+                  </a:txBody>
+                  <a:tcPr>
+                    <a:solidFill>
+                      <a:srgbClr val="FFFFFF"/>
+                    </a:solidFill>
+                  </a:tcPr>
+                </a:tc>
+                <a:tc>
+                  <a:txBody>
+                    <a:bodyPr wrap="square"/>
+                    <a:lstStyle/>
+                    <a:p>
+                      <a:pPr algn="ctr"/>
+                      <a:r>
+                        <a:rPr sz="900" b="0">
+                          <a:solidFill>
+                            <a:srgbClr val="334155"/>
+                          </a:solidFill>
+                          <a:latin typeface="Calibri"/>
+                        </a:rPr>
+                        <a:t>Canvas +
+代码解释器</a:t>
+                      </a:r>
+                    </a:p>
+                  </a:txBody>
+                  <a:tcPr>
+                    <a:solidFill>
+                      <a:srgbClr val="FFFFFF"/>
+                    </a:solidFill>
+                  </a:tcPr>
+                </a:tc>
+                <a:tc>
+                  <a:txBody>
+                    <a:bodyPr wrap="square"/>
+                    <a:lstStyle/>
+                    <a:p>
+                      <a:pPr algn="ctr"/>
+                      <a:r>
+                        <a:rPr sz="900" b="0">
+                          <a:solidFill>
+                            <a:srgbClr val="334155"/>
+                          </a:solidFill>
+                          <a:latin typeface="Calibri"/>
+                        </a:rPr>
+                        <a:t>站点/
+App 预览</a:t>
+                      </a:r>
+                    </a:p>
+                  </a:txBody>
+                  <a:tcPr>
+                    <a:solidFill>
+                      <a:srgbClr val="FFFFFF"/>
+                    </a:solidFill>
+                  </a:tcPr>
+                </a:tc>
+              </a:tr>
+              <a:tr h="718457">
+                <a:tc>
+                  <a:txBody>
+                    <a:bodyPr wrap="square"/>
+                    <a:lstStyle/>
+                    <a:p>
+                      <a:pPr algn="ctr"/>
+                      <a:r>
+                        <a:rPr sz="900" b="1">
+                          <a:solidFill>
+                            <a:srgbClr val="0F172A"/>
+                          </a:solidFill>
+                          <a:latin typeface="Calibri"/>
+                        </a:rPr>
+                        <a:t>数据/工具</a:t>
+                      </a:r>
+                    </a:p>
+                  </a:txBody>
+                  <a:tcPr>
+                    <a:solidFill>
+                      <a:srgbClr val="F0FDFA"/>
+                    </a:solidFill>
+                  </a:tcPr>
+                </a:tc>
+                <a:tc>
+                  <a:txBody>
+                    <a:bodyPr wrap="square"/>
+                    <a:lstStyle/>
+                    <a:p>
+                      <a:pPr algn="ctr"/>
+                      <a:r>
+                        <a:rPr sz="900" b="0">
+                          <a:solidFill>
+                            <a:srgbClr val="334155"/>
+                          </a:solidFill>
+                          <a:latin typeface="Calibri"/>
+                        </a:rPr>
+                        <a:t>Skill/
+工具调用</a:t>
+                      </a:r>
+                    </a:p>
+                  </a:txBody>
+                  <a:tcPr>
+                    <a:solidFill>
+                      <a:srgbClr val="FFFFFF"/>
+                    </a:solidFill>
+                  </a:tcPr>
+                </a:tc>
+                <a:tc>
+                  <a:txBody>
+                    <a:bodyPr wrap="square"/>
+                    <a:lstStyle/>
+                    <a:p>
+                      <a:pPr algn="ctr"/>
+                      <a:r>
+                        <a:rPr sz="900" b="0">
+                          <a:solidFill>
+                            <a:srgbClr val="334155"/>
+                          </a:solidFill>
+                          <a:latin typeface="Calibri"/>
+                        </a:rPr>
+                        <a:t>FS/终端
+浏览器</a:t>
+                      </a:r>
+                    </a:p>
+                  </a:txBody>
+                  <a:tcPr>
+                    <a:solidFill>
+                      <a:srgbClr val="FFFFFF"/>
+                    </a:solidFill>
+                  </a:tcPr>
+                </a:tc>
+                <a:tc>
+                  <a:txBody>
+                    <a:bodyPr wrap="square"/>
+                    <a:lstStyle/>
+                    <a:p>
+                      <a:pPr algn="ctr"/>
+                      <a:r>
+                        <a:rPr sz="900" b="0">
+                          <a:solidFill>
+                            <a:srgbClr val="334155"/>
+                          </a:solidFill>
+                          <a:latin typeface="Calibri"/>
+                        </a:rPr>
+                        <a:t>工具 +
+MCP</a:t>
+                      </a:r>
+                    </a:p>
+                  </a:txBody>
+                  <a:tcPr>
+                    <a:solidFill>
+                      <a:srgbClr val="FFFFFF"/>
+                    </a:solidFill>
+                  </a:tcPr>
+                </a:tc>
+                <a:tc>
+                  <a:txBody>
+                    <a:bodyPr wrap="square"/>
+                    <a:lstStyle/>
+                    <a:p>
+                      <a:pPr algn="ctr"/>
+                      <a:r>
+                        <a:rPr sz="900" b="0">
+                          <a:solidFill>
+                            <a:srgbClr val="334155"/>
+                          </a:solidFill>
+                          <a:latin typeface="Calibri"/>
+                        </a:rPr>
+                        <a:t>工具 +
+Workspace</a:t>
+                      </a:r>
+                    </a:p>
+                  </a:txBody>
+                  <a:tcPr>
+                    <a:solidFill>
+                      <a:srgbClr val="FFFFFF"/>
+                    </a:solidFill>
+                  </a:tcPr>
+                </a:tc>
+                <a:tc>
+                  <a:txBody>
+                    <a:bodyPr wrap="square"/>
+                    <a:lstStyle/>
+                    <a:p>
+                      <a:pPr algn="ctr"/>
+                      <a:r>
+                        <a:rPr sz="900" b="0">
+                          <a:solidFill>
+                            <a:srgbClr val="334155"/>
+                          </a:solidFill>
+                          <a:latin typeface="Calibri"/>
+                        </a:rPr>
+                        <a:t>GPTs/
+ADA 取数画图</a:t>
+                      </a:r>
+                    </a:p>
+                  </a:txBody>
+                  <a:tcPr>
+                    <a:solidFill>
+                      <a:srgbClr val="FFFFFF"/>
+                    </a:solidFill>
+                  </a:tcPr>
+                </a:tc>
+                <a:tc>
+                  <a:txBody>
+                    <a:bodyPr wrap="square"/>
+                    <a:lstStyle/>
+                    <a:p>
+                      <a:pPr algn="ctr"/>
+                      <a:r>
+                        <a:rPr sz="900" b="0">
+                          <a:solidFill>
+                            <a:srgbClr val="334155"/>
+                          </a:solidFill>
+                          <a:latin typeface="Calibri"/>
+                        </a:rPr>
+                        <a:t>Agent
+全流程</a:t>
+                      </a:r>
+                    </a:p>
+                  </a:txBody>
+                  <a:tcPr>
+                    <a:solidFill>
+                      <a:srgbClr val="FFFFFF"/>
+                    </a:solidFill>
+                  </a:tcPr>
+                </a:tc>
+              </a:tr>
+              <a:tr h="718457">
+                <a:tc>
+                  <a:txBody>
+                    <a:bodyPr wrap="square"/>
+                    <a:lstStyle/>
+                    <a:p>
+                      <a:pPr algn="ctr"/>
+                      <a:r>
+                        <a:rPr sz="900" b="1">
+                          <a:solidFill>
+                            <a:srgbClr val="0F172A"/>
+                          </a:solidFill>
+                          <a:latin typeface="Calibri"/>
+                        </a:rPr>
+                        <a:t>安全隔离</a:t>
+                      </a:r>
+                    </a:p>
+                  </a:txBody>
+                  <a:tcPr>
+                    <a:solidFill>
+                      <a:srgbClr val="F0FDFA"/>
+                    </a:solidFill>
+                  </a:tcPr>
+                </a:tc>
+                <a:tc>
+                  <a:txBody>
+                    <a:bodyPr wrap="square"/>
+                    <a:lstStyle/>
+                    <a:p>
+                      <a:pPr algn="ctr"/>
+                      <a:r>
+                        <a:rPr sz="900" b="0">
+                          <a:solidFill>
+                            <a:srgbClr val="334155"/>
+                          </a:solidFill>
+                          <a:latin typeface="Calibri"/>
+                        </a:rPr>
+                        <a:t>双层 iframe
+沙箱</a:t>
+                      </a:r>
+                    </a:p>
+                  </a:txBody>
+                  <a:tcPr>
+                    <a:solidFill>
+                      <a:srgbClr val="FFFFFF"/>
+                    </a:solidFill>
+                  </a:tcPr>
+                </a:tc>
+                <a:tc>
+                  <a:txBody>
+                    <a:bodyPr wrap="square"/>
+                    <a:lstStyle/>
+                    <a:p>
+                      <a:pPr algn="ctr"/>
+                      <a:r>
+                        <a:rPr sz="900" b="0">
+                          <a:solidFill>
+                            <a:srgbClr val="334155"/>
+                          </a:solidFill>
+                          <a:latin typeface="Calibri"/>
+                        </a:rPr>
+                        <a:t>工作区
+隔离</a:t>
+                      </a:r>
+                    </a:p>
+                  </a:txBody>
+                  <a:tcPr>
+                    <a:solidFill>
+                      <a:srgbClr val="FFFFFF"/>
+                    </a:solidFill>
+                  </a:tcPr>
+                </a:tc>
+                <a:tc>
+                  <a:txBody>
+                    <a:bodyPr wrap="square"/>
+                    <a:lstStyle/>
+                    <a:p>
+                      <a:pPr algn="ctr"/>
+                      <a:r>
+                        <a:rPr sz="900" b="0">
+                          <a:solidFill>
+                            <a:srgbClr val="334155"/>
+                          </a:solidFill>
+                          <a:latin typeface="Calibri"/>
+                        </a:rPr>
+                        <a:t>独立域
+严 CSP</a:t>
+                      </a:r>
+                    </a:p>
+                  </a:txBody>
+                  <a:tcPr>
+                    <a:solidFill>
+                      <a:srgbClr val="FFFFFF"/>
+                    </a:solidFill>
+                  </a:tcPr>
+                </a:tc>
+                <a:tc>
+                  <a:txBody>
+                    <a:bodyPr wrap="square"/>
+                    <a:lstStyle/>
+                    <a:p>
+                      <a:pPr algn="ctr"/>
+                      <a:r>
+                        <a:rPr sz="900" b="0">
+                          <a:solidFill>
+                            <a:srgbClr val="334155"/>
+                          </a:solidFill>
+                          <a:latin typeface="Calibri"/>
+                        </a:rPr>
+                        <a:t>平台沙箱</a:t>
+                      </a:r>
+                    </a:p>
+                  </a:txBody>
+                  <a:tcPr>
+                    <a:solidFill>
+                      <a:srgbClr val="FFFFFF"/>
+                    </a:solidFill>
+                  </a:tcPr>
+                </a:tc>
+                <a:tc>
+                  <a:txBody>
+                    <a:bodyPr wrap="square"/>
+                    <a:lstStyle/>
+                    <a:p>
+                      <a:pPr algn="ctr"/>
+                      <a:r>
+                        <a:rPr sz="900" b="0">
+                          <a:solidFill>
+                            <a:srgbClr val="334155"/>
+                          </a:solidFill>
+                          <a:latin typeface="Calibri"/>
+                        </a:rPr>
+                        <a:t>平台沙箱</a:t>
+                      </a:r>
+                    </a:p>
+                  </a:txBody>
+                  <a:tcPr>
+                    <a:solidFill>
+                      <a:srgbClr val="FFFFFF"/>
+                    </a:solidFill>
+                  </a:tcPr>
+                </a:tc>
+                <a:tc>
+                  <a:txBody>
+                    <a:bodyPr wrap="square"/>
+                    <a:lstStyle/>
+                    <a:p>
+                      <a:pPr algn="ctr"/>
+                      <a:r>
+                        <a:rPr sz="900" b="0">
+                          <a:solidFill>
+                            <a:srgbClr val="334155"/>
+                          </a:solidFill>
+                          <a:latin typeface="Calibri"/>
+                        </a:rPr>
+                        <a:t>托管隔离</a:t>
+                      </a:r>
+                    </a:p>
+                  </a:txBody>
+                  <a:tcPr>
+                    <a:solidFill>
+                      <a:srgbClr val="FFFFFF"/>
+                    </a:solidFill>
+                  </a:tcPr>
+                </a:tc>
+              </a:tr>
+              <a:tr h="718457">
+                <a:tc>
+                  <a:txBody>
+                    <a:bodyPr wrap="square"/>
+                    <a:lstStyle/>
+                    <a:p>
+                      <a:pPr algn="ctr"/>
+                      <a:r>
+                        <a:rPr sz="900" b="1">
+                          <a:solidFill>
+                            <a:srgbClr val="0F172A"/>
+                          </a:solidFill>
+                          <a:latin typeface="Calibri"/>
+                        </a:rPr>
+                        <a:t>分享</a:t>
+                      </a:r>
+                    </a:p>
+                  </a:txBody>
+                  <a:tcPr>
+                    <a:solidFill>
+                      <a:srgbClr val="F0FDFA"/>
+                    </a:solidFill>
+                  </a:tcPr>
+                </a:tc>
+                <a:tc>
+                  <a:txBody>
+                    <a:bodyPr wrap="square"/>
+                    <a:lstStyle/>
+                    <a:p>
+                      <a:pPr algn="ctr"/>
+                      <a:r>
+                        <a:rPr sz="900" b="0">
+                          <a:solidFill>
+                            <a:srgbClr val="334155"/>
+                          </a:solidFill>
+                          <a:latin typeface="Calibri"/>
+                        </a:rPr>
+                        <a:t>pin/
+渠道</a:t>
+                      </a:r>
+                    </a:p>
+                  </a:txBody>
+                  <a:tcPr>
+                    <a:solidFill>
+                      <a:srgbClr val="FFFFFF"/>
+                    </a:solidFill>
+                  </a:tcPr>
+                </a:tc>
+                <a:tc>
+                  <a:txBody>
+                    <a:bodyPr wrap="square"/>
+                    <a:lstStyle/>
+                    <a:p>
+                      <a:pPr algn="ctr"/>
+                      <a:r>
+                        <a:rPr sz="900" b="0">
+                          <a:solidFill>
+                            <a:srgbClr val="334155"/>
+                          </a:solidFill>
+                          <a:latin typeface="Calibri"/>
+                        </a:rPr>
+                        <a:t>Git/PR</a:t>
+                      </a:r>
+                    </a:p>
+                  </a:txBody>
+                  <a:tcPr>
+                    <a:solidFill>
+                      <a:srgbClr val="FFFFFF"/>
+                    </a:solidFill>
+                  </a:tcPr>
+                </a:tc>
+                <a:tc>
+                  <a:txBody>
+                    <a:bodyPr wrap="square"/>
+                    <a:lstStyle/>
+                    <a:p>
+                      <a:pPr algn="ctr"/>
+                      <a:r>
+                        <a:rPr sz="900" b="0">
+                          <a:solidFill>
+                            <a:srgbClr val="334155"/>
+                          </a:solidFill>
+                          <a:latin typeface="Calibri"/>
+                        </a:rPr>
+                        <a:t>Publish
+链接</a:t>
+                      </a:r>
+                    </a:p>
+                  </a:txBody>
+                  <a:tcPr>
+                    <a:solidFill>
+                      <a:srgbClr val="FFFFFF"/>
+                    </a:solidFill>
+                  </a:tcPr>
+                </a:tc>
+                <a:tc>
+                  <a:txBody>
+                    <a:bodyPr wrap="square"/>
+                    <a:lstStyle/>
+                    <a:p>
+                      <a:pPr algn="ctr"/>
+                      <a:r>
+                        <a:rPr sz="900" b="0">
+                          <a:solidFill>
+                            <a:srgbClr val="334155"/>
+                          </a:solidFill>
+                          <a:latin typeface="Calibri"/>
+                        </a:rPr>
+                        <a:t>分享/
+导出 Docs</a:t>
+                      </a:r>
+                    </a:p>
+                  </a:txBody>
+                  <a:tcPr>
+                    <a:solidFill>
+                      <a:srgbClr val="FFFFFF"/>
+                    </a:solidFill>
+                  </a:tcPr>
+                </a:tc>
+                <a:tc>
+                  <a:txBody>
+                    <a:bodyPr wrap="square"/>
+                    <a:lstStyle/>
+                    <a:p>
+                      <a:pPr algn="ctr"/>
+                      <a:r>
+                        <a:rPr sz="900" b="0">
+                          <a:solidFill>
+                            <a:srgbClr val="334155"/>
+                          </a:solidFill>
+                          <a:latin typeface="Calibri"/>
+                        </a:rPr>
+                        <a:t>分享链接
+(偏账号)</a:t>
+                      </a:r>
+                    </a:p>
+                  </a:txBody>
+                  <a:tcPr>
+                    <a:solidFill>
+                      <a:srgbClr val="FFFFFF"/>
+                    </a:solidFill>
+                  </a:tcPr>
+                </a:tc>
+                <a:tc>
+                  <a:txBody>
+                    <a:bodyPr wrap="square"/>
+                    <a:lstStyle/>
+                    <a:p>
+                      <a:pPr algn="ctr"/>
+                      <a:r>
+                        <a:rPr sz="900" b="0">
+                          <a:solidFill>
+                            <a:srgbClr val="334155"/>
+                          </a:solidFill>
+                          <a:latin typeface="Calibri"/>
+                        </a:rPr>
+                        <a:t>一键
+publish</a:t>
+                      </a:r>
+                    </a:p>
+                  </a:txBody>
+                  <a:tcPr>
+                    <a:solidFill>
+                      <a:srgbClr val="FFFFFF"/>
+                    </a:solidFill>
+                  </a:tcPr>
+                </a:tc>
+              </a:tr>
+              <a:tr h="718458">
+                <a:tc>
+                  <a:txBody>
+                    <a:bodyPr wrap="square"/>
+                    <a:lstStyle/>
+                    <a:p>
+                      <a:pPr algn="ctr"/>
+                      <a:r>
+                        <a:rPr sz="900" b="1">
+                          <a:solidFill>
+                            <a:srgbClr val="0F172A"/>
+                          </a:solidFill>
+                          <a:latin typeface="Calibri"/>
+                        </a:rPr>
+                        <a:t>对我们
+启示</a:t>
+                      </a:r>
+                    </a:p>
+                  </a:txBody>
+                  <a:tcPr>
+                    <a:solidFill>
+                      <a:srgbClr val="F0FDFA"/>
+                    </a:solidFill>
+                  </a:tcPr>
+                </a:tc>
+                <a:tc>
+                  <a:txBody>
+                    <a:bodyPr wrap="square"/>
+                    <a:lstStyle/>
+                    <a:p>
+                      <a:pPr algn="ctr"/>
+                      <a:r>
+                        <a:rPr sz="900" b="0">
+                          <a:solidFill>
+                            <a:srgbClr val="334155"/>
+                          </a:solidFill>
+                          <a:latin typeface="Calibri"/>
+                        </a:rPr>
+                        <a:t>widget
+语义+沙箱</a:t>
+                      </a:r>
+                    </a:p>
+                  </a:txBody>
+                  <a:tcPr>
+                    <a:solidFill>
+                      <a:srgbClr val="FFFFFF"/>
+                    </a:solidFill>
+                  </a:tcPr>
+                </a:tc>
+                <a:tc>
+                  <a:txBody>
+                    <a:bodyPr wrap="square"/>
+                    <a:lstStyle/>
+                    <a:p>
+                      <a:pPr algn="ctr"/>
+                      <a:r>
+                        <a:rPr sz="900" b="0">
+                          <a:solidFill>
+                            <a:srgbClr val="334155"/>
+                          </a:solidFill>
+                          <a:latin typeface="Calibri"/>
+                        </a:rPr>
+                        <a:t>复用 write
+不强造工具</a:t>
+                      </a:r>
+                    </a:p>
+                  </a:txBody>
+                  <a:tcPr>
+                    <a:solidFill>
+                      <a:srgbClr val="FFFFFF"/>
+                    </a:solidFill>
+                  </a:tcPr>
+                </a:tc>
+                <a:tc>
+                  <a:txBody>
+                    <a:bodyPr wrap="square"/>
+                    <a:lstStyle/>
+                    <a:p>
+                      <a:pPr algn="ctr"/>
+                      <a:r>
+                        <a:rPr sz="900" b="0">
+                          <a:solidFill>
+                            <a:srgbClr val="334155"/>
+                          </a:solidFill>
+                          <a:latin typeface="Calibri"/>
+                        </a:rPr>
+                        <a:t>单文件
+预览体验</a:t>
+                      </a:r>
+                    </a:p>
+                  </a:txBody>
+                  <a:tcPr>
+                    <a:solidFill>
+                      <a:srgbClr val="FFFFFF"/>
+                    </a:solidFill>
+                  </a:tcPr>
+                </a:tc>
+                <a:tc>
+                  <a:txBody>
+                    <a:bodyPr wrap="square"/>
+                    <a:lstStyle/>
+                    <a:p>
+                      <a:pPr algn="ctr"/>
+                      <a:r>
+                        <a:rPr sz="900" b="0">
+                          <a:solidFill>
+                            <a:srgbClr val="334155"/>
+                          </a:solidFill>
+                          <a:latin typeface="Calibri"/>
+                        </a:rPr>
+                        <a:t>Canvas+
+预览可参考</a:t>
+                      </a:r>
+                    </a:p>
+                  </a:txBody>
+                  <a:tcPr>
+                    <a:solidFill>
+                      <a:srgbClr val="FFFFFF"/>
+                    </a:solidFill>
+                  </a:tcPr>
+                </a:tc>
+                <a:tc>
+                  <a:txBody>
+                    <a:bodyPr wrap="square"/>
+                    <a:lstStyle/>
+                    <a:p>
+                      <a:pPr algn="ctr"/>
+                      <a:r>
+                        <a:rPr sz="900" b="0">
+                          <a:solidFill>
+                            <a:srgbClr val="334155"/>
+                          </a:solidFill>
+                          <a:latin typeface="Calibri"/>
+                        </a:rPr>
+                        <a:t>取数可视化
+可参考 ADA</a:t>
+                      </a:r>
+                    </a:p>
+                  </a:txBody>
+                  <a:tcPr>
+                    <a:solidFill>
+                      <a:srgbClr val="FFFFFF"/>
+                    </a:solidFill>
+                  </a:tcPr>
+                </a:tc>
+                <a:tc>
+                  <a:txBody>
+                    <a:bodyPr wrap="square"/>
+                    <a:lstStyle/>
+                    <a:p>
+                      <a:pPr algn="ctr"/>
+                      <a:r>
+                        <a:rPr sz="900" b="0">
+                          <a:solidFill>
+                            <a:srgbClr val="334155"/>
+                          </a:solidFill>
+                          <a:latin typeface="Calibri"/>
+                        </a:rPr>
+                        <a:t>后期分享
+可参考</a:t>
+                      </a:r>
+                    </a:p>
+                  </a:txBody>
+                  <a:tcPr>
+                    <a:solidFill>
+                      <a:srgbClr val="FFFFFF"/>
+                    </a:solidFill>
+                  </a:tcPr>
+                </a:tc>
+              </a:tr>
+            </a:tbl>
+          </a:graphicData>
+        </a:graphic>
+      </p:graphicFrame>
       <p:sp>
         <p:nvSpPr>
           <p:cNvPr id="7" name="TextBox 6"/>
@@ -5651,8 +6853,8 @@
         </p:nvSpPr>
         <p:spPr>
           <a:xfrm>
-            <a:off x="576072" y="1344168"/>
-            <a:ext cx="5303520" cy="2286000"/>
+            <a:off x="365760" y="6263640"/>
+            <a:ext cx="11430000" cy="411480"/>
           </a:xfrm>
           <a:prstGeom prst="rect">
             <a:avLst/>
@@ -5666,512 +6868,13 @@
           <a:lstStyle/>
           <a:p>
             <a:r>
-              <a:rPr sz="1400" b="1">
-                <a:solidFill>
-                  <a:srgbClr val="0D9488"/>
-                </a:solidFill>
-                <a:latin typeface="Calibri"/>
-              </a:rPr>
-              <a:t>A. Artifact / Widget（Claude · OpenClaw）</a:t>
-            </a:r>
-          </a:p>
-          <a:p>
-            <a:pPr>
-              <a:spcBef>
-                <a:spcPts val="400"/>
-              </a:spcBef>
-            </a:pPr>
-            <a:r>
-              <a:rPr sz="1200" b="0">
-                <a:solidFill>
-                  <a:srgbClr val="334155"/>
-                </a:solidFill>
-                <a:latin typeface="Calibri"/>
-              </a:rPr>
-              <a:t>单文件自包含页面 → 会话侧栏 sandbox 预览</a:t>
-            </a:r>
-          </a:p>
-          <a:p>
-            <a:pPr>
-              <a:spcBef>
-                <a:spcPts val="400"/>
-              </a:spcBef>
-            </a:pPr>
-            <a:r>
-              <a:rPr sz="1200" b="0">
-                <a:solidFill>
-                  <a:srgbClr val="334155"/>
-                </a:solidFill>
-                <a:latin typeface="Calibri"/>
-              </a:rPr>
-              <a:t>独立源 + 严 CSP；可 Publish / pin</a:t>
-            </a:r>
-          </a:p>
-          <a:p>
-            <a:pPr>
-              <a:spcBef>
-                <a:spcPts val="400"/>
-              </a:spcBef>
-            </a:pPr>
-            <a:r>
-              <a:rPr sz="1200" b="0">
-                <a:solidFill>
-                  <a:srgbClr val="334155"/>
-                </a:solidFill>
-                <a:latin typeface="Calibri"/>
-              </a:rPr>
-              <a:t>适合：计算器、图表、小工具、演示页</a:t>
-            </a:r>
-          </a:p>
-          <a:p>
-            <a:pPr>
-              <a:spcBef>
-                <a:spcPts val="400"/>
-              </a:spcBef>
-            </a:pPr>
-            <a:r>
-              <a:rPr sz="1200" b="0">
-                <a:solidFill>
-                  <a:srgbClr val="334155"/>
-                </a:solidFill>
-                <a:latin typeface="Calibri"/>
-              </a:rPr>
-              <a:t>可抄：show_widget 语义 + 沙箱 iframe</a:t>
-            </a:r>
-          </a:p>
-        </p:txBody>
-      </p:sp>
-      <p:sp>
-        <p:nvSpPr>
-          <p:cNvPr id="8" name="Rounded Rectangle 7"/>
-          <p:cNvSpPr/>
-          <p:nvPr/>
-        </p:nvSpPr>
-        <p:spPr>
-          <a:xfrm>
-            <a:off x="6172200" y="1234440"/>
-            <a:ext cx="5577840" cy="2468880"/>
-          </a:xfrm>
-          <a:prstGeom prst="roundRect">
-            <a:avLst>
-              <a:gd name="adj" fmla="val 8000"/>
-            </a:avLst>
-          </a:prstGeom>
-          <a:solidFill>
-            <a:srgbClr val="FFFFFF"/>
-          </a:solidFill>
-          <a:ln>
-            <a:solidFill>
-              <a:srgbClr val="E2E8F0"/>
-            </a:solidFill>
-          </a:ln>
-        </p:spPr>
-        <p:style>
-          <a:lnRef idx="1">
-            <a:schemeClr val="accent1"/>
-          </a:lnRef>
-          <a:fillRef idx="3">
-            <a:schemeClr val="accent1"/>
-          </a:fillRef>
-          <a:effectRef idx="2">
-            <a:schemeClr val="accent1"/>
-          </a:effectRef>
-          <a:fontRef idx="minor">
-            <a:schemeClr val="lt1"/>
-          </a:fontRef>
-        </p:style>
-        <p:txBody>
-          <a:bodyPr rtlCol="0" anchor="ctr"/>
-          <a:lstStyle/>
-          <a:p>
-            <a:pPr algn="ctr"/>
-          </a:p>
-        </p:txBody>
-      </p:sp>
-      <p:sp>
-        <p:nvSpPr>
-          <p:cNvPr id="9" name="TextBox 8"/>
-          <p:cNvSpPr txBox="1"/>
-          <p:nvPr/>
-        </p:nvSpPr>
-        <p:spPr>
-          <a:xfrm>
-            <a:off x="6336792" y="1344168"/>
-            <a:ext cx="5303520" cy="2286000"/>
-          </a:xfrm>
-          <a:prstGeom prst="rect">
-            <a:avLst/>
-          </a:prstGeom>
-          <a:noFill/>
-        </p:spPr>
-        <p:txBody>
-          <a:bodyPr wrap="square">
-            <a:spAutoFit/>
-          </a:bodyPr>
-          <a:lstStyle/>
-          <a:p>
-            <a:r>
-              <a:rPr sz="1400" b="1">
-                <a:solidFill>
-                  <a:srgbClr val="0D9488"/>
-                </a:solidFill>
-                <a:latin typeface="Calibri"/>
-              </a:rPr>
-              <a:t>B. IDE Agent（Cursor · Claude Code）</a:t>
-            </a:r>
-          </a:p>
-          <a:p>
-            <a:pPr>
-              <a:spcBef>
-                <a:spcPts val="400"/>
-              </a:spcBef>
-            </a:pPr>
-            <a:r>
-              <a:rPr sz="1200" b="0">
-                <a:solidFill>
-                  <a:srgbClr val="334155"/>
-                </a:solidFill>
-                <a:latin typeface="Calibri"/>
-              </a:rPr>
-              <a:t>HTML 即普通文件；FS + 终端 + 浏览器</a:t>
-            </a:r>
-          </a:p>
-          <a:p>
-            <a:pPr>
-              <a:spcBef>
-                <a:spcPts val="400"/>
-              </a:spcBef>
-            </a:pPr>
-            <a:r>
-              <a:rPr sz="1200" b="0">
-                <a:solidFill>
-                  <a:srgbClr val="334155"/>
-                </a:solidFill>
-                <a:latin typeface="Calibri"/>
-              </a:rPr>
-              <a:t>交付物是仓库/PR，不是聊天小部件</a:t>
-            </a:r>
-          </a:p>
-          <a:p>
-            <a:pPr>
-              <a:spcBef>
-                <a:spcPts val="400"/>
-              </a:spcBef>
-            </a:pPr>
-            <a:r>
-              <a:rPr sz="1200" b="0">
-                <a:solidFill>
-                  <a:srgbClr val="334155"/>
-                </a:solidFill>
-                <a:latin typeface="Calibri"/>
-              </a:rPr>
-              <a:t>适合：进真实代码库改前端</a:t>
-            </a:r>
-          </a:p>
-          <a:p>
-            <a:pPr>
-              <a:spcBef>
-                <a:spcPts val="400"/>
-              </a:spcBef>
-            </a:pPr>
-            <a:r>
-              <a:rPr sz="1200" b="0">
-                <a:solidFill>
-                  <a:srgbClr val="334155"/>
-                </a:solidFill>
-                <a:latin typeface="Calibri"/>
-              </a:rPr>
-              <a:t>可抄：复用 write，不强造 generate_html</a:t>
-            </a:r>
-          </a:p>
-        </p:txBody>
-      </p:sp>
-      <p:sp>
-        <p:nvSpPr>
-          <p:cNvPr id="10" name="Rounded Rectangle 9"/>
-          <p:cNvSpPr/>
-          <p:nvPr/>
-        </p:nvSpPr>
-        <p:spPr>
-          <a:xfrm>
-            <a:off x="411480" y="3886200"/>
-            <a:ext cx="5577840" cy="2468880"/>
-          </a:xfrm>
-          <a:prstGeom prst="roundRect">
-            <a:avLst>
-              <a:gd name="adj" fmla="val 8000"/>
-            </a:avLst>
-          </a:prstGeom>
-          <a:solidFill>
-            <a:srgbClr val="FFFFFF"/>
-          </a:solidFill>
-          <a:ln>
-            <a:solidFill>
-              <a:srgbClr val="E2E8F0"/>
-            </a:solidFill>
-          </a:ln>
-        </p:spPr>
-        <p:style>
-          <a:lnRef idx="1">
-            <a:schemeClr val="accent1"/>
-          </a:lnRef>
-          <a:fillRef idx="3">
-            <a:schemeClr val="accent1"/>
-          </a:fillRef>
-          <a:effectRef idx="2">
-            <a:schemeClr val="accent1"/>
-          </a:effectRef>
-          <a:fontRef idx="minor">
-            <a:schemeClr val="lt1"/>
-          </a:fontRef>
-        </p:style>
-        <p:txBody>
-          <a:bodyPr rtlCol="0" anchor="ctr"/>
-          <a:lstStyle/>
-          <a:p>
-            <a:pPr algn="ctr"/>
-          </a:p>
-        </p:txBody>
-      </p:sp>
-      <p:sp>
-        <p:nvSpPr>
-          <p:cNvPr id="11" name="TextBox 10"/>
-          <p:cNvSpPr txBox="1"/>
-          <p:nvPr/>
-        </p:nvSpPr>
-        <p:spPr>
-          <a:xfrm>
-            <a:off x="576072" y="3995928"/>
-            <a:ext cx="5303520" cy="2286000"/>
-          </a:xfrm>
-          <a:prstGeom prst="rect">
-            <a:avLst/>
-          </a:prstGeom>
-          <a:noFill/>
-        </p:spPr>
-        <p:txBody>
-          <a:bodyPr wrap="square">
-            <a:spAutoFit/>
-          </a:bodyPr>
-          <a:lstStyle/>
-          <a:p>
-            <a:r>
-              <a:rPr sz="1400" b="1">
-                <a:solidFill>
-                  <a:srgbClr val="0D9488"/>
-                </a:solidFill>
-                <a:latin typeface="Calibri"/>
-              </a:rPr>
-              <a:t>C. App Builder（Manus · Lovable · Bolt · v0）</a:t>
-            </a:r>
-          </a:p>
-          <a:p>
-            <a:pPr>
-              <a:spcBef>
-                <a:spcPts val="400"/>
-              </a:spcBef>
-            </a:pPr>
-            <a:r>
-              <a:rPr sz="1200" b="0">
-                <a:solidFill>
-                  <a:srgbClr val="334155"/>
-                </a:solidFill>
-                <a:latin typeface="Calibri"/>
-              </a:rPr>
-              <a:t>生成工程 + 托管预览 / WebContainer</a:t>
-            </a:r>
-          </a:p>
-          <a:p>
-            <a:pPr>
-              <a:spcBef>
-                <a:spcPts val="400"/>
-              </a:spcBef>
-            </a:pPr>
-            <a:r>
-              <a:rPr sz="1200" b="0">
-                <a:solidFill>
-                  <a:srgbClr val="334155"/>
-                </a:solidFill>
-                <a:latin typeface="Calibri"/>
-              </a:rPr>
-              <a:t>发布是一等能力（URL、visibility、版本）</a:t>
-            </a:r>
-          </a:p>
-          <a:p>
-            <a:pPr>
-              <a:spcBef>
-                <a:spcPts val="400"/>
-              </a:spcBef>
-            </a:pPr>
-            <a:r>
-              <a:rPr sz="1200" b="0">
-                <a:solidFill>
-                  <a:srgbClr val="334155"/>
-                </a:solidFill>
-                <a:latin typeface="Calibri"/>
-              </a:rPr>
-              <a:t>适合：Prompt → 可分享站点</a:t>
-            </a:r>
-          </a:p>
-          <a:p>
-            <a:pPr>
-              <a:spcBef>
-                <a:spcPts val="400"/>
-              </a:spcBef>
-            </a:pPr>
-            <a:r>
-              <a:rPr sz="1200" b="0">
-                <a:solidFill>
-                  <a:srgbClr val="334155"/>
-                </a:solidFill>
-                <a:latin typeface="Calibri"/>
-              </a:rPr>
-              <a:t>可抄：后期的 publish / TTL 预览域</a:t>
-            </a:r>
-          </a:p>
-        </p:txBody>
-      </p:sp>
-      <p:sp>
-        <p:nvSpPr>
-          <p:cNvPr id="12" name="Rounded Rectangle 11"/>
-          <p:cNvSpPr/>
-          <p:nvPr/>
-        </p:nvSpPr>
-        <p:spPr>
-          <a:xfrm>
-            <a:off x="6172200" y="3886200"/>
-            <a:ext cx="5577840" cy="2468880"/>
-          </a:xfrm>
-          <a:prstGeom prst="roundRect">
-            <a:avLst>
-              <a:gd name="adj" fmla="val 8000"/>
-            </a:avLst>
-          </a:prstGeom>
-          <a:solidFill>
-            <a:srgbClr val="FFFFFF"/>
-          </a:solidFill>
-          <a:ln>
-            <a:solidFill>
-              <a:srgbClr val="E2E8F0"/>
-            </a:solidFill>
-          </a:ln>
-        </p:spPr>
-        <p:style>
-          <a:lnRef idx="1">
-            <a:schemeClr val="accent1"/>
-          </a:lnRef>
-          <a:fillRef idx="3">
-            <a:schemeClr val="accent1"/>
-          </a:fillRef>
-          <a:effectRef idx="2">
-            <a:schemeClr val="accent1"/>
-          </a:effectRef>
-          <a:fontRef idx="minor">
-            <a:schemeClr val="lt1"/>
-          </a:fontRef>
-        </p:style>
-        <p:txBody>
-          <a:bodyPr rtlCol="0" anchor="ctr"/>
-          <a:lstStyle/>
-          <a:p>
-            <a:pPr algn="ctr"/>
-          </a:p>
-        </p:txBody>
-      </p:sp>
-      <p:sp>
-        <p:nvSpPr>
-          <p:cNvPr id="13" name="TextBox 12"/>
-          <p:cNvSpPr txBox="1"/>
-          <p:nvPr/>
-        </p:nvSpPr>
-        <p:spPr>
-          <a:xfrm>
-            <a:off x="6336792" y="3995928"/>
-            <a:ext cx="5303520" cy="2286000"/>
-          </a:xfrm>
-          <a:prstGeom prst="rect">
-            <a:avLst/>
-          </a:prstGeom>
-          <a:noFill/>
-        </p:spPr>
-        <p:txBody>
-          <a:bodyPr wrap="square">
-            <a:spAutoFit/>
-          </a:bodyPr>
-          <a:lstStyle/>
-          <a:p>
-            <a:r>
-              <a:rPr sz="1400" b="1">
-                <a:solidFill>
-                  <a:srgbClr val="0D9488"/>
-                </a:solidFill>
-                <a:latin typeface="Calibri"/>
-              </a:rPr>
-              <a:t>D. Doc Canvas（ChatGPT Canvas）</a:t>
-            </a:r>
-          </a:p>
-          <a:p>
-            <a:pPr>
-              <a:spcBef>
-                <a:spcPts val="400"/>
-              </a:spcBef>
-            </a:pPr>
-            <a:r>
-              <a:rPr sz="1200" b="0">
-                <a:solidFill>
-                  <a:srgbClr val="334155"/>
-                </a:solidFill>
-                <a:latin typeface="Calibri"/>
-              </a:rPr>
-              <a:t>侧栏协作改文档/代码</a:t>
-            </a:r>
-          </a:p>
-          <a:p>
-            <a:pPr>
-              <a:spcBef>
-                <a:spcPts val="400"/>
-              </a:spcBef>
-            </a:pPr>
-            <a:r>
-              <a:rPr sz="1200" b="0">
-                <a:solidFill>
-                  <a:srgbClr val="334155"/>
-                </a:solidFill>
-                <a:latin typeface="Calibri"/>
-              </a:rPr>
-              <a:t>不是 HTML runtime，不对齐本需求</a:t>
-            </a:r>
-          </a:p>
-          <a:p>
-            <a:pPr>
-              <a:spcBef>
-                <a:spcPts val="400"/>
-              </a:spcBef>
-            </a:pPr>
-            <a:r>
-              <a:rPr sz="1200" b="0">
-                <a:solidFill>
-                  <a:srgbClr val="334155"/>
-                </a:solidFill>
-                <a:latin typeface="Calibri"/>
-              </a:rPr>
-              <a:t>启示：别把「编辑面」当成「渲染面」</a:t>
-            </a:r>
-          </a:p>
-          <a:p>
-            <a:pPr>
-              <a:spcBef>
-                <a:spcPts val="400"/>
-              </a:spcBef>
-            </a:pPr>
-            <a:r>
-              <a:rPr sz="1200" b="0">
-                <a:solidFill>
-                  <a:srgbClr val="334155"/>
-                </a:solidFill>
-                <a:latin typeface="Calibri"/>
-              </a:rPr>
-              <a:t>我们应对标 A，必要时向 C 演进</a:t>
+              <a:rPr sz="1000" b="0">
+                <a:solidFill>
+                  <a:srgbClr val="64748B"/>
+                </a:solidFill>
+                <a:latin typeface="Calibri"/>
+              </a:rPr>
+              <a:t>* Cursor：强在仓库内工程能力，对话内「小工具预览」不是主路径。综合对标优先级：Claude Artifacts / OpenClaw Widget → 其次 Gemini/ChatGPT Canvas → 分享演进参考 Manus。</a:t>
             </a:r>
           </a:p>
         </p:txBody>
@@ -6246,7 +6949,7 @@
         <p:spPr>
           <a:xfrm>
             <a:off x="0" y="0"/>
-            <a:ext cx="12191695" cy="960120"/>
+            <a:ext cx="12191695" cy="914400"/>
           </a:xfrm>
           <a:prstGeom prst="rect">
             <a:avLst/>
@@ -6288,8 +6991,8 @@
         </p:nvSpPr>
         <p:spPr>
           <a:xfrm>
-            <a:off x="0" y="960120"/>
-            <a:ext cx="12191695" cy="54864"/>
+            <a:off x="0" y="914400"/>
+            <a:ext cx="12191695" cy="45720"/>
           </a:xfrm>
           <a:prstGeom prst="rect">
             <a:avLst/>
@@ -6331,8 +7034,8 @@
         </p:nvSpPr>
         <p:spPr>
           <a:xfrm>
-            <a:off x="502920" y="201168"/>
-            <a:ext cx="11155680" cy="640080"/>
+            <a:off x="457200" y="201168"/>
+            <a:ext cx="11247120" cy="640080"/>
           </a:xfrm>
           <a:prstGeom prst="rect">
             <a:avLst/>
@@ -6346,24 +7049,24 @@
           <a:lstStyle/>
           <a:p>
             <a:r>
-              <a:rPr sz="2400" b="1">
+              <a:rPr sz="2200" b="1">
                 <a:solidFill>
                   <a:srgbClr val="FFFFFF"/>
                 </a:solidFill>
                 <a:latin typeface="Calibri"/>
               </a:rPr>
-              <a:t>04  我们的现状与目标架构</a:t>
-            </a:r>
-          </a:p>
-          <a:p>
-            <a:r>
-              <a:rPr sz="1200" b="0">
+              <a:t>04  现状与目标架构 Gap</a:t>
+            </a:r>
+          </a:p>
+          <a:p>
+            <a:r>
+              <a:rPr sz="1100" b="0">
                 <a:solidFill>
                   <a:srgbClr val="94A3B8"/>
                 </a:solidFill>
                 <a:latin typeface="Calibri"/>
               </a:rPr>
-              <a:t>复用 write + 云空间；补齐「可预览」闭环，而不是新建一套存储</a:t>
+              <a:t>复用 write + 云空间；补齐「可预览」闭环</a:t>
             </a:r>
           </a:p>
         </p:txBody>
@@ -6376,12 +7079,12 @@
         </p:nvSpPr>
         <p:spPr>
           <a:xfrm>
-            <a:off x="411480" y="1234440"/>
-            <a:ext cx="5577840" cy="3063240"/>
+            <a:off x="365760" y="1143000"/>
+            <a:ext cx="5669280" cy="3108960"/>
           </a:xfrm>
           <a:prstGeom prst="roundRect">
             <a:avLst>
-              <a:gd name="adj" fmla="val 8000"/>
+              <a:gd name="adj" fmla="val 6000"/>
             </a:avLst>
           </a:prstGeom>
           <a:solidFill>
@@ -6423,8 +7126,8 @@
         </p:nvSpPr>
         <p:spPr>
           <a:xfrm>
-            <a:off x="576072" y="1344168"/>
-            <a:ext cx="5303520" cy="2880360"/>
+            <a:off x="512064" y="1252728"/>
+            <a:ext cx="5413248" cy="2926080"/>
           </a:xfrm>
           <a:prstGeom prst="rect">
             <a:avLst/>
@@ -6438,125 +7141,125 @@
           <a:lstStyle/>
           <a:p>
             <a:r>
-              <a:rPr sz="1400" b="1">
+              <a:rPr sz="1300" b="1">
                 <a:solidFill>
                   <a:srgbClr val="0D9488"/>
                 </a:solidFill>
                 <a:latin typeface="Calibri"/>
               </a:rPr>
-              <a:t>现状链路（已通）</a:t>
+              <a:t>现状</a:t>
             </a:r>
           </a:p>
           <a:p>
             <a:pPr>
               <a:spcBef>
-                <a:spcPts val="400"/>
+                <a:spcPts val="300"/>
               </a:spcBef>
             </a:pPr>
             <a:r>
-              <a:rPr sz="1200" b="0">
+              <a:rPr sz="1100" b="0">
                 <a:solidFill>
                   <a:srgbClr val="334155"/>
                 </a:solidFill>
                 <a:latin typeface="Calibri"/>
               </a:rPr>
-              <a:t>Agent → write(path, content)</a:t>
+              <a:t>Skill 取数 → 模型生成 HTML</a:t>
             </a:r>
           </a:p>
           <a:p>
             <a:pPr>
               <a:spcBef>
-                <a:spcPts val="400"/>
+                <a:spcPts val="300"/>
               </a:spcBef>
             </a:pPr>
             <a:r>
-              <a:rPr sz="1200" b="0">
+              <a:rPr sz="1100" b="0">
                 <a:solidFill>
                   <a:srgbClr val="334155"/>
                 </a:solidFill>
                 <a:latin typeface="Calibri"/>
               </a:rPr>
-              <a:t>→ workspace 落盘</a:t>
+              <a:t>→ write 落盘 → 同步华为云空间</a:t>
             </a:r>
           </a:p>
           <a:p>
             <a:pPr>
               <a:spcBef>
-                <a:spcPts val="400"/>
+                <a:spcPts val="300"/>
               </a:spcBef>
             </a:pPr>
             <a:r>
-              <a:rPr sz="1200" b="0">
+              <a:rPr sz="1100" b="0">
                 <a:solidFill>
                   <a:srgbClr val="334155"/>
                 </a:solidFill>
                 <a:latin typeface="Calibri"/>
               </a:rPr>
-              <a:t>→ 同步华为云空间（KooDrive）</a:t>
+              <a:t>→ 端 REST 可下载</a:t>
             </a:r>
           </a:p>
           <a:p>
             <a:pPr>
               <a:spcBef>
-                <a:spcPts val="400"/>
+                <a:spcPts val="300"/>
               </a:spcBef>
             </a:pPr>
             <a:r>
-              <a:rPr sz="1200" b="0">
+              <a:rPr sz="1100" b="0">
                 <a:solidFill>
                   <a:srgbClr val="334155"/>
                 </a:solidFill>
                 <a:latin typeface="Calibri"/>
               </a:rPr>
-              <a:t>→ 端 REST 按 file_id 下载</a:t>
+              <a:t/>
             </a:r>
           </a:p>
           <a:p>
             <a:pPr>
               <a:spcBef>
-                <a:spcPts val="400"/>
+                <a:spcPts val="300"/>
               </a:spcBef>
             </a:pPr>
             <a:r>
-              <a:rPr sz="1200" b="0">
+              <a:rPr sz="1100" b="0">
                 <a:solidFill>
                   <a:srgbClr val="334155"/>
                 </a:solidFill>
                 <a:latin typeface="Calibri"/>
               </a:rPr>
-              <a:t/>
+              <a:t>已具备：生成 / 落盘 / 同步</a:t>
             </a:r>
           </a:p>
           <a:p>
             <a:pPr>
               <a:spcBef>
-                <a:spcPts val="400"/>
+                <a:spcPts val="300"/>
               </a:spcBef>
             </a:pPr>
             <a:r>
-              <a:rPr sz="1200" b="0">
+              <a:rPr sz="1100" b="0">
                 <a:solidFill>
                   <a:srgbClr val="334155"/>
                 </a:solidFill>
                 <a:latin typeface="Calibri"/>
               </a:rPr>
-              <a:t>断点：下载后当附件/源码，</a:t>
+              <a:t>用户感知：多为附件或源码，</a:t>
             </a:r>
           </a:p>
           <a:p>
             <a:pPr>
               <a:spcBef>
-                <a:spcPts val="400"/>
+                <a:spcPts val="300"/>
               </a:spcBef>
             </a:pPr>
             <a:r>
-              <a:rPr sz="1200" b="0">
+              <a:rPr sz="1100" b="0">
                 <a:solidFill>
                   <a:srgbClr val="334155"/>
                 </a:solidFill>
                 <a:latin typeface="Calibri"/>
               </a:rPr>
-              <a:t>没有「这是网页，请画出来」的产品路径</a:t>
+              <a:t>「报告」没有在对话里长出来</a:t>
             </a:r>
           </a:p>
         </p:txBody>
@@ -6569,12 +7272,205 @@
         </p:nvSpPr>
         <p:spPr>
           <a:xfrm>
-            <a:off x="6172200" y="1234440"/>
-            <a:ext cx="5577840" cy="3063240"/>
+            <a:off x="6217920" y="1143000"/>
+            <a:ext cx="5577840" cy="3108960"/>
           </a:xfrm>
           <a:prstGeom prst="roundRect">
             <a:avLst>
-              <a:gd name="adj" fmla="val 8000"/>
+              <a:gd name="adj" fmla="val 6000"/>
+            </a:avLst>
+          </a:prstGeom>
+          <a:solidFill>
+            <a:srgbClr val="F0FDFA"/>
+          </a:solidFill>
+          <a:ln>
+            <a:solidFill>
+              <a:srgbClr val="E2E8F0"/>
+            </a:solidFill>
+          </a:ln>
+        </p:spPr>
+        <p:style>
+          <a:lnRef idx="1">
+            <a:schemeClr val="accent1"/>
+          </a:lnRef>
+          <a:fillRef idx="3">
+            <a:schemeClr val="accent1"/>
+          </a:fillRef>
+          <a:effectRef idx="2">
+            <a:schemeClr val="accent1"/>
+          </a:effectRef>
+          <a:fontRef idx="minor">
+            <a:schemeClr val="lt1"/>
+          </a:fontRef>
+        </p:style>
+        <p:txBody>
+          <a:bodyPr rtlCol="0" anchor="ctr"/>
+          <a:lstStyle/>
+          <a:p>
+            <a:pPr algn="ctr"/>
+          </a:p>
+        </p:txBody>
+      </p:sp>
+      <p:sp>
+        <p:nvSpPr>
+          <p:cNvPr id="9" name="TextBox 8"/>
+          <p:cNvSpPr txBox="1"/>
+          <p:nvPr/>
+        </p:nvSpPr>
+        <p:spPr>
+          <a:xfrm>
+            <a:off x="6364224" y="1252728"/>
+            <a:ext cx="5321808" cy="2926080"/>
+          </a:xfrm>
+          <a:prstGeom prst="rect">
+            <a:avLst/>
+          </a:prstGeom>
+          <a:noFill/>
+        </p:spPr>
+        <p:txBody>
+          <a:bodyPr wrap="square">
+            <a:spAutoFit/>
+          </a:bodyPr>
+          <a:lstStyle/>
+          <a:p>
+            <a:r>
+              <a:rPr sz="1300" b="1">
+                <a:solidFill>
+                  <a:srgbClr val="0D9488"/>
+                </a:solidFill>
+                <a:latin typeface="Calibri"/>
+              </a:rPr>
+              <a:t>目标</a:t>
+            </a:r>
+          </a:p>
+          <a:p>
+            <a:pPr>
+              <a:spcBef>
+                <a:spcPts val="300"/>
+              </a:spcBef>
+            </a:pPr>
+            <a:r>
+              <a:rPr sz="1100" b="0">
+                <a:solidFill>
+                  <a:srgbClr val="334155"/>
+                </a:solidFill>
+                <a:latin typeface="Calibri"/>
+              </a:rPr>
+              <a:t>…… → 识别为 HTML 预览</a:t>
+            </a:r>
+          </a:p>
+          <a:p>
+            <a:pPr>
+              <a:spcBef>
+                <a:spcPts val="300"/>
+              </a:spcBef>
+            </a:pPr>
+            <a:r>
+              <a:rPr sz="1100" b="0">
+                <a:solidFill>
+                  <a:srgbClr val="334155"/>
+                </a:solidFill>
+                <a:latin typeface="Calibri"/>
+              </a:rPr>
+              <a:t>→ sandbox iframe/WebView 渲染</a:t>
+            </a:r>
+          </a:p>
+          <a:p>
+            <a:pPr>
+              <a:spcBef>
+                <a:spcPts val="300"/>
+              </a:spcBef>
+            </a:pPr>
+            <a:r>
+              <a:rPr sz="1100" b="0">
+                <a:solidFill>
+                  <a:srgbClr val="334155"/>
+                </a:solidFill>
+                <a:latin typeface="Calibri"/>
+              </a:rPr>
+              <a:t>→ 会话内可见可交互</a:t>
+            </a:r>
+          </a:p>
+          <a:p>
+            <a:pPr>
+              <a:spcBef>
+                <a:spcPts val="300"/>
+              </a:spcBef>
+            </a:pPr>
+            <a:r>
+              <a:rPr sz="1100" b="0">
+                <a:solidFill>
+                  <a:srgbClr val="334155"/>
+                </a:solidFill>
+                <a:latin typeface="Calibri"/>
+              </a:rPr>
+              <a:t>→（可选）分享 / 回放</a:t>
+            </a:r>
+          </a:p>
+          <a:p>
+            <a:pPr>
+              <a:spcBef>
+                <a:spcPts val="300"/>
+              </a:spcBef>
+            </a:pPr>
+            <a:r>
+              <a:rPr sz="1100" b="0">
+                <a:solidFill>
+                  <a:srgbClr val="334155"/>
+                </a:solidFill>
+                <a:latin typeface="Calibri"/>
+              </a:rPr>
+              <a:t/>
+            </a:r>
+          </a:p>
+          <a:p>
+            <a:pPr>
+              <a:spcBef>
+                <a:spcPts val="300"/>
+              </a:spcBef>
+            </a:pPr>
+            <a:r>
+              <a:rPr sz="1100" b="0">
+                <a:solidFill>
+                  <a:srgbClr val="334155"/>
+                </a:solidFill>
+                <a:latin typeface="Calibri"/>
+              </a:rPr>
+              <a:t>健康报告验收：打开会话即可</a:t>
+            </a:r>
+          </a:p>
+          <a:p>
+            <a:pPr>
+              <a:spcBef>
+                <a:spcPts val="300"/>
+              </a:spcBef>
+            </a:pPr>
+            <a:r>
+              <a:rPr sz="1100" b="0">
+                <a:solidFill>
+                  <a:srgbClr val="334155"/>
+                </a:solidFill>
+                <a:latin typeface="Calibri"/>
+              </a:rPr>
+              <a:t>查看图表化报告并交互</a:t>
+            </a:r>
+          </a:p>
+        </p:txBody>
+      </p:sp>
+      <p:sp>
+        <p:nvSpPr>
+          <p:cNvPr id="10" name="Rounded Rectangle 9"/>
+          <p:cNvSpPr/>
+          <p:nvPr/>
+        </p:nvSpPr>
+        <p:spPr>
+          <a:xfrm>
+            <a:off x="365760" y="4434840"/>
+            <a:ext cx="11430000" cy="2103120"/>
+          </a:xfrm>
+          <a:prstGeom prst="roundRect">
+            <a:avLst>
+              <a:gd name="adj" fmla="val 6000"/>
             </a:avLst>
           </a:prstGeom>
           <a:solidFill>
@@ -6610,14 +7506,14 @@
       </p:sp>
       <p:sp>
         <p:nvSpPr>
-          <p:cNvPr id="9" name="TextBox 8"/>
+          <p:cNvPr id="11" name="TextBox 10"/>
           <p:cNvSpPr txBox="1"/>
           <p:nvPr/>
         </p:nvSpPr>
         <p:spPr>
           <a:xfrm>
-            <a:off x="6336792" y="1344168"/>
-            <a:ext cx="5303520" cy="2880360"/>
+            <a:off x="512064" y="4544568"/>
+            <a:ext cx="11173968" cy="1920240"/>
           </a:xfrm>
           <a:prstGeom prst="rect">
             <a:avLst/>
@@ -6631,207 +7527,93 @@
           <a:lstStyle/>
           <a:p>
             <a:r>
-              <a:rPr sz="1400" b="1">
+              <a:rPr sz="1300" b="1">
                 <a:solidFill>
                   <a:srgbClr val="0D9488"/>
                 </a:solidFill>
                 <a:latin typeface="Calibri"/>
               </a:rPr>
-              <a:t>目标闭环（要补）</a:t>
+              <a:t>Gap 清单（按优先级）</a:t>
             </a:r>
           </a:p>
           <a:p>
             <a:pPr>
               <a:spcBef>
-                <a:spcPts val="400"/>
+                <a:spcPts val="300"/>
               </a:spcBef>
             </a:pPr>
             <a:r>
-              <a:rPr sz="1200" b="0">
+              <a:rPr sz="1100" b="0">
                 <a:solidFill>
                   <a:srgbClr val="334155"/>
                 </a:solidFill>
                 <a:latin typeface="Calibri"/>
               </a:rPr>
-              <a:t>write 返回：file_id + mime + sync_status</a:t>
+              <a:t>P0  端侧无 HTML 预览容器（Web：iframe / 原生：WebView）</a:t>
             </a:r>
           </a:p>
           <a:p>
             <a:pPr>
               <a:spcBef>
-                <a:spcPts val="400"/>
+                <a:spcPts val="300"/>
               </a:spcBef>
             </a:pPr>
             <a:r>
-              <a:rPr sz="1200" b="0">
+              <a:rPr sz="1100" b="0">
                 <a:solidFill>
                   <a:srgbClr val="334155"/>
                 </a:solidFill>
                 <a:latin typeface="Calibri"/>
               </a:rPr>
-              <a:t>运行时标记：previewable=html</a:t>
+              <a:t>P0  缺 preview 元数据约定（mime=text/html、preview.kind、sync_status、file_id）</a:t>
             </a:r>
           </a:p>
           <a:p>
             <a:pPr>
               <a:spcBef>
-                <a:spcPts val="400"/>
+                <a:spcPts val="300"/>
               </a:spcBef>
             </a:pPr>
             <a:r>
-              <a:rPr sz="1200" b="0">
+              <a:rPr sz="1100" b="0">
                 <a:solidFill>
                   <a:srgbClr val="334155"/>
                 </a:solidFill>
                 <a:latin typeface="Calibri"/>
               </a:rPr>
-              <a:t>端：REST 取文本 → iframe/WebView 渲染</a:t>
+              <a:t>P0  缺安全默认（sandbox=allow-scripts，默认不加 allow-same-origin）</a:t>
             </a:r>
           </a:p>
           <a:p>
             <a:pPr>
               <a:spcBef>
-                <a:spcPts val="400"/>
+                <a:spcPts val="300"/>
               </a:spcBef>
             </a:pPr>
             <a:r>
-              <a:rPr sz="1200" b="0">
+              <a:rPr sz="1100" b="0">
                 <a:solidFill>
                   <a:srgbClr val="334155"/>
                 </a:solidFill>
                 <a:latin typeface="Calibri"/>
               </a:rPr>
-              <a:t>安全：sandbox=allow-scripts（默不加 same-origin）</a:t>
+              <a:t>P1  同步就绪信号（避免未 sync 完就拉 404）与刷新/降级策略</a:t>
             </a:r>
           </a:p>
           <a:p>
             <a:pPr>
               <a:spcBef>
-                <a:spcPts val="400"/>
+                <a:spcPts val="300"/>
               </a:spcBef>
             </a:pPr>
             <a:r>
-              <a:rPr sz="1200" b="0">
+              <a:rPr sz="1100" b="0">
                 <a:solidFill>
                   <a:srgbClr val="334155"/>
                 </a:solidFill>
                 <a:latin typeface="Calibri"/>
               </a:rPr>
-              <a:t/>
-            </a:r>
-          </a:p>
-          <a:p>
-            <a:pPr>
-              <a:spcBef>
-                <a:spcPts val="400"/>
-              </a:spcBef>
-            </a:pPr>
-            <a:r>
-              <a:rPr sz="1200" b="0">
-                <a:solidFill>
-                  <a:srgbClr val="334155"/>
-                </a:solidFill>
-                <a:latin typeface="Calibri"/>
-              </a:rPr>
-              <a:t>可选：show_widget 薄封装（语义化触发预览）</a:t>
-            </a:r>
-          </a:p>
-          <a:p>
-            <a:pPr>
-              <a:spcBef>
-                <a:spcPts val="400"/>
-              </a:spcBef>
-            </a:pPr>
-            <a:r>
-              <a:rPr sz="1200" b="0">
-                <a:solidFill>
-                  <a:srgbClr val="334155"/>
-                </a:solidFill>
-                <a:latin typeface="Calibri"/>
-              </a:rPr>
-              <a:t>可选：流式粗预览；最终仍以完整版为准</a:t>
-            </a:r>
-          </a:p>
-        </p:txBody>
-      </p:sp>
-      <p:sp>
-        <p:nvSpPr>
-          <p:cNvPr id="10" name="TextBox 9"/>
-          <p:cNvSpPr txBox="1"/>
-          <p:nvPr/>
-        </p:nvSpPr>
-        <p:spPr>
-          <a:xfrm>
-            <a:off x="502920" y="4480560"/>
-            <a:ext cx="11155680" cy="2011680"/>
-          </a:xfrm>
-          <a:prstGeom prst="rect">
-            <a:avLst/>
-          </a:prstGeom>
-          <a:noFill/>
-        </p:spPr>
-        <p:txBody>
-          <a:bodyPr wrap="square">
-            <a:spAutoFit/>
-          </a:bodyPr>
-          <a:lstStyle/>
-          <a:p>
-            <a:r>
-              <a:rPr sz="1400" b="1">
-                <a:solidFill>
-                  <a:srgbClr val="0D9488"/>
-                </a:solidFill>
-                <a:latin typeface="Calibri"/>
-              </a:rPr>
-              <a:t>端到端目标流</a:t>
-            </a:r>
-          </a:p>
-          <a:p>
-            <a:pPr>
-              <a:spcBef>
-                <a:spcPts val="600"/>
-              </a:spcBef>
-            </a:pPr>
-            <a:r>
-              <a:rPr sz="1300" b="0">
-                <a:solidFill>
-                  <a:srgbClr val="334155"/>
-                </a:solidFill>
-                <a:latin typeface="Calibri"/>
-              </a:rPr>
-              <a:t>用户要交互页 → 模型生成 HTML → write 到 artifacts/*.html → 云空间同步就绪</a:t>
-            </a:r>
-          </a:p>
-          <a:p>
-            <a:pPr>
-              <a:spcBef>
-                <a:spcPts val="600"/>
-              </a:spcBef>
-            </a:pPr>
-            <a:r>
-              <a:rPr sz="1300" b="0">
-                <a:solidFill>
-                  <a:srgbClr val="334155"/>
-                </a:solidFill>
-                <a:latin typeface="Calibri"/>
-              </a:rPr>
-              <a:t>→ 工具结果带 file_id/mime → 端下载 → sandbox iframe/WebView 呈现 → 用户可交互</a:t>
-            </a:r>
-          </a:p>
-          <a:p>
-            <a:pPr>
-              <a:spcBef>
-                <a:spcPts val="600"/>
-              </a:spcBef>
-            </a:pPr>
-            <a:r>
-              <a:rPr sz="1300" b="0">
-                <a:solidFill>
-                  <a:srgbClr val="334155"/>
-                </a:solidFill>
-                <a:latin typeface="Calibri"/>
-              </a:rPr>
-              <a:t>→（可选）再次 write 覆盖 → 端刷新预览；（可选）对外分享仍用云空间 URL/签名链</a:t>
+              <a:t>P2  流式通道、混合预览、对外分享（签名 URL / TTL）</a:t>
             </a:r>
           </a:p>
         </p:txBody>
@@ -6906,7 +7688,7 @@
         <p:spPr>
           <a:xfrm>
             <a:off x="0" y="0"/>
-            <a:ext cx="12191695" cy="960120"/>
+            <a:ext cx="12191695" cy="914400"/>
           </a:xfrm>
           <a:prstGeom prst="rect">
             <a:avLst/>
@@ -6948,8 +7730,8 @@
         </p:nvSpPr>
         <p:spPr>
           <a:xfrm>
-            <a:off x="0" y="960120"/>
-            <a:ext cx="12191695" cy="54864"/>
+            <a:off x="0" y="914400"/>
+            <a:ext cx="12191695" cy="45720"/>
           </a:xfrm>
           <a:prstGeom prst="rect">
             <a:avLst/>
@@ -6991,8 +7773,8 @@
         </p:nvSpPr>
         <p:spPr>
           <a:xfrm>
-            <a:off x="502920" y="201168"/>
-            <a:ext cx="11155680" cy="640080"/>
+            <a:off x="457200" y="201168"/>
+            <a:ext cx="11247120" cy="640080"/>
           </a:xfrm>
           <a:prstGeom prst="rect">
             <a:avLst/>
@@ -7006,590 +7788,642 @@
           <a:lstStyle/>
           <a:p>
             <a:r>
-              <a:rPr sz="2400" b="1">
+              <a:rPr sz="2200" b="1">
                 <a:solidFill>
                   <a:srgbClr val="FFFFFF"/>
                 </a:solidFill>
                 <a:latin typeface="Calibri"/>
               </a:rPr>
-              <a:t>05  两条渲染路径：完整下载 vs 流式增量</a:t>
-            </a:r>
-          </a:p>
-          <a:p>
-            <a:r>
-              <a:rPr sz="1200" b="0">
+              <a:t>05  实现方案对比</a:t>
+            </a:r>
+          </a:p>
+          <a:p>
+            <a:r>
+              <a:rPr sz="1100" b="0">
                 <a:solidFill>
                   <a:srgbClr val="94A3B8"/>
                 </a:solidFill>
                 <a:latin typeface="Calibri"/>
               </a:rPr>
-              <a:t>都要有渲染引擎；差别只在「何时把 HTML 喂给引擎」</a:t>
-            </a:r>
-          </a:p>
-        </p:txBody>
-      </p:sp>
-      <p:sp>
-        <p:nvSpPr>
-          <p:cNvPr id="6" name="Rounded Rectangle 5"/>
-          <p:cNvSpPr/>
+              <a:t>三种路径：完整下载渲染 / 流式实时渲染 / 混合（流式粗预览 + 落盘定稿）</a:t>
+            </a:r>
+          </a:p>
+        </p:txBody>
+      </p:sp>
+      <p:graphicFrame>
+        <p:nvGraphicFramePr>
+          <p:cNvPr id="6" name="Table 5"/>
+          <p:cNvGraphicFramePr>
+            <a:graphicFrameLocks noGrp="1"/>
+          </p:cNvGraphicFramePr>
           <p:nvPr/>
-        </p:nvSpPr>
-        <p:spPr>
-          <a:xfrm>
-            <a:off x="411480" y="1234440"/>
-            <a:ext cx="5577840" cy="5029200"/>
-          </a:xfrm>
-          <a:prstGeom prst="roundRect">
-            <a:avLst>
-              <a:gd name="adj" fmla="val 8000"/>
-            </a:avLst>
-          </a:prstGeom>
-          <a:solidFill>
-            <a:srgbClr val="FFFFFF"/>
-          </a:solidFill>
-          <a:ln>
-            <a:solidFill>
-              <a:srgbClr val="E2E8F0"/>
-            </a:solidFill>
-          </a:ln>
-        </p:spPr>
-        <p:style>
-          <a:lnRef idx="1">
-            <a:schemeClr val="accent1"/>
-          </a:lnRef>
-          <a:fillRef idx="3">
-            <a:schemeClr val="accent1"/>
-          </a:fillRef>
-          <a:effectRef idx="2">
-            <a:schemeClr val="accent1"/>
-          </a:effectRef>
-          <a:fontRef idx="minor">
-            <a:schemeClr val="lt1"/>
-          </a:fontRef>
-        </p:style>
-        <p:txBody>
-          <a:bodyPr rtlCol="0" anchor="ctr"/>
-          <a:lstStyle/>
-          <a:p>
-            <a:pPr algn="ctr"/>
-          </a:p>
-        </p:txBody>
-      </p:sp>
-      <p:sp>
-        <p:nvSpPr>
-          <p:cNvPr id="7" name="TextBox 6"/>
-          <p:cNvSpPr txBox="1"/>
-          <p:nvPr/>
-        </p:nvSpPr>
-        <p:spPr>
-          <a:xfrm>
-            <a:off x="576072" y="1344168"/>
-            <a:ext cx="5303520" cy="4846320"/>
-          </a:xfrm>
-          <a:prstGeom prst="rect">
-            <a:avLst/>
-          </a:prstGeom>
-          <a:noFill/>
-        </p:spPr>
-        <p:txBody>
-          <a:bodyPr wrap="square">
-            <a:spAutoFit/>
-          </a:bodyPr>
-          <a:lstStyle/>
-          <a:p>
-            <a:r>
-              <a:rPr sz="1400" b="1">
-                <a:solidFill>
-                  <a:srgbClr val="0D9488"/>
-                </a:solidFill>
-                <a:latin typeface="Calibri"/>
-              </a:rPr>
-              <a:t>路径 A · 下载后完整渲染（推荐默认）</a:t>
-            </a:r>
-          </a:p>
-          <a:p>
-            <a:pPr>
-              <a:spcBef>
-                <a:spcPts val="400"/>
-              </a:spcBef>
-            </a:pPr>
-            <a:r>
-              <a:rPr sz="1200" b="0">
-                <a:solidFill>
-                  <a:srgbClr val="334155"/>
-                </a:solidFill>
-                <a:latin typeface="Calibri"/>
-              </a:rPr>
-              <a:t>时机：sync 完成 → REST 拉全文 → 一次加载</a:t>
-            </a:r>
-          </a:p>
-          <a:p>
-            <a:pPr>
-              <a:spcBef>
-                <a:spcPts val="400"/>
-              </a:spcBef>
-            </a:pPr>
-            <a:r>
-              <a:rPr sz="1200" b="0">
-                <a:solidFill>
-                  <a:srgbClr val="334155"/>
-                </a:solidFill>
-                <a:latin typeface="Calibri"/>
-              </a:rPr>
-              <a:t/>
-            </a:r>
-          </a:p>
-          <a:p>
-            <a:pPr>
-              <a:spcBef>
-                <a:spcPts val="400"/>
-              </a:spcBef>
-            </a:pPr>
-            <a:r>
-              <a:rPr sz="1200" b="0">
-                <a:solidFill>
-                  <a:srgbClr val="334155"/>
-                </a:solidFill>
-                <a:latin typeface="Calibri"/>
-              </a:rPr>
-              <a:t>优点</a:t>
-            </a:r>
-          </a:p>
-          <a:p>
-            <a:pPr>
-              <a:spcBef>
-                <a:spcPts val="400"/>
-              </a:spcBef>
-            </a:pPr>
-            <a:r>
-              <a:rPr sz="1200" b="0">
-                <a:solidFill>
-                  <a:srgbClr val="334155"/>
-                </a:solidFill>
-                <a:latin typeface="Calibri"/>
-              </a:rPr>
-              <a:t>· 标签完整，不易花屏</a:t>
-            </a:r>
-          </a:p>
-          <a:p>
-            <a:pPr>
-              <a:spcBef>
-                <a:spcPts val="400"/>
-              </a:spcBef>
-            </a:pPr>
-            <a:r>
-              <a:rPr sz="1200" b="0">
-                <a:solidFill>
-                  <a:srgbClr val="334155"/>
-                </a:solidFill>
-                <a:latin typeface="Calibri"/>
-              </a:rPr>
-              <a:t>· 脚本只执行一次</a:t>
-            </a:r>
-          </a:p>
-          <a:p>
-            <a:pPr>
-              <a:spcBef>
-                <a:spcPts val="400"/>
-              </a:spcBef>
-            </a:pPr>
-            <a:r>
-              <a:rPr sz="1200" b="0">
-                <a:solidFill>
-                  <a:srgbClr val="334155"/>
-                </a:solidFill>
-                <a:latin typeface="Calibri"/>
-              </a:rPr>
-              <a:t>· 天然可刷新 / 多端 / 回放</a:t>
-            </a:r>
-          </a:p>
-          <a:p>
-            <a:pPr>
-              <a:spcBef>
-                <a:spcPts val="400"/>
-              </a:spcBef>
-            </a:pPr>
-            <a:r>
-              <a:rPr sz="1200" b="0">
-                <a:solidFill>
-                  <a:srgbClr val="334155"/>
-                </a:solidFill>
-                <a:latin typeface="Calibri"/>
-              </a:rPr>
-              <a:t>· 与现有云空间模型零阻抗</a:t>
-            </a:r>
-          </a:p>
-          <a:p>
-            <a:pPr>
-              <a:spcBef>
-                <a:spcPts val="400"/>
-              </a:spcBef>
-            </a:pPr>
-            <a:r>
-              <a:rPr sz="1200" b="0">
-                <a:solidFill>
-                  <a:srgbClr val="334155"/>
-                </a:solidFill>
-                <a:latin typeface="Calibri"/>
-              </a:rPr>
-              <a:t/>
-            </a:r>
-          </a:p>
-          <a:p>
-            <a:pPr>
-              <a:spcBef>
-                <a:spcPts val="400"/>
-              </a:spcBef>
-            </a:pPr>
-            <a:r>
-              <a:rPr sz="1200" b="0">
-                <a:solidFill>
-                  <a:srgbClr val="334155"/>
-                </a:solidFill>
-                <a:latin typeface="Calibri"/>
-              </a:rPr>
-              <a:t>代价</a:t>
-            </a:r>
-          </a:p>
-          <a:p>
-            <a:pPr>
-              <a:spcBef>
-                <a:spcPts val="400"/>
-              </a:spcBef>
-            </a:pPr>
-            <a:r>
-              <a:rPr sz="1200" b="0">
-                <a:solidFill>
-                  <a:srgbClr val="334155"/>
-                </a:solidFill>
-                <a:latin typeface="Calibri"/>
-              </a:rPr>
-              <a:t>· 需等生成+同步结束才出画面</a:t>
-            </a:r>
-          </a:p>
-          <a:p>
-            <a:pPr>
-              <a:spcBef>
-                <a:spcPts val="400"/>
-              </a:spcBef>
-            </a:pPr>
-            <a:r>
-              <a:rPr sz="1200" b="0">
-                <a:solidFill>
-                  <a:srgbClr val="334155"/>
-                </a:solidFill>
-                <a:latin typeface="Calibri"/>
-              </a:rPr>
-              <a:t/>
-            </a:r>
-          </a:p>
-          <a:p>
-            <a:pPr>
-              <a:spcBef>
-                <a:spcPts val="400"/>
-              </a:spcBef>
-            </a:pPr>
-            <a:r>
-              <a:rPr sz="1200" b="0">
-                <a:solidFill>
-                  <a:srgbClr val="334155"/>
-                </a:solidFill>
-                <a:latin typeface="Calibri"/>
-              </a:rPr>
-              <a:t>适用：几乎所有一期场景</a:t>
-            </a:r>
-          </a:p>
-        </p:txBody>
-      </p:sp>
-      <p:sp>
-        <p:nvSpPr>
-          <p:cNvPr id="8" name="Rounded Rectangle 7"/>
-          <p:cNvSpPr/>
-          <p:nvPr/>
-        </p:nvSpPr>
-        <p:spPr>
-          <a:xfrm>
-            <a:off x="6172200" y="1234440"/>
-            <a:ext cx="5577840" cy="5029200"/>
-          </a:xfrm>
-          <a:prstGeom prst="roundRect">
-            <a:avLst>
-              <a:gd name="adj" fmla="val 8000"/>
-            </a:avLst>
-          </a:prstGeom>
-          <a:solidFill>
-            <a:srgbClr val="FFFFFF"/>
-          </a:solidFill>
-          <a:ln>
-            <a:solidFill>
-              <a:srgbClr val="E2E8F0"/>
-            </a:solidFill>
-          </a:ln>
-        </p:spPr>
-        <p:style>
-          <a:lnRef idx="1">
-            <a:schemeClr val="accent1"/>
-          </a:lnRef>
-          <a:fillRef idx="3">
-            <a:schemeClr val="accent1"/>
-          </a:fillRef>
-          <a:effectRef idx="2">
-            <a:schemeClr val="accent1"/>
-          </a:effectRef>
-          <a:fontRef idx="minor">
-            <a:schemeClr val="lt1"/>
-          </a:fontRef>
-        </p:style>
-        <p:txBody>
-          <a:bodyPr rtlCol="0" anchor="ctr"/>
-          <a:lstStyle/>
-          <a:p>
-            <a:pPr algn="ctr"/>
-          </a:p>
-        </p:txBody>
-      </p:sp>
-      <p:sp>
-        <p:nvSpPr>
-          <p:cNvPr id="9" name="TextBox 8"/>
-          <p:cNvSpPr txBox="1"/>
-          <p:nvPr/>
-        </p:nvSpPr>
-        <p:spPr>
-          <a:xfrm>
-            <a:off x="6336792" y="1344168"/>
-            <a:ext cx="5303520" cy="4846320"/>
-          </a:xfrm>
-          <a:prstGeom prst="rect">
-            <a:avLst/>
-          </a:prstGeom>
-          <a:noFill/>
-        </p:spPr>
-        <p:txBody>
-          <a:bodyPr wrap="square">
-            <a:spAutoFit/>
-          </a:bodyPr>
-          <a:lstStyle/>
-          <a:p>
-            <a:r>
-              <a:rPr sz="1400" b="1">
-                <a:solidFill>
-                  <a:srgbClr val="0D9488"/>
-                </a:solidFill>
-                <a:latin typeface="Calibri"/>
-              </a:rPr>
-              <a:t>路径 B · 流式边传边渲染（体验增强）</a:t>
-            </a:r>
-          </a:p>
-          <a:p>
-            <a:pPr>
-              <a:spcBef>
-                <a:spcPts val="400"/>
-              </a:spcBef>
-            </a:pPr>
-            <a:r>
-              <a:rPr sz="1200" b="0">
-                <a:solidFill>
-                  <a:srgbClr val="334155"/>
-                </a:solidFill>
-                <a:latin typeface="Calibri"/>
-              </a:rPr>
-              <a:t>时机：token/delta 推送 → buffer → 节流刷新</a:t>
-            </a:r>
-          </a:p>
-          <a:p>
-            <a:pPr>
-              <a:spcBef>
-                <a:spcPts val="400"/>
-              </a:spcBef>
-            </a:pPr>
-            <a:r>
-              <a:rPr sz="1200" b="0">
-                <a:solidFill>
-                  <a:srgbClr val="334155"/>
-                </a:solidFill>
-                <a:latin typeface="Calibri"/>
-              </a:rPr>
-              <a:t/>
-            </a:r>
-          </a:p>
-          <a:p>
-            <a:pPr>
-              <a:spcBef>
-                <a:spcPts val="400"/>
-              </a:spcBef>
-            </a:pPr>
-            <a:r>
-              <a:rPr sz="1200" b="0">
-                <a:solidFill>
-                  <a:srgbClr val="334155"/>
-                </a:solidFill>
-                <a:latin typeface="Calibri"/>
-              </a:rPr>
-              <a:t>优点</a:t>
-            </a:r>
-          </a:p>
-          <a:p>
-            <a:pPr>
-              <a:spcBef>
-                <a:spcPts val="400"/>
-              </a:spcBef>
-            </a:pPr>
-            <a:r>
-              <a:rPr sz="1200" b="0">
-                <a:solidFill>
-                  <a:srgbClr val="334155"/>
-                </a:solidFill>
-                <a:latin typeface="Calibri"/>
-              </a:rPr>
-              <a:t>· 首屏更早，体感像流式 Markdown</a:t>
-            </a:r>
-          </a:p>
-          <a:p>
-            <a:pPr>
-              <a:spcBef>
-                <a:spcPts val="400"/>
-              </a:spcBef>
-            </a:pPr>
-            <a:r>
-              <a:rPr sz="1200" b="0">
-                <a:solidFill>
-                  <a:srgbClr val="334155"/>
-                </a:solidFill>
-                <a:latin typeface="Calibri"/>
-              </a:rPr>
-              <a:t/>
-            </a:r>
-          </a:p>
-          <a:p>
-            <a:pPr>
-              <a:spcBef>
-                <a:spcPts val="400"/>
-              </a:spcBef>
-            </a:pPr>
-            <a:r>
-              <a:rPr sz="1200" b="0">
-                <a:solidFill>
-                  <a:srgbClr val="334155"/>
-                </a:solidFill>
-                <a:latin typeface="Calibri"/>
-              </a:rPr>
-              <a:t>挑战（比 Markdown 更挑）</a:t>
-            </a:r>
-          </a:p>
-          <a:p>
-            <a:pPr>
-              <a:spcBef>
-                <a:spcPts val="400"/>
-              </a:spcBef>
-            </a:pPr>
-            <a:r>
-              <a:rPr sz="1200" b="0">
-                <a:solidFill>
-                  <a:srgbClr val="334155"/>
-                </a:solidFill>
-                <a:latin typeface="Calibri"/>
-              </a:rPr>
-              <a:t>· 未闭合标签破坏 DOM</a:t>
-            </a:r>
-          </a:p>
-          <a:p>
-            <a:pPr>
-              <a:spcBef>
-                <a:spcPts val="400"/>
-              </a:spcBef>
-            </a:pPr>
-            <a:r>
-              <a:rPr sz="1200" b="0">
-                <a:solidFill>
-                  <a:srgbClr val="334155"/>
-                </a:solidFill>
-                <a:latin typeface="Calibri"/>
-              </a:rPr>
-              <a:t>· srcdoc 重设导致脚本重复跑</a:t>
-            </a:r>
-          </a:p>
-          <a:p>
-            <a:pPr>
-              <a:spcBef>
-                <a:spcPts val="400"/>
-              </a:spcBef>
-            </a:pPr>
-            <a:r>
-              <a:rPr sz="1200" b="0">
-                <a:solidFill>
-                  <a:srgbClr val="334155"/>
-                </a:solidFill>
-                <a:latin typeface="Calibri"/>
-              </a:rPr>
-              <a:t>· 需要独立推送通道与状态机</a:t>
-            </a:r>
-          </a:p>
-          <a:p>
-            <a:pPr>
-              <a:spcBef>
-                <a:spcPts val="400"/>
-              </a:spcBef>
-            </a:pPr>
-            <a:r>
-              <a:rPr sz="1200" b="0">
-                <a:solidFill>
-                  <a:srgbClr val="334155"/>
-                </a:solidFill>
-                <a:latin typeface="Calibri"/>
-              </a:rPr>
-              <a:t/>
-            </a:r>
-          </a:p>
-          <a:p>
-            <a:pPr>
-              <a:spcBef>
-                <a:spcPts val="400"/>
-              </a:spcBef>
-            </a:pPr>
-            <a:r>
-              <a:rPr sz="1200" b="0">
-                <a:solidFill>
-                  <a:srgbClr val="334155"/>
-                </a:solidFill>
-                <a:latin typeface="Calibri"/>
-              </a:rPr>
-              <a:t>建议策略</a:t>
-            </a:r>
-          </a:p>
-          <a:p>
-            <a:pPr>
-              <a:spcBef>
-                <a:spcPts val="400"/>
-              </a:spcBef>
-            </a:pPr>
-            <a:r>
-              <a:rPr sz="1200" b="0">
-                <a:solidFill>
-                  <a:srgbClr val="334155"/>
-                </a:solidFill>
-                <a:latin typeface="Calibri"/>
-              </a:rPr>
-              <a:t>· 结构可增量；脚本等 done</a:t>
-            </a:r>
-          </a:p>
-          <a:p>
-            <a:pPr>
-              <a:spcBef>
-                <a:spcPts val="400"/>
-              </a:spcBef>
-            </a:pPr>
-            <a:r>
-              <a:rPr sz="1200" b="0">
-                <a:solidFill>
-                  <a:srgbClr val="334155"/>
-                </a:solidFill>
-                <a:latin typeface="Calibri"/>
-              </a:rPr>
-              <a:t>· 最终仍 upload/write 定稿</a:t>
-            </a:r>
-          </a:p>
-        </p:txBody>
-      </p:sp>
+        </p:nvGraphicFramePr>
+        <p:xfrm>
+          <a:off x="274320" y="1097280"/>
+          <a:ext cx="11612880" cy="5394960"/>
+        </p:xfrm>
+        <a:graphic>
+          <a:graphicData uri="http://schemas.openxmlformats.org/drawingml/2006/table">
+            <a:tbl>
+              <a:tblPr firstRow="1" bandRow="1">
+                <a:tableStyleId>{5C22544A-7EE6-4342-B048-85BDC9FD1C3A}</a:tableStyleId>
+              </a:tblPr>
+              <a:tblGrid>
+                <a:gridCol w="1188720"/>
+                <a:gridCol w="3474720"/>
+                <a:gridCol w="3474720"/>
+                <a:gridCol w="3474720"/>
+              </a:tblGrid>
+              <a:tr h="899160">
+                <a:tc>
+                  <a:txBody>
+                    <a:bodyPr wrap="square"/>
+                    <a:lstStyle/>
+                    <a:p>
+                      <a:pPr algn="ctr"/>
+                      <a:r>
+                        <a:rPr sz="1100" b="1">
+                          <a:solidFill>
+                            <a:srgbClr val="FFFFFF"/>
+                          </a:solidFill>
+                          <a:latin typeface="Calibri"/>
+                        </a:rPr>
+                        <a:t/>
+                      </a:r>
+                    </a:p>
+                  </a:txBody>
+                  <a:tcPr>
+                    <a:solidFill>
+                      <a:srgbClr val="0F172A"/>
+                    </a:solidFill>
+                  </a:tcPr>
+                </a:tc>
+                <a:tc>
+                  <a:txBody>
+                    <a:bodyPr wrap="square"/>
+                    <a:lstStyle/>
+                    <a:p>
+                      <a:pPr algn="ctr"/>
+                      <a:r>
+                        <a:rPr sz="1100" b="1">
+                          <a:solidFill>
+                            <a:srgbClr val="FFFFFF"/>
+                          </a:solidFill>
+                          <a:latin typeface="Calibri"/>
+                        </a:rPr>
+                        <a:t>方案 A
+下载后推送到端渲染</a:t>
+                      </a:r>
+                    </a:p>
+                  </a:txBody>
+                  <a:tcPr>
+                    <a:solidFill>
+                      <a:srgbClr val="0F766E"/>
+                    </a:solidFill>
+                  </a:tcPr>
+                </a:tc>
+                <a:tc>
+                  <a:txBody>
+                    <a:bodyPr wrap="square"/>
+                    <a:lstStyle/>
+                    <a:p>
+                      <a:pPr algn="ctr"/>
+                      <a:r>
+                        <a:rPr sz="1100" b="1">
+                          <a:solidFill>
+                            <a:srgbClr val="FFFFFF"/>
+                          </a:solidFill>
+                          <a:latin typeface="Calibri"/>
+                        </a:rPr>
+                        <a:t>方案 B
+模型输出流式到端实时渲染</a:t>
+                      </a:r>
+                    </a:p>
+                  </a:txBody>
+                  <a:tcPr>
+                    <a:solidFill>
+                      <a:srgbClr val="0F766E"/>
+                    </a:solidFill>
+                  </a:tcPr>
+                </a:tc>
+                <a:tc>
+                  <a:txBody>
+                    <a:bodyPr wrap="square"/>
+                    <a:lstStyle/>
+                    <a:p>
+                      <a:pPr algn="ctr"/>
+                      <a:r>
+                        <a:rPr sz="1100" b="1">
+                          <a:solidFill>
+                            <a:srgbClr val="FFFFFF"/>
+                          </a:solidFill>
+                          <a:latin typeface="Calibri"/>
+                        </a:rPr>
+                        <a:t>方案 C（混合）
+流式粗预览 + 完成后落盘定稿</a:t>
+                      </a:r>
+                    </a:p>
+                  </a:txBody>
+                  <a:tcPr>
+                    <a:solidFill>
+                      <a:srgbClr val="0F766E"/>
+                    </a:solidFill>
+                  </a:tcPr>
+                </a:tc>
+              </a:tr>
+              <a:tr h="899160">
+                <a:tc>
+                  <a:txBody>
+                    <a:bodyPr wrap="square"/>
+                    <a:lstStyle/>
+                    <a:p>
+                      <a:pPr algn="ctr"/>
+                      <a:r>
+                        <a:rPr sz="1100" b="1">
+                          <a:solidFill>
+                            <a:srgbClr val="0F172A"/>
+                          </a:solidFill>
+                          <a:latin typeface="Calibri"/>
+                        </a:rPr>
+                        <a:t>流程</a:t>
+                      </a:r>
+                    </a:p>
+                  </a:txBody>
+                  <a:tcPr>
+                    <a:solidFill>
+                      <a:srgbClr val="F0FDFA"/>
+                    </a:solidFill>
+                  </a:tcPr>
+                </a:tc>
+                <a:tc>
+                  <a:txBody>
+                    <a:bodyPr wrap="square"/>
+                    <a:lstStyle/>
+                    <a:p>
+                      <a:pPr algn="l"/>
+                      <a:r>
+                        <a:rPr sz="1000" b="0">
+                          <a:solidFill>
+                            <a:srgbClr val="334155"/>
+                          </a:solidFill>
+                          <a:latin typeface="Calibri"/>
+                        </a:rPr>
+                        <a:t>write→同步云空间
+→REST 下载全文
+→一次加载预览</a:t>
+                      </a:r>
+                    </a:p>
+                  </a:txBody>
+                  <a:tcPr>
+                    <a:solidFill>
+                      <a:srgbClr val="FFFFFF"/>
+                    </a:solidFill>
+                  </a:tcPr>
+                </a:tc>
+                <a:tc>
+                  <a:txBody>
+                    <a:bodyPr wrap="square"/>
+                    <a:lstStyle/>
+                    <a:p>
+                      <a:pPr algn="l"/>
+                      <a:r>
+                        <a:rPr sz="1000" b="0">
+                          <a:solidFill>
+                            <a:srgbClr val="334155"/>
+                          </a:solidFill>
+                          <a:latin typeface="Calibri"/>
+                        </a:rPr>
+                        <a:t>token/delta 推送
+→端 buffer
+→边收边刷新 iframe</a:t>
+                      </a:r>
+                    </a:p>
+                  </a:txBody>
+                  <a:tcPr>
+                    <a:solidFill>
+                      <a:srgbClr val="FFFFFF"/>
+                    </a:solidFill>
+                  </a:tcPr>
+                </a:tc>
+                <a:tc>
+                  <a:txBody>
+                    <a:bodyPr wrap="square"/>
+                    <a:lstStyle/>
+                    <a:p>
+                      <a:pPr algn="l"/>
+                      <a:r>
+                        <a:rPr sz="1000" b="0">
+                          <a:solidFill>
+                            <a:srgbClr val="334155"/>
+                          </a:solidFill>
+                          <a:latin typeface="Calibri"/>
+                        </a:rPr>
+                        <a:t>流式先出粗画面
+→同时/完成后 write 同步
+→最终以完整版替换</a:t>
+                      </a:r>
+                    </a:p>
+                  </a:txBody>
+                  <a:tcPr>
+                    <a:solidFill>
+                      <a:srgbClr val="FFFFFF"/>
+                    </a:solidFill>
+                  </a:tcPr>
+                </a:tc>
+              </a:tr>
+              <a:tr h="899160">
+                <a:tc>
+                  <a:txBody>
+                    <a:bodyPr wrap="square"/>
+                    <a:lstStyle/>
+                    <a:p>
+                      <a:pPr algn="ctr"/>
+                      <a:r>
+                        <a:rPr sz="1100" b="1">
+                          <a:solidFill>
+                            <a:srgbClr val="0F172A"/>
+                          </a:solidFill>
+                          <a:latin typeface="Calibri"/>
+                        </a:rPr>
+                        <a:t>优势</a:t>
+                      </a:r>
+                    </a:p>
+                  </a:txBody>
+                  <a:tcPr>
+                    <a:solidFill>
+                      <a:srgbClr val="F0FDFA"/>
+                    </a:solidFill>
+                  </a:tcPr>
+                </a:tc>
+                <a:tc>
+                  <a:txBody>
+                    <a:bodyPr wrap="square"/>
+                    <a:lstStyle/>
+                    <a:p>
+                      <a:pPr algn="l"/>
+                      <a:r>
+                        <a:rPr sz="1000" b="0">
+                          <a:solidFill>
+                            <a:srgbClr val="334155"/>
+                          </a:solidFill>
+                          <a:latin typeface="Calibri"/>
+                        </a:rPr>
+                        <a:t>稳、标签完整
+脚本只跑一次
+易刷新/回放/多端
+贴合现有云空间</a:t>
+                      </a:r>
+                    </a:p>
+                  </a:txBody>
+                  <a:tcPr>
+                    <a:solidFill>
+                      <a:srgbClr val="FFFFFF"/>
+                    </a:solidFill>
+                  </a:tcPr>
+                </a:tc>
+                <a:tc>
+                  <a:txBody>
+                    <a:bodyPr wrap="square"/>
+                    <a:lstStyle/>
+                    <a:p>
+                      <a:pPr algn="l"/>
+                      <a:r>
+                        <a:rPr sz="1000" b="0">
+                          <a:solidFill>
+                            <a:srgbClr val="334155"/>
+                          </a:solidFill>
+                          <a:latin typeface="Calibri"/>
+                        </a:rPr>
+                        <a:t>首屏快
+体感像流式 MD
+等待焦虑低</a:t>
+                      </a:r>
+                    </a:p>
+                  </a:txBody>
+                  <a:tcPr>
+                    <a:solidFill>
+                      <a:srgbClr val="FFFFFF"/>
+                    </a:solidFill>
+                  </a:tcPr>
+                </a:tc>
+                <a:tc>
+                  <a:txBody>
+                    <a:bodyPr wrap="square"/>
+                    <a:lstStyle/>
+                    <a:p>
+                      <a:pPr algn="l"/>
+                      <a:r>
+                        <a:rPr sz="1000" b="0">
+                          <a:solidFill>
+                            <a:srgbClr val="334155"/>
+                          </a:solidFill>
+                          <a:latin typeface="Calibri"/>
+                        </a:rPr>
+                        <a:t>体验接近 B
+正确性兜底靠 A
+适合报告类长 HTML</a:t>
+                      </a:r>
+                    </a:p>
+                  </a:txBody>
+                  <a:tcPr>
+                    <a:solidFill>
+                      <a:srgbClr val="FFFFFF"/>
+                    </a:solidFill>
+                  </a:tcPr>
+                </a:tc>
+              </a:tr>
+              <a:tr h="899160">
+                <a:tc>
+                  <a:txBody>
+                    <a:bodyPr wrap="square"/>
+                    <a:lstStyle/>
+                    <a:p>
+                      <a:pPr algn="ctr"/>
+                      <a:r>
+                        <a:rPr sz="1100" b="1">
+                          <a:solidFill>
+                            <a:srgbClr val="0F172A"/>
+                          </a:solidFill>
+                          <a:latin typeface="Calibri"/>
+                        </a:rPr>
+                        <a:t>劣势</a:t>
+                      </a:r>
+                    </a:p>
+                  </a:txBody>
+                  <a:tcPr>
+                    <a:solidFill>
+                      <a:srgbClr val="F0FDFA"/>
+                    </a:solidFill>
+                  </a:tcPr>
+                </a:tc>
+                <a:tc>
+                  <a:txBody>
+                    <a:bodyPr wrap="square"/>
+                    <a:lstStyle/>
+                    <a:p>
+                      <a:pPr algn="l"/>
+                      <a:r>
+                        <a:rPr sz="1000" b="0">
+                          <a:solidFill>
+                            <a:srgbClr val="334155"/>
+                          </a:solidFill>
+                          <a:latin typeface="Calibri"/>
+                        </a:rPr>
+                        <a:t>需等生成+同步
+才出首屏</a:t>
+                      </a:r>
+                    </a:p>
+                  </a:txBody>
+                  <a:tcPr>
+                    <a:solidFill>
+                      <a:srgbClr val="FFFFFF"/>
+                    </a:solidFill>
+                  </a:tcPr>
+                </a:tc>
+                <a:tc>
+                  <a:txBody>
+                    <a:bodyPr wrap="square"/>
+                    <a:lstStyle/>
+                    <a:p>
+                      <a:pPr algn="l"/>
+                      <a:r>
+                        <a:rPr sz="1000" b="0">
+                          <a:solidFill>
+                            <a:srgbClr val="334155"/>
+                          </a:solidFill>
+                          <a:latin typeface="Calibri"/>
+                        </a:rPr>
+                        <a:t>未闭合标签易花屏
+脚本易重复执行
+要单独推送通道</a:t>
+                      </a:r>
+                    </a:p>
+                  </a:txBody>
+                  <a:tcPr>
+                    <a:solidFill>
+                      <a:srgbClr val="FFFFFF"/>
+                    </a:solidFill>
+                  </a:tcPr>
+                </a:tc>
+                <a:tc>
+                  <a:txBody>
+                    <a:bodyPr wrap="square"/>
+                    <a:lstStyle/>
+                    <a:p>
+                      <a:pPr algn="l"/>
+                      <a:r>
+                        <a:rPr sz="1000" b="0">
+                          <a:solidFill>
+                            <a:srgbClr val="334155"/>
+                          </a:solidFill>
+                          <a:latin typeface="Calibri"/>
+                        </a:rPr>
+                        <a:t>实现与状态机更复杂
+需明确「粗预览/定稿」切换</a:t>
+                      </a:r>
+                    </a:p>
+                  </a:txBody>
+                  <a:tcPr>
+                    <a:solidFill>
+                      <a:srgbClr val="FFFFFF"/>
+                    </a:solidFill>
+                  </a:tcPr>
+                </a:tc>
+              </a:tr>
+              <a:tr h="899160">
+                <a:tc>
+                  <a:txBody>
+                    <a:bodyPr wrap="square"/>
+                    <a:lstStyle/>
+                    <a:p>
+                      <a:pPr algn="ctr"/>
+                      <a:r>
+                        <a:rPr sz="1100" b="1">
+                          <a:solidFill>
+                            <a:srgbClr val="0F172A"/>
+                          </a:solidFill>
+                          <a:latin typeface="Calibri"/>
+                        </a:rPr>
+                        <a:t>依赖</a:t>
+                      </a:r>
+                    </a:p>
+                  </a:txBody>
+                  <a:tcPr>
+                    <a:solidFill>
+                      <a:srgbClr val="F0FDFA"/>
+                    </a:solidFill>
+                  </a:tcPr>
+                </a:tc>
+                <a:tc>
+                  <a:txBody>
+                    <a:bodyPr wrap="square"/>
+                    <a:lstStyle/>
+                    <a:p>
+                      <a:pPr algn="l"/>
+                      <a:r>
+                        <a:rPr sz="1000" b="0">
+                          <a:solidFill>
+                            <a:srgbClr val="334155"/>
+                          </a:solidFill>
+                          <a:latin typeface="Calibri"/>
+                        </a:rPr>
+                        <a:t>write+云空间
++端预览容器</a:t>
+                      </a:r>
+                    </a:p>
+                  </a:txBody>
+                  <a:tcPr>
+                    <a:solidFill>
+                      <a:srgbClr val="FFFFFF"/>
+                    </a:solidFill>
+                  </a:tcPr>
+                </a:tc>
+                <a:tc>
+                  <a:txBody>
+                    <a:bodyPr wrap="square"/>
+                    <a:lstStyle/>
+                    <a:p>
+                      <a:pPr algn="l"/>
+                      <a:r>
+                        <a:rPr sz="1000" b="0">
+                          <a:solidFill>
+                            <a:srgbClr val="334155"/>
+                          </a:solidFill>
+                          <a:latin typeface="Calibri"/>
+                        </a:rPr>
+                        <a:t>流式协议
++端节流策略</a:t>
+                      </a:r>
+                    </a:p>
+                  </a:txBody>
+                  <a:tcPr>
+                    <a:solidFill>
+                      <a:srgbClr val="FFFFFF"/>
+                    </a:solidFill>
+                  </a:tcPr>
+                </a:tc>
+                <a:tc>
+                  <a:txBody>
+                    <a:bodyPr wrap="square"/>
+                    <a:lstStyle/>
+                    <a:p>
+                      <a:pPr algn="l"/>
+                      <a:r>
+                        <a:rPr sz="1000" b="0">
+                          <a:solidFill>
+                            <a:srgbClr val="334155"/>
+                          </a:solidFill>
+                          <a:latin typeface="Calibri"/>
+                        </a:rPr>
+                        <a:t>A+B 能力叠加</a:t>
+                      </a:r>
+                    </a:p>
+                  </a:txBody>
+                  <a:tcPr>
+                    <a:solidFill>
+                      <a:srgbClr val="FFFFFF"/>
+                    </a:solidFill>
+                  </a:tcPr>
+                </a:tc>
+              </a:tr>
+              <a:tr h="899160">
+                <a:tc>
+                  <a:txBody>
+                    <a:bodyPr wrap="square"/>
+                    <a:lstStyle/>
+                    <a:p>
+                      <a:pPr algn="ctr"/>
+                      <a:r>
+                        <a:rPr sz="1100" b="1">
+                          <a:solidFill>
+                            <a:srgbClr val="0F172A"/>
+                          </a:solidFill>
+                          <a:latin typeface="Calibri"/>
+                        </a:rPr>
+                        <a:t>建议</a:t>
+                      </a:r>
+                    </a:p>
+                  </a:txBody>
+                  <a:tcPr>
+                    <a:solidFill>
+                      <a:srgbClr val="F0FDFA"/>
+                    </a:solidFill>
+                  </a:tcPr>
+                </a:tc>
+                <a:tc>
+                  <a:txBody>
+                    <a:bodyPr wrap="square"/>
+                    <a:lstStyle/>
+                    <a:p>
+                      <a:pPr algn="ctr"/>
+                      <a:r>
+                        <a:rPr sz="1100" b="1">
+                          <a:solidFill>
+                            <a:srgbClr val="047857"/>
+                          </a:solidFill>
+                          <a:latin typeface="Calibri"/>
+                        </a:rPr>
+                        <a:t>一期默认 ★</a:t>
+                      </a:r>
+                    </a:p>
+                  </a:txBody>
+                  <a:tcPr>
+                    <a:solidFill>
+                      <a:srgbClr val="FFFBEB"/>
+                    </a:solidFill>
+                  </a:tcPr>
+                </a:tc>
+                <a:tc>
+                  <a:txBody>
+                    <a:bodyPr wrap="square"/>
+                    <a:lstStyle/>
+                    <a:p>
+                      <a:pPr algn="ctr"/>
+                      <a:r>
+                        <a:rPr sz="1100" b="1">
+                          <a:solidFill>
+                            <a:srgbClr val="334155"/>
+                          </a:solidFill>
+                          <a:latin typeface="Calibri"/>
+                        </a:rPr>
+                        <a:t>二期体验增强</a:t>
+                      </a:r>
+                    </a:p>
+                  </a:txBody>
+                  <a:tcPr>
+                    <a:solidFill>
+                      <a:srgbClr val="FFFFFF"/>
+                    </a:solidFill>
+                  </a:tcPr>
+                </a:tc>
+                <a:tc>
+                  <a:txBody>
+                    <a:bodyPr wrap="square"/>
+                    <a:lstStyle/>
+                    <a:p>
+                      <a:pPr algn="ctr"/>
+                      <a:r>
+                        <a:rPr sz="1100" b="1">
+                          <a:solidFill>
+                            <a:srgbClr val="047857"/>
+                          </a:solidFill>
+                          <a:latin typeface="Calibri"/>
+                        </a:rPr>
+                        <a:t>报告场景推荐演进 ★</a:t>
+                      </a:r>
+                    </a:p>
+                  </a:txBody>
+                  <a:tcPr>
+                    <a:solidFill>
+                      <a:srgbClr val="FFFBEB"/>
+                    </a:solidFill>
+                  </a:tcPr>
+                </a:tc>
+              </a:tr>
+            </a:tbl>
+          </a:graphicData>
+        </a:graphic>
+      </p:graphicFrame>
     </p:spTree>
   </p:cSld>
   <p:clrMapOvr>
@@ -7660,7 +8494,7 @@
         <p:spPr>
           <a:xfrm>
             <a:off x="0" y="0"/>
-            <a:ext cx="12191695" cy="960120"/>
+            <a:ext cx="12191695" cy="914400"/>
           </a:xfrm>
           <a:prstGeom prst="rect">
             <a:avLst/>
@@ -7702,8 +8536,8 @@
         </p:nvSpPr>
         <p:spPr>
           <a:xfrm>
-            <a:off x="0" y="960120"/>
-            <a:ext cx="12191695" cy="54864"/>
+            <a:off x="0" y="914400"/>
+            <a:ext cx="12191695" cy="45720"/>
           </a:xfrm>
           <a:prstGeom prst="rect">
             <a:avLst/>
@@ -7745,8 +8579,8 @@
         </p:nvSpPr>
         <p:spPr>
           <a:xfrm>
-            <a:off x="502920" y="201168"/>
-            <a:ext cx="11155680" cy="640080"/>
+            <a:off x="457200" y="201168"/>
+            <a:ext cx="11247120" cy="640080"/>
           </a:xfrm>
           <a:prstGeom prst="rect">
             <a:avLst/>
@@ -7760,24 +8594,24 @@
           <a:lstStyle/>
           <a:p>
             <a:r>
-              <a:rPr sz="2400" b="1">
+              <a:rPr sz="2200" b="1">
                 <a:solidFill>
                   <a:srgbClr val="FFFFFF"/>
                 </a:solidFill>
                 <a:latin typeface="Calibri"/>
               </a:rPr>
-              <a:t>06  关键概念与安全默认</a:t>
-            </a:r>
-          </a:p>
-          <a:p>
-            <a:r>
-              <a:rPr sz="1200" b="0">
+              <a:t>06  实现示例</a:t>
+            </a:r>
+          </a:p>
+          <a:p>
+            <a:r>
+              <a:rPr sz="1100" b="0">
                 <a:solidFill>
                   <a:srgbClr val="94A3B8"/>
                 </a:solidFill>
                 <a:latin typeface="Calibri"/>
               </a:rPr>
-              <a:t>MIME 决定「当什么打开」；iframe/WebView 决定「在哪画」；sandbox 决定「能闯多大祸」</a:t>
+              <a:t>契约 + 健康报告最小闭环（以方案 A 为主，C 为增强）</a:t>
             </a:r>
           </a:p>
         </p:txBody>
@@ -7790,12 +8624,12 @@
         </p:nvSpPr>
         <p:spPr>
           <a:xfrm>
-            <a:off x="411480" y="1234440"/>
-            <a:ext cx="3703320" cy="5029200"/>
+            <a:off x="365760" y="1097280"/>
+            <a:ext cx="5669280" cy="2286000"/>
           </a:xfrm>
           <a:prstGeom prst="roundRect">
             <a:avLst>
-              <a:gd name="adj" fmla="val 8000"/>
+              <a:gd name="adj" fmla="val 6000"/>
             </a:avLst>
           </a:prstGeom>
           <a:solidFill>
@@ -7837,8 +8671,8 @@
         </p:nvSpPr>
         <p:spPr>
           <a:xfrm>
-            <a:off x="576072" y="1344168"/>
-            <a:ext cx="3429000" cy="4846320"/>
+            <a:off x="512064" y="1207008"/>
+            <a:ext cx="5413248" cy="2103120"/>
           </a:xfrm>
           <a:prstGeom prst="rect">
             <a:avLst/>
@@ -7852,189 +8686,93 @@
           <a:lstStyle/>
           <a:p>
             <a:r>
-              <a:rPr sz="1400" b="1">
+              <a:rPr sz="1300" b="1">
                 <a:solidFill>
                   <a:srgbClr val="0D9488"/>
                 </a:solidFill>
                 <a:latin typeface="Calibri"/>
               </a:rPr>
-              <a:t>MIME（Content-Type）</a:t>
+              <a:t>1）工具返回约定（write/同步后）</a:t>
             </a:r>
           </a:p>
           <a:p>
             <a:pPr>
               <a:spcBef>
-                <a:spcPts val="400"/>
+                <a:spcPts val="300"/>
               </a:spcBef>
             </a:pPr>
             <a:r>
-              <a:rPr sz="1200" b="0">
+              <a:rPr sz="1100" b="0">
                 <a:solidFill>
                   <a:srgbClr val="334155"/>
                 </a:solidFill>
                 <a:latin typeface="Calibri"/>
               </a:rPr>
-              <a:t>给字节贴类型标签</a:t>
+              <a:t>path / cloud_file_id / mime=text/html</a:t>
             </a:r>
           </a:p>
           <a:p>
             <a:pPr>
               <a:spcBef>
-                <a:spcPts val="400"/>
+                <a:spcPts val="300"/>
               </a:spcBef>
             </a:pPr>
             <a:r>
-              <a:rPr sz="1200" b="0">
+              <a:rPr sz="1100" b="0">
                 <a:solidFill>
                   <a:srgbClr val="334155"/>
                 </a:solidFill>
                 <a:latin typeface="Calibri"/>
               </a:rPr>
-              <a:t/>
+              <a:t>sync_status=synced|syncing</a:t>
             </a:r>
           </a:p>
           <a:p>
             <a:pPr>
               <a:spcBef>
-                <a:spcPts val="400"/>
+                <a:spcPts val="300"/>
               </a:spcBef>
             </a:pPr>
             <a:r>
-              <a:rPr sz="1200" b="0">
+              <a:rPr sz="1100" b="0">
                 <a:solidFill>
                   <a:srgbClr val="334155"/>
                 </a:solidFill>
                 <a:latin typeface="Calibri"/>
               </a:rPr>
-              <a:t>text/html → 当网页渲染</a:t>
+              <a:t>preview: { kind: "html", entry: true }</a:t>
             </a:r>
           </a:p>
           <a:p>
             <a:pPr>
               <a:spcBef>
-                <a:spcPts val="400"/>
+                <a:spcPts val="300"/>
               </a:spcBef>
             </a:pPr>
             <a:r>
-              <a:rPr sz="1200" b="0">
+              <a:rPr sz="1100" b="0">
                 <a:solidFill>
                   <a:srgbClr val="334155"/>
                 </a:solidFill>
                 <a:latin typeface="Calibri"/>
               </a:rPr>
-              <a:t>text/plain → 当纯文本</a:t>
+              <a:t/>
             </a:r>
           </a:p>
           <a:p>
             <a:pPr>
               <a:spcBef>
-                <a:spcPts val="400"/>
+                <a:spcPts val="300"/>
               </a:spcBef>
             </a:pPr>
             <a:r>
-              <a:rPr sz="1200" b="0">
+              <a:rPr sz="1100" b="0">
                 <a:solidFill>
                   <a:srgbClr val="334155"/>
                 </a:solidFill>
                 <a:latin typeface="Calibri"/>
               </a:rPr>
-              <a:t>octet-stream → 常当附件下载</a:t>
-            </a:r>
-          </a:p>
-          <a:p>
-            <a:pPr>
-              <a:spcBef>
-                <a:spcPts val="400"/>
-              </a:spcBef>
-            </a:pPr>
-            <a:r>
-              <a:rPr sz="1200" b="0">
-                <a:solidFill>
-                  <a:srgbClr val="334155"/>
-                </a:solidFill>
-                <a:latin typeface="Calibri"/>
-              </a:rPr>
-              <a:t/>
-            </a:r>
-          </a:p>
-          <a:p>
-            <a:pPr>
-              <a:spcBef>
-                <a:spcPts val="400"/>
-              </a:spcBef>
-            </a:pPr>
-            <a:r>
-              <a:rPr sz="1200" b="0">
-                <a:solidFill>
-                  <a:srgbClr val="334155"/>
-                </a:solidFill>
-                <a:latin typeface="Calibri"/>
-              </a:rPr>
-              <a:t>实践</a:t>
-            </a:r>
-          </a:p>
-          <a:p>
-            <a:pPr>
-              <a:spcBef>
-                <a:spcPts val="400"/>
-              </a:spcBef>
-            </a:pPr>
-            <a:r>
-              <a:rPr sz="1200" b="0">
-                <a:solidFill>
-                  <a:srgbClr val="334155"/>
-                </a:solidFill>
-                <a:latin typeface="Calibri"/>
-              </a:rPr>
-              <a:t>· write/同步带 mime=text/html</a:t>
-            </a:r>
-          </a:p>
-          <a:p>
-            <a:pPr>
-              <a:spcBef>
-                <a:spcPts val="400"/>
-              </a:spcBef>
-            </a:pPr>
-            <a:r>
-              <a:rPr sz="1200" b="0">
-                <a:solidFill>
-                  <a:srgbClr val="334155"/>
-                </a:solidFill>
-                <a:latin typeface="Calibri"/>
-              </a:rPr>
-              <a:t>· REST 尽量返回正确类型</a:t>
-            </a:r>
-          </a:p>
-          <a:p>
-            <a:pPr>
-              <a:spcBef>
-                <a:spcPts val="400"/>
-              </a:spcBef>
-            </a:pPr>
-            <a:r>
-              <a:rPr sz="1200" b="0">
-                <a:solidFill>
-                  <a:srgbClr val="334155"/>
-                </a:solidFill>
-                <a:latin typeface="Calibri"/>
-              </a:rPr>
-              <a:t>· 若云侧一律 octet-stream：</a:t>
-            </a:r>
-          </a:p>
-          <a:p>
-            <a:pPr>
-              <a:spcBef>
-                <a:spcPts val="400"/>
-              </a:spcBef>
-            </a:pPr>
-            <a:r>
-              <a:rPr sz="1200" b="0">
-                <a:solidFill>
-                  <a:srgbClr val="334155"/>
-                </a:solidFill>
-                <a:latin typeface="Calibri"/>
-              </a:rPr>
-              <a:t>  端按 .html 自行当 HTML 处理</a:t>
+              <a:t>端据此展示「预览卡片」而非纯附件行</a:t>
             </a:r>
           </a:p>
         </p:txBody>
@@ -8047,12 +8785,124 @@
         </p:nvSpPr>
         <p:spPr>
           <a:xfrm>
-            <a:off x="4251960" y="1234440"/>
-            <a:ext cx="3703320" cy="5029200"/>
+            <a:off x="6217920" y="1097280"/>
+            <a:ext cx="5577840" cy="2286000"/>
           </a:xfrm>
           <a:prstGeom prst="roundRect">
             <a:avLst>
-              <a:gd name="adj" fmla="val 8000"/>
+              <a:gd name="adj" fmla="val 4000"/>
+            </a:avLst>
+          </a:prstGeom>
+          <a:solidFill>
+            <a:srgbClr val="0F172A"/>
+          </a:solidFill>
+          <a:ln>
+            <a:noFill/>
+          </a:ln>
+        </p:spPr>
+        <p:style>
+          <a:lnRef idx="1">
+            <a:schemeClr val="accent1"/>
+          </a:lnRef>
+          <a:fillRef idx="3">
+            <a:schemeClr val="accent1"/>
+          </a:fillRef>
+          <a:effectRef idx="2">
+            <a:schemeClr val="accent1"/>
+          </a:effectRef>
+          <a:fontRef idx="minor">
+            <a:schemeClr val="lt1"/>
+          </a:fontRef>
+        </p:style>
+        <p:txBody>
+          <a:bodyPr rtlCol="0" anchor="ctr"/>
+          <a:lstStyle/>
+          <a:p>
+            <a:pPr algn="ctr"/>
+          </a:p>
+        </p:txBody>
+      </p:sp>
+      <p:sp>
+        <p:nvSpPr>
+          <p:cNvPr id="9" name="TextBox 8"/>
+          <p:cNvSpPr txBox="1"/>
+          <p:nvPr/>
+        </p:nvSpPr>
+        <p:spPr>
+          <a:xfrm>
+            <a:off x="6355080" y="1188720"/>
+            <a:ext cx="5303520" cy="2103120"/>
+          </a:xfrm>
+          <a:prstGeom prst="rect">
+            <a:avLst/>
+          </a:prstGeom>
+          <a:noFill/>
+        </p:spPr>
+        <p:txBody>
+          <a:bodyPr wrap="square">
+            <a:spAutoFit/>
+          </a:bodyPr>
+          <a:lstStyle/>
+          <a:p>
+            <a:r>
+              <a:rPr sz="1100" b="0">
+                <a:solidFill>
+                  <a:srgbClr val="E2E8F0"/>
+                </a:solidFill>
+                <a:latin typeface="Consolas"/>
+              </a:rPr>
+              <a:t>// 方案 A：下载后一次渲染</a:t>
+            </a:r>
+          </a:p>
+          <a:p>
+            <a:r>
+              <a:rPr sz="1100" b="0">
+                <a:solidFill>
+                  <a:srgbClr val="E2E8F0"/>
+                </a:solidFill>
+                <a:latin typeface="Consolas"/>
+              </a:rPr>
+              <a:t>const html = await downloadText(fileId);</a:t>
+            </a:r>
+          </a:p>
+          <a:p>
+            <a:r>
+              <a:rPr sz="1100" b="0">
+                <a:solidFill>
+                  <a:srgbClr val="E2E8F0"/>
+                </a:solidFill>
+                <a:latin typeface="Consolas"/>
+              </a:rPr>
+              <a:t>iframe.sandbox = 'allow-scripts';</a:t>
+            </a:r>
+          </a:p>
+          <a:p>
+            <a:r>
+              <a:rPr sz="1100" b="0">
+                <a:solidFill>
+                  <a:srgbClr val="E2E8F0"/>
+                </a:solidFill>
+                <a:latin typeface="Consolas"/>
+              </a:rPr>
+              <a:t>iframe.srcdoc = html;  // 默不加 same-origin</a:t>
+            </a:r>
+          </a:p>
+        </p:txBody>
+      </p:sp>
+      <p:sp>
+        <p:nvSpPr>
+          <p:cNvPr id="10" name="Rounded Rectangle 9"/>
+          <p:cNvSpPr/>
+          <p:nvPr/>
+        </p:nvSpPr>
+        <p:spPr>
+          <a:xfrm>
+            <a:off x="365760" y="3566160"/>
+            <a:ext cx="5669280" cy="2926080"/>
+          </a:xfrm>
+          <a:prstGeom prst="roundRect">
+            <a:avLst>
+              <a:gd name="adj" fmla="val 6000"/>
             </a:avLst>
           </a:prstGeom>
           <a:solidFill>
@@ -8088,14 +8938,14 @@
       </p:sp>
       <p:sp>
         <p:nvSpPr>
-          <p:cNvPr id="9" name="TextBox 8"/>
+          <p:cNvPr id="11" name="TextBox 10"/>
           <p:cNvSpPr txBox="1"/>
           <p:nvPr/>
         </p:nvSpPr>
         <p:spPr>
           <a:xfrm>
-            <a:off x="4416552" y="1344168"/>
-            <a:ext cx="3429000" cy="4846320"/>
+            <a:off x="512064" y="3675888"/>
+            <a:ext cx="5413248" cy="2743200"/>
           </a:xfrm>
           <a:prstGeom prst="rect">
             <a:avLst/>
@@ -8109,248 +8959,134 @@
           <a:lstStyle/>
           <a:p>
             <a:r>
-              <a:rPr sz="1400" b="1">
+              <a:rPr sz="1300" b="1">
                 <a:solidFill>
                   <a:srgbClr val="0D9488"/>
                 </a:solidFill>
                 <a:latin typeface="Calibri"/>
               </a:rPr>
-              <a:t>iframe / WebView</a:t>
+              <a:t>2）健康报告场景串接</a:t>
             </a:r>
           </a:p>
           <a:p>
             <a:pPr>
               <a:spcBef>
-                <a:spcPts val="400"/>
+                <a:spcPts val="300"/>
               </a:spcBef>
             </a:pPr>
             <a:r>
-              <a:rPr sz="1200" b="0">
+              <a:rPr sz="1100" b="0">
                 <a:solidFill>
                   <a:srgbClr val="334155"/>
                 </a:solidFill>
                 <a:latin typeface="Calibri"/>
               </a:rPr>
-              <a:t>同一类能力，不同载体</a:t>
+              <a:t>① Skill 获取运动健康数据</a:t>
             </a:r>
           </a:p>
           <a:p>
             <a:pPr>
               <a:spcBef>
-                <a:spcPts val="400"/>
+                <a:spcPts val="300"/>
               </a:spcBef>
             </a:pPr>
             <a:r>
-              <a:rPr sz="1200" b="0">
+              <a:rPr sz="1100" b="0">
                 <a:solidFill>
                   <a:srgbClr val="334155"/>
                 </a:solidFill>
                 <a:latin typeface="Calibri"/>
               </a:rPr>
-              <a:t/>
+              <a:t>② 模型生成含图表的单文件 HTML</a:t>
             </a:r>
           </a:p>
           <a:p>
             <a:pPr>
               <a:spcBef>
-                <a:spcPts val="400"/>
+                <a:spcPts val="300"/>
               </a:spcBef>
             </a:pPr>
             <a:r>
-              <a:rPr sz="1200" b="0">
+              <a:rPr sz="1100" b="0">
                 <a:solidFill>
                   <a:srgbClr val="334155"/>
                 </a:solidFill>
                 <a:latin typeface="Calibri"/>
               </a:rPr>
-              <a:t>Web 控制台 → iframe</a:t>
+              <a:t>   （CSS/JS 尽量内联，降低多文件依赖）</a:t>
             </a:r>
           </a:p>
           <a:p>
             <a:pPr>
               <a:spcBef>
-                <a:spcPts val="400"/>
+                <a:spcPts val="300"/>
               </a:spcBef>
             </a:pPr>
             <a:r>
-              <a:rPr sz="1200" b="0">
+              <a:rPr sz="1100" b="0">
                 <a:solidFill>
                   <a:srgbClr val="334155"/>
                 </a:solidFill>
                 <a:latin typeface="Calibri"/>
               </a:rPr>
-              <a:t>（页中嵌小网页）</a:t>
+              <a:t>③ write → 云空间同步就绪</a:t>
             </a:r>
           </a:p>
           <a:p>
             <a:pPr>
               <a:spcBef>
-                <a:spcPts val="400"/>
+                <a:spcPts val="300"/>
               </a:spcBef>
             </a:pPr>
             <a:r>
-              <a:rPr sz="1200" b="0">
+              <a:rPr sz="1100" b="0">
                 <a:solidFill>
                   <a:srgbClr val="334155"/>
                 </a:solidFill>
                 <a:latin typeface="Calibri"/>
               </a:rPr>
-              <a:t/>
+              <a:t>④ 端 REST 下载 → sandbox 预览</a:t>
             </a:r>
           </a:p>
           <a:p>
             <a:pPr>
               <a:spcBef>
-                <a:spcPts val="400"/>
+                <a:spcPts val="300"/>
               </a:spcBef>
             </a:pPr>
             <a:r>
-              <a:rPr sz="1200" b="0">
+              <a:rPr sz="1100" b="0">
                 <a:solidFill>
                   <a:srgbClr val="334155"/>
                 </a:solidFill>
                 <a:latin typeface="Calibri"/>
               </a:rPr>
-              <a:t>原生 App → WebView</a:t>
-            </a:r>
-          </a:p>
-          <a:p>
-            <a:pPr>
-              <a:spcBef>
-                <a:spcPts val="400"/>
-              </a:spcBef>
-            </a:pPr>
-            <a:r>
-              <a:rPr sz="1200" b="0">
-                <a:solidFill>
-                  <a:srgbClr val="334155"/>
-                </a:solidFill>
-                <a:latin typeface="Calibri"/>
-              </a:rPr>
-              <a:t>（App 内迷你浏览器）</a:t>
-            </a:r>
-          </a:p>
-          <a:p>
-            <a:pPr>
-              <a:spcBef>
-                <a:spcPts val="400"/>
-              </a:spcBef>
-            </a:pPr>
-            <a:r>
-              <a:rPr sz="1200" b="0">
-                <a:solidFill>
-                  <a:srgbClr val="334155"/>
-                </a:solidFill>
-                <a:latin typeface="Calibri"/>
-              </a:rPr>
-              <a:t/>
-            </a:r>
-          </a:p>
-          <a:p>
-            <a:pPr>
-              <a:spcBef>
-                <a:spcPts val="400"/>
-              </a:spcBef>
-            </a:pPr>
-            <a:r>
-              <a:rPr sz="1200" b="0">
-                <a:solidFill>
-                  <a:srgbClr val="334155"/>
-                </a:solidFill>
-                <a:latin typeface="Calibri"/>
-              </a:rPr>
-              <a:t>喂法</a:t>
-            </a:r>
-          </a:p>
-          <a:p>
-            <a:pPr>
-              <a:spcBef>
-                <a:spcPts val="400"/>
-              </a:spcBef>
-            </a:pPr>
-            <a:r>
-              <a:rPr sz="1200" b="0">
-                <a:solidFill>
-                  <a:srgbClr val="334155"/>
-                </a:solidFill>
-                <a:latin typeface="Calibri"/>
-              </a:rPr>
-              <a:t>· srcdoc / loadData（下载文本）</a:t>
-            </a:r>
-          </a:p>
-          <a:p>
-            <a:pPr>
-              <a:spcBef>
-                <a:spcPts val="400"/>
-              </a:spcBef>
-            </a:pPr>
-            <a:r>
-              <a:rPr sz="1200" b="0">
-                <a:solidFill>
-                  <a:srgbClr val="334155"/>
-                </a:solidFill>
-                <a:latin typeface="Calibri"/>
-              </a:rPr>
-              <a:t>· src / loadUrl（可打开的 URL）</a:t>
-            </a:r>
-          </a:p>
-          <a:p>
-            <a:pPr>
-              <a:spcBef>
-                <a:spcPts val="400"/>
-              </a:spcBef>
-            </a:pPr>
-            <a:r>
-              <a:rPr sz="1200" b="0">
-                <a:solidFill>
-                  <a:srgbClr val="334155"/>
-                </a:solidFill>
-                <a:latin typeface="Calibri"/>
-              </a:rPr>
-              <a:t/>
-            </a:r>
-          </a:p>
-          <a:p>
-            <a:pPr>
-              <a:spcBef>
-                <a:spcPts val="400"/>
-              </a:spcBef>
-            </a:pPr>
-            <a:r>
-              <a:rPr sz="1200" b="0">
-                <a:solidFill>
-                  <a:srgbClr val="334155"/>
-                </a:solidFill>
-                <a:latin typeface="Calibri"/>
-              </a:rPr>
-              <a:t>没有它们：只能下载或看源码</a:t>
-            </a:r>
-          </a:p>
-        </p:txBody>
-      </p:sp>
-      <p:sp>
-        <p:nvSpPr>
-          <p:cNvPr id="10" name="Rounded Rectangle 9"/>
+              <a:t>⑤ 用户在会话内查看/交互报告</a:t>
+            </a:r>
+          </a:p>
+        </p:txBody>
+      </p:sp>
+      <p:sp>
+        <p:nvSpPr>
+          <p:cNvPr id="12" name="Rounded Rectangle 11"/>
           <p:cNvSpPr/>
           <p:nvPr/>
         </p:nvSpPr>
         <p:spPr>
           <a:xfrm>
-            <a:off x="8092440" y="1234440"/>
-            <a:ext cx="3657600" cy="5029200"/>
+            <a:off x="6217920" y="3566160"/>
+            <a:ext cx="5577840" cy="2926080"/>
           </a:xfrm>
           <a:prstGeom prst="roundRect">
             <a:avLst>
-              <a:gd name="adj" fmla="val 8000"/>
+              <a:gd name="adj" fmla="val 4000"/>
             </a:avLst>
           </a:prstGeom>
           <a:solidFill>
-            <a:srgbClr val="FFFFFF"/>
+            <a:srgbClr val="0F172A"/>
           </a:solidFill>
           <a:ln>
-            <a:solidFill>
-              <a:srgbClr val="E2E8F0"/>
-            </a:solidFill>
+            <a:noFill/>
           </a:ln>
         </p:spPr>
         <p:style>
@@ -8377,14 +9113,14 @@
       </p:sp>
       <p:sp>
         <p:nvSpPr>
-          <p:cNvPr id="11" name="TextBox 10"/>
+          <p:cNvPr id="13" name="TextBox 12"/>
           <p:cNvSpPr txBox="1"/>
           <p:nvPr/>
         </p:nvSpPr>
         <p:spPr>
           <a:xfrm>
-            <a:off x="8257032" y="1344168"/>
-            <a:ext cx="3383280" cy="4846320"/>
+            <a:off x="6355080" y="3657600"/>
+            <a:ext cx="5303520" cy="2743200"/>
           </a:xfrm>
           <a:prstGeom prst="rect">
             <a:avLst/>
@@ -8398,189 +9134,68 @@
           <a:lstStyle/>
           <a:p>
             <a:r>
-              <a:rPr sz="1400" b="1">
-                <a:solidFill>
-                  <a:srgbClr val="0D9488"/>
-                </a:solidFill>
-                <a:latin typeface="Calibri"/>
-              </a:rPr>
-              <a:t>安全默认</a:t>
-            </a:r>
-          </a:p>
-          <a:p>
-            <a:pPr>
-              <a:spcBef>
-                <a:spcPts val="400"/>
-              </a:spcBef>
-            </a:pPr>
-            <a:r>
-              <a:rPr sz="1200" b="0">
-                <a:solidFill>
-                  <a:srgbClr val="334155"/>
-                </a:solidFill>
-                <a:latin typeface="Calibri"/>
-              </a:rPr>
-              <a:t>HTML 来自模型 = 不可信</a:t>
-            </a:r>
-          </a:p>
-          <a:p>
-            <a:pPr>
-              <a:spcBef>
-                <a:spcPts val="400"/>
-              </a:spcBef>
-            </a:pPr>
-            <a:r>
-              <a:rPr sz="1200" b="0">
-                <a:solidFill>
-                  <a:srgbClr val="334155"/>
-                </a:solidFill>
-                <a:latin typeface="Calibri"/>
-              </a:rPr>
-              <a:t/>
-            </a:r>
-          </a:p>
-          <a:p>
-            <a:pPr>
-              <a:spcBef>
-                <a:spcPts val="400"/>
-              </a:spcBef>
-            </a:pPr>
-            <a:r>
-              <a:rPr sz="1200" b="0">
-                <a:solidFill>
-                  <a:srgbClr val="334155"/>
-                </a:solidFill>
-                <a:latin typeface="Calibri"/>
-              </a:rPr>
-              <a:t>sandbox=allow-scripts</a:t>
-            </a:r>
-          </a:p>
-          <a:p>
-            <a:pPr>
-              <a:spcBef>
-                <a:spcPts val="400"/>
-              </a:spcBef>
-            </a:pPr>
-            <a:r>
-              <a:rPr sz="1200" b="0">
-                <a:solidFill>
-                  <a:srgbClr val="334155"/>
-                </a:solidFill>
-                <a:latin typeface="Calibri"/>
-              </a:rPr>
-              <a:t>默认不加 allow-same-origin</a:t>
-            </a:r>
-          </a:p>
-          <a:p>
-            <a:pPr>
-              <a:spcBef>
-                <a:spcPts val="400"/>
-              </a:spcBef>
-            </a:pPr>
-            <a:r>
-              <a:rPr sz="1200" b="0">
-                <a:solidFill>
-                  <a:srgbClr val="334155"/>
-                </a:solidFill>
-                <a:latin typeface="Calibri"/>
-              </a:rPr>
-              <a:t/>
-            </a:r>
-          </a:p>
-          <a:p>
-            <a:pPr>
-              <a:spcBef>
-                <a:spcPts val="400"/>
-              </a:spcBef>
-            </a:pPr>
-            <a:r>
-              <a:rPr sz="1200" b="0">
-                <a:solidFill>
-                  <a:srgbClr val="334155"/>
-                </a:solidFill>
-                <a:latin typeface="Calibri"/>
-              </a:rPr>
-              <a:t>限制随意外链 / 白名单 CDN</a:t>
-            </a:r>
-          </a:p>
-          <a:p>
-            <a:pPr>
-              <a:spcBef>
-                <a:spcPts val="400"/>
-              </a:spcBef>
-            </a:pPr>
-            <a:r>
-              <a:rPr sz="1200" b="0">
-                <a:solidFill>
-                  <a:srgbClr val="334155"/>
-                </a:solidFill>
-                <a:latin typeface="Calibri"/>
-              </a:rPr>
-              <a:t>预览域与主站 cookie 隔离</a:t>
-            </a:r>
-          </a:p>
-          <a:p>
-            <a:pPr>
-              <a:spcBef>
-                <a:spcPts val="400"/>
-              </a:spcBef>
-            </a:pPr>
-            <a:r>
-              <a:rPr sz="1200" b="0">
-                <a:solidFill>
-                  <a:srgbClr val="334155"/>
-                </a:solidFill>
-                <a:latin typeface="Calibri"/>
-              </a:rPr>
-              <a:t/>
-            </a:r>
-          </a:p>
-          <a:p>
-            <a:pPr>
-              <a:spcBef>
-                <a:spcPts val="400"/>
-              </a:spcBef>
-            </a:pPr>
-            <a:r>
-              <a:rPr sz="1200" b="0">
-                <a:solidFill>
-                  <a:srgbClr val="334155"/>
-                </a:solidFill>
-                <a:latin typeface="Calibri"/>
-              </a:rPr>
-              <a:t>体积上限，敏感场景短 TTL</a:t>
-            </a:r>
-          </a:p>
-          <a:p>
-            <a:pPr>
-              <a:spcBef>
-                <a:spcPts val="400"/>
-              </a:spcBef>
-            </a:pPr>
-            <a:r>
-              <a:rPr sz="1200" b="0">
-                <a:solidFill>
-                  <a:srgbClr val="334155"/>
-                </a:solidFill>
-                <a:latin typeface="Calibri"/>
-              </a:rPr>
-              <a:t>需要时用 postMessage 桥</a:t>
-            </a:r>
-          </a:p>
-          <a:p>
-            <a:pPr>
-              <a:spcBef>
-                <a:spcPts val="400"/>
-              </a:spcBef>
-            </a:pPr>
-            <a:r>
-              <a:rPr sz="1200" b="0">
-                <a:solidFill>
-                  <a:srgbClr val="334155"/>
-                </a:solidFill>
-                <a:latin typeface="Calibri"/>
-              </a:rPr>
-              <a:t>而不是放开同源</a:t>
+              <a:rPr sz="1100" b="0">
+                <a:solidFill>
+                  <a:srgbClr val="E2E8F0"/>
+                </a:solidFill>
+                <a:latin typeface="Consolas"/>
+              </a:rPr>
+              <a:t>// 方案 C：流式粗预览 + 定稿</a:t>
+            </a:r>
+          </a:p>
+          <a:p>
+            <a:r>
+              <a:rPr sz="1100" b="0">
+                <a:solidFill>
+                  <a:srgbClr val="E2E8F0"/>
+                </a:solidFill>
+                <a:latin typeface="Consolas"/>
+              </a:rPr>
+              <a:t>onDelta(t =&gt; { buf += t; schedulePaint(buf); })</a:t>
+            </a:r>
+          </a:p>
+          <a:p>
+            <a:r>
+              <a:rPr sz="1100" b="0">
+                <a:solidFill>
+                  <a:srgbClr val="E2E8F0"/>
+                </a:solidFill>
+                <a:latin typeface="Consolas"/>
+              </a:rPr>
+              <a:t>onDone(async () =&gt; {</a:t>
+            </a:r>
+          </a:p>
+          <a:p>
+            <a:r>
+              <a:rPr sz="1100" b="0">
+                <a:solidFill>
+                  <a:srgbClr val="E2E8F0"/>
+                </a:solidFill>
+                <a:latin typeface="Consolas"/>
+              </a:rPr>
+              <a:t>  await writeAndSync(finalHtml);   // 落盘</a:t>
+            </a:r>
+          </a:p>
+          <a:p>
+            <a:r>
+              <a:rPr sz="1100" b="0">
+                <a:solidFill>
+                  <a:srgbClr val="E2E8F0"/>
+                </a:solidFill>
+                <a:latin typeface="Consolas"/>
+              </a:rPr>
+              <a:t>  iframe.srcdoc = await downloadText(id);</a:t>
+            </a:r>
+          </a:p>
+          <a:p>
+            <a:r>
+              <a:rPr sz="1100" b="0">
+                <a:solidFill>
+                  <a:srgbClr val="E2E8F0"/>
+                </a:solidFill>
+                <a:latin typeface="Consolas"/>
+              </a:rPr>
+              <a:t>})</a:t>
             </a:r>
           </a:p>
         </p:txBody>
@@ -8655,7 +9270,7 @@
         <p:spPr>
           <a:xfrm>
             <a:off x="0" y="0"/>
-            <a:ext cx="12191695" cy="960120"/>
+            <a:ext cx="12191695" cy="914400"/>
           </a:xfrm>
           <a:prstGeom prst="rect">
             <a:avLst/>
@@ -8697,8 +9312,8 @@
         </p:nvSpPr>
         <p:spPr>
           <a:xfrm>
-            <a:off x="0" y="960120"/>
-            <a:ext cx="12191695" cy="54864"/>
+            <a:off x="0" y="914400"/>
+            <a:ext cx="12191695" cy="45720"/>
           </a:xfrm>
           <a:prstGeom prst="rect">
             <a:avLst/>
@@ -8740,8 +9355,8 @@
         </p:nvSpPr>
         <p:spPr>
           <a:xfrm>
-            <a:off x="502920" y="201168"/>
-            <a:ext cx="11155680" cy="640080"/>
+            <a:off x="457200" y="201168"/>
+            <a:ext cx="11247120" cy="640080"/>
           </a:xfrm>
           <a:prstGeom prst="rect">
             <a:avLst/>
@@ -8755,24 +9370,24 @@
           <a:lstStyle/>
           <a:p>
             <a:r>
-              <a:rPr sz="2400" b="1">
+              <a:rPr sz="2200" b="1">
                 <a:solidFill>
                   <a:srgbClr val="FFFFFF"/>
                 </a:solidFill>
                 <a:latin typeface="Calibri"/>
               </a:rPr>
-              <a:t>07  建议契约与实现示例</a:t>
-            </a:r>
-          </a:p>
-          <a:p>
-            <a:r>
-              <a:rPr sz="1200" b="0">
+              <a:t>07  结论与建议</a:t>
+            </a:r>
+          </a:p>
+          <a:p>
+            <a:r>
+              <a:rPr sz="1100" b="0">
                 <a:solidFill>
                   <a:srgbClr val="94A3B8"/>
                 </a:solidFill>
                 <a:latin typeface="Calibri"/>
               </a:rPr>
-              <a:t>工具层给足元数据；端侧只做「识别 → 下载 → 沙箱渲染」</a:t>
+              <a:t>用最少改动打通「对话里看得见的健康报告」</a:t>
             </a:r>
           </a:p>
         </p:txBody>
@@ -8785,8 +9400,8 @@
         </p:nvSpPr>
         <p:spPr>
           <a:xfrm>
-            <a:off x="502920" y="1143000"/>
-            <a:ext cx="11155680" cy="411480"/>
+            <a:off x="548640" y="1188720"/>
+            <a:ext cx="11064240" cy="5303520"/>
           </a:xfrm>
           <a:prstGeom prst="rect">
             <a:avLst/>
@@ -8799,1460 +9414,153 @@
           </a:bodyPr>
           <a:lstStyle/>
           <a:p>
-            <a:r>
-              <a:rPr sz="1300" b="1">
-                <a:solidFill>
-                  <a:srgbClr val="0D9488"/>
-                </a:solidFill>
-                <a:latin typeface="Calibri"/>
-              </a:rPr>
-              <a:t>write / 同步完成后的建议返回（示意）</a:t>
-            </a:r>
-          </a:p>
-        </p:txBody>
-      </p:sp>
-      <p:sp>
-        <p:nvSpPr>
-          <p:cNvPr id="7" name="Rounded Rectangle 6"/>
-          <p:cNvSpPr/>
-          <p:nvPr/>
-        </p:nvSpPr>
-        <p:spPr>
-          <a:xfrm>
-            <a:off x="411480" y="1554480"/>
-            <a:ext cx="5577840" cy="2148840"/>
-          </a:xfrm>
-          <a:prstGeom prst="roundRect">
-            <a:avLst>
-              <a:gd name="adj" fmla="val 4000"/>
-            </a:avLst>
-          </a:prstGeom>
-          <a:solidFill>
-            <a:srgbClr val="0F172A"/>
-          </a:solidFill>
-          <a:ln>
-            <a:noFill/>
-          </a:ln>
-        </p:spPr>
-        <p:style>
-          <a:lnRef idx="1">
-            <a:schemeClr val="accent1"/>
-          </a:lnRef>
-          <a:fillRef idx="3">
-            <a:schemeClr val="accent1"/>
-          </a:fillRef>
-          <a:effectRef idx="2">
-            <a:schemeClr val="accent1"/>
-          </a:effectRef>
-          <a:fontRef idx="minor">
-            <a:schemeClr val="lt1"/>
-          </a:fontRef>
-        </p:style>
-        <p:txBody>
-          <a:bodyPr rtlCol="0" anchor="ctr"/>
-          <a:lstStyle/>
-          <a:p>
-            <a:pPr algn="ctr"/>
-          </a:p>
-        </p:txBody>
-      </p:sp>
-      <p:sp>
-        <p:nvSpPr>
-          <p:cNvPr id="8" name="TextBox 7"/>
-          <p:cNvSpPr txBox="1"/>
-          <p:nvPr/>
-        </p:nvSpPr>
-        <p:spPr>
-          <a:xfrm>
-            <a:off x="612648" y="1691640"/>
-            <a:ext cx="5257800" cy="1920240"/>
-          </a:xfrm>
-          <a:prstGeom prst="rect">
-            <a:avLst/>
-          </a:prstGeom>
-          <a:noFill/>
-        </p:spPr>
-        <p:txBody>
-          <a:bodyPr wrap="square">
-            <a:spAutoFit/>
-          </a:bodyPr>
-          <a:lstStyle/>
-          <a:p>
             <a:pPr>
               <a:spcAft>
-                <a:spcPts val="100"/>
+                <a:spcPts val="1200"/>
               </a:spcAft>
             </a:pPr>
             <a:r>
-              <a:rPr sz="1100" b="0">
-                <a:solidFill>
-                  <a:srgbClr val="E2E8F0"/>
-                </a:solidFill>
-                <a:latin typeface="Consolas"/>
-              </a:rPr>
-              <a:t>{</a:t>
+              <a:rPr sz="1500" b="1">
+                <a:solidFill>
+                  <a:srgbClr val="0D9488"/>
+                </a:solidFill>
+                <a:latin typeface="Calibri"/>
+              </a:rPr>
+              <a:t>问题本质  </a:t>
+            </a:r>
+            <a:r>
+              <a:rPr sz="1500" b="0">
+                <a:solidFill>
+                  <a:srgbClr val="334155"/>
+                </a:solidFill>
+                <a:latin typeface="Calibri"/>
+              </a:rPr>
+              <a:t>对话内安全渲染可视化 HTML（Skill 取数 + 图形化生成 + 端呈现），不是再造存储。</a:t>
             </a:r>
           </a:p>
           <a:p>
             <a:pPr>
               <a:spcAft>
-                <a:spcPts val="100"/>
+                <a:spcPts val="1200"/>
               </a:spcAft>
             </a:pPr>
             <a:r>
-              <a:rPr sz="1100" b="0">
-                <a:solidFill>
-                  <a:srgbClr val="E2E8F0"/>
-                </a:solidFill>
-                <a:latin typeface="Consolas"/>
-              </a:rPr>
-              <a:t>  "path": "artifacts/demo/index.html",</a:t>
+              <a:rPr sz="1500" b="1">
+                <a:solidFill>
+                  <a:srgbClr val="0D9488"/>
+                </a:solidFill>
+                <a:latin typeface="Calibri"/>
+              </a:rPr>
+              <a:t>能力优先级  </a:t>
+            </a:r>
+            <a:r>
+              <a:rPr sz="1500" b="0">
+                <a:solidFill>
+                  <a:srgbClr val="334155"/>
+                </a:solidFill>
+                <a:latin typeface="Calibri"/>
+              </a:rPr>
+              <a:t>先补渲染 + 安全；分享与流式后置。生成/落盘/同步已具备。</a:t>
             </a:r>
           </a:p>
           <a:p>
             <a:pPr>
               <a:spcAft>
-                <a:spcPts val="100"/>
+                <a:spcPts val="1200"/>
               </a:spcAft>
             </a:pPr>
             <a:r>
-              <a:rPr sz="1100" b="0">
-                <a:solidFill>
-                  <a:srgbClr val="E2E8F0"/>
-                </a:solidFill>
-                <a:latin typeface="Consolas"/>
-              </a:rPr>
-              <a:t>  "cloud_file_id": "f_xxx",</a:t>
+              <a:rPr sz="1500" b="1">
+                <a:solidFill>
+                  <a:srgbClr val="0D9488"/>
+                </a:solidFill>
+                <a:latin typeface="Calibri"/>
+              </a:rPr>
+              <a:t>竞品对标  </a:t>
+            </a:r>
+            <a:r>
+              <a:rPr sz="1500" b="0">
+                <a:solidFill>
+                  <a:srgbClr val="334155"/>
+                </a:solidFill>
+                <a:latin typeface="Calibri"/>
+              </a:rPr>
+              <a:t>Claude Artifacts / OpenClaw Widget；Canvas 类作参考；分享演进看 Manus。</a:t>
             </a:r>
           </a:p>
           <a:p>
             <a:pPr>
               <a:spcAft>
-                <a:spcPts val="100"/>
+                <a:spcPts val="1200"/>
               </a:spcAft>
             </a:pPr>
             <a:r>
-              <a:rPr sz="1100" b="0">
-                <a:solidFill>
-                  <a:srgbClr val="E2E8F0"/>
-                </a:solidFill>
-                <a:latin typeface="Consolas"/>
-              </a:rPr>
-              <a:t>  "mime": "text/html",</a:t>
+              <a:rPr sz="1500" b="1">
+                <a:solidFill>
+                  <a:srgbClr val="0D9488"/>
+                </a:solidFill>
+                <a:latin typeface="Calibri"/>
+              </a:rPr>
+              <a:t>方案选择  </a:t>
+            </a:r>
+            <a:r>
+              <a:rPr sz="1500" b="0">
+                <a:solidFill>
+                  <a:srgbClr val="334155"/>
+                </a:solidFill>
+                <a:latin typeface="Calibri"/>
+              </a:rPr>
+              <a:t>一期默认方案 A；报告等待较长时演进方案 C；纯方案 B 不作唯一路径。</a:t>
             </a:r>
           </a:p>
           <a:p>
             <a:pPr>
               <a:spcAft>
-                <a:spcPts val="100"/>
+                <a:spcPts val="1200"/>
               </a:spcAft>
             </a:pPr>
             <a:r>
-              <a:rPr sz="1100" b="0">
-                <a:solidFill>
-                  <a:srgbClr val="E2E8F0"/>
-                </a:solidFill>
-                <a:latin typeface="Consolas"/>
-              </a:rPr>
-              <a:t>  "sync_status": "synced",</a:t>
+              <a:rPr sz="1500" b="1">
+                <a:solidFill>
+                  <a:srgbClr val="0D9488"/>
+                </a:solidFill>
+                <a:latin typeface="Calibri"/>
+              </a:rPr>
+              <a:t>安全底线  </a:t>
+            </a:r>
+            <a:r>
+              <a:rPr sz="1500" b="0">
+                <a:solidFill>
+                  <a:srgbClr val="334155"/>
+                </a:solidFill>
+                <a:latin typeface="Calibri"/>
+              </a:rPr>
+              <a:t>模型 HTML=不可信；allow-scripts；慎开 allow-same-origin；预览与主站隔离。</a:t>
             </a:r>
           </a:p>
           <a:p>
             <a:pPr>
               <a:spcAft>
-                <a:spcPts val="100"/>
+                <a:spcPts val="1200"/>
               </a:spcAft>
             </a:pPr>
             <a:r>
-              <a:rPr sz="1100" b="0">
-                <a:solidFill>
-                  <a:srgbClr val="E2E8F0"/>
-                </a:solidFill>
-                <a:latin typeface="Consolas"/>
-              </a:rPr>
-              <a:t>  "preview": { "kind": "html", "entry": true }</a:t>
-            </a:r>
-          </a:p>
-          <a:p>
-            <a:pPr>
-              <a:spcAft>
-                <a:spcPts val="100"/>
-              </a:spcAft>
-            </a:pPr>
-            <a:r>
-              <a:rPr sz="1100" b="0">
-                <a:solidFill>
-                  <a:srgbClr val="E2E8F0"/>
-                </a:solidFill>
-                <a:latin typeface="Consolas"/>
-              </a:rPr>
-              <a:t>}</a:t>
-            </a:r>
-          </a:p>
-        </p:txBody>
-      </p:sp>
-      <p:sp>
-        <p:nvSpPr>
-          <p:cNvPr id="9" name="Rounded Rectangle 8"/>
-          <p:cNvSpPr/>
-          <p:nvPr/>
-        </p:nvSpPr>
-        <p:spPr>
-          <a:xfrm>
-            <a:off x="6172200" y="1554480"/>
-            <a:ext cx="5577840" cy="2148840"/>
-          </a:xfrm>
-          <a:prstGeom prst="roundRect">
-            <a:avLst>
-              <a:gd name="adj" fmla="val 4000"/>
-            </a:avLst>
-          </a:prstGeom>
-          <a:solidFill>
-            <a:srgbClr val="0F172A"/>
-          </a:solidFill>
-          <a:ln>
-            <a:noFill/>
-          </a:ln>
-        </p:spPr>
-        <p:style>
-          <a:lnRef idx="1">
-            <a:schemeClr val="accent1"/>
-          </a:lnRef>
-          <a:fillRef idx="3">
-            <a:schemeClr val="accent1"/>
-          </a:fillRef>
-          <a:effectRef idx="2">
-            <a:schemeClr val="accent1"/>
-          </a:effectRef>
-          <a:fontRef idx="minor">
-            <a:schemeClr val="lt1"/>
-          </a:fontRef>
-        </p:style>
-        <p:txBody>
-          <a:bodyPr rtlCol="0" anchor="ctr"/>
-          <a:lstStyle/>
-          <a:p>
-            <a:pPr algn="ctr"/>
-          </a:p>
-        </p:txBody>
-      </p:sp>
-      <p:sp>
-        <p:nvSpPr>
-          <p:cNvPr id="10" name="TextBox 9"/>
-          <p:cNvSpPr txBox="1"/>
-          <p:nvPr/>
-        </p:nvSpPr>
-        <p:spPr>
-          <a:xfrm>
-            <a:off x="6373368" y="1691640"/>
-            <a:ext cx="5257800" cy="1920240"/>
-          </a:xfrm>
-          <a:prstGeom prst="rect">
-            <a:avLst/>
-          </a:prstGeom>
-          <a:noFill/>
-        </p:spPr>
-        <p:txBody>
-          <a:bodyPr wrap="square">
-            <a:spAutoFit/>
-          </a:bodyPr>
-          <a:lstStyle/>
-          <a:p>
-            <a:pPr>
-              <a:spcAft>
-                <a:spcPts val="100"/>
-              </a:spcAft>
-            </a:pPr>
-            <a:r>
-              <a:rPr sz="1100" b="0">
-                <a:solidFill>
-                  <a:srgbClr val="E2E8F0"/>
-                </a:solidFill>
-                <a:latin typeface="Consolas"/>
-              </a:rPr>
-              <a:t>// 路径 A：下载后一次渲染</a:t>
-            </a:r>
-          </a:p>
-          <a:p>
-            <a:pPr>
-              <a:spcAft>
-                <a:spcPts val="100"/>
-              </a:spcAft>
-            </a:pPr>
-            <a:r>
-              <a:rPr sz="1100" b="0">
-                <a:solidFill>
-                  <a:srgbClr val="E2E8F0"/>
-                </a:solidFill>
-                <a:latin typeface="Consolas"/>
-              </a:rPr>
-              <a:t>const html = await downloadText(fileId);</a:t>
-            </a:r>
-          </a:p>
-          <a:p>
-            <a:pPr>
-              <a:spcAft>
-                <a:spcPts val="100"/>
-              </a:spcAft>
-            </a:pPr>
-            <a:r>
-              <a:rPr sz="1100" b="0">
-                <a:solidFill>
-                  <a:srgbClr val="E2E8F0"/>
-                </a:solidFill>
-                <a:latin typeface="Consolas"/>
-              </a:rPr>
-              <a:t>iframe.sandbox = "allow-scripts";</a:t>
-            </a:r>
-          </a:p>
-          <a:p>
-            <a:pPr>
-              <a:spcAft>
-                <a:spcPts val="100"/>
-              </a:spcAft>
-            </a:pPr>
-            <a:r>
-              <a:rPr sz="1100" b="0">
-                <a:solidFill>
-                  <a:srgbClr val="E2E8F0"/>
-                </a:solidFill>
-                <a:latin typeface="Consolas"/>
-              </a:rPr>
-              <a:t>iframe.srcdoc = html;</a:t>
-            </a:r>
-          </a:p>
-          <a:p>
-            <a:pPr>
-              <a:spcAft>
-                <a:spcPts val="100"/>
-              </a:spcAft>
-            </a:pPr>
-            <a:r>
-              <a:rPr sz="1100" b="0">
-                <a:solidFill>
-                  <a:srgbClr val="E2E8F0"/>
-                </a:solidFill>
-                <a:latin typeface="Consolas"/>
-              </a:rPr>
-              <a:t/>
-            </a:r>
-          </a:p>
-          <a:p>
-            <a:pPr>
-              <a:spcAft>
-                <a:spcPts val="100"/>
-              </a:spcAft>
-            </a:pPr>
-            <a:r>
-              <a:rPr sz="1100" b="0">
-                <a:solidFill>
-                  <a:srgbClr val="E2E8F0"/>
-                </a:solidFill>
-                <a:latin typeface="Consolas"/>
-              </a:rPr>
-              <a:t>// 路径 B：流式 buffer（节流）</a:t>
-            </a:r>
-          </a:p>
-          <a:p>
-            <a:pPr>
-              <a:spcAft>
-                <a:spcPts val="100"/>
-              </a:spcAft>
-            </a:pPr>
-            <a:r>
-              <a:rPr sz="1100" b="0">
-                <a:solidFill>
-                  <a:srgbClr val="E2E8F0"/>
-                </a:solidFill>
-                <a:latin typeface="Consolas"/>
-              </a:rPr>
-              <a:t>onDelta(t =&gt; { buf += t; schedulePaint(); })</a:t>
-            </a:r>
-          </a:p>
-          <a:p>
-            <a:pPr>
-              <a:spcAft>
-                <a:spcPts val="100"/>
-              </a:spcAft>
-            </a:pPr>
-            <a:r>
-              <a:rPr sz="1100" b="0">
-                <a:solidFill>
-                  <a:srgbClr val="E2E8F0"/>
-                </a:solidFill>
-                <a:latin typeface="Consolas"/>
-              </a:rPr>
-              <a:t>onDone(() =&gt; { iframe.srcdoc = buf; })</a:t>
-            </a:r>
-          </a:p>
-        </p:txBody>
-      </p:sp>
-      <p:sp>
-        <p:nvSpPr>
-          <p:cNvPr id="11" name="TextBox 10"/>
-          <p:cNvSpPr txBox="1"/>
-          <p:nvPr/>
-        </p:nvSpPr>
-        <p:spPr>
-          <a:xfrm>
-            <a:off x="502920" y="3886200"/>
-            <a:ext cx="11155680" cy="2560320"/>
-          </a:xfrm>
-          <a:prstGeom prst="rect">
-            <a:avLst/>
-          </a:prstGeom>
-          <a:noFill/>
-        </p:spPr>
-        <p:txBody>
-          <a:bodyPr wrap="square">
-            <a:spAutoFit/>
-          </a:bodyPr>
-          <a:lstStyle/>
-          <a:p>
-            <a:r>
-              <a:rPr sz="1300" b="1">
+              <a:rPr sz="1500" b="1">
                 <a:solidFill>
                   <a:srgbClr val="0D9488"/>
                 </a:solidFill>
                 <a:latin typeface="Calibri"/>
               </a:rPr>
-              <a:t>端侧最小产品行为</a:t>
-            </a:r>
-          </a:p>
-          <a:p>
-            <a:pPr>
-              <a:spcBef>
-                <a:spcPts val="600"/>
-              </a:spcBef>
-            </a:pPr>
-            <a:r>
-              <a:rPr sz="1300" b="0">
+              <a:t>下一步  </a:t>
+            </a:r>
+            <a:r>
+              <a:rPr sz="1500" b="0">
                 <a:solidFill>
                   <a:srgbClr val="334155"/>
                 </a:solidFill>
                 <a:latin typeface="Calibri"/>
               </a:rPr>
-              <a:t>1. 识别 preview.kind===html 或 path 以 .html/.htm 结尾 → 展示「预览卡片」，而不是纯附件行</a:t>
-            </a:r>
-          </a:p>
-          <a:p>
-            <a:pPr>
-              <a:spcBef>
-                <a:spcPts val="600"/>
-              </a:spcBef>
-            </a:pPr>
-            <a:r>
-              <a:rPr sz="1300" b="0">
-                <a:solidFill>
-                  <a:srgbClr val="334155"/>
-                </a:solidFill>
-                <a:latin typeface="Calibri"/>
-              </a:rPr>
-              <a:t>2. sync_status!==synced 时显示加载态；就绪后再 REST 拉正文</a:t>
-            </a:r>
-          </a:p>
-          <a:p>
-            <a:pPr>
-              <a:spcBef>
-                <a:spcPts val="600"/>
-              </a:spcBef>
-            </a:pPr>
-            <a:r>
-              <a:rPr sz="1300" b="0">
-                <a:solidFill>
-                  <a:srgbClr val="334155"/>
-                </a:solidFill>
-                <a:latin typeface="Calibri"/>
-              </a:rPr>
-              <a:t>3. Web 用 sandbox iframe；原生用 WebView loadData/loadUrl；失败则降级「下载 / 外开浏览器」</a:t>
-            </a:r>
-          </a:p>
-          <a:p>
-            <a:pPr>
-              <a:spcBef>
-                <a:spcPts val="600"/>
-              </a:spcBef>
-            </a:pPr>
-            <a:r>
-              <a:rPr sz="1300" b="0">
-                <a:solidFill>
-                  <a:srgbClr val="334155"/>
-                </a:solidFill>
-                <a:latin typeface="Calibri"/>
-              </a:rPr>
-              <a:t>4.（可选）show_widget({html|html_path|file_id})：对模型暴露「请展示」语义，内部仍走 write+同步</a:t>
-            </a:r>
-          </a:p>
-        </p:txBody>
-      </p:sp>
-    </p:spTree>
-  </p:cSld>
-  <p:clrMapOvr>
-    <a:masterClrMapping/>
-  </p:clrMapOvr>
-</p:sld>
-</file>
-
-<file path=ppt/slides/slide9.xml><?xml version="1.0" encoding="utf-8"?>
-<p:sld xmlns:a="http://schemas.openxmlformats.org/drawingml/2006/main" xmlns:p="http://schemas.openxmlformats.org/presentationml/2006/main" xmlns:r="http://schemas.openxmlformats.org/officeDocument/2006/relationships">
-  <p:cSld>
-    <p:spTree>
-      <p:nvGrpSpPr>
-        <p:cNvPr id="1" name=""/>
-        <p:cNvGrpSpPr/>
-        <p:nvPr/>
-      </p:nvGrpSpPr>
-      <p:grpSpPr/>
-      <p:sp>
-        <p:nvSpPr>
-          <p:cNvPr id="2" name="Rectangle 1"/>
-          <p:cNvSpPr/>
-          <p:nvPr/>
-        </p:nvSpPr>
-        <p:spPr>
-          <a:xfrm>
-            <a:off x="0" y="0"/>
-            <a:ext cx="12191695" cy="6858000"/>
-          </a:xfrm>
-          <a:prstGeom prst="rect">
-            <a:avLst/>
-          </a:prstGeom>
-          <a:solidFill>
-            <a:srgbClr val="F8FAFC"/>
-          </a:solidFill>
-          <a:ln>
-            <a:noFill/>
-          </a:ln>
-        </p:spPr>
-        <p:style>
-          <a:lnRef idx="1">
-            <a:schemeClr val="accent1"/>
-          </a:lnRef>
-          <a:fillRef idx="3">
-            <a:schemeClr val="accent1"/>
-          </a:fillRef>
-          <a:effectRef idx="2">
-            <a:schemeClr val="accent1"/>
-          </a:effectRef>
-          <a:fontRef idx="minor">
-            <a:schemeClr val="lt1"/>
-          </a:fontRef>
-        </p:style>
-        <p:txBody>
-          <a:bodyPr rtlCol="0" anchor="ctr"/>
-          <a:lstStyle/>
-          <a:p>
-            <a:pPr algn="ctr"/>
-          </a:p>
-        </p:txBody>
-      </p:sp>
-      <p:sp>
-        <p:nvSpPr>
-          <p:cNvPr id="3" name="Rectangle 2"/>
-          <p:cNvSpPr/>
-          <p:nvPr/>
-        </p:nvSpPr>
-        <p:spPr>
-          <a:xfrm>
-            <a:off x="0" y="0"/>
-            <a:ext cx="12191695" cy="960120"/>
-          </a:xfrm>
-          <a:prstGeom prst="rect">
-            <a:avLst/>
-          </a:prstGeom>
-          <a:solidFill>
-            <a:srgbClr val="0F172A"/>
-          </a:solidFill>
-          <a:ln>
-            <a:noFill/>
-          </a:ln>
-        </p:spPr>
-        <p:style>
-          <a:lnRef idx="1">
-            <a:schemeClr val="accent1"/>
-          </a:lnRef>
-          <a:fillRef idx="3">
-            <a:schemeClr val="accent1"/>
-          </a:fillRef>
-          <a:effectRef idx="2">
-            <a:schemeClr val="accent1"/>
-          </a:effectRef>
-          <a:fontRef idx="minor">
-            <a:schemeClr val="lt1"/>
-          </a:fontRef>
-        </p:style>
-        <p:txBody>
-          <a:bodyPr rtlCol="0" anchor="ctr"/>
-          <a:lstStyle/>
-          <a:p>
-            <a:pPr algn="ctr"/>
-          </a:p>
-        </p:txBody>
-      </p:sp>
-      <p:sp>
-        <p:nvSpPr>
-          <p:cNvPr id="4" name="Rectangle 3"/>
-          <p:cNvSpPr/>
-          <p:nvPr/>
-        </p:nvSpPr>
-        <p:spPr>
-          <a:xfrm>
-            <a:off x="0" y="960120"/>
-            <a:ext cx="12191695" cy="54864"/>
-          </a:xfrm>
-          <a:prstGeom prst="rect">
-            <a:avLst/>
-          </a:prstGeom>
-          <a:solidFill>
-            <a:srgbClr val="0D9488"/>
-          </a:solidFill>
-          <a:ln>
-            <a:noFill/>
-          </a:ln>
-        </p:spPr>
-        <p:style>
-          <a:lnRef idx="1">
-            <a:schemeClr val="accent1"/>
-          </a:lnRef>
-          <a:fillRef idx="3">
-            <a:schemeClr val="accent1"/>
-          </a:fillRef>
-          <a:effectRef idx="2">
-            <a:schemeClr val="accent1"/>
-          </a:effectRef>
-          <a:fontRef idx="minor">
-            <a:schemeClr val="lt1"/>
-          </a:fontRef>
-        </p:style>
-        <p:txBody>
-          <a:bodyPr rtlCol="0" anchor="ctr"/>
-          <a:lstStyle/>
-          <a:p>
-            <a:pPr algn="ctr"/>
-          </a:p>
-        </p:txBody>
-      </p:sp>
-      <p:sp>
-        <p:nvSpPr>
-          <p:cNvPr id="5" name="TextBox 4"/>
-          <p:cNvSpPr txBox="1"/>
-          <p:nvPr/>
-        </p:nvSpPr>
-        <p:spPr>
-          <a:xfrm>
-            <a:off x="502920" y="201168"/>
-            <a:ext cx="11155680" cy="640080"/>
-          </a:xfrm>
-          <a:prstGeom prst="rect">
-            <a:avLst/>
-          </a:prstGeom>
-          <a:noFill/>
-        </p:spPr>
-        <p:txBody>
-          <a:bodyPr wrap="square">
-            <a:spAutoFit/>
-          </a:bodyPr>
-          <a:lstStyle/>
-          <a:p>
-            <a:r>
-              <a:rPr sz="2400" b="1">
-                <a:solidFill>
-                  <a:srgbClr val="FFFFFF"/>
-                </a:solidFill>
-                <a:latin typeface="Calibri"/>
-              </a:rPr>
-              <a:t>08  落地路径与优先级</a:t>
-            </a:r>
-          </a:p>
-          <a:p>
-            <a:r>
-              <a:rPr sz="1200" b="0">
-                <a:solidFill>
-                  <a:srgbClr val="94A3B8"/>
-                </a:solidFill>
-                <a:latin typeface="Calibri"/>
-              </a:rPr>
-              <a:t>先闭环可见，再优化体感，最后做分享与多文件</a:t>
-            </a:r>
-          </a:p>
-        </p:txBody>
-      </p:sp>
-      <p:sp>
-        <p:nvSpPr>
-          <p:cNvPr id="6" name="Rounded Rectangle 5"/>
-          <p:cNvSpPr/>
-          <p:nvPr/>
-        </p:nvSpPr>
-        <p:spPr>
-          <a:xfrm>
-            <a:off x="411480" y="1325880"/>
-            <a:ext cx="2743200" cy="4846320"/>
-          </a:xfrm>
-          <a:prstGeom prst="roundRect">
-            <a:avLst>
-              <a:gd name="adj" fmla="val 8000"/>
-            </a:avLst>
-          </a:prstGeom>
-          <a:solidFill>
-            <a:srgbClr val="FFFFFF"/>
-          </a:solidFill>
-          <a:ln>
-            <a:solidFill>
-              <a:srgbClr val="E2E8F0"/>
-            </a:solidFill>
-          </a:ln>
-        </p:spPr>
-        <p:style>
-          <a:lnRef idx="1">
-            <a:schemeClr val="accent1"/>
-          </a:lnRef>
-          <a:fillRef idx="3">
-            <a:schemeClr val="accent1"/>
-          </a:fillRef>
-          <a:effectRef idx="2">
-            <a:schemeClr val="accent1"/>
-          </a:effectRef>
-          <a:fontRef idx="minor">
-            <a:schemeClr val="lt1"/>
-          </a:fontRef>
-        </p:style>
-        <p:txBody>
-          <a:bodyPr rtlCol="0" anchor="ctr"/>
-          <a:lstStyle/>
-          <a:p>
-            <a:pPr algn="ctr"/>
-          </a:p>
-        </p:txBody>
-      </p:sp>
-      <p:sp>
-        <p:nvSpPr>
-          <p:cNvPr id="7" name="Rectangle 6"/>
-          <p:cNvSpPr/>
-          <p:nvPr/>
-        </p:nvSpPr>
-        <p:spPr>
-          <a:xfrm>
-            <a:off x="411480" y="1325880"/>
-            <a:ext cx="2743200" cy="640080"/>
-          </a:xfrm>
-          <a:prstGeom prst="rect">
-            <a:avLst/>
-          </a:prstGeom>
-          <a:solidFill>
-            <a:srgbClr val="0D9488"/>
-          </a:solidFill>
-          <a:ln>
-            <a:noFill/>
-          </a:ln>
-        </p:spPr>
-        <p:style>
-          <a:lnRef idx="1">
-            <a:schemeClr val="accent1"/>
-          </a:lnRef>
-          <a:fillRef idx="3">
-            <a:schemeClr val="accent1"/>
-          </a:fillRef>
-          <a:effectRef idx="2">
-            <a:schemeClr val="accent1"/>
-          </a:effectRef>
-          <a:fontRef idx="minor">
-            <a:schemeClr val="lt1"/>
-          </a:fontRef>
-        </p:style>
-        <p:txBody>
-          <a:bodyPr rtlCol="0" anchor="ctr"/>
-          <a:lstStyle/>
-          <a:p>
-            <a:pPr algn="ctr"/>
-          </a:p>
-        </p:txBody>
-      </p:sp>
-      <p:sp>
-        <p:nvSpPr>
-          <p:cNvPr id="8" name="TextBox 7"/>
-          <p:cNvSpPr txBox="1"/>
-          <p:nvPr/>
-        </p:nvSpPr>
-        <p:spPr>
-          <a:xfrm>
-            <a:off x="548640" y="1417320"/>
-            <a:ext cx="2468880" cy="457200"/>
-          </a:xfrm>
-          <a:prstGeom prst="rect">
-            <a:avLst/>
-          </a:prstGeom>
-          <a:noFill/>
-        </p:spPr>
-        <p:txBody>
-          <a:bodyPr wrap="square">
-            <a:spAutoFit/>
-          </a:bodyPr>
-          <a:lstStyle/>
-          <a:p>
-            <a:r>
-              <a:rPr sz="1300" b="1">
-                <a:solidFill>
-                  <a:srgbClr val="FFFFFF"/>
-                </a:solidFill>
-                <a:latin typeface="Calibri"/>
-              </a:rPr>
-              <a:t>Phase 0  对齐与验通</a:t>
-            </a:r>
-          </a:p>
-        </p:txBody>
-      </p:sp>
-      <p:sp>
-        <p:nvSpPr>
-          <p:cNvPr id="9" name="TextBox 8"/>
-          <p:cNvSpPr txBox="1"/>
-          <p:nvPr/>
-        </p:nvSpPr>
-        <p:spPr>
-          <a:xfrm>
-            <a:off x="576072" y="2148840"/>
-            <a:ext cx="2423160" cy="3749039"/>
-          </a:xfrm>
-          <a:prstGeom prst="rect">
-            <a:avLst/>
-          </a:prstGeom>
-          <a:noFill/>
-        </p:spPr>
-        <p:txBody>
-          <a:bodyPr wrap="square">
-            <a:spAutoFit/>
-          </a:bodyPr>
-          <a:lstStyle/>
-          <a:p>
-            <a:pPr>
-              <a:spcAft>
-                <a:spcPts val="1000"/>
-              </a:spcAft>
-            </a:pPr>
-            <a:r>
-              <a:rPr sz="1300" b="0">
-                <a:solidFill>
-                  <a:srgbClr val="334155"/>
-                </a:solidFill>
-                <a:latin typeface="Calibri"/>
-              </a:rPr>
-              <a:t>• 确认 write 已可写 .html</a:t>
-            </a:r>
-          </a:p>
-          <a:p>
-            <a:pPr>
-              <a:spcAft>
-                <a:spcPts val="1000"/>
-              </a:spcAft>
-            </a:pPr>
-            <a:r>
-              <a:rPr sz="1300" b="0">
-                <a:solidFill>
-                  <a:srgbClr val="334155"/>
-                </a:solidFill>
-                <a:latin typeface="Calibri"/>
-              </a:rPr>
-              <a:t>• 手工同步/下载一轮</a:t>
-            </a:r>
-          </a:p>
-          <a:p>
-            <a:pPr>
-              <a:spcAft>
-                <a:spcPts val="1000"/>
-              </a:spcAft>
-            </a:pPr>
-            <a:r>
-              <a:rPr sz="1300" b="0">
-                <a:solidFill>
-                  <a:srgbClr val="334155"/>
-                </a:solidFill>
-                <a:latin typeface="Calibri"/>
-              </a:rPr>
-              <a:t>• 确认 MIME 或扩展名策略</a:t>
-            </a:r>
-          </a:p>
-        </p:txBody>
-      </p:sp>
-      <p:sp>
-        <p:nvSpPr>
-          <p:cNvPr id="10" name="Rounded Rectangle 9"/>
-          <p:cNvSpPr/>
-          <p:nvPr/>
-        </p:nvSpPr>
-        <p:spPr>
-          <a:xfrm>
-            <a:off x="3337560" y="1325880"/>
-            <a:ext cx="2743200" cy="4846320"/>
-          </a:xfrm>
-          <a:prstGeom prst="roundRect">
-            <a:avLst>
-              <a:gd name="adj" fmla="val 8000"/>
-            </a:avLst>
-          </a:prstGeom>
-          <a:solidFill>
-            <a:srgbClr val="FFFFFF"/>
-          </a:solidFill>
-          <a:ln>
-            <a:solidFill>
-              <a:srgbClr val="E2E8F0"/>
-            </a:solidFill>
-          </a:ln>
-        </p:spPr>
-        <p:style>
-          <a:lnRef idx="1">
-            <a:schemeClr val="accent1"/>
-          </a:lnRef>
-          <a:fillRef idx="3">
-            <a:schemeClr val="accent1"/>
-          </a:fillRef>
-          <a:effectRef idx="2">
-            <a:schemeClr val="accent1"/>
-          </a:effectRef>
-          <a:fontRef idx="minor">
-            <a:schemeClr val="lt1"/>
-          </a:fontRef>
-        </p:style>
-        <p:txBody>
-          <a:bodyPr rtlCol="0" anchor="ctr"/>
-          <a:lstStyle/>
-          <a:p>
-            <a:pPr algn="ctr"/>
-          </a:p>
-        </p:txBody>
-      </p:sp>
-      <p:sp>
-        <p:nvSpPr>
-          <p:cNvPr id="11" name="Rectangle 10"/>
-          <p:cNvSpPr/>
-          <p:nvPr/>
-        </p:nvSpPr>
-        <p:spPr>
-          <a:xfrm>
-            <a:off x="3337560" y="1325880"/>
-            <a:ext cx="2743200" cy="640080"/>
-          </a:xfrm>
-          <a:prstGeom prst="rect">
-            <a:avLst/>
-          </a:prstGeom>
-          <a:solidFill>
-            <a:srgbClr val="0D9488"/>
-          </a:solidFill>
-          <a:ln>
-            <a:noFill/>
-          </a:ln>
-        </p:spPr>
-        <p:style>
-          <a:lnRef idx="1">
-            <a:schemeClr val="accent1"/>
-          </a:lnRef>
-          <a:fillRef idx="3">
-            <a:schemeClr val="accent1"/>
-          </a:fillRef>
-          <a:effectRef idx="2">
-            <a:schemeClr val="accent1"/>
-          </a:effectRef>
-          <a:fontRef idx="minor">
-            <a:schemeClr val="lt1"/>
-          </a:fontRef>
-        </p:style>
-        <p:txBody>
-          <a:bodyPr rtlCol="0" anchor="ctr"/>
-          <a:lstStyle/>
-          <a:p>
-            <a:pPr algn="ctr"/>
-          </a:p>
-        </p:txBody>
-      </p:sp>
-      <p:sp>
-        <p:nvSpPr>
-          <p:cNvPr id="12" name="TextBox 11"/>
-          <p:cNvSpPr txBox="1"/>
-          <p:nvPr/>
-        </p:nvSpPr>
-        <p:spPr>
-          <a:xfrm>
-            <a:off x="3474720" y="1417320"/>
-            <a:ext cx="2468880" cy="457200"/>
-          </a:xfrm>
-          <a:prstGeom prst="rect">
-            <a:avLst/>
-          </a:prstGeom>
-          <a:noFill/>
-        </p:spPr>
-        <p:txBody>
-          <a:bodyPr wrap="square">
-            <a:spAutoFit/>
-          </a:bodyPr>
-          <a:lstStyle/>
-          <a:p>
-            <a:r>
-              <a:rPr sz="1300" b="1">
-                <a:solidFill>
-                  <a:srgbClr val="FFFFFF"/>
-                </a:solidFill>
-                <a:latin typeface="Calibri"/>
-              </a:rPr>
-              <a:t>Phase 1  完整下载渲染</a:t>
-            </a:r>
-          </a:p>
-        </p:txBody>
-      </p:sp>
-      <p:sp>
-        <p:nvSpPr>
-          <p:cNvPr id="13" name="TextBox 12"/>
-          <p:cNvSpPr txBox="1"/>
-          <p:nvPr/>
-        </p:nvSpPr>
-        <p:spPr>
-          <a:xfrm>
-            <a:off x="3502152" y="2148840"/>
-            <a:ext cx="2423160" cy="3749039"/>
-          </a:xfrm>
-          <a:prstGeom prst="rect">
-            <a:avLst/>
-          </a:prstGeom>
-          <a:noFill/>
-        </p:spPr>
-        <p:txBody>
-          <a:bodyPr wrap="square">
-            <a:spAutoFit/>
-          </a:bodyPr>
-          <a:lstStyle/>
-          <a:p>
-            <a:pPr>
-              <a:spcAft>
-                <a:spcPts val="1000"/>
-              </a:spcAft>
-            </a:pPr>
-            <a:r>
-              <a:rPr sz="1300" b="0">
-                <a:solidFill>
-                  <a:srgbClr val="334155"/>
-                </a:solidFill>
-                <a:latin typeface="Calibri"/>
-              </a:rPr>
-              <a:t>• 工具返回 mime/file_id/hint</a:t>
-            </a:r>
-          </a:p>
-          <a:p>
-            <a:pPr>
-              <a:spcAft>
-                <a:spcPts val="1000"/>
-              </a:spcAft>
-            </a:pPr>
-            <a:r>
-              <a:rPr sz="1300" b="0">
-                <a:solidFill>
-                  <a:srgbClr val="334155"/>
-                </a:solidFill>
-                <a:latin typeface="Calibri"/>
-              </a:rPr>
-              <a:t>• 端预览卡片 + iframe/WebView</a:t>
-            </a:r>
-          </a:p>
-          <a:p>
-            <a:pPr>
-              <a:spcAft>
-                <a:spcPts val="1000"/>
-              </a:spcAft>
-            </a:pPr>
-            <a:r>
-              <a:rPr sz="1300" b="0">
-                <a:solidFill>
-                  <a:srgbClr val="334155"/>
-                </a:solidFill>
-                <a:latin typeface="Calibri"/>
-              </a:rPr>
-              <a:t>• sandbox 默认策略上线</a:t>
-            </a:r>
-          </a:p>
-        </p:txBody>
-      </p:sp>
-      <p:sp>
-        <p:nvSpPr>
-          <p:cNvPr id="14" name="Rounded Rectangle 13"/>
-          <p:cNvSpPr/>
-          <p:nvPr/>
-        </p:nvSpPr>
-        <p:spPr>
-          <a:xfrm>
-            <a:off x="6263640" y="1325880"/>
-            <a:ext cx="2743200" cy="4846320"/>
-          </a:xfrm>
-          <a:prstGeom prst="roundRect">
-            <a:avLst>
-              <a:gd name="adj" fmla="val 8000"/>
-            </a:avLst>
-          </a:prstGeom>
-          <a:solidFill>
-            <a:srgbClr val="FFFFFF"/>
-          </a:solidFill>
-          <a:ln>
-            <a:solidFill>
-              <a:srgbClr val="E2E8F0"/>
-            </a:solidFill>
-          </a:ln>
-        </p:spPr>
-        <p:style>
-          <a:lnRef idx="1">
-            <a:schemeClr val="accent1"/>
-          </a:lnRef>
-          <a:fillRef idx="3">
-            <a:schemeClr val="accent1"/>
-          </a:fillRef>
-          <a:effectRef idx="2">
-            <a:schemeClr val="accent1"/>
-          </a:effectRef>
-          <a:fontRef idx="minor">
-            <a:schemeClr val="lt1"/>
-          </a:fontRef>
-        </p:style>
-        <p:txBody>
-          <a:bodyPr rtlCol="0" anchor="ctr"/>
-          <a:lstStyle/>
-          <a:p>
-            <a:pPr algn="ctr"/>
-          </a:p>
-        </p:txBody>
-      </p:sp>
-      <p:sp>
-        <p:nvSpPr>
-          <p:cNvPr id="15" name="Rectangle 14"/>
-          <p:cNvSpPr/>
-          <p:nvPr/>
-        </p:nvSpPr>
-        <p:spPr>
-          <a:xfrm>
-            <a:off x="6263640" y="1325880"/>
-            <a:ext cx="2743200" cy="640080"/>
-          </a:xfrm>
-          <a:prstGeom prst="rect">
-            <a:avLst/>
-          </a:prstGeom>
-          <a:solidFill>
-            <a:srgbClr val="0F766E"/>
-          </a:solidFill>
-          <a:ln>
-            <a:noFill/>
-          </a:ln>
-        </p:spPr>
-        <p:style>
-          <a:lnRef idx="1">
-            <a:schemeClr val="accent1"/>
-          </a:lnRef>
-          <a:fillRef idx="3">
-            <a:schemeClr val="accent1"/>
-          </a:fillRef>
-          <a:effectRef idx="2">
-            <a:schemeClr val="accent1"/>
-          </a:effectRef>
-          <a:fontRef idx="minor">
-            <a:schemeClr val="lt1"/>
-          </a:fontRef>
-        </p:style>
-        <p:txBody>
-          <a:bodyPr rtlCol="0" anchor="ctr"/>
-          <a:lstStyle/>
-          <a:p>
-            <a:pPr algn="ctr"/>
-          </a:p>
-        </p:txBody>
-      </p:sp>
-      <p:sp>
-        <p:nvSpPr>
-          <p:cNvPr id="16" name="TextBox 15"/>
-          <p:cNvSpPr txBox="1"/>
-          <p:nvPr/>
-        </p:nvSpPr>
-        <p:spPr>
-          <a:xfrm>
-            <a:off x="6400800" y="1417320"/>
-            <a:ext cx="2468880" cy="457200"/>
-          </a:xfrm>
-          <a:prstGeom prst="rect">
-            <a:avLst/>
-          </a:prstGeom>
-          <a:noFill/>
-        </p:spPr>
-        <p:txBody>
-          <a:bodyPr wrap="square">
-            <a:spAutoFit/>
-          </a:bodyPr>
-          <a:lstStyle/>
-          <a:p>
-            <a:r>
-              <a:rPr sz="1300" b="1">
-                <a:solidFill>
-                  <a:srgbClr val="FFFFFF"/>
-                </a:solidFill>
-                <a:latin typeface="Calibri"/>
-              </a:rPr>
-              <a:t>Phase 2  体验与稳定</a:t>
-            </a:r>
-          </a:p>
-        </p:txBody>
-      </p:sp>
-      <p:sp>
-        <p:nvSpPr>
-          <p:cNvPr id="17" name="TextBox 16"/>
-          <p:cNvSpPr txBox="1"/>
-          <p:nvPr/>
-        </p:nvSpPr>
-        <p:spPr>
-          <a:xfrm>
-            <a:off x="6428232" y="2148840"/>
-            <a:ext cx="2423160" cy="3749039"/>
-          </a:xfrm>
-          <a:prstGeom prst="rect">
-            <a:avLst/>
-          </a:prstGeom>
-          <a:noFill/>
-        </p:spPr>
-        <p:txBody>
-          <a:bodyPr wrap="square">
-            <a:spAutoFit/>
-          </a:bodyPr>
-          <a:lstStyle/>
-          <a:p>
-            <a:pPr>
-              <a:spcAft>
-                <a:spcPts val="1000"/>
-              </a:spcAft>
-            </a:pPr>
-            <a:r>
-              <a:rPr sz="1300" b="0">
-                <a:solidFill>
-                  <a:srgbClr val="334155"/>
-                </a:solidFill>
-                <a:latin typeface="Calibri"/>
-              </a:rPr>
-              <a:t>• 同步就绪推送/轮询</a:t>
-            </a:r>
-          </a:p>
-          <a:p>
-            <a:pPr>
-              <a:spcAft>
-                <a:spcPts val="1000"/>
-              </a:spcAft>
-            </a:pPr>
-            <a:r>
-              <a:rPr sz="1300" b="0">
-                <a:solidFill>
-                  <a:srgbClr val="334155"/>
-                </a:solidFill>
-                <a:latin typeface="Calibri"/>
-              </a:rPr>
-              <a:t>• 刷新预览、错误降级</a:t>
-            </a:r>
-          </a:p>
-          <a:p>
-            <a:pPr>
-              <a:spcAft>
-                <a:spcPts val="1000"/>
-              </a:spcAft>
-            </a:pPr>
-            <a:r>
-              <a:rPr sz="1300" b="0">
-                <a:solidFill>
-                  <a:srgbClr val="334155"/>
-                </a:solidFill>
-                <a:latin typeface="Calibri"/>
-              </a:rPr>
-              <a:t>• 单文件内联 CSS/JS 约定</a:t>
-            </a:r>
-          </a:p>
-        </p:txBody>
-      </p:sp>
-      <p:sp>
-        <p:nvSpPr>
-          <p:cNvPr id="18" name="Rounded Rectangle 17"/>
-          <p:cNvSpPr/>
-          <p:nvPr/>
-        </p:nvSpPr>
-        <p:spPr>
-          <a:xfrm>
-            <a:off x="9189720" y="1325880"/>
-            <a:ext cx="2743200" cy="4846320"/>
-          </a:xfrm>
-          <a:prstGeom prst="roundRect">
-            <a:avLst>
-              <a:gd name="adj" fmla="val 8000"/>
-            </a:avLst>
-          </a:prstGeom>
-          <a:solidFill>
-            <a:srgbClr val="FFFFFF"/>
-          </a:solidFill>
-          <a:ln>
-            <a:solidFill>
-              <a:srgbClr val="E2E8F0"/>
-            </a:solidFill>
-          </a:ln>
-        </p:spPr>
-        <p:style>
-          <a:lnRef idx="1">
-            <a:schemeClr val="accent1"/>
-          </a:lnRef>
-          <a:fillRef idx="3">
-            <a:schemeClr val="accent1"/>
-          </a:fillRef>
-          <a:effectRef idx="2">
-            <a:schemeClr val="accent1"/>
-          </a:effectRef>
-          <a:fontRef idx="minor">
-            <a:schemeClr val="lt1"/>
-          </a:fontRef>
-        </p:style>
-        <p:txBody>
-          <a:bodyPr rtlCol="0" anchor="ctr"/>
-          <a:lstStyle/>
-          <a:p>
-            <a:pPr algn="ctr"/>
-          </a:p>
-        </p:txBody>
-      </p:sp>
-      <p:sp>
-        <p:nvSpPr>
-          <p:cNvPr id="19" name="Rectangle 18"/>
-          <p:cNvSpPr/>
-          <p:nvPr/>
-        </p:nvSpPr>
-        <p:spPr>
-          <a:xfrm>
-            <a:off x="9189720" y="1325880"/>
-            <a:ext cx="2743200" cy="640080"/>
-          </a:xfrm>
-          <a:prstGeom prst="rect">
-            <a:avLst/>
-          </a:prstGeom>
-          <a:solidFill>
-            <a:srgbClr val="64748B"/>
-          </a:solidFill>
-          <a:ln>
-            <a:noFill/>
-          </a:ln>
-        </p:spPr>
-        <p:style>
-          <a:lnRef idx="1">
-            <a:schemeClr val="accent1"/>
-          </a:lnRef>
-          <a:fillRef idx="3">
-            <a:schemeClr val="accent1"/>
-          </a:fillRef>
-          <a:effectRef idx="2">
-            <a:schemeClr val="accent1"/>
-          </a:effectRef>
-          <a:fontRef idx="minor">
-            <a:schemeClr val="lt1"/>
-          </a:fontRef>
-        </p:style>
-        <p:txBody>
-          <a:bodyPr rtlCol="0" anchor="ctr"/>
-          <a:lstStyle/>
-          <a:p>
-            <a:pPr algn="ctr"/>
-          </a:p>
-        </p:txBody>
-      </p:sp>
-      <p:sp>
-        <p:nvSpPr>
-          <p:cNvPr id="20" name="TextBox 19"/>
-          <p:cNvSpPr txBox="1"/>
-          <p:nvPr/>
-        </p:nvSpPr>
-        <p:spPr>
-          <a:xfrm>
-            <a:off x="9326880" y="1417320"/>
-            <a:ext cx="2468880" cy="457200"/>
-          </a:xfrm>
-          <a:prstGeom prst="rect">
-            <a:avLst/>
-          </a:prstGeom>
-          <a:noFill/>
-        </p:spPr>
-        <p:txBody>
-          <a:bodyPr wrap="square">
-            <a:spAutoFit/>
-          </a:bodyPr>
-          <a:lstStyle/>
-          <a:p>
-            <a:r>
-              <a:rPr sz="1300" b="1">
-                <a:solidFill>
-                  <a:srgbClr val="FFFFFF"/>
-                </a:solidFill>
-                <a:latin typeface="Calibri"/>
-              </a:rPr>
-              <a:t>Phase 3  流式 + 分享</a:t>
-            </a:r>
-          </a:p>
-        </p:txBody>
-      </p:sp>
-      <p:sp>
-        <p:nvSpPr>
-          <p:cNvPr id="21" name="TextBox 20"/>
-          <p:cNvSpPr txBox="1"/>
-          <p:nvPr/>
-        </p:nvSpPr>
-        <p:spPr>
-          <a:xfrm>
-            <a:off x="9354312" y="2148840"/>
-            <a:ext cx="2423160" cy="3749039"/>
-          </a:xfrm>
-          <a:prstGeom prst="rect">
-            <a:avLst/>
-          </a:prstGeom>
-          <a:noFill/>
-        </p:spPr>
-        <p:txBody>
-          <a:bodyPr wrap="square">
-            <a:spAutoFit/>
-          </a:bodyPr>
-          <a:lstStyle/>
-          <a:p>
-            <a:pPr>
-              <a:spcAft>
-                <a:spcPts val="1000"/>
-              </a:spcAft>
-            </a:pPr>
-            <a:r>
-              <a:rPr sz="1300" b="0">
-                <a:solidFill>
-                  <a:srgbClr val="334155"/>
-                </a:solidFill>
-                <a:latin typeface="Calibri"/>
-              </a:rPr>
-              <a:t>• delta 通道与节流渲染</a:t>
-            </a:r>
-          </a:p>
-          <a:p>
-            <a:pPr>
-              <a:spcAft>
-                <a:spcPts val="1000"/>
-              </a:spcAft>
-            </a:pPr>
-            <a:r>
-              <a:rPr sz="1300" b="0">
-                <a:solidFill>
-                  <a:srgbClr val="334155"/>
-                </a:solidFill>
-                <a:latin typeface="Calibri"/>
-              </a:rPr>
-              <a:t>• 脚本延后执行策略</a:t>
-            </a:r>
-          </a:p>
-          <a:p>
-            <a:pPr>
-              <a:spcAft>
-                <a:spcPts val="1000"/>
-              </a:spcAft>
-            </a:pPr>
-            <a:r>
-              <a:rPr sz="1300" b="0">
-                <a:solidFill>
-                  <a:srgbClr val="334155"/>
-                </a:solidFill>
-                <a:latin typeface="Calibri"/>
-              </a:rPr>
-              <a:t>• 签名 URL / TTL 分享</a:t>
+              <a:t>元数据约定 + 端预览卡片 + sandbox；用「健康分析报告」做验收场景。</a:t>
             </a:r>
           </a:p>
         </p:txBody>

--- a/docs/agent_html_preview_proposal.pptx
+++ b/docs/agent_html_preview_proposal.pptx
@@ -3095,16 +3095,40 @@
         <p:nvPr/>
       </p:nvGrpSpPr>
       <p:grpSpPr/>
-      <p:sp>
-        <p:nvSpPr>
-          <p:cNvPr id="2" name="Rectangle 1"/>
-          <p:cNvSpPr/>
-          <p:nvPr/>
-        </p:nvSpPr>
+      <p:pic>
+        <p:nvPicPr>
+          <p:cNvPr id="2" name="Picture 1" descr="ppt-cover-health-chat.png"/>
+          <p:cNvPicPr>
+            <a:picLocks noChangeAspect="1"/>
+          </p:cNvPicPr>
+          <p:nvPr/>
+        </p:nvPicPr>
+        <p:blipFill>
+          <a:blip r:embed="rId2"/>
+          <a:stretch>
+            <a:fillRect/>
+          </a:stretch>
+        </p:blipFill>
         <p:spPr>
           <a:xfrm>
             <a:off x="0" y="0"/>
             <a:ext cx="12191695" cy="6858000"/>
+          </a:xfrm>
+          <a:prstGeom prst="rect">
+            <a:avLst/>
+          </a:prstGeom>
+        </p:spPr>
+      </p:pic>
+      <p:sp>
+        <p:nvSpPr>
+          <p:cNvPr id="3" name="Rectangle 2"/>
+          <p:cNvSpPr/>
+          <p:nvPr/>
+        </p:nvSpPr>
+        <p:spPr>
+          <a:xfrm>
+            <a:off x="0" y="0"/>
+            <a:ext cx="6583680" cy="6858000"/>
           </a:xfrm>
           <a:prstGeom prst="rect">
             <a:avLst/>
@@ -3140,14 +3164,14 @@
       </p:sp>
       <p:sp>
         <p:nvSpPr>
-          <p:cNvPr id="3" name="Rectangle 2"/>
+          <p:cNvPr id="4" name="Rectangle 3"/>
           <p:cNvSpPr/>
           <p:nvPr/>
         </p:nvSpPr>
         <p:spPr>
           <a:xfrm>
-            <a:off x="0" y="5349240"/>
-            <a:ext cx="12191695" cy="1508760"/>
+            <a:off x="0" y="5212080"/>
+            <a:ext cx="6583680" cy="1645920"/>
           </a:xfrm>
           <a:prstGeom prst="rect">
             <a:avLst/>
@@ -3183,14 +3207,14 @@
       </p:sp>
       <p:sp>
         <p:nvSpPr>
-          <p:cNvPr id="4" name="TextBox 3"/>
+          <p:cNvPr id="5" name="TextBox 4"/>
           <p:cNvSpPr txBox="1"/>
           <p:nvPr/>
         </p:nvSpPr>
         <p:spPr>
           <a:xfrm>
-            <a:off x="640080" y="1920240"/>
-            <a:ext cx="10789920" cy="2286000"/>
+            <a:off x="594360" y="1828800"/>
+            <a:ext cx="5669280" cy="2926080"/>
           </a:xfrm>
           <a:prstGeom prst="rect">
             <a:avLst/>
@@ -3204,7 +3228,7 @@
           <a:lstStyle/>
           <a:p>
             <a:r>
-              <a:rPr sz="3400" b="1">
+              <a:rPr sz="3200" b="1">
                 <a:solidFill>
                   <a:srgbClr val="FFFFFF"/>
                 </a:solidFill>
@@ -3216,31 +3240,48 @@
           <a:p>
             <a:pPr>
               <a:spcBef>
-                <a:spcPts val="1200"/>
+                <a:spcPts val="1400"/>
               </a:spcBef>
             </a:pPr>
             <a:r>
-              <a:rPr sz="1600" b="0">
+              <a:rPr sz="1500" b="0">
+                <a:solidFill>
+                  <a:srgbClr val="99F6E4"/>
+                </a:solidFill>
+                <a:latin typeface="Calibri"/>
+              </a:rPr>
+              <a:t>Skill 取数 · 图形化生成 · 端侧安全呈现</a:t>
+            </a:r>
+          </a:p>
+          <a:p>
+            <a:pPr>
+              <a:spcBef>
+                <a:spcPts val="1800"/>
+              </a:spcBef>
+            </a:pPr>
+            <a:r>
+              <a:rPr sz="1200" b="0">
                 <a:solidFill>
                   <a:srgbClr val="94A3B8"/>
                 </a:solidFill>
                 <a:latin typeface="Calibri"/>
               </a:rPr>
-              <a:t>从健康报告场景出发：Skill 取数 → 图形化 HTML → 端侧安全呈现</a:t>
-            </a:r>
-          </a:p>
-        </p:txBody>
-      </p:sp>
-      <p:sp>
-        <p:nvSpPr>
-          <p:cNvPr id="5" name="TextBox 4"/>
+              <a:t>以「个人健康分析报告」为验收场景
+图文讲解：问题 → 能力 → 竞品 → Gap → 三方案 → 示例 → 建议</a:t>
+            </a:r>
+          </a:p>
+        </p:txBody>
+      </p:sp>
+      <p:sp>
+        <p:nvSpPr>
+          <p:cNvPr id="6" name="TextBox 5"/>
           <p:cNvSpPr txBox="1"/>
           <p:nvPr/>
         </p:nvSpPr>
         <p:spPr>
           <a:xfrm>
-            <a:off x="640080" y="5669280"/>
-            <a:ext cx="10789920" cy="914400"/>
+            <a:off x="594360" y="5532120"/>
+            <a:ext cx="5486400" cy="914400"/>
           </a:xfrm>
           <a:prstGeom prst="rect">
             <a:avLst/>
@@ -3254,13 +3295,13 @@
           <a:lstStyle/>
           <a:p>
             <a:r>
-              <a:rPr sz="1300" b="0">
+              <a:rPr sz="1300" b="1">
                 <a:solidFill>
                   <a:srgbClr val="FFFFFF"/>
                 </a:solidFill>
                 <a:latin typeface="Calibri"/>
               </a:rPr>
-              <a:t>问题定义  ·  能力路径  ·  竞品对比  ·  Gap  ·  三方案  ·  示例  ·  建议</a:t>
+              <a:t>技术分享  |  系统方案  |  落地路径</a:t>
             </a:r>
           </a:p>
         </p:txBody>
@@ -3335,7 +3376,7 @@
         <p:spPr>
           <a:xfrm>
             <a:off x="0" y="0"/>
-            <a:ext cx="12191695" cy="914400"/>
+            <a:ext cx="12191695" cy="868680"/>
           </a:xfrm>
           <a:prstGeom prst="rect">
             <a:avLst/>
@@ -3377,8 +3418,8 @@
         </p:nvSpPr>
         <p:spPr>
           <a:xfrm>
-            <a:off x="0" y="914400"/>
-            <a:ext cx="12191695" cy="45720"/>
+            <a:off x="0" y="868680"/>
+            <a:ext cx="12191695" cy="54864"/>
           </a:xfrm>
           <a:prstGeom prst="rect">
             <a:avLst/>
@@ -3414,72 +3455,25 @@
       </p:sp>
       <p:sp>
         <p:nvSpPr>
-          <p:cNvPr id="5" name="TextBox 4"/>
-          <p:cNvSpPr txBox="1"/>
-          <p:nvPr/>
-        </p:nvSpPr>
-        <p:spPr>
-          <a:xfrm>
-            <a:off x="457200" y="201168"/>
-            <a:ext cx="11247120" cy="640080"/>
-          </a:xfrm>
-          <a:prstGeom prst="rect">
-            <a:avLst/>
-          </a:prstGeom>
-          <a:noFill/>
-        </p:spPr>
-        <p:txBody>
-          <a:bodyPr wrap="square">
-            <a:spAutoFit/>
-          </a:bodyPr>
-          <a:lstStyle/>
-          <a:p>
-            <a:r>
-              <a:rPr sz="2200" b="1">
-                <a:solidFill>
-                  <a:srgbClr val="FFFFFF"/>
-                </a:solidFill>
-                <a:latin typeface="Calibri"/>
-              </a:rPr>
-              <a:t>01  问题定义</a:t>
-            </a:r>
-          </a:p>
-          <a:p>
-            <a:r>
-              <a:rPr sz="1100" b="0">
-                <a:solidFill>
-                  <a:srgbClr val="94A3B8"/>
-                </a:solidFill>
-                <a:latin typeface="Calibri"/>
-              </a:rPr>
-              <a:t>需要在端侧对话中直接渲染并展示模型生成的 HTML 内容</a:t>
-            </a:r>
-          </a:p>
-        </p:txBody>
-      </p:sp>
-      <p:sp>
-        <p:nvSpPr>
-          <p:cNvPr id="6" name="Rounded Rectangle 5"/>
+          <p:cNvPr id="5" name="Rounded Rectangle 4"/>
           <p:cNvSpPr/>
           <p:nvPr/>
         </p:nvSpPr>
         <p:spPr>
           <a:xfrm>
-            <a:off x="411480" y="1188720"/>
-            <a:ext cx="6858000" cy="3200400"/>
+            <a:off x="411480" y="201168"/>
+            <a:ext cx="502920" cy="457200"/>
           </a:xfrm>
           <a:prstGeom prst="roundRect">
             <a:avLst>
-              <a:gd name="adj" fmla="val 6000"/>
+              <a:gd name="adj" fmla="val 30000"/>
             </a:avLst>
           </a:prstGeom>
           <a:solidFill>
-            <a:srgbClr val="F0FDFA"/>
+            <a:srgbClr val="0D9488"/>
           </a:solidFill>
           <a:ln>
-            <a:solidFill>
-              <a:srgbClr val="E2E8F0"/>
-            </a:solidFill>
+            <a:noFill/>
           </a:ln>
         </p:spPr>
         <p:style>
@@ -3501,19 +3495,28 @@
           <a:lstStyle/>
           <a:p>
             <a:pPr algn="ctr"/>
-          </a:p>
-        </p:txBody>
-      </p:sp>
-      <p:sp>
-        <p:nvSpPr>
-          <p:cNvPr id="7" name="TextBox 6"/>
+            <a:r>
+              <a:rPr sz="1400" b="1">
+                <a:solidFill>
+                  <a:srgbClr val="FFFFFF"/>
+                </a:solidFill>
+                <a:latin typeface="Calibri"/>
+              </a:rPr>
+              <a:t>01</a:t>
+            </a:r>
+          </a:p>
+        </p:txBody>
+      </p:sp>
+      <p:sp>
+        <p:nvSpPr>
+          <p:cNvPr id="6" name="TextBox 5"/>
           <p:cNvSpPr txBox="1"/>
           <p:nvPr/>
         </p:nvSpPr>
         <p:spPr>
           <a:xfrm>
-            <a:off x="557784" y="1298448"/>
-            <a:ext cx="6601968" cy="3017520"/>
+            <a:off x="1051560" y="164592"/>
+            <a:ext cx="10515600" cy="640080"/>
           </a:xfrm>
           <a:prstGeom prst="rect">
             <a:avLst/>
@@ -3527,13 +3530,129 @@
           <a:lstStyle/>
           <a:p>
             <a:r>
+              <a:rPr sz="2200" b="1">
+                <a:solidFill>
+                  <a:srgbClr val="FFFFFF"/>
+                </a:solidFill>
+                <a:latin typeface="Calibri"/>
+              </a:rPr>
+              <a:t>问题定义</a:t>
+            </a:r>
+          </a:p>
+          <a:p>
+            <a:r>
+              <a:rPr sz="1100" b="0">
+                <a:solidFill>
+                  <a:srgbClr val="94A3B8"/>
+                </a:solidFill>
+                <a:latin typeface="Calibri"/>
+              </a:rPr>
+              <a:t>需要在端侧对话中直接渲染并显示模型生成的 HTML 内容</a:t>
+            </a:r>
+          </a:p>
+        </p:txBody>
+      </p:sp>
+      <p:pic>
+        <p:nvPicPr>
+          <p:cNvPr id="7" name="Picture 6" descr="ppt-scenario-flow.png"/>
+          <p:cNvPicPr>
+            <a:picLocks noChangeAspect="1"/>
+          </p:cNvPicPr>
+          <p:nvPr/>
+        </p:nvPicPr>
+        <p:blipFill>
+          <a:blip r:embed="rId2"/>
+          <a:stretch>
+            <a:fillRect/>
+          </a:stretch>
+        </p:blipFill>
+        <p:spPr>
+          <a:xfrm>
+            <a:off x="365760" y="1143000"/>
+            <a:ext cx="6949440" cy="3703320"/>
+          </a:xfrm>
+          <a:prstGeom prst="rect">
+            <a:avLst/>
+          </a:prstGeom>
+        </p:spPr>
+      </p:pic>
+      <p:sp>
+        <p:nvSpPr>
+          <p:cNvPr id="8" name="Rounded Rectangle 7"/>
+          <p:cNvSpPr/>
+          <p:nvPr/>
+        </p:nvSpPr>
+        <p:spPr>
+          <a:xfrm>
+            <a:off x="365760" y="4937760"/>
+            <a:ext cx="6949440" cy="1554480"/>
+          </a:xfrm>
+          <a:prstGeom prst="roundRect">
+            <a:avLst>
+              <a:gd name="adj" fmla="val 8000"/>
+            </a:avLst>
+          </a:prstGeom>
+          <a:solidFill>
+            <a:srgbClr val="F0FDFA"/>
+          </a:solidFill>
+          <a:ln w="12700">
+            <a:solidFill>
+              <a:srgbClr val="0D9488"/>
+            </a:solidFill>
+          </a:ln>
+        </p:spPr>
+        <p:style>
+          <a:lnRef idx="1">
+            <a:schemeClr val="accent1"/>
+          </a:lnRef>
+          <a:fillRef idx="3">
+            <a:schemeClr val="accent1"/>
+          </a:fillRef>
+          <a:effectRef idx="2">
+            <a:schemeClr val="accent1"/>
+          </a:effectRef>
+          <a:fontRef idx="minor">
+            <a:schemeClr val="lt1"/>
+          </a:fontRef>
+        </p:style>
+        <p:txBody>
+          <a:bodyPr rtlCol="0" anchor="ctr"/>
+          <a:lstStyle/>
+          <a:p>
+            <a:pPr algn="ctr"/>
+          </a:p>
+        </p:txBody>
+      </p:sp>
+      <p:sp>
+        <p:nvSpPr>
+          <p:cNvPr id="9" name="TextBox 8"/>
+          <p:cNvSpPr txBox="1"/>
+          <p:nvPr/>
+        </p:nvSpPr>
+        <p:spPr>
+          <a:xfrm>
+            <a:off x="502920" y="5074920"/>
+            <a:ext cx="6675120" cy="1325880"/>
+          </a:xfrm>
+          <a:prstGeom prst="rect">
+            <a:avLst/>
+          </a:prstGeom>
+          <a:noFill/>
+        </p:spPr>
+        <p:txBody>
+          <a:bodyPr wrap="square">
+            <a:spAutoFit/>
+          </a:bodyPr>
+          <a:lstStyle/>
+          <a:p>
+            <a:r>
               <a:rPr sz="1300" b="1">
                 <a:solidFill>
-                  <a:srgbClr val="0D9488"/>
-                </a:solidFill>
-                <a:latin typeface="Calibri"/>
-              </a:rPr>
-              <a:t>典型场景：个人健康分析报告</a:t>
+                  <a:srgbClr val="0F766E"/>
+                </a:solidFill>
+                <a:latin typeface="Calibri"/>
+              </a:rPr>
+              <a:t>场景分镜：取数 → 生成可视化 → 对话内预览</a:t>
             </a:r>
           </a:p>
           <a:p>
@@ -3543,13 +3662,13 @@
               </a:spcBef>
             </a:pPr>
             <a:r>
-              <a:rPr sz="1100" b="0">
+              <a:rPr sz="1200" b="0">
                 <a:solidFill>
                   <a:srgbClr val="334155"/>
                 </a:solidFill>
                 <a:latin typeface="Calibri"/>
               </a:rPr>
-              <a:t>用户：「帮我生成最近的个人健康分析报告」</a:t>
+              <a:t>① 运动健康 Skill 拉取指标</a:t>
             </a:r>
           </a:p>
           <a:p>
@@ -3559,13 +3678,13 @@
               </a:spcBef>
             </a:pPr>
             <a:r>
-              <a:rPr sz="1100" b="0">
+              <a:rPr sz="1200" b="0">
                 <a:solidFill>
                   <a:srgbClr val="334155"/>
                 </a:solidFill>
                 <a:latin typeface="Calibri"/>
               </a:rPr>
-              <a:t/>
+              <a:t>② 模型生成带图表的 HTML 报告</a:t>
             </a:r>
           </a:p>
           <a:p>
@@ -3575,101 +3694,37 @@
               </a:spcBef>
             </a:pPr>
             <a:r>
-              <a:rPr sz="1100" b="0">
+              <a:rPr sz="1200" b="0">
                 <a:solidFill>
                   <a:srgbClr val="334155"/>
                 </a:solidFill>
                 <a:latin typeface="Calibri"/>
               </a:rPr>
-              <a:t>1. Agent 调用「运动健康数据」Skill 拉取指标</a:t>
-            </a:r>
-          </a:p>
-          <a:p>
-            <a:pPr>
-              <a:spcBef>
-                <a:spcPts val="300"/>
-              </a:spcBef>
-            </a:pPr>
-            <a:r>
-              <a:rPr sz="1100" b="0">
-                <a:solidFill>
-                  <a:srgbClr val="334155"/>
-                </a:solidFill>
-                <a:latin typeface="Calibri"/>
-              </a:rPr>
-              <a:t>2. 模型结合数据，用图表/卡片等图形化方式生成 HTML</a:t>
-            </a:r>
-          </a:p>
-          <a:p>
-            <a:pPr>
-              <a:spcBef>
-                <a:spcPts val="300"/>
-              </a:spcBef>
-            </a:pPr>
-            <a:r>
-              <a:rPr sz="1100" b="0">
-                <a:solidFill>
-                  <a:srgbClr val="334155"/>
-                </a:solidFill>
-                <a:latin typeface="Calibri"/>
-              </a:rPr>
-              <a:t>3. 在对话中直接展示可交互报告（而不是源码或附件）</a:t>
-            </a:r>
-          </a:p>
-          <a:p>
-            <a:pPr>
-              <a:spcBef>
-                <a:spcPts val="300"/>
-              </a:spcBef>
-            </a:pPr>
-            <a:r>
-              <a:rPr sz="1100" b="0">
-                <a:solidFill>
-                  <a:srgbClr val="334155"/>
-                </a:solidFill>
-                <a:latin typeface="Calibri"/>
-              </a:rPr>
-              <a:t/>
-            </a:r>
-          </a:p>
-          <a:p>
-            <a:pPr>
-              <a:spcBef>
-                <a:spcPts val="300"/>
-              </a:spcBef>
-            </a:pPr>
-            <a:r>
-              <a:rPr sz="1100" b="0">
-                <a:solidFill>
-                  <a:srgbClr val="334155"/>
-                </a:solidFill>
-                <a:latin typeface="Calibri"/>
-              </a:rPr>
-              <a:t>成功标准：会话内可见、可交互；无需下载后另开应用。</a:t>
-            </a:r>
-          </a:p>
-        </p:txBody>
-      </p:sp>
-      <p:sp>
-        <p:nvSpPr>
-          <p:cNvPr id="8" name="Rounded Rectangle 7"/>
+              <a:t>③ 在会话中直接展示，而非源码/附件</a:t>
+            </a:r>
+          </a:p>
+        </p:txBody>
+      </p:sp>
+      <p:sp>
+        <p:nvSpPr>
+          <p:cNvPr id="10" name="Rounded Rectangle 9"/>
           <p:cNvSpPr/>
           <p:nvPr/>
         </p:nvSpPr>
         <p:spPr>
           <a:xfrm>
-            <a:off x="7452360" y="1188720"/>
-            <a:ext cx="4297680" cy="3200400"/>
+            <a:off x="7498079" y="1143000"/>
+            <a:ext cx="4297680" cy="2331720"/>
           </a:xfrm>
           <a:prstGeom prst="roundRect">
             <a:avLst>
-              <a:gd name="adj" fmla="val 6000"/>
+              <a:gd name="adj" fmla="val 8000"/>
             </a:avLst>
           </a:prstGeom>
           <a:solidFill>
             <a:srgbClr val="FFFFFF"/>
           </a:solidFill>
-          <a:ln>
+          <a:ln w="12700">
             <a:solidFill>
               <a:srgbClr val="E2E8F0"/>
             </a:solidFill>
@@ -3699,14 +3754,14 @@
       </p:sp>
       <p:sp>
         <p:nvSpPr>
-          <p:cNvPr id="9" name="TextBox 8"/>
+          <p:cNvPr id="11" name="TextBox 10"/>
           <p:cNvSpPr txBox="1"/>
           <p:nvPr/>
         </p:nvSpPr>
         <p:spPr>
           <a:xfrm>
-            <a:off x="7598664" y="1298448"/>
-            <a:ext cx="4041648" cy="3017520"/>
+            <a:off x="7680960" y="1280160"/>
+            <a:ext cx="3977639" cy="2103120"/>
           </a:xfrm>
           <a:prstGeom prst="rect">
             <a:avLst/>
@@ -3726,145 +3781,65 @@
                 </a:solidFill>
                 <a:latin typeface="Calibri"/>
               </a:rPr>
-              <a:t>本质诉求</a:t>
+              <a:t>用户原话（示例）</a:t>
             </a:r>
           </a:p>
           <a:p>
             <a:pPr>
               <a:spcBef>
-                <a:spcPts val="300"/>
+                <a:spcPts val="1000"/>
               </a:spcBef>
             </a:pPr>
             <a:r>
-              <a:rPr sz="1100" b="0">
-                <a:solidFill>
-                  <a:srgbClr val="334155"/>
-                </a:solidFill>
-                <a:latin typeface="Calibri"/>
-              </a:rPr>
-              <a:t>不是「模型会不会写 HTML」</a:t>
+              <a:rPr sz="1400" b="1">
+                <a:solidFill>
+                  <a:srgbClr val="0F172A"/>
+                </a:solidFill>
+                <a:latin typeface="Calibri"/>
+              </a:rPr>
+              <a:t>「帮我生成最近的个人健康分析报告」</a:t>
             </a:r>
           </a:p>
           <a:p>
             <a:pPr>
               <a:spcBef>
-                <a:spcPts val="300"/>
+                <a:spcPts val="1000"/>
               </a:spcBef>
             </a:pPr>
             <a:r>
-              <a:rPr sz="1100" b="0">
+              <a:rPr sz="1200" b="0">
                 <a:solidFill>
                   <a:srgbClr val="334155"/>
                 </a:solidFill>
                 <a:latin typeface="Calibri"/>
               </a:rPr>
-              <a:t>而是「对话产品能否：</a:t>
-            </a:r>
-          </a:p>
-          <a:p>
-            <a:pPr>
-              <a:spcBef>
-                <a:spcPts val="300"/>
-              </a:spcBef>
-            </a:pPr>
-            <a:r>
-              <a:rPr sz="1100" b="0">
-                <a:solidFill>
-                  <a:srgbClr val="334155"/>
-                </a:solidFill>
-                <a:latin typeface="Calibri"/>
-              </a:rPr>
-              <a:t>  取数 → 可视化生成</a:t>
-            </a:r>
-          </a:p>
-          <a:p>
-            <a:pPr>
-              <a:spcBef>
-                <a:spcPts val="300"/>
-              </a:spcBef>
-            </a:pPr>
-            <a:r>
-              <a:rPr sz="1100" b="0">
-                <a:solidFill>
-                  <a:srgbClr val="334155"/>
-                </a:solidFill>
-                <a:latin typeface="Calibri"/>
-              </a:rPr>
-              <a:t>  → 端内安全渲染」</a:t>
-            </a:r>
-          </a:p>
-          <a:p>
-            <a:pPr>
-              <a:spcBef>
-                <a:spcPts val="300"/>
-              </a:spcBef>
-            </a:pPr>
-            <a:r>
-              <a:rPr sz="1100" b="0">
-                <a:solidFill>
-                  <a:srgbClr val="334155"/>
-                </a:solidFill>
-                <a:latin typeface="Calibri"/>
-              </a:rPr>
-              <a:t/>
-            </a:r>
-          </a:p>
-          <a:p>
-            <a:pPr>
-              <a:spcBef>
-                <a:spcPts val="300"/>
-              </a:spcBef>
-            </a:pPr>
-            <a:r>
-              <a:rPr sz="1100" b="0">
-                <a:solidFill>
-                  <a:srgbClr val="334155"/>
-                </a:solidFill>
-                <a:latin typeface="Calibri"/>
-              </a:rPr>
-              <a:t>断点往往在最后一跳：</a:t>
-            </a:r>
-          </a:p>
-          <a:p>
-            <a:pPr>
-              <a:spcBef>
-                <a:spcPts val="300"/>
-              </a:spcBef>
-            </a:pPr>
-            <a:r>
-              <a:rPr sz="1100" b="0">
-                <a:solidFill>
-                  <a:srgbClr val="334155"/>
-                </a:solidFill>
-                <a:latin typeface="Calibri"/>
-              </a:rPr>
-              <a:t>渲染容器 + 类型识别 + 沙箱</a:t>
-            </a:r>
-          </a:p>
-        </p:txBody>
-      </p:sp>
-      <p:sp>
-        <p:nvSpPr>
-          <p:cNvPr id="10" name="Rounded Rectangle 9"/>
+              <a:t>期望：图表、趋势、结论卡片在对话里可点可看。</a:t>
+            </a:r>
+          </a:p>
+        </p:txBody>
+      </p:sp>
+      <p:sp>
+        <p:nvSpPr>
+          <p:cNvPr id="12" name="Rounded Rectangle 11"/>
           <p:cNvSpPr/>
           <p:nvPr/>
         </p:nvSpPr>
         <p:spPr>
           <a:xfrm>
-            <a:off x="411480" y="4572000"/>
-            <a:ext cx="11338560" cy="1920240"/>
+            <a:off x="7498079" y="3657600"/>
+            <a:ext cx="4297680" cy="2834640"/>
           </a:xfrm>
           <a:prstGeom prst="roundRect">
             <a:avLst>
-              <a:gd name="adj" fmla="val 6000"/>
+              <a:gd name="adj" fmla="val 8000"/>
             </a:avLst>
           </a:prstGeom>
           <a:solidFill>
-            <a:srgbClr val="FFFFFF"/>
+            <a:srgbClr val="FFFBEB"/>
           </a:solidFill>
-          <a:ln>
+          <a:ln w="12700">
             <a:solidFill>
-              <a:srgbClr val="E2E8F0"/>
+              <a:srgbClr val="F59E0B"/>
             </a:solidFill>
           </a:ln>
         </p:spPr>
@@ -3892,14 +3867,14 @@
       </p:sp>
       <p:sp>
         <p:nvSpPr>
-          <p:cNvPr id="11" name="TextBox 10"/>
+          <p:cNvPr id="13" name="TextBox 12"/>
           <p:cNvSpPr txBox="1"/>
           <p:nvPr/>
         </p:nvSpPr>
         <p:spPr>
           <a:xfrm>
-            <a:off x="557784" y="4681728"/>
-            <a:ext cx="11082528" cy="1737360"/>
+            <a:off x="7680960" y="3794760"/>
+            <a:ext cx="3977639" cy="2606040"/>
           </a:xfrm>
           <a:prstGeom prst="rect">
             <a:avLst/>
@@ -3915,43 +3890,75 @@
             <a:r>
               <a:rPr sz="1300" b="1">
                 <a:solidFill>
-                  <a:srgbClr val="0D9488"/>
-                </a:solidFill>
-                <a:latin typeface="Calibri"/>
-              </a:rPr>
-              <a:t>本次要回答</a:t>
+                  <a:srgbClr val="B45309"/>
+                </a:solidFill>
+                <a:latin typeface="Calibri"/>
+              </a:rPr>
+              <a:t>成功标准</a:t>
             </a:r>
           </a:p>
           <a:p>
             <a:pPr>
               <a:spcBef>
-                <a:spcPts val="300"/>
+                <a:spcPts val="600"/>
               </a:spcBef>
             </a:pPr>
             <a:r>
-              <a:rPr sz="1100" b="0">
+              <a:rPr sz="1300" b="0">
                 <a:solidFill>
                   <a:srgbClr val="334155"/>
                 </a:solidFill>
                 <a:latin typeface="Calibri"/>
               </a:rPr>
-              <a:t>能力链上哪些已有、哪些缺口？竞品怎么做？我们与目标差在哪？</a:t>
+              <a:t>· 会话内直接看见报告</a:t>
             </a:r>
           </a:p>
           <a:p>
             <a:pPr>
               <a:spcBef>
-                <a:spcPts val="300"/>
+                <a:spcPts val="600"/>
               </a:spcBef>
             </a:pPr>
             <a:r>
-              <a:rPr sz="1100" b="0">
+              <a:rPr sz="1300" b="0">
                 <a:solidFill>
                   <a:srgbClr val="334155"/>
                 </a:solidFill>
                 <a:latin typeface="Calibri"/>
               </a:rPr>
-              <a:t>下载后渲染 / 流式实时渲染 / 混合方案怎么选？如何落地与验收？</a:t>
+              <a:t>· 图表可交互（不仅截图）</a:t>
+            </a:r>
+          </a:p>
+          <a:p>
+            <a:pPr>
+              <a:spcBef>
+                <a:spcPts val="600"/>
+              </a:spcBef>
+            </a:pPr>
+            <a:r>
+              <a:rPr sz="1300" b="0">
+                <a:solidFill>
+                  <a:srgbClr val="334155"/>
+                </a:solidFill>
+                <a:latin typeface="Calibri"/>
+              </a:rPr>
+              <a:t>· 无需下载后另开应用</a:t>
+            </a:r>
+          </a:p>
+          <a:p>
+            <a:pPr>
+              <a:spcBef>
+                <a:spcPts val="600"/>
+              </a:spcBef>
+            </a:pPr>
+            <a:r>
+              <a:rPr sz="1300" b="0">
+                <a:solidFill>
+                  <a:srgbClr val="334155"/>
+                </a:solidFill>
+                <a:latin typeface="Calibri"/>
+              </a:rPr>
+              <a:t>· 安全：脚本不越权主站</a:t>
             </a:r>
           </a:p>
         </p:txBody>
@@ -4026,7 +4033,7 @@
         <p:spPr>
           <a:xfrm>
             <a:off x="0" y="0"/>
-            <a:ext cx="12191695" cy="914400"/>
+            <a:ext cx="12191695" cy="868680"/>
           </a:xfrm>
           <a:prstGeom prst="rect">
             <a:avLst/>
@@ -4068,8 +4075,8 @@
         </p:nvSpPr>
         <p:spPr>
           <a:xfrm>
-            <a:off x="0" y="914400"/>
-            <a:ext cx="12191695" cy="45720"/>
+            <a:off x="0" y="868680"/>
+            <a:ext cx="12191695" cy="54864"/>
           </a:xfrm>
           <a:prstGeom prst="rect">
             <a:avLst/>
@@ -4105,72 +4112,25 @@
       </p:sp>
       <p:sp>
         <p:nvSpPr>
-          <p:cNvPr id="5" name="TextBox 4"/>
-          <p:cNvSpPr txBox="1"/>
-          <p:nvPr/>
-        </p:nvSpPr>
-        <p:spPr>
-          <a:xfrm>
-            <a:off x="457200" y="201168"/>
-            <a:ext cx="11247120" cy="640080"/>
-          </a:xfrm>
-          <a:prstGeom prst="rect">
-            <a:avLst/>
-          </a:prstGeom>
-          <a:noFill/>
-        </p:spPr>
-        <p:txBody>
-          <a:bodyPr wrap="square">
-            <a:spAutoFit/>
-          </a:bodyPr>
-          <a:lstStyle/>
-          <a:p>
-            <a:r>
-              <a:rPr sz="2200" b="1">
-                <a:solidFill>
-                  <a:srgbClr val="FFFFFF"/>
-                </a:solidFill>
-                <a:latin typeface="Calibri"/>
-              </a:rPr>
-              <a:t>02  实现能力路径</a:t>
-            </a:r>
-          </a:p>
-          <a:p>
-            <a:r>
-              <a:rPr sz="1100" b="0">
-                <a:solidFill>
-                  <a:srgbClr val="94A3B8"/>
-                </a:solidFill>
-                <a:latin typeface="Calibri"/>
-              </a:rPr>
-              <a:t>生成 → 落盘 → 同步 → 渲染 → 安全 → 分享（标出已有 / 缺口）</a:t>
-            </a:r>
-          </a:p>
-        </p:txBody>
-      </p:sp>
-      <p:sp>
-        <p:nvSpPr>
-          <p:cNvPr id="6" name="Rounded Rectangle 5"/>
+          <p:cNvPr id="5" name="Rounded Rectangle 4"/>
           <p:cNvSpPr/>
           <p:nvPr/>
         </p:nvSpPr>
         <p:spPr>
           <a:xfrm>
-            <a:off x="365760" y="1280160"/>
-            <a:ext cx="1828800" cy="3657600"/>
+            <a:off x="411480" y="201168"/>
+            <a:ext cx="502920" cy="457200"/>
           </a:xfrm>
           <a:prstGeom prst="roundRect">
             <a:avLst>
-              <a:gd name="adj" fmla="val 8000"/>
+              <a:gd name="adj" fmla="val 30000"/>
             </a:avLst>
           </a:prstGeom>
           <a:solidFill>
-            <a:srgbClr val="FFFFFF"/>
+            <a:srgbClr val="0D9488"/>
           </a:solidFill>
           <a:ln>
-            <a:solidFill>
-              <a:srgbClr val="047857"/>
-            </a:solidFill>
+            <a:noFill/>
           </a:ln>
         </p:spPr>
         <p:style>
@@ -4192,22 +4152,216 @@
           <a:lstStyle/>
           <a:p>
             <a:pPr algn="ctr"/>
-          </a:p>
-        </p:txBody>
-      </p:sp>
-      <p:sp>
-        <p:nvSpPr>
-          <p:cNvPr id="7" name="Oval 6"/>
+            <a:r>
+              <a:rPr sz="1400" b="1">
+                <a:solidFill>
+                  <a:srgbClr val="FFFFFF"/>
+                </a:solidFill>
+                <a:latin typeface="Calibri"/>
+              </a:rPr>
+              <a:t>02</a:t>
+            </a:r>
+          </a:p>
+        </p:txBody>
+      </p:sp>
+      <p:sp>
+        <p:nvSpPr>
+          <p:cNvPr id="6" name="TextBox 5"/>
+          <p:cNvSpPr txBox="1"/>
+          <p:nvPr/>
+        </p:nvSpPr>
+        <p:spPr>
+          <a:xfrm>
+            <a:off x="1051560" y="164592"/>
+            <a:ext cx="10515600" cy="640080"/>
+          </a:xfrm>
+          <a:prstGeom prst="rect">
+            <a:avLst/>
+          </a:prstGeom>
+          <a:noFill/>
+        </p:spPr>
+        <p:txBody>
+          <a:bodyPr wrap="square">
+            <a:spAutoFit/>
+          </a:bodyPr>
+          <a:lstStyle/>
+          <a:p>
+            <a:r>
+              <a:rPr sz="2200" b="1">
+                <a:solidFill>
+                  <a:srgbClr val="FFFFFF"/>
+                </a:solidFill>
+                <a:latin typeface="Calibri"/>
+              </a:rPr>
+              <a:t>实现能力路径</a:t>
+            </a:r>
+          </a:p>
+          <a:p>
+            <a:r>
+              <a:rPr sz="1100" b="0">
+                <a:solidFill>
+                  <a:srgbClr val="94A3B8"/>
+                </a:solidFill>
+                <a:latin typeface="Calibri"/>
+              </a:rPr>
+              <a:t>生成 → 落盘 → 同步 → 渲染 → 安全 → 分享</a:t>
+            </a:r>
+          </a:p>
+        </p:txBody>
+      </p:sp>
+      <p:pic>
+        <p:nvPicPr>
+          <p:cNvPr id="7" name="Picture 6" descr="ppt-capability-pipeline.png"/>
+          <p:cNvPicPr>
+            <a:picLocks noChangeAspect="1"/>
+          </p:cNvPicPr>
+          <p:nvPr/>
+        </p:nvPicPr>
+        <p:blipFill>
+          <a:blip r:embed="rId2"/>
+          <a:stretch>
+            <a:fillRect/>
+          </a:stretch>
+        </p:blipFill>
+        <p:spPr>
+          <a:xfrm>
+            <a:off x="457200" y="1097280"/>
+            <a:ext cx="11247120" cy="2331720"/>
+          </a:xfrm>
+          <a:prstGeom prst="rect">
+            <a:avLst/>
+          </a:prstGeom>
+        </p:spPr>
+      </p:pic>
+      <p:sp>
+        <p:nvSpPr>
+          <p:cNvPr id="8" name="Rounded Rectangle 7"/>
           <p:cNvSpPr/>
           <p:nvPr/>
         </p:nvSpPr>
         <p:spPr>
           <a:xfrm>
-            <a:off x="1005840" y="1463040"/>
-            <a:ext cx="502920" cy="502920"/>
-          </a:xfrm>
-          <a:prstGeom prst="ellipse">
+            <a:off x="411480" y="3611880"/>
+            <a:ext cx="1874519" cy="2331720"/>
+          </a:xfrm>
+          <a:prstGeom prst="roundRect">
+            <a:avLst>
+              <a:gd name="adj" fmla="val 8000"/>
+            </a:avLst>
+          </a:prstGeom>
+          <a:solidFill>
+            <a:srgbClr val="FFFFFF"/>
+          </a:solidFill>
+          <a:ln w="12700">
+            <a:solidFill>
+              <a:srgbClr val="047857"/>
+            </a:solidFill>
+          </a:ln>
+        </p:spPr>
+        <p:style>
+          <a:lnRef idx="1">
+            <a:schemeClr val="accent1"/>
+          </a:lnRef>
+          <a:fillRef idx="3">
+            <a:schemeClr val="accent1"/>
+          </a:fillRef>
+          <a:effectRef idx="2">
+            <a:schemeClr val="accent1"/>
+          </a:effectRef>
+          <a:fontRef idx="minor">
+            <a:schemeClr val="lt1"/>
+          </a:fontRef>
+        </p:style>
+        <p:txBody>
+          <a:bodyPr rtlCol="0" anchor="ctr"/>
+          <a:lstStyle/>
+          <a:p>
+            <a:pPr algn="ctr"/>
+          </a:p>
+        </p:txBody>
+      </p:sp>
+      <p:sp>
+        <p:nvSpPr>
+          <p:cNvPr id="9" name="TextBox 8"/>
+          <p:cNvSpPr txBox="1"/>
+          <p:nvPr/>
+        </p:nvSpPr>
+        <p:spPr>
+          <a:xfrm>
+            <a:off x="502920" y="3749039"/>
+            <a:ext cx="1691640" cy="2103120"/>
+          </a:xfrm>
+          <a:prstGeom prst="rect">
             <a:avLst/>
+          </a:prstGeom>
+          <a:noFill/>
+        </p:spPr>
+        <p:txBody>
+          <a:bodyPr wrap="square">
+            <a:spAutoFit/>
+          </a:bodyPr>
+          <a:lstStyle/>
+          <a:p>
+            <a:pPr algn="ctr"/>
+            <a:r>
+              <a:rPr sz="1300" b="1">
+                <a:solidFill>
+                  <a:srgbClr val="0F172A"/>
+                </a:solidFill>
+                <a:latin typeface="Calibri"/>
+              </a:rPr>
+              <a:t>1 生成</a:t>
+            </a:r>
+          </a:p>
+          <a:p>
+            <a:pPr algn="ctr">
+              <a:spcBef>
+                <a:spcPts val="200"/>
+              </a:spcBef>
+            </a:pPr>
+            <a:r>
+              <a:rPr sz="1000" b="0">
+                <a:solidFill>
+                  <a:srgbClr val="334155"/>
+                </a:solidFill>
+                <a:latin typeface="Calibri"/>
+              </a:rPr>
+              <a:t>LLM + Skill</a:t>
+            </a:r>
+          </a:p>
+          <a:p>
+            <a:pPr algn="ctr">
+              <a:spcBef>
+                <a:spcPts val="200"/>
+              </a:spcBef>
+            </a:pPr>
+            <a:r>
+              <a:rPr sz="1000" b="0">
+                <a:solidFill>
+                  <a:srgbClr val="334155"/>
+                </a:solidFill>
+                <a:latin typeface="Calibri"/>
+              </a:rPr>
+              <a:t>产出 HTML</a:t>
+            </a:r>
+          </a:p>
+        </p:txBody>
+      </p:sp>
+      <p:sp>
+        <p:nvSpPr>
+          <p:cNvPr id="10" name="Rounded Rectangle 9"/>
+          <p:cNvSpPr/>
+          <p:nvPr/>
+        </p:nvSpPr>
+        <p:spPr>
+          <a:xfrm>
+            <a:off x="731520" y="5440680"/>
+            <a:ext cx="1234440" cy="320040"/>
+          </a:xfrm>
+          <a:prstGeom prst="roundRect">
+            <a:avLst>
+              <a:gd name="adj" fmla="val 40000"/>
+            </a:avLst>
           </a:prstGeom>
           <a:solidFill>
             <a:srgbClr val="047857"/>
@@ -4235,122 +4389,13 @@
           <a:lstStyle/>
           <a:p>
             <a:pPr algn="ctr"/>
-          </a:p>
-        </p:txBody>
-      </p:sp>
-      <p:sp>
-        <p:nvSpPr>
-          <p:cNvPr id="8" name="TextBox 7"/>
-          <p:cNvSpPr txBox="1"/>
-          <p:nvPr/>
-        </p:nvSpPr>
-        <p:spPr>
-          <a:xfrm>
-            <a:off x="1005840" y="1536192"/>
-            <a:ext cx="502920" cy="411480"/>
-          </a:xfrm>
-          <a:prstGeom prst="rect">
-            <a:avLst/>
-          </a:prstGeom>
-          <a:noFill/>
-        </p:spPr>
-        <p:txBody>
-          <a:bodyPr wrap="square">
-            <a:spAutoFit/>
-          </a:bodyPr>
-          <a:lstStyle/>
-          <a:p>
-            <a:pPr algn="ctr"/>
-            <a:r>
-              <a:rPr sz="1400" b="1">
+            <a:r>
+              <a:rPr sz="1100" b="1">
                 <a:solidFill>
                   <a:srgbClr val="FFFFFF"/>
                 </a:solidFill>
                 <a:latin typeface="Calibri"/>
               </a:rPr>
-              <a:t>1</a:t>
-            </a:r>
-          </a:p>
-        </p:txBody>
-      </p:sp>
-      <p:sp>
-        <p:nvSpPr>
-          <p:cNvPr id="9" name="TextBox 8"/>
-          <p:cNvSpPr txBox="1"/>
-          <p:nvPr/>
-        </p:nvSpPr>
-        <p:spPr>
-          <a:xfrm>
-            <a:off x="475488" y="2148840"/>
-            <a:ext cx="1600200" cy="2560320"/>
-          </a:xfrm>
-          <a:prstGeom prst="rect">
-            <a:avLst/>
-          </a:prstGeom>
-          <a:noFill/>
-        </p:spPr>
-        <p:txBody>
-          <a:bodyPr wrap="square">
-            <a:spAutoFit/>
-          </a:bodyPr>
-          <a:lstStyle/>
-          <a:p>
-            <a:pPr algn="ctr"/>
-            <a:r>
-              <a:rPr sz="1600" b="1">
-                <a:solidFill>
-                  <a:srgbClr val="0F172A"/>
-                </a:solidFill>
-                <a:latin typeface="Calibri"/>
-              </a:rPr>
-              <a:t>生成</a:t>
-            </a:r>
-          </a:p>
-          <a:p>
-            <a:pPr algn="ctr">
-              <a:spcBef>
-                <a:spcPts val="400"/>
-              </a:spcBef>
-            </a:pPr>
-            <a:r>
-              <a:rPr sz="1100" b="0">
-                <a:solidFill>
-                  <a:srgbClr val="334155"/>
-                </a:solidFill>
-                <a:latin typeface="Calibri"/>
-              </a:rPr>
-              <a:t>LLM + Skill 取数</a:t>
-            </a:r>
-          </a:p>
-          <a:p>
-            <a:pPr algn="ctr">
-              <a:spcBef>
-                <a:spcPts val="400"/>
-              </a:spcBef>
-            </a:pPr>
-            <a:r>
-              <a:rPr sz="1100" b="0">
-                <a:solidFill>
-                  <a:srgbClr val="334155"/>
-                </a:solidFill>
-                <a:latin typeface="Calibri"/>
-              </a:rPr>
-              <a:t>产出可视化 HTML</a:t>
-            </a:r>
-          </a:p>
-          <a:p>
-            <a:pPr algn="ctr">
-              <a:spcBef>
-                <a:spcPts val="1400"/>
-              </a:spcBef>
-            </a:pPr>
-            <a:r>
-              <a:rPr sz="1300" b="1">
-                <a:solidFill>
-                  <a:srgbClr val="047857"/>
-                </a:solidFill>
-                <a:latin typeface="Calibri"/>
-              </a:rPr>
               <a:t>已有</a:t>
             </a:r>
           </a:p>
@@ -4358,14 +4403,14 @@
       </p:sp>
       <p:sp>
         <p:nvSpPr>
-          <p:cNvPr id="10" name="Rounded Rectangle 9"/>
+          <p:cNvPr id="11" name="Rounded Rectangle 10"/>
           <p:cNvSpPr/>
           <p:nvPr/>
         </p:nvSpPr>
         <p:spPr>
           <a:xfrm>
-            <a:off x="2331720" y="1280160"/>
-            <a:ext cx="1828800" cy="3657600"/>
+            <a:off x="2377440" y="3611880"/>
+            <a:ext cx="1874519" cy="2331720"/>
           </a:xfrm>
           <a:prstGeom prst="roundRect">
             <a:avLst>
@@ -4375,7 +4420,7 @@
           <a:solidFill>
             <a:srgbClr val="FFFFFF"/>
           </a:solidFill>
-          <a:ln>
+          <a:ln w="12700">
             <a:solidFill>
               <a:srgbClr val="047857"/>
             </a:solidFill>
@@ -4405,17 +4450,86 @@
       </p:sp>
       <p:sp>
         <p:nvSpPr>
-          <p:cNvPr id="11" name="Oval 10"/>
+          <p:cNvPr id="12" name="TextBox 11"/>
+          <p:cNvSpPr txBox="1"/>
+          <p:nvPr/>
+        </p:nvSpPr>
+        <p:spPr>
+          <a:xfrm>
+            <a:off x="2468880" y="3749039"/>
+            <a:ext cx="1691640" cy="2103120"/>
+          </a:xfrm>
+          <a:prstGeom prst="rect">
+            <a:avLst/>
+          </a:prstGeom>
+          <a:noFill/>
+        </p:spPr>
+        <p:txBody>
+          <a:bodyPr wrap="square">
+            <a:spAutoFit/>
+          </a:bodyPr>
+          <a:lstStyle/>
+          <a:p>
+            <a:pPr algn="ctr"/>
+            <a:r>
+              <a:rPr sz="1300" b="1">
+                <a:solidFill>
+                  <a:srgbClr val="0F172A"/>
+                </a:solidFill>
+                <a:latin typeface="Calibri"/>
+              </a:rPr>
+              <a:t>2 落盘</a:t>
+            </a:r>
+          </a:p>
+          <a:p>
+            <a:pPr algn="ctr">
+              <a:spcBef>
+                <a:spcPts val="200"/>
+              </a:spcBef>
+            </a:pPr>
+            <a:r>
+              <a:rPr sz="1000" b="0">
+                <a:solidFill>
+                  <a:srgbClr val="334155"/>
+                </a:solidFill>
+                <a:latin typeface="Calibri"/>
+              </a:rPr>
+              <a:t>write</a:t>
+            </a:r>
+          </a:p>
+          <a:p>
+            <a:pPr algn="ctr">
+              <a:spcBef>
+                <a:spcPts val="200"/>
+              </a:spcBef>
+            </a:pPr>
+            <a:r>
+              <a:rPr sz="1000" b="0">
+                <a:solidFill>
+                  <a:srgbClr val="334155"/>
+                </a:solidFill>
+                <a:latin typeface="Calibri"/>
+              </a:rPr>
+              <a:t>workspace</a:t>
+            </a:r>
+          </a:p>
+        </p:txBody>
+      </p:sp>
+      <p:sp>
+        <p:nvSpPr>
+          <p:cNvPr id="13" name="Rounded Rectangle 12"/>
           <p:cNvSpPr/>
           <p:nvPr/>
         </p:nvSpPr>
         <p:spPr>
           <a:xfrm>
-            <a:off x="2971800" y="1463040"/>
-            <a:ext cx="502920" cy="502920"/>
-          </a:xfrm>
-          <a:prstGeom prst="ellipse">
-            <a:avLst/>
+            <a:off x="2697480" y="5440680"/>
+            <a:ext cx="1234440" cy="320040"/>
+          </a:xfrm>
+          <a:prstGeom prst="roundRect">
+            <a:avLst>
+              <a:gd name="adj" fmla="val 40000"/>
+            </a:avLst>
           </a:prstGeom>
           <a:solidFill>
             <a:srgbClr val="047857"/>
@@ -4443,119 +4557,10 @@
           <a:lstStyle/>
           <a:p>
             <a:pPr algn="ctr"/>
-          </a:p>
-        </p:txBody>
-      </p:sp>
-      <p:sp>
-        <p:nvSpPr>
-          <p:cNvPr id="12" name="TextBox 11"/>
-          <p:cNvSpPr txBox="1"/>
-          <p:nvPr/>
-        </p:nvSpPr>
-        <p:spPr>
-          <a:xfrm>
-            <a:off x="2971800" y="1536192"/>
-            <a:ext cx="502920" cy="411480"/>
-          </a:xfrm>
-          <a:prstGeom prst="rect">
-            <a:avLst/>
-          </a:prstGeom>
-          <a:noFill/>
-        </p:spPr>
-        <p:txBody>
-          <a:bodyPr wrap="square">
-            <a:spAutoFit/>
-          </a:bodyPr>
-          <a:lstStyle/>
-          <a:p>
-            <a:pPr algn="ctr"/>
-            <a:r>
-              <a:rPr sz="1400" b="1">
+            <a:r>
+              <a:rPr sz="1100" b="1">
                 <a:solidFill>
                   <a:srgbClr val="FFFFFF"/>
-                </a:solidFill>
-                <a:latin typeface="Calibri"/>
-              </a:rPr>
-              <a:t>2</a:t>
-            </a:r>
-          </a:p>
-        </p:txBody>
-      </p:sp>
-      <p:sp>
-        <p:nvSpPr>
-          <p:cNvPr id="13" name="TextBox 12"/>
-          <p:cNvSpPr txBox="1"/>
-          <p:nvPr/>
-        </p:nvSpPr>
-        <p:spPr>
-          <a:xfrm>
-            <a:off x="2441448" y="2148840"/>
-            <a:ext cx="1600200" cy="2560320"/>
-          </a:xfrm>
-          <a:prstGeom prst="rect">
-            <a:avLst/>
-          </a:prstGeom>
-          <a:noFill/>
-        </p:spPr>
-        <p:txBody>
-          <a:bodyPr wrap="square">
-            <a:spAutoFit/>
-          </a:bodyPr>
-          <a:lstStyle/>
-          <a:p>
-            <a:pPr algn="ctr"/>
-            <a:r>
-              <a:rPr sz="1600" b="1">
-                <a:solidFill>
-                  <a:srgbClr val="0F172A"/>
-                </a:solidFill>
-                <a:latin typeface="Calibri"/>
-              </a:rPr>
-              <a:t>落盘</a:t>
-            </a:r>
-          </a:p>
-          <a:p>
-            <a:pPr algn="ctr">
-              <a:spcBef>
-                <a:spcPts val="400"/>
-              </a:spcBef>
-            </a:pPr>
-            <a:r>
-              <a:rPr sz="1100" b="0">
-                <a:solidFill>
-                  <a:srgbClr val="334155"/>
-                </a:solidFill>
-                <a:latin typeface="Calibri"/>
-              </a:rPr>
-              <a:t>write 写入</a:t>
-            </a:r>
-          </a:p>
-          <a:p>
-            <a:pPr algn="ctr">
-              <a:spcBef>
-                <a:spcPts val="400"/>
-              </a:spcBef>
-            </a:pPr>
-            <a:r>
-              <a:rPr sz="1100" b="0">
-                <a:solidFill>
-                  <a:srgbClr val="334155"/>
-                </a:solidFill>
-                <a:latin typeface="Calibri"/>
-              </a:rPr>
-              <a:t>workspace</a:t>
-            </a:r>
-          </a:p>
-          <a:p>
-            <a:pPr algn="ctr">
-              <a:spcBef>
-                <a:spcPts val="1400"/>
-              </a:spcBef>
-            </a:pPr>
-            <a:r>
-              <a:rPr sz="1300" b="1">
-                <a:solidFill>
-                  <a:srgbClr val="047857"/>
                 </a:solidFill>
                 <a:latin typeface="Calibri"/>
               </a:rPr>
@@ -4572,8 +4577,8 @@
         </p:nvSpPr>
         <p:spPr>
           <a:xfrm>
-            <a:off x="4297680" y="1280160"/>
-            <a:ext cx="1828800" cy="3657600"/>
+            <a:off x="4343400" y="3611880"/>
+            <a:ext cx="1874519" cy="2331720"/>
           </a:xfrm>
           <a:prstGeom prst="roundRect">
             <a:avLst>
@@ -4583,7 +4588,7 @@
           <a:solidFill>
             <a:srgbClr val="FFFFFF"/>
           </a:solidFill>
-          <a:ln>
+          <a:ln w="12700">
             <a:solidFill>
               <a:srgbClr val="047857"/>
             </a:solidFill>
@@ -4613,17 +4618,86 @@
       </p:sp>
       <p:sp>
         <p:nvSpPr>
-          <p:cNvPr id="15" name="Oval 14"/>
+          <p:cNvPr id="15" name="TextBox 14"/>
+          <p:cNvSpPr txBox="1"/>
+          <p:nvPr/>
+        </p:nvSpPr>
+        <p:spPr>
+          <a:xfrm>
+            <a:off x="4434840" y="3749039"/>
+            <a:ext cx="1691640" cy="2103120"/>
+          </a:xfrm>
+          <a:prstGeom prst="rect">
+            <a:avLst/>
+          </a:prstGeom>
+          <a:noFill/>
+        </p:spPr>
+        <p:txBody>
+          <a:bodyPr wrap="square">
+            <a:spAutoFit/>
+          </a:bodyPr>
+          <a:lstStyle/>
+          <a:p>
+            <a:pPr algn="ctr"/>
+            <a:r>
+              <a:rPr sz="1300" b="1">
+                <a:solidFill>
+                  <a:srgbClr val="0F172A"/>
+                </a:solidFill>
+                <a:latin typeface="Calibri"/>
+              </a:rPr>
+              <a:t>3 同步</a:t>
+            </a:r>
+          </a:p>
+          <a:p>
+            <a:pPr algn="ctr">
+              <a:spcBef>
+                <a:spcPts val="200"/>
+              </a:spcBef>
+            </a:pPr>
+            <a:r>
+              <a:rPr sz="1000" b="0">
+                <a:solidFill>
+                  <a:srgbClr val="334155"/>
+                </a:solidFill>
+                <a:latin typeface="Calibri"/>
+              </a:rPr>
+              <a:t>华为云空间</a:t>
+            </a:r>
+          </a:p>
+          <a:p>
+            <a:pPr algn="ctr">
+              <a:spcBef>
+                <a:spcPts val="200"/>
+              </a:spcBef>
+            </a:pPr>
+            <a:r>
+              <a:rPr sz="1000" b="0">
+                <a:solidFill>
+                  <a:srgbClr val="334155"/>
+                </a:solidFill>
+                <a:latin typeface="Calibri"/>
+              </a:rPr>
+              <a:t>REST 可下</a:t>
+            </a:r>
+          </a:p>
+        </p:txBody>
+      </p:sp>
+      <p:sp>
+        <p:nvSpPr>
+          <p:cNvPr id="16" name="Rounded Rectangle 15"/>
           <p:cNvSpPr/>
           <p:nvPr/>
         </p:nvSpPr>
         <p:spPr>
           <a:xfrm>
-            <a:off x="4937760" y="1463040"/>
-            <a:ext cx="502920" cy="502920"/>
-          </a:xfrm>
-          <a:prstGeom prst="ellipse">
-            <a:avLst/>
+            <a:off x="4663440" y="5440680"/>
+            <a:ext cx="1234440" cy="320040"/>
+          </a:xfrm>
+          <a:prstGeom prst="roundRect">
+            <a:avLst>
+              <a:gd name="adj" fmla="val 40000"/>
+            </a:avLst>
           </a:prstGeom>
           <a:solidFill>
             <a:srgbClr val="047857"/>
@@ -4651,122 +4725,13 @@
           <a:lstStyle/>
           <a:p>
             <a:pPr algn="ctr"/>
-          </a:p>
-        </p:txBody>
-      </p:sp>
-      <p:sp>
-        <p:nvSpPr>
-          <p:cNvPr id="16" name="TextBox 15"/>
-          <p:cNvSpPr txBox="1"/>
-          <p:nvPr/>
-        </p:nvSpPr>
-        <p:spPr>
-          <a:xfrm>
-            <a:off x="4937760" y="1536192"/>
-            <a:ext cx="502920" cy="411480"/>
-          </a:xfrm>
-          <a:prstGeom prst="rect">
-            <a:avLst/>
-          </a:prstGeom>
-          <a:noFill/>
-        </p:spPr>
-        <p:txBody>
-          <a:bodyPr wrap="square">
-            <a:spAutoFit/>
-          </a:bodyPr>
-          <a:lstStyle/>
-          <a:p>
-            <a:pPr algn="ctr"/>
-            <a:r>
-              <a:rPr sz="1400" b="1">
+            <a:r>
+              <a:rPr sz="1100" b="1">
                 <a:solidFill>
                   <a:srgbClr val="FFFFFF"/>
                 </a:solidFill>
                 <a:latin typeface="Calibri"/>
               </a:rPr>
-              <a:t>3</a:t>
-            </a:r>
-          </a:p>
-        </p:txBody>
-      </p:sp>
-      <p:sp>
-        <p:nvSpPr>
-          <p:cNvPr id="17" name="TextBox 16"/>
-          <p:cNvSpPr txBox="1"/>
-          <p:nvPr/>
-        </p:nvSpPr>
-        <p:spPr>
-          <a:xfrm>
-            <a:off x="4407408" y="2148840"/>
-            <a:ext cx="1600200" cy="2560320"/>
-          </a:xfrm>
-          <a:prstGeom prst="rect">
-            <a:avLst/>
-          </a:prstGeom>
-          <a:noFill/>
-        </p:spPr>
-        <p:txBody>
-          <a:bodyPr wrap="square">
-            <a:spAutoFit/>
-          </a:bodyPr>
-          <a:lstStyle/>
-          <a:p>
-            <a:pPr algn="ctr"/>
-            <a:r>
-              <a:rPr sz="1600" b="1">
-                <a:solidFill>
-                  <a:srgbClr val="0F172A"/>
-                </a:solidFill>
-                <a:latin typeface="Calibri"/>
-              </a:rPr>
-              <a:t>同步</a:t>
-            </a:r>
-          </a:p>
-          <a:p>
-            <a:pPr algn="ctr">
-              <a:spcBef>
-                <a:spcPts val="400"/>
-              </a:spcBef>
-            </a:pPr>
-            <a:r>
-              <a:rPr sz="1100" b="0">
-                <a:solidFill>
-                  <a:srgbClr val="334155"/>
-                </a:solidFill>
-                <a:latin typeface="Calibri"/>
-              </a:rPr>
-              <a:t>workspace →</a:t>
-            </a:r>
-          </a:p>
-          <a:p>
-            <a:pPr algn="ctr">
-              <a:spcBef>
-                <a:spcPts val="400"/>
-              </a:spcBef>
-            </a:pPr>
-            <a:r>
-              <a:rPr sz="1100" b="0">
-                <a:solidFill>
-                  <a:srgbClr val="334155"/>
-                </a:solidFill>
-                <a:latin typeface="Calibri"/>
-              </a:rPr>
-              <a:t>华为云空间</a:t>
-            </a:r>
-          </a:p>
-          <a:p>
-            <a:pPr algn="ctr">
-              <a:spcBef>
-                <a:spcPts val="1400"/>
-              </a:spcBef>
-            </a:pPr>
-            <a:r>
-              <a:rPr sz="1300" b="1">
-                <a:solidFill>
-                  <a:srgbClr val="047857"/>
-                </a:solidFill>
-                <a:latin typeface="Calibri"/>
-              </a:rPr>
               <a:t>已有</a:t>
             </a:r>
           </a:p>
@@ -4774,14 +4739,14 @@
       </p:sp>
       <p:sp>
         <p:nvSpPr>
-          <p:cNvPr id="18" name="Rounded Rectangle 17"/>
+          <p:cNvPr id="17" name="Rounded Rectangle 16"/>
           <p:cNvSpPr/>
           <p:nvPr/>
         </p:nvSpPr>
         <p:spPr>
           <a:xfrm>
-            <a:off x="6263639" y="1280160"/>
-            <a:ext cx="1828800" cy="3657600"/>
+            <a:off x="6309359" y="3611880"/>
+            <a:ext cx="1874519" cy="2331720"/>
           </a:xfrm>
           <a:prstGeom prst="roundRect">
             <a:avLst>
@@ -4791,7 +4756,7 @@
           <a:solidFill>
             <a:srgbClr val="FFFBEB"/>
           </a:solidFill>
-          <a:ln>
+          <a:ln w="12700">
             <a:solidFill>
               <a:srgbClr val="B45309"/>
             </a:solidFill>
@@ -4821,17 +4786,86 @@
       </p:sp>
       <p:sp>
         <p:nvSpPr>
-          <p:cNvPr id="19" name="Oval 18"/>
+          <p:cNvPr id="18" name="TextBox 17"/>
+          <p:cNvSpPr txBox="1"/>
+          <p:nvPr/>
+        </p:nvSpPr>
+        <p:spPr>
+          <a:xfrm>
+            <a:off x="6400799" y="3749039"/>
+            <a:ext cx="1691640" cy="2103120"/>
+          </a:xfrm>
+          <a:prstGeom prst="rect">
+            <a:avLst/>
+          </a:prstGeom>
+          <a:noFill/>
+        </p:spPr>
+        <p:txBody>
+          <a:bodyPr wrap="square">
+            <a:spAutoFit/>
+          </a:bodyPr>
+          <a:lstStyle/>
+          <a:p>
+            <a:pPr algn="ctr"/>
+            <a:r>
+              <a:rPr sz="1300" b="1">
+                <a:solidFill>
+                  <a:srgbClr val="0F172A"/>
+                </a:solidFill>
+                <a:latin typeface="Calibri"/>
+              </a:rPr>
+              <a:t>4 渲染</a:t>
+            </a:r>
+          </a:p>
+          <a:p>
+            <a:pPr algn="ctr">
+              <a:spcBef>
+                <a:spcPts val="200"/>
+              </a:spcBef>
+            </a:pPr>
+            <a:r>
+              <a:rPr sz="1000" b="0">
+                <a:solidFill>
+                  <a:srgbClr val="334155"/>
+                </a:solidFill>
+                <a:latin typeface="Calibri"/>
+              </a:rPr>
+              <a:t>iframe /</a:t>
+            </a:r>
+          </a:p>
+          <a:p>
+            <a:pPr algn="ctr">
+              <a:spcBef>
+                <a:spcPts val="200"/>
+              </a:spcBef>
+            </a:pPr>
+            <a:r>
+              <a:rPr sz="1000" b="0">
+                <a:solidFill>
+                  <a:srgbClr val="334155"/>
+                </a:solidFill>
+                <a:latin typeface="Calibri"/>
+              </a:rPr>
+              <a:t>WebView</a:t>
+            </a:r>
+          </a:p>
+        </p:txBody>
+      </p:sp>
+      <p:sp>
+        <p:nvSpPr>
+          <p:cNvPr id="19" name="Rounded Rectangle 18"/>
           <p:cNvSpPr/>
           <p:nvPr/>
         </p:nvSpPr>
         <p:spPr>
           <a:xfrm>
-            <a:off x="6903719" y="1463040"/>
-            <a:ext cx="502920" cy="502920"/>
-          </a:xfrm>
-          <a:prstGeom prst="ellipse">
-            <a:avLst/>
+            <a:off x="6629399" y="5440680"/>
+            <a:ext cx="1234440" cy="320040"/>
+          </a:xfrm>
+          <a:prstGeom prst="roundRect">
+            <a:avLst>
+              <a:gd name="adj" fmla="val 40000"/>
+            </a:avLst>
           </a:prstGeom>
           <a:solidFill>
             <a:srgbClr val="B45309"/>
@@ -4859,122 +4893,13 @@
           <a:lstStyle/>
           <a:p>
             <a:pPr algn="ctr"/>
-          </a:p>
-        </p:txBody>
-      </p:sp>
-      <p:sp>
-        <p:nvSpPr>
-          <p:cNvPr id="20" name="TextBox 19"/>
-          <p:cNvSpPr txBox="1"/>
-          <p:nvPr/>
-        </p:nvSpPr>
-        <p:spPr>
-          <a:xfrm>
-            <a:off x="6903719" y="1536192"/>
-            <a:ext cx="502920" cy="411480"/>
-          </a:xfrm>
-          <a:prstGeom prst="rect">
-            <a:avLst/>
-          </a:prstGeom>
-          <a:noFill/>
-        </p:spPr>
-        <p:txBody>
-          <a:bodyPr wrap="square">
-            <a:spAutoFit/>
-          </a:bodyPr>
-          <a:lstStyle/>
-          <a:p>
-            <a:pPr algn="ctr"/>
-            <a:r>
-              <a:rPr sz="1400" b="1">
+            <a:r>
+              <a:rPr sz="1100" b="1">
                 <a:solidFill>
                   <a:srgbClr val="FFFFFF"/>
                 </a:solidFill>
                 <a:latin typeface="Calibri"/>
               </a:rPr>
-              <a:t>4</a:t>
-            </a:r>
-          </a:p>
-        </p:txBody>
-      </p:sp>
-      <p:sp>
-        <p:nvSpPr>
-          <p:cNvPr id="21" name="TextBox 20"/>
-          <p:cNvSpPr txBox="1"/>
-          <p:nvPr/>
-        </p:nvSpPr>
-        <p:spPr>
-          <a:xfrm>
-            <a:off x="6373367" y="2148840"/>
-            <a:ext cx="1600200" cy="2560320"/>
-          </a:xfrm>
-          <a:prstGeom prst="rect">
-            <a:avLst/>
-          </a:prstGeom>
-          <a:noFill/>
-        </p:spPr>
-        <p:txBody>
-          <a:bodyPr wrap="square">
-            <a:spAutoFit/>
-          </a:bodyPr>
-          <a:lstStyle/>
-          <a:p>
-            <a:pPr algn="ctr"/>
-            <a:r>
-              <a:rPr sz="1600" b="1">
-                <a:solidFill>
-                  <a:srgbClr val="0F172A"/>
-                </a:solidFill>
-                <a:latin typeface="Calibri"/>
-              </a:rPr>
-              <a:t>渲染</a:t>
-            </a:r>
-          </a:p>
-          <a:p>
-            <a:pPr algn="ctr">
-              <a:spcBef>
-                <a:spcPts val="400"/>
-              </a:spcBef>
-            </a:pPr>
-            <a:r>
-              <a:rPr sz="1100" b="0">
-                <a:solidFill>
-                  <a:srgbClr val="334155"/>
-                </a:solidFill>
-                <a:latin typeface="Calibri"/>
-              </a:rPr>
-              <a:t>iframe / WebView</a:t>
-            </a:r>
-          </a:p>
-          <a:p>
-            <a:pPr algn="ctr">
-              <a:spcBef>
-                <a:spcPts val="400"/>
-              </a:spcBef>
-            </a:pPr>
-            <a:r>
-              <a:rPr sz="1100" b="0">
-                <a:solidFill>
-                  <a:srgbClr val="334155"/>
-                </a:solidFill>
-                <a:latin typeface="Calibri"/>
-              </a:rPr>
-              <a:t>会话内展示</a:t>
-            </a:r>
-          </a:p>
-          <a:p>
-            <a:pPr algn="ctr">
-              <a:spcBef>
-                <a:spcPts val="1400"/>
-              </a:spcBef>
-            </a:pPr>
-            <a:r>
-              <a:rPr sz="1300" b="1">
-                <a:solidFill>
-                  <a:srgbClr val="B45309"/>
-                </a:solidFill>
-                <a:latin typeface="Calibri"/>
-              </a:rPr>
               <a:t>缺口</a:t>
             </a:r>
           </a:p>
@@ -4982,14 +4907,14 @@
       </p:sp>
       <p:sp>
         <p:nvSpPr>
-          <p:cNvPr id="22" name="Rounded Rectangle 21"/>
+          <p:cNvPr id="20" name="Rounded Rectangle 19"/>
           <p:cNvSpPr/>
           <p:nvPr/>
         </p:nvSpPr>
         <p:spPr>
           <a:xfrm>
-            <a:off x="8229600" y="1280160"/>
-            <a:ext cx="1828800" cy="3657600"/>
+            <a:off x="8275320" y="3611880"/>
+            <a:ext cx="1874519" cy="2331720"/>
           </a:xfrm>
           <a:prstGeom prst="roundRect">
             <a:avLst>
@@ -4999,7 +4924,7 @@
           <a:solidFill>
             <a:srgbClr val="FFFBEB"/>
           </a:solidFill>
-          <a:ln>
+          <a:ln w="12700">
             <a:solidFill>
               <a:srgbClr val="B45309"/>
             </a:solidFill>
@@ -5029,17 +4954,86 @@
       </p:sp>
       <p:sp>
         <p:nvSpPr>
-          <p:cNvPr id="23" name="Oval 22"/>
+          <p:cNvPr id="21" name="TextBox 20"/>
+          <p:cNvSpPr txBox="1"/>
+          <p:nvPr/>
+        </p:nvSpPr>
+        <p:spPr>
+          <a:xfrm>
+            <a:off x="8366760" y="3749039"/>
+            <a:ext cx="1691640" cy="2103120"/>
+          </a:xfrm>
+          <a:prstGeom prst="rect">
+            <a:avLst/>
+          </a:prstGeom>
+          <a:noFill/>
+        </p:spPr>
+        <p:txBody>
+          <a:bodyPr wrap="square">
+            <a:spAutoFit/>
+          </a:bodyPr>
+          <a:lstStyle/>
+          <a:p>
+            <a:pPr algn="ctr"/>
+            <a:r>
+              <a:rPr sz="1300" b="1">
+                <a:solidFill>
+                  <a:srgbClr val="0F172A"/>
+                </a:solidFill>
+                <a:latin typeface="Calibri"/>
+              </a:rPr>
+              <a:t>5 安全</a:t>
+            </a:r>
+          </a:p>
+          <a:p>
+            <a:pPr algn="ctr">
+              <a:spcBef>
+                <a:spcPts val="200"/>
+              </a:spcBef>
+            </a:pPr>
+            <a:r>
+              <a:rPr sz="1000" b="0">
+                <a:solidFill>
+                  <a:srgbClr val="334155"/>
+                </a:solidFill>
+                <a:latin typeface="Calibri"/>
+              </a:rPr>
+              <a:t>sandbox</a:t>
+            </a:r>
+          </a:p>
+          <a:p>
+            <a:pPr algn="ctr">
+              <a:spcBef>
+                <a:spcPts val="200"/>
+              </a:spcBef>
+            </a:pPr>
+            <a:r>
+              <a:rPr sz="1000" b="0">
+                <a:solidFill>
+                  <a:srgbClr val="334155"/>
+                </a:solidFill>
+                <a:latin typeface="Calibri"/>
+              </a:rPr>
+              <a:t>CSP 隔离</a:t>
+            </a:r>
+          </a:p>
+        </p:txBody>
+      </p:sp>
+      <p:sp>
+        <p:nvSpPr>
+          <p:cNvPr id="22" name="Rounded Rectangle 21"/>
           <p:cNvSpPr/>
           <p:nvPr/>
         </p:nvSpPr>
         <p:spPr>
           <a:xfrm>
-            <a:off x="8869680" y="1463040"/>
-            <a:ext cx="502920" cy="502920"/>
-          </a:xfrm>
-          <a:prstGeom prst="ellipse">
-            <a:avLst/>
+            <a:off x="8595360" y="5440680"/>
+            <a:ext cx="1234440" cy="320040"/>
+          </a:xfrm>
+          <a:prstGeom prst="roundRect">
+            <a:avLst>
+              <a:gd name="adj" fmla="val 40000"/>
+            </a:avLst>
           </a:prstGeom>
           <a:solidFill>
             <a:srgbClr val="B45309"/>
@@ -5067,122 +5061,13 @@
           <a:lstStyle/>
           <a:p>
             <a:pPr algn="ctr"/>
-          </a:p>
-        </p:txBody>
-      </p:sp>
-      <p:sp>
-        <p:nvSpPr>
-          <p:cNvPr id="24" name="TextBox 23"/>
-          <p:cNvSpPr txBox="1"/>
-          <p:nvPr/>
-        </p:nvSpPr>
-        <p:spPr>
-          <a:xfrm>
-            <a:off x="8869680" y="1536192"/>
-            <a:ext cx="502920" cy="411480"/>
-          </a:xfrm>
-          <a:prstGeom prst="rect">
-            <a:avLst/>
-          </a:prstGeom>
-          <a:noFill/>
-        </p:spPr>
-        <p:txBody>
-          <a:bodyPr wrap="square">
-            <a:spAutoFit/>
-          </a:bodyPr>
-          <a:lstStyle/>
-          <a:p>
-            <a:pPr algn="ctr"/>
-            <a:r>
-              <a:rPr sz="1400" b="1">
+            <a:r>
+              <a:rPr sz="1100" b="1">
                 <a:solidFill>
                   <a:srgbClr val="FFFFFF"/>
                 </a:solidFill>
                 <a:latin typeface="Calibri"/>
               </a:rPr>
-              <a:t>5</a:t>
-            </a:r>
-          </a:p>
-        </p:txBody>
-      </p:sp>
-      <p:sp>
-        <p:nvSpPr>
-          <p:cNvPr id="25" name="TextBox 24"/>
-          <p:cNvSpPr txBox="1"/>
-          <p:nvPr/>
-        </p:nvSpPr>
-        <p:spPr>
-          <a:xfrm>
-            <a:off x="8339328" y="2148840"/>
-            <a:ext cx="1600200" cy="2560320"/>
-          </a:xfrm>
-          <a:prstGeom prst="rect">
-            <a:avLst/>
-          </a:prstGeom>
-          <a:noFill/>
-        </p:spPr>
-        <p:txBody>
-          <a:bodyPr wrap="square">
-            <a:spAutoFit/>
-          </a:bodyPr>
-          <a:lstStyle/>
-          <a:p>
-            <a:pPr algn="ctr"/>
-            <a:r>
-              <a:rPr sz="1600" b="1">
-                <a:solidFill>
-                  <a:srgbClr val="0F172A"/>
-                </a:solidFill>
-                <a:latin typeface="Calibri"/>
-              </a:rPr>
-              <a:t>安全</a:t>
-            </a:r>
-          </a:p>
-          <a:p>
-            <a:pPr algn="ctr">
-              <a:spcBef>
-                <a:spcPts val="400"/>
-              </a:spcBef>
-            </a:pPr>
-            <a:r>
-              <a:rPr sz="1100" b="0">
-                <a:solidFill>
-                  <a:srgbClr val="334155"/>
-                </a:solidFill>
-                <a:latin typeface="Calibri"/>
-              </a:rPr>
-              <a:t>sandbox / CSP</a:t>
-            </a:r>
-          </a:p>
-          <a:p>
-            <a:pPr algn="ctr">
-              <a:spcBef>
-                <a:spcPts val="400"/>
-              </a:spcBef>
-            </a:pPr>
-            <a:r>
-              <a:rPr sz="1100" b="0">
-                <a:solidFill>
-                  <a:srgbClr val="334155"/>
-                </a:solidFill>
-                <a:latin typeface="Calibri"/>
-              </a:rPr>
-              <a:t>不可信隔离</a:t>
-            </a:r>
-          </a:p>
-          <a:p>
-            <a:pPr algn="ctr">
-              <a:spcBef>
-                <a:spcPts val="1400"/>
-              </a:spcBef>
-            </a:pPr>
-            <a:r>
-              <a:rPr sz="1300" b="1">
-                <a:solidFill>
-                  <a:srgbClr val="B45309"/>
-                </a:solidFill>
-                <a:latin typeface="Calibri"/>
-              </a:rPr>
               <a:t>缺口</a:t>
             </a:r>
           </a:p>
@@ -5190,14 +5075,14 @@
       </p:sp>
       <p:sp>
         <p:nvSpPr>
-          <p:cNvPr id="26" name="Rounded Rectangle 25"/>
+          <p:cNvPr id="23" name="Rounded Rectangle 22"/>
           <p:cNvSpPr/>
           <p:nvPr/>
         </p:nvSpPr>
         <p:spPr>
           <a:xfrm>
-            <a:off x="10195560" y="1280160"/>
-            <a:ext cx="1828800" cy="3657600"/>
+            <a:off x="10241280" y="3611880"/>
+            <a:ext cx="1874519" cy="2331720"/>
           </a:xfrm>
           <a:prstGeom prst="roundRect">
             <a:avLst>
@@ -5207,7 +5092,7 @@
           <a:solidFill>
             <a:srgbClr val="FFFFFF"/>
           </a:solidFill>
-          <a:ln>
+          <a:ln w="12700">
             <a:solidFill>
               <a:srgbClr val="64748B"/>
             </a:solidFill>
@@ -5237,17 +5122,86 @@
       </p:sp>
       <p:sp>
         <p:nvSpPr>
-          <p:cNvPr id="27" name="Oval 26"/>
+          <p:cNvPr id="24" name="TextBox 23"/>
+          <p:cNvSpPr txBox="1"/>
+          <p:nvPr/>
+        </p:nvSpPr>
+        <p:spPr>
+          <a:xfrm>
+            <a:off x="10332720" y="3749039"/>
+            <a:ext cx="1691640" cy="2103120"/>
+          </a:xfrm>
+          <a:prstGeom prst="rect">
+            <a:avLst/>
+          </a:prstGeom>
+          <a:noFill/>
+        </p:spPr>
+        <p:txBody>
+          <a:bodyPr wrap="square">
+            <a:spAutoFit/>
+          </a:bodyPr>
+          <a:lstStyle/>
+          <a:p>
+            <a:pPr algn="ctr"/>
+            <a:r>
+              <a:rPr sz="1300" b="1">
+                <a:solidFill>
+                  <a:srgbClr val="0F172A"/>
+                </a:solidFill>
+                <a:latin typeface="Calibri"/>
+              </a:rPr>
+              <a:t>6 分享</a:t>
+            </a:r>
+          </a:p>
+          <a:p>
+            <a:pPr algn="ctr">
+              <a:spcBef>
+                <a:spcPts val="200"/>
+              </a:spcBef>
+            </a:pPr>
+            <a:r>
+              <a:rPr sz="1000" b="0">
+                <a:solidFill>
+                  <a:srgbClr val="334155"/>
+                </a:solidFill>
+                <a:latin typeface="Calibri"/>
+              </a:rPr>
+              <a:t>链接/回放</a:t>
+            </a:r>
+          </a:p>
+          <a:p>
+            <a:pPr algn="ctr">
+              <a:spcBef>
+                <a:spcPts val="200"/>
+              </a:spcBef>
+            </a:pPr>
+            <a:r>
+              <a:rPr sz="1000" b="0">
+                <a:solidFill>
+                  <a:srgbClr val="334155"/>
+                </a:solidFill>
+                <a:latin typeface="Calibri"/>
+              </a:rPr>
+              <a:t>转发</a:t>
+            </a:r>
+          </a:p>
+        </p:txBody>
+      </p:sp>
+      <p:sp>
+        <p:nvSpPr>
+          <p:cNvPr id="25" name="Rounded Rectangle 24"/>
           <p:cNvSpPr/>
           <p:nvPr/>
         </p:nvSpPr>
         <p:spPr>
           <a:xfrm>
-            <a:off x="10835640" y="1463040"/>
-            <a:ext cx="502920" cy="502920"/>
-          </a:xfrm>
-          <a:prstGeom prst="ellipse">
-            <a:avLst/>
+            <a:off x="10561320" y="5440680"/>
+            <a:ext cx="1234440" cy="320040"/>
+          </a:xfrm>
+          <a:prstGeom prst="roundRect">
+            <a:avLst>
+              <a:gd name="adj" fmla="val 40000"/>
+            </a:avLst>
           </a:prstGeom>
           <a:solidFill>
             <a:srgbClr val="64748B"/>
@@ -5275,19 +5229,28 @@
           <a:lstStyle/>
           <a:p>
             <a:pPr algn="ctr"/>
-          </a:p>
-        </p:txBody>
-      </p:sp>
-      <p:sp>
-        <p:nvSpPr>
-          <p:cNvPr id="28" name="TextBox 27"/>
+            <a:r>
+              <a:rPr sz="1100" b="1">
+                <a:solidFill>
+                  <a:srgbClr val="FFFFFF"/>
+                </a:solidFill>
+                <a:latin typeface="Calibri"/>
+              </a:rPr>
+              <a:t>可选</a:t>
+            </a:r>
+          </a:p>
+        </p:txBody>
+      </p:sp>
+      <p:sp>
+        <p:nvSpPr>
+          <p:cNvPr id="26" name="TextBox 25"/>
           <p:cNvSpPr txBox="1"/>
           <p:nvPr/>
         </p:nvSpPr>
         <p:spPr>
           <a:xfrm>
-            <a:off x="10835640" y="1536192"/>
-            <a:ext cx="502920" cy="411480"/>
+            <a:off x="457200" y="6126480"/>
+            <a:ext cx="11247120" cy="502920"/>
           </a:xfrm>
           <a:prstGeom prst="rect">
             <a:avLst/>
@@ -5300,148 +5263,14 @@
           </a:bodyPr>
           <a:lstStyle/>
           <a:p>
-            <a:pPr algn="ctr"/>
-            <a:r>
-              <a:rPr sz="1400" b="1">
-                <a:solidFill>
-                  <a:srgbClr val="FFFFFF"/>
-                </a:solidFill>
-                <a:latin typeface="Calibri"/>
-              </a:rPr>
-              <a:t>6</a:t>
-            </a:r>
-          </a:p>
-        </p:txBody>
-      </p:sp>
-      <p:sp>
-        <p:nvSpPr>
-          <p:cNvPr id="29" name="TextBox 28"/>
-          <p:cNvSpPr txBox="1"/>
-          <p:nvPr/>
-        </p:nvSpPr>
-        <p:spPr>
-          <a:xfrm>
-            <a:off x="10305288" y="2148840"/>
-            <a:ext cx="1600200" cy="2560320"/>
-          </a:xfrm>
-          <a:prstGeom prst="rect">
-            <a:avLst/>
-          </a:prstGeom>
-          <a:noFill/>
-        </p:spPr>
-        <p:txBody>
-          <a:bodyPr wrap="square">
-            <a:spAutoFit/>
-          </a:bodyPr>
-          <a:lstStyle/>
-          <a:p>
-            <a:pPr algn="ctr"/>
-            <a:r>
-              <a:rPr sz="1600" b="1">
-                <a:solidFill>
-                  <a:srgbClr val="0F172A"/>
-                </a:solidFill>
-                <a:latin typeface="Calibri"/>
-              </a:rPr>
-              <a:t>分享</a:t>
-            </a:r>
-          </a:p>
-          <a:p>
-            <a:pPr algn="ctr">
-              <a:spcBef>
-                <a:spcPts val="400"/>
-              </a:spcBef>
-            </a:pPr>
-            <a:r>
-              <a:rPr sz="1100" b="0">
+            <a:r>
+              <a:rPr sz="1300" b="0">
                 <a:solidFill>
                   <a:srgbClr val="334155"/>
                 </a:solidFill>
                 <a:latin typeface="Calibri"/>
               </a:rPr>
-              <a:t>链接 / 回放</a:t>
-            </a:r>
-          </a:p>
-          <a:p>
-            <a:pPr algn="ctr">
-              <a:spcBef>
-                <a:spcPts val="400"/>
-              </a:spcBef>
-            </a:pPr>
-            <a:r>
-              <a:rPr sz="1100" b="0">
-                <a:solidFill>
-                  <a:srgbClr val="334155"/>
-                </a:solidFill>
-                <a:latin typeface="Calibri"/>
-              </a:rPr>
-              <a:t>转发</a:t>
-            </a:r>
-          </a:p>
-          <a:p>
-            <a:pPr algn="ctr">
-              <a:spcBef>
-                <a:spcPts val="1400"/>
-              </a:spcBef>
-            </a:pPr>
-            <a:r>
-              <a:rPr sz="1300" b="1">
-                <a:solidFill>
-                  <a:srgbClr val="64748B"/>
-                </a:solidFill>
-                <a:latin typeface="Calibri"/>
-              </a:rPr>
-              <a:t>可选</a:t>
-            </a:r>
-          </a:p>
-        </p:txBody>
-      </p:sp>
-      <p:sp>
-        <p:nvSpPr>
-          <p:cNvPr id="30" name="TextBox 29"/>
-          <p:cNvSpPr txBox="1"/>
-          <p:nvPr/>
-        </p:nvSpPr>
-        <p:spPr>
-          <a:xfrm>
-            <a:off x="457200" y="5212080"/>
-            <a:ext cx="11247120" cy="1280160"/>
-          </a:xfrm>
-          <a:prstGeom prst="rect">
-            <a:avLst/>
-          </a:prstGeom>
-          <a:noFill/>
-        </p:spPr>
-        <p:txBody>
-          <a:bodyPr wrap="square">
-            <a:spAutoFit/>
-          </a:bodyPr>
-          <a:lstStyle/>
-          <a:p>
-            <a:r>
-              <a:rPr sz="1400" b="0">
-                <a:solidFill>
-                  <a:srgbClr val="334155"/>
-                </a:solidFill>
-                <a:latin typeface="Calibri"/>
-              </a:rPr>
-              <a:t>结论：生成 / 落盘 / 同步已通；产品断点在「渲染 + 安全」。分享与流式体验是增强项，不阻塞第一期闭环。</a:t>
-            </a:r>
-          </a:p>
-          <a:p>
-            <a:pPr>
-              <a:spcBef>
-                <a:spcPts val="800"/>
-              </a:spcBef>
-            </a:pPr>
-            <a:r>
-              <a:rPr sz="1200" b="0">
-                <a:solidFill>
-                  <a:srgbClr val="64748B"/>
-                </a:solidFill>
-                <a:latin typeface="Calibri"/>
-              </a:rPr>
-              <a:t>健康报告场景映射：Skill 取数 ⊂ 生成层；图形化 HTML ⊂ 生成层；对话内看见 ⊂ 渲染层；防脚本越权 ⊂ 安全层。</a:t>
+              <a:t>结论：前三环已通；产品断点在「渲染 + 安全」。健康报告要「在对话里长出来」，必须补齐第 4、5 环。</a:t>
             </a:r>
           </a:p>
         </p:txBody>
@@ -5516,7 +5345,7 @@
         <p:spPr>
           <a:xfrm>
             <a:off x="0" y="0"/>
-            <a:ext cx="12191695" cy="914400"/>
+            <a:ext cx="12191695" cy="868680"/>
           </a:xfrm>
           <a:prstGeom prst="rect">
             <a:avLst/>
@@ -5558,8 +5387,8 @@
         </p:nvSpPr>
         <p:spPr>
           <a:xfrm>
-            <a:off x="0" y="914400"/>
-            <a:ext cx="12191695" cy="45720"/>
+            <a:off x="0" y="868680"/>
+            <a:ext cx="12191695" cy="54864"/>
           </a:xfrm>
           <a:prstGeom prst="rect">
             <a:avLst/>
@@ -5595,14 +5424,68 @@
       </p:sp>
       <p:sp>
         <p:nvSpPr>
-          <p:cNvPr id="5" name="TextBox 4"/>
+          <p:cNvPr id="5" name="Rounded Rectangle 4"/>
+          <p:cNvSpPr/>
+          <p:nvPr/>
+        </p:nvSpPr>
+        <p:spPr>
+          <a:xfrm>
+            <a:off x="411480" y="201168"/>
+            <a:ext cx="502920" cy="457200"/>
+          </a:xfrm>
+          <a:prstGeom prst="roundRect">
+            <a:avLst>
+              <a:gd name="adj" fmla="val 30000"/>
+            </a:avLst>
+          </a:prstGeom>
+          <a:solidFill>
+            <a:srgbClr val="0D9488"/>
+          </a:solidFill>
+          <a:ln>
+            <a:noFill/>
+          </a:ln>
+        </p:spPr>
+        <p:style>
+          <a:lnRef idx="1">
+            <a:schemeClr val="accent1"/>
+          </a:lnRef>
+          <a:fillRef idx="3">
+            <a:schemeClr val="accent1"/>
+          </a:fillRef>
+          <a:effectRef idx="2">
+            <a:schemeClr val="accent1"/>
+          </a:effectRef>
+          <a:fontRef idx="minor">
+            <a:schemeClr val="lt1"/>
+          </a:fontRef>
+        </p:style>
+        <p:txBody>
+          <a:bodyPr rtlCol="0" anchor="ctr"/>
+          <a:lstStyle/>
+          <a:p>
+            <a:pPr algn="ctr"/>
+            <a:r>
+              <a:rPr sz="1400" b="1">
+                <a:solidFill>
+                  <a:srgbClr val="FFFFFF"/>
+                </a:solidFill>
+                <a:latin typeface="Calibri"/>
+              </a:rPr>
+              <a:t>03</a:t>
+            </a:r>
+          </a:p>
+        </p:txBody>
+      </p:sp>
+      <p:sp>
+        <p:nvSpPr>
+          <p:cNvPr id="6" name="TextBox 5"/>
           <p:cNvSpPr txBox="1"/>
           <p:nvPr/>
         </p:nvSpPr>
         <p:spPr>
           <a:xfrm>
-            <a:off x="457200" y="201168"/>
-            <a:ext cx="11247120" cy="640080"/>
+            <a:off x="1051560" y="164592"/>
+            <a:ext cx="10515600" cy="640080"/>
           </a:xfrm>
           <a:prstGeom prst="rect">
             <a:avLst/>
@@ -5622,7 +5505,7 @@
                 </a:solidFill>
                 <a:latin typeface="Calibri"/>
               </a:rPr>
-              <a:t>03  竞品对比</a:t>
+              <a:t>竞品多维对比</a:t>
             </a:r>
           </a:p>
           <a:p>
@@ -5633,22 +5516,22 @@
                 </a:solidFill>
                 <a:latin typeface="Calibri"/>
               </a:rPr>
-              <a:t>多维度看「对话内可视化 / HTML 呈现」——对标 Artifact/Widget，而非一上来做全栈 Builder</a:t>
+              <a:t>OpenClaw · Cursor · Claude · Gemini · ChatGPT · Manus</a:t>
             </a:r>
           </a:p>
         </p:txBody>
       </p:sp>
       <p:graphicFrame>
         <p:nvGraphicFramePr>
-          <p:cNvPr id="6" name="Table 5"/>
+          <p:cNvPr id="7" name="Table 6"/>
           <p:cNvGraphicFramePr>
             <a:graphicFrameLocks noGrp="1"/>
           </p:cNvGraphicFramePr>
           <p:nvPr/>
         </p:nvGraphicFramePr>
         <p:xfrm>
-          <a:off x="274320" y="1143000"/>
-          <a:ext cx="11612880" cy="5029200"/>
+          <a:off x="228600" y="1097280"/>
+          <a:ext cx="11704320" cy="4572000"/>
         </p:xfrm>
         <a:graphic>
           <a:graphicData uri="http://schemas.openxmlformats.org/drawingml/2006/table">
@@ -5657,15 +5540,15 @@
                 <a:tableStyleId>{5C22544A-7EE6-4342-B048-85BDC9FD1C3A}</a:tableStyleId>
               </a:tblPr>
               <a:tblGrid>
-                <a:gridCol w="1234440"/>
+                <a:gridCol w="1280160"/>
                 <a:gridCol w="1737360"/>
                 <a:gridCol w="1691640"/>
                 <a:gridCol w="1737360"/>
                 <a:gridCol w="1737360"/>
-                <a:gridCol w="1737360"/>
+                <a:gridCol w="1783080"/>
                 <a:gridCol w="1737360"/>
               </a:tblGrid>
-              <a:tr h="718457">
+              <a:tr h="653142">
                 <a:tc>
                   <a:txBody>
                     <a:bodyPr wrap="square"/>
@@ -5828,7 +5711,7 @@
                   </a:tcPr>
                 </a:tc>
               </a:tr>
-              <a:tr h="718457">
+              <a:tr h="653142">
                 <a:tc>
                   <a:txBody>
                     <a:bodyPr wrap="square"/>
@@ -5842,8 +5725,7 @@
                           </a:solidFill>
                           <a:latin typeface="Calibri"/>
                         </a:rPr>
-                        <a:t>对话内
-实时预览</a:t>
+                        <a:t>对话内预览</a:t>
                       </a:r>
                     </a:p>
                   </a:txBody>
@@ -5860,20 +5742,20 @@
                     <a:p>
                       <a:pPr algn="ctr"/>
                       <a:r>
-                        <a:rPr sz="900" b="0">
+                        <a:rPr sz="900" b="1">
                           <a:solidFill>
-                            <a:srgbClr val="334155"/>
+                            <a:srgbClr val="047857"/>
                           </a:solidFill>
                           <a:latin typeface="Calibri"/>
                         </a:rPr>
                         <a:t>强
-show_widget</a:t>
+widget</a:t>
                       </a:r>
                     </a:p>
                   </a:txBody>
                   <a:tcPr>
                     <a:solidFill>
-                      <a:srgbClr val="FFFFFF"/>
+                      <a:srgbClr val="ECFDF5"/>
                     </a:solidFill>
                   </a:tcPr>
                 </a:tc>
@@ -5908,9 +5790,9 @@
                     <a:p>
                       <a:pPr algn="ctr"/>
                       <a:r>
-                        <a:rPr sz="900" b="0">
+                        <a:rPr sz="900" b="1">
                           <a:solidFill>
-                            <a:srgbClr val="334155"/>
+                            <a:srgbClr val="047857"/>
                           </a:solidFill>
                           <a:latin typeface="Calibri"/>
                         </a:rPr>
@@ -5921,7 +5803,7 @@
                   </a:txBody>
                   <a:tcPr>
                     <a:solidFill>
-                      <a:srgbClr val="FFFFFF"/>
+                      <a:srgbClr val="ECFDF5"/>
                     </a:solidFill>
                   </a:tcPr>
                 </a:tc>
@@ -5938,8 +5820,8 @@
                           </a:solidFill>
                           <a:latin typeface="Calibri"/>
                         </a:rPr>
-                        <a:t>中～强
-Canvas 预览</a:t>
+                        <a:t>中强
+Canvas</a:t>
                       </a:r>
                     </a:p>
                   </a:txBody>
@@ -5963,8 +5845,7 @@
                           <a:latin typeface="Calibri"/>
                         </a:rPr>
                         <a:t>中
-Canvas/
-部分预览</a:t>
+Canvas/ADA</a:t>
                       </a:r>
                     </a:p>
                   </a:txBody>
@@ -5981,9 +5862,9 @@
                     <a:p>
                       <a:pPr algn="ctr"/>
                       <a:r>
-                        <a:rPr sz="900" b="0">
+                        <a:rPr sz="900" b="1">
                           <a:solidFill>
-                            <a:srgbClr val="334155"/>
+                            <a:srgbClr val="047857"/>
                           </a:solidFill>
                           <a:latin typeface="Calibri"/>
                         </a:rPr>
@@ -5994,12 +5875,12 @@
                   </a:txBody>
                   <a:tcPr>
                     <a:solidFill>
-                      <a:srgbClr val="FFFFFF"/>
+                      <a:srgbClr val="ECFDF5"/>
                     </a:solidFill>
                   </a:tcPr>
                 </a:tc>
               </a:tr>
-              <a:tr h="718457">
+              <a:tr h="653142">
                 <a:tc>
                   <a:txBody>
                     <a:bodyPr wrap="square"/>
@@ -6036,8 +5917,7 @@
                           </a:solidFill>
                           <a:latin typeface="Calibri"/>
                         </a:rPr>
-                        <a:t>Widget/
-Canvas</a:t>
+                        <a:t>Widget</a:t>
                       </a:r>
                     </a:p>
                   </a:txBody>
@@ -6060,8 +5940,7 @@
                           </a:solidFill>
                           <a:latin typeface="Calibri"/>
                         </a:rPr>
-                        <a:t>工作区
-文件</a:t>
+                        <a:t>工作区文件</a:t>
                       </a:r>
                     </a:p>
                   </a:txBody>
@@ -6084,8 +5963,7 @@
                           </a:solidFill>
                           <a:latin typeface="Calibri"/>
                         </a:rPr>
-                        <a:t>侧栏
-Artifact</a:t>
+                        <a:t>侧栏产物</a:t>
                       </a:r>
                     </a:p>
                   </a:txBody>
@@ -6108,8 +5986,7 @@
                           </a:solidFill>
                           <a:latin typeface="Calibri"/>
                         </a:rPr>
-                        <a:t>Canvas
-工作区</a:t>
+                        <a:t>Canvas</a:t>
                       </a:r>
                     </a:p>
                   </a:txBody>
@@ -6132,8 +6009,8 @@
                           </a:solidFill>
                           <a:latin typeface="Calibri"/>
                         </a:rPr>
-                        <a:t>Canvas +
-代码解释器</a:t>
+                        <a:t>Canvas+
+解释器</a:t>
                       </a:r>
                     </a:p>
                   </a:txBody>
@@ -6156,8 +6033,7 @@
                           </a:solidFill>
                           <a:latin typeface="Calibri"/>
                         </a:rPr>
-                        <a:t>站点/
-App 预览</a:t>
+                        <a:t>站点/App</a:t>
                       </a:r>
                     </a:p>
                   </a:txBody>
@@ -6168,7 +6044,7 @@
                   </a:tcPr>
                 </a:tc>
               </a:tr>
-              <a:tr h="718457">
+              <a:tr h="653142">
                 <a:tc>
                   <a:txBody>
                     <a:bodyPr wrap="square"/>
@@ -6205,8 +6081,7 @@
                           </a:solidFill>
                           <a:latin typeface="Calibri"/>
                         </a:rPr>
-                        <a:t>Skill/
-工具调用</a:t>
+                        <a:t>Skill/工具</a:t>
                       </a:r>
                     </a:p>
                   </a:txBody>
@@ -6229,8 +6104,7 @@
                           </a:solidFill>
                           <a:latin typeface="Calibri"/>
                         </a:rPr>
-                        <a:t>FS/终端
-浏览器</a:t>
+                        <a:t>FS/终端</a:t>
                       </a:r>
                     </a:p>
                   </a:txBody>
@@ -6253,8 +6127,7 @@
                           </a:solidFill>
                           <a:latin typeface="Calibri"/>
                         </a:rPr>
-                        <a:t>工具 +
-MCP</a:t>
+                        <a:t>工具+MCP</a:t>
                       </a:r>
                     </a:p>
                   </a:txBody>
@@ -6277,7 +6150,7 @@
                           </a:solidFill>
                           <a:latin typeface="Calibri"/>
                         </a:rPr>
-                        <a:t>工具 +
+                        <a:t>工具+
 Workspace</a:t>
                       </a:r>
                     </a:p>
@@ -6301,8 +6174,7 @@
                           </a:solidFill>
                           <a:latin typeface="Calibri"/>
                         </a:rPr>
-                        <a:t>GPTs/
-ADA 取数画图</a:t>
+                        <a:t>GPTs/ADA</a:t>
                       </a:r>
                     </a:p>
                   </a:txBody>
@@ -6325,8 +6197,7 @@
                           </a:solidFill>
                           <a:latin typeface="Calibri"/>
                         </a:rPr>
-                        <a:t>Agent
-全流程</a:t>
+                        <a:t>Agent全流程</a:t>
                       </a:r>
                     </a:p>
                   </a:txBody>
@@ -6337,7 +6208,7 @@
                   </a:tcPr>
                 </a:tc>
               </a:tr>
-              <a:tr h="718457">
+              <a:tr h="653142">
                 <a:tc>
                   <a:txBody>
                     <a:bodyPr wrap="square"/>
@@ -6374,8 +6245,7 @@
                           </a:solidFill>
                           <a:latin typeface="Calibri"/>
                         </a:rPr>
-                        <a:t>双层 iframe
-沙箱</a:t>
+                        <a:t>双层iframe</a:t>
                       </a:r>
                     </a:p>
                   </a:txBody>
@@ -6398,8 +6268,7 @@
                           </a:solidFill>
                           <a:latin typeface="Calibri"/>
                         </a:rPr>
-                        <a:t>工作区
-隔离</a:t>
+                        <a:t>工作区隔离</a:t>
                       </a:r>
                     </a:p>
                   </a:txBody>
@@ -6422,8 +6291,7 @@
                           </a:solidFill>
                           <a:latin typeface="Calibri"/>
                         </a:rPr>
-                        <a:t>独立域
-严 CSP</a:t>
+                        <a:t>独立域CSP</a:t>
                       </a:r>
                     </a:p>
                   </a:txBody>
@@ -6503,7 +6371,7 @@
                   </a:tcPr>
                 </a:tc>
               </a:tr>
-              <a:tr h="718457">
+              <a:tr h="653142">
                 <a:tc>
                   <a:txBody>
                     <a:bodyPr wrap="square"/>
@@ -6540,8 +6408,7 @@
                           </a:solidFill>
                           <a:latin typeface="Calibri"/>
                         </a:rPr>
-                        <a:t>pin/
-渠道</a:t>
+                        <a:t>pin/渠道</a:t>
                       </a:r>
                     </a:p>
                   </a:txBody>
@@ -6587,8 +6454,7 @@
                           </a:solidFill>
                           <a:latin typeface="Calibri"/>
                         </a:rPr>
-                        <a:t>Publish
-链接</a:t>
+                        <a:t>Publish</a:t>
                       </a:r>
                     </a:p>
                   </a:txBody>
@@ -6611,8 +6477,7 @@
                           </a:solidFill>
                           <a:latin typeface="Calibri"/>
                         </a:rPr>
-                        <a:t>分享/
-导出 Docs</a:t>
+                        <a:t>分享/导出</a:t>
                       </a:r>
                     </a:p>
                   </a:txBody>
@@ -6635,8 +6500,7 @@
                           </a:solidFill>
                           <a:latin typeface="Calibri"/>
                         </a:rPr>
-                        <a:t>分享链接
-(偏账号)</a:t>
+                        <a:t>分享链接</a:t>
                       </a:r>
                     </a:p>
                   </a:txBody>
@@ -6659,8 +6523,7 @@
                           </a:solidFill>
                           <a:latin typeface="Calibri"/>
                         </a:rPr>
-                        <a:t>一键
-publish</a:t>
+                        <a:t>一键发布</a:t>
                       </a:r>
                     </a:p>
                   </a:txBody>
@@ -6671,7 +6534,7 @@
                   </a:tcPr>
                 </a:tc>
               </a:tr>
-              <a:tr h="718458">
+              <a:tr h="653148">
                 <a:tc>
                   <a:txBody>
                     <a:bodyPr wrap="square"/>
@@ -6685,8 +6548,7 @@
                           </a:solidFill>
                           <a:latin typeface="Calibri"/>
                         </a:rPr>
-                        <a:t>对我们
-启示</a:t>
+                        <a:t>启示</a:t>
                       </a:r>
                     </a:p>
                   </a:txBody>
@@ -6709,8 +6571,8 @@
                           </a:solidFill>
                           <a:latin typeface="Calibri"/>
                         </a:rPr>
-                        <a:t>widget
-语义+沙箱</a:t>
+                        <a:t>widget+
+沙箱</a:t>
                       </a:r>
                     </a:p>
                   </a:txBody>
@@ -6733,8 +6595,7 @@
                           </a:solidFill>
                           <a:latin typeface="Calibri"/>
                         </a:rPr>
-                        <a:t>复用 write
-不强造工具</a:t>
+                        <a:t>复用write</a:t>
                       </a:r>
                     </a:p>
                   </a:txBody>
@@ -6781,8 +6642,8 @@
                           </a:solidFill>
                           <a:latin typeface="Calibri"/>
                         </a:rPr>
-                        <a:t>Canvas+
-预览可参考</a:t>
+                        <a:t>Canvas
+可参考</a:t>
                       </a:r>
                     </a:p>
                   </a:txBody>
@@ -6805,8 +6666,7 @@
                           </a:solidFill>
                           <a:latin typeface="Calibri"/>
                         </a:rPr>
-                        <a:t>取数可视化
-可参考 ADA</a:t>
+                        <a:t>取数可视化</a:t>
                       </a:r>
                     </a:p>
                   </a:txBody>
@@ -6829,8 +6689,7 @@
                           </a:solidFill>
                           <a:latin typeface="Calibri"/>
                         </a:rPr>
-                        <a:t>后期分享
-可参考</a:t>
+                        <a:t>分享演进</a:t>
                       </a:r>
                     </a:p>
                   </a:txBody>
@@ -6847,14 +6706,14 @@
       </p:graphicFrame>
       <p:sp>
         <p:nvSpPr>
-          <p:cNvPr id="7" name="TextBox 6"/>
+          <p:cNvPr id="8" name="TextBox 7"/>
           <p:cNvSpPr txBox="1"/>
           <p:nvPr/>
         </p:nvSpPr>
         <p:spPr>
           <a:xfrm>
-            <a:off x="365760" y="6263640"/>
-            <a:ext cx="11430000" cy="411480"/>
+            <a:off x="320040" y="5806440"/>
+            <a:ext cx="11521440" cy="822960"/>
           </a:xfrm>
           <a:prstGeom prst="rect">
             <a:avLst/>
@@ -6868,13 +6727,56 @@
           <a:lstStyle/>
           <a:p>
             <a:r>
+              <a:rPr sz="1200" b="1">
+                <a:solidFill>
+                  <a:srgbClr val="0D9488"/>
+                </a:solidFill>
+                <a:latin typeface="Calibri"/>
+              </a:rPr>
+              <a:t>对标优先级：</a:t>
+            </a:r>
+            <a:r>
+              <a:rPr sz="1200" b="0">
+                <a:solidFill>
+                  <a:srgbClr val="334155"/>
+                </a:solidFill>
+                <a:latin typeface="Calibri"/>
+              </a:rPr>
+              <a:t>Claude Artifacts / OpenClaw Widget  </a:t>
+            </a:r>
+            <a:r>
+              <a:rPr sz="1200" b="0">
+                <a:solidFill>
+                  <a:srgbClr val="334155"/>
+                </a:solidFill>
+                <a:latin typeface="Calibri"/>
+              </a:rPr>
+              <a:t>→ 参考 Gemini/ChatGPT Canvas  </a:t>
+            </a:r>
+            <a:r>
+              <a:rPr sz="1200" b="0">
+                <a:solidFill>
+                  <a:srgbClr val="334155"/>
+                </a:solidFill>
+                <a:latin typeface="Calibri"/>
+              </a:rPr>
+              <a:t>→ 分享演进看 Manus。</a:t>
+            </a:r>
+          </a:p>
+          <a:p>
+            <a:pPr>
+              <a:spcBef>
+                <a:spcPts val="400"/>
+              </a:spcBef>
+            </a:pPr>
+            <a:r>
               <a:rPr sz="1000" b="0">
                 <a:solidFill>
                   <a:srgbClr val="64748B"/>
                 </a:solidFill>
                 <a:latin typeface="Calibri"/>
               </a:rPr>
-              <a:t>* Cursor：强在仓库内工程能力，对话内「小工具预览」不是主路径。综合对标优先级：Claude Artifacts / OpenClaw Widget → 其次 Gemini/ChatGPT Canvas → 分享演进参考 Manus。</a:t>
+              <a:t>* Cursor 强在仓库工程，不是对话内小工具预览主路径。</a:t>
             </a:r>
           </a:p>
         </p:txBody>
@@ -6949,7 +6851,7 @@
         <p:spPr>
           <a:xfrm>
             <a:off x="0" y="0"/>
-            <a:ext cx="12191695" cy="914400"/>
+            <a:ext cx="12191695" cy="868680"/>
           </a:xfrm>
           <a:prstGeom prst="rect">
             <a:avLst/>
@@ -6991,8 +6893,8 @@
         </p:nvSpPr>
         <p:spPr>
           <a:xfrm>
-            <a:off x="0" y="914400"/>
-            <a:ext cx="12191695" cy="45720"/>
+            <a:off x="0" y="868680"/>
+            <a:ext cx="12191695" cy="54864"/>
           </a:xfrm>
           <a:prstGeom prst="rect">
             <a:avLst/>
@@ -7028,72 +6930,25 @@
       </p:sp>
       <p:sp>
         <p:nvSpPr>
-          <p:cNvPr id="5" name="TextBox 4"/>
-          <p:cNvSpPr txBox="1"/>
-          <p:nvPr/>
-        </p:nvSpPr>
-        <p:spPr>
-          <a:xfrm>
-            <a:off x="457200" y="201168"/>
-            <a:ext cx="11247120" cy="640080"/>
-          </a:xfrm>
-          <a:prstGeom prst="rect">
-            <a:avLst/>
-          </a:prstGeom>
-          <a:noFill/>
-        </p:spPr>
-        <p:txBody>
-          <a:bodyPr wrap="square">
-            <a:spAutoFit/>
-          </a:bodyPr>
-          <a:lstStyle/>
-          <a:p>
-            <a:r>
-              <a:rPr sz="2200" b="1">
-                <a:solidFill>
-                  <a:srgbClr val="FFFFFF"/>
-                </a:solidFill>
-                <a:latin typeface="Calibri"/>
-              </a:rPr>
-              <a:t>04  现状与目标架构 Gap</a:t>
-            </a:r>
-          </a:p>
-          <a:p>
-            <a:r>
-              <a:rPr sz="1100" b="0">
-                <a:solidFill>
-                  <a:srgbClr val="94A3B8"/>
-                </a:solidFill>
-                <a:latin typeface="Calibri"/>
-              </a:rPr>
-              <a:t>复用 write + 云空间；补齐「可预览」闭环</a:t>
-            </a:r>
-          </a:p>
-        </p:txBody>
-      </p:sp>
-      <p:sp>
-        <p:nvSpPr>
-          <p:cNvPr id="6" name="Rounded Rectangle 5"/>
+          <p:cNvPr id="5" name="Rounded Rectangle 4"/>
           <p:cNvSpPr/>
           <p:nvPr/>
         </p:nvSpPr>
         <p:spPr>
           <a:xfrm>
-            <a:off x="365760" y="1143000"/>
-            <a:ext cx="5669280" cy="3108960"/>
+            <a:off x="411480" y="201168"/>
+            <a:ext cx="502920" cy="457200"/>
           </a:xfrm>
           <a:prstGeom prst="roundRect">
             <a:avLst>
-              <a:gd name="adj" fmla="val 6000"/>
+              <a:gd name="adj" fmla="val 30000"/>
             </a:avLst>
           </a:prstGeom>
           <a:solidFill>
-            <a:srgbClr val="FFFFFF"/>
+            <a:srgbClr val="0D9488"/>
           </a:solidFill>
           <a:ln>
-            <a:solidFill>
-              <a:srgbClr val="E2E8F0"/>
-            </a:solidFill>
+            <a:noFill/>
           </a:ln>
         </p:spPr>
         <p:style>
@@ -7115,19 +6970,28 @@
           <a:lstStyle/>
           <a:p>
             <a:pPr algn="ctr"/>
-          </a:p>
-        </p:txBody>
-      </p:sp>
-      <p:sp>
-        <p:nvSpPr>
-          <p:cNvPr id="7" name="TextBox 6"/>
+            <a:r>
+              <a:rPr sz="1400" b="1">
+                <a:solidFill>
+                  <a:srgbClr val="FFFFFF"/>
+                </a:solidFill>
+                <a:latin typeface="Calibri"/>
+              </a:rPr>
+              <a:t>04</a:t>
+            </a:r>
+          </a:p>
+        </p:txBody>
+      </p:sp>
+      <p:sp>
+        <p:nvSpPr>
+          <p:cNvPr id="6" name="TextBox 5"/>
           <p:cNvSpPr txBox="1"/>
           <p:nvPr/>
         </p:nvSpPr>
         <p:spPr>
           <a:xfrm>
-            <a:off x="512064" y="1252728"/>
-            <a:ext cx="5413248" cy="2926080"/>
+            <a:off x="1051560" y="164592"/>
+            <a:ext cx="10515600" cy="640080"/>
           </a:xfrm>
           <a:prstGeom prst="rect">
             <a:avLst/>
@@ -7141,149 +7005,48 @@
           <a:lstStyle/>
           <a:p>
             <a:r>
-              <a:rPr sz="1300" b="1">
-                <a:solidFill>
-                  <a:srgbClr val="0D9488"/>
-                </a:solidFill>
-                <a:latin typeface="Calibri"/>
-              </a:rPr>
-              <a:t>现状</a:t>
-            </a:r>
-          </a:p>
-          <a:p>
-            <a:pPr>
-              <a:spcBef>
-                <a:spcPts val="300"/>
-              </a:spcBef>
-            </a:pPr>
+              <a:rPr sz="2200" b="1">
+                <a:solidFill>
+                  <a:srgbClr val="FFFFFF"/>
+                </a:solidFill>
+                <a:latin typeface="Calibri"/>
+              </a:rPr>
+              <a:t>现状与目标架构 Gap</a:t>
+            </a:r>
+          </a:p>
+          <a:p>
             <a:r>
               <a:rPr sz="1100" b="0">
                 <a:solidFill>
-                  <a:srgbClr val="334155"/>
-                </a:solidFill>
-                <a:latin typeface="Calibri"/>
-              </a:rPr>
-              <a:t>Skill 取数 → 模型生成 HTML</a:t>
-            </a:r>
-          </a:p>
-          <a:p>
-            <a:pPr>
-              <a:spcBef>
-                <a:spcPts val="300"/>
-              </a:spcBef>
-            </a:pPr>
-            <a:r>
-              <a:rPr sz="1100" b="0">
-                <a:solidFill>
-                  <a:srgbClr val="334155"/>
-                </a:solidFill>
-                <a:latin typeface="Calibri"/>
-              </a:rPr>
-              <a:t>→ write 落盘 → 同步华为云空间</a:t>
-            </a:r>
-          </a:p>
-          <a:p>
-            <a:pPr>
-              <a:spcBef>
-                <a:spcPts val="300"/>
-              </a:spcBef>
-            </a:pPr>
-            <a:r>
-              <a:rPr sz="1100" b="0">
-                <a:solidFill>
-                  <a:srgbClr val="334155"/>
-                </a:solidFill>
-                <a:latin typeface="Calibri"/>
-              </a:rPr>
-              <a:t>→ 端 REST 可下载</a:t>
-            </a:r>
-          </a:p>
-          <a:p>
-            <a:pPr>
-              <a:spcBef>
-                <a:spcPts val="300"/>
-              </a:spcBef>
-            </a:pPr>
-            <a:r>
-              <a:rPr sz="1100" b="0">
-                <a:solidFill>
-                  <a:srgbClr val="334155"/>
-                </a:solidFill>
-                <a:latin typeface="Calibri"/>
-              </a:rPr>
-              <a:t/>
-            </a:r>
-          </a:p>
-          <a:p>
-            <a:pPr>
-              <a:spcBef>
-                <a:spcPts val="300"/>
-              </a:spcBef>
-            </a:pPr>
-            <a:r>
-              <a:rPr sz="1100" b="0">
-                <a:solidFill>
-                  <a:srgbClr val="334155"/>
-                </a:solidFill>
-                <a:latin typeface="Calibri"/>
-              </a:rPr>
-              <a:t>已具备：生成 / 落盘 / 同步</a:t>
-            </a:r>
-          </a:p>
-          <a:p>
-            <a:pPr>
-              <a:spcBef>
-                <a:spcPts val="300"/>
-              </a:spcBef>
-            </a:pPr>
-            <a:r>
-              <a:rPr sz="1100" b="0">
-                <a:solidFill>
-                  <a:srgbClr val="334155"/>
-                </a:solidFill>
-                <a:latin typeface="Calibri"/>
-              </a:rPr>
-              <a:t>用户感知：多为附件或源码，</a:t>
-            </a:r>
-          </a:p>
-          <a:p>
-            <a:pPr>
-              <a:spcBef>
-                <a:spcPts val="300"/>
-              </a:spcBef>
-            </a:pPr>
-            <a:r>
-              <a:rPr sz="1100" b="0">
-                <a:solidFill>
-                  <a:srgbClr val="334155"/>
-                </a:solidFill>
-                <a:latin typeface="Calibri"/>
-              </a:rPr>
-              <a:t>「报告」没有在对话里长出来</a:t>
-            </a:r>
-          </a:p>
-        </p:txBody>
-      </p:sp>
-      <p:sp>
-        <p:nvSpPr>
-          <p:cNvPr id="8" name="Rounded Rectangle 7"/>
+                  <a:srgbClr val="94A3B8"/>
+                </a:solidFill>
+                <a:latin typeface="Calibri"/>
+              </a:rPr>
+              <a:t>复用 write + 云空间；补齐「可预览」闭环</a:t>
+            </a:r>
+          </a:p>
+        </p:txBody>
+      </p:sp>
+      <p:sp>
+        <p:nvSpPr>
+          <p:cNvPr id="7" name="Rounded Rectangle 6"/>
           <p:cNvSpPr/>
           <p:nvPr/>
         </p:nvSpPr>
         <p:spPr>
           <a:xfrm>
-            <a:off x="6217920" y="1143000"/>
-            <a:ext cx="5577840" cy="3108960"/>
+            <a:off x="320040" y="1097280"/>
+            <a:ext cx="11521440" cy="1965960"/>
           </a:xfrm>
           <a:prstGeom prst="roundRect">
             <a:avLst>
-              <a:gd name="adj" fmla="val 6000"/>
+              <a:gd name="adj" fmla="val 8000"/>
             </a:avLst>
           </a:prstGeom>
           <a:solidFill>
-            <a:srgbClr val="F0FDFA"/>
+            <a:srgbClr val="FFFFFF"/>
           </a:solidFill>
-          <a:ln>
+          <a:ln w="12700">
             <a:solidFill>
               <a:srgbClr val="E2E8F0"/>
             </a:solidFill>
@@ -7313,14 +7076,14 @@
       </p:sp>
       <p:sp>
         <p:nvSpPr>
-          <p:cNvPr id="9" name="TextBox 8"/>
+          <p:cNvPr id="8" name="TextBox 7"/>
           <p:cNvSpPr txBox="1"/>
           <p:nvPr/>
         </p:nvSpPr>
         <p:spPr>
           <a:xfrm>
-            <a:off x="6364224" y="1252728"/>
-            <a:ext cx="5321808" cy="2926080"/>
+            <a:off x="457200" y="1188720"/>
+            <a:ext cx="11247120" cy="320040"/>
           </a:xfrm>
           <a:prstGeom prst="rect">
             <a:avLst/>
@@ -7336,149 +7099,37 @@
             <a:r>
               <a:rPr sz="1300" b="1">
                 <a:solidFill>
-                  <a:srgbClr val="0D9488"/>
-                </a:solidFill>
-                <a:latin typeface="Calibri"/>
-              </a:rPr>
-              <a:t>目标</a:t>
-            </a:r>
-          </a:p>
-          <a:p>
-            <a:pPr>
-              <a:spcBef>
-                <a:spcPts val="300"/>
-              </a:spcBef>
-            </a:pPr>
-            <a:r>
-              <a:rPr sz="1100" b="0">
-                <a:solidFill>
-                  <a:srgbClr val="334155"/>
-                </a:solidFill>
-                <a:latin typeface="Calibri"/>
-              </a:rPr>
-              <a:t>…… → 识别为 HTML 预览</a:t>
-            </a:r>
-          </a:p>
-          <a:p>
-            <a:pPr>
-              <a:spcBef>
-                <a:spcPts val="300"/>
-              </a:spcBef>
-            </a:pPr>
-            <a:r>
-              <a:rPr sz="1100" b="0">
-                <a:solidFill>
-                  <a:srgbClr val="334155"/>
-                </a:solidFill>
-                <a:latin typeface="Calibri"/>
-              </a:rPr>
-              <a:t>→ sandbox iframe/WebView 渲染</a:t>
-            </a:r>
-          </a:p>
-          <a:p>
-            <a:pPr>
-              <a:spcBef>
-                <a:spcPts val="300"/>
-              </a:spcBef>
-            </a:pPr>
-            <a:r>
-              <a:rPr sz="1100" b="0">
-                <a:solidFill>
-                  <a:srgbClr val="334155"/>
-                </a:solidFill>
-                <a:latin typeface="Calibri"/>
-              </a:rPr>
-              <a:t>→ 会话内可见可交互</a:t>
-            </a:r>
-          </a:p>
-          <a:p>
-            <a:pPr>
-              <a:spcBef>
-                <a:spcPts val="300"/>
-              </a:spcBef>
-            </a:pPr>
-            <a:r>
-              <a:rPr sz="1100" b="0">
-                <a:solidFill>
-                  <a:srgbClr val="334155"/>
-                </a:solidFill>
-                <a:latin typeface="Calibri"/>
-              </a:rPr>
-              <a:t>→（可选）分享 / 回放</a:t>
-            </a:r>
-          </a:p>
-          <a:p>
-            <a:pPr>
-              <a:spcBef>
-                <a:spcPts val="300"/>
-              </a:spcBef>
-            </a:pPr>
-            <a:r>
-              <a:rPr sz="1100" b="0">
-                <a:solidFill>
-                  <a:srgbClr val="334155"/>
-                </a:solidFill>
-                <a:latin typeface="Calibri"/>
-              </a:rPr>
-              <a:t/>
-            </a:r>
-          </a:p>
-          <a:p>
-            <a:pPr>
-              <a:spcBef>
-                <a:spcPts val="300"/>
-              </a:spcBef>
-            </a:pPr>
-            <a:r>
-              <a:rPr sz="1100" b="0">
-                <a:solidFill>
-                  <a:srgbClr val="334155"/>
-                </a:solidFill>
-                <a:latin typeface="Calibri"/>
-              </a:rPr>
-              <a:t>健康报告验收：打开会话即可</a:t>
-            </a:r>
-          </a:p>
-          <a:p>
-            <a:pPr>
-              <a:spcBef>
-                <a:spcPts val="300"/>
-              </a:spcBef>
-            </a:pPr>
-            <a:r>
-              <a:rPr sz="1100" b="0">
-                <a:solidFill>
-                  <a:srgbClr val="334155"/>
-                </a:solidFill>
-                <a:latin typeface="Calibri"/>
-              </a:rPr>
-              <a:t>查看图表化报告并交互</a:t>
-            </a:r>
-          </a:p>
-        </p:txBody>
-      </p:sp>
-      <p:sp>
-        <p:nvSpPr>
-          <p:cNvPr id="10" name="Rounded Rectangle 9"/>
+                  <a:srgbClr val="64748B"/>
+                </a:solidFill>
+                <a:latin typeface="Calibri"/>
+              </a:rPr>
+              <a:t>现状 AS-IS</a:t>
+            </a:r>
+          </a:p>
+        </p:txBody>
+      </p:sp>
+      <p:sp>
+        <p:nvSpPr>
+          <p:cNvPr id="9" name="Rounded Rectangle 8"/>
           <p:cNvSpPr/>
           <p:nvPr/>
         </p:nvSpPr>
         <p:spPr>
           <a:xfrm>
-            <a:off x="365760" y="4434840"/>
-            <a:ext cx="11430000" cy="2103120"/>
+            <a:off x="502920" y="1691640"/>
+            <a:ext cx="1600200" cy="1051560"/>
           </a:xfrm>
           <a:prstGeom prst="roundRect">
             <a:avLst>
-              <a:gd name="adj" fmla="val 6000"/>
+              <a:gd name="adj" fmla="val 8000"/>
             </a:avLst>
           </a:prstGeom>
           <a:solidFill>
-            <a:srgbClr val="FFFFFF"/>
+            <a:srgbClr val="F0FDFA"/>
           </a:solidFill>
-          <a:ln>
+          <a:ln w="12700">
             <a:solidFill>
-              <a:srgbClr val="E2E8F0"/>
+              <a:srgbClr val="0D9488"/>
             </a:solidFill>
           </a:ln>
         </p:spPr>
@@ -7506,14 +7157,14 @@
       </p:sp>
       <p:sp>
         <p:nvSpPr>
-          <p:cNvPr id="11" name="TextBox 10"/>
+          <p:cNvPr id="10" name="TextBox 9"/>
           <p:cNvSpPr txBox="1"/>
           <p:nvPr/>
         </p:nvSpPr>
         <p:spPr>
           <a:xfrm>
-            <a:off x="512064" y="4544568"/>
-            <a:ext cx="11173968" cy="1920240"/>
+            <a:off x="548640" y="1965960"/>
+            <a:ext cx="1508760" cy="640080"/>
           </a:xfrm>
           <a:prstGeom prst="rect">
             <a:avLst/>
@@ -7526,22 +7177,1512 @@
           </a:bodyPr>
           <a:lstStyle/>
           <a:p>
+            <a:pPr algn="ctr"/>
+            <a:r>
+              <a:rPr sz="1200" b="1">
+                <a:solidFill>
+                  <a:srgbClr val="0F172A"/>
+                </a:solidFill>
+                <a:latin typeface="Calibri"/>
+              </a:rPr>
+              <a:t>Skill取数</a:t>
+            </a:r>
+          </a:p>
+        </p:txBody>
+      </p:sp>
+      <p:sp>
+        <p:nvSpPr>
+          <p:cNvPr id="11" name="Right Arrow 10"/>
+          <p:cNvSpPr/>
+          <p:nvPr/>
+        </p:nvSpPr>
+        <p:spPr>
+          <a:xfrm>
+            <a:off x="2130552" y="2057400"/>
+            <a:ext cx="256032" cy="201168"/>
+          </a:xfrm>
+          <a:prstGeom prst="rightArrow">
+            <a:avLst/>
+          </a:prstGeom>
+          <a:solidFill>
+            <a:srgbClr val="0D9488"/>
+          </a:solidFill>
+          <a:ln>
+            <a:noFill/>
+          </a:ln>
+        </p:spPr>
+        <p:style>
+          <a:lnRef idx="1">
+            <a:schemeClr val="accent1"/>
+          </a:lnRef>
+          <a:fillRef idx="3">
+            <a:schemeClr val="accent1"/>
+          </a:fillRef>
+          <a:effectRef idx="2">
+            <a:schemeClr val="accent1"/>
+          </a:effectRef>
+          <a:fontRef idx="minor">
+            <a:schemeClr val="lt1"/>
+          </a:fontRef>
+        </p:style>
+        <p:txBody>
+          <a:bodyPr rtlCol="0" anchor="ctr"/>
+          <a:lstStyle/>
+          <a:p>
+            <a:pPr algn="ctr"/>
+          </a:p>
+        </p:txBody>
+      </p:sp>
+      <p:sp>
+        <p:nvSpPr>
+          <p:cNvPr id="12" name="Rounded Rectangle 11"/>
+          <p:cNvSpPr/>
+          <p:nvPr/>
+        </p:nvSpPr>
+        <p:spPr>
+          <a:xfrm>
+            <a:off x="2377439" y="1691640"/>
+            <a:ext cx="1600200" cy="1051560"/>
+          </a:xfrm>
+          <a:prstGeom prst="roundRect">
+            <a:avLst>
+              <a:gd name="adj" fmla="val 8000"/>
+            </a:avLst>
+          </a:prstGeom>
+          <a:solidFill>
+            <a:srgbClr val="F0FDFA"/>
+          </a:solidFill>
+          <a:ln w="12700">
+            <a:solidFill>
+              <a:srgbClr val="0D9488"/>
+            </a:solidFill>
+          </a:ln>
+        </p:spPr>
+        <p:style>
+          <a:lnRef idx="1">
+            <a:schemeClr val="accent1"/>
+          </a:lnRef>
+          <a:fillRef idx="3">
+            <a:schemeClr val="accent1"/>
+          </a:fillRef>
+          <a:effectRef idx="2">
+            <a:schemeClr val="accent1"/>
+          </a:effectRef>
+          <a:fontRef idx="minor">
+            <a:schemeClr val="lt1"/>
+          </a:fontRef>
+        </p:style>
+        <p:txBody>
+          <a:bodyPr rtlCol="0" anchor="ctr"/>
+          <a:lstStyle/>
+          <a:p>
+            <a:pPr algn="ctr"/>
+          </a:p>
+        </p:txBody>
+      </p:sp>
+      <p:sp>
+        <p:nvSpPr>
+          <p:cNvPr id="13" name="TextBox 12"/>
+          <p:cNvSpPr txBox="1"/>
+          <p:nvPr/>
+        </p:nvSpPr>
+        <p:spPr>
+          <a:xfrm>
+            <a:off x="2423159" y="1965960"/>
+            <a:ext cx="1508760" cy="640080"/>
+          </a:xfrm>
+          <a:prstGeom prst="rect">
+            <a:avLst/>
+          </a:prstGeom>
+          <a:noFill/>
+        </p:spPr>
+        <p:txBody>
+          <a:bodyPr wrap="square">
+            <a:spAutoFit/>
+          </a:bodyPr>
+          <a:lstStyle/>
+          <a:p>
+            <a:pPr algn="ctr"/>
+            <a:r>
+              <a:rPr sz="1200" b="1">
+                <a:solidFill>
+                  <a:srgbClr val="0F172A"/>
+                </a:solidFill>
+                <a:latin typeface="Calibri"/>
+              </a:rPr>
+              <a:t>生成HTML</a:t>
+            </a:r>
+          </a:p>
+        </p:txBody>
+      </p:sp>
+      <p:sp>
+        <p:nvSpPr>
+          <p:cNvPr id="14" name="Right Arrow 13"/>
+          <p:cNvSpPr/>
+          <p:nvPr/>
+        </p:nvSpPr>
+        <p:spPr>
+          <a:xfrm>
+            <a:off x="4005071" y="2057400"/>
+            <a:ext cx="256032" cy="201168"/>
+          </a:xfrm>
+          <a:prstGeom prst="rightArrow">
+            <a:avLst/>
+          </a:prstGeom>
+          <a:solidFill>
+            <a:srgbClr val="0D9488"/>
+          </a:solidFill>
+          <a:ln>
+            <a:noFill/>
+          </a:ln>
+        </p:spPr>
+        <p:style>
+          <a:lnRef idx="1">
+            <a:schemeClr val="accent1"/>
+          </a:lnRef>
+          <a:fillRef idx="3">
+            <a:schemeClr val="accent1"/>
+          </a:fillRef>
+          <a:effectRef idx="2">
+            <a:schemeClr val="accent1"/>
+          </a:effectRef>
+          <a:fontRef idx="minor">
+            <a:schemeClr val="lt1"/>
+          </a:fontRef>
+        </p:style>
+        <p:txBody>
+          <a:bodyPr rtlCol="0" anchor="ctr"/>
+          <a:lstStyle/>
+          <a:p>
+            <a:pPr algn="ctr"/>
+          </a:p>
+        </p:txBody>
+      </p:sp>
+      <p:sp>
+        <p:nvSpPr>
+          <p:cNvPr id="15" name="Rounded Rectangle 14"/>
+          <p:cNvSpPr/>
+          <p:nvPr/>
+        </p:nvSpPr>
+        <p:spPr>
+          <a:xfrm>
+            <a:off x="4251959" y="1691640"/>
+            <a:ext cx="1600200" cy="1051560"/>
+          </a:xfrm>
+          <a:prstGeom prst="roundRect">
+            <a:avLst>
+              <a:gd name="adj" fmla="val 8000"/>
+            </a:avLst>
+          </a:prstGeom>
+          <a:solidFill>
+            <a:srgbClr val="F0FDFA"/>
+          </a:solidFill>
+          <a:ln w="12700">
+            <a:solidFill>
+              <a:srgbClr val="0D9488"/>
+            </a:solidFill>
+          </a:ln>
+        </p:spPr>
+        <p:style>
+          <a:lnRef idx="1">
+            <a:schemeClr val="accent1"/>
+          </a:lnRef>
+          <a:fillRef idx="3">
+            <a:schemeClr val="accent1"/>
+          </a:fillRef>
+          <a:effectRef idx="2">
+            <a:schemeClr val="accent1"/>
+          </a:effectRef>
+          <a:fontRef idx="minor">
+            <a:schemeClr val="lt1"/>
+          </a:fontRef>
+        </p:style>
+        <p:txBody>
+          <a:bodyPr rtlCol="0" anchor="ctr"/>
+          <a:lstStyle/>
+          <a:p>
+            <a:pPr algn="ctr"/>
+          </a:p>
+        </p:txBody>
+      </p:sp>
+      <p:sp>
+        <p:nvSpPr>
+          <p:cNvPr id="16" name="TextBox 15"/>
+          <p:cNvSpPr txBox="1"/>
+          <p:nvPr/>
+        </p:nvSpPr>
+        <p:spPr>
+          <a:xfrm>
+            <a:off x="4297679" y="1965960"/>
+            <a:ext cx="1508760" cy="640080"/>
+          </a:xfrm>
+          <a:prstGeom prst="rect">
+            <a:avLst/>
+          </a:prstGeom>
+          <a:noFill/>
+        </p:spPr>
+        <p:txBody>
+          <a:bodyPr wrap="square">
+            <a:spAutoFit/>
+          </a:bodyPr>
+          <a:lstStyle/>
+          <a:p>
+            <a:pPr algn="ctr"/>
+            <a:r>
+              <a:rPr sz="1200" b="1">
+                <a:solidFill>
+                  <a:srgbClr val="0F172A"/>
+                </a:solidFill>
+                <a:latin typeface="Calibri"/>
+              </a:rPr>
+              <a:t>write落盘</a:t>
+            </a:r>
+          </a:p>
+        </p:txBody>
+      </p:sp>
+      <p:sp>
+        <p:nvSpPr>
+          <p:cNvPr id="17" name="Right Arrow 16"/>
+          <p:cNvSpPr/>
+          <p:nvPr/>
+        </p:nvSpPr>
+        <p:spPr>
+          <a:xfrm>
+            <a:off x="5879591" y="2057400"/>
+            <a:ext cx="256032" cy="201168"/>
+          </a:xfrm>
+          <a:prstGeom prst="rightArrow">
+            <a:avLst/>
+          </a:prstGeom>
+          <a:solidFill>
+            <a:srgbClr val="0D9488"/>
+          </a:solidFill>
+          <a:ln>
+            <a:noFill/>
+          </a:ln>
+        </p:spPr>
+        <p:style>
+          <a:lnRef idx="1">
+            <a:schemeClr val="accent1"/>
+          </a:lnRef>
+          <a:fillRef idx="3">
+            <a:schemeClr val="accent1"/>
+          </a:fillRef>
+          <a:effectRef idx="2">
+            <a:schemeClr val="accent1"/>
+          </a:effectRef>
+          <a:fontRef idx="minor">
+            <a:schemeClr val="lt1"/>
+          </a:fontRef>
+        </p:style>
+        <p:txBody>
+          <a:bodyPr rtlCol="0" anchor="ctr"/>
+          <a:lstStyle/>
+          <a:p>
+            <a:pPr algn="ctr"/>
+          </a:p>
+        </p:txBody>
+      </p:sp>
+      <p:sp>
+        <p:nvSpPr>
+          <p:cNvPr id="18" name="Rounded Rectangle 17"/>
+          <p:cNvSpPr/>
+          <p:nvPr/>
+        </p:nvSpPr>
+        <p:spPr>
+          <a:xfrm>
+            <a:off x="6126479" y="1691640"/>
+            <a:ext cx="1600200" cy="1051560"/>
+          </a:xfrm>
+          <a:prstGeom prst="roundRect">
+            <a:avLst>
+              <a:gd name="adj" fmla="val 8000"/>
+            </a:avLst>
+          </a:prstGeom>
+          <a:solidFill>
+            <a:srgbClr val="F0FDFA"/>
+          </a:solidFill>
+          <a:ln w="12700">
+            <a:solidFill>
+              <a:srgbClr val="0D9488"/>
+            </a:solidFill>
+          </a:ln>
+        </p:spPr>
+        <p:style>
+          <a:lnRef idx="1">
+            <a:schemeClr val="accent1"/>
+          </a:lnRef>
+          <a:fillRef idx="3">
+            <a:schemeClr val="accent1"/>
+          </a:fillRef>
+          <a:effectRef idx="2">
+            <a:schemeClr val="accent1"/>
+          </a:effectRef>
+          <a:fontRef idx="minor">
+            <a:schemeClr val="lt1"/>
+          </a:fontRef>
+        </p:style>
+        <p:txBody>
+          <a:bodyPr rtlCol="0" anchor="ctr"/>
+          <a:lstStyle/>
+          <a:p>
+            <a:pPr algn="ctr"/>
+          </a:p>
+        </p:txBody>
+      </p:sp>
+      <p:sp>
+        <p:nvSpPr>
+          <p:cNvPr id="19" name="TextBox 18"/>
+          <p:cNvSpPr txBox="1"/>
+          <p:nvPr/>
+        </p:nvSpPr>
+        <p:spPr>
+          <a:xfrm>
+            <a:off x="6172199" y="1965960"/>
+            <a:ext cx="1508760" cy="640080"/>
+          </a:xfrm>
+          <a:prstGeom prst="rect">
+            <a:avLst/>
+          </a:prstGeom>
+          <a:noFill/>
+        </p:spPr>
+        <p:txBody>
+          <a:bodyPr wrap="square">
+            <a:spAutoFit/>
+          </a:bodyPr>
+          <a:lstStyle/>
+          <a:p>
+            <a:pPr algn="ctr"/>
+            <a:r>
+              <a:rPr sz="1200" b="1">
+                <a:solidFill>
+                  <a:srgbClr val="0F172A"/>
+                </a:solidFill>
+                <a:latin typeface="Calibri"/>
+              </a:rPr>
+              <a:t>云空间同步</a:t>
+            </a:r>
+          </a:p>
+        </p:txBody>
+      </p:sp>
+      <p:sp>
+        <p:nvSpPr>
+          <p:cNvPr id="20" name="Right Arrow 19"/>
+          <p:cNvSpPr/>
+          <p:nvPr/>
+        </p:nvSpPr>
+        <p:spPr>
+          <a:xfrm>
+            <a:off x="7754111" y="2057400"/>
+            <a:ext cx="256032" cy="201168"/>
+          </a:xfrm>
+          <a:prstGeom prst="rightArrow">
+            <a:avLst/>
+          </a:prstGeom>
+          <a:solidFill>
+            <a:srgbClr val="0D9488"/>
+          </a:solidFill>
+          <a:ln>
+            <a:noFill/>
+          </a:ln>
+        </p:spPr>
+        <p:style>
+          <a:lnRef idx="1">
+            <a:schemeClr val="accent1"/>
+          </a:lnRef>
+          <a:fillRef idx="3">
+            <a:schemeClr val="accent1"/>
+          </a:fillRef>
+          <a:effectRef idx="2">
+            <a:schemeClr val="accent1"/>
+          </a:effectRef>
+          <a:fontRef idx="minor">
+            <a:schemeClr val="lt1"/>
+          </a:fontRef>
+        </p:style>
+        <p:txBody>
+          <a:bodyPr rtlCol="0" anchor="ctr"/>
+          <a:lstStyle/>
+          <a:p>
+            <a:pPr algn="ctr"/>
+          </a:p>
+        </p:txBody>
+      </p:sp>
+      <p:sp>
+        <p:nvSpPr>
+          <p:cNvPr id="21" name="Rounded Rectangle 20"/>
+          <p:cNvSpPr/>
+          <p:nvPr/>
+        </p:nvSpPr>
+        <p:spPr>
+          <a:xfrm>
+            <a:off x="8000999" y="1691640"/>
+            <a:ext cx="1600200" cy="1051560"/>
+          </a:xfrm>
+          <a:prstGeom prst="roundRect">
+            <a:avLst>
+              <a:gd name="adj" fmla="val 8000"/>
+            </a:avLst>
+          </a:prstGeom>
+          <a:solidFill>
+            <a:srgbClr val="F0FDFA"/>
+          </a:solidFill>
+          <a:ln w="12700">
+            <a:solidFill>
+              <a:srgbClr val="0D9488"/>
+            </a:solidFill>
+          </a:ln>
+        </p:spPr>
+        <p:style>
+          <a:lnRef idx="1">
+            <a:schemeClr val="accent1"/>
+          </a:lnRef>
+          <a:fillRef idx="3">
+            <a:schemeClr val="accent1"/>
+          </a:fillRef>
+          <a:effectRef idx="2">
+            <a:schemeClr val="accent1"/>
+          </a:effectRef>
+          <a:fontRef idx="minor">
+            <a:schemeClr val="lt1"/>
+          </a:fontRef>
+        </p:style>
+        <p:txBody>
+          <a:bodyPr rtlCol="0" anchor="ctr"/>
+          <a:lstStyle/>
+          <a:p>
+            <a:pPr algn="ctr"/>
+          </a:p>
+        </p:txBody>
+      </p:sp>
+      <p:sp>
+        <p:nvSpPr>
+          <p:cNvPr id="22" name="TextBox 21"/>
+          <p:cNvSpPr txBox="1"/>
+          <p:nvPr/>
+        </p:nvSpPr>
+        <p:spPr>
+          <a:xfrm>
+            <a:off x="8046719" y="1965960"/>
+            <a:ext cx="1508760" cy="640080"/>
+          </a:xfrm>
+          <a:prstGeom prst="rect">
+            <a:avLst/>
+          </a:prstGeom>
+          <a:noFill/>
+        </p:spPr>
+        <p:txBody>
+          <a:bodyPr wrap="square">
+            <a:spAutoFit/>
+          </a:bodyPr>
+          <a:lstStyle/>
+          <a:p>
+            <a:pPr algn="ctr"/>
+            <a:r>
+              <a:rPr sz="1200" b="1">
+                <a:solidFill>
+                  <a:srgbClr val="0F172A"/>
+                </a:solidFill>
+                <a:latin typeface="Calibri"/>
+              </a:rPr>
+              <a:t>REST下载</a:t>
+            </a:r>
+          </a:p>
+        </p:txBody>
+      </p:sp>
+      <p:sp>
+        <p:nvSpPr>
+          <p:cNvPr id="23" name="Right Arrow 22"/>
+          <p:cNvSpPr/>
+          <p:nvPr/>
+        </p:nvSpPr>
+        <p:spPr>
+          <a:xfrm>
+            <a:off x="9628631" y="2057400"/>
+            <a:ext cx="256032" cy="201168"/>
+          </a:xfrm>
+          <a:prstGeom prst="rightArrow">
+            <a:avLst/>
+          </a:prstGeom>
+          <a:solidFill>
+            <a:srgbClr val="0D9488"/>
+          </a:solidFill>
+          <a:ln>
+            <a:noFill/>
+          </a:ln>
+        </p:spPr>
+        <p:style>
+          <a:lnRef idx="1">
+            <a:schemeClr val="accent1"/>
+          </a:lnRef>
+          <a:fillRef idx="3">
+            <a:schemeClr val="accent1"/>
+          </a:fillRef>
+          <a:effectRef idx="2">
+            <a:schemeClr val="accent1"/>
+          </a:effectRef>
+          <a:fontRef idx="minor">
+            <a:schemeClr val="lt1"/>
+          </a:fontRef>
+        </p:style>
+        <p:txBody>
+          <a:bodyPr rtlCol="0" anchor="ctr"/>
+          <a:lstStyle/>
+          <a:p>
+            <a:pPr algn="ctr"/>
+          </a:p>
+        </p:txBody>
+      </p:sp>
+      <p:sp>
+        <p:nvSpPr>
+          <p:cNvPr id="24" name="Rounded Rectangle 23"/>
+          <p:cNvSpPr/>
+          <p:nvPr/>
+        </p:nvSpPr>
+        <p:spPr>
+          <a:xfrm>
+            <a:off x="9875520" y="1691640"/>
+            <a:ext cx="1600200" cy="1051560"/>
+          </a:xfrm>
+          <a:prstGeom prst="roundRect">
+            <a:avLst>
+              <a:gd name="adj" fmla="val 8000"/>
+            </a:avLst>
+          </a:prstGeom>
+          <a:solidFill>
+            <a:srgbClr val="FFFBEB"/>
+          </a:solidFill>
+          <a:ln w="12700">
+            <a:solidFill>
+              <a:srgbClr val="B45309"/>
+            </a:solidFill>
+          </a:ln>
+        </p:spPr>
+        <p:style>
+          <a:lnRef idx="1">
+            <a:schemeClr val="accent1"/>
+          </a:lnRef>
+          <a:fillRef idx="3">
+            <a:schemeClr val="accent1"/>
+          </a:fillRef>
+          <a:effectRef idx="2">
+            <a:schemeClr val="accent1"/>
+          </a:effectRef>
+          <a:fontRef idx="minor">
+            <a:schemeClr val="lt1"/>
+          </a:fontRef>
+        </p:style>
+        <p:txBody>
+          <a:bodyPr rtlCol="0" anchor="ctr"/>
+          <a:lstStyle/>
+          <a:p>
+            <a:pPr algn="ctr"/>
+          </a:p>
+        </p:txBody>
+      </p:sp>
+      <p:sp>
+        <p:nvSpPr>
+          <p:cNvPr id="25" name="TextBox 24"/>
+          <p:cNvSpPr txBox="1"/>
+          <p:nvPr/>
+        </p:nvSpPr>
+        <p:spPr>
+          <a:xfrm>
+            <a:off x="9921240" y="1965960"/>
+            <a:ext cx="1508760" cy="640080"/>
+          </a:xfrm>
+          <a:prstGeom prst="rect">
+            <a:avLst/>
+          </a:prstGeom>
+          <a:noFill/>
+        </p:spPr>
+        <p:txBody>
+          <a:bodyPr wrap="square">
+            <a:spAutoFit/>
+          </a:bodyPr>
+          <a:lstStyle/>
+          <a:p>
+            <a:pPr algn="ctr"/>
+            <a:r>
+              <a:rPr sz="1200" b="1">
+                <a:solidFill>
+                  <a:srgbClr val="B45309"/>
+                </a:solidFill>
+                <a:latin typeface="Calibri"/>
+              </a:rPr>
+              <a:t>附件/源码?</a:t>
+            </a:r>
+          </a:p>
+        </p:txBody>
+      </p:sp>
+      <p:sp>
+        <p:nvSpPr>
+          <p:cNvPr id="26" name="Rounded Rectangle 25"/>
+          <p:cNvSpPr/>
+          <p:nvPr/>
+        </p:nvSpPr>
+        <p:spPr>
+          <a:xfrm>
+            <a:off x="320040" y="3200400"/>
+            <a:ext cx="11521440" cy="1965960"/>
+          </a:xfrm>
+          <a:prstGeom prst="roundRect">
+            <a:avLst>
+              <a:gd name="adj" fmla="val 8000"/>
+            </a:avLst>
+          </a:prstGeom>
+          <a:solidFill>
+            <a:srgbClr val="F0FDFA"/>
+          </a:solidFill>
+          <a:ln w="12700">
+            <a:solidFill>
+              <a:srgbClr val="0D9488"/>
+            </a:solidFill>
+          </a:ln>
+        </p:spPr>
+        <p:style>
+          <a:lnRef idx="1">
+            <a:schemeClr val="accent1"/>
+          </a:lnRef>
+          <a:fillRef idx="3">
+            <a:schemeClr val="accent1"/>
+          </a:fillRef>
+          <a:effectRef idx="2">
+            <a:schemeClr val="accent1"/>
+          </a:effectRef>
+          <a:fontRef idx="minor">
+            <a:schemeClr val="lt1"/>
+          </a:fontRef>
+        </p:style>
+        <p:txBody>
+          <a:bodyPr rtlCol="0" anchor="ctr"/>
+          <a:lstStyle/>
+          <a:p>
+            <a:pPr algn="ctr"/>
+          </a:p>
+        </p:txBody>
+      </p:sp>
+      <p:sp>
+        <p:nvSpPr>
+          <p:cNvPr id="27" name="TextBox 26"/>
+          <p:cNvSpPr txBox="1"/>
+          <p:nvPr/>
+        </p:nvSpPr>
+        <p:spPr>
+          <a:xfrm>
+            <a:off x="457200" y="3291840"/>
+            <a:ext cx="11247120" cy="320040"/>
+          </a:xfrm>
+          <a:prstGeom prst="rect">
+            <a:avLst/>
+          </a:prstGeom>
+          <a:noFill/>
+        </p:spPr>
+        <p:txBody>
+          <a:bodyPr wrap="square">
+            <a:spAutoFit/>
+          </a:bodyPr>
+          <a:lstStyle/>
+          <a:p>
             <a:r>
               <a:rPr sz="1300" b="1">
                 <a:solidFill>
-                  <a:srgbClr val="0D9488"/>
-                </a:solidFill>
-                <a:latin typeface="Calibri"/>
-              </a:rPr>
-              <a:t>Gap 清单（按优先级）</a:t>
-            </a:r>
-          </a:p>
-          <a:p>
-            <a:pPr>
-              <a:spcBef>
-                <a:spcPts val="300"/>
-              </a:spcBef>
-            </a:pPr>
+                  <a:srgbClr val="0F766E"/>
+                </a:solidFill>
+                <a:latin typeface="Calibri"/>
+              </a:rPr>
+              <a:t>目标 TO-BE</a:t>
+            </a:r>
+          </a:p>
+        </p:txBody>
+      </p:sp>
+      <p:sp>
+        <p:nvSpPr>
+          <p:cNvPr id="28" name="Rounded Rectangle 27"/>
+          <p:cNvSpPr/>
+          <p:nvPr/>
+        </p:nvSpPr>
+        <p:spPr>
+          <a:xfrm>
+            <a:off x="502920" y="3794760"/>
+            <a:ext cx="1600200" cy="1051560"/>
+          </a:xfrm>
+          <a:prstGeom prst="roundRect">
+            <a:avLst>
+              <a:gd name="adj" fmla="val 8000"/>
+            </a:avLst>
+          </a:prstGeom>
+          <a:solidFill>
+            <a:srgbClr val="FFFFFF"/>
+          </a:solidFill>
+          <a:ln w="12700">
+            <a:solidFill>
+              <a:srgbClr val="0D9488"/>
+            </a:solidFill>
+          </a:ln>
+        </p:spPr>
+        <p:style>
+          <a:lnRef idx="1">
+            <a:schemeClr val="accent1"/>
+          </a:lnRef>
+          <a:fillRef idx="3">
+            <a:schemeClr val="accent1"/>
+          </a:fillRef>
+          <a:effectRef idx="2">
+            <a:schemeClr val="accent1"/>
+          </a:effectRef>
+          <a:fontRef idx="minor">
+            <a:schemeClr val="lt1"/>
+          </a:fontRef>
+        </p:style>
+        <p:txBody>
+          <a:bodyPr rtlCol="0" anchor="ctr"/>
+          <a:lstStyle/>
+          <a:p>
+            <a:pPr algn="ctr"/>
+          </a:p>
+        </p:txBody>
+      </p:sp>
+      <p:sp>
+        <p:nvSpPr>
+          <p:cNvPr id="29" name="TextBox 28"/>
+          <p:cNvSpPr txBox="1"/>
+          <p:nvPr/>
+        </p:nvSpPr>
+        <p:spPr>
+          <a:xfrm>
+            <a:off x="548640" y="4069080"/>
+            <a:ext cx="1508760" cy="640080"/>
+          </a:xfrm>
+          <a:prstGeom prst="rect">
+            <a:avLst/>
+          </a:prstGeom>
+          <a:noFill/>
+        </p:spPr>
+        <p:txBody>
+          <a:bodyPr wrap="square">
+            <a:spAutoFit/>
+          </a:bodyPr>
+          <a:lstStyle/>
+          <a:p>
+            <a:pPr algn="ctr"/>
+            <a:r>
+              <a:rPr sz="1200" b="1">
+                <a:solidFill>
+                  <a:srgbClr val="0F766E"/>
+                </a:solidFill>
+                <a:latin typeface="Calibri"/>
+              </a:rPr>
+              <a:t>Skill取数</a:t>
+            </a:r>
+          </a:p>
+        </p:txBody>
+      </p:sp>
+      <p:sp>
+        <p:nvSpPr>
+          <p:cNvPr id="30" name="Right Arrow 29"/>
+          <p:cNvSpPr/>
+          <p:nvPr/>
+        </p:nvSpPr>
+        <p:spPr>
+          <a:xfrm>
+            <a:off x="2130552" y="4160520"/>
+            <a:ext cx="256032" cy="201168"/>
+          </a:xfrm>
+          <a:prstGeom prst="rightArrow">
+            <a:avLst/>
+          </a:prstGeom>
+          <a:solidFill>
+            <a:srgbClr val="0F766E"/>
+          </a:solidFill>
+          <a:ln>
+            <a:noFill/>
+          </a:ln>
+        </p:spPr>
+        <p:style>
+          <a:lnRef idx="1">
+            <a:schemeClr val="accent1"/>
+          </a:lnRef>
+          <a:fillRef idx="3">
+            <a:schemeClr val="accent1"/>
+          </a:fillRef>
+          <a:effectRef idx="2">
+            <a:schemeClr val="accent1"/>
+          </a:effectRef>
+          <a:fontRef idx="minor">
+            <a:schemeClr val="lt1"/>
+          </a:fontRef>
+        </p:style>
+        <p:txBody>
+          <a:bodyPr rtlCol="0" anchor="ctr"/>
+          <a:lstStyle/>
+          <a:p>
+            <a:pPr algn="ctr"/>
+          </a:p>
+        </p:txBody>
+      </p:sp>
+      <p:sp>
+        <p:nvSpPr>
+          <p:cNvPr id="31" name="Rounded Rectangle 30"/>
+          <p:cNvSpPr/>
+          <p:nvPr/>
+        </p:nvSpPr>
+        <p:spPr>
+          <a:xfrm>
+            <a:off x="2377439" y="3794760"/>
+            <a:ext cx="1600200" cy="1051560"/>
+          </a:xfrm>
+          <a:prstGeom prst="roundRect">
+            <a:avLst>
+              <a:gd name="adj" fmla="val 8000"/>
+            </a:avLst>
+          </a:prstGeom>
+          <a:solidFill>
+            <a:srgbClr val="FFFFFF"/>
+          </a:solidFill>
+          <a:ln w="12700">
+            <a:solidFill>
+              <a:srgbClr val="0D9488"/>
+            </a:solidFill>
+          </a:ln>
+        </p:spPr>
+        <p:style>
+          <a:lnRef idx="1">
+            <a:schemeClr val="accent1"/>
+          </a:lnRef>
+          <a:fillRef idx="3">
+            <a:schemeClr val="accent1"/>
+          </a:fillRef>
+          <a:effectRef idx="2">
+            <a:schemeClr val="accent1"/>
+          </a:effectRef>
+          <a:fontRef idx="minor">
+            <a:schemeClr val="lt1"/>
+          </a:fontRef>
+        </p:style>
+        <p:txBody>
+          <a:bodyPr rtlCol="0" anchor="ctr"/>
+          <a:lstStyle/>
+          <a:p>
+            <a:pPr algn="ctr"/>
+          </a:p>
+        </p:txBody>
+      </p:sp>
+      <p:sp>
+        <p:nvSpPr>
+          <p:cNvPr id="32" name="TextBox 31"/>
+          <p:cNvSpPr txBox="1"/>
+          <p:nvPr/>
+        </p:nvSpPr>
+        <p:spPr>
+          <a:xfrm>
+            <a:off x="2423159" y="4069080"/>
+            <a:ext cx="1508760" cy="640080"/>
+          </a:xfrm>
+          <a:prstGeom prst="rect">
+            <a:avLst/>
+          </a:prstGeom>
+          <a:noFill/>
+        </p:spPr>
+        <p:txBody>
+          <a:bodyPr wrap="square">
+            <a:spAutoFit/>
+          </a:bodyPr>
+          <a:lstStyle/>
+          <a:p>
+            <a:pPr algn="ctr"/>
+            <a:r>
+              <a:rPr sz="1200" b="1">
+                <a:solidFill>
+                  <a:srgbClr val="0F766E"/>
+                </a:solidFill>
+                <a:latin typeface="Calibri"/>
+              </a:rPr>
+              <a:t>生成HTML</a:t>
+            </a:r>
+          </a:p>
+        </p:txBody>
+      </p:sp>
+      <p:sp>
+        <p:nvSpPr>
+          <p:cNvPr id="33" name="Right Arrow 32"/>
+          <p:cNvSpPr/>
+          <p:nvPr/>
+        </p:nvSpPr>
+        <p:spPr>
+          <a:xfrm>
+            <a:off x="4005071" y="4160520"/>
+            <a:ext cx="256032" cy="201168"/>
+          </a:xfrm>
+          <a:prstGeom prst="rightArrow">
+            <a:avLst/>
+          </a:prstGeom>
+          <a:solidFill>
+            <a:srgbClr val="0F766E"/>
+          </a:solidFill>
+          <a:ln>
+            <a:noFill/>
+          </a:ln>
+        </p:spPr>
+        <p:style>
+          <a:lnRef idx="1">
+            <a:schemeClr val="accent1"/>
+          </a:lnRef>
+          <a:fillRef idx="3">
+            <a:schemeClr val="accent1"/>
+          </a:fillRef>
+          <a:effectRef idx="2">
+            <a:schemeClr val="accent1"/>
+          </a:effectRef>
+          <a:fontRef idx="minor">
+            <a:schemeClr val="lt1"/>
+          </a:fontRef>
+        </p:style>
+        <p:txBody>
+          <a:bodyPr rtlCol="0" anchor="ctr"/>
+          <a:lstStyle/>
+          <a:p>
+            <a:pPr algn="ctr"/>
+          </a:p>
+        </p:txBody>
+      </p:sp>
+      <p:sp>
+        <p:nvSpPr>
+          <p:cNvPr id="34" name="Rounded Rectangle 33"/>
+          <p:cNvSpPr/>
+          <p:nvPr/>
+        </p:nvSpPr>
+        <p:spPr>
+          <a:xfrm>
+            <a:off x="4251959" y="3794760"/>
+            <a:ext cx="1600200" cy="1051560"/>
+          </a:xfrm>
+          <a:prstGeom prst="roundRect">
+            <a:avLst>
+              <a:gd name="adj" fmla="val 8000"/>
+            </a:avLst>
+          </a:prstGeom>
+          <a:solidFill>
+            <a:srgbClr val="FFFFFF"/>
+          </a:solidFill>
+          <a:ln w="12700">
+            <a:solidFill>
+              <a:srgbClr val="0D9488"/>
+            </a:solidFill>
+          </a:ln>
+        </p:spPr>
+        <p:style>
+          <a:lnRef idx="1">
+            <a:schemeClr val="accent1"/>
+          </a:lnRef>
+          <a:fillRef idx="3">
+            <a:schemeClr val="accent1"/>
+          </a:fillRef>
+          <a:effectRef idx="2">
+            <a:schemeClr val="accent1"/>
+          </a:effectRef>
+          <a:fontRef idx="minor">
+            <a:schemeClr val="lt1"/>
+          </a:fontRef>
+        </p:style>
+        <p:txBody>
+          <a:bodyPr rtlCol="0" anchor="ctr"/>
+          <a:lstStyle/>
+          <a:p>
+            <a:pPr algn="ctr"/>
+          </a:p>
+        </p:txBody>
+      </p:sp>
+      <p:sp>
+        <p:nvSpPr>
+          <p:cNvPr id="35" name="TextBox 34"/>
+          <p:cNvSpPr txBox="1"/>
+          <p:nvPr/>
+        </p:nvSpPr>
+        <p:spPr>
+          <a:xfrm>
+            <a:off x="4297679" y="4069080"/>
+            <a:ext cx="1508760" cy="640080"/>
+          </a:xfrm>
+          <a:prstGeom prst="rect">
+            <a:avLst/>
+          </a:prstGeom>
+          <a:noFill/>
+        </p:spPr>
+        <p:txBody>
+          <a:bodyPr wrap="square">
+            <a:spAutoFit/>
+          </a:bodyPr>
+          <a:lstStyle/>
+          <a:p>
+            <a:pPr algn="ctr"/>
+            <a:r>
+              <a:rPr sz="1200" b="1">
+                <a:solidFill>
+                  <a:srgbClr val="0F766E"/>
+                </a:solidFill>
+                <a:latin typeface="Calibri"/>
+              </a:rPr>
+              <a:t>write+同步</a:t>
+            </a:r>
+          </a:p>
+        </p:txBody>
+      </p:sp>
+      <p:sp>
+        <p:nvSpPr>
+          <p:cNvPr id="36" name="Right Arrow 35"/>
+          <p:cNvSpPr/>
+          <p:nvPr/>
+        </p:nvSpPr>
+        <p:spPr>
+          <a:xfrm>
+            <a:off x="5879591" y="4160520"/>
+            <a:ext cx="256032" cy="201168"/>
+          </a:xfrm>
+          <a:prstGeom prst="rightArrow">
+            <a:avLst/>
+          </a:prstGeom>
+          <a:solidFill>
+            <a:srgbClr val="0F766E"/>
+          </a:solidFill>
+          <a:ln>
+            <a:noFill/>
+          </a:ln>
+        </p:spPr>
+        <p:style>
+          <a:lnRef idx="1">
+            <a:schemeClr val="accent1"/>
+          </a:lnRef>
+          <a:fillRef idx="3">
+            <a:schemeClr val="accent1"/>
+          </a:fillRef>
+          <a:effectRef idx="2">
+            <a:schemeClr val="accent1"/>
+          </a:effectRef>
+          <a:fontRef idx="minor">
+            <a:schemeClr val="lt1"/>
+          </a:fontRef>
+        </p:style>
+        <p:txBody>
+          <a:bodyPr rtlCol="0" anchor="ctr"/>
+          <a:lstStyle/>
+          <a:p>
+            <a:pPr algn="ctr"/>
+          </a:p>
+        </p:txBody>
+      </p:sp>
+      <p:sp>
+        <p:nvSpPr>
+          <p:cNvPr id="37" name="Rounded Rectangle 36"/>
+          <p:cNvSpPr/>
+          <p:nvPr/>
+        </p:nvSpPr>
+        <p:spPr>
+          <a:xfrm>
+            <a:off x="6126479" y="3794760"/>
+            <a:ext cx="1600200" cy="1051560"/>
+          </a:xfrm>
+          <a:prstGeom prst="roundRect">
+            <a:avLst>
+              <a:gd name="adj" fmla="val 8000"/>
+            </a:avLst>
+          </a:prstGeom>
+          <a:solidFill>
+            <a:srgbClr val="FFFFFF"/>
+          </a:solidFill>
+          <a:ln w="12700">
+            <a:solidFill>
+              <a:srgbClr val="0D9488"/>
+            </a:solidFill>
+          </a:ln>
+        </p:spPr>
+        <p:style>
+          <a:lnRef idx="1">
+            <a:schemeClr val="accent1"/>
+          </a:lnRef>
+          <a:fillRef idx="3">
+            <a:schemeClr val="accent1"/>
+          </a:fillRef>
+          <a:effectRef idx="2">
+            <a:schemeClr val="accent1"/>
+          </a:effectRef>
+          <a:fontRef idx="minor">
+            <a:schemeClr val="lt1"/>
+          </a:fontRef>
+        </p:style>
+        <p:txBody>
+          <a:bodyPr rtlCol="0" anchor="ctr"/>
+          <a:lstStyle/>
+          <a:p>
+            <a:pPr algn="ctr"/>
+          </a:p>
+        </p:txBody>
+      </p:sp>
+      <p:sp>
+        <p:nvSpPr>
+          <p:cNvPr id="38" name="TextBox 37"/>
+          <p:cNvSpPr txBox="1"/>
+          <p:nvPr/>
+        </p:nvSpPr>
+        <p:spPr>
+          <a:xfrm>
+            <a:off x="6172199" y="4069080"/>
+            <a:ext cx="1508760" cy="640080"/>
+          </a:xfrm>
+          <a:prstGeom prst="rect">
+            <a:avLst/>
+          </a:prstGeom>
+          <a:noFill/>
+        </p:spPr>
+        <p:txBody>
+          <a:bodyPr wrap="square">
+            <a:spAutoFit/>
+          </a:bodyPr>
+          <a:lstStyle/>
+          <a:p>
+            <a:pPr algn="ctr"/>
+            <a:r>
+              <a:rPr sz="1200" b="1">
+                <a:solidFill>
+                  <a:srgbClr val="0F766E"/>
+                </a:solidFill>
+                <a:latin typeface="Calibri"/>
+              </a:rPr>
+              <a:t>识别preview</a:t>
+            </a:r>
+          </a:p>
+        </p:txBody>
+      </p:sp>
+      <p:sp>
+        <p:nvSpPr>
+          <p:cNvPr id="39" name="Right Arrow 38"/>
+          <p:cNvSpPr/>
+          <p:nvPr/>
+        </p:nvSpPr>
+        <p:spPr>
+          <a:xfrm>
+            <a:off x="7754111" y="4160520"/>
+            <a:ext cx="256032" cy="201168"/>
+          </a:xfrm>
+          <a:prstGeom prst="rightArrow">
+            <a:avLst/>
+          </a:prstGeom>
+          <a:solidFill>
+            <a:srgbClr val="0F766E"/>
+          </a:solidFill>
+          <a:ln>
+            <a:noFill/>
+          </a:ln>
+        </p:spPr>
+        <p:style>
+          <a:lnRef idx="1">
+            <a:schemeClr val="accent1"/>
+          </a:lnRef>
+          <a:fillRef idx="3">
+            <a:schemeClr val="accent1"/>
+          </a:fillRef>
+          <a:effectRef idx="2">
+            <a:schemeClr val="accent1"/>
+          </a:effectRef>
+          <a:fontRef idx="minor">
+            <a:schemeClr val="lt1"/>
+          </a:fontRef>
+        </p:style>
+        <p:txBody>
+          <a:bodyPr rtlCol="0" anchor="ctr"/>
+          <a:lstStyle/>
+          <a:p>
+            <a:pPr algn="ctr"/>
+          </a:p>
+        </p:txBody>
+      </p:sp>
+      <p:sp>
+        <p:nvSpPr>
+          <p:cNvPr id="40" name="Rounded Rectangle 39"/>
+          <p:cNvSpPr/>
+          <p:nvPr/>
+        </p:nvSpPr>
+        <p:spPr>
+          <a:xfrm>
+            <a:off x="8000999" y="3794760"/>
+            <a:ext cx="1600200" cy="1051560"/>
+          </a:xfrm>
+          <a:prstGeom prst="roundRect">
+            <a:avLst>
+              <a:gd name="adj" fmla="val 8000"/>
+            </a:avLst>
+          </a:prstGeom>
+          <a:solidFill>
+            <a:srgbClr val="FFFFFF"/>
+          </a:solidFill>
+          <a:ln w="12700">
+            <a:solidFill>
+              <a:srgbClr val="0D9488"/>
+            </a:solidFill>
+          </a:ln>
+        </p:spPr>
+        <p:style>
+          <a:lnRef idx="1">
+            <a:schemeClr val="accent1"/>
+          </a:lnRef>
+          <a:fillRef idx="3">
+            <a:schemeClr val="accent1"/>
+          </a:fillRef>
+          <a:effectRef idx="2">
+            <a:schemeClr val="accent1"/>
+          </a:effectRef>
+          <a:fontRef idx="minor">
+            <a:schemeClr val="lt1"/>
+          </a:fontRef>
+        </p:style>
+        <p:txBody>
+          <a:bodyPr rtlCol="0" anchor="ctr"/>
+          <a:lstStyle/>
+          <a:p>
+            <a:pPr algn="ctr"/>
+          </a:p>
+        </p:txBody>
+      </p:sp>
+      <p:sp>
+        <p:nvSpPr>
+          <p:cNvPr id="41" name="TextBox 40"/>
+          <p:cNvSpPr txBox="1"/>
+          <p:nvPr/>
+        </p:nvSpPr>
+        <p:spPr>
+          <a:xfrm>
+            <a:off x="8046719" y="4069080"/>
+            <a:ext cx="1508760" cy="640080"/>
+          </a:xfrm>
+          <a:prstGeom prst="rect">
+            <a:avLst/>
+          </a:prstGeom>
+          <a:noFill/>
+        </p:spPr>
+        <p:txBody>
+          <a:bodyPr wrap="square">
+            <a:spAutoFit/>
+          </a:bodyPr>
+          <a:lstStyle/>
+          <a:p>
+            <a:pPr algn="ctr"/>
+            <a:r>
+              <a:rPr sz="1200" b="1">
+                <a:solidFill>
+                  <a:srgbClr val="0F766E"/>
+                </a:solidFill>
+                <a:latin typeface="Calibri"/>
+              </a:rPr>
+              <a:t>沙箱渲染</a:t>
+            </a:r>
+          </a:p>
+        </p:txBody>
+      </p:sp>
+      <p:sp>
+        <p:nvSpPr>
+          <p:cNvPr id="42" name="Right Arrow 41"/>
+          <p:cNvSpPr/>
+          <p:nvPr/>
+        </p:nvSpPr>
+        <p:spPr>
+          <a:xfrm>
+            <a:off x="9628631" y="4160520"/>
+            <a:ext cx="256032" cy="201168"/>
+          </a:xfrm>
+          <a:prstGeom prst="rightArrow">
+            <a:avLst/>
+          </a:prstGeom>
+          <a:solidFill>
+            <a:srgbClr val="0F766E"/>
+          </a:solidFill>
+          <a:ln>
+            <a:noFill/>
+          </a:ln>
+        </p:spPr>
+        <p:style>
+          <a:lnRef idx="1">
+            <a:schemeClr val="accent1"/>
+          </a:lnRef>
+          <a:fillRef idx="3">
+            <a:schemeClr val="accent1"/>
+          </a:fillRef>
+          <a:effectRef idx="2">
+            <a:schemeClr val="accent1"/>
+          </a:effectRef>
+          <a:fontRef idx="minor">
+            <a:schemeClr val="lt1"/>
+          </a:fontRef>
+        </p:style>
+        <p:txBody>
+          <a:bodyPr rtlCol="0" anchor="ctr"/>
+          <a:lstStyle/>
+          <a:p>
+            <a:pPr algn="ctr"/>
+          </a:p>
+        </p:txBody>
+      </p:sp>
+      <p:sp>
+        <p:nvSpPr>
+          <p:cNvPr id="43" name="Rounded Rectangle 42"/>
+          <p:cNvSpPr/>
+          <p:nvPr/>
+        </p:nvSpPr>
+        <p:spPr>
+          <a:xfrm>
+            <a:off x="9875520" y="3794760"/>
+            <a:ext cx="1600200" cy="1051560"/>
+          </a:xfrm>
+          <a:prstGeom prst="roundRect">
+            <a:avLst>
+              <a:gd name="adj" fmla="val 8000"/>
+            </a:avLst>
+          </a:prstGeom>
+          <a:solidFill>
+            <a:srgbClr val="FFFFFF"/>
+          </a:solidFill>
+          <a:ln w="12700">
+            <a:solidFill>
+              <a:srgbClr val="0D9488"/>
+            </a:solidFill>
+          </a:ln>
+        </p:spPr>
+        <p:style>
+          <a:lnRef idx="1">
+            <a:schemeClr val="accent1"/>
+          </a:lnRef>
+          <a:fillRef idx="3">
+            <a:schemeClr val="accent1"/>
+          </a:fillRef>
+          <a:effectRef idx="2">
+            <a:schemeClr val="accent1"/>
+          </a:effectRef>
+          <a:fontRef idx="minor">
+            <a:schemeClr val="lt1"/>
+          </a:fontRef>
+        </p:style>
+        <p:txBody>
+          <a:bodyPr rtlCol="0" anchor="ctr"/>
+          <a:lstStyle/>
+          <a:p>
+            <a:pPr algn="ctr"/>
+          </a:p>
+        </p:txBody>
+      </p:sp>
+      <p:sp>
+        <p:nvSpPr>
+          <p:cNvPr id="44" name="TextBox 43"/>
+          <p:cNvSpPr txBox="1"/>
+          <p:nvPr/>
+        </p:nvSpPr>
+        <p:spPr>
+          <a:xfrm>
+            <a:off x="9921240" y="4069080"/>
+            <a:ext cx="1508760" cy="640080"/>
+          </a:xfrm>
+          <a:prstGeom prst="rect">
+            <a:avLst/>
+          </a:prstGeom>
+          <a:noFill/>
+        </p:spPr>
+        <p:txBody>
+          <a:bodyPr wrap="square">
+            <a:spAutoFit/>
+          </a:bodyPr>
+          <a:lstStyle/>
+          <a:p>
+            <a:pPr algn="ctr"/>
+            <a:r>
+              <a:rPr sz="1200" b="1">
+                <a:solidFill>
+                  <a:srgbClr val="0F766E"/>
+                </a:solidFill>
+                <a:latin typeface="Calibri"/>
+              </a:rPr>
+              <a:t>会话内交互</a:t>
+            </a:r>
+          </a:p>
+        </p:txBody>
+      </p:sp>
+      <p:sp>
+        <p:nvSpPr>
+          <p:cNvPr id="45" name="Rounded Rectangle 44"/>
+          <p:cNvSpPr/>
+          <p:nvPr/>
+        </p:nvSpPr>
+        <p:spPr>
+          <a:xfrm>
+            <a:off x="320040" y="5394960"/>
+            <a:ext cx="2240280" cy="1097280"/>
+          </a:xfrm>
+          <a:prstGeom prst="roundRect">
+            <a:avLst>
+              <a:gd name="adj" fmla="val 8000"/>
+            </a:avLst>
+          </a:prstGeom>
+          <a:solidFill>
+            <a:srgbClr val="FFFBEB"/>
+          </a:solidFill>
+          <a:ln w="12700">
+            <a:solidFill>
+              <a:srgbClr val="B45309"/>
+            </a:solidFill>
+          </a:ln>
+        </p:spPr>
+        <p:style>
+          <a:lnRef idx="1">
+            <a:schemeClr val="accent1"/>
+          </a:lnRef>
+          <a:fillRef idx="3">
+            <a:schemeClr val="accent1"/>
+          </a:fillRef>
+          <a:effectRef idx="2">
+            <a:schemeClr val="accent1"/>
+          </a:effectRef>
+          <a:fontRef idx="minor">
+            <a:schemeClr val="lt1"/>
+          </a:fontRef>
+        </p:style>
+        <p:txBody>
+          <a:bodyPr rtlCol="0" anchor="ctr"/>
+          <a:lstStyle/>
+          <a:p>
+            <a:pPr algn="ctr"/>
+          </a:p>
+        </p:txBody>
+      </p:sp>
+      <p:sp>
+        <p:nvSpPr>
+          <p:cNvPr id="46" name="TextBox 45"/>
+          <p:cNvSpPr txBox="1"/>
+          <p:nvPr/>
+        </p:nvSpPr>
+        <p:spPr>
+          <a:xfrm>
+            <a:off x="429768" y="5532120"/>
+            <a:ext cx="2011680" cy="868680"/>
+          </a:xfrm>
+          <a:prstGeom prst="rect">
+            <a:avLst/>
+          </a:prstGeom>
+          <a:noFill/>
+        </p:spPr>
+        <p:txBody>
+          <a:bodyPr wrap="square">
+            <a:spAutoFit/>
+          </a:bodyPr>
+          <a:lstStyle/>
+          <a:p>
+            <a:r>
+              <a:rPr sz="1200" b="1">
+                <a:solidFill>
+                  <a:srgbClr val="B45309"/>
+                </a:solidFill>
+                <a:latin typeface="Calibri"/>
+              </a:rPr>
+              <a:t>P0</a:t>
+            </a:r>
+          </a:p>
+          <a:p>
             <a:r>
               <a:rPr sz="1100" b="0">
                 <a:solidFill>
@@ -7549,15 +8690,91 @@
                 </a:solidFill>
                 <a:latin typeface="Calibri"/>
               </a:rPr>
-              <a:t>P0  端侧无 HTML 预览容器（Web：iframe / 原生：WebView）</a:t>
-            </a:r>
-          </a:p>
-          <a:p>
-            <a:pPr>
-              <a:spcBef>
-                <a:spcPts val="300"/>
-              </a:spcBef>
-            </a:pPr>
+              <a:t>预览容器 iframe/WebView</a:t>
+            </a:r>
+          </a:p>
+        </p:txBody>
+      </p:sp>
+      <p:sp>
+        <p:nvSpPr>
+          <p:cNvPr id="47" name="Rounded Rectangle 46"/>
+          <p:cNvSpPr/>
+          <p:nvPr/>
+        </p:nvSpPr>
+        <p:spPr>
+          <a:xfrm>
+            <a:off x="2651760" y="5394960"/>
+            <a:ext cx="2240280" cy="1097280"/>
+          </a:xfrm>
+          <a:prstGeom prst="roundRect">
+            <a:avLst>
+              <a:gd name="adj" fmla="val 8000"/>
+            </a:avLst>
+          </a:prstGeom>
+          <a:solidFill>
+            <a:srgbClr val="FFFBEB"/>
+          </a:solidFill>
+          <a:ln w="12700">
+            <a:solidFill>
+              <a:srgbClr val="B45309"/>
+            </a:solidFill>
+          </a:ln>
+        </p:spPr>
+        <p:style>
+          <a:lnRef idx="1">
+            <a:schemeClr val="accent1"/>
+          </a:lnRef>
+          <a:fillRef idx="3">
+            <a:schemeClr val="accent1"/>
+          </a:fillRef>
+          <a:effectRef idx="2">
+            <a:schemeClr val="accent1"/>
+          </a:effectRef>
+          <a:fontRef idx="minor">
+            <a:schemeClr val="lt1"/>
+          </a:fontRef>
+        </p:style>
+        <p:txBody>
+          <a:bodyPr rtlCol="0" anchor="ctr"/>
+          <a:lstStyle/>
+          <a:p>
+            <a:pPr algn="ctr"/>
+          </a:p>
+        </p:txBody>
+      </p:sp>
+      <p:sp>
+        <p:nvSpPr>
+          <p:cNvPr id="48" name="TextBox 47"/>
+          <p:cNvSpPr txBox="1"/>
+          <p:nvPr/>
+        </p:nvSpPr>
+        <p:spPr>
+          <a:xfrm>
+            <a:off x="2761488" y="5532120"/>
+            <a:ext cx="2011680" cy="868680"/>
+          </a:xfrm>
+          <a:prstGeom prst="rect">
+            <a:avLst/>
+          </a:prstGeom>
+          <a:noFill/>
+        </p:spPr>
+        <p:txBody>
+          <a:bodyPr wrap="square">
+            <a:spAutoFit/>
+          </a:bodyPr>
+          <a:lstStyle/>
+          <a:p>
+            <a:r>
+              <a:rPr sz="1200" b="1">
+                <a:solidFill>
+                  <a:srgbClr val="B45309"/>
+                </a:solidFill>
+                <a:latin typeface="Calibri"/>
+              </a:rPr>
+              <a:t>P0</a:t>
+            </a:r>
+          </a:p>
+          <a:p>
             <a:r>
               <a:rPr sz="1100" b="0">
                 <a:solidFill>
@@ -7565,15 +8782,91 @@
                 </a:solidFill>
                 <a:latin typeface="Calibri"/>
               </a:rPr>
-              <a:t>P0  缺 preview 元数据约定（mime=text/html、preview.kind、sync_status、file_id）</a:t>
-            </a:r>
-          </a:p>
-          <a:p>
-            <a:pPr>
-              <a:spcBef>
-                <a:spcPts val="300"/>
-              </a:spcBef>
-            </a:pPr>
+              <a:t>mime / preview 元数据</a:t>
+            </a:r>
+          </a:p>
+        </p:txBody>
+      </p:sp>
+      <p:sp>
+        <p:nvSpPr>
+          <p:cNvPr id="49" name="Rounded Rectangle 48"/>
+          <p:cNvSpPr/>
+          <p:nvPr/>
+        </p:nvSpPr>
+        <p:spPr>
+          <a:xfrm>
+            <a:off x="4983480" y="5394960"/>
+            <a:ext cx="2240280" cy="1097280"/>
+          </a:xfrm>
+          <a:prstGeom prst="roundRect">
+            <a:avLst>
+              <a:gd name="adj" fmla="val 8000"/>
+            </a:avLst>
+          </a:prstGeom>
+          <a:solidFill>
+            <a:srgbClr val="FFFBEB"/>
+          </a:solidFill>
+          <a:ln w="12700">
+            <a:solidFill>
+              <a:srgbClr val="B45309"/>
+            </a:solidFill>
+          </a:ln>
+        </p:spPr>
+        <p:style>
+          <a:lnRef idx="1">
+            <a:schemeClr val="accent1"/>
+          </a:lnRef>
+          <a:fillRef idx="3">
+            <a:schemeClr val="accent1"/>
+          </a:fillRef>
+          <a:effectRef idx="2">
+            <a:schemeClr val="accent1"/>
+          </a:effectRef>
+          <a:fontRef idx="minor">
+            <a:schemeClr val="lt1"/>
+          </a:fontRef>
+        </p:style>
+        <p:txBody>
+          <a:bodyPr rtlCol="0" anchor="ctr"/>
+          <a:lstStyle/>
+          <a:p>
+            <a:pPr algn="ctr"/>
+          </a:p>
+        </p:txBody>
+      </p:sp>
+      <p:sp>
+        <p:nvSpPr>
+          <p:cNvPr id="50" name="TextBox 49"/>
+          <p:cNvSpPr txBox="1"/>
+          <p:nvPr/>
+        </p:nvSpPr>
+        <p:spPr>
+          <a:xfrm>
+            <a:off x="5093208" y="5532120"/>
+            <a:ext cx="2011680" cy="868680"/>
+          </a:xfrm>
+          <a:prstGeom prst="rect">
+            <a:avLst/>
+          </a:prstGeom>
+          <a:noFill/>
+        </p:spPr>
+        <p:txBody>
+          <a:bodyPr wrap="square">
+            <a:spAutoFit/>
+          </a:bodyPr>
+          <a:lstStyle/>
+          <a:p>
+            <a:r>
+              <a:rPr sz="1200" b="1">
+                <a:solidFill>
+                  <a:srgbClr val="B45309"/>
+                </a:solidFill>
+                <a:latin typeface="Calibri"/>
+              </a:rPr>
+              <a:t>P0</a:t>
+            </a:r>
+          </a:p>
+          <a:p>
             <a:r>
               <a:rPr sz="1100" b="0">
                 <a:solidFill>
@@ -7581,15 +8874,91 @@
                 </a:solidFill>
                 <a:latin typeface="Calibri"/>
               </a:rPr>
-              <a:t>P0  缺安全默认（sandbox=allow-scripts，默认不加 allow-same-origin）</a:t>
-            </a:r>
-          </a:p>
-          <a:p>
-            <a:pPr>
-              <a:spcBef>
-                <a:spcPts val="300"/>
-              </a:spcBef>
-            </a:pPr>
+              <a:t>sandbox 安全默认</a:t>
+            </a:r>
+          </a:p>
+        </p:txBody>
+      </p:sp>
+      <p:sp>
+        <p:nvSpPr>
+          <p:cNvPr id="51" name="Rounded Rectangle 50"/>
+          <p:cNvSpPr/>
+          <p:nvPr/>
+        </p:nvSpPr>
+        <p:spPr>
+          <a:xfrm>
+            <a:off x="7315199" y="5394960"/>
+            <a:ext cx="2240280" cy="1097280"/>
+          </a:xfrm>
+          <a:prstGeom prst="roundRect">
+            <a:avLst>
+              <a:gd name="adj" fmla="val 8000"/>
+            </a:avLst>
+          </a:prstGeom>
+          <a:solidFill>
+            <a:srgbClr val="FFFFFF"/>
+          </a:solidFill>
+          <a:ln w="12700">
+            <a:solidFill>
+              <a:srgbClr val="E2E8F0"/>
+            </a:solidFill>
+          </a:ln>
+        </p:spPr>
+        <p:style>
+          <a:lnRef idx="1">
+            <a:schemeClr val="accent1"/>
+          </a:lnRef>
+          <a:fillRef idx="3">
+            <a:schemeClr val="accent1"/>
+          </a:fillRef>
+          <a:effectRef idx="2">
+            <a:schemeClr val="accent1"/>
+          </a:effectRef>
+          <a:fontRef idx="minor">
+            <a:schemeClr val="lt1"/>
+          </a:fontRef>
+        </p:style>
+        <p:txBody>
+          <a:bodyPr rtlCol="0" anchor="ctr"/>
+          <a:lstStyle/>
+          <a:p>
+            <a:pPr algn="ctr"/>
+          </a:p>
+        </p:txBody>
+      </p:sp>
+      <p:sp>
+        <p:nvSpPr>
+          <p:cNvPr id="52" name="TextBox 51"/>
+          <p:cNvSpPr txBox="1"/>
+          <p:nvPr/>
+        </p:nvSpPr>
+        <p:spPr>
+          <a:xfrm>
+            <a:off x="7424927" y="5532120"/>
+            <a:ext cx="2011680" cy="868680"/>
+          </a:xfrm>
+          <a:prstGeom prst="rect">
+            <a:avLst/>
+          </a:prstGeom>
+          <a:noFill/>
+        </p:spPr>
+        <p:txBody>
+          <a:bodyPr wrap="square">
+            <a:spAutoFit/>
+          </a:bodyPr>
+          <a:lstStyle/>
+          <a:p>
+            <a:r>
+              <a:rPr sz="1200" b="1">
+                <a:solidFill>
+                  <a:srgbClr val="64748B"/>
+                </a:solidFill>
+                <a:latin typeface="Calibri"/>
+              </a:rPr>
+              <a:t>P1</a:t>
+            </a:r>
+          </a:p>
+          <a:p>
             <a:r>
               <a:rPr sz="1100" b="0">
                 <a:solidFill>
@@ -7597,15 +8966,91 @@
                 </a:solidFill>
                 <a:latin typeface="Calibri"/>
               </a:rPr>
-              <a:t>P1  同步就绪信号（避免未 sync 完就拉 404）与刷新/降级策略</a:t>
-            </a:r>
-          </a:p>
-          <a:p>
-            <a:pPr>
-              <a:spcBef>
-                <a:spcPts val="300"/>
-              </a:spcBef>
-            </a:pPr>
+              <a:t>同步就绪与刷新降级</a:t>
+            </a:r>
+          </a:p>
+        </p:txBody>
+      </p:sp>
+      <p:sp>
+        <p:nvSpPr>
+          <p:cNvPr id="53" name="Rounded Rectangle 52"/>
+          <p:cNvSpPr/>
+          <p:nvPr/>
+        </p:nvSpPr>
+        <p:spPr>
+          <a:xfrm>
+            <a:off x="9646920" y="5394960"/>
+            <a:ext cx="2240280" cy="1097280"/>
+          </a:xfrm>
+          <a:prstGeom prst="roundRect">
+            <a:avLst>
+              <a:gd name="adj" fmla="val 8000"/>
+            </a:avLst>
+          </a:prstGeom>
+          <a:solidFill>
+            <a:srgbClr val="FFFFFF"/>
+          </a:solidFill>
+          <a:ln w="12700">
+            <a:solidFill>
+              <a:srgbClr val="E2E8F0"/>
+            </a:solidFill>
+          </a:ln>
+        </p:spPr>
+        <p:style>
+          <a:lnRef idx="1">
+            <a:schemeClr val="accent1"/>
+          </a:lnRef>
+          <a:fillRef idx="3">
+            <a:schemeClr val="accent1"/>
+          </a:fillRef>
+          <a:effectRef idx="2">
+            <a:schemeClr val="accent1"/>
+          </a:effectRef>
+          <a:fontRef idx="minor">
+            <a:schemeClr val="lt1"/>
+          </a:fontRef>
+        </p:style>
+        <p:txBody>
+          <a:bodyPr rtlCol="0" anchor="ctr"/>
+          <a:lstStyle/>
+          <a:p>
+            <a:pPr algn="ctr"/>
+          </a:p>
+        </p:txBody>
+      </p:sp>
+      <p:sp>
+        <p:nvSpPr>
+          <p:cNvPr id="54" name="TextBox 53"/>
+          <p:cNvSpPr txBox="1"/>
+          <p:nvPr/>
+        </p:nvSpPr>
+        <p:spPr>
+          <a:xfrm>
+            <a:off x="9756648" y="5532120"/>
+            <a:ext cx="2011680" cy="868680"/>
+          </a:xfrm>
+          <a:prstGeom prst="rect">
+            <a:avLst/>
+          </a:prstGeom>
+          <a:noFill/>
+        </p:spPr>
+        <p:txBody>
+          <a:bodyPr wrap="square">
+            <a:spAutoFit/>
+          </a:bodyPr>
+          <a:lstStyle/>
+          <a:p>
+            <a:r>
+              <a:rPr sz="1200" b="1">
+                <a:solidFill>
+                  <a:srgbClr val="64748B"/>
+                </a:solidFill>
+                <a:latin typeface="Calibri"/>
+              </a:rPr>
+              <a:t>P2</a:t>
+            </a:r>
+          </a:p>
+          <a:p>
             <a:r>
               <a:rPr sz="1100" b="0">
                 <a:solidFill>
@@ -7613,7 +9058,7 @@
                 </a:solidFill>
                 <a:latin typeface="Calibri"/>
               </a:rPr>
-              <a:t>P2  流式通道、混合预览、对外分享（签名 URL / TTL）</a:t>
+              <a:t>流式 / 混合 / 分享</a:t>
             </a:r>
           </a:p>
         </p:txBody>
@@ -7688,7 +9133,7 @@
         <p:spPr>
           <a:xfrm>
             <a:off x="0" y="0"/>
-            <a:ext cx="12191695" cy="914400"/>
+            <a:ext cx="12191695" cy="868680"/>
           </a:xfrm>
           <a:prstGeom prst="rect">
             <a:avLst/>
@@ -7730,8 +9175,8 @@
         </p:nvSpPr>
         <p:spPr>
           <a:xfrm>
-            <a:off x="0" y="914400"/>
-            <a:ext cx="12191695" cy="45720"/>
+            <a:off x="0" y="868680"/>
+            <a:ext cx="12191695" cy="54864"/>
           </a:xfrm>
           <a:prstGeom prst="rect">
             <a:avLst/>
@@ -7767,14 +9212,68 @@
       </p:sp>
       <p:sp>
         <p:nvSpPr>
-          <p:cNvPr id="5" name="TextBox 4"/>
+          <p:cNvPr id="5" name="Rounded Rectangle 4"/>
+          <p:cNvSpPr/>
+          <p:nvPr/>
+        </p:nvSpPr>
+        <p:spPr>
+          <a:xfrm>
+            <a:off x="411480" y="201168"/>
+            <a:ext cx="502920" cy="457200"/>
+          </a:xfrm>
+          <a:prstGeom prst="roundRect">
+            <a:avLst>
+              <a:gd name="adj" fmla="val 30000"/>
+            </a:avLst>
+          </a:prstGeom>
+          <a:solidFill>
+            <a:srgbClr val="0D9488"/>
+          </a:solidFill>
+          <a:ln>
+            <a:noFill/>
+          </a:ln>
+        </p:spPr>
+        <p:style>
+          <a:lnRef idx="1">
+            <a:schemeClr val="accent1"/>
+          </a:lnRef>
+          <a:fillRef idx="3">
+            <a:schemeClr val="accent1"/>
+          </a:fillRef>
+          <a:effectRef idx="2">
+            <a:schemeClr val="accent1"/>
+          </a:effectRef>
+          <a:fontRef idx="minor">
+            <a:schemeClr val="lt1"/>
+          </a:fontRef>
+        </p:style>
+        <p:txBody>
+          <a:bodyPr rtlCol="0" anchor="ctr"/>
+          <a:lstStyle/>
+          <a:p>
+            <a:pPr algn="ctr"/>
+            <a:r>
+              <a:rPr sz="1400" b="1">
+                <a:solidFill>
+                  <a:srgbClr val="FFFFFF"/>
+                </a:solidFill>
+                <a:latin typeface="Calibri"/>
+              </a:rPr>
+              <a:t>05</a:t>
+            </a:r>
+          </a:p>
+        </p:txBody>
+      </p:sp>
+      <p:sp>
+        <p:nvSpPr>
+          <p:cNvPr id="6" name="TextBox 5"/>
           <p:cNvSpPr txBox="1"/>
           <p:nvPr/>
         </p:nvSpPr>
         <p:spPr>
           <a:xfrm>
-            <a:off x="457200" y="201168"/>
-            <a:ext cx="11247120" cy="640080"/>
+            <a:off x="1051560" y="164592"/>
+            <a:ext cx="10515600" cy="640080"/>
           </a:xfrm>
           <a:prstGeom prst="rect">
             <a:avLst/>
@@ -7794,7 +9293,7 @@
                 </a:solidFill>
                 <a:latin typeface="Calibri"/>
               </a:rPr>
-              <a:t>05  实现方案对比</a:t>
+              <a:t>三种实现方案对比</a:t>
             </a:r>
           </a:p>
           <a:p>
@@ -7805,625 +9304,665 @@
                 </a:solidFill>
                 <a:latin typeface="Calibri"/>
               </a:rPr>
-              <a:t>三种路径：完整下载渲染 / 流式实时渲染 / 混合（流式粗预览 + 落盘定稿）</a:t>
-            </a:r>
-          </a:p>
-        </p:txBody>
-      </p:sp>
-      <p:graphicFrame>
-        <p:nvGraphicFramePr>
-          <p:cNvPr id="6" name="Table 5"/>
-          <p:cNvGraphicFramePr>
-            <a:graphicFrameLocks noGrp="1"/>
-          </p:cNvGraphicFramePr>
-          <p:nvPr/>
-        </p:nvGraphicFramePr>
-        <p:xfrm>
-          <a:off x="274320" y="1097280"/>
-          <a:ext cx="11612880" cy="5394960"/>
-        </p:xfrm>
-        <a:graphic>
-          <a:graphicData uri="http://schemas.openxmlformats.org/drawingml/2006/table">
-            <a:tbl>
-              <a:tblPr firstRow="1" bandRow="1">
-                <a:tableStyleId>{5C22544A-7EE6-4342-B048-85BDC9FD1C3A}</a:tableStyleId>
-              </a:tblPr>
-              <a:tblGrid>
-                <a:gridCol w="1188720"/>
-                <a:gridCol w="3474720"/>
-                <a:gridCol w="3474720"/>
-                <a:gridCol w="3474720"/>
-              </a:tblGrid>
-              <a:tr h="899160">
-                <a:tc>
-                  <a:txBody>
-                    <a:bodyPr wrap="square"/>
-                    <a:lstStyle/>
-                    <a:p>
-                      <a:pPr algn="ctr"/>
-                      <a:r>
-                        <a:rPr sz="1100" b="1">
-                          <a:solidFill>
-                            <a:srgbClr val="FFFFFF"/>
-                          </a:solidFill>
-                          <a:latin typeface="Calibri"/>
-                        </a:rPr>
-                        <a:t/>
-                      </a:r>
-                    </a:p>
-                  </a:txBody>
-                  <a:tcPr>
-                    <a:solidFill>
-                      <a:srgbClr val="0F172A"/>
-                    </a:solidFill>
-                  </a:tcPr>
-                </a:tc>
-                <a:tc>
-                  <a:txBody>
-                    <a:bodyPr wrap="square"/>
-                    <a:lstStyle/>
-                    <a:p>
-                      <a:pPr algn="ctr"/>
-                      <a:r>
-                        <a:rPr sz="1100" b="1">
-                          <a:solidFill>
-                            <a:srgbClr val="FFFFFF"/>
-                          </a:solidFill>
-                          <a:latin typeface="Calibri"/>
-                        </a:rPr>
-                        <a:t>方案 A
-下载后推送到端渲染</a:t>
-                      </a:r>
-                    </a:p>
-                  </a:txBody>
-                  <a:tcPr>
-                    <a:solidFill>
-                      <a:srgbClr val="0F766E"/>
-                    </a:solidFill>
-                  </a:tcPr>
-                </a:tc>
-                <a:tc>
-                  <a:txBody>
-                    <a:bodyPr wrap="square"/>
-                    <a:lstStyle/>
-                    <a:p>
-                      <a:pPr algn="ctr"/>
-                      <a:r>
-                        <a:rPr sz="1100" b="1">
-                          <a:solidFill>
-                            <a:srgbClr val="FFFFFF"/>
-                          </a:solidFill>
-                          <a:latin typeface="Calibri"/>
-                        </a:rPr>
-                        <a:t>方案 B
-模型输出流式到端实时渲染</a:t>
-                      </a:r>
-                    </a:p>
-                  </a:txBody>
-                  <a:tcPr>
-                    <a:solidFill>
-                      <a:srgbClr val="0F766E"/>
-                    </a:solidFill>
-                  </a:tcPr>
-                </a:tc>
-                <a:tc>
-                  <a:txBody>
-                    <a:bodyPr wrap="square"/>
-                    <a:lstStyle/>
-                    <a:p>
-                      <a:pPr algn="ctr"/>
-                      <a:r>
-                        <a:rPr sz="1100" b="1">
-                          <a:solidFill>
-                            <a:srgbClr val="FFFFFF"/>
-                          </a:solidFill>
-                          <a:latin typeface="Calibri"/>
-                        </a:rPr>
-                        <a:t>方案 C（混合）
-流式粗预览 + 完成后落盘定稿</a:t>
-                      </a:r>
-                    </a:p>
-                  </a:txBody>
-                  <a:tcPr>
-                    <a:solidFill>
-                      <a:srgbClr val="0F766E"/>
-                    </a:solidFill>
-                  </a:tcPr>
-                </a:tc>
-              </a:tr>
-              <a:tr h="899160">
-                <a:tc>
-                  <a:txBody>
-                    <a:bodyPr wrap="square"/>
-                    <a:lstStyle/>
-                    <a:p>
-                      <a:pPr algn="ctr"/>
-                      <a:r>
-                        <a:rPr sz="1100" b="1">
-                          <a:solidFill>
-                            <a:srgbClr val="0F172A"/>
-                          </a:solidFill>
-                          <a:latin typeface="Calibri"/>
-                        </a:rPr>
-                        <a:t>流程</a:t>
-                      </a:r>
-                    </a:p>
-                  </a:txBody>
-                  <a:tcPr>
-                    <a:solidFill>
-                      <a:srgbClr val="F0FDFA"/>
-                    </a:solidFill>
-                  </a:tcPr>
-                </a:tc>
-                <a:tc>
-                  <a:txBody>
-                    <a:bodyPr wrap="square"/>
-                    <a:lstStyle/>
-                    <a:p>
-                      <a:pPr algn="l"/>
-                      <a:r>
-                        <a:rPr sz="1000" b="0">
-                          <a:solidFill>
-                            <a:srgbClr val="334155"/>
-                          </a:solidFill>
-                          <a:latin typeface="Calibri"/>
-                        </a:rPr>
-                        <a:t>write→同步云空间
-→REST 下载全文
-→一次加载预览</a:t>
-                      </a:r>
-                    </a:p>
-                  </a:txBody>
-                  <a:tcPr>
-                    <a:solidFill>
-                      <a:srgbClr val="FFFFFF"/>
-                    </a:solidFill>
-                  </a:tcPr>
-                </a:tc>
-                <a:tc>
-                  <a:txBody>
-                    <a:bodyPr wrap="square"/>
-                    <a:lstStyle/>
-                    <a:p>
-                      <a:pPr algn="l"/>
-                      <a:r>
-                        <a:rPr sz="1000" b="0">
-                          <a:solidFill>
-                            <a:srgbClr val="334155"/>
-                          </a:solidFill>
-                          <a:latin typeface="Calibri"/>
-                        </a:rPr>
-                        <a:t>token/delta 推送
-→端 buffer
-→边收边刷新 iframe</a:t>
-                      </a:r>
-                    </a:p>
-                  </a:txBody>
-                  <a:tcPr>
-                    <a:solidFill>
-                      <a:srgbClr val="FFFFFF"/>
-                    </a:solidFill>
-                  </a:tcPr>
-                </a:tc>
-                <a:tc>
-                  <a:txBody>
-                    <a:bodyPr wrap="square"/>
-                    <a:lstStyle/>
-                    <a:p>
-                      <a:pPr algn="l"/>
-                      <a:r>
-                        <a:rPr sz="1000" b="0">
-                          <a:solidFill>
-                            <a:srgbClr val="334155"/>
-                          </a:solidFill>
-                          <a:latin typeface="Calibri"/>
-                        </a:rPr>
-                        <a:t>流式先出粗画面
-→同时/完成后 write 同步
-→最终以完整版替换</a:t>
-                      </a:r>
-                    </a:p>
-                  </a:txBody>
-                  <a:tcPr>
-                    <a:solidFill>
-                      <a:srgbClr val="FFFFFF"/>
-                    </a:solidFill>
-                  </a:tcPr>
-                </a:tc>
-              </a:tr>
-              <a:tr h="899160">
-                <a:tc>
-                  <a:txBody>
-                    <a:bodyPr wrap="square"/>
-                    <a:lstStyle/>
-                    <a:p>
-                      <a:pPr algn="ctr"/>
-                      <a:r>
-                        <a:rPr sz="1100" b="1">
-                          <a:solidFill>
-                            <a:srgbClr val="0F172A"/>
-                          </a:solidFill>
-                          <a:latin typeface="Calibri"/>
-                        </a:rPr>
-                        <a:t>优势</a:t>
-                      </a:r>
-                    </a:p>
-                  </a:txBody>
-                  <a:tcPr>
-                    <a:solidFill>
-                      <a:srgbClr val="F0FDFA"/>
-                    </a:solidFill>
-                  </a:tcPr>
-                </a:tc>
-                <a:tc>
-                  <a:txBody>
-                    <a:bodyPr wrap="square"/>
-                    <a:lstStyle/>
-                    <a:p>
-                      <a:pPr algn="l"/>
-                      <a:r>
-                        <a:rPr sz="1000" b="0">
-                          <a:solidFill>
-                            <a:srgbClr val="334155"/>
-                          </a:solidFill>
-                          <a:latin typeface="Calibri"/>
-                        </a:rPr>
-                        <a:t>稳、标签完整
-脚本只跑一次
-易刷新/回放/多端
-贴合现有云空间</a:t>
-                      </a:r>
-                    </a:p>
-                  </a:txBody>
-                  <a:tcPr>
-                    <a:solidFill>
-                      <a:srgbClr val="FFFFFF"/>
-                    </a:solidFill>
-                  </a:tcPr>
-                </a:tc>
-                <a:tc>
-                  <a:txBody>
-                    <a:bodyPr wrap="square"/>
-                    <a:lstStyle/>
-                    <a:p>
-                      <a:pPr algn="l"/>
-                      <a:r>
-                        <a:rPr sz="1000" b="0">
-                          <a:solidFill>
-                            <a:srgbClr val="334155"/>
-                          </a:solidFill>
-                          <a:latin typeface="Calibri"/>
-                        </a:rPr>
-                        <a:t>首屏快
-体感像流式 MD
-等待焦虑低</a:t>
-                      </a:r>
-                    </a:p>
-                  </a:txBody>
-                  <a:tcPr>
-                    <a:solidFill>
-                      <a:srgbClr val="FFFFFF"/>
-                    </a:solidFill>
-                  </a:tcPr>
-                </a:tc>
-                <a:tc>
-                  <a:txBody>
-                    <a:bodyPr wrap="square"/>
-                    <a:lstStyle/>
-                    <a:p>
-                      <a:pPr algn="l"/>
-                      <a:r>
-                        <a:rPr sz="1000" b="0">
-                          <a:solidFill>
-                            <a:srgbClr val="334155"/>
-                          </a:solidFill>
-                          <a:latin typeface="Calibri"/>
-                        </a:rPr>
-                        <a:t>体验接近 B
-正确性兜底靠 A
-适合报告类长 HTML</a:t>
-                      </a:r>
-                    </a:p>
-                  </a:txBody>
-                  <a:tcPr>
-                    <a:solidFill>
-                      <a:srgbClr val="FFFFFF"/>
-                    </a:solidFill>
-                  </a:tcPr>
-                </a:tc>
-              </a:tr>
-              <a:tr h="899160">
-                <a:tc>
-                  <a:txBody>
-                    <a:bodyPr wrap="square"/>
-                    <a:lstStyle/>
-                    <a:p>
-                      <a:pPr algn="ctr"/>
-                      <a:r>
-                        <a:rPr sz="1100" b="1">
-                          <a:solidFill>
-                            <a:srgbClr val="0F172A"/>
-                          </a:solidFill>
-                          <a:latin typeface="Calibri"/>
-                        </a:rPr>
-                        <a:t>劣势</a:t>
-                      </a:r>
-                    </a:p>
-                  </a:txBody>
-                  <a:tcPr>
-                    <a:solidFill>
-                      <a:srgbClr val="F0FDFA"/>
-                    </a:solidFill>
-                  </a:tcPr>
-                </a:tc>
-                <a:tc>
-                  <a:txBody>
-                    <a:bodyPr wrap="square"/>
-                    <a:lstStyle/>
-                    <a:p>
-                      <a:pPr algn="l"/>
-                      <a:r>
-                        <a:rPr sz="1000" b="0">
-                          <a:solidFill>
-                            <a:srgbClr val="334155"/>
-                          </a:solidFill>
-                          <a:latin typeface="Calibri"/>
-                        </a:rPr>
-                        <a:t>需等生成+同步
-才出首屏</a:t>
-                      </a:r>
-                    </a:p>
-                  </a:txBody>
-                  <a:tcPr>
-                    <a:solidFill>
-                      <a:srgbClr val="FFFFFF"/>
-                    </a:solidFill>
-                  </a:tcPr>
-                </a:tc>
-                <a:tc>
-                  <a:txBody>
-                    <a:bodyPr wrap="square"/>
-                    <a:lstStyle/>
-                    <a:p>
-                      <a:pPr algn="l"/>
-                      <a:r>
-                        <a:rPr sz="1000" b="0">
-                          <a:solidFill>
-                            <a:srgbClr val="334155"/>
-                          </a:solidFill>
-                          <a:latin typeface="Calibri"/>
-                        </a:rPr>
-                        <a:t>未闭合标签易花屏
-脚本易重复执行
-要单独推送通道</a:t>
-                      </a:r>
-                    </a:p>
-                  </a:txBody>
-                  <a:tcPr>
-                    <a:solidFill>
-                      <a:srgbClr val="FFFFFF"/>
-                    </a:solidFill>
-                  </a:tcPr>
-                </a:tc>
-                <a:tc>
-                  <a:txBody>
-                    <a:bodyPr wrap="square"/>
-                    <a:lstStyle/>
-                    <a:p>
-                      <a:pPr algn="l"/>
-                      <a:r>
-                        <a:rPr sz="1000" b="0">
-                          <a:solidFill>
-                            <a:srgbClr val="334155"/>
-                          </a:solidFill>
-                          <a:latin typeface="Calibri"/>
-                        </a:rPr>
-                        <a:t>实现与状态机更复杂
-需明确「粗预览/定稿」切换</a:t>
-                      </a:r>
-                    </a:p>
-                  </a:txBody>
-                  <a:tcPr>
-                    <a:solidFill>
-                      <a:srgbClr val="FFFFFF"/>
-                    </a:solidFill>
-                  </a:tcPr>
-                </a:tc>
-              </a:tr>
-              <a:tr h="899160">
-                <a:tc>
-                  <a:txBody>
-                    <a:bodyPr wrap="square"/>
-                    <a:lstStyle/>
-                    <a:p>
-                      <a:pPr algn="ctr"/>
-                      <a:r>
-                        <a:rPr sz="1100" b="1">
-                          <a:solidFill>
-                            <a:srgbClr val="0F172A"/>
-                          </a:solidFill>
-                          <a:latin typeface="Calibri"/>
-                        </a:rPr>
-                        <a:t>依赖</a:t>
-                      </a:r>
-                    </a:p>
-                  </a:txBody>
-                  <a:tcPr>
-                    <a:solidFill>
-                      <a:srgbClr val="F0FDFA"/>
-                    </a:solidFill>
-                  </a:tcPr>
-                </a:tc>
-                <a:tc>
-                  <a:txBody>
-                    <a:bodyPr wrap="square"/>
-                    <a:lstStyle/>
-                    <a:p>
-                      <a:pPr algn="l"/>
-                      <a:r>
-                        <a:rPr sz="1000" b="0">
-                          <a:solidFill>
-                            <a:srgbClr val="334155"/>
-                          </a:solidFill>
-                          <a:latin typeface="Calibri"/>
-                        </a:rPr>
-                        <a:t>write+云空间
-+端预览容器</a:t>
-                      </a:r>
-                    </a:p>
-                  </a:txBody>
-                  <a:tcPr>
-                    <a:solidFill>
-                      <a:srgbClr val="FFFFFF"/>
-                    </a:solidFill>
-                  </a:tcPr>
-                </a:tc>
-                <a:tc>
-                  <a:txBody>
-                    <a:bodyPr wrap="square"/>
-                    <a:lstStyle/>
-                    <a:p>
-                      <a:pPr algn="l"/>
-                      <a:r>
-                        <a:rPr sz="1000" b="0">
-                          <a:solidFill>
-                            <a:srgbClr val="334155"/>
-                          </a:solidFill>
-                          <a:latin typeface="Calibri"/>
-                        </a:rPr>
-                        <a:t>流式协议
-+端节流策略</a:t>
-                      </a:r>
-                    </a:p>
-                  </a:txBody>
-                  <a:tcPr>
-                    <a:solidFill>
-                      <a:srgbClr val="FFFFFF"/>
-                    </a:solidFill>
-                  </a:tcPr>
-                </a:tc>
-                <a:tc>
-                  <a:txBody>
-                    <a:bodyPr wrap="square"/>
-                    <a:lstStyle/>
-                    <a:p>
-                      <a:pPr algn="l"/>
-                      <a:r>
-                        <a:rPr sz="1000" b="0">
-                          <a:solidFill>
-                            <a:srgbClr val="334155"/>
-                          </a:solidFill>
-                          <a:latin typeface="Calibri"/>
-                        </a:rPr>
-                        <a:t>A+B 能力叠加</a:t>
-                      </a:r>
-                    </a:p>
-                  </a:txBody>
-                  <a:tcPr>
-                    <a:solidFill>
-                      <a:srgbClr val="FFFFFF"/>
-                    </a:solidFill>
-                  </a:tcPr>
-                </a:tc>
-              </a:tr>
-              <a:tr h="899160">
-                <a:tc>
-                  <a:txBody>
-                    <a:bodyPr wrap="square"/>
-                    <a:lstStyle/>
-                    <a:p>
-                      <a:pPr algn="ctr"/>
-                      <a:r>
-                        <a:rPr sz="1100" b="1">
-                          <a:solidFill>
-                            <a:srgbClr val="0F172A"/>
-                          </a:solidFill>
-                          <a:latin typeface="Calibri"/>
-                        </a:rPr>
-                        <a:t>建议</a:t>
-                      </a:r>
-                    </a:p>
-                  </a:txBody>
-                  <a:tcPr>
-                    <a:solidFill>
-                      <a:srgbClr val="F0FDFA"/>
-                    </a:solidFill>
-                  </a:tcPr>
-                </a:tc>
-                <a:tc>
-                  <a:txBody>
-                    <a:bodyPr wrap="square"/>
-                    <a:lstStyle/>
-                    <a:p>
-                      <a:pPr algn="ctr"/>
-                      <a:r>
-                        <a:rPr sz="1100" b="1">
-                          <a:solidFill>
-                            <a:srgbClr val="047857"/>
-                          </a:solidFill>
-                          <a:latin typeface="Calibri"/>
-                        </a:rPr>
-                        <a:t>一期默认 ★</a:t>
-                      </a:r>
-                    </a:p>
-                  </a:txBody>
-                  <a:tcPr>
-                    <a:solidFill>
-                      <a:srgbClr val="FFFBEB"/>
-                    </a:solidFill>
-                  </a:tcPr>
-                </a:tc>
-                <a:tc>
-                  <a:txBody>
-                    <a:bodyPr wrap="square"/>
-                    <a:lstStyle/>
-                    <a:p>
-                      <a:pPr algn="ctr"/>
-                      <a:r>
-                        <a:rPr sz="1100" b="1">
-                          <a:solidFill>
-                            <a:srgbClr val="334155"/>
-                          </a:solidFill>
-                          <a:latin typeface="Calibri"/>
-                        </a:rPr>
-                        <a:t>二期体验增强</a:t>
-                      </a:r>
-                    </a:p>
-                  </a:txBody>
-                  <a:tcPr>
-                    <a:solidFill>
-                      <a:srgbClr val="FFFFFF"/>
-                    </a:solidFill>
-                  </a:tcPr>
-                </a:tc>
-                <a:tc>
-                  <a:txBody>
-                    <a:bodyPr wrap="square"/>
-                    <a:lstStyle/>
-                    <a:p>
-                      <a:pPr algn="ctr"/>
-                      <a:r>
-                        <a:rPr sz="1100" b="1">
-                          <a:solidFill>
-                            <a:srgbClr val="047857"/>
-                          </a:solidFill>
-                          <a:latin typeface="Calibri"/>
-                        </a:rPr>
-                        <a:t>报告场景推荐演进 ★</a:t>
-                      </a:r>
-                    </a:p>
-                  </a:txBody>
-                  <a:tcPr>
-                    <a:solidFill>
-                      <a:srgbClr val="FFFBEB"/>
-                    </a:solidFill>
-                  </a:tcPr>
-                </a:tc>
-              </a:tr>
-            </a:tbl>
-          </a:graphicData>
-        </a:graphic>
-      </p:graphicFrame>
+              <a:t>A 下载后渲染 · B 流式实时 · C 混合（流式粗预览 + 落盘定稿）</a:t>
+            </a:r>
+          </a:p>
+        </p:txBody>
+      </p:sp>
+      <p:pic>
+        <p:nvPicPr>
+          <p:cNvPr id="7" name="Picture 6" descr="ppt-three-schemes.png"/>
+          <p:cNvPicPr>
+            <a:picLocks noChangeAspect="1"/>
+          </p:cNvPicPr>
+          <p:nvPr/>
+        </p:nvPicPr>
+        <p:blipFill>
+          <a:blip r:embed="rId2"/>
+          <a:stretch>
+            <a:fillRect/>
+          </a:stretch>
+        </p:blipFill>
+        <p:spPr>
+          <a:xfrm>
+            <a:off x="365760" y="1051560"/>
+            <a:ext cx="11430000" cy="2148840"/>
+          </a:xfrm>
+          <a:prstGeom prst="rect">
+            <a:avLst/>
+          </a:prstGeom>
+        </p:spPr>
+      </p:pic>
+      <p:sp>
+        <p:nvSpPr>
+          <p:cNvPr id="8" name="Rounded Rectangle 7"/>
+          <p:cNvSpPr/>
+          <p:nvPr/>
+        </p:nvSpPr>
+        <p:spPr>
+          <a:xfrm>
+            <a:off x="365760" y="3337560"/>
+            <a:ext cx="3703320" cy="3154680"/>
+          </a:xfrm>
+          <a:prstGeom prst="roundRect">
+            <a:avLst>
+              <a:gd name="adj" fmla="val 8000"/>
+            </a:avLst>
+          </a:prstGeom>
+          <a:solidFill>
+            <a:srgbClr val="F0FDFA"/>
+          </a:solidFill>
+          <a:ln w="12700">
+            <a:solidFill>
+              <a:srgbClr val="0D9488"/>
+            </a:solidFill>
+          </a:ln>
+        </p:spPr>
+        <p:style>
+          <a:lnRef idx="1">
+            <a:schemeClr val="accent1"/>
+          </a:lnRef>
+          <a:fillRef idx="3">
+            <a:schemeClr val="accent1"/>
+          </a:fillRef>
+          <a:effectRef idx="2">
+            <a:schemeClr val="accent1"/>
+          </a:effectRef>
+          <a:fontRef idx="minor">
+            <a:schemeClr val="lt1"/>
+          </a:fontRef>
+        </p:style>
+        <p:txBody>
+          <a:bodyPr rtlCol="0" anchor="ctr"/>
+          <a:lstStyle/>
+          <a:p>
+            <a:pPr algn="ctr"/>
+          </a:p>
+        </p:txBody>
+      </p:sp>
+      <p:sp>
+        <p:nvSpPr>
+          <p:cNvPr id="9" name="Rounded Rectangle 8"/>
+          <p:cNvSpPr/>
+          <p:nvPr/>
+        </p:nvSpPr>
+        <p:spPr>
+          <a:xfrm>
+            <a:off x="502920" y="3474720"/>
+            <a:ext cx="2011680" cy="292608"/>
+          </a:xfrm>
+          <a:prstGeom prst="roundRect">
+            <a:avLst>
+              <a:gd name="adj" fmla="val 40000"/>
+            </a:avLst>
+          </a:prstGeom>
+          <a:solidFill>
+            <a:srgbClr val="0D9488"/>
+          </a:solidFill>
+          <a:ln>
+            <a:noFill/>
+          </a:ln>
+        </p:spPr>
+        <p:style>
+          <a:lnRef idx="1">
+            <a:schemeClr val="accent1"/>
+          </a:lnRef>
+          <a:fillRef idx="3">
+            <a:schemeClr val="accent1"/>
+          </a:fillRef>
+          <a:effectRef idx="2">
+            <a:schemeClr val="accent1"/>
+          </a:effectRef>
+          <a:fontRef idx="minor">
+            <a:schemeClr val="lt1"/>
+          </a:fontRef>
+        </p:style>
+        <p:txBody>
+          <a:bodyPr rtlCol="0" anchor="ctr"/>
+          <a:lstStyle/>
+          <a:p>
+            <a:pPr algn="ctr"/>
+            <a:r>
+              <a:rPr sz="1000" b="1">
+                <a:solidFill>
+                  <a:srgbClr val="FFFFFF"/>
+                </a:solidFill>
+                <a:latin typeface="Calibri"/>
+              </a:rPr>
+              <a:t>一期默认 ★</a:t>
+            </a:r>
+          </a:p>
+        </p:txBody>
+      </p:sp>
+      <p:sp>
+        <p:nvSpPr>
+          <p:cNvPr id="10" name="TextBox 9"/>
+          <p:cNvSpPr txBox="1"/>
+          <p:nvPr/>
+        </p:nvSpPr>
+        <p:spPr>
+          <a:xfrm>
+            <a:off x="530352" y="3886200"/>
+            <a:ext cx="3383280" cy="2468880"/>
+          </a:xfrm>
+          <a:prstGeom prst="rect">
+            <a:avLst/>
+          </a:prstGeom>
+          <a:noFill/>
+        </p:spPr>
+        <p:txBody>
+          <a:bodyPr wrap="square">
+            <a:spAutoFit/>
+          </a:bodyPr>
+          <a:lstStyle/>
+          <a:p>
+            <a:r>
+              <a:rPr sz="1400" b="1">
+                <a:solidFill>
+                  <a:srgbClr val="0F172A"/>
+                </a:solidFill>
+                <a:latin typeface="Calibri"/>
+              </a:rPr>
+              <a:t>方案 A · 下载后渲染</a:t>
+            </a:r>
+          </a:p>
+          <a:p>
+            <a:pPr>
+              <a:spcBef>
+                <a:spcPts val="800"/>
+              </a:spcBef>
+            </a:pPr>
+            <a:r>
+              <a:rPr sz="1100" b="1">
+                <a:solidFill>
+                  <a:srgbClr val="0F766E"/>
+                </a:solidFill>
+                <a:latin typeface="Calibri"/>
+              </a:rPr>
+              <a:t>流程：</a:t>
+            </a:r>
+            <a:r>
+              <a:rPr sz="1100" b="0">
+                <a:solidFill>
+                  <a:srgbClr val="334155"/>
+                </a:solidFill>
+                <a:latin typeface="Calibri"/>
+              </a:rPr>
+              <a:t>write→同步→REST全文→一次加载</a:t>
+            </a:r>
+          </a:p>
+          <a:p>
+            <a:pPr>
+              <a:spcBef>
+                <a:spcPts val="800"/>
+              </a:spcBef>
+            </a:pPr>
+            <a:r>
+              <a:rPr sz="1100" b="1">
+                <a:solidFill>
+                  <a:srgbClr val="0F766E"/>
+                </a:solidFill>
+                <a:latin typeface="Calibri"/>
+              </a:rPr>
+              <a:t>优势：</a:t>
+            </a:r>
+            <a:r>
+              <a:rPr sz="1100" b="0">
+                <a:solidFill>
+                  <a:srgbClr val="334155"/>
+                </a:solidFill>
+                <a:latin typeface="Calibri"/>
+              </a:rPr>
+              <a:t>稳、完整、易回放、贴合云空间</a:t>
+            </a:r>
+          </a:p>
+          <a:p>
+            <a:pPr>
+              <a:spcBef>
+                <a:spcPts val="800"/>
+              </a:spcBef>
+            </a:pPr>
+            <a:r>
+              <a:rPr sz="1100" b="1">
+                <a:solidFill>
+                  <a:srgbClr val="0F766E"/>
+                </a:solidFill>
+                <a:latin typeface="Calibri"/>
+              </a:rPr>
+              <a:t>代价：</a:t>
+            </a:r>
+            <a:r>
+              <a:rPr sz="1100" b="0">
+                <a:solidFill>
+                  <a:srgbClr val="334155"/>
+                </a:solidFill>
+                <a:latin typeface="Calibri"/>
+              </a:rPr>
+              <a:t>需等生成+同步才出首屏</a:t>
+            </a:r>
+          </a:p>
+        </p:txBody>
+      </p:sp>
+      <p:sp>
+        <p:nvSpPr>
+          <p:cNvPr id="11" name="Rounded Rectangle 10"/>
+          <p:cNvSpPr/>
+          <p:nvPr/>
+        </p:nvSpPr>
+        <p:spPr>
+          <a:xfrm>
+            <a:off x="4251960" y="3337560"/>
+            <a:ext cx="3703320" cy="3154680"/>
+          </a:xfrm>
+          <a:prstGeom prst="roundRect">
+            <a:avLst>
+              <a:gd name="adj" fmla="val 8000"/>
+            </a:avLst>
+          </a:prstGeom>
+          <a:solidFill>
+            <a:srgbClr val="FFFFFF"/>
+          </a:solidFill>
+          <a:ln w="12700">
+            <a:solidFill>
+              <a:srgbClr val="64748B"/>
+            </a:solidFill>
+          </a:ln>
+        </p:spPr>
+        <p:style>
+          <a:lnRef idx="1">
+            <a:schemeClr val="accent1"/>
+          </a:lnRef>
+          <a:fillRef idx="3">
+            <a:schemeClr val="accent1"/>
+          </a:fillRef>
+          <a:effectRef idx="2">
+            <a:schemeClr val="accent1"/>
+          </a:effectRef>
+          <a:fontRef idx="minor">
+            <a:schemeClr val="lt1"/>
+          </a:fontRef>
+        </p:style>
+        <p:txBody>
+          <a:bodyPr rtlCol="0" anchor="ctr"/>
+          <a:lstStyle/>
+          <a:p>
+            <a:pPr algn="ctr"/>
+          </a:p>
+        </p:txBody>
+      </p:sp>
+      <p:sp>
+        <p:nvSpPr>
+          <p:cNvPr id="12" name="Rounded Rectangle 11"/>
+          <p:cNvSpPr/>
+          <p:nvPr/>
+        </p:nvSpPr>
+        <p:spPr>
+          <a:xfrm>
+            <a:off x="4389120" y="3474720"/>
+            <a:ext cx="2011680" cy="292608"/>
+          </a:xfrm>
+          <a:prstGeom prst="roundRect">
+            <a:avLst>
+              <a:gd name="adj" fmla="val 40000"/>
+            </a:avLst>
+          </a:prstGeom>
+          <a:solidFill>
+            <a:srgbClr val="64748B"/>
+          </a:solidFill>
+          <a:ln>
+            <a:noFill/>
+          </a:ln>
+        </p:spPr>
+        <p:style>
+          <a:lnRef idx="1">
+            <a:schemeClr val="accent1"/>
+          </a:lnRef>
+          <a:fillRef idx="3">
+            <a:schemeClr val="accent1"/>
+          </a:fillRef>
+          <a:effectRef idx="2">
+            <a:schemeClr val="accent1"/>
+          </a:effectRef>
+          <a:fontRef idx="minor">
+            <a:schemeClr val="lt1"/>
+          </a:fontRef>
+        </p:style>
+        <p:txBody>
+          <a:bodyPr rtlCol="0" anchor="ctr"/>
+          <a:lstStyle/>
+          <a:p>
+            <a:pPr algn="ctr"/>
+            <a:r>
+              <a:rPr sz="1000" b="1">
+                <a:solidFill>
+                  <a:srgbClr val="FFFFFF"/>
+                </a:solidFill>
+                <a:latin typeface="Calibri"/>
+              </a:rPr>
+              <a:t>二期增强</a:t>
+            </a:r>
+          </a:p>
+        </p:txBody>
+      </p:sp>
+      <p:sp>
+        <p:nvSpPr>
+          <p:cNvPr id="13" name="TextBox 12"/>
+          <p:cNvSpPr txBox="1"/>
+          <p:nvPr/>
+        </p:nvSpPr>
+        <p:spPr>
+          <a:xfrm>
+            <a:off x="4416552" y="3886200"/>
+            <a:ext cx="3383280" cy="2468880"/>
+          </a:xfrm>
+          <a:prstGeom prst="rect">
+            <a:avLst/>
+          </a:prstGeom>
+          <a:noFill/>
+        </p:spPr>
+        <p:txBody>
+          <a:bodyPr wrap="square">
+            <a:spAutoFit/>
+          </a:bodyPr>
+          <a:lstStyle/>
+          <a:p>
+            <a:r>
+              <a:rPr sz="1400" b="1">
+                <a:solidFill>
+                  <a:srgbClr val="0F172A"/>
+                </a:solidFill>
+                <a:latin typeface="Calibri"/>
+              </a:rPr>
+              <a:t>方案 B · 流式实时渲染</a:t>
+            </a:r>
+          </a:p>
+          <a:p>
+            <a:pPr>
+              <a:spcBef>
+                <a:spcPts val="800"/>
+              </a:spcBef>
+            </a:pPr>
+            <a:r>
+              <a:rPr sz="1100" b="1">
+                <a:solidFill>
+                  <a:srgbClr val="0F766E"/>
+                </a:solidFill>
+                <a:latin typeface="Calibri"/>
+              </a:rPr>
+              <a:t>流程：</a:t>
+            </a:r>
+            <a:r>
+              <a:rPr sz="1100" b="0">
+                <a:solidFill>
+                  <a:srgbClr val="334155"/>
+                </a:solidFill>
+                <a:latin typeface="Calibri"/>
+              </a:rPr>
+              <a:t>token/delta→buffer→边收边刷新</a:t>
+            </a:r>
+          </a:p>
+          <a:p>
+            <a:pPr>
+              <a:spcBef>
+                <a:spcPts val="800"/>
+              </a:spcBef>
+            </a:pPr>
+            <a:r>
+              <a:rPr sz="1100" b="1">
+                <a:solidFill>
+                  <a:srgbClr val="0F766E"/>
+                </a:solidFill>
+                <a:latin typeface="Calibri"/>
+              </a:rPr>
+              <a:t>优势：</a:t>
+            </a:r>
+            <a:r>
+              <a:rPr sz="1100" b="0">
+                <a:solidFill>
+                  <a:srgbClr val="334155"/>
+                </a:solidFill>
+                <a:latin typeface="Calibri"/>
+              </a:rPr>
+              <a:t>首屏快，体感像流式 Markdown</a:t>
+            </a:r>
+          </a:p>
+          <a:p>
+            <a:pPr>
+              <a:spcBef>
+                <a:spcPts val="800"/>
+              </a:spcBef>
+            </a:pPr>
+            <a:r>
+              <a:rPr sz="1100" b="1">
+                <a:solidFill>
+                  <a:srgbClr val="0F766E"/>
+                </a:solidFill>
+                <a:latin typeface="Calibri"/>
+              </a:rPr>
+              <a:t>代价：</a:t>
+            </a:r>
+            <a:r>
+              <a:rPr sz="1100" b="0">
+                <a:solidFill>
+                  <a:srgbClr val="334155"/>
+                </a:solidFill>
+                <a:latin typeface="Calibri"/>
+              </a:rPr>
+              <a:t>半截标签/脚本重复/协议重</a:t>
+            </a:r>
+          </a:p>
+        </p:txBody>
+      </p:sp>
+      <p:sp>
+        <p:nvSpPr>
+          <p:cNvPr id="14" name="Rounded Rectangle 13"/>
+          <p:cNvSpPr/>
+          <p:nvPr/>
+        </p:nvSpPr>
+        <p:spPr>
+          <a:xfrm>
+            <a:off x="8138160" y="3337560"/>
+            <a:ext cx="3703320" cy="3154680"/>
+          </a:xfrm>
+          <a:prstGeom prst="roundRect">
+            <a:avLst>
+              <a:gd name="adj" fmla="val 8000"/>
+            </a:avLst>
+          </a:prstGeom>
+          <a:solidFill>
+            <a:srgbClr val="F0FDFA"/>
+          </a:solidFill>
+          <a:ln w="12700">
+            <a:solidFill>
+              <a:srgbClr val="0F766E"/>
+            </a:solidFill>
+          </a:ln>
+        </p:spPr>
+        <p:style>
+          <a:lnRef idx="1">
+            <a:schemeClr val="accent1"/>
+          </a:lnRef>
+          <a:fillRef idx="3">
+            <a:schemeClr val="accent1"/>
+          </a:fillRef>
+          <a:effectRef idx="2">
+            <a:schemeClr val="accent1"/>
+          </a:effectRef>
+          <a:fontRef idx="minor">
+            <a:schemeClr val="lt1"/>
+          </a:fontRef>
+        </p:style>
+        <p:txBody>
+          <a:bodyPr rtlCol="0" anchor="ctr"/>
+          <a:lstStyle/>
+          <a:p>
+            <a:pPr algn="ctr"/>
+          </a:p>
+        </p:txBody>
+      </p:sp>
+      <p:sp>
+        <p:nvSpPr>
+          <p:cNvPr id="15" name="Rounded Rectangle 14"/>
+          <p:cNvSpPr/>
+          <p:nvPr/>
+        </p:nvSpPr>
+        <p:spPr>
+          <a:xfrm>
+            <a:off x="8275320" y="3474720"/>
+            <a:ext cx="2011680" cy="292608"/>
+          </a:xfrm>
+          <a:prstGeom prst="roundRect">
+            <a:avLst>
+              <a:gd name="adj" fmla="val 40000"/>
+            </a:avLst>
+          </a:prstGeom>
+          <a:solidFill>
+            <a:srgbClr val="0F766E"/>
+          </a:solidFill>
+          <a:ln>
+            <a:noFill/>
+          </a:ln>
+        </p:spPr>
+        <p:style>
+          <a:lnRef idx="1">
+            <a:schemeClr val="accent1"/>
+          </a:lnRef>
+          <a:fillRef idx="3">
+            <a:schemeClr val="accent1"/>
+          </a:fillRef>
+          <a:effectRef idx="2">
+            <a:schemeClr val="accent1"/>
+          </a:effectRef>
+          <a:fontRef idx="minor">
+            <a:schemeClr val="lt1"/>
+          </a:fontRef>
+        </p:style>
+        <p:txBody>
+          <a:bodyPr rtlCol="0" anchor="ctr"/>
+          <a:lstStyle/>
+          <a:p>
+            <a:pPr algn="ctr"/>
+            <a:r>
+              <a:rPr sz="1000" b="1">
+                <a:solidFill>
+                  <a:srgbClr val="FFFFFF"/>
+                </a:solidFill>
+                <a:latin typeface="Calibri"/>
+              </a:rPr>
+              <a:t>报告场景演进 ★</a:t>
+            </a:r>
+          </a:p>
+        </p:txBody>
+      </p:sp>
+      <p:sp>
+        <p:nvSpPr>
+          <p:cNvPr id="16" name="TextBox 15"/>
+          <p:cNvSpPr txBox="1"/>
+          <p:nvPr/>
+        </p:nvSpPr>
+        <p:spPr>
+          <a:xfrm>
+            <a:off x="8302752" y="3886200"/>
+            <a:ext cx="3383280" cy="2468880"/>
+          </a:xfrm>
+          <a:prstGeom prst="rect">
+            <a:avLst/>
+          </a:prstGeom>
+          <a:noFill/>
+        </p:spPr>
+        <p:txBody>
+          <a:bodyPr wrap="square">
+            <a:spAutoFit/>
+          </a:bodyPr>
+          <a:lstStyle/>
+          <a:p>
+            <a:r>
+              <a:rPr sz="1400" b="1">
+                <a:solidFill>
+                  <a:srgbClr val="0F172A"/>
+                </a:solidFill>
+                <a:latin typeface="Calibri"/>
+              </a:rPr>
+              <a:t>方案 C · 混合</a:t>
+            </a:r>
+          </a:p>
+          <a:p>
+            <a:pPr>
+              <a:spcBef>
+                <a:spcPts val="800"/>
+              </a:spcBef>
+            </a:pPr>
+            <a:r>
+              <a:rPr sz="1100" b="1">
+                <a:solidFill>
+                  <a:srgbClr val="0F766E"/>
+                </a:solidFill>
+                <a:latin typeface="Calibri"/>
+              </a:rPr>
+              <a:t>流程：</a:t>
+            </a:r>
+            <a:r>
+              <a:rPr sz="1100" b="0">
+                <a:solidFill>
+                  <a:srgbClr val="334155"/>
+                </a:solidFill>
+                <a:latin typeface="Calibri"/>
+              </a:rPr>
+              <a:t>流式粗预览 + 完成后 write 定稿</a:t>
+            </a:r>
+          </a:p>
+          <a:p>
+            <a:pPr>
+              <a:spcBef>
+                <a:spcPts val="800"/>
+              </a:spcBef>
+            </a:pPr>
+            <a:r>
+              <a:rPr sz="1100" b="1">
+                <a:solidFill>
+                  <a:srgbClr val="0F766E"/>
+                </a:solidFill>
+                <a:latin typeface="Calibri"/>
+              </a:rPr>
+              <a:t>优势：</a:t>
+            </a:r>
+            <a:r>
+              <a:rPr sz="1100" b="0">
+                <a:solidFill>
+                  <a:srgbClr val="334155"/>
+                </a:solidFill>
+                <a:latin typeface="Calibri"/>
+              </a:rPr>
+              <a:t>体验近 B，正确性兜底靠 A</a:t>
+            </a:r>
+          </a:p>
+          <a:p>
+            <a:pPr>
+              <a:spcBef>
+                <a:spcPts val="800"/>
+              </a:spcBef>
+            </a:pPr>
+            <a:r>
+              <a:rPr sz="1100" b="1">
+                <a:solidFill>
+                  <a:srgbClr val="0F766E"/>
+                </a:solidFill>
+                <a:latin typeface="Calibri"/>
+              </a:rPr>
+              <a:t>代价：</a:t>
+            </a:r>
+            <a:r>
+              <a:rPr sz="1100" b="0">
+                <a:solidFill>
+                  <a:srgbClr val="334155"/>
+                </a:solidFill>
+                <a:latin typeface="Calibri"/>
+              </a:rPr>
+              <a:t>状态机更复杂，需切换策略</a:t>
+            </a:r>
+          </a:p>
+        </p:txBody>
+      </p:sp>
     </p:spTree>
   </p:cSld>
   <p:clrMapOvr>
@@ -8494,7 +10033,7 @@
         <p:spPr>
           <a:xfrm>
             <a:off x="0" y="0"/>
-            <a:ext cx="12191695" cy="914400"/>
+            <a:ext cx="12191695" cy="868680"/>
           </a:xfrm>
           <a:prstGeom prst="rect">
             <a:avLst/>
@@ -8536,8 +10075,8 @@
         </p:nvSpPr>
         <p:spPr>
           <a:xfrm>
-            <a:off x="0" y="914400"/>
-            <a:ext cx="12191695" cy="45720"/>
+            <a:off x="0" y="868680"/>
+            <a:ext cx="12191695" cy="54864"/>
           </a:xfrm>
           <a:prstGeom prst="rect">
             <a:avLst/>
@@ -8573,72 +10112,25 @@
       </p:sp>
       <p:sp>
         <p:nvSpPr>
-          <p:cNvPr id="5" name="TextBox 4"/>
-          <p:cNvSpPr txBox="1"/>
-          <p:nvPr/>
-        </p:nvSpPr>
-        <p:spPr>
-          <a:xfrm>
-            <a:off x="457200" y="201168"/>
-            <a:ext cx="11247120" cy="640080"/>
-          </a:xfrm>
-          <a:prstGeom prst="rect">
-            <a:avLst/>
-          </a:prstGeom>
-          <a:noFill/>
-        </p:spPr>
-        <p:txBody>
-          <a:bodyPr wrap="square">
-            <a:spAutoFit/>
-          </a:bodyPr>
-          <a:lstStyle/>
-          <a:p>
-            <a:r>
-              <a:rPr sz="2200" b="1">
-                <a:solidFill>
-                  <a:srgbClr val="FFFFFF"/>
-                </a:solidFill>
-                <a:latin typeface="Calibri"/>
-              </a:rPr>
-              <a:t>06  实现示例</a:t>
-            </a:r>
-          </a:p>
-          <a:p>
-            <a:r>
-              <a:rPr sz="1100" b="0">
-                <a:solidFill>
-                  <a:srgbClr val="94A3B8"/>
-                </a:solidFill>
-                <a:latin typeface="Calibri"/>
-              </a:rPr>
-              <a:t>契约 + 健康报告最小闭环（以方案 A 为主，C 为增强）</a:t>
-            </a:r>
-          </a:p>
-        </p:txBody>
-      </p:sp>
-      <p:sp>
-        <p:nvSpPr>
-          <p:cNvPr id="6" name="Rounded Rectangle 5"/>
+          <p:cNvPr id="5" name="Rounded Rectangle 4"/>
           <p:cNvSpPr/>
           <p:nvPr/>
         </p:nvSpPr>
         <p:spPr>
           <a:xfrm>
-            <a:off x="365760" y="1097280"/>
-            <a:ext cx="5669280" cy="2286000"/>
+            <a:off x="411480" y="201168"/>
+            <a:ext cx="502920" cy="457200"/>
           </a:xfrm>
           <a:prstGeom prst="roundRect">
             <a:avLst>
-              <a:gd name="adj" fmla="val 6000"/>
+              <a:gd name="adj" fmla="val 30000"/>
             </a:avLst>
           </a:prstGeom>
           <a:solidFill>
-            <a:srgbClr val="FFFFFF"/>
+            <a:srgbClr val="0D9488"/>
           </a:solidFill>
           <a:ln>
-            <a:solidFill>
-              <a:srgbClr val="E2E8F0"/>
-            </a:solidFill>
+            <a:noFill/>
           </a:ln>
         </p:spPr>
         <p:style>
@@ -8660,19 +10152,28 @@
           <a:lstStyle/>
           <a:p>
             <a:pPr algn="ctr"/>
-          </a:p>
-        </p:txBody>
-      </p:sp>
-      <p:sp>
-        <p:nvSpPr>
-          <p:cNvPr id="7" name="TextBox 6"/>
+            <a:r>
+              <a:rPr sz="1400" b="1">
+                <a:solidFill>
+                  <a:srgbClr val="FFFFFF"/>
+                </a:solidFill>
+                <a:latin typeface="Calibri"/>
+              </a:rPr>
+              <a:t>06</a:t>
+            </a:r>
+          </a:p>
+        </p:txBody>
+      </p:sp>
+      <p:sp>
+        <p:nvSpPr>
+          <p:cNvPr id="6" name="TextBox 5"/>
           <p:cNvSpPr txBox="1"/>
           <p:nvPr/>
         </p:nvSpPr>
         <p:spPr>
           <a:xfrm>
-            <a:off x="512064" y="1207008"/>
-            <a:ext cx="5413248" cy="2103120"/>
+            <a:off x="1051560" y="164592"/>
+            <a:ext cx="10515600" cy="640080"/>
           </a:xfrm>
           <a:prstGeom prst="rect">
             <a:avLst/>
@@ -8686,118 +10187,51 @@
           <a:lstStyle/>
           <a:p>
             <a:r>
-              <a:rPr sz="1300" b="1">
-                <a:solidFill>
-                  <a:srgbClr val="0D9488"/>
-                </a:solidFill>
-                <a:latin typeface="Calibri"/>
-              </a:rPr>
-              <a:t>1）工具返回约定（write/同步后）</a:t>
-            </a:r>
-          </a:p>
-          <a:p>
-            <a:pPr>
-              <a:spcBef>
-                <a:spcPts val="300"/>
-              </a:spcBef>
-            </a:pPr>
+              <a:rPr sz="2200" b="1">
+                <a:solidFill>
+                  <a:srgbClr val="FFFFFF"/>
+                </a:solidFill>
+                <a:latin typeface="Calibri"/>
+              </a:rPr>
+              <a:t>实现示例</a:t>
+            </a:r>
+          </a:p>
+          <a:p>
             <a:r>
               <a:rPr sz="1100" b="0">
                 <a:solidFill>
-                  <a:srgbClr val="334155"/>
-                </a:solidFill>
-                <a:latin typeface="Calibri"/>
-              </a:rPr>
-              <a:t>path / cloud_file_id / mime=text/html</a:t>
-            </a:r>
-          </a:p>
-          <a:p>
-            <a:pPr>
-              <a:spcBef>
-                <a:spcPts val="300"/>
-              </a:spcBef>
-            </a:pPr>
-            <a:r>
-              <a:rPr sz="1100" b="0">
-                <a:solidFill>
-                  <a:srgbClr val="334155"/>
-                </a:solidFill>
-                <a:latin typeface="Calibri"/>
-              </a:rPr>
-              <a:t>sync_status=synced|syncing</a:t>
-            </a:r>
-          </a:p>
-          <a:p>
-            <a:pPr>
-              <a:spcBef>
-                <a:spcPts val="300"/>
-              </a:spcBef>
-            </a:pPr>
-            <a:r>
-              <a:rPr sz="1100" b="0">
-                <a:solidFill>
-                  <a:srgbClr val="334155"/>
-                </a:solidFill>
-                <a:latin typeface="Calibri"/>
-              </a:rPr>
-              <a:t>preview: { kind: "html", entry: true }</a:t>
-            </a:r>
-          </a:p>
-          <a:p>
-            <a:pPr>
-              <a:spcBef>
-                <a:spcPts val="300"/>
-              </a:spcBef>
-            </a:pPr>
-            <a:r>
-              <a:rPr sz="1100" b="0">
-                <a:solidFill>
-                  <a:srgbClr val="334155"/>
-                </a:solidFill>
-                <a:latin typeface="Calibri"/>
-              </a:rPr>
-              <a:t/>
-            </a:r>
-          </a:p>
-          <a:p>
-            <a:pPr>
-              <a:spcBef>
-                <a:spcPts val="300"/>
-              </a:spcBef>
-            </a:pPr>
-            <a:r>
-              <a:rPr sz="1100" b="0">
-                <a:solidFill>
-                  <a:srgbClr val="334155"/>
-                </a:solidFill>
-                <a:latin typeface="Calibri"/>
-              </a:rPr>
-              <a:t>端据此展示「预览卡片」而非纯附件行</a:t>
-            </a:r>
-          </a:p>
-        </p:txBody>
-      </p:sp>
-      <p:sp>
-        <p:nvSpPr>
-          <p:cNvPr id="8" name="Rounded Rectangle 7"/>
+                  <a:srgbClr val="94A3B8"/>
+                </a:solidFill>
+                <a:latin typeface="Calibri"/>
+              </a:rPr>
+              <a:t>健康报告闭环：契约 · 方案 A · 方案 C</a:t>
+            </a:r>
+          </a:p>
+        </p:txBody>
+      </p:sp>
+      <p:sp>
+        <p:nvSpPr>
+          <p:cNvPr id="7" name="Rounded Rectangle 6"/>
           <p:cNvSpPr/>
           <p:nvPr/>
         </p:nvSpPr>
         <p:spPr>
           <a:xfrm>
-            <a:off x="6217920" y="1097280"/>
-            <a:ext cx="5577840" cy="2286000"/>
+            <a:off x="320040" y="1097280"/>
+            <a:ext cx="4114800" cy="5394960"/>
           </a:xfrm>
           <a:prstGeom prst="roundRect">
             <a:avLst>
-              <a:gd name="adj" fmla="val 4000"/>
+              <a:gd name="adj" fmla="val 8000"/>
             </a:avLst>
           </a:prstGeom>
           <a:solidFill>
-            <a:srgbClr val="0F172A"/>
+            <a:srgbClr val="FFFFFF"/>
           </a:solidFill>
-          <a:ln>
-            <a:noFill/>
+          <a:ln w="12700">
+            <a:solidFill>
+              <a:srgbClr val="E2E8F0"/>
+            </a:solidFill>
           </a:ln>
         </p:spPr>
         <p:style>
@@ -8824,14 +10258,14 @@
       </p:sp>
       <p:sp>
         <p:nvSpPr>
-          <p:cNvPr id="9" name="TextBox 8"/>
+          <p:cNvPr id="8" name="TextBox 7"/>
           <p:cNvSpPr txBox="1"/>
           <p:nvPr/>
         </p:nvSpPr>
         <p:spPr>
           <a:xfrm>
-            <a:off x="6355080" y="1188720"/>
-            <a:ext cx="5303520" cy="2103120"/>
+            <a:off x="457200" y="1234440"/>
+            <a:ext cx="3840480" cy="365760"/>
           </a:xfrm>
           <a:prstGeom prst="rect">
             <a:avLst/>
@@ -8845,73 +10279,36 @@
           <a:lstStyle/>
           <a:p>
             <a:r>
-              <a:rPr sz="1100" b="0">
-                <a:solidFill>
-                  <a:srgbClr val="E2E8F0"/>
-                </a:solidFill>
-                <a:latin typeface="Consolas"/>
-              </a:rPr>
-              <a:t>// 方案 A：下载后一次渲染</a:t>
-            </a:r>
-          </a:p>
-          <a:p>
-            <a:r>
-              <a:rPr sz="1100" b="0">
-                <a:solidFill>
-                  <a:srgbClr val="E2E8F0"/>
-                </a:solidFill>
-                <a:latin typeface="Consolas"/>
-              </a:rPr>
-              <a:t>const html = await downloadText(fileId);</a:t>
-            </a:r>
-          </a:p>
-          <a:p>
-            <a:r>
-              <a:rPr sz="1100" b="0">
-                <a:solidFill>
-                  <a:srgbClr val="E2E8F0"/>
-                </a:solidFill>
-                <a:latin typeface="Consolas"/>
-              </a:rPr>
-              <a:t>iframe.sandbox = 'allow-scripts';</a:t>
-            </a:r>
-          </a:p>
-          <a:p>
-            <a:r>
-              <a:rPr sz="1100" b="0">
-                <a:solidFill>
-                  <a:srgbClr val="E2E8F0"/>
-                </a:solidFill>
-                <a:latin typeface="Consolas"/>
-              </a:rPr>
-              <a:t>iframe.srcdoc = html;  // 默不加 same-origin</a:t>
-            </a:r>
-          </a:p>
-        </p:txBody>
-      </p:sp>
-      <p:sp>
-        <p:nvSpPr>
-          <p:cNvPr id="10" name="Rounded Rectangle 9"/>
+              <a:rPr sz="1400" b="1">
+                <a:solidFill>
+                  <a:srgbClr val="0D9488"/>
+                </a:solidFill>
+                <a:latin typeface="Calibri"/>
+              </a:rPr>
+              <a:t>健康报告串接</a:t>
+            </a:r>
+          </a:p>
+        </p:txBody>
+      </p:sp>
+      <p:sp>
+        <p:nvSpPr>
+          <p:cNvPr id="9" name="Oval 8"/>
           <p:cNvSpPr/>
           <p:nvPr/>
         </p:nvSpPr>
         <p:spPr>
           <a:xfrm>
-            <a:off x="365760" y="3566160"/>
-            <a:ext cx="5669280" cy="2926080"/>
-          </a:xfrm>
-          <a:prstGeom prst="roundRect">
-            <a:avLst>
-              <a:gd name="adj" fmla="val 6000"/>
-            </a:avLst>
+            <a:off x="548640" y="1737360"/>
+            <a:ext cx="384048" cy="384048"/>
+          </a:xfrm>
+          <a:prstGeom prst="ellipse">
+            <a:avLst/>
           </a:prstGeom>
           <a:solidFill>
-            <a:srgbClr val="FFFFFF"/>
+            <a:srgbClr val="0D9488"/>
           </a:solidFill>
           <a:ln>
-            <a:solidFill>
-              <a:srgbClr val="E2E8F0"/>
-            </a:solidFill>
+            <a:noFill/>
           </a:ln>
         </p:spPr>
         <p:style>
@@ -8933,19 +10330,28 @@
           <a:lstStyle/>
           <a:p>
             <a:pPr algn="ctr"/>
-          </a:p>
-        </p:txBody>
-      </p:sp>
-      <p:sp>
-        <p:nvSpPr>
-          <p:cNvPr id="11" name="TextBox 10"/>
+            <a:r>
+              <a:rPr sz="1200" b="1">
+                <a:solidFill>
+                  <a:srgbClr val="FFFFFF"/>
+                </a:solidFill>
+                <a:latin typeface="Calibri"/>
+              </a:rPr>
+              <a:t>1</a:t>
+            </a:r>
+          </a:p>
+        </p:txBody>
+      </p:sp>
+      <p:sp>
+        <p:nvSpPr>
+          <p:cNvPr id="10" name="TextBox 9"/>
           <p:cNvSpPr txBox="1"/>
           <p:nvPr/>
         </p:nvSpPr>
         <p:spPr>
           <a:xfrm>
-            <a:off x="512064" y="3675888"/>
-            <a:ext cx="5413248" cy="2743200"/>
+            <a:off x="1097280" y="1691640"/>
+            <a:ext cx="3108960" cy="731520"/>
           </a:xfrm>
           <a:prstGeom prst="rect">
             <a:avLst/>
@@ -8959,131 +10365,33 @@
           <a:lstStyle/>
           <a:p>
             <a:r>
-              <a:rPr sz="1300" b="1">
-                <a:solidFill>
-                  <a:srgbClr val="0D9488"/>
-                </a:solidFill>
-                <a:latin typeface="Calibri"/>
-              </a:rPr>
-              <a:t>2）健康报告场景串接</a:t>
-            </a:r>
-          </a:p>
-          <a:p>
-            <a:pPr>
-              <a:spcBef>
-                <a:spcPts val="300"/>
-              </a:spcBef>
-            </a:pPr>
-            <a:r>
-              <a:rPr sz="1100" b="0">
+              <a:rPr sz="1200" b="0">
                 <a:solidFill>
                   <a:srgbClr val="334155"/>
                 </a:solidFill>
                 <a:latin typeface="Calibri"/>
               </a:rPr>
-              <a:t>① Skill 获取运动健康数据</a:t>
-            </a:r>
-          </a:p>
-          <a:p>
-            <a:pPr>
-              <a:spcBef>
-                <a:spcPts val="300"/>
-              </a:spcBef>
-            </a:pPr>
-            <a:r>
-              <a:rPr sz="1100" b="0">
-                <a:solidFill>
-                  <a:srgbClr val="334155"/>
-                </a:solidFill>
-                <a:latin typeface="Calibri"/>
-              </a:rPr>
-              <a:t>② 模型生成含图表的单文件 HTML</a:t>
-            </a:r>
-          </a:p>
-          <a:p>
-            <a:pPr>
-              <a:spcBef>
-                <a:spcPts val="300"/>
-              </a:spcBef>
-            </a:pPr>
-            <a:r>
-              <a:rPr sz="1100" b="0">
-                <a:solidFill>
-                  <a:srgbClr val="334155"/>
-                </a:solidFill>
-                <a:latin typeface="Calibri"/>
-              </a:rPr>
-              <a:t>   （CSS/JS 尽量内联，降低多文件依赖）</a:t>
-            </a:r>
-          </a:p>
-          <a:p>
-            <a:pPr>
-              <a:spcBef>
-                <a:spcPts val="300"/>
-              </a:spcBef>
-            </a:pPr>
-            <a:r>
-              <a:rPr sz="1100" b="0">
-                <a:solidFill>
-                  <a:srgbClr val="334155"/>
-                </a:solidFill>
-                <a:latin typeface="Calibri"/>
-              </a:rPr>
-              <a:t>③ write → 云空间同步就绪</a:t>
-            </a:r>
-          </a:p>
-          <a:p>
-            <a:pPr>
-              <a:spcBef>
-                <a:spcPts val="300"/>
-              </a:spcBef>
-            </a:pPr>
-            <a:r>
-              <a:rPr sz="1100" b="0">
-                <a:solidFill>
-                  <a:srgbClr val="334155"/>
-                </a:solidFill>
-                <a:latin typeface="Calibri"/>
-              </a:rPr>
-              <a:t>④ 端 REST 下载 → sandbox 预览</a:t>
-            </a:r>
-          </a:p>
-          <a:p>
-            <a:pPr>
-              <a:spcBef>
-                <a:spcPts val="300"/>
-              </a:spcBef>
-            </a:pPr>
-            <a:r>
-              <a:rPr sz="1100" b="0">
-                <a:solidFill>
-                  <a:srgbClr val="334155"/>
-                </a:solidFill>
-                <a:latin typeface="Calibri"/>
-              </a:rPr>
-              <a:t>⑤ 用户在会话内查看/交互报告</a:t>
-            </a:r>
-          </a:p>
-        </p:txBody>
-      </p:sp>
-      <p:sp>
-        <p:nvSpPr>
-          <p:cNvPr id="12" name="Rounded Rectangle 11"/>
+              <a:t>Skill 拉取运动健康数据</a:t>
+            </a:r>
+          </a:p>
+        </p:txBody>
+      </p:sp>
+      <p:sp>
+        <p:nvSpPr>
+          <p:cNvPr id="11" name="Oval 10"/>
           <p:cNvSpPr/>
           <p:nvPr/>
         </p:nvSpPr>
         <p:spPr>
           <a:xfrm>
-            <a:off x="6217920" y="3566160"/>
-            <a:ext cx="5577840" cy="2926080"/>
-          </a:xfrm>
-          <a:prstGeom prst="roundRect">
-            <a:avLst>
-              <a:gd name="adj" fmla="val 4000"/>
-            </a:avLst>
+            <a:off x="548640" y="2606040"/>
+            <a:ext cx="384048" cy="384048"/>
+          </a:xfrm>
+          <a:prstGeom prst="ellipse">
+            <a:avLst/>
           </a:prstGeom>
           <a:solidFill>
-            <a:srgbClr val="0F172A"/>
+            <a:srgbClr val="0D9488"/>
           </a:solidFill>
           <a:ln>
             <a:noFill/>
@@ -9108,19 +10416,28 @@
           <a:lstStyle/>
           <a:p>
             <a:pPr algn="ctr"/>
-          </a:p>
-        </p:txBody>
-      </p:sp>
-      <p:sp>
-        <p:nvSpPr>
-          <p:cNvPr id="13" name="TextBox 12"/>
+            <a:r>
+              <a:rPr sz="1200" b="1">
+                <a:solidFill>
+                  <a:srgbClr val="FFFFFF"/>
+                </a:solidFill>
+                <a:latin typeface="Calibri"/>
+              </a:rPr>
+              <a:t>2</a:t>
+            </a:r>
+          </a:p>
+        </p:txBody>
+      </p:sp>
+      <p:sp>
+        <p:nvSpPr>
+          <p:cNvPr id="12" name="TextBox 11"/>
           <p:cNvSpPr txBox="1"/>
           <p:nvPr/>
         </p:nvSpPr>
         <p:spPr>
           <a:xfrm>
-            <a:off x="6355080" y="3657600"/>
-            <a:ext cx="5303520" cy="2743200"/>
+            <a:off x="1097280" y="2560320"/>
+            <a:ext cx="3108960" cy="731520"/>
           </a:xfrm>
           <a:prstGeom prst="rect">
             <a:avLst/>
@@ -9134,64 +10451,664 @@
           <a:lstStyle/>
           <a:p>
             <a:r>
-              <a:rPr sz="1100" b="0">
-                <a:solidFill>
-                  <a:srgbClr val="E2E8F0"/>
+              <a:rPr sz="1200" b="0">
+                <a:solidFill>
+                  <a:srgbClr val="334155"/>
+                </a:solidFill>
+                <a:latin typeface="Calibri"/>
+              </a:rPr>
+              <a:t>生成单文件图表 HTML</a:t>
+            </a:r>
+          </a:p>
+          <a:p>
+            <a:r>
+              <a:rPr sz="1200" b="0">
+                <a:solidFill>
+                  <a:srgbClr val="334155"/>
+                </a:solidFill>
+                <a:latin typeface="Calibri"/>
+              </a:rPr>
+              <a:t>（CSS/JS 尽量内联）</a:t>
+            </a:r>
+          </a:p>
+        </p:txBody>
+      </p:sp>
+      <p:sp>
+        <p:nvSpPr>
+          <p:cNvPr id="13" name="Oval 12"/>
+          <p:cNvSpPr/>
+          <p:nvPr/>
+        </p:nvSpPr>
+        <p:spPr>
+          <a:xfrm>
+            <a:off x="548640" y="3474720"/>
+            <a:ext cx="384048" cy="384048"/>
+          </a:xfrm>
+          <a:prstGeom prst="ellipse">
+            <a:avLst/>
+          </a:prstGeom>
+          <a:solidFill>
+            <a:srgbClr val="0D9488"/>
+          </a:solidFill>
+          <a:ln>
+            <a:noFill/>
+          </a:ln>
+        </p:spPr>
+        <p:style>
+          <a:lnRef idx="1">
+            <a:schemeClr val="accent1"/>
+          </a:lnRef>
+          <a:fillRef idx="3">
+            <a:schemeClr val="accent1"/>
+          </a:fillRef>
+          <a:effectRef idx="2">
+            <a:schemeClr val="accent1"/>
+          </a:effectRef>
+          <a:fontRef idx="minor">
+            <a:schemeClr val="lt1"/>
+          </a:fontRef>
+        </p:style>
+        <p:txBody>
+          <a:bodyPr rtlCol="0" anchor="ctr"/>
+          <a:lstStyle/>
+          <a:p>
+            <a:pPr algn="ctr"/>
+            <a:r>
+              <a:rPr sz="1200" b="1">
+                <a:solidFill>
+                  <a:srgbClr val="FFFFFF"/>
+                </a:solidFill>
+                <a:latin typeface="Calibri"/>
+              </a:rPr>
+              <a:t>3</a:t>
+            </a:r>
+          </a:p>
+        </p:txBody>
+      </p:sp>
+      <p:sp>
+        <p:nvSpPr>
+          <p:cNvPr id="14" name="TextBox 13"/>
+          <p:cNvSpPr txBox="1"/>
+          <p:nvPr/>
+        </p:nvSpPr>
+        <p:spPr>
+          <a:xfrm>
+            <a:off x="1097280" y="3429000"/>
+            <a:ext cx="3108960" cy="731520"/>
+          </a:xfrm>
+          <a:prstGeom prst="rect">
+            <a:avLst/>
+          </a:prstGeom>
+          <a:noFill/>
+        </p:spPr>
+        <p:txBody>
+          <a:bodyPr wrap="square">
+            <a:spAutoFit/>
+          </a:bodyPr>
+          <a:lstStyle/>
+          <a:p>
+            <a:r>
+              <a:rPr sz="1200" b="0">
+                <a:solidFill>
+                  <a:srgbClr val="334155"/>
+                </a:solidFill>
+                <a:latin typeface="Calibri"/>
+              </a:rPr>
+              <a:t>write → 云空间同步就绪</a:t>
+            </a:r>
+          </a:p>
+        </p:txBody>
+      </p:sp>
+      <p:sp>
+        <p:nvSpPr>
+          <p:cNvPr id="15" name="Oval 14"/>
+          <p:cNvSpPr/>
+          <p:nvPr/>
+        </p:nvSpPr>
+        <p:spPr>
+          <a:xfrm>
+            <a:off x="548640" y="4343399"/>
+            <a:ext cx="384048" cy="384048"/>
+          </a:xfrm>
+          <a:prstGeom prst="ellipse">
+            <a:avLst/>
+          </a:prstGeom>
+          <a:solidFill>
+            <a:srgbClr val="0D9488"/>
+          </a:solidFill>
+          <a:ln>
+            <a:noFill/>
+          </a:ln>
+        </p:spPr>
+        <p:style>
+          <a:lnRef idx="1">
+            <a:schemeClr val="accent1"/>
+          </a:lnRef>
+          <a:fillRef idx="3">
+            <a:schemeClr val="accent1"/>
+          </a:fillRef>
+          <a:effectRef idx="2">
+            <a:schemeClr val="accent1"/>
+          </a:effectRef>
+          <a:fontRef idx="minor">
+            <a:schemeClr val="lt1"/>
+          </a:fontRef>
+        </p:style>
+        <p:txBody>
+          <a:bodyPr rtlCol="0" anchor="ctr"/>
+          <a:lstStyle/>
+          <a:p>
+            <a:pPr algn="ctr"/>
+            <a:r>
+              <a:rPr sz="1200" b="1">
+                <a:solidFill>
+                  <a:srgbClr val="FFFFFF"/>
+                </a:solidFill>
+                <a:latin typeface="Calibri"/>
+              </a:rPr>
+              <a:t>4</a:t>
+            </a:r>
+          </a:p>
+        </p:txBody>
+      </p:sp>
+      <p:sp>
+        <p:nvSpPr>
+          <p:cNvPr id="16" name="TextBox 15"/>
+          <p:cNvSpPr txBox="1"/>
+          <p:nvPr/>
+        </p:nvSpPr>
+        <p:spPr>
+          <a:xfrm>
+            <a:off x="1097280" y="4297679"/>
+            <a:ext cx="3108960" cy="731520"/>
+          </a:xfrm>
+          <a:prstGeom prst="rect">
+            <a:avLst/>
+          </a:prstGeom>
+          <a:noFill/>
+        </p:spPr>
+        <p:txBody>
+          <a:bodyPr wrap="square">
+            <a:spAutoFit/>
+          </a:bodyPr>
+          <a:lstStyle/>
+          <a:p>
+            <a:r>
+              <a:rPr sz="1200" b="0">
+                <a:solidFill>
+                  <a:srgbClr val="334155"/>
+                </a:solidFill>
+                <a:latin typeface="Calibri"/>
+              </a:rPr>
+              <a:t>端识别 preview.kind=html</a:t>
+            </a:r>
+          </a:p>
+        </p:txBody>
+      </p:sp>
+      <p:sp>
+        <p:nvSpPr>
+          <p:cNvPr id="17" name="Oval 16"/>
+          <p:cNvSpPr/>
+          <p:nvPr/>
+        </p:nvSpPr>
+        <p:spPr>
+          <a:xfrm>
+            <a:off x="548640" y="5212080"/>
+            <a:ext cx="384048" cy="384048"/>
+          </a:xfrm>
+          <a:prstGeom prst="ellipse">
+            <a:avLst/>
+          </a:prstGeom>
+          <a:solidFill>
+            <a:srgbClr val="0D9488"/>
+          </a:solidFill>
+          <a:ln>
+            <a:noFill/>
+          </a:ln>
+        </p:spPr>
+        <p:style>
+          <a:lnRef idx="1">
+            <a:schemeClr val="accent1"/>
+          </a:lnRef>
+          <a:fillRef idx="3">
+            <a:schemeClr val="accent1"/>
+          </a:fillRef>
+          <a:effectRef idx="2">
+            <a:schemeClr val="accent1"/>
+          </a:effectRef>
+          <a:fontRef idx="minor">
+            <a:schemeClr val="lt1"/>
+          </a:fontRef>
+        </p:style>
+        <p:txBody>
+          <a:bodyPr rtlCol="0" anchor="ctr"/>
+          <a:lstStyle/>
+          <a:p>
+            <a:pPr algn="ctr"/>
+            <a:r>
+              <a:rPr sz="1200" b="1">
+                <a:solidFill>
+                  <a:srgbClr val="FFFFFF"/>
+                </a:solidFill>
+                <a:latin typeface="Calibri"/>
+              </a:rPr>
+              <a:t>5</a:t>
+            </a:r>
+          </a:p>
+        </p:txBody>
+      </p:sp>
+      <p:sp>
+        <p:nvSpPr>
+          <p:cNvPr id="18" name="TextBox 17"/>
+          <p:cNvSpPr txBox="1"/>
+          <p:nvPr/>
+        </p:nvSpPr>
+        <p:spPr>
+          <a:xfrm>
+            <a:off x="1097280" y="5166360"/>
+            <a:ext cx="3108960" cy="731520"/>
+          </a:xfrm>
+          <a:prstGeom prst="rect">
+            <a:avLst/>
+          </a:prstGeom>
+          <a:noFill/>
+        </p:spPr>
+        <p:txBody>
+          <a:bodyPr wrap="square">
+            <a:spAutoFit/>
+          </a:bodyPr>
+          <a:lstStyle/>
+          <a:p>
+            <a:r>
+              <a:rPr sz="1200" b="0">
+                <a:solidFill>
+                  <a:srgbClr val="334155"/>
+                </a:solidFill>
+                <a:latin typeface="Calibri"/>
+              </a:rPr>
+              <a:t>sandbox 预览 / 可交互</a:t>
+            </a:r>
+          </a:p>
+        </p:txBody>
+      </p:sp>
+      <p:sp>
+        <p:nvSpPr>
+          <p:cNvPr id="19" name="Rounded Rectangle 18"/>
+          <p:cNvSpPr/>
+          <p:nvPr/>
+        </p:nvSpPr>
+        <p:spPr>
+          <a:xfrm>
+            <a:off x="4617720" y="1097280"/>
+            <a:ext cx="7178040" cy="2331720"/>
+          </a:xfrm>
+          <a:prstGeom prst="roundRect">
+            <a:avLst>
+              <a:gd name="adj" fmla="val 8000"/>
+            </a:avLst>
+          </a:prstGeom>
+          <a:solidFill>
+            <a:srgbClr val="0F172A"/>
+          </a:solidFill>
+          <a:ln w="12700">
+            <a:solidFill>
+              <a:srgbClr val="0F172A"/>
+            </a:solidFill>
+          </a:ln>
+        </p:spPr>
+        <p:style>
+          <a:lnRef idx="1">
+            <a:schemeClr val="accent1"/>
+          </a:lnRef>
+          <a:fillRef idx="3">
+            <a:schemeClr val="accent1"/>
+          </a:fillRef>
+          <a:effectRef idx="2">
+            <a:schemeClr val="accent1"/>
+          </a:effectRef>
+          <a:fontRef idx="minor">
+            <a:schemeClr val="lt1"/>
+          </a:fontRef>
+        </p:style>
+        <p:txBody>
+          <a:bodyPr rtlCol="0" anchor="ctr"/>
+          <a:lstStyle/>
+          <a:p>
+            <a:pPr algn="ctr"/>
+          </a:p>
+        </p:txBody>
+      </p:sp>
+      <p:sp>
+        <p:nvSpPr>
+          <p:cNvPr id="20" name="TextBox 19"/>
+          <p:cNvSpPr txBox="1"/>
+          <p:nvPr/>
+        </p:nvSpPr>
+        <p:spPr>
+          <a:xfrm>
+            <a:off x="4800600" y="1234440"/>
+            <a:ext cx="6858000" cy="2057400"/>
+          </a:xfrm>
+          <a:prstGeom prst="rect">
+            <a:avLst/>
+          </a:prstGeom>
+          <a:noFill/>
+        </p:spPr>
+        <p:txBody>
+          <a:bodyPr wrap="square">
+            <a:spAutoFit/>
+          </a:bodyPr>
+          <a:lstStyle/>
+          <a:p>
+            <a:r>
+              <a:rPr sz="1200" b="0">
+                <a:solidFill>
+                  <a:srgbClr val="5EEAD4"/>
                 </a:solidFill>
                 <a:latin typeface="Consolas"/>
               </a:rPr>
-              <a:t>// 方案 C：流式粗预览 + 定稿</a:t>
-            </a:r>
-          </a:p>
-          <a:p>
-            <a:r>
-              <a:rPr sz="1100" b="0">
-                <a:solidFill>
-                  <a:srgbClr val="E2E8F0"/>
+              <a:t>// write / 同步完成后的返回（示意）</a:t>
+            </a:r>
+          </a:p>
+          <a:p>
+            <a:r>
+              <a:rPr sz="1200" b="0">
+                <a:solidFill>
+                  <a:srgbClr val="CBD5E1"/>
                 </a:solidFill>
                 <a:latin typeface="Consolas"/>
               </a:rPr>
-              <a:t>onDelta(t =&gt; { buf += t; schedulePaint(buf); })</a:t>
-            </a:r>
-          </a:p>
-          <a:p>
-            <a:r>
-              <a:rPr sz="1100" b="0">
-                <a:solidFill>
-                  <a:srgbClr val="E2E8F0"/>
+              <a:t>{ "path": "artifacts/health-report.html",</a:t>
+            </a:r>
+          </a:p>
+          <a:p>
+            <a:r>
+              <a:rPr sz="1200" b="0">
+                <a:solidFill>
+                  <a:srgbClr val="CBD5E1"/>
                 </a:solidFill>
                 <a:latin typeface="Consolas"/>
               </a:rPr>
+              <a:t>  "cloud_file_id": "f_xxx", "mime": "text/html",</a:t>
+            </a:r>
+          </a:p>
+          <a:p>
+            <a:r>
+              <a:rPr sz="1200" b="0">
+                <a:solidFill>
+                  <a:srgbClr val="CBD5E1"/>
+                </a:solidFill>
+                <a:latin typeface="Consolas"/>
+              </a:rPr>
+              <a:t>  "sync_status": "synced",</a:t>
+            </a:r>
+          </a:p>
+          <a:p>
+            <a:r>
+              <a:rPr sz="1200" b="0">
+                <a:solidFill>
+                  <a:srgbClr val="CBD5E1"/>
+                </a:solidFill>
+                <a:latin typeface="Consolas"/>
+              </a:rPr>
+              <a:t>  "preview": { "kind": "html", "entry": true } }</a:t>
+            </a:r>
+          </a:p>
+        </p:txBody>
+      </p:sp>
+      <p:sp>
+        <p:nvSpPr>
+          <p:cNvPr id="21" name="Rounded Rectangle 20"/>
+          <p:cNvSpPr/>
+          <p:nvPr/>
+        </p:nvSpPr>
+        <p:spPr>
+          <a:xfrm>
+            <a:off x="4617720" y="3611880"/>
+            <a:ext cx="3474720" cy="2880360"/>
+          </a:xfrm>
+          <a:prstGeom prst="roundRect">
+            <a:avLst>
+              <a:gd name="adj" fmla="val 8000"/>
+            </a:avLst>
+          </a:prstGeom>
+          <a:solidFill>
+            <a:srgbClr val="0F172A"/>
+          </a:solidFill>
+          <a:ln w="12700">
+            <a:solidFill>
+              <a:srgbClr val="0F172A"/>
+            </a:solidFill>
+          </a:ln>
+        </p:spPr>
+        <p:style>
+          <a:lnRef idx="1">
+            <a:schemeClr val="accent1"/>
+          </a:lnRef>
+          <a:fillRef idx="3">
+            <a:schemeClr val="accent1"/>
+          </a:fillRef>
+          <a:effectRef idx="2">
+            <a:schemeClr val="accent1"/>
+          </a:effectRef>
+          <a:fontRef idx="minor">
+            <a:schemeClr val="lt1"/>
+          </a:fontRef>
+        </p:style>
+        <p:txBody>
+          <a:bodyPr rtlCol="0" anchor="ctr"/>
+          <a:lstStyle/>
+          <a:p>
+            <a:pPr algn="ctr"/>
+          </a:p>
+        </p:txBody>
+      </p:sp>
+      <p:sp>
+        <p:nvSpPr>
+          <p:cNvPr id="22" name="TextBox 21"/>
+          <p:cNvSpPr txBox="1"/>
+          <p:nvPr/>
+        </p:nvSpPr>
+        <p:spPr>
+          <a:xfrm>
+            <a:off x="4754880" y="3749039"/>
+            <a:ext cx="3200400" cy="2606040"/>
+          </a:xfrm>
+          <a:prstGeom prst="rect">
+            <a:avLst/>
+          </a:prstGeom>
+          <a:noFill/>
+        </p:spPr>
+        <p:txBody>
+          <a:bodyPr wrap="square">
+            <a:spAutoFit/>
+          </a:bodyPr>
+          <a:lstStyle/>
+          <a:p>
+            <a:r>
+              <a:rPr sz="1200" b="0">
+                <a:solidFill>
+                  <a:srgbClr val="5EEAD4"/>
+                </a:solidFill>
+                <a:latin typeface="Consolas"/>
+              </a:rPr>
+              <a:t>// 方案 A</a:t>
+            </a:r>
+          </a:p>
+          <a:p>
+            <a:r>
+              <a:rPr sz="1200" b="0">
+                <a:solidFill>
+                  <a:srgbClr val="CBD5E1"/>
+                </a:solidFill>
+                <a:latin typeface="Consolas"/>
+              </a:rPr>
+              <a:t>html = await download(id)</a:t>
+            </a:r>
+          </a:p>
+          <a:p>
+            <a:r>
+              <a:rPr sz="1200" b="0">
+                <a:solidFill>
+                  <a:srgbClr val="CBD5E1"/>
+                </a:solidFill>
+                <a:latin typeface="Consolas"/>
+              </a:rPr>
+              <a:t>iframe.sandbox =</a:t>
+            </a:r>
+          </a:p>
+          <a:p>
+            <a:r>
+              <a:rPr sz="1200" b="0">
+                <a:solidFill>
+                  <a:srgbClr val="CBD5E1"/>
+                </a:solidFill>
+                <a:latin typeface="Consolas"/>
+              </a:rPr>
+              <a:t>  'allow-scripts'</a:t>
+            </a:r>
+          </a:p>
+          <a:p>
+            <a:r>
+              <a:rPr sz="1200" b="0">
+                <a:solidFill>
+                  <a:srgbClr val="CBD5E1"/>
+                </a:solidFill>
+                <a:latin typeface="Consolas"/>
+              </a:rPr>
+              <a:t>iframe.srcdoc = html</a:t>
+            </a:r>
+          </a:p>
+        </p:txBody>
+      </p:sp>
+      <p:sp>
+        <p:nvSpPr>
+          <p:cNvPr id="23" name="Rounded Rectangle 22"/>
+          <p:cNvSpPr/>
+          <p:nvPr/>
+        </p:nvSpPr>
+        <p:spPr>
+          <a:xfrm>
+            <a:off x="8275320" y="3611880"/>
+            <a:ext cx="3520440" cy="2880360"/>
+          </a:xfrm>
+          <a:prstGeom prst="roundRect">
+            <a:avLst>
+              <a:gd name="adj" fmla="val 8000"/>
+            </a:avLst>
+          </a:prstGeom>
+          <a:solidFill>
+            <a:srgbClr val="0F172A"/>
+          </a:solidFill>
+          <a:ln w="12700">
+            <a:solidFill>
+              <a:srgbClr val="0F172A"/>
+            </a:solidFill>
+          </a:ln>
+        </p:spPr>
+        <p:style>
+          <a:lnRef idx="1">
+            <a:schemeClr val="accent1"/>
+          </a:lnRef>
+          <a:fillRef idx="3">
+            <a:schemeClr val="accent1"/>
+          </a:fillRef>
+          <a:effectRef idx="2">
+            <a:schemeClr val="accent1"/>
+          </a:effectRef>
+          <a:fontRef idx="minor">
+            <a:schemeClr val="lt1"/>
+          </a:fontRef>
+        </p:style>
+        <p:txBody>
+          <a:bodyPr rtlCol="0" anchor="ctr"/>
+          <a:lstStyle/>
+          <a:p>
+            <a:pPr algn="ctr"/>
+          </a:p>
+        </p:txBody>
+      </p:sp>
+      <p:sp>
+        <p:nvSpPr>
+          <p:cNvPr id="24" name="TextBox 23"/>
+          <p:cNvSpPr txBox="1"/>
+          <p:nvPr/>
+        </p:nvSpPr>
+        <p:spPr>
+          <a:xfrm>
+            <a:off x="8412480" y="3749039"/>
+            <a:ext cx="3246120" cy="2606040"/>
+          </a:xfrm>
+          <a:prstGeom prst="rect">
+            <a:avLst/>
+          </a:prstGeom>
+          <a:noFill/>
+        </p:spPr>
+        <p:txBody>
+          <a:bodyPr wrap="square">
+            <a:spAutoFit/>
+          </a:bodyPr>
+          <a:lstStyle/>
+          <a:p>
+            <a:r>
+              <a:rPr sz="1200" b="0">
+                <a:solidFill>
+                  <a:srgbClr val="5EEAD4"/>
+                </a:solidFill>
+                <a:latin typeface="Consolas"/>
+              </a:rPr>
+              <a:t>// 方案 C</a:t>
+            </a:r>
+          </a:p>
+          <a:p>
+            <a:r>
+              <a:rPr sz="1200" b="0">
+                <a:solidFill>
+                  <a:srgbClr val="CBD5E1"/>
+                </a:solidFill>
+                <a:latin typeface="Consolas"/>
+              </a:rPr>
+              <a:t>onDelta(t =&gt; paint(buf+=t))</a:t>
+            </a:r>
+          </a:p>
+          <a:p>
+            <a:r>
+              <a:rPr sz="1200" b="0">
+                <a:solidFill>
+                  <a:srgbClr val="CBD5E1"/>
+                </a:solidFill>
+                <a:latin typeface="Consolas"/>
+              </a:rPr>
               <a:t>onDone(async () =&gt; {</a:t>
             </a:r>
           </a:p>
           <a:p>
             <a:r>
-              <a:rPr sz="1100" b="0">
-                <a:solidFill>
-                  <a:srgbClr val="E2E8F0"/>
+              <a:rPr sz="1200" b="0">
+                <a:solidFill>
+                  <a:srgbClr val="CBD5E1"/>
                 </a:solidFill>
                 <a:latin typeface="Consolas"/>
               </a:rPr>
-              <a:t>  await writeAndSync(finalHtml);   // 落盘</a:t>
-            </a:r>
-          </a:p>
-          <a:p>
-            <a:r>
-              <a:rPr sz="1100" b="0">
-                <a:solidFill>
-                  <a:srgbClr val="E2E8F0"/>
+              <a:t>  await writeAndSync()</a:t>
+            </a:r>
+          </a:p>
+          <a:p>
+            <a:r>
+              <a:rPr sz="1200" b="0">
+                <a:solidFill>
+                  <a:srgbClr val="CBD5E1"/>
                 </a:solidFill>
                 <a:latin typeface="Consolas"/>
               </a:rPr>
-              <a:t>  iframe.srcdoc = await downloadText(id);</a:t>
-            </a:r>
-          </a:p>
-          <a:p>
-            <a:r>
-              <a:rPr sz="1100" b="0">
-                <a:solidFill>
-                  <a:srgbClr val="E2E8F0"/>
+              <a:t>  iframe.srcdoc = final</a:t>
+            </a:r>
+          </a:p>
+          <a:p>
+            <a:r>
+              <a:rPr sz="1200" b="0">
+                <a:solidFill>
+                  <a:srgbClr val="CBD5E1"/>
                 </a:solidFill>
                 <a:latin typeface="Consolas"/>
               </a:rPr>
@@ -9270,7 +11187,7 @@
         <p:spPr>
           <a:xfrm>
             <a:off x="0" y="0"/>
-            <a:ext cx="12191695" cy="914400"/>
+            <a:ext cx="12191695" cy="868680"/>
           </a:xfrm>
           <a:prstGeom prst="rect">
             <a:avLst/>
@@ -9312,8 +11229,8 @@
         </p:nvSpPr>
         <p:spPr>
           <a:xfrm>
-            <a:off x="0" y="914400"/>
-            <a:ext cx="12191695" cy="45720"/>
+            <a:off x="0" y="868680"/>
+            <a:ext cx="12191695" cy="54864"/>
           </a:xfrm>
           <a:prstGeom prst="rect">
             <a:avLst/>
@@ -9349,14 +11266,68 @@
       </p:sp>
       <p:sp>
         <p:nvSpPr>
-          <p:cNvPr id="5" name="TextBox 4"/>
+          <p:cNvPr id="5" name="Rounded Rectangle 4"/>
+          <p:cNvSpPr/>
+          <p:nvPr/>
+        </p:nvSpPr>
+        <p:spPr>
+          <a:xfrm>
+            <a:off x="411480" y="201168"/>
+            <a:ext cx="502920" cy="457200"/>
+          </a:xfrm>
+          <a:prstGeom prst="roundRect">
+            <a:avLst>
+              <a:gd name="adj" fmla="val 30000"/>
+            </a:avLst>
+          </a:prstGeom>
+          <a:solidFill>
+            <a:srgbClr val="0D9488"/>
+          </a:solidFill>
+          <a:ln>
+            <a:noFill/>
+          </a:ln>
+        </p:spPr>
+        <p:style>
+          <a:lnRef idx="1">
+            <a:schemeClr val="accent1"/>
+          </a:lnRef>
+          <a:fillRef idx="3">
+            <a:schemeClr val="accent1"/>
+          </a:fillRef>
+          <a:effectRef idx="2">
+            <a:schemeClr val="accent1"/>
+          </a:effectRef>
+          <a:fontRef idx="minor">
+            <a:schemeClr val="lt1"/>
+          </a:fontRef>
+        </p:style>
+        <p:txBody>
+          <a:bodyPr rtlCol="0" anchor="ctr"/>
+          <a:lstStyle/>
+          <a:p>
+            <a:pPr algn="ctr"/>
+            <a:r>
+              <a:rPr sz="1400" b="1">
+                <a:solidFill>
+                  <a:srgbClr val="FFFFFF"/>
+                </a:solidFill>
+                <a:latin typeface="Calibri"/>
+              </a:rPr>
+              <a:t>07</a:t>
+            </a:r>
+          </a:p>
+        </p:txBody>
+      </p:sp>
+      <p:sp>
+        <p:nvSpPr>
+          <p:cNvPr id="6" name="TextBox 5"/>
           <p:cNvSpPr txBox="1"/>
           <p:nvPr/>
         </p:nvSpPr>
         <p:spPr>
           <a:xfrm>
-            <a:off x="457200" y="201168"/>
-            <a:ext cx="11247120" cy="640080"/>
+            <a:off x="1051560" y="164592"/>
+            <a:ext cx="10515600" cy="640080"/>
           </a:xfrm>
           <a:prstGeom prst="rect">
             <a:avLst/>
@@ -9376,7 +11347,7 @@
                 </a:solidFill>
                 <a:latin typeface="Calibri"/>
               </a:rPr>
-              <a:t>07  结论与建议</a:t>
+              <a:t>结论与建议</a:t>
             </a:r>
           </a:p>
           <a:p>
@@ -9394,14 +11365,113 @@
       </p:sp>
       <p:sp>
         <p:nvSpPr>
-          <p:cNvPr id="6" name="TextBox 5"/>
+          <p:cNvPr id="7" name="Rounded Rectangle 6"/>
+          <p:cNvSpPr/>
+          <p:nvPr/>
+        </p:nvSpPr>
+        <p:spPr>
+          <a:xfrm>
+            <a:off x="365760" y="1143000"/>
+            <a:ext cx="3703320" cy="2423160"/>
+          </a:xfrm>
+          <a:prstGeom prst="roundRect">
+            <a:avLst>
+              <a:gd name="adj" fmla="val 8000"/>
+            </a:avLst>
+          </a:prstGeom>
+          <a:solidFill>
+            <a:srgbClr val="FFFFFF"/>
+          </a:solidFill>
+          <a:ln w="12700">
+            <a:solidFill>
+              <a:srgbClr val="0D9488"/>
+            </a:solidFill>
+          </a:ln>
+        </p:spPr>
+        <p:style>
+          <a:lnRef idx="1">
+            <a:schemeClr val="accent1"/>
+          </a:lnRef>
+          <a:fillRef idx="3">
+            <a:schemeClr val="accent1"/>
+          </a:fillRef>
+          <a:effectRef idx="2">
+            <a:schemeClr val="accent1"/>
+          </a:effectRef>
+          <a:fontRef idx="minor">
+            <a:schemeClr val="lt1"/>
+          </a:fontRef>
+        </p:style>
+        <p:txBody>
+          <a:bodyPr rtlCol="0" anchor="ctr"/>
+          <a:lstStyle/>
+          <a:p>
+            <a:pPr algn="ctr"/>
+          </a:p>
+        </p:txBody>
+      </p:sp>
+      <p:sp>
+        <p:nvSpPr>
+          <p:cNvPr id="8" name="Oval 7"/>
+          <p:cNvSpPr/>
+          <p:nvPr/>
+        </p:nvSpPr>
+        <p:spPr>
+          <a:xfrm>
+            <a:off x="548640" y="1371600"/>
+            <a:ext cx="457200" cy="457200"/>
+          </a:xfrm>
+          <a:prstGeom prst="ellipse">
+            <a:avLst/>
+          </a:prstGeom>
+          <a:solidFill>
+            <a:srgbClr val="0D9488"/>
+          </a:solidFill>
+          <a:ln>
+            <a:noFill/>
+          </a:ln>
+        </p:spPr>
+        <p:style>
+          <a:lnRef idx="1">
+            <a:schemeClr val="accent1"/>
+          </a:lnRef>
+          <a:fillRef idx="3">
+            <a:schemeClr val="accent1"/>
+          </a:fillRef>
+          <a:effectRef idx="2">
+            <a:schemeClr val="accent1"/>
+          </a:effectRef>
+          <a:fontRef idx="minor">
+            <a:schemeClr val="lt1"/>
+          </a:fontRef>
+        </p:style>
+        <p:txBody>
+          <a:bodyPr rtlCol="0" anchor="ctr"/>
+          <a:lstStyle/>
+          <a:p>
+            <a:pPr algn="ctr"/>
+            <a:r>
+              <a:rPr sz="1100" b="1">
+                <a:solidFill>
+                  <a:srgbClr val="FFFFFF"/>
+                </a:solidFill>
+                <a:latin typeface="Calibri"/>
+              </a:rPr>
+              <a:t>01</a:t>
+            </a:r>
+          </a:p>
+        </p:txBody>
+      </p:sp>
+      <p:sp>
+        <p:nvSpPr>
+          <p:cNvPr id="9" name="TextBox 8"/>
           <p:cNvSpPr txBox="1"/>
           <p:nvPr/>
         </p:nvSpPr>
         <p:spPr>
           <a:xfrm>
-            <a:off x="548640" y="1188720"/>
-            <a:ext cx="11064240" cy="5303520"/>
+            <a:off x="1143000" y="1417320"/>
+            <a:ext cx="2743200" cy="411480"/>
           </a:xfrm>
           <a:prstGeom prst="rect">
             <a:avLst/>
@@ -9414,153 +11484,979 @@
           </a:bodyPr>
           <a:lstStyle/>
           <a:p>
+            <a:r>
+              <a:rPr sz="1400" b="1">
+                <a:solidFill>
+                  <a:srgbClr val="0F172A"/>
+                </a:solidFill>
+                <a:latin typeface="Calibri"/>
+              </a:rPr>
+              <a:t>问题本质</a:t>
+            </a:r>
+          </a:p>
+        </p:txBody>
+      </p:sp>
+      <p:sp>
+        <p:nvSpPr>
+          <p:cNvPr id="10" name="TextBox 9"/>
+          <p:cNvSpPr txBox="1"/>
+          <p:nvPr/>
+        </p:nvSpPr>
+        <p:spPr>
+          <a:xfrm>
+            <a:off x="594360" y="2057400"/>
+            <a:ext cx="3246120" cy="1280160"/>
+          </a:xfrm>
+          <a:prstGeom prst="rect">
+            <a:avLst/>
+          </a:prstGeom>
+          <a:noFill/>
+        </p:spPr>
+        <p:txBody>
+          <a:bodyPr wrap="square">
+            <a:spAutoFit/>
+          </a:bodyPr>
+          <a:lstStyle/>
+          <a:p>
+            <a:r>
+              <a:rPr sz="1300" b="0">
+                <a:solidFill>
+                  <a:srgbClr val="334155"/>
+                </a:solidFill>
+                <a:latin typeface="Calibri"/>
+              </a:rPr>
+              <a:t>对话内安全渲染可视化 HTML</a:t>
+            </a:r>
+          </a:p>
+          <a:p>
             <a:pPr>
-              <a:spcAft>
-                <a:spcPts val="1200"/>
-              </a:spcAft>
+              <a:spcBef>
+                <a:spcPts val="400"/>
+              </a:spcBef>
             </a:pPr>
             <a:r>
-              <a:rPr sz="1500" b="1">
-                <a:solidFill>
-                  <a:srgbClr val="0D9488"/>
-                </a:solidFill>
-                <a:latin typeface="Calibri"/>
-              </a:rPr>
-              <a:t>问题本质  </a:t>
-            </a:r>
-            <a:r>
-              <a:rPr sz="1500" b="0">
+              <a:rPr sz="1300" b="0">
                 <a:solidFill>
                   <a:srgbClr val="334155"/>
                 </a:solidFill>
                 <a:latin typeface="Calibri"/>
               </a:rPr>
-              <a:t>对话内安全渲染可视化 HTML（Skill 取数 + 图形化生成 + 端呈现），不是再造存储。</a:t>
+              <a:t>（取数+生成+呈现），不是再造存储</a:t>
+            </a:r>
+          </a:p>
+        </p:txBody>
+      </p:sp>
+      <p:sp>
+        <p:nvSpPr>
+          <p:cNvPr id="11" name="Rounded Rectangle 10"/>
+          <p:cNvSpPr/>
+          <p:nvPr/>
+        </p:nvSpPr>
+        <p:spPr>
+          <a:xfrm>
+            <a:off x="4251960" y="1143000"/>
+            <a:ext cx="3703320" cy="2423160"/>
+          </a:xfrm>
+          <a:prstGeom prst="roundRect">
+            <a:avLst>
+              <a:gd name="adj" fmla="val 8000"/>
+            </a:avLst>
+          </a:prstGeom>
+          <a:solidFill>
+            <a:srgbClr val="FFFFFF"/>
+          </a:solidFill>
+          <a:ln w="12700">
+            <a:solidFill>
+              <a:srgbClr val="0D9488"/>
+            </a:solidFill>
+          </a:ln>
+        </p:spPr>
+        <p:style>
+          <a:lnRef idx="1">
+            <a:schemeClr val="accent1"/>
+          </a:lnRef>
+          <a:fillRef idx="3">
+            <a:schemeClr val="accent1"/>
+          </a:fillRef>
+          <a:effectRef idx="2">
+            <a:schemeClr val="accent1"/>
+          </a:effectRef>
+          <a:fontRef idx="minor">
+            <a:schemeClr val="lt1"/>
+          </a:fontRef>
+        </p:style>
+        <p:txBody>
+          <a:bodyPr rtlCol="0" anchor="ctr"/>
+          <a:lstStyle/>
+          <a:p>
+            <a:pPr algn="ctr"/>
+          </a:p>
+        </p:txBody>
+      </p:sp>
+      <p:sp>
+        <p:nvSpPr>
+          <p:cNvPr id="12" name="Oval 11"/>
+          <p:cNvSpPr/>
+          <p:nvPr/>
+        </p:nvSpPr>
+        <p:spPr>
+          <a:xfrm>
+            <a:off x="4434840" y="1371600"/>
+            <a:ext cx="457200" cy="457200"/>
+          </a:xfrm>
+          <a:prstGeom prst="ellipse">
+            <a:avLst/>
+          </a:prstGeom>
+          <a:solidFill>
+            <a:srgbClr val="0D9488"/>
+          </a:solidFill>
+          <a:ln>
+            <a:noFill/>
+          </a:ln>
+        </p:spPr>
+        <p:style>
+          <a:lnRef idx="1">
+            <a:schemeClr val="accent1"/>
+          </a:lnRef>
+          <a:fillRef idx="3">
+            <a:schemeClr val="accent1"/>
+          </a:fillRef>
+          <a:effectRef idx="2">
+            <a:schemeClr val="accent1"/>
+          </a:effectRef>
+          <a:fontRef idx="minor">
+            <a:schemeClr val="lt1"/>
+          </a:fontRef>
+        </p:style>
+        <p:txBody>
+          <a:bodyPr rtlCol="0" anchor="ctr"/>
+          <a:lstStyle/>
+          <a:p>
+            <a:pPr algn="ctr"/>
+            <a:r>
+              <a:rPr sz="1100" b="1">
+                <a:solidFill>
+                  <a:srgbClr val="FFFFFF"/>
+                </a:solidFill>
+                <a:latin typeface="Calibri"/>
+              </a:rPr>
+              <a:t>02</a:t>
+            </a:r>
+          </a:p>
+        </p:txBody>
+      </p:sp>
+      <p:sp>
+        <p:nvSpPr>
+          <p:cNvPr id="13" name="TextBox 12"/>
+          <p:cNvSpPr txBox="1"/>
+          <p:nvPr/>
+        </p:nvSpPr>
+        <p:spPr>
+          <a:xfrm>
+            <a:off x="5029200" y="1417320"/>
+            <a:ext cx="2743200" cy="411480"/>
+          </a:xfrm>
+          <a:prstGeom prst="rect">
+            <a:avLst/>
+          </a:prstGeom>
+          <a:noFill/>
+        </p:spPr>
+        <p:txBody>
+          <a:bodyPr wrap="square">
+            <a:spAutoFit/>
+          </a:bodyPr>
+          <a:lstStyle/>
+          <a:p>
+            <a:r>
+              <a:rPr sz="1400" b="1">
+                <a:solidFill>
+                  <a:srgbClr val="0F172A"/>
+                </a:solidFill>
+                <a:latin typeface="Calibri"/>
+              </a:rPr>
+              <a:t>能力优先级</a:t>
+            </a:r>
+          </a:p>
+        </p:txBody>
+      </p:sp>
+      <p:sp>
+        <p:nvSpPr>
+          <p:cNvPr id="14" name="TextBox 13"/>
+          <p:cNvSpPr txBox="1"/>
+          <p:nvPr/>
+        </p:nvSpPr>
+        <p:spPr>
+          <a:xfrm>
+            <a:off x="4480560" y="2057400"/>
+            <a:ext cx="3246120" cy="1280160"/>
+          </a:xfrm>
+          <a:prstGeom prst="rect">
+            <a:avLst/>
+          </a:prstGeom>
+          <a:noFill/>
+        </p:spPr>
+        <p:txBody>
+          <a:bodyPr wrap="square">
+            <a:spAutoFit/>
+          </a:bodyPr>
+          <a:lstStyle/>
+          <a:p>
+            <a:r>
+              <a:rPr sz="1300" b="0">
+                <a:solidFill>
+                  <a:srgbClr val="334155"/>
+                </a:solidFill>
+                <a:latin typeface="Calibri"/>
+              </a:rPr>
+              <a:t>先补渲染 + 安全</a:t>
             </a:r>
           </a:p>
           <a:p>
             <a:pPr>
-              <a:spcAft>
-                <a:spcPts val="1200"/>
-              </a:spcAft>
+              <a:spcBef>
+                <a:spcPts val="400"/>
+              </a:spcBef>
             </a:pPr>
             <a:r>
-              <a:rPr sz="1500" b="1">
-                <a:solidFill>
-                  <a:srgbClr val="0D9488"/>
-                </a:solidFill>
-                <a:latin typeface="Calibri"/>
-              </a:rPr>
-              <a:t>能力优先级  </a:t>
-            </a:r>
-            <a:r>
-              <a:rPr sz="1500" b="0">
+              <a:rPr sz="1300" b="0">
                 <a:solidFill>
                   <a:srgbClr val="334155"/>
                 </a:solidFill>
                 <a:latin typeface="Calibri"/>
               </a:rPr>
-              <a:t>先补渲染 + 安全；分享与流式后置。生成/落盘/同步已具备。</a:t>
+              <a:t>分享与流式后置</a:t>
+            </a:r>
+          </a:p>
+        </p:txBody>
+      </p:sp>
+      <p:sp>
+        <p:nvSpPr>
+          <p:cNvPr id="15" name="Rounded Rectangle 14"/>
+          <p:cNvSpPr/>
+          <p:nvPr/>
+        </p:nvSpPr>
+        <p:spPr>
+          <a:xfrm>
+            <a:off x="8138160" y="1143000"/>
+            <a:ext cx="3703320" cy="2423160"/>
+          </a:xfrm>
+          <a:prstGeom prst="roundRect">
+            <a:avLst>
+              <a:gd name="adj" fmla="val 8000"/>
+            </a:avLst>
+          </a:prstGeom>
+          <a:solidFill>
+            <a:srgbClr val="FFFFFF"/>
+          </a:solidFill>
+          <a:ln w="12700">
+            <a:solidFill>
+              <a:srgbClr val="0D9488"/>
+            </a:solidFill>
+          </a:ln>
+        </p:spPr>
+        <p:style>
+          <a:lnRef idx="1">
+            <a:schemeClr val="accent1"/>
+          </a:lnRef>
+          <a:fillRef idx="3">
+            <a:schemeClr val="accent1"/>
+          </a:fillRef>
+          <a:effectRef idx="2">
+            <a:schemeClr val="accent1"/>
+          </a:effectRef>
+          <a:fontRef idx="minor">
+            <a:schemeClr val="lt1"/>
+          </a:fontRef>
+        </p:style>
+        <p:txBody>
+          <a:bodyPr rtlCol="0" anchor="ctr"/>
+          <a:lstStyle/>
+          <a:p>
+            <a:pPr algn="ctr"/>
+          </a:p>
+        </p:txBody>
+      </p:sp>
+      <p:sp>
+        <p:nvSpPr>
+          <p:cNvPr id="16" name="Oval 15"/>
+          <p:cNvSpPr/>
+          <p:nvPr/>
+        </p:nvSpPr>
+        <p:spPr>
+          <a:xfrm>
+            <a:off x="8321040" y="1371600"/>
+            <a:ext cx="457200" cy="457200"/>
+          </a:xfrm>
+          <a:prstGeom prst="ellipse">
+            <a:avLst/>
+          </a:prstGeom>
+          <a:solidFill>
+            <a:srgbClr val="0D9488"/>
+          </a:solidFill>
+          <a:ln>
+            <a:noFill/>
+          </a:ln>
+        </p:spPr>
+        <p:style>
+          <a:lnRef idx="1">
+            <a:schemeClr val="accent1"/>
+          </a:lnRef>
+          <a:fillRef idx="3">
+            <a:schemeClr val="accent1"/>
+          </a:fillRef>
+          <a:effectRef idx="2">
+            <a:schemeClr val="accent1"/>
+          </a:effectRef>
+          <a:fontRef idx="minor">
+            <a:schemeClr val="lt1"/>
+          </a:fontRef>
+        </p:style>
+        <p:txBody>
+          <a:bodyPr rtlCol="0" anchor="ctr"/>
+          <a:lstStyle/>
+          <a:p>
+            <a:pPr algn="ctr"/>
+            <a:r>
+              <a:rPr sz="1100" b="1">
+                <a:solidFill>
+                  <a:srgbClr val="FFFFFF"/>
+                </a:solidFill>
+                <a:latin typeface="Calibri"/>
+              </a:rPr>
+              <a:t>03</a:t>
+            </a:r>
+          </a:p>
+        </p:txBody>
+      </p:sp>
+      <p:sp>
+        <p:nvSpPr>
+          <p:cNvPr id="17" name="TextBox 16"/>
+          <p:cNvSpPr txBox="1"/>
+          <p:nvPr/>
+        </p:nvSpPr>
+        <p:spPr>
+          <a:xfrm>
+            <a:off x="8915400" y="1417320"/>
+            <a:ext cx="2743200" cy="411480"/>
+          </a:xfrm>
+          <a:prstGeom prst="rect">
+            <a:avLst/>
+          </a:prstGeom>
+          <a:noFill/>
+        </p:spPr>
+        <p:txBody>
+          <a:bodyPr wrap="square">
+            <a:spAutoFit/>
+          </a:bodyPr>
+          <a:lstStyle/>
+          <a:p>
+            <a:r>
+              <a:rPr sz="1400" b="1">
+                <a:solidFill>
+                  <a:srgbClr val="0F172A"/>
+                </a:solidFill>
+                <a:latin typeface="Calibri"/>
+              </a:rPr>
+              <a:t>竞品对标</a:t>
+            </a:r>
+          </a:p>
+        </p:txBody>
+      </p:sp>
+      <p:sp>
+        <p:nvSpPr>
+          <p:cNvPr id="18" name="TextBox 17"/>
+          <p:cNvSpPr txBox="1"/>
+          <p:nvPr/>
+        </p:nvSpPr>
+        <p:spPr>
+          <a:xfrm>
+            <a:off x="8366760" y="2057400"/>
+            <a:ext cx="3246120" cy="1280160"/>
+          </a:xfrm>
+          <a:prstGeom prst="rect">
+            <a:avLst/>
+          </a:prstGeom>
+          <a:noFill/>
+        </p:spPr>
+        <p:txBody>
+          <a:bodyPr wrap="square">
+            <a:spAutoFit/>
+          </a:bodyPr>
+          <a:lstStyle/>
+          <a:p>
+            <a:r>
+              <a:rPr sz="1300" b="0">
+                <a:solidFill>
+                  <a:srgbClr val="334155"/>
+                </a:solidFill>
+                <a:latin typeface="Calibri"/>
+              </a:rPr>
+              <a:t>Claude Artifacts / OpenClaw Widget</a:t>
             </a:r>
           </a:p>
           <a:p>
             <a:pPr>
-              <a:spcAft>
-                <a:spcPts val="1200"/>
-              </a:spcAft>
+              <a:spcBef>
+                <a:spcPts val="400"/>
+              </a:spcBef>
             </a:pPr>
             <a:r>
-              <a:rPr sz="1500" b="1">
-                <a:solidFill>
-                  <a:srgbClr val="0D9488"/>
-                </a:solidFill>
-                <a:latin typeface="Calibri"/>
-              </a:rPr>
-              <a:t>竞品对标  </a:t>
-            </a:r>
-            <a:r>
-              <a:rPr sz="1500" b="0">
+              <a:rPr sz="1300" b="0">
                 <a:solidFill>
                   <a:srgbClr val="334155"/>
                 </a:solidFill>
                 <a:latin typeface="Calibri"/>
               </a:rPr>
-              <a:t>Claude Artifacts / OpenClaw Widget；Canvas 类作参考；分享演进看 Manus。</a:t>
+              <a:t>分享演进参考 Manus</a:t>
+            </a:r>
+          </a:p>
+        </p:txBody>
+      </p:sp>
+      <p:sp>
+        <p:nvSpPr>
+          <p:cNvPr id="19" name="Rounded Rectangle 18"/>
+          <p:cNvSpPr/>
+          <p:nvPr/>
+        </p:nvSpPr>
+        <p:spPr>
+          <a:xfrm>
+            <a:off x="365760" y="3794760"/>
+            <a:ext cx="3703320" cy="2423160"/>
+          </a:xfrm>
+          <a:prstGeom prst="roundRect">
+            <a:avLst>
+              <a:gd name="adj" fmla="val 8000"/>
+            </a:avLst>
+          </a:prstGeom>
+          <a:solidFill>
+            <a:srgbClr val="FFFFFF"/>
+          </a:solidFill>
+          <a:ln w="12700">
+            <a:solidFill>
+              <a:srgbClr val="0D9488"/>
+            </a:solidFill>
+          </a:ln>
+        </p:spPr>
+        <p:style>
+          <a:lnRef idx="1">
+            <a:schemeClr val="accent1"/>
+          </a:lnRef>
+          <a:fillRef idx="3">
+            <a:schemeClr val="accent1"/>
+          </a:fillRef>
+          <a:effectRef idx="2">
+            <a:schemeClr val="accent1"/>
+          </a:effectRef>
+          <a:fontRef idx="minor">
+            <a:schemeClr val="lt1"/>
+          </a:fontRef>
+        </p:style>
+        <p:txBody>
+          <a:bodyPr rtlCol="0" anchor="ctr"/>
+          <a:lstStyle/>
+          <a:p>
+            <a:pPr algn="ctr"/>
+          </a:p>
+        </p:txBody>
+      </p:sp>
+      <p:sp>
+        <p:nvSpPr>
+          <p:cNvPr id="20" name="Oval 19"/>
+          <p:cNvSpPr/>
+          <p:nvPr/>
+        </p:nvSpPr>
+        <p:spPr>
+          <a:xfrm>
+            <a:off x="548640" y="4023360"/>
+            <a:ext cx="457200" cy="457200"/>
+          </a:xfrm>
+          <a:prstGeom prst="ellipse">
+            <a:avLst/>
+          </a:prstGeom>
+          <a:solidFill>
+            <a:srgbClr val="0D9488"/>
+          </a:solidFill>
+          <a:ln>
+            <a:noFill/>
+          </a:ln>
+        </p:spPr>
+        <p:style>
+          <a:lnRef idx="1">
+            <a:schemeClr val="accent1"/>
+          </a:lnRef>
+          <a:fillRef idx="3">
+            <a:schemeClr val="accent1"/>
+          </a:fillRef>
+          <a:effectRef idx="2">
+            <a:schemeClr val="accent1"/>
+          </a:effectRef>
+          <a:fontRef idx="minor">
+            <a:schemeClr val="lt1"/>
+          </a:fontRef>
+        </p:style>
+        <p:txBody>
+          <a:bodyPr rtlCol="0" anchor="ctr"/>
+          <a:lstStyle/>
+          <a:p>
+            <a:pPr algn="ctr"/>
+            <a:r>
+              <a:rPr sz="1100" b="1">
+                <a:solidFill>
+                  <a:srgbClr val="FFFFFF"/>
+                </a:solidFill>
+                <a:latin typeface="Calibri"/>
+              </a:rPr>
+              <a:t>04</a:t>
+            </a:r>
+          </a:p>
+        </p:txBody>
+      </p:sp>
+      <p:sp>
+        <p:nvSpPr>
+          <p:cNvPr id="21" name="TextBox 20"/>
+          <p:cNvSpPr txBox="1"/>
+          <p:nvPr/>
+        </p:nvSpPr>
+        <p:spPr>
+          <a:xfrm>
+            <a:off x="1143000" y="4069080"/>
+            <a:ext cx="2743200" cy="411480"/>
+          </a:xfrm>
+          <a:prstGeom prst="rect">
+            <a:avLst/>
+          </a:prstGeom>
+          <a:noFill/>
+        </p:spPr>
+        <p:txBody>
+          <a:bodyPr wrap="square">
+            <a:spAutoFit/>
+          </a:bodyPr>
+          <a:lstStyle/>
+          <a:p>
+            <a:r>
+              <a:rPr sz="1400" b="1">
+                <a:solidFill>
+                  <a:srgbClr val="0F172A"/>
+                </a:solidFill>
+                <a:latin typeface="Calibri"/>
+              </a:rPr>
+              <a:t>方案选择</a:t>
+            </a:r>
+          </a:p>
+        </p:txBody>
+      </p:sp>
+      <p:sp>
+        <p:nvSpPr>
+          <p:cNvPr id="22" name="TextBox 21"/>
+          <p:cNvSpPr txBox="1"/>
+          <p:nvPr/>
+        </p:nvSpPr>
+        <p:spPr>
+          <a:xfrm>
+            <a:off x="594360" y="4709160"/>
+            <a:ext cx="3246120" cy="1280160"/>
+          </a:xfrm>
+          <a:prstGeom prst="rect">
+            <a:avLst/>
+          </a:prstGeom>
+          <a:noFill/>
+        </p:spPr>
+        <p:txBody>
+          <a:bodyPr wrap="square">
+            <a:spAutoFit/>
+          </a:bodyPr>
+          <a:lstStyle/>
+          <a:p>
+            <a:r>
+              <a:rPr sz="1300" b="0">
+                <a:solidFill>
+                  <a:srgbClr val="334155"/>
+                </a:solidFill>
+                <a:latin typeface="Calibri"/>
+              </a:rPr>
+              <a:t>一期默认 A；报告场景演进 C</a:t>
             </a:r>
           </a:p>
           <a:p>
             <a:pPr>
-              <a:spcAft>
-                <a:spcPts val="1200"/>
-              </a:spcAft>
+              <a:spcBef>
+                <a:spcPts val="400"/>
+              </a:spcBef>
             </a:pPr>
             <a:r>
-              <a:rPr sz="1500" b="1">
-                <a:solidFill>
-                  <a:srgbClr val="0D9488"/>
-                </a:solidFill>
-                <a:latin typeface="Calibri"/>
-              </a:rPr>
-              <a:t>方案选择  </a:t>
-            </a:r>
-            <a:r>
-              <a:rPr sz="1500" b="0">
+              <a:rPr sz="1300" b="0">
                 <a:solidFill>
                   <a:srgbClr val="334155"/>
                 </a:solidFill>
                 <a:latin typeface="Calibri"/>
               </a:rPr>
-              <a:t>一期默认方案 A；报告等待较长时演进方案 C；纯方案 B 不作唯一路径。</a:t>
+              <a:t>纯 B 不作唯一路径</a:t>
+            </a:r>
+          </a:p>
+        </p:txBody>
+      </p:sp>
+      <p:sp>
+        <p:nvSpPr>
+          <p:cNvPr id="23" name="Rounded Rectangle 22"/>
+          <p:cNvSpPr/>
+          <p:nvPr/>
+        </p:nvSpPr>
+        <p:spPr>
+          <a:xfrm>
+            <a:off x="4251960" y="3794760"/>
+            <a:ext cx="3703320" cy="2423160"/>
+          </a:xfrm>
+          <a:prstGeom prst="roundRect">
+            <a:avLst>
+              <a:gd name="adj" fmla="val 8000"/>
+            </a:avLst>
+          </a:prstGeom>
+          <a:solidFill>
+            <a:srgbClr val="FFFFFF"/>
+          </a:solidFill>
+          <a:ln w="12700">
+            <a:solidFill>
+              <a:srgbClr val="E2E8F0"/>
+            </a:solidFill>
+          </a:ln>
+        </p:spPr>
+        <p:style>
+          <a:lnRef idx="1">
+            <a:schemeClr val="accent1"/>
+          </a:lnRef>
+          <a:fillRef idx="3">
+            <a:schemeClr val="accent1"/>
+          </a:fillRef>
+          <a:effectRef idx="2">
+            <a:schemeClr val="accent1"/>
+          </a:effectRef>
+          <a:fontRef idx="minor">
+            <a:schemeClr val="lt1"/>
+          </a:fontRef>
+        </p:style>
+        <p:txBody>
+          <a:bodyPr rtlCol="0" anchor="ctr"/>
+          <a:lstStyle/>
+          <a:p>
+            <a:pPr algn="ctr"/>
+          </a:p>
+        </p:txBody>
+      </p:sp>
+      <p:sp>
+        <p:nvSpPr>
+          <p:cNvPr id="24" name="Oval 23"/>
+          <p:cNvSpPr/>
+          <p:nvPr/>
+        </p:nvSpPr>
+        <p:spPr>
+          <a:xfrm>
+            <a:off x="4434840" y="4023360"/>
+            <a:ext cx="457200" cy="457200"/>
+          </a:xfrm>
+          <a:prstGeom prst="ellipse">
+            <a:avLst/>
+          </a:prstGeom>
+          <a:solidFill>
+            <a:srgbClr val="0D9488"/>
+          </a:solidFill>
+          <a:ln>
+            <a:noFill/>
+          </a:ln>
+        </p:spPr>
+        <p:style>
+          <a:lnRef idx="1">
+            <a:schemeClr val="accent1"/>
+          </a:lnRef>
+          <a:fillRef idx="3">
+            <a:schemeClr val="accent1"/>
+          </a:fillRef>
+          <a:effectRef idx="2">
+            <a:schemeClr val="accent1"/>
+          </a:effectRef>
+          <a:fontRef idx="minor">
+            <a:schemeClr val="lt1"/>
+          </a:fontRef>
+        </p:style>
+        <p:txBody>
+          <a:bodyPr rtlCol="0" anchor="ctr"/>
+          <a:lstStyle/>
+          <a:p>
+            <a:pPr algn="ctr"/>
+            <a:r>
+              <a:rPr sz="1100" b="1">
+                <a:solidFill>
+                  <a:srgbClr val="FFFFFF"/>
+                </a:solidFill>
+                <a:latin typeface="Calibri"/>
+              </a:rPr>
+              <a:t>05</a:t>
+            </a:r>
+          </a:p>
+        </p:txBody>
+      </p:sp>
+      <p:sp>
+        <p:nvSpPr>
+          <p:cNvPr id="25" name="TextBox 24"/>
+          <p:cNvSpPr txBox="1"/>
+          <p:nvPr/>
+        </p:nvSpPr>
+        <p:spPr>
+          <a:xfrm>
+            <a:off x="5029200" y="4069080"/>
+            <a:ext cx="2743200" cy="411480"/>
+          </a:xfrm>
+          <a:prstGeom prst="rect">
+            <a:avLst/>
+          </a:prstGeom>
+          <a:noFill/>
+        </p:spPr>
+        <p:txBody>
+          <a:bodyPr wrap="square">
+            <a:spAutoFit/>
+          </a:bodyPr>
+          <a:lstStyle/>
+          <a:p>
+            <a:r>
+              <a:rPr sz="1400" b="1">
+                <a:solidFill>
+                  <a:srgbClr val="0F172A"/>
+                </a:solidFill>
+                <a:latin typeface="Calibri"/>
+              </a:rPr>
+              <a:t>安全底线</a:t>
+            </a:r>
+          </a:p>
+        </p:txBody>
+      </p:sp>
+      <p:sp>
+        <p:nvSpPr>
+          <p:cNvPr id="26" name="TextBox 25"/>
+          <p:cNvSpPr txBox="1"/>
+          <p:nvPr/>
+        </p:nvSpPr>
+        <p:spPr>
+          <a:xfrm>
+            <a:off x="4480560" y="4709160"/>
+            <a:ext cx="3246120" cy="1280160"/>
+          </a:xfrm>
+          <a:prstGeom prst="rect">
+            <a:avLst/>
+          </a:prstGeom>
+          <a:noFill/>
+        </p:spPr>
+        <p:txBody>
+          <a:bodyPr wrap="square">
+            <a:spAutoFit/>
+          </a:bodyPr>
+          <a:lstStyle/>
+          <a:p>
+            <a:r>
+              <a:rPr sz="1300" b="0">
+                <a:solidFill>
+                  <a:srgbClr val="334155"/>
+                </a:solidFill>
+                <a:latin typeface="Calibri"/>
+              </a:rPr>
+              <a:t>模型 HTML = 不可信</a:t>
             </a:r>
           </a:p>
           <a:p>
             <a:pPr>
-              <a:spcAft>
-                <a:spcPts val="1200"/>
-              </a:spcAft>
+              <a:spcBef>
+                <a:spcPts val="400"/>
+              </a:spcBef>
             </a:pPr>
             <a:r>
-              <a:rPr sz="1500" b="1">
-                <a:solidFill>
-                  <a:srgbClr val="0D9488"/>
-                </a:solidFill>
-                <a:latin typeface="Calibri"/>
-              </a:rPr>
-              <a:t>安全底线  </a:t>
-            </a:r>
-            <a:r>
-              <a:rPr sz="1500" b="0">
+              <a:rPr sz="1300" b="0">
                 <a:solidFill>
                   <a:srgbClr val="334155"/>
                 </a:solidFill>
                 <a:latin typeface="Calibri"/>
               </a:rPr>
-              <a:t>模型 HTML=不可信；allow-scripts；慎开 allow-same-origin；预览与主站隔离。</a:t>
+              <a:t>allow-scripts，慎开 same-origin</a:t>
+            </a:r>
+          </a:p>
+        </p:txBody>
+      </p:sp>
+      <p:sp>
+        <p:nvSpPr>
+          <p:cNvPr id="27" name="Rounded Rectangle 26"/>
+          <p:cNvSpPr/>
+          <p:nvPr/>
+        </p:nvSpPr>
+        <p:spPr>
+          <a:xfrm>
+            <a:off x="8138160" y="3794760"/>
+            <a:ext cx="3703320" cy="2423160"/>
+          </a:xfrm>
+          <a:prstGeom prst="roundRect">
+            <a:avLst>
+              <a:gd name="adj" fmla="val 8000"/>
+            </a:avLst>
+          </a:prstGeom>
+          <a:solidFill>
+            <a:srgbClr val="FFFFFF"/>
+          </a:solidFill>
+          <a:ln w="12700">
+            <a:solidFill>
+              <a:srgbClr val="E2E8F0"/>
+            </a:solidFill>
+          </a:ln>
+        </p:spPr>
+        <p:style>
+          <a:lnRef idx="1">
+            <a:schemeClr val="accent1"/>
+          </a:lnRef>
+          <a:fillRef idx="3">
+            <a:schemeClr val="accent1"/>
+          </a:fillRef>
+          <a:effectRef idx="2">
+            <a:schemeClr val="accent1"/>
+          </a:effectRef>
+          <a:fontRef idx="minor">
+            <a:schemeClr val="lt1"/>
+          </a:fontRef>
+        </p:style>
+        <p:txBody>
+          <a:bodyPr rtlCol="0" anchor="ctr"/>
+          <a:lstStyle/>
+          <a:p>
+            <a:pPr algn="ctr"/>
+          </a:p>
+        </p:txBody>
+      </p:sp>
+      <p:sp>
+        <p:nvSpPr>
+          <p:cNvPr id="28" name="Oval 27"/>
+          <p:cNvSpPr/>
+          <p:nvPr/>
+        </p:nvSpPr>
+        <p:spPr>
+          <a:xfrm>
+            <a:off x="8321040" y="4023360"/>
+            <a:ext cx="457200" cy="457200"/>
+          </a:xfrm>
+          <a:prstGeom prst="ellipse">
+            <a:avLst/>
+          </a:prstGeom>
+          <a:solidFill>
+            <a:srgbClr val="0D9488"/>
+          </a:solidFill>
+          <a:ln>
+            <a:noFill/>
+          </a:ln>
+        </p:spPr>
+        <p:style>
+          <a:lnRef idx="1">
+            <a:schemeClr val="accent1"/>
+          </a:lnRef>
+          <a:fillRef idx="3">
+            <a:schemeClr val="accent1"/>
+          </a:fillRef>
+          <a:effectRef idx="2">
+            <a:schemeClr val="accent1"/>
+          </a:effectRef>
+          <a:fontRef idx="minor">
+            <a:schemeClr val="lt1"/>
+          </a:fontRef>
+        </p:style>
+        <p:txBody>
+          <a:bodyPr rtlCol="0" anchor="ctr"/>
+          <a:lstStyle/>
+          <a:p>
+            <a:pPr algn="ctr"/>
+            <a:r>
+              <a:rPr sz="1100" b="1">
+                <a:solidFill>
+                  <a:srgbClr val="FFFFFF"/>
+                </a:solidFill>
+                <a:latin typeface="Calibri"/>
+              </a:rPr>
+              <a:t>06</a:t>
+            </a:r>
+          </a:p>
+        </p:txBody>
+      </p:sp>
+      <p:sp>
+        <p:nvSpPr>
+          <p:cNvPr id="29" name="TextBox 28"/>
+          <p:cNvSpPr txBox="1"/>
+          <p:nvPr/>
+        </p:nvSpPr>
+        <p:spPr>
+          <a:xfrm>
+            <a:off x="8915400" y="4069080"/>
+            <a:ext cx="2743200" cy="411480"/>
+          </a:xfrm>
+          <a:prstGeom prst="rect">
+            <a:avLst/>
+          </a:prstGeom>
+          <a:noFill/>
+        </p:spPr>
+        <p:txBody>
+          <a:bodyPr wrap="square">
+            <a:spAutoFit/>
+          </a:bodyPr>
+          <a:lstStyle/>
+          <a:p>
+            <a:r>
+              <a:rPr sz="1400" b="1">
+                <a:solidFill>
+                  <a:srgbClr val="0F172A"/>
+                </a:solidFill>
+                <a:latin typeface="Calibri"/>
+              </a:rPr>
+              <a:t>下一步</a:t>
+            </a:r>
+          </a:p>
+        </p:txBody>
+      </p:sp>
+      <p:sp>
+        <p:nvSpPr>
+          <p:cNvPr id="30" name="TextBox 29"/>
+          <p:cNvSpPr txBox="1"/>
+          <p:nvPr/>
+        </p:nvSpPr>
+        <p:spPr>
+          <a:xfrm>
+            <a:off x="8366760" y="4709160"/>
+            <a:ext cx="3246120" cy="1280160"/>
+          </a:xfrm>
+          <a:prstGeom prst="rect">
+            <a:avLst/>
+          </a:prstGeom>
+          <a:noFill/>
+        </p:spPr>
+        <p:txBody>
+          <a:bodyPr wrap="square">
+            <a:spAutoFit/>
+          </a:bodyPr>
+          <a:lstStyle/>
+          <a:p>
+            <a:r>
+              <a:rPr sz="1300" b="0">
+                <a:solidFill>
+                  <a:srgbClr val="334155"/>
+                </a:solidFill>
+                <a:latin typeface="Calibri"/>
+              </a:rPr>
+              <a:t>元数据 + 预览卡片 + sandbox</a:t>
             </a:r>
           </a:p>
           <a:p>
             <a:pPr>
-              <a:spcAft>
-                <a:spcPts val="1200"/>
-              </a:spcAft>
+              <a:spcBef>
+                <a:spcPts val="400"/>
+              </a:spcBef>
             </a:pPr>
             <a:r>
-              <a:rPr sz="1500" b="1">
-                <a:solidFill>
-                  <a:srgbClr val="0D9488"/>
-                </a:solidFill>
-                <a:latin typeface="Calibri"/>
-              </a:rPr>
-              <a:t>下一步  </a:t>
-            </a:r>
-            <a:r>
-              <a:rPr sz="1500" b="0">
+              <a:rPr sz="1300" b="0">
                 <a:solidFill>
                   <a:srgbClr val="334155"/>
                 </a:solidFill>
                 <a:latin typeface="Calibri"/>
               </a:rPr>
-              <a:t>元数据约定 + 端预览卡片 + sandbox；用「健康分析报告」做验收场景。</a:t>
+              <a:t>用健康报告做验收</a:t>
             </a:r>
           </a:p>
         </p:txBody>

--- a/docs/agent_html_preview_proposal.pptx
+++ b/docs/agent_html_preview_proposal.pptx
@@ -13,6 +13,7 @@
     <p:sldId id="261" r:id="rId12"/>
     <p:sldId id="262" r:id="rId13"/>
     <p:sldId id="263" r:id="rId14"/>
+    <p:sldId id="264" r:id="rId15"/>
   </p:sldIdLst>
   <p:sldSz cx="12191695" cy="6858000" type="screen4x3"/>
   <p:notesSz cx="6858000" cy="9144000"/>
@@ -3267,7 +3268,7 @@
                 <a:latin typeface="Calibri"/>
               </a:rPr>
               <a:t>以「个人健康分析报告」为验收场景
-图文讲解：问题 → 能力 → 竞品 → Gap → 三方案 → 示例 → 建议</a:t>
+图文讲解：问题 → 能力 → 竞品 → Gap → 四方案 → 示例 → 建议</a:t>
             </a:r>
           </a:p>
         </p:txBody>
@@ -3301,7 +3302,7 @@
                 </a:solidFill>
                 <a:latin typeface="Calibri"/>
               </a:rPr>
-              <a:t>技术分享  |  系统方案  |  落地路径</a:t>
+              <a:t>技术分享  |  系统方案  |  四路径落地</a:t>
             </a:r>
           </a:p>
         </p:txBody>
@@ -8348,7 +8349,7 @@
                 </a:solidFill>
                 <a:latin typeface="Calibri"/>
               </a:rPr>
-              <a:t>识别preview</a:t>
+              <a:t>发布预览URL</a:t>
             </a:r>
           </a:p>
         </p:txBody>
@@ -8473,7 +8474,7 @@
                 </a:solidFill>
                 <a:latin typeface="Calibri"/>
               </a:rPr>
-              <a:t>沙箱渲染</a:t>
+              <a:t>WebView打开</a:t>
             </a:r>
           </a:p>
         </p:txBody>
@@ -8690,7 +8691,7 @@
                 </a:solidFill>
                 <a:latin typeface="Calibri"/>
               </a:rPr>
-              <a:t>预览容器 iframe/WebView</a:t>
+              <a:t>预览容器 WebView/iframe</a:t>
             </a:r>
           </a:p>
         </p:txBody>
@@ -8782,7 +8783,7 @@
                 </a:solidFill>
                 <a:latin typeface="Calibri"/>
               </a:rPr>
-              <a:t>mime / preview 元数据</a:t>
+              <a:t>可打开的预览 URL 或 mime</a:t>
             </a:r>
           </a:p>
         </p:txBody>
@@ -8874,7 +8875,7 @@
                 </a:solidFill>
                 <a:latin typeface="Calibri"/>
               </a:rPr>
-              <a:t>sandbox 安全默认</a:t>
+              <a:t>sandbox / 预览域隔离</a:t>
             </a:r>
           </a:p>
         </p:txBody>
@@ -9058,7 +9059,7 @@
                 </a:solidFill>
                 <a:latin typeface="Calibri"/>
               </a:rPr>
-              <a:t>流式 / 混合 / 分享</a:t>
+              <a:t>流式 / 混合体验增强</a:t>
             </a:r>
           </a:p>
         </p:txBody>
@@ -9293,7 +9294,7 @@
                 </a:solidFill>
                 <a:latin typeface="Calibri"/>
               </a:rPr>
-              <a:t>三种实现方案对比</a:t>
+              <a:t>四种实现方案对比</a:t>
             </a:r>
           </a:p>
           <a:p>
@@ -9304,45 +9305,651 @@
                 </a:solidFill>
                 <a:latin typeface="Calibri"/>
               </a:rPr>
-              <a:t>A 下载后渲染 · B 流式实时 · C 混合（流式粗预览 + 落盘定稿）</a:t>
-            </a:r>
-          </a:p>
-        </p:txBody>
-      </p:sp>
-      <p:pic>
-        <p:nvPicPr>
-          <p:cNvPr id="7" name="Picture 6" descr="ppt-three-schemes.png"/>
-          <p:cNvPicPr>
-            <a:picLocks noChangeAspect="1"/>
-          </p:cNvPicPr>
-          <p:nvPr/>
-        </p:nvPicPr>
-        <p:blipFill>
-          <a:blip r:embed="rId2"/>
-          <a:stretch>
-            <a:fillRect/>
-          </a:stretch>
-        </p:blipFill>
-        <p:spPr>
-          <a:xfrm>
-            <a:off x="365760" y="1051560"/>
-            <a:ext cx="11430000" cy="2148840"/>
+              <a:t>A 下载后渲染 · B 流式实时 · C 混合 · D 云预览服务出可渲染链接</a:t>
+            </a:r>
+          </a:p>
+        </p:txBody>
+      </p:sp>
+      <p:sp>
+        <p:nvSpPr>
+          <p:cNvPr id="7" name="Rounded Rectangle 6"/>
+          <p:cNvSpPr/>
+          <p:nvPr/>
+        </p:nvSpPr>
+        <p:spPr>
+          <a:xfrm>
+            <a:off x="365760" y="1097280"/>
+            <a:ext cx="5669280" cy="2560320"/>
+          </a:xfrm>
+          <a:prstGeom prst="roundRect">
+            <a:avLst>
+              <a:gd name="adj" fmla="val 8000"/>
+            </a:avLst>
+          </a:prstGeom>
+          <a:solidFill>
+            <a:srgbClr val="FFFFFF"/>
+          </a:solidFill>
+          <a:ln w="12700">
+            <a:solidFill>
+              <a:srgbClr val="0D9488"/>
+            </a:solidFill>
+          </a:ln>
+        </p:spPr>
+        <p:style>
+          <a:lnRef idx="1">
+            <a:schemeClr val="accent1"/>
+          </a:lnRef>
+          <a:fillRef idx="3">
+            <a:schemeClr val="accent1"/>
+          </a:fillRef>
+          <a:effectRef idx="2">
+            <a:schemeClr val="accent1"/>
+          </a:effectRef>
+          <a:fontRef idx="minor">
+            <a:schemeClr val="lt1"/>
+          </a:fontRef>
+        </p:style>
+        <p:txBody>
+          <a:bodyPr rtlCol="0" anchor="ctr"/>
+          <a:lstStyle/>
+          <a:p>
+            <a:pPr algn="ctr"/>
+          </a:p>
+        </p:txBody>
+      </p:sp>
+      <p:sp>
+        <p:nvSpPr>
+          <p:cNvPr id="8" name="Rounded Rectangle 7"/>
+          <p:cNvSpPr/>
+          <p:nvPr/>
+        </p:nvSpPr>
+        <p:spPr>
+          <a:xfrm>
+            <a:off x="530352" y="1261872"/>
+            <a:ext cx="2377440" cy="292608"/>
+          </a:xfrm>
+          <a:prstGeom prst="roundRect">
+            <a:avLst>
+              <a:gd name="adj" fmla="val 40000"/>
+            </a:avLst>
+          </a:prstGeom>
+          <a:solidFill>
+            <a:srgbClr val="0D9488"/>
+          </a:solidFill>
+          <a:ln>
+            <a:noFill/>
+          </a:ln>
+        </p:spPr>
+        <p:style>
+          <a:lnRef idx="1">
+            <a:schemeClr val="accent1"/>
+          </a:lnRef>
+          <a:fillRef idx="3">
+            <a:schemeClr val="accent1"/>
+          </a:fillRef>
+          <a:effectRef idx="2">
+            <a:schemeClr val="accent1"/>
+          </a:effectRef>
+          <a:fontRef idx="minor">
+            <a:schemeClr val="lt1"/>
+          </a:fontRef>
+        </p:style>
+        <p:txBody>
+          <a:bodyPr rtlCol="0" anchor="ctr"/>
+          <a:lstStyle/>
+          <a:p>
+            <a:pPr algn="ctr"/>
+            <a:r>
+              <a:rPr sz="1100" b="1">
+                <a:solidFill>
+                  <a:srgbClr val="FFFFFF"/>
+                </a:solidFill>
+                <a:latin typeface="Calibri"/>
+              </a:rPr>
+              <a:t>轻量闭环</a:t>
+            </a:r>
+          </a:p>
+        </p:txBody>
+      </p:sp>
+      <p:sp>
+        <p:nvSpPr>
+          <p:cNvPr id="9" name="TextBox 8"/>
+          <p:cNvSpPr txBox="1"/>
+          <p:nvPr/>
+        </p:nvSpPr>
+        <p:spPr>
+          <a:xfrm>
+            <a:off x="548640" y="1645920"/>
+            <a:ext cx="5303520" cy="1828800"/>
           </a:xfrm>
           <a:prstGeom prst="rect">
             <a:avLst/>
           </a:prstGeom>
-        </p:spPr>
-      </p:pic>
-      <p:sp>
-        <p:nvSpPr>
-          <p:cNvPr id="8" name="Rounded Rectangle 7"/>
+          <a:noFill/>
+        </p:spPr>
+        <p:txBody>
+          <a:bodyPr wrap="square">
+            <a:spAutoFit/>
+          </a:bodyPr>
+          <a:lstStyle/>
+          <a:p>
+            <a:r>
+              <a:rPr sz="1500" b="1">
+                <a:solidFill>
+                  <a:srgbClr val="0F172A"/>
+                </a:solidFill>
+                <a:latin typeface="Calibri"/>
+              </a:rPr>
+              <a:t>方案 1 · A 下载后渲染</a:t>
+            </a:r>
+          </a:p>
+          <a:p>
+            <a:pPr>
+              <a:spcBef>
+                <a:spcPts val="600"/>
+              </a:spcBef>
+            </a:pPr>
+            <a:r>
+              <a:rPr sz="1200" b="1">
+                <a:solidFill>
+                  <a:srgbClr val="0F766E"/>
+                </a:solidFill>
+                <a:latin typeface="Calibri"/>
+              </a:rPr>
+              <a:t>流程：</a:t>
+            </a:r>
+            <a:r>
+              <a:rPr sz="1200" b="0">
+                <a:solidFill>
+                  <a:srgbClr val="334155"/>
+                </a:solidFill>
+                <a:latin typeface="Calibri"/>
+              </a:rPr>
+              <a:t>write→云空间→REST 拉全文→srcdoc/loadData</a:t>
+            </a:r>
+          </a:p>
+          <a:p>
+            <a:pPr>
+              <a:spcBef>
+                <a:spcPts val="600"/>
+              </a:spcBef>
+            </a:pPr>
+            <a:r>
+              <a:rPr sz="1200" b="1">
+                <a:solidFill>
+                  <a:srgbClr val="0F766E"/>
+                </a:solidFill>
+                <a:latin typeface="Calibri"/>
+              </a:rPr>
+              <a:t>要点：</a:t>
+            </a:r>
+            <a:r>
+              <a:rPr sz="1200" b="0">
+                <a:solidFill>
+                  <a:srgbClr val="334155"/>
+                </a:solidFill>
+                <a:latin typeface="Calibri"/>
+              </a:rPr>
+              <a:t>稳、贴合现有同步；端要自己注入 HTML</a:t>
+            </a:r>
+          </a:p>
+          <a:p>
+            <a:pPr>
+              <a:spcBef>
+                <a:spcPts val="600"/>
+              </a:spcBef>
+            </a:pPr>
+            <a:r>
+              <a:rPr sz="1200" b="1">
+                <a:solidFill>
+                  <a:srgbClr val="0F766E"/>
+                </a:solidFill>
+                <a:latin typeface="Calibri"/>
+              </a:rPr>
+              <a:t>代价：</a:t>
+            </a:r>
+            <a:r>
+              <a:rPr sz="1200" b="0">
+                <a:solidFill>
+                  <a:srgbClr val="334155"/>
+                </a:solidFill>
+                <a:latin typeface="Calibri"/>
+              </a:rPr>
+              <a:t>多文件/分享较弱</a:t>
+            </a:r>
+          </a:p>
+        </p:txBody>
+      </p:sp>
+      <p:sp>
+        <p:nvSpPr>
+          <p:cNvPr id="10" name="Rounded Rectangle 9"/>
           <p:cNvSpPr/>
           <p:nvPr/>
         </p:nvSpPr>
         <p:spPr>
           <a:xfrm>
-            <a:off x="365760" y="3337560"/>
-            <a:ext cx="3703320" cy="3154680"/>
+            <a:off x="6263640" y="1097280"/>
+            <a:ext cx="5669280" cy="2560320"/>
+          </a:xfrm>
+          <a:prstGeom prst="roundRect">
+            <a:avLst>
+              <a:gd name="adj" fmla="val 8000"/>
+            </a:avLst>
+          </a:prstGeom>
+          <a:solidFill>
+            <a:srgbClr val="FFFFFF"/>
+          </a:solidFill>
+          <a:ln w="12700">
+            <a:solidFill>
+              <a:srgbClr val="64748B"/>
+            </a:solidFill>
+          </a:ln>
+        </p:spPr>
+        <p:style>
+          <a:lnRef idx="1">
+            <a:schemeClr val="accent1"/>
+          </a:lnRef>
+          <a:fillRef idx="3">
+            <a:schemeClr val="accent1"/>
+          </a:fillRef>
+          <a:effectRef idx="2">
+            <a:schemeClr val="accent1"/>
+          </a:effectRef>
+          <a:fontRef idx="minor">
+            <a:schemeClr val="lt1"/>
+          </a:fontRef>
+        </p:style>
+        <p:txBody>
+          <a:bodyPr rtlCol="0" anchor="ctr"/>
+          <a:lstStyle/>
+          <a:p>
+            <a:pPr algn="ctr"/>
+          </a:p>
+        </p:txBody>
+      </p:sp>
+      <p:sp>
+        <p:nvSpPr>
+          <p:cNvPr id="11" name="Rounded Rectangle 10"/>
+          <p:cNvSpPr/>
+          <p:nvPr/>
+        </p:nvSpPr>
+        <p:spPr>
+          <a:xfrm>
+            <a:off x="6428232" y="1261872"/>
+            <a:ext cx="2377440" cy="292608"/>
+          </a:xfrm>
+          <a:prstGeom prst="roundRect">
+            <a:avLst>
+              <a:gd name="adj" fmla="val 40000"/>
+            </a:avLst>
+          </a:prstGeom>
+          <a:solidFill>
+            <a:srgbClr val="64748B"/>
+          </a:solidFill>
+          <a:ln>
+            <a:noFill/>
+          </a:ln>
+        </p:spPr>
+        <p:style>
+          <a:lnRef idx="1">
+            <a:schemeClr val="accent1"/>
+          </a:lnRef>
+          <a:fillRef idx="3">
+            <a:schemeClr val="accent1"/>
+          </a:fillRef>
+          <a:effectRef idx="2">
+            <a:schemeClr val="accent1"/>
+          </a:effectRef>
+          <a:fontRef idx="minor">
+            <a:schemeClr val="lt1"/>
+          </a:fontRef>
+        </p:style>
+        <p:txBody>
+          <a:bodyPr rtlCol="0" anchor="ctr"/>
+          <a:lstStyle/>
+          <a:p>
+            <a:pPr algn="ctr"/>
+            <a:r>
+              <a:rPr sz="1100" b="1">
+                <a:solidFill>
+                  <a:srgbClr val="FFFFFF"/>
+                </a:solidFill>
+                <a:latin typeface="Calibri"/>
+              </a:rPr>
+              <a:t>体验增强</a:t>
+            </a:r>
+          </a:p>
+        </p:txBody>
+      </p:sp>
+      <p:sp>
+        <p:nvSpPr>
+          <p:cNvPr id="12" name="TextBox 11"/>
+          <p:cNvSpPr txBox="1"/>
+          <p:nvPr/>
+        </p:nvSpPr>
+        <p:spPr>
+          <a:xfrm>
+            <a:off x="6446520" y="1645920"/>
+            <a:ext cx="5303520" cy="1828800"/>
+          </a:xfrm>
+          <a:prstGeom prst="rect">
+            <a:avLst/>
+          </a:prstGeom>
+          <a:noFill/>
+        </p:spPr>
+        <p:txBody>
+          <a:bodyPr wrap="square">
+            <a:spAutoFit/>
+          </a:bodyPr>
+          <a:lstStyle/>
+          <a:p>
+            <a:r>
+              <a:rPr sz="1500" b="1">
+                <a:solidFill>
+                  <a:srgbClr val="0F172A"/>
+                </a:solidFill>
+                <a:latin typeface="Calibri"/>
+              </a:rPr>
+              <a:t>方案 2 · B 流式实时渲染</a:t>
+            </a:r>
+          </a:p>
+          <a:p>
+            <a:pPr>
+              <a:spcBef>
+                <a:spcPts val="600"/>
+              </a:spcBef>
+            </a:pPr>
+            <a:r>
+              <a:rPr sz="1200" b="1">
+                <a:solidFill>
+                  <a:srgbClr val="0F766E"/>
+                </a:solidFill>
+                <a:latin typeface="Calibri"/>
+              </a:rPr>
+              <a:t>流程：</a:t>
+            </a:r>
+            <a:r>
+              <a:rPr sz="1200" b="0">
+                <a:solidFill>
+                  <a:srgbClr val="334155"/>
+                </a:solidFill>
+                <a:latin typeface="Calibri"/>
+              </a:rPr>
+              <a:t>token/delta→端 buffer→边收边刷新</a:t>
+            </a:r>
+          </a:p>
+          <a:p>
+            <a:pPr>
+              <a:spcBef>
+                <a:spcPts val="600"/>
+              </a:spcBef>
+            </a:pPr>
+            <a:r>
+              <a:rPr sz="1200" b="1">
+                <a:solidFill>
+                  <a:srgbClr val="0F766E"/>
+                </a:solidFill>
+                <a:latin typeface="Calibri"/>
+              </a:rPr>
+              <a:t>要点：</a:t>
+            </a:r>
+            <a:r>
+              <a:rPr sz="1200" b="0">
+                <a:solidFill>
+                  <a:srgbClr val="334155"/>
+                </a:solidFill>
+                <a:latin typeface="Calibri"/>
+              </a:rPr>
+              <a:t>首屏快；半截标签与脚本副作用风险高</a:t>
+            </a:r>
+          </a:p>
+          <a:p>
+            <a:pPr>
+              <a:spcBef>
+                <a:spcPts val="600"/>
+              </a:spcBef>
+            </a:pPr>
+            <a:r>
+              <a:rPr sz="1200" b="1">
+                <a:solidFill>
+                  <a:srgbClr val="0F766E"/>
+                </a:solidFill>
+                <a:latin typeface="Calibri"/>
+              </a:rPr>
+              <a:t>代价：</a:t>
+            </a:r>
+            <a:r>
+              <a:rPr sz="1200" b="0">
+                <a:solidFill>
+                  <a:srgbClr val="334155"/>
+                </a:solidFill>
+                <a:latin typeface="Calibri"/>
+              </a:rPr>
+              <a:t>需独立推送通道</a:t>
+            </a:r>
+          </a:p>
+        </p:txBody>
+      </p:sp>
+      <p:sp>
+        <p:nvSpPr>
+          <p:cNvPr id="13" name="Rounded Rectangle 12"/>
+          <p:cNvSpPr/>
+          <p:nvPr/>
+        </p:nvSpPr>
+        <p:spPr>
+          <a:xfrm>
+            <a:off x="365760" y="3840480"/>
+            <a:ext cx="5669280" cy="2560320"/>
+          </a:xfrm>
+          <a:prstGeom prst="roundRect">
+            <a:avLst>
+              <a:gd name="adj" fmla="val 8000"/>
+            </a:avLst>
+          </a:prstGeom>
+          <a:solidFill>
+            <a:srgbClr val="F0FDFA"/>
+          </a:solidFill>
+          <a:ln w="12700">
+            <a:solidFill>
+              <a:srgbClr val="0F766E"/>
+            </a:solidFill>
+          </a:ln>
+        </p:spPr>
+        <p:style>
+          <a:lnRef idx="1">
+            <a:schemeClr val="accent1"/>
+          </a:lnRef>
+          <a:fillRef idx="3">
+            <a:schemeClr val="accent1"/>
+          </a:fillRef>
+          <a:effectRef idx="2">
+            <a:schemeClr val="accent1"/>
+          </a:effectRef>
+          <a:fontRef idx="minor">
+            <a:schemeClr val="lt1"/>
+          </a:fontRef>
+        </p:style>
+        <p:txBody>
+          <a:bodyPr rtlCol="0" anchor="ctr"/>
+          <a:lstStyle/>
+          <a:p>
+            <a:pPr algn="ctr"/>
+          </a:p>
+        </p:txBody>
+      </p:sp>
+      <p:sp>
+        <p:nvSpPr>
+          <p:cNvPr id="14" name="Rounded Rectangle 13"/>
+          <p:cNvSpPr/>
+          <p:nvPr/>
+        </p:nvSpPr>
+        <p:spPr>
+          <a:xfrm>
+            <a:off x="530352" y="4005072"/>
+            <a:ext cx="2377440" cy="292608"/>
+          </a:xfrm>
+          <a:prstGeom prst="roundRect">
+            <a:avLst>
+              <a:gd name="adj" fmla="val 40000"/>
+            </a:avLst>
+          </a:prstGeom>
+          <a:solidFill>
+            <a:srgbClr val="0F766E"/>
+          </a:solidFill>
+          <a:ln>
+            <a:noFill/>
+          </a:ln>
+        </p:spPr>
+        <p:style>
+          <a:lnRef idx="1">
+            <a:schemeClr val="accent1"/>
+          </a:lnRef>
+          <a:fillRef idx="3">
+            <a:schemeClr val="accent1"/>
+          </a:fillRef>
+          <a:effectRef idx="2">
+            <a:schemeClr val="accent1"/>
+          </a:effectRef>
+          <a:fontRef idx="minor">
+            <a:schemeClr val="lt1"/>
+          </a:fontRef>
+        </p:style>
+        <p:txBody>
+          <a:bodyPr rtlCol="0" anchor="ctr"/>
+          <a:lstStyle/>
+          <a:p>
+            <a:pPr algn="ctr"/>
+            <a:r>
+              <a:rPr sz="1100" b="1">
+                <a:solidFill>
+                  <a:srgbClr val="FFFFFF"/>
+                </a:solidFill>
+                <a:latin typeface="Calibri"/>
+              </a:rPr>
+              <a:t>长报告体验</a:t>
+            </a:r>
+          </a:p>
+        </p:txBody>
+      </p:sp>
+      <p:sp>
+        <p:nvSpPr>
+          <p:cNvPr id="15" name="TextBox 14"/>
+          <p:cNvSpPr txBox="1"/>
+          <p:nvPr/>
+        </p:nvSpPr>
+        <p:spPr>
+          <a:xfrm>
+            <a:off x="548640" y="4389120"/>
+            <a:ext cx="5303520" cy="1828800"/>
+          </a:xfrm>
+          <a:prstGeom prst="rect">
+            <a:avLst/>
+          </a:prstGeom>
+          <a:noFill/>
+        </p:spPr>
+        <p:txBody>
+          <a:bodyPr wrap="square">
+            <a:spAutoFit/>
+          </a:bodyPr>
+          <a:lstStyle/>
+          <a:p>
+            <a:r>
+              <a:rPr sz="1500" b="1">
+                <a:solidFill>
+                  <a:srgbClr val="0F172A"/>
+                </a:solidFill>
+                <a:latin typeface="Calibri"/>
+              </a:rPr>
+              <a:t>方案 3 · C 混合</a:t>
+            </a:r>
+          </a:p>
+          <a:p>
+            <a:pPr>
+              <a:spcBef>
+                <a:spcPts val="600"/>
+              </a:spcBef>
+            </a:pPr>
+            <a:r>
+              <a:rPr sz="1200" b="1">
+                <a:solidFill>
+                  <a:srgbClr val="0F766E"/>
+                </a:solidFill>
+                <a:latin typeface="Calibri"/>
+              </a:rPr>
+              <a:t>流程：</a:t>
+            </a:r>
+            <a:r>
+              <a:rPr sz="1200" b="0">
+                <a:solidFill>
+                  <a:srgbClr val="334155"/>
+                </a:solidFill>
+                <a:latin typeface="Calibri"/>
+              </a:rPr>
+              <a:t>流式粗预览 + 完成后落盘定稿再替换</a:t>
+            </a:r>
+          </a:p>
+          <a:p>
+            <a:pPr>
+              <a:spcBef>
+                <a:spcPts val="600"/>
+              </a:spcBef>
+            </a:pPr>
+            <a:r>
+              <a:rPr sz="1200" b="1">
+                <a:solidFill>
+                  <a:srgbClr val="0F766E"/>
+                </a:solidFill>
+                <a:latin typeface="Calibri"/>
+              </a:rPr>
+              <a:t>要点：</a:t>
+            </a:r>
+            <a:r>
+              <a:rPr sz="1200" b="0">
+                <a:solidFill>
+                  <a:srgbClr val="334155"/>
+                </a:solidFill>
+                <a:latin typeface="Calibri"/>
+              </a:rPr>
+              <a:t>体验近 B，正确性兜底靠完整版</a:t>
+            </a:r>
+          </a:p>
+          <a:p>
+            <a:pPr>
+              <a:spcBef>
+                <a:spcPts val="600"/>
+              </a:spcBef>
+            </a:pPr>
+            <a:r>
+              <a:rPr sz="1200" b="1">
+                <a:solidFill>
+                  <a:srgbClr val="0F766E"/>
+                </a:solidFill>
+                <a:latin typeface="Calibri"/>
+              </a:rPr>
+              <a:t>代价：</a:t>
+            </a:r>
+            <a:r>
+              <a:rPr sz="1200" b="0">
+                <a:solidFill>
+                  <a:srgbClr val="334155"/>
+                </a:solidFill>
+                <a:latin typeface="Calibri"/>
+              </a:rPr>
+              <a:t>状态机更复杂</a:t>
+            </a:r>
+          </a:p>
+        </p:txBody>
+      </p:sp>
+      <p:sp>
+        <p:nvSpPr>
+          <p:cNvPr id="16" name="Rounded Rectangle 15"/>
+          <p:cNvSpPr/>
+          <p:nvPr/>
+        </p:nvSpPr>
+        <p:spPr>
+          <a:xfrm>
+            <a:off x="6263640" y="3840480"/>
+            <a:ext cx="5669280" cy="2560320"/>
           </a:xfrm>
           <a:prstGeom prst="roundRect">
             <a:avLst>
@@ -9382,14 +9989,14 @@
       </p:sp>
       <p:sp>
         <p:nvSpPr>
-          <p:cNvPr id="9" name="Rounded Rectangle 8"/>
+          <p:cNvPr id="17" name="Rounded Rectangle 16"/>
           <p:cNvSpPr/>
           <p:nvPr/>
         </p:nvSpPr>
         <p:spPr>
           <a:xfrm>
-            <a:off x="502920" y="3474720"/>
-            <a:ext cx="2011680" cy="292608"/>
+            <a:off x="6428232" y="4005072"/>
+            <a:ext cx="2377440" cy="292608"/>
           </a:xfrm>
           <a:prstGeom prst="roundRect">
             <a:avLst>
@@ -9423,27 +10030,27 @@
           <a:p>
             <a:pPr algn="ctr"/>
             <a:r>
-              <a:rPr sz="1000" b="1">
+              <a:rPr sz="1100" b="1">
                 <a:solidFill>
                   <a:srgbClr val="FFFFFF"/>
                 </a:solidFill>
                 <a:latin typeface="Calibri"/>
               </a:rPr>
-              <a:t>一期默认 ★</a:t>
-            </a:r>
-          </a:p>
-        </p:txBody>
-      </p:sp>
-      <p:sp>
-        <p:nvSpPr>
-          <p:cNvPr id="10" name="TextBox 9"/>
+              <a:t>中台主路径推荐</a:t>
+            </a:r>
+          </a:p>
+        </p:txBody>
+      </p:sp>
+      <p:sp>
+        <p:nvSpPr>
+          <p:cNvPr id="18" name="TextBox 17"/>
           <p:cNvSpPr txBox="1"/>
           <p:nvPr/>
         </p:nvSpPr>
         <p:spPr>
           <a:xfrm>
-            <a:off x="530352" y="3886200"/>
-            <a:ext cx="3383280" cy="2468880"/>
+            <a:off x="6446520" y="4389120"/>
+            <a:ext cx="5303520" cy="1828800"/>
           </a:xfrm>
           <a:prstGeom prst="rect">
             <a:avLst/>
@@ -9457,23 +10064,23 @@
           <a:lstStyle/>
           <a:p>
             <a:r>
-              <a:rPr sz="1400" b="1">
+              <a:rPr sz="1500" b="1">
                 <a:solidFill>
                   <a:srgbClr val="0F172A"/>
                 </a:solidFill>
                 <a:latin typeface="Calibri"/>
               </a:rPr>
-              <a:t>方案 A · 下载后渲染</a:t>
+              <a:t>方案 4 · D 云预览出链接 ★</a:t>
             </a:r>
           </a:p>
           <a:p>
             <a:pPr>
               <a:spcBef>
-                <a:spcPts val="800"/>
+                <a:spcPts val="600"/>
               </a:spcBef>
             </a:pPr>
             <a:r>
-              <a:rPr sz="1100" b="1">
+              <a:rPr sz="1200" b="1">
                 <a:solidFill>
                   <a:srgbClr val="0F766E"/>
                 </a:solidFill>
@@ -9482,48 +10089,48 @@
               <a:t>流程：</a:t>
             </a:r>
             <a:r>
-              <a:rPr sz="1100" b="0">
+              <a:rPr sz="1200" b="0">
                 <a:solidFill>
                   <a:srgbClr val="334155"/>
                 </a:solidFill>
                 <a:latin typeface="Calibri"/>
               </a:rPr>
-              <a:t>write→同步→REST全文→一次加载</a:t>
+              <a:t>发布到预览 Web 服务→返回 URL→WebView 直接打开</a:t>
             </a:r>
           </a:p>
           <a:p>
             <a:pPr>
               <a:spcBef>
-                <a:spcPts val="800"/>
+                <a:spcPts val="600"/>
               </a:spcBef>
             </a:pPr>
             <a:r>
-              <a:rPr sz="1100" b="1">
+              <a:rPr sz="1200" b="1">
                 <a:solidFill>
                   <a:srgbClr val="0F766E"/>
                 </a:solidFill>
                 <a:latin typeface="Calibri"/>
               </a:rPr>
-              <a:t>优势：</a:t>
-            </a:r>
-            <a:r>
-              <a:rPr sz="1100" b="0">
+              <a:t>要点：</a:t>
+            </a:r>
+            <a:r>
+              <a:rPr sz="1200" b="0">
                 <a:solidFill>
                   <a:srgbClr val="334155"/>
                 </a:solidFill>
                 <a:latin typeface="Calibri"/>
               </a:rPr>
-              <a:t>稳、完整、易回放、贴合云空间</a:t>
+              <a:t>端最简；多文件/分享/统一 CSP 天然友好</a:t>
             </a:r>
           </a:p>
           <a:p>
             <a:pPr>
               <a:spcBef>
-                <a:spcPts val="800"/>
+                <a:spcPts val="600"/>
               </a:spcBef>
             </a:pPr>
             <a:r>
-              <a:rPr sz="1100" b="1">
+              <a:rPr sz="1200" b="1">
                 <a:solidFill>
                   <a:srgbClr val="0F766E"/>
                 </a:solidFill>
@@ -9532,433 +10139,13 @@
               <a:t>代价：</a:t>
             </a:r>
             <a:r>
-              <a:rPr sz="1100" b="0">
+              <a:rPr sz="1200" b="0">
                 <a:solidFill>
                   <a:srgbClr val="334155"/>
                 </a:solidFill>
                 <a:latin typeface="Calibri"/>
               </a:rPr>
-              <a:t>需等生成+同步才出首屏</a:t>
-            </a:r>
-          </a:p>
-        </p:txBody>
-      </p:sp>
-      <p:sp>
-        <p:nvSpPr>
-          <p:cNvPr id="11" name="Rounded Rectangle 10"/>
-          <p:cNvSpPr/>
-          <p:nvPr/>
-        </p:nvSpPr>
-        <p:spPr>
-          <a:xfrm>
-            <a:off x="4251960" y="3337560"/>
-            <a:ext cx="3703320" cy="3154680"/>
-          </a:xfrm>
-          <a:prstGeom prst="roundRect">
-            <a:avLst>
-              <a:gd name="adj" fmla="val 8000"/>
-            </a:avLst>
-          </a:prstGeom>
-          <a:solidFill>
-            <a:srgbClr val="FFFFFF"/>
-          </a:solidFill>
-          <a:ln w="12700">
-            <a:solidFill>
-              <a:srgbClr val="64748B"/>
-            </a:solidFill>
-          </a:ln>
-        </p:spPr>
-        <p:style>
-          <a:lnRef idx="1">
-            <a:schemeClr val="accent1"/>
-          </a:lnRef>
-          <a:fillRef idx="3">
-            <a:schemeClr val="accent1"/>
-          </a:fillRef>
-          <a:effectRef idx="2">
-            <a:schemeClr val="accent1"/>
-          </a:effectRef>
-          <a:fontRef idx="minor">
-            <a:schemeClr val="lt1"/>
-          </a:fontRef>
-        </p:style>
-        <p:txBody>
-          <a:bodyPr rtlCol="0" anchor="ctr"/>
-          <a:lstStyle/>
-          <a:p>
-            <a:pPr algn="ctr"/>
-          </a:p>
-        </p:txBody>
-      </p:sp>
-      <p:sp>
-        <p:nvSpPr>
-          <p:cNvPr id="12" name="Rounded Rectangle 11"/>
-          <p:cNvSpPr/>
-          <p:nvPr/>
-        </p:nvSpPr>
-        <p:spPr>
-          <a:xfrm>
-            <a:off x="4389120" y="3474720"/>
-            <a:ext cx="2011680" cy="292608"/>
-          </a:xfrm>
-          <a:prstGeom prst="roundRect">
-            <a:avLst>
-              <a:gd name="adj" fmla="val 40000"/>
-            </a:avLst>
-          </a:prstGeom>
-          <a:solidFill>
-            <a:srgbClr val="64748B"/>
-          </a:solidFill>
-          <a:ln>
-            <a:noFill/>
-          </a:ln>
-        </p:spPr>
-        <p:style>
-          <a:lnRef idx="1">
-            <a:schemeClr val="accent1"/>
-          </a:lnRef>
-          <a:fillRef idx="3">
-            <a:schemeClr val="accent1"/>
-          </a:fillRef>
-          <a:effectRef idx="2">
-            <a:schemeClr val="accent1"/>
-          </a:effectRef>
-          <a:fontRef idx="minor">
-            <a:schemeClr val="lt1"/>
-          </a:fontRef>
-        </p:style>
-        <p:txBody>
-          <a:bodyPr rtlCol="0" anchor="ctr"/>
-          <a:lstStyle/>
-          <a:p>
-            <a:pPr algn="ctr"/>
-            <a:r>
-              <a:rPr sz="1000" b="1">
-                <a:solidFill>
-                  <a:srgbClr val="FFFFFF"/>
-                </a:solidFill>
-                <a:latin typeface="Calibri"/>
-              </a:rPr>
-              <a:t>二期增强</a:t>
-            </a:r>
-          </a:p>
-        </p:txBody>
-      </p:sp>
-      <p:sp>
-        <p:nvSpPr>
-          <p:cNvPr id="13" name="TextBox 12"/>
-          <p:cNvSpPr txBox="1"/>
-          <p:nvPr/>
-        </p:nvSpPr>
-        <p:spPr>
-          <a:xfrm>
-            <a:off x="4416552" y="3886200"/>
-            <a:ext cx="3383280" cy="2468880"/>
-          </a:xfrm>
-          <a:prstGeom prst="rect">
-            <a:avLst/>
-          </a:prstGeom>
-          <a:noFill/>
-        </p:spPr>
-        <p:txBody>
-          <a:bodyPr wrap="square">
-            <a:spAutoFit/>
-          </a:bodyPr>
-          <a:lstStyle/>
-          <a:p>
-            <a:r>
-              <a:rPr sz="1400" b="1">
-                <a:solidFill>
-                  <a:srgbClr val="0F172A"/>
-                </a:solidFill>
-                <a:latin typeface="Calibri"/>
-              </a:rPr>
-              <a:t>方案 B · 流式实时渲染</a:t>
-            </a:r>
-          </a:p>
-          <a:p>
-            <a:pPr>
-              <a:spcBef>
-                <a:spcPts val="800"/>
-              </a:spcBef>
-            </a:pPr>
-            <a:r>
-              <a:rPr sz="1100" b="1">
-                <a:solidFill>
-                  <a:srgbClr val="0F766E"/>
-                </a:solidFill>
-                <a:latin typeface="Calibri"/>
-              </a:rPr>
-              <a:t>流程：</a:t>
-            </a:r>
-            <a:r>
-              <a:rPr sz="1100" b="0">
-                <a:solidFill>
-                  <a:srgbClr val="334155"/>
-                </a:solidFill>
-                <a:latin typeface="Calibri"/>
-              </a:rPr>
-              <a:t>token/delta→buffer→边收边刷新</a:t>
-            </a:r>
-          </a:p>
-          <a:p>
-            <a:pPr>
-              <a:spcBef>
-                <a:spcPts val="800"/>
-              </a:spcBef>
-            </a:pPr>
-            <a:r>
-              <a:rPr sz="1100" b="1">
-                <a:solidFill>
-                  <a:srgbClr val="0F766E"/>
-                </a:solidFill>
-                <a:latin typeface="Calibri"/>
-              </a:rPr>
-              <a:t>优势：</a:t>
-            </a:r>
-            <a:r>
-              <a:rPr sz="1100" b="0">
-                <a:solidFill>
-                  <a:srgbClr val="334155"/>
-                </a:solidFill>
-                <a:latin typeface="Calibri"/>
-              </a:rPr>
-              <a:t>首屏快，体感像流式 Markdown</a:t>
-            </a:r>
-          </a:p>
-          <a:p>
-            <a:pPr>
-              <a:spcBef>
-                <a:spcPts val="800"/>
-              </a:spcBef>
-            </a:pPr>
-            <a:r>
-              <a:rPr sz="1100" b="1">
-                <a:solidFill>
-                  <a:srgbClr val="0F766E"/>
-                </a:solidFill>
-                <a:latin typeface="Calibri"/>
-              </a:rPr>
-              <a:t>代价：</a:t>
-            </a:r>
-            <a:r>
-              <a:rPr sz="1100" b="0">
-                <a:solidFill>
-                  <a:srgbClr val="334155"/>
-                </a:solidFill>
-                <a:latin typeface="Calibri"/>
-              </a:rPr>
-              <a:t>半截标签/脚本重复/协议重</a:t>
-            </a:r>
-          </a:p>
-        </p:txBody>
-      </p:sp>
-      <p:sp>
-        <p:nvSpPr>
-          <p:cNvPr id="14" name="Rounded Rectangle 13"/>
-          <p:cNvSpPr/>
-          <p:nvPr/>
-        </p:nvSpPr>
-        <p:spPr>
-          <a:xfrm>
-            <a:off x="8138160" y="3337560"/>
-            <a:ext cx="3703320" cy="3154680"/>
-          </a:xfrm>
-          <a:prstGeom prst="roundRect">
-            <a:avLst>
-              <a:gd name="adj" fmla="val 8000"/>
-            </a:avLst>
-          </a:prstGeom>
-          <a:solidFill>
-            <a:srgbClr val="F0FDFA"/>
-          </a:solidFill>
-          <a:ln w="12700">
-            <a:solidFill>
-              <a:srgbClr val="0F766E"/>
-            </a:solidFill>
-          </a:ln>
-        </p:spPr>
-        <p:style>
-          <a:lnRef idx="1">
-            <a:schemeClr val="accent1"/>
-          </a:lnRef>
-          <a:fillRef idx="3">
-            <a:schemeClr val="accent1"/>
-          </a:fillRef>
-          <a:effectRef idx="2">
-            <a:schemeClr val="accent1"/>
-          </a:effectRef>
-          <a:fontRef idx="minor">
-            <a:schemeClr val="lt1"/>
-          </a:fontRef>
-        </p:style>
-        <p:txBody>
-          <a:bodyPr rtlCol="0" anchor="ctr"/>
-          <a:lstStyle/>
-          <a:p>
-            <a:pPr algn="ctr"/>
-          </a:p>
-        </p:txBody>
-      </p:sp>
-      <p:sp>
-        <p:nvSpPr>
-          <p:cNvPr id="15" name="Rounded Rectangle 14"/>
-          <p:cNvSpPr/>
-          <p:nvPr/>
-        </p:nvSpPr>
-        <p:spPr>
-          <a:xfrm>
-            <a:off x="8275320" y="3474720"/>
-            <a:ext cx="2011680" cy="292608"/>
-          </a:xfrm>
-          <a:prstGeom prst="roundRect">
-            <a:avLst>
-              <a:gd name="adj" fmla="val 40000"/>
-            </a:avLst>
-          </a:prstGeom>
-          <a:solidFill>
-            <a:srgbClr val="0F766E"/>
-          </a:solidFill>
-          <a:ln>
-            <a:noFill/>
-          </a:ln>
-        </p:spPr>
-        <p:style>
-          <a:lnRef idx="1">
-            <a:schemeClr val="accent1"/>
-          </a:lnRef>
-          <a:fillRef idx="3">
-            <a:schemeClr val="accent1"/>
-          </a:fillRef>
-          <a:effectRef idx="2">
-            <a:schemeClr val="accent1"/>
-          </a:effectRef>
-          <a:fontRef idx="minor">
-            <a:schemeClr val="lt1"/>
-          </a:fontRef>
-        </p:style>
-        <p:txBody>
-          <a:bodyPr rtlCol="0" anchor="ctr"/>
-          <a:lstStyle/>
-          <a:p>
-            <a:pPr algn="ctr"/>
-            <a:r>
-              <a:rPr sz="1000" b="1">
-                <a:solidFill>
-                  <a:srgbClr val="FFFFFF"/>
-                </a:solidFill>
-                <a:latin typeface="Calibri"/>
-              </a:rPr>
-              <a:t>报告场景演进 ★</a:t>
-            </a:r>
-          </a:p>
-        </p:txBody>
-      </p:sp>
-      <p:sp>
-        <p:nvSpPr>
-          <p:cNvPr id="16" name="TextBox 15"/>
-          <p:cNvSpPr txBox="1"/>
-          <p:nvPr/>
-        </p:nvSpPr>
-        <p:spPr>
-          <a:xfrm>
-            <a:off x="8302752" y="3886200"/>
-            <a:ext cx="3383280" cy="2468880"/>
-          </a:xfrm>
-          <a:prstGeom prst="rect">
-            <a:avLst/>
-          </a:prstGeom>
-          <a:noFill/>
-        </p:spPr>
-        <p:txBody>
-          <a:bodyPr wrap="square">
-            <a:spAutoFit/>
-          </a:bodyPr>
-          <a:lstStyle/>
-          <a:p>
-            <a:r>
-              <a:rPr sz="1400" b="1">
-                <a:solidFill>
-                  <a:srgbClr val="0F172A"/>
-                </a:solidFill>
-                <a:latin typeface="Calibri"/>
-              </a:rPr>
-              <a:t>方案 C · 混合</a:t>
-            </a:r>
-          </a:p>
-          <a:p>
-            <a:pPr>
-              <a:spcBef>
-                <a:spcPts val="800"/>
-              </a:spcBef>
-            </a:pPr>
-            <a:r>
-              <a:rPr sz="1100" b="1">
-                <a:solidFill>
-                  <a:srgbClr val="0F766E"/>
-                </a:solidFill>
-                <a:latin typeface="Calibri"/>
-              </a:rPr>
-              <a:t>流程：</a:t>
-            </a:r>
-            <a:r>
-              <a:rPr sz="1100" b="0">
-                <a:solidFill>
-                  <a:srgbClr val="334155"/>
-                </a:solidFill>
-                <a:latin typeface="Calibri"/>
-              </a:rPr>
-              <a:t>流式粗预览 + 完成后 write 定稿</a:t>
-            </a:r>
-          </a:p>
-          <a:p>
-            <a:pPr>
-              <a:spcBef>
-                <a:spcPts val="800"/>
-              </a:spcBef>
-            </a:pPr>
-            <a:r>
-              <a:rPr sz="1100" b="1">
-                <a:solidFill>
-                  <a:srgbClr val="0F766E"/>
-                </a:solidFill>
-                <a:latin typeface="Calibri"/>
-              </a:rPr>
-              <a:t>优势：</a:t>
-            </a:r>
-            <a:r>
-              <a:rPr sz="1100" b="0">
-                <a:solidFill>
-                  <a:srgbClr val="334155"/>
-                </a:solidFill>
-                <a:latin typeface="Calibri"/>
-              </a:rPr>
-              <a:t>体验近 B，正确性兜底靠 A</a:t>
-            </a:r>
-          </a:p>
-          <a:p>
-            <a:pPr>
-              <a:spcBef>
-                <a:spcPts val="800"/>
-              </a:spcBef>
-            </a:pPr>
-            <a:r>
-              <a:rPr sz="1100" b="1">
-                <a:solidFill>
-                  <a:srgbClr val="0F766E"/>
-                </a:solidFill>
-                <a:latin typeface="Calibri"/>
-              </a:rPr>
-              <a:t>代价：</a:t>
-            </a:r>
-            <a:r>
-              <a:rPr sz="1100" b="0">
-                <a:solidFill>
-                  <a:srgbClr val="334155"/>
-                </a:solidFill>
-                <a:latin typeface="Calibri"/>
-              </a:rPr>
-              <a:t>状态机更复杂，需切换策略</a:t>
+              <a:t>需养预览域（或存储签名 URL 网关）</a:t>
             </a:r>
           </a:p>
         </p:txBody>
@@ -10159,7 +10346,7 @@
                 </a:solidFill>
                 <a:latin typeface="Calibri"/>
               </a:rPr>
-              <a:t>06</a:t>
+              <a:t>05b</a:t>
             </a:r>
           </a:p>
         </p:txBody>
@@ -10193,7 +10380,7 @@
                 </a:solidFill>
                 <a:latin typeface="Calibri"/>
               </a:rPr>
-              <a:t>实现示例</a:t>
+              <a:t>方案 4 详解：云预览服务 → 可渲染链接</a:t>
             </a:r>
           </a:p>
           <a:p>
@@ -10204,21 +10391,206 @@
                 </a:solidFill>
                 <a:latin typeface="Calibri"/>
               </a:rPr>
-              <a:t>健康报告闭环：契约 · 方案 A · 方案 C</a:t>
-            </a:r>
-          </a:p>
-        </p:txBody>
-      </p:sp>
-      <p:sp>
-        <p:nvSpPr>
-          <p:cNvPr id="7" name="Rounded Rectangle 6"/>
+              <a:t>专用（或轻量）HTTP 入口，供 WebView / iframe 直接 loadUrl</a:t>
+            </a:r>
+          </a:p>
+        </p:txBody>
+      </p:sp>
+      <p:pic>
+        <p:nvPicPr>
+          <p:cNvPr id="7" name="Picture 6" descr="ppt-scheme-preview-url.png"/>
+          <p:cNvPicPr>
+            <a:picLocks noChangeAspect="1"/>
+          </p:cNvPicPr>
+          <p:nvPr/>
+        </p:nvPicPr>
+        <p:blipFill>
+          <a:blip r:embed="rId2"/>
+          <a:stretch>
+            <a:fillRect/>
+          </a:stretch>
+        </p:blipFill>
+        <p:spPr>
+          <a:xfrm>
+            <a:off x="365760" y="1097280"/>
+            <a:ext cx="6766560" cy="3200400"/>
+          </a:xfrm>
+          <a:prstGeom prst="rect">
+            <a:avLst/>
+          </a:prstGeom>
+        </p:spPr>
+      </p:pic>
+      <p:sp>
+        <p:nvSpPr>
+          <p:cNvPr id="8" name="Rounded Rectangle 7"/>
           <p:cNvSpPr/>
           <p:nvPr/>
         </p:nvSpPr>
         <p:spPr>
           <a:xfrm>
-            <a:off x="320040" y="1097280"/>
-            <a:ext cx="4114800" cy="5394960"/>
+            <a:off x="7315200" y="1097280"/>
+            <a:ext cx="4480560" cy="3200400"/>
+          </a:xfrm>
+          <a:prstGeom prst="roundRect">
+            <a:avLst>
+              <a:gd name="adj" fmla="val 8000"/>
+            </a:avLst>
+          </a:prstGeom>
+          <a:solidFill>
+            <a:srgbClr val="F0FDFA"/>
+          </a:solidFill>
+          <a:ln w="12700">
+            <a:solidFill>
+              <a:srgbClr val="0D9488"/>
+            </a:solidFill>
+          </a:ln>
+        </p:spPr>
+        <p:style>
+          <a:lnRef idx="1">
+            <a:schemeClr val="accent1"/>
+          </a:lnRef>
+          <a:fillRef idx="3">
+            <a:schemeClr val="accent1"/>
+          </a:fillRef>
+          <a:effectRef idx="2">
+            <a:schemeClr val="accent1"/>
+          </a:effectRef>
+          <a:fontRef idx="minor">
+            <a:schemeClr val="lt1"/>
+          </a:fontRef>
+        </p:style>
+        <p:txBody>
+          <a:bodyPr rtlCol="0" anchor="ctr"/>
+          <a:lstStyle/>
+          <a:p>
+            <a:pPr algn="ctr"/>
+          </a:p>
+        </p:txBody>
+      </p:sp>
+      <p:sp>
+        <p:nvSpPr>
+          <p:cNvPr id="9" name="TextBox 8"/>
+          <p:cNvSpPr txBox="1"/>
+          <p:nvPr/>
+        </p:nvSpPr>
+        <p:spPr>
+          <a:xfrm>
+            <a:off x="7498079" y="1234440"/>
+            <a:ext cx="4160520" cy="2926080"/>
+          </a:xfrm>
+          <a:prstGeom prst="rect">
+            <a:avLst/>
+          </a:prstGeom>
+          <a:noFill/>
+        </p:spPr>
+        <p:txBody>
+          <a:bodyPr wrap="square">
+            <a:spAutoFit/>
+          </a:bodyPr>
+          <a:lstStyle/>
+          <a:p>
+            <a:r>
+              <a:rPr sz="1400" b="1">
+                <a:solidFill>
+                  <a:srgbClr val="0D9488"/>
+                </a:solidFill>
+                <a:latin typeface="Calibri"/>
+              </a:rPr>
+              <a:t>核心链路</a:t>
+            </a:r>
+          </a:p>
+          <a:p>
+            <a:pPr>
+              <a:spcBef>
+                <a:spcPts val="600"/>
+              </a:spcBef>
+            </a:pPr>
+            <a:r>
+              <a:rPr sz="1200" b="0">
+                <a:solidFill>
+                  <a:srgbClr val="334155"/>
+                </a:solidFill>
+                <a:latin typeface="Calibri"/>
+              </a:rPr>
+              <a:t>1. Agent 生成 HTML（可 write 到云空间）</a:t>
+            </a:r>
+          </a:p>
+          <a:p>
+            <a:pPr>
+              <a:spcBef>
+                <a:spcPts val="600"/>
+              </a:spcBef>
+            </a:pPr>
+            <a:r>
+              <a:rPr sz="1200" b="0">
+                <a:solidFill>
+                  <a:srgbClr val="334155"/>
+                </a:solidFill>
+                <a:latin typeface="Calibri"/>
+              </a:rPr>
+              <a:t>2. 发布到预览 Web 服务 / 签名托管</a:t>
+            </a:r>
+          </a:p>
+          <a:p>
+            <a:pPr>
+              <a:spcBef>
+                <a:spcPts val="600"/>
+              </a:spcBef>
+            </a:pPr>
+            <a:r>
+              <a:rPr sz="1200" b="0">
+                <a:solidFill>
+                  <a:srgbClr val="334155"/>
+                </a:solidFill>
+                <a:latin typeface="Calibri"/>
+              </a:rPr>
+              <a:t>3. 返回 https://preview…/p/{id}/</a:t>
+            </a:r>
+          </a:p>
+          <a:p>
+            <a:pPr>
+              <a:spcBef>
+                <a:spcPts val="600"/>
+              </a:spcBef>
+            </a:pPr>
+            <a:r>
+              <a:rPr sz="1200" b="0">
+                <a:solidFill>
+                  <a:srgbClr val="334155"/>
+                </a:solidFill>
+                <a:latin typeface="Calibri"/>
+              </a:rPr>
+              <a:t>4. 端 WebView.loadUrl(link)</a:t>
+            </a:r>
+          </a:p>
+          <a:p>
+            <a:pPr>
+              <a:spcBef>
+                <a:spcPts val="600"/>
+              </a:spcBef>
+            </a:pPr>
+            <a:r>
+              <a:rPr sz="1200" b="0">
+                <a:solidFill>
+                  <a:srgbClr val="334155"/>
+                </a:solidFill>
+                <a:latin typeface="Calibri"/>
+              </a:rPr>
+              <a:t>5. 服务保证 text/html + CSP/TTL</a:t>
+            </a:r>
+          </a:p>
+        </p:txBody>
+      </p:sp>
+      <p:sp>
+        <p:nvSpPr>
+          <p:cNvPr id="10" name="Rounded Rectangle 9"/>
+          <p:cNvSpPr/>
+          <p:nvPr/>
+        </p:nvSpPr>
+        <p:spPr>
+          <a:xfrm>
+            <a:off x="365760" y="4480560"/>
+            <a:ext cx="3703320" cy="2011680"/>
           </a:xfrm>
           <a:prstGeom prst="roundRect">
             <a:avLst>
@@ -10258,14 +10630,14 @@
       </p:sp>
       <p:sp>
         <p:nvSpPr>
-          <p:cNvPr id="8" name="TextBox 7"/>
+          <p:cNvPr id="11" name="TextBox 10"/>
           <p:cNvSpPr txBox="1"/>
           <p:nvPr/>
         </p:nvSpPr>
         <p:spPr>
           <a:xfrm>
-            <a:off x="457200" y="1234440"/>
-            <a:ext cx="3840480" cy="365760"/>
+            <a:off x="548640" y="4617720"/>
+            <a:ext cx="3383280" cy="1737360"/>
           </a:xfrm>
           <a:prstGeom prst="rect">
             <a:avLst/>
@@ -10279,36 +10651,72 @@
           <a:lstStyle/>
           <a:p>
             <a:r>
-              <a:rPr sz="1400" b="1">
+              <a:rPr sz="1300" b="1">
                 <a:solidFill>
                   <a:srgbClr val="0D9488"/>
                 </a:solidFill>
                 <a:latin typeface="Calibri"/>
               </a:rPr>
-              <a:t>健康报告串接</a:t>
-            </a:r>
-          </a:p>
-        </p:txBody>
-      </p:sp>
-      <p:sp>
-        <p:nvSpPr>
-          <p:cNvPr id="9" name="Oval 8"/>
+              <a:t>端侧</a:t>
+            </a:r>
+          </a:p>
+          <a:p>
+            <a:pPr>
+              <a:spcBef>
+                <a:spcPts val="400"/>
+              </a:spcBef>
+            </a:pPr>
+            <a:r>
+              <a:rPr sz="1200" b="0">
+                <a:solidFill>
+                  <a:srgbClr val="334155"/>
+                </a:solidFill>
+                <a:latin typeface="Calibri"/>
+              </a:rPr>
+              <a:t>不再必须 REST 拉全文再 srcdoc；</a:t>
+            </a:r>
+          </a:p>
+          <a:p>
+            <a:pPr>
+              <a:spcBef>
+                <a:spcPts val="400"/>
+              </a:spcBef>
+            </a:pPr>
+            <a:r>
+              <a:rPr sz="1200" b="0">
+                <a:solidFill>
+                  <a:srgbClr val="334155"/>
+                </a:solidFill>
+                <a:latin typeface="Calibri"/>
+              </a:rPr>
+              <a:t>Web / 原生统一 loadUrl</a:t>
+            </a:r>
+          </a:p>
+        </p:txBody>
+      </p:sp>
+      <p:sp>
+        <p:nvSpPr>
+          <p:cNvPr id="12" name="Rounded Rectangle 11"/>
           <p:cNvSpPr/>
           <p:nvPr/>
         </p:nvSpPr>
         <p:spPr>
           <a:xfrm>
-            <a:off x="548640" y="1737360"/>
-            <a:ext cx="384048" cy="384048"/>
-          </a:xfrm>
-          <a:prstGeom prst="ellipse">
-            <a:avLst/>
+            <a:off x="4251960" y="4480560"/>
+            <a:ext cx="3703320" cy="2011680"/>
+          </a:xfrm>
+          <a:prstGeom prst="roundRect">
+            <a:avLst>
+              <a:gd name="adj" fmla="val 8000"/>
+            </a:avLst>
           </a:prstGeom>
           <a:solidFill>
-            <a:srgbClr val="0D9488"/>
+            <a:srgbClr val="FFFFFF"/>
           </a:solidFill>
-          <a:ln>
-            <a:noFill/>
+          <a:ln w="12700">
+            <a:solidFill>
+              <a:srgbClr val="E2E8F0"/>
+            </a:solidFill>
           </a:ln>
         </p:spPr>
         <p:style>
@@ -10330,28 +10738,19 @@
           <a:lstStyle/>
           <a:p>
             <a:pPr algn="ctr"/>
-            <a:r>
-              <a:rPr sz="1200" b="1">
-                <a:solidFill>
-                  <a:srgbClr val="FFFFFF"/>
-                </a:solidFill>
-                <a:latin typeface="Calibri"/>
-              </a:rPr>
-              <a:t>1</a:t>
-            </a:r>
-          </a:p>
-        </p:txBody>
-      </p:sp>
-      <p:sp>
-        <p:nvSpPr>
-          <p:cNvPr id="10" name="TextBox 9"/>
+          </a:p>
+        </p:txBody>
+      </p:sp>
+      <p:sp>
+        <p:nvSpPr>
+          <p:cNvPr id="13" name="TextBox 12"/>
           <p:cNvSpPr txBox="1"/>
           <p:nvPr/>
         </p:nvSpPr>
         <p:spPr>
           <a:xfrm>
-            <a:off x="1097280" y="1691640"/>
-            <a:ext cx="3108960" cy="731520"/>
+            <a:off x="4434840" y="4617720"/>
+            <a:ext cx="3383280" cy="1737360"/>
           </a:xfrm>
           <a:prstGeom prst="rect">
             <a:avLst/>
@@ -10365,36 +10764,72 @@
           <a:lstStyle/>
           <a:p>
             <a:r>
+              <a:rPr sz="1300" b="1">
+                <a:solidFill>
+                  <a:srgbClr val="0D9488"/>
+                </a:solidFill>
+                <a:latin typeface="Calibri"/>
+              </a:rPr>
+              <a:t>云侧</a:t>
+            </a:r>
+          </a:p>
+          <a:p>
+            <a:pPr>
+              <a:spcBef>
+                <a:spcPts val="400"/>
+              </a:spcBef>
+            </a:pPr>
+            <a:r>
               <a:rPr sz="1200" b="0">
                 <a:solidFill>
                   <a:srgbClr val="334155"/>
                 </a:solidFill>
                 <a:latin typeface="Calibri"/>
               </a:rPr>
-              <a:t>Skill 拉取运动健康数据</a:t>
-            </a:r>
-          </a:p>
-        </p:txBody>
-      </p:sp>
-      <p:sp>
-        <p:nvSpPr>
-          <p:cNvPr id="11" name="Oval 10"/>
+              <a:t>统一承载所有 Web 预览需求；</a:t>
+            </a:r>
+          </a:p>
+          <a:p>
+            <a:pPr>
+              <a:spcBef>
+                <a:spcPts val="400"/>
+              </a:spcBef>
+            </a:pPr>
+            <a:r>
+              <a:rPr sz="1200" b="0">
+                <a:solidFill>
+                  <a:srgbClr val="334155"/>
+                </a:solidFill>
+                <a:latin typeface="Calibri"/>
+              </a:rPr>
+              <a:t>多文件相对路径自然支持</a:t>
+            </a:r>
+          </a:p>
+        </p:txBody>
+      </p:sp>
+      <p:sp>
+        <p:nvSpPr>
+          <p:cNvPr id="14" name="Rounded Rectangle 13"/>
           <p:cNvSpPr/>
           <p:nvPr/>
         </p:nvSpPr>
         <p:spPr>
           <a:xfrm>
-            <a:off x="548640" y="2606040"/>
-            <a:ext cx="384048" cy="384048"/>
-          </a:xfrm>
-          <a:prstGeom prst="ellipse">
-            <a:avLst/>
+            <a:off x="8138160" y="4480560"/>
+            <a:ext cx="3703320" cy="2011680"/>
+          </a:xfrm>
+          <a:prstGeom prst="roundRect">
+            <a:avLst>
+              <a:gd name="adj" fmla="val 8000"/>
+            </a:avLst>
           </a:prstGeom>
           <a:solidFill>
-            <a:srgbClr val="0D9488"/>
+            <a:srgbClr val="FFFFFF"/>
           </a:solidFill>
-          <a:ln>
-            <a:noFill/>
+          <a:ln w="12700">
+            <a:solidFill>
+              <a:srgbClr val="E2E8F0"/>
+            </a:solidFill>
           </a:ln>
         </p:spPr>
         <p:style>
@@ -10416,28 +10851,19 @@
           <a:lstStyle/>
           <a:p>
             <a:pPr algn="ctr"/>
-            <a:r>
-              <a:rPr sz="1200" b="1">
-                <a:solidFill>
-                  <a:srgbClr val="FFFFFF"/>
-                </a:solidFill>
-                <a:latin typeface="Calibri"/>
-              </a:rPr>
-              <a:t>2</a:t>
-            </a:r>
-          </a:p>
-        </p:txBody>
-      </p:sp>
-      <p:sp>
-        <p:nvSpPr>
-          <p:cNvPr id="12" name="TextBox 11"/>
+          </a:p>
+        </p:txBody>
+      </p:sp>
+      <p:sp>
+        <p:nvSpPr>
+          <p:cNvPr id="15" name="TextBox 14"/>
           <p:cNvSpPr txBox="1"/>
           <p:nvPr/>
         </p:nvSpPr>
         <p:spPr>
           <a:xfrm>
-            <a:off x="1097280" y="2560320"/>
-            <a:ext cx="3108960" cy="731520"/>
+            <a:off x="8321040" y="4617720"/>
+            <a:ext cx="3383280" cy="1737360"/>
           </a:xfrm>
           <a:prstGeom prst="rect">
             <a:avLst/>
@@ -10451,16 +10877,37 @@
           <a:lstStyle/>
           <a:p>
             <a:r>
+              <a:rPr sz="1300" b="1">
+                <a:solidFill>
+                  <a:srgbClr val="0D9488"/>
+                </a:solidFill>
+                <a:latin typeface="Calibri"/>
+              </a:rPr>
+              <a:t>与云空间关系</a:t>
+            </a:r>
+          </a:p>
+          <a:p>
+            <a:pPr>
+              <a:spcBef>
+                <a:spcPts val="400"/>
+              </a:spcBef>
+            </a:pPr>
+            <a:r>
               <a:rPr sz="1200" b="0">
                 <a:solidFill>
                   <a:srgbClr val="334155"/>
                 </a:solidFill>
                 <a:latin typeface="Calibri"/>
               </a:rPr>
-              <a:t>生成单文件图表 HTML</a:t>
-            </a:r>
-          </a:p>
-          <a:p>
+              <a:t>云空间可作源文件仓；</a:t>
+            </a:r>
+          </a:p>
+          <a:p>
+            <a:pPr>
+              <a:spcBef>
+                <a:spcPts val="400"/>
+              </a:spcBef>
+            </a:pPr>
             <a:r>
               <a:rPr sz="1200" b="0">
                 <a:solidFill>
@@ -10468,651 +10915,7 @@
                 </a:solidFill>
                 <a:latin typeface="Calibri"/>
               </a:rPr>
-              <a:t>（CSS/JS 尽量内联）</a:t>
-            </a:r>
-          </a:p>
-        </p:txBody>
-      </p:sp>
-      <p:sp>
-        <p:nvSpPr>
-          <p:cNvPr id="13" name="Oval 12"/>
-          <p:cNvSpPr/>
-          <p:nvPr/>
-        </p:nvSpPr>
-        <p:spPr>
-          <a:xfrm>
-            <a:off x="548640" y="3474720"/>
-            <a:ext cx="384048" cy="384048"/>
-          </a:xfrm>
-          <a:prstGeom prst="ellipse">
-            <a:avLst/>
-          </a:prstGeom>
-          <a:solidFill>
-            <a:srgbClr val="0D9488"/>
-          </a:solidFill>
-          <a:ln>
-            <a:noFill/>
-          </a:ln>
-        </p:spPr>
-        <p:style>
-          <a:lnRef idx="1">
-            <a:schemeClr val="accent1"/>
-          </a:lnRef>
-          <a:fillRef idx="3">
-            <a:schemeClr val="accent1"/>
-          </a:fillRef>
-          <a:effectRef idx="2">
-            <a:schemeClr val="accent1"/>
-          </a:effectRef>
-          <a:fontRef idx="minor">
-            <a:schemeClr val="lt1"/>
-          </a:fontRef>
-        </p:style>
-        <p:txBody>
-          <a:bodyPr rtlCol="0" anchor="ctr"/>
-          <a:lstStyle/>
-          <a:p>
-            <a:pPr algn="ctr"/>
-            <a:r>
-              <a:rPr sz="1200" b="1">
-                <a:solidFill>
-                  <a:srgbClr val="FFFFFF"/>
-                </a:solidFill>
-                <a:latin typeface="Calibri"/>
-              </a:rPr>
-              <a:t>3</a:t>
-            </a:r>
-          </a:p>
-        </p:txBody>
-      </p:sp>
-      <p:sp>
-        <p:nvSpPr>
-          <p:cNvPr id="14" name="TextBox 13"/>
-          <p:cNvSpPr txBox="1"/>
-          <p:nvPr/>
-        </p:nvSpPr>
-        <p:spPr>
-          <a:xfrm>
-            <a:off x="1097280" y="3429000"/>
-            <a:ext cx="3108960" cy="731520"/>
-          </a:xfrm>
-          <a:prstGeom prst="rect">
-            <a:avLst/>
-          </a:prstGeom>
-          <a:noFill/>
-        </p:spPr>
-        <p:txBody>
-          <a:bodyPr wrap="square">
-            <a:spAutoFit/>
-          </a:bodyPr>
-          <a:lstStyle/>
-          <a:p>
-            <a:r>
-              <a:rPr sz="1200" b="0">
-                <a:solidFill>
-                  <a:srgbClr val="334155"/>
-                </a:solidFill>
-                <a:latin typeface="Calibri"/>
-              </a:rPr>
-              <a:t>write → 云空间同步就绪</a:t>
-            </a:r>
-          </a:p>
-        </p:txBody>
-      </p:sp>
-      <p:sp>
-        <p:nvSpPr>
-          <p:cNvPr id="15" name="Oval 14"/>
-          <p:cNvSpPr/>
-          <p:nvPr/>
-        </p:nvSpPr>
-        <p:spPr>
-          <a:xfrm>
-            <a:off x="548640" y="4343399"/>
-            <a:ext cx="384048" cy="384048"/>
-          </a:xfrm>
-          <a:prstGeom prst="ellipse">
-            <a:avLst/>
-          </a:prstGeom>
-          <a:solidFill>
-            <a:srgbClr val="0D9488"/>
-          </a:solidFill>
-          <a:ln>
-            <a:noFill/>
-          </a:ln>
-        </p:spPr>
-        <p:style>
-          <a:lnRef idx="1">
-            <a:schemeClr val="accent1"/>
-          </a:lnRef>
-          <a:fillRef idx="3">
-            <a:schemeClr val="accent1"/>
-          </a:fillRef>
-          <a:effectRef idx="2">
-            <a:schemeClr val="accent1"/>
-          </a:effectRef>
-          <a:fontRef idx="minor">
-            <a:schemeClr val="lt1"/>
-          </a:fontRef>
-        </p:style>
-        <p:txBody>
-          <a:bodyPr rtlCol="0" anchor="ctr"/>
-          <a:lstStyle/>
-          <a:p>
-            <a:pPr algn="ctr"/>
-            <a:r>
-              <a:rPr sz="1200" b="1">
-                <a:solidFill>
-                  <a:srgbClr val="FFFFFF"/>
-                </a:solidFill>
-                <a:latin typeface="Calibri"/>
-              </a:rPr>
-              <a:t>4</a:t>
-            </a:r>
-          </a:p>
-        </p:txBody>
-      </p:sp>
-      <p:sp>
-        <p:nvSpPr>
-          <p:cNvPr id="16" name="TextBox 15"/>
-          <p:cNvSpPr txBox="1"/>
-          <p:nvPr/>
-        </p:nvSpPr>
-        <p:spPr>
-          <a:xfrm>
-            <a:off x="1097280" y="4297679"/>
-            <a:ext cx="3108960" cy="731520"/>
-          </a:xfrm>
-          <a:prstGeom prst="rect">
-            <a:avLst/>
-          </a:prstGeom>
-          <a:noFill/>
-        </p:spPr>
-        <p:txBody>
-          <a:bodyPr wrap="square">
-            <a:spAutoFit/>
-          </a:bodyPr>
-          <a:lstStyle/>
-          <a:p>
-            <a:r>
-              <a:rPr sz="1200" b="0">
-                <a:solidFill>
-                  <a:srgbClr val="334155"/>
-                </a:solidFill>
-                <a:latin typeface="Calibri"/>
-              </a:rPr>
-              <a:t>端识别 preview.kind=html</a:t>
-            </a:r>
-          </a:p>
-        </p:txBody>
-      </p:sp>
-      <p:sp>
-        <p:nvSpPr>
-          <p:cNvPr id="17" name="Oval 16"/>
-          <p:cNvSpPr/>
-          <p:nvPr/>
-        </p:nvSpPr>
-        <p:spPr>
-          <a:xfrm>
-            <a:off x="548640" y="5212080"/>
-            <a:ext cx="384048" cy="384048"/>
-          </a:xfrm>
-          <a:prstGeom prst="ellipse">
-            <a:avLst/>
-          </a:prstGeom>
-          <a:solidFill>
-            <a:srgbClr val="0D9488"/>
-          </a:solidFill>
-          <a:ln>
-            <a:noFill/>
-          </a:ln>
-        </p:spPr>
-        <p:style>
-          <a:lnRef idx="1">
-            <a:schemeClr val="accent1"/>
-          </a:lnRef>
-          <a:fillRef idx="3">
-            <a:schemeClr val="accent1"/>
-          </a:fillRef>
-          <a:effectRef idx="2">
-            <a:schemeClr val="accent1"/>
-          </a:effectRef>
-          <a:fontRef idx="minor">
-            <a:schemeClr val="lt1"/>
-          </a:fontRef>
-        </p:style>
-        <p:txBody>
-          <a:bodyPr rtlCol="0" anchor="ctr"/>
-          <a:lstStyle/>
-          <a:p>
-            <a:pPr algn="ctr"/>
-            <a:r>
-              <a:rPr sz="1200" b="1">
-                <a:solidFill>
-                  <a:srgbClr val="FFFFFF"/>
-                </a:solidFill>
-                <a:latin typeface="Calibri"/>
-              </a:rPr>
-              <a:t>5</a:t>
-            </a:r>
-          </a:p>
-        </p:txBody>
-      </p:sp>
-      <p:sp>
-        <p:nvSpPr>
-          <p:cNvPr id="18" name="TextBox 17"/>
-          <p:cNvSpPr txBox="1"/>
-          <p:nvPr/>
-        </p:nvSpPr>
-        <p:spPr>
-          <a:xfrm>
-            <a:off x="1097280" y="5166360"/>
-            <a:ext cx="3108960" cy="731520"/>
-          </a:xfrm>
-          <a:prstGeom prst="rect">
-            <a:avLst/>
-          </a:prstGeom>
-          <a:noFill/>
-        </p:spPr>
-        <p:txBody>
-          <a:bodyPr wrap="square">
-            <a:spAutoFit/>
-          </a:bodyPr>
-          <a:lstStyle/>
-          <a:p>
-            <a:r>
-              <a:rPr sz="1200" b="0">
-                <a:solidFill>
-                  <a:srgbClr val="334155"/>
-                </a:solidFill>
-                <a:latin typeface="Calibri"/>
-              </a:rPr>
-              <a:t>sandbox 预览 / 可交互</a:t>
-            </a:r>
-          </a:p>
-        </p:txBody>
-      </p:sp>
-      <p:sp>
-        <p:nvSpPr>
-          <p:cNvPr id="19" name="Rounded Rectangle 18"/>
-          <p:cNvSpPr/>
-          <p:nvPr/>
-        </p:nvSpPr>
-        <p:spPr>
-          <a:xfrm>
-            <a:off x="4617720" y="1097280"/>
-            <a:ext cx="7178040" cy="2331720"/>
-          </a:xfrm>
-          <a:prstGeom prst="roundRect">
-            <a:avLst>
-              <a:gd name="adj" fmla="val 8000"/>
-            </a:avLst>
-          </a:prstGeom>
-          <a:solidFill>
-            <a:srgbClr val="0F172A"/>
-          </a:solidFill>
-          <a:ln w="12700">
-            <a:solidFill>
-              <a:srgbClr val="0F172A"/>
-            </a:solidFill>
-          </a:ln>
-        </p:spPr>
-        <p:style>
-          <a:lnRef idx="1">
-            <a:schemeClr val="accent1"/>
-          </a:lnRef>
-          <a:fillRef idx="3">
-            <a:schemeClr val="accent1"/>
-          </a:fillRef>
-          <a:effectRef idx="2">
-            <a:schemeClr val="accent1"/>
-          </a:effectRef>
-          <a:fontRef idx="minor">
-            <a:schemeClr val="lt1"/>
-          </a:fontRef>
-        </p:style>
-        <p:txBody>
-          <a:bodyPr rtlCol="0" anchor="ctr"/>
-          <a:lstStyle/>
-          <a:p>
-            <a:pPr algn="ctr"/>
-          </a:p>
-        </p:txBody>
-      </p:sp>
-      <p:sp>
-        <p:nvSpPr>
-          <p:cNvPr id="20" name="TextBox 19"/>
-          <p:cNvSpPr txBox="1"/>
-          <p:nvPr/>
-        </p:nvSpPr>
-        <p:spPr>
-          <a:xfrm>
-            <a:off x="4800600" y="1234440"/>
-            <a:ext cx="6858000" cy="2057400"/>
-          </a:xfrm>
-          <a:prstGeom prst="rect">
-            <a:avLst/>
-          </a:prstGeom>
-          <a:noFill/>
-        </p:spPr>
-        <p:txBody>
-          <a:bodyPr wrap="square">
-            <a:spAutoFit/>
-          </a:bodyPr>
-          <a:lstStyle/>
-          <a:p>
-            <a:r>
-              <a:rPr sz="1200" b="0">
-                <a:solidFill>
-                  <a:srgbClr val="5EEAD4"/>
-                </a:solidFill>
-                <a:latin typeface="Consolas"/>
-              </a:rPr>
-              <a:t>// write / 同步完成后的返回（示意）</a:t>
-            </a:r>
-          </a:p>
-          <a:p>
-            <a:r>
-              <a:rPr sz="1200" b="0">
-                <a:solidFill>
-                  <a:srgbClr val="CBD5E1"/>
-                </a:solidFill>
-                <a:latin typeface="Consolas"/>
-              </a:rPr>
-              <a:t>{ "path": "artifacts/health-report.html",</a:t>
-            </a:r>
-          </a:p>
-          <a:p>
-            <a:r>
-              <a:rPr sz="1200" b="0">
-                <a:solidFill>
-                  <a:srgbClr val="CBD5E1"/>
-                </a:solidFill>
-                <a:latin typeface="Consolas"/>
-              </a:rPr>
-              <a:t>  "cloud_file_id": "f_xxx", "mime": "text/html",</a:t>
-            </a:r>
-          </a:p>
-          <a:p>
-            <a:r>
-              <a:rPr sz="1200" b="0">
-                <a:solidFill>
-                  <a:srgbClr val="CBD5E1"/>
-                </a:solidFill>
-                <a:latin typeface="Consolas"/>
-              </a:rPr>
-              <a:t>  "sync_status": "synced",</a:t>
-            </a:r>
-          </a:p>
-          <a:p>
-            <a:r>
-              <a:rPr sz="1200" b="0">
-                <a:solidFill>
-                  <a:srgbClr val="CBD5E1"/>
-                </a:solidFill>
-                <a:latin typeface="Consolas"/>
-              </a:rPr>
-              <a:t>  "preview": { "kind": "html", "entry": true } }</a:t>
-            </a:r>
-          </a:p>
-        </p:txBody>
-      </p:sp>
-      <p:sp>
-        <p:nvSpPr>
-          <p:cNvPr id="21" name="Rounded Rectangle 20"/>
-          <p:cNvSpPr/>
-          <p:nvPr/>
-        </p:nvSpPr>
-        <p:spPr>
-          <a:xfrm>
-            <a:off x="4617720" y="3611880"/>
-            <a:ext cx="3474720" cy="2880360"/>
-          </a:xfrm>
-          <a:prstGeom prst="roundRect">
-            <a:avLst>
-              <a:gd name="adj" fmla="val 8000"/>
-            </a:avLst>
-          </a:prstGeom>
-          <a:solidFill>
-            <a:srgbClr val="0F172A"/>
-          </a:solidFill>
-          <a:ln w="12700">
-            <a:solidFill>
-              <a:srgbClr val="0F172A"/>
-            </a:solidFill>
-          </a:ln>
-        </p:spPr>
-        <p:style>
-          <a:lnRef idx="1">
-            <a:schemeClr val="accent1"/>
-          </a:lnRef>
-          <a:fillRef idx="3">
-            <a:schemeClr val="accent1"/>
-          </a:fillRef>
-          <a:effectRef idx="2">
-            <a:schemeClr val="accent1"/>
-          </a:effectRef>
-          <a:fontRef idx="minor">
-            <a:schemeClr val="lt1"/>
-          </a:fontRef>
-        </p:style>
-        <p:txBody>
-          <a:bodyPr rtlCol="0" anchor="ctr"/>
-          <a:lstStyle/>
-          <a:p>
-            <a:pPr algn="ctr"/>
-          </a:p>
-        </p:txBody>
-      </p:sp>
-      <p:sp>
-        <p:nvSpPr>
-          <p:cNvPr id="22" name="TextBox 21"/>
-          <p:cNvSpPr txBox="1"/>
-          <p:nvPr/>
-        </p:nvSpPr>
-        <p:spPr>
-          <a:xfrm>
-            <a:off x="4754880" y="3749039"/>
-            <a:ext cx="3200400" cy="2606040"/>
-          </a:xfrm>
-          <a:prstGeom prst="rect">
-            <a:avLst/>
-          </a:prstGeom>
-          <a:noFill/>
-        </p:spPr>
-        <p:txBody>
-          <a:bodyPr wrap="square">
-            <a:spAutoFit/>
-          </a:bodyPr>
-          <a:lstStyle/>
-          <a:p>
-            <a:r>
-              <a:rPr sz="1200" b="0">
-                <a:solidFill>
-                  <a:srgbClr val="5EEAD4"/>
-                </a:solidFill>
-                <a:latin typeface="Consolas"/>
-              </a:rPr>
-              <a:t>// 方案 A</a:t>
-            </a:r>
-          </a:p>
-          <a:p>
-            <a:r>
-              <a:rPr sz="1200" b="0">
-                <a:solidFill>
-                  <a:srgbClr val="CBD5E1"/>
-                </a:solidFill>
-                <a:latin typeface="Consolas"/>
-              </a:rPr>
-              <a:t>html = await download(id)</a:t>
-            </a:r>
-          </a:p>
-          <a:p>
-            <a:r>
-              <a:rPr sz="1200" b="0">
-                <a:solidFill>
-                  <a:srgbClr val="CBD5E1"/>
-                </a:solidFill>
-                <a:latin typeface="Consolas"/>
-              </a:rPr>
-              <a:t>iframe.sandbox =</a:t>
-            </a:r>
-          </a:p>
-          <a:p>
-            <a:r>
-              <a:rPr sz="1200" b="0">
-                <a:solidFill>
-                  <a:srgbClr val="CBD5E1"/>
-                </a:solidFill>
-                <a:latin typeface="Consolas"/>
-              </a:rPr>
-              <a:t>  'allow-scripts'</a:t>
-            </a:r>
-          </a:p>
-          <a:p>
-            <a:r>
-              <a:rPr sz="1200" b="0">
-                <a:solidFill>
-                  <a:srgbClr val="CBD5E1"/>
-                </a:solidFill>
-                <a:latin typeface="Consolas"/>
-              </a:rPr>
-              <a:t>iframe.srcdoc = html</a:t>
-            </a:r>
-          </a:p>
-        </p:txBody>
-      </p:sp>
-      <p:sp>
-        <p:nvSpPr>
-          <p:cNvPr id="23" name="Rounded Rectangle 22"/>
-          <p:cNvSpPr/>
-          <p:nvPr/>
-        </p:nvSpPr>
-        <p:spPr>
-          <a:xfrm>
-            <a:off x="8275320" y="3611880"/>
-            <a:ext cx="3520440" cy="2880360"/>
-          </a:xfrm>
-          <a:prstGeom prst="roundRect">
-            <a:avLst>
-              <a:gd name="adj" fmla="val 8000"/>
-            </a:avLst>
-          </a:prstGeom>
-          <a:solidFill>
-            <a:srgbClr val="0F172A"/>
-          </a:solidFill>
-          <a:ln w="12700">
-            <a:solidFill>
-              <a:srgbClr val="0F172A"/>
-            </a:solidFill>
-          </a:ln>
-        </p:spPr>
-        <p:style>
-          <a:lnRef idx="1">
-            <a:schemeClr val="accent1"/>
-          </a:lnRef>
-          <a:fillRef idx="3">
-            <a:schemeClr val="accent1"/>
-          </a:fillRef>
-          <a:effectRef idx="2">
-            <a:schemeClr val="accent1"/>
-          </a:effectRef>
-          <a:fontRef idx="minor">
-            <a:schemeClr val="lt1"/>
-          </a:fontRef>
-        </p:style>
-        <p:txBody>
-          <a:bodyPr rtlCol="0" anchor="ctr"/>
-          <a:lstStyle/>
-          <a:p>
-            <a:pPr algn="ctr"/>
-          </a:p>
-        </p:txBody>
-      </p:sp>
-      <p:sp>
-        <p:nvSpPr>
-          <p:cNvPr id="24" name="TextBox 23"/>
-          <p:cNvSpPr txBox="1"/>
-          <p:nvPr/>
-        </p:nvSpPr>
-        <p:spPr>
-          <a:xfrm>
-            <a:off x="8412480" y="3749039"/>
-            <a:ext cx="3246120" cy="2606040"/>
-          </a:xfrm>
-          <a:prstGeom prst="rect">
-            <a:avLst/>
-          </a:prstGeom>
-          <a:noFill/>
-        </p:spPr>
-        <p:txBody>
-          <a:bodyPr wrap="square">
-            <a:spAutoFit/>
-          </a:bodyPr>
-          <a:lstStyle/>
-          <a:p>
-            <a:r>
-              <a:rPr sz="1200" b="0">
-                <a:solidFill>
-                  <a:srgbClr val="5EEAD4"/>
-                </a:solidFill>
-                <a:latin typeface="Consolas"/>
-              </a:rPr>
-              <a:t>// 方案 C</a:t>
-            </a:r>
-          </a:p>
-          <a:p>
-            <a:r>
-              <a:rPr sz="1200" b="0">
-                <a:solidFill>
-                  <a:srgbClr val="CBD5E1"/>
-                </a:solidFill>
-                <a:latin typeface="Consolas"/>
-              </a:rPr>
-              <a:t>onDelta(t =&gt; paint(buf+=t))</a:t>
-            </a:r>
-          </a:p>
-          <a:p>
-            <a:r>
-              <a:rPr sz="1200" b="0">
-                <a:solidFill>
-                  <a:srgbClr val="CBD5E1"/>
-                </a:solidFill>
-                <a:latin typeface="Consolas"/>
-              </a:rPr>
-              <a:t>onDone(async () =&gt; {</a:t>
-            </a:r>
-          </a:p>
-          <a:p>
-            <a:r>
-              <a:rPr sz="1200" b="0">
-                <a:solidFill>
-                  <a:srgbClr val="CBD5E1"/>
-                </a:solidFill>
-                <a:latin typeface="Consolas"/>
-              </a:rPr>
-              <a:t>  await writeAndSync()</a:t>
-            </a:r>
-          </a:p>
-          <a:p>
-            <a:r>
-              <a:rPr sz="1200" b="0">
-                <a:solidFill>
-                  <a:srgbClr val="CBD5E1"/>
-                </a:solidFill>
-                <a:latin typeface="Consolas"/>
-              </a:rPr>
-              <a:t>  iframe.srcdoc = final</a:t>
-            </a:r>
-          </a:p>
-          <a:p>
-            <a:r>
-              <a:rPr sz="1200" b="0">
-                <a:solidFill>
-                  <a:srgbClr val="CBD5E1"/>
-                </a:solidFill>
-                <a:latin typeface="Consolas"/>
-              </a:rPr>
-              <a:t>})</a:t>
+              <a:t>预览域作渲染入口（可解耦）</a:t>
             </a:r>
           </a:p>
         </p:txBody>
@@ -11313,7 +11116,7 @@
                 </a:solidFill>
                 <a:latin typeface="Calibri"/>
               </a:rPr>
-              <a:t>07</a:t>
+              <a:t>06</a:t>
             </a:r>
           </a:p>
         </p:txBody>
@@ -11347,6 +11150,1160 @@
                 </a:solidFill>
                 <a:latin typeface="Calibri"/>
               </a:rPr>
+              <a:t>实现示例</a:t>
+            </a:r>
+          </a:p>
+          <a:p>
+            <a:r>
+              <a:rPr sz="1100" b="0">
+                <a:solidFill>
+                  <a:srgbClr val="94A3B8"/>
+                </a:solidFill>
+                <a:latin typeface="Calibri"/>
+              </a:rPr>
+              <a:t>健康报告闭环：契约 · 方案 4 主路径 · 方案 A 兜底</a:t>
+            </a:r>
+          </a:p>
+        </p:txBody>
+      </p:sp>
+      <p:sp>
+        <p:nvSpPr>
+          <p:cNvPr id="7" name="Rounded Rectangle 6"/>
+          <p:cNvSpPr/>
+          <p:nvPr/>
+        </p:nvSpPr>
+        <p:spPr>
+          <a:xfrm>
+            <a:off x="320040" y="1097280"/>
+            <a:ext cx="4114800" cy="5394960"/>
+          </a:xfrm>
+          <a:prstGeom prst="roundRect">
+            <a:avLst>
+              <a:gd name="adj" fmla="val 8000"/>
+            </a:avLst>
+          </a:prstGeom>
+          <a:solidFill>
+            <a:srgbClr val="FFFFFF"/>
+          </a:solidFill>
+          <a:ln w="12700">
+            <a:solidFill>
+              <a:srgbClr val="E2E8F0"/>
+            </a:solidFill>
+          </a:ln>
+        </p:spPr>
+        <p:style>
+          <a:lnRef idx="1">
+            <a:schemeClr val="accent1"/>
+          </a:lnRef>
+          <a:fillRef idx="3">
+            <a:schemeClr val="accent1"/>
+          </a:fillRef>
+          <a:effectRef idx="2">
+            <a:schemeClr val="accent1"/>
+          </a:effectRef>
+          <a:fontRef idx="minor">
+            <a:schemeClr val="lt1"/>
+          </a:fontRef>
+        </p:style>
+        <p:txBody>
+          <a:bodyPr rtlCol="0" anchor="ctr"/>
+          <a:lstStyle/>
+          <a:p>
+            <a:pPr algn="ctr"/>
+          </a:p>
+        </p:txBody>
+      </p:sp>
+      <p:sp>
+        <p:nvSpPr>
+          <p:cNvPr id="8" name="TextBox 7"/>
+          <p:cNvSpPr txBox="1"/>
+          <p:nvPr/>
+        </p:nvSpPr>
+        <p:spPr>
+          <a:xfrm>
+            <a:off x="457200" y="1234440"/>
+            <a:ext cx="3840480" cy="365760"/>
+          </a:xfrm>
+          <a:prstGeom prst="rect">
+            <a:avLst/>
+          </a:prstGeom>
+          <a:noFill/>
+        </p:spPr>
+        <p:txBody>
+          <a:bodyPr wrap="square">
+            <a:spAutoFit/>
+          </a:bodyPr>
+          <a:lstStyle/>
+          <a:p>
+            <a:r>
+              <a:rPr sz="1400" b="1">
+                <a:solidFill>
+                  <a:srgbClr val="0D9488"/>
+                </a:solidFill>
+                <a:latin typeface="Calibri"/>
+              </a:rPr>
+              <a:t>健康报告串接（方案 4）</a:t>
+            </a:r>
+          </a:p>
+        </p:txBody>
+      </p:sp>
+      <p:sp>
+        <p:nvSpPr>
+          <p:cNvPr id="9" name="Oval 8"/>
+          <p:cNvSpPr/>
+          <p:nvPr/>
+        </p:nvSpPr>
+        <p:spPr>
+          <a:xfrm>
+            <a:off x="548640" y="1737360"/>
+            <a:ext cx="384048" cy="384048"/>
+          </a:xfrm>
+          <a:prstGeom prst="ellipse">
+            <a:avLst/>
+          </a:prstGeom>
+          <a:solidFill>
+            <a:srgbClr val="0D9488"/>
+          </a:solidFill>
+          <a:ln>
+            <a:noFill/>
+          </a:ln>
+        </p:spPr>
+        <p:style>
+          <a:lnRef idx="1">
+            <a:schemeClr val="accent1"/>
+          </a:lnRef>
+          <a:fillRef idx="3">
+            <a:schemeClr val="accent1"/>
+          </a:fillRef>
+          <a:effectRef idx="2">
+            <a:schemeClr val="accent1"/>
+          </a:effectRef>
+          <a:fontRef idx="minor">
+            <a:schemeClr val="lt1"/>
+          </a:fontRef>
+        </p:style>
+        <p:txBody>
+          <a:bodyPr rtlCol="0" anchor="ctr"/>
+          <a:lstStyle/>
+          <a:p>
+            <a:pPr algn="ctr"/>
+            <a:r>
+              <a:rPr sz="1200" b="1">
+                <a:solidFill>
+                  <a:srgbClr val="FFFFFF"/>
+                </a:solidFill>
+                <a:latin typeface="Calibri"/>
+              </a:rPr>
+              <a:t>1</a:t>
+            </a:r>
+          </a:p>
+        </p:txBody>
+      </p:sp>
+      <p:sp>
+        <p:nvSpPr>
+          <p:cNvPr id="10" name="TextBox 9"/>
+          <p:cNvSpPr txBox="1"/>
+          <p:nvPr/>
+        </p:nvSpPr>
+        <p:spPr>
+          <a:xfrm>
+            <a:off x="1097280" y="1691640"/>
+            <a:ext cx="3108960" cy="731520"/>
+          </a:xfrm>
+          <a:prstGeom prst="rect">
+            <a:avLst/>
+          </a:prstGeom>
+          <a:noFill/>
+        </p:spPr>
+        <p:txBody>
+          <a:bodyPr wrap="square">
+            <a:spAutoFit/>
+          </a:bodyPr>
+          <a:lstStyle/>
+          <a:p>
+            <a:r>
+              <a:rPr sz="1200" b="0">
+                <a:solidFill>
+                  <a:srgbClr val="334155"/>
+                </a:solidFill>
+                <a:latin typeface="Calibri"/>
+              </a:rPr>
+              <a:t>Skill 拉取运动健康数据</a:t>
+            </a:r>
+          </a:p>
+        </p:txBody>
+      </p:sp>
+      <p:sp>
+        <p:nvSpPr>
+          <p:cNvPr id="11" name="Oval 10"/>
+          <p:cNvSpPr/>
+          <p:nvPr/>
+        </p:nvSpPr>
+        <p:spPr>
+          <a:xfrm>
+            <a:off x="548640" y="2606040"/>
+            <a:ext cx="384048" cy="384048"/>
+          </a:xfrm>
+          <a:prstGeom prst="ellipse">
+            <a:avLst/>
+          </a:prstGeom>
+          <a:solidFill>
+            <a:srgbClr val="0D9488"/>
+          </a:solidFill>
+          <a:ln>
+            <a:noFill/>
+          </a:ln>
+        </p:spPr>
+        <p:style>
+          <a:lnRef idx="1">
+            <a:schemeClr val="accent1"/>
+          </a:lnRef>
+          <a:fillRef idx="3">
+            <a:schemeClr val="accent1"/>
+          </a:fillRef>
+          <a:effectRef idx="2">
+            <a:schemeClr val="accent1"/>
+          </a:effectRef>
+          <a:fontRef idx="minor">
+            <a:schemeClr val="lt1"/>
+          </a:fontRef>
+        </p:style>
+        <p:txBody>
+          <a:bodyPr rtlCol="0" anchor="ctr"/>
+          <a:lstStyle/>
+          <a:p>
+            <a:pPr algn="ctr"/>
+            <a:r>
+              <a:rPr sz="1200" b="1">
+                <a:solidFill>
+                  <a:srgbClr val="FFFFFF"/>
+                </a:solidFill>
+                <a:latin typeface="Calibri"/>
+              </a:rPr>
+              <a:t>2</a:t>
+            </a:r>
+          </a:p>
+        </p:txBody>
+      </p:sp>
+      <p:sp>
+        <p:nvSpPr>
+          <p:cNvPr id="12" name="TextBox 11"/>
+          <p:cNvSpPr txBox="1"/>
+          <p:nvPr/>
+        </p:nvSpPr>
+        <p:spPr>
+          <a:xfrm>
+            <a:off x="1097280" y="2560320"/>
+            <a:ext cx="3108960" cy="731520"/>
+          </a:xfrm>
+          <a:prstGeom prst="rect">
+            <a:avLst/>
+          </a:prstGeom>
+          <a:noFill/>
+        </p:spPr>
+        <p:txBody>
+          <a:bodyPr wrap="square">
+            <a:spAutoFit/>
+          </a:bodyPr>
+          <a:lstStyle/>
+          <a:p>
+            <a:r>
+              <a:rPr sz="1200" b="0">
+                <a:solidFill>
+                  <a:srgbClr val="334155"/>
+                </a:solidFill>
+                <a:latin typeface="Calibri"/>
+              </a:rPr>
+              <a:t>生成图表化 HTML 报告</a:t>
+            </a:r>
+          </a:p>
+        </p:txBody>
+      </p:sp>
+      <p:sp>
+        <p:nvSpPr>
+          <p:cNvPr id="13" name="Oval 12"/>
+          <p:cNvSpPr/>
+          <p:nvPr/>
+        </p:nvSpPr>
+        <p:spPr>
+          <a:xfrm>
+            <a:off x="548640" y="3474720"/>
+            <a:ext cx="384048" cy="384048"/>
+          </a:xfrm>
+          <a:prstGeom prst="ellipse">
+            <a:avLst/>
+          </a:prstGeom>
+          <a:solidFill>
+            <a:srgbClr val="0D9488"/>
+          </a:solidFill>
+          <a:ln>
+            <a:noFill/>
+          </a:ln>
+        </p:spPr>
+        <p:style>
+          <a:lnRef idx="1">
+            <a:schemeClr val="accent1"/>
+          </a:lnRef>
+          <a:fillRef idx="3">
+            <a:schemeClr val="accent1"/>
+          </a:fillRef>
+          <a:effectRef idx="2">
+            <a:schemeClr val="accent1"/>
+          </a:effectRef>
+          <a:fontRef idx="minor">
+            <a:schemeClr val="lt1"/>
+          </a:fontRef>
+        </p:style>
+        <p:txBody>
+          <a:bodyPr rtlCol="0" anchor="ctr"/>
+          <a:lstStyle/>
+          <a:p>
+            <a:pPr algn="ctr"/>
+            <a:r>
+              <a:rPr sz="1200" b="1">
+                <a:solidFill>
+                  <a:srgbClr val="FFFFFF"/>
+                </a:solidFill>
+                <a:latin typeface="Calibri"/>
+              </a:rPr>
+              <a:t>3</a:t>
+            </a:r>
+          </a:p>
+        </p:txBody>
+      </p:sp>
+      <p:sp>
+        <p:nvSpPr>
+          <p:cNvPr id="14" name="TextBox 13"/>
+          <p:cNvSpPr txBox="1"/>
+          <p:nvPr/>
+        </p:nvSpPr>
+        <p:spPr>
+          <a:xfrm>
+            <a:off x="1097280" y="3429000"/>
+            <a:ext cx="3108960" cy="731520"/>
+          </a:xfrm>
+          <a:prstGeom prst="rect">
+            <a:avLst/>
+          </a:prstGeom>
+          <a:noFill/>
+        </p:spPr>
+        <p:txBody>
+          <a:bodyPr wrap="square">
+            <a:spAutoFit/>
+          </a:bodyPr>
+          <a:lstStyle/>
+          <a:p>
+            <a:r>
+              <a:rPr sz="1200" b="0">
+                <a:solidFill>
+                  <a:srgbClr val="334155"/>
+                </a:solidFill>
+                <a:latin typeface="Calibri"/>
+              </a:rPr>
+              <a:t>发布到云预览服务</a:t>
+            </a:r>
+          </a:p>
+          <a:p>
+            <a:r>
+              <a:rPr sz="1200" b="0">
+                <a:solidFill>
+                  <a:srgbClr val="334155"/>
+                </a:solidFill>
+                <a:latin typeface="Calibri"/>
+              </a:rPr>
+              <a:t>（源文件仍可 write 云空间）</a:t>
+            </a:r>
+          </a:p>
+        </p:txBody>
+      </p:sp>
+      <p:sp>
+        <p:nvSpPr>
+          <p:cNvPr id="15" name="Oval 14"/>
+          <p:cNvSpPr/>
+          <p:nvPr/>
+        </p:nvSpPr>
+        <p:spPr>
+          <a:xfrm>
+            <a:off x="548640" y="4343399"/>
+            <a:ext cx="384048" cy="384048"/>
+          </a:xfrm>
+          <a:prstGeom prst="ellipse">
+            <a:avLst/>
+          </a:prstGeom>
+          <a:solidFill>
+            <a:srgbClr val="0D9488"/>
+          </a:solidFill>
+          <a:ln>
+            <a:noFill/>
+          </a:ln>
+        </p:spPr>
+        <p:style>
+          <a:lnRef idx="1">
+            <a:schemeClr val="accent1"/>
+          </a:lnRef>
+          <a:fillRef idx="3">
+            <a:schemeClr val="accent1"/>
+          </a:fillRef>
+          <a:effectRef idx="2">
+            <a:schemeClr val="accent1"/>
+          </a:effectRef>
+          <a:fontRef idx="minor">
+            <a:schemeClr val="lt1"/>
+          </a:fontRef>
+        </p:style>
+        <p:txBody>
+          <a:bodyPr rtlCol="0" anchor="ctr"/>
+          <a:lstStyle/>
+          <a:p>
+            <a:pPr algn="ctr"/>
+            <a:r>
+              <a:rPr sz="1200" b="1">
+                <a:solidFill>
+                  <a:srgbClr val="FFFFFF"/>
+                </a:solidFill>
+                <a:latin typeface="Calibri"/>
+              </a:rPr>
+              <a:t>4</a:t>
+            </a:r>
+          </a:p>
+        </p:txBody>
+      </p:sp>
+      <p:sp>
+        <p:nvSpPr>
+          <p:cNvPr id="16" name="TextBox 15"/>
+          <p:cNvSpPr txBox="1"/>
+          <p:nvPr/>
+        </p:nvSpPr>
+        <p:spPr>
+          <a:xfrm>
+            <a:off x="1097280" y="4297679"/>
+            <a:ext cx="3108960" cy="731520"/>
+          </a:xfrm>
+          <a:prstGeom prst="rect">
+            <a:avLst/>
+          </a:prstGeom>
+          <a:noFill/>
+        </p:spPr>
+        <p:txBody>
+          <a:bodyPr wrap="square">
+            <a:spAutoFit/>
+          </a:bodyPr>
+          <a:lstStyle/>
+          <a:p>
+            <a:r>
+              <a:rPr sz="1200" b="0">
+                <a:solidFill>
+                  <a:srgbClr val="334155"/>
+                </a:solidFill>
+                <a:latin typeface="Calibri"/>
+              </a:rPr>
+              <a:t>工具返回 preview_url</a:t>
+            </a:r>
+          </a:p>
+        </p:txBody>
+      </p:sp>
+      <p:sp>
+        <p:nvSpPr>
+          <p:cNvPr id="17" name="Oval 16"/>
+          <p:cNvSpPr/>
+          <p:nvPr/>
+        </p:nvSpPr>
+        <p:spPr>
+          <a:xfrm>
+            <a:off x="548640" y="5212080"/>
+            <a:ext cx="384048" cy="384048"/>
+          </a:xfrm>
+          <a:prstGeom prst="ellipse">
+            <a:avLst/>
+          </a:prstGeom>
+          <a:solidFill>
+            <a:srgbClr val="0D9488"/>
+          </a:solidFill>
+          <a:ln>
+            <a:noFill/>
+          </a:ln>
+        </p:spPr>
+        <p:style>
+          <a:lnRef idx="1">
+            <a:schemeClr val="accent1"/>
+          </a:lnRef>
+          <a:fillRef idx="3">
+            <a:schemeClr val="accent1"/>
+          </a:fillRef>
+          <a:effectRef idx="2">
+            <a:schemeClr val="accent1"/>
+          </a:effectRef>
+          <a:fontRef idx="minor">
+            <a:schemeClr val="lt1"/>
+          </a:fontRef>
+        </p:style>
+        <p:txBody>
+          <a:bodyPr rtlCol="0" anchor="ctr"/>
+          <a:lstStyle/>
+          <a:p>
+            <a:pPr algn="ctr"/>
+            <a:r>
+              <a:rPr sz="1200" b="1">
+                <a:solidFill>
+                  <a:srgbClr val="FFFFFF"/>
+                </a:solidFill>
+                <a:latin typeface="Calibri"/>
+              </a:rPr>
+              <a:t>5</a:t>
+            </a:r>
+          </a:p>
+        </p:txBody>
+      </p:sp>
+      <p:sp>
+        <p:nvSpPr>
+          <p:cNvPr id="18" name="TextBox 17"/>
+          <p:cNvSpPr txBox="1"/>
+          <p:nvPr/>
+        </p:nvSpPr>
+        <p:spPr>
+          <a:xfrm>
+            <a:off x="1097280" y="5166360"/>
+            <a:ext cx="3108960" cy="731520"/>
+          </a:xfrm>
+          <a:prstGeom prst="rect">
+            <a:avLst/>
+          </a:prstGeom>
+          <a:noFill/>
+        </p:spPr>
+        <p:txBody>
+          <a:bodyPr wrap="square">
+            <a:spAutoFit/>
+          </a:bodyPr>
+          <a:lstStyle/>
+          <a:p>
+            <a:r>
+              <a:rPr sz="1200" b="0">
+                <a:solidFill>
+                  <a:srgbClr val="334155"/>
+                </a:solidFill>
+                <a:latin typeface="Calibri"/>
+              </a:rPr>
+              <a:t>WebView 直接打开链接</a:t>
+            </a:r>
+          </a:p>
+        </p:txBody>
+      </p:sp>
+      <p:sp>
+        <p:nvSpPr>
+          <p:cNvPr id="19" name="Rounded Rectangle 18"/>
+          <p:cNvSpPr/>
+          <p:nvPr/>
+        </p:nvSpPr>
+        <p:spPr>
+          <a:xfrm>
+            <a:off x="4617720" y="1097280"/>
+            <a:ext cx="7178040" cy="2331720"/>
+          </a:xfrm>
+          <a:prstGeom prst="roundRect">
+            <a:avLst>
+              <a:gd name="adj" fmla="val 8000"/>
+            </a:avLst>
+          </a:prstGeom>
+          <a:solidFill>
+            <a:srgbClr val="0F172A"/>
+          </a:solidFill>
+          <a:ln w="12700">
+            <a:solidFill>
+              <a:srgbClr val="0F172A"/>
+            </a:solidFill>
+          </a:ln>
+        </p:spPr>
+        <p:style>
+          <a:lnRef idx="1">
+            <a:schemeClr val="accent1"/>
+          </a:lnRef>
+          <a:fillRef idx="3">
+            <a:schemeClr val="accent1"/>
+          </a:fillRef>
+          <a:effectRef idx="2">
+            <a:schemeClr val="accent1"/>
+          </a:effectRef>
+          <a:fontRef idx="minor">
+            <a:schemeClr val="lt1"/>
+          </a:fontRef>
+        </p:style>
+        <p:txBody>
+          <a:bodyPr rtlCol="0" anchor="ctr"/>
+          <a:lstStyle/>
+          <a:p>
+            <a:pPr algn="ctr"/>
+          </a:p>
+        </p:txBody>
+      </p:sp>
+      <p:sp>
+        <p:nvSpPr>
+          <p:cNvPr id="20" name="TextBox 19"/>
+          <p:cNvSpPr txBox="1"/>
+          <p:nvPr/>
+        </p:nvSpPr>
+        <p:spPr>
+          <a:xfrm>
+            <a:off x="4800600" y="1234440"/>
+            <a:ext cx="6858000" cy="2057400"/>
+          </a:xfrm>
+          <a:prstGeom prst="rect">
+            <a:avLst/>
+          </a:prstGeom>
+          <a:noFill/>
+        </p:spPr>
+        <p:txBody>
+          <a:bodyPr wrap="square">
+            <a:spAutoFit/>
+          </a:bodyPr>
+          <a:lstStyle/>
+          <a:p>
+            <a:r>
+              <a:rPr sz="1200" b="0">
+                <a:solidFill>
+                  <a:srgbClr val="5EEAD4"/>
+                </a:solidFill>
+                <a:latin typeface="Consolas"/>
+              </a:rPr>
+              <a:t>// 方案 4：发布后的工具返回（示意）</a:t>
+            </a:r>
+          </a:p>
+          <a:p>
+            <a:r>
+              <a:rPr sz="1200" b="0">
+                <a:solidFill>
+                  <a:srgbClr val="CBD5E1"/>
+                </a:solidFill>
+                <a:latin typeface="Consolas"/>
+              </a:rPr>
+              <a:t>{ "preview_url": "https://preview.xxx/p/abc/",</a:t>
+            </a:r>
+          </a:p>
+          <a:p>
+            <a:r>
+              <a:rPr sz="1200" b="0">
+                <a:solidFill>
+                  <a:srgbClr val="CBD5E1"/>
+                </a:solidFill>
+                <a:latin typeface="Consolas"/>
+              </a:rPr>
+              <a:t>  "expires_at": "2026-08-01T00:00:00Z",</a:t>
+            </a:r>
+          </a:p>
+          <a:p>
+            <a:r>
+              <a:rPr sz="1200" b="0">
+                <a:solidFill>
+                  <a:srgbClr val="CBD5E1"/>
+                </a:solidFill>
+                <a:latin typeface="Consolas"/>
+              </a:rPr>
+              <a:t>  "mime": "text/html",</a:t>
+            </a:r>
+          </a:p>
+          <a:p>
+            <a:r>
+              <a:rPr sz="1200" b="0">
+                <a:solidFill>
+                  <a:srgbClr val="CBD5E1"/>
+                </a:solidFill>
+                <a:latin typeface="Consolas"/>
+              </a:rPr>
+              <a:t>  "source_file_id": "f_xxx"  // 可选，云空间源文件 }</a:t>
+            </a:r>
+          </a:p>
+        </p:txBody>
+      </p:sp>
+      <p:sp>
+        <p:nvSpPr>
+          <p:cNvPr id="21" name="Rounded Rectangle 20"/>
+          <p:cNvSpPr/>
+          <p:nvPr/>
+        </p:nvSpPr>
+        <p:spPr>
+          <a:xfrm>
+            <a:off x="4617720" y="3611880"/>
+            <a:ext cx="3474720" cy="2880360"/>
+          </a:xfrm>
+          <a:prstGeom prst="roundRect">
+            <a:avLst>
+              <a:gd name="adj" fmla="val 8000"/>
+            </a:avLst>
+          </a:prstGeom>
+          <a:solidFill>
+            <a:srgbClr val="0F172A"/>
+          </a:solidFill>
+          <a:ln w="12700">
+            <a:solidFill>
+              <a:srgbClr val="0F172A"/>
+            </a:solidFill>
+          </a:ln>
+        </p:spPr>
+        <p:style>
+          <a:lnRef idx="1">
+            <a:schemeClr val="accent1"/>
+          </a:lnRef>
+          <a:fillRef idx="3">
+            <a:schemeClr val="accent1"/>
+          </a:fillRef>
+          <a:effectRef idx="2">
+            <a:schemeClr val="accent1"/>
+          </a:effectRef>
+          <a:fontRef idx="minor">
+            <a:schemeClr val="lt1"/>
+          </a:fontRef>
+        </p:style>
+        <p:txBody>
+          <a:bodyPr rtlCol="0" anchor="ctr"/>
+          <a:lstStyle/>
+          <a:p>
+            <a:pPr algn="ctr"/>
+          </a:p>
+        </p:txBody>
+      </p:sp>
+      <p:sp>
+        <p:nvSpPr>
+          <p:cNvPr id="22" name="TextBox 21"/>
+          <p:cNvSpPr txBox="1"/>
+          <p:nvPr/>
+        </p:nvSpPr>
+        <p:spPr>
+          <a:xfrm>
+            <a:off x="4754880" y="3749039"/>
+            <a:ext cx="3200400" cy="2606040"/>
+          </a:xfrm>
+          <a:prstGeom prst="rect">
+            <a:avLst/>
+          </a:prstGeom>
+          <a:noFill/>
+        </p:spPr>
+        <p:txBody>
+          <a:bodyPr wrap="square">
+            <a:spAutoFit/>
+          </a:bodyPr>
+          <a:lstStyle/>
+          <a:p>
+            <a:r>
+              <a:rPr sz="1100" b="0">
+                <a:solidFill>
+                  <a:srgbClr val="5EEAD4"/>
+                </a:solidFill>
+                <a:latin typeface="Consolas"/>
+              </a:rPr>
+              <a:t>// 方案 4 · 端侧</a:t>
+            </a:r>
+          </a:p>
+          <a:p>
+            <a:r>
+              <a:rPr sz="1100" b="0">
+                <a:solidFill>
+                  <a:srgbClr val="CBD5E1"/>
+                </a:solidFill>
+                <a:latin typeface="Consolas"/>
+              </a:rPr>
+              <a:t>webView.settings.javaScript</a:t>
+            </a:r>
+          </a:p>
+          <a:p>
+            <a:r>
+              <a:rPr sz="1100" b="0">
+                <a:solidFill>
+                  <a:srgbClr val="CBD5E1"/>
+                </a:solidFill>
+                <a:latin typeface="Consolas"/>
+              </a:rPr>
+              <a:t>  Enabled = true</a:t>
+            </a:r>
+          </a:p>
+          <a:p>
+            <a:r>
+              <a:rPr sz="1100" b="0">
+                <a:solidFill>
+                  <a:srgbClr val="CBD5E1"/>
+                </a:solidFill>
+                <a:latin typeface="Consolas"/>
+              </a:rPr>
+              <a:t>webView.loadUrl(previewUrl)</a:t>
+            </a:r>
+          </a:p>
+          <a:p>
+            <a:r>
+              <a:rPr sz="1100" b="0">
+                <a:solidFill>
+                  <a:srgbClr val="CBD5E1"/>
+                </a:solidFill>
+                <a:latin typeface="Consolas"/>
+              </a:rPr>
+              <a:t>// 或 iframe.src = url</a:t>
+            </a:r>
+          </a:p>
+          <a:p>
+            <a:r>
+              <a:rPr sz="1100" b="0">
+                <a:solidFill>
+                  <a:srgbClr val="CBD5E1"/>
+                </a:solidFill>
+                <a:latin typeface="Consolas"/>
+              </a:rPr>
+              <a:t>// + sandbox=allow-scripts</a:t>
+            </a:r>
+          </a:p>
+        </p:txBody>
+      </p:sp>
+      <p:sp>
+        <p:nvSpPr>
+          <p:cNvPr id="23" name="Rounded Rectangle 22"/>
+          <p:cNvSpPr/>
+          <p:nvPr/>
+        </p:nvSpPr>
+        <p:spPr>
+          <a:xfrm>
+            <a:off x="8275320" y="3611880"/>
+            <a:ext cx="3520440" cy="2880360"/>
+          </a:xfrm>
+          <a:prstGeom prst="roundRect">
+            <a:avLst>
+              <a:gd name="adj" fmla="val 8000"/>
+            </a:avLst>
+          </a:prstGeom>
+          <a:solidFill>
+            <a:srgbClr val="0F172A"/>
+          </a:solidFill>
+          <a:ln w="12700">
+            <a:solidFill>
+              <a:srgbClr val="0F172A"/>
+            </a:solidFill>
+          </a:ln>
+        </p:spPr>
+        <p:style>
+          <a:lnRef idx="1">
+            <a:schemeClr val="accent1"/>
+          </a:lnRef>
+          <a:fillRef idx="3">
+            <a:schemeClr val="accent1"/>
+          </a:fillRef>
+          <a:effectRef idx="2">
+            <a:schemeClr val="accent1"/>
+          </a:effectRef>
+          <a:fontRef idx="minor">
+            <a:schemeClr val="lt1"/>
+          </a:fontRef>
+        </p:style>
+        <p:txBody>
+          <a:bodyPr rtlCol="0" anchor="ctr"/>
+          <a:lstStyle/>
+          <a:p>
+            <a:pPr algn="ctr"/>
+          </a:p>
+        </p:txBody>
+      </p:sp>
+      <p:sp>
+        <p:nvSpPr>
+          <p:cNvPr id="24" name="TextBox 23"/>
+          <p:cNvSpPr txBox="1"/>
+          <p:nvPr/>
+        </p:nvSpPr>
+        <p:spPr>
+          <a:xfrm>
+            <a:off x="8412480" y="3749039"/>
+            <a:ext cx="3246120" cy="2606040"/>
+          </a:xfrm>
+          <a:prstGeom prst="rect">
+            <a:avLst/>
+          </a:prstGeom>
+          <a:noFill/>
+        </p:spPr>
+        <p:txBody>
+          <a:bodyPr wrap="square">
+            <a:spAutoFit/>
+          </a:bodyPr>
+          <a:lstStyle/>
+          <a:p>
+            <a:r>
+              <a:rPr sz="1200" b="0">
+                <a:solidFill>
+                  <a:srgbClr val="5EEAD4"/>
+                </a:solidFill>
+                <a:latin typeface="Consolas"/>
+              </a:rPr>
+              <a:t>// 方案 A · 兜底</a:t>
+            </a:r>
+          </a:p>
+          <a:p>
+            <a:r>
+              <a:rPr sz="1200" b="0">
+                <a:solidFill>
+                  <a:srgbClr val="CBD5E1"/>
+                </a:solidFill>
+                <a:latin typeface="Consolas"/>
+              </a:rPr>
+              <a:t>html = await download(id)</a:t>
+            </a:r>
+          </a:p>
+          <a:p>
+            <a:r>
+              <a:rPr sz="1200" b="0">
+                <a:solidFill>
+                  <a:srgbClr val="CBD5E1"/>
+                </a:solidFill>
+                <a:latin typeface="Consolas"/>
+              </a:rPr>
+              <a:t>iframe.sandbox =</a:t>
+            </a:r>
+          </a:p>
+          <a:p>
+            <a:r>
+              <a:rPr sz="1200" b="0">
+                <a:solidFill>
+                  <a:srgbClr val="CBD5E1"/>
+                </a:solidFill>
+                <a:latin typeface="Consolas"/>
+              </a:rPr>
+              <a:t>  'allow-scripts'</a:t>
+            </a:r>
+          </a:p>
+          <a:p>
+            <a:r>
+              <a:rPr sz="1200" b="0">
+                <a:solidFill>
+                  <a:srgbClr val="CBD5E1"/>
+                </a:solidFill>
+                <a:latin typeface="Consolas"/>
+              </a:rPr>
+              <a:t>iframe.srcdoc = html</a:t>
+            </a:r>
+          </a:p>
+        </p:txBody>
+      </p:sp>
+    </p:spTree>
+  </p:cSld>
+  <p:clrMapOvr>
+    <a:masterClrMapping/>
+  </p:clrMapOvr>
+</p:sld>
+</file>
+
+<file path=ppt/slides/slide9.xml><?xml version="1.0" encoding="utf-8"?>
+<p:sld xmlns:a="http://schemas.openxmlformats.org/drawingml/2006/main" xmlns:p="http://schemas.openxmlformats.org/presentationml/2006/main" xmlns:r="http://schemas.openxmlformats.org/officeDocument/2006/relationships">
+  <p:cSld>
+    <p:spTree>
+      <p:nvGrpSpPr>
+        <p:cNvPr id="1" name=""/>
+        <p:cNvGrpSpPr/>
+        <p:nvPr/>
+      </p:nvGrpSpPr>
+      <p:grpSpPr/>
+      <p:sp>
+        <p:nvSpPr>
+          <p:cNvPr id="2" name="Rectangle 1"/>
+          <p:cNvSpPr/>
+          <p:nvPr/>
+        </p:nvSpPr>
+        <p:spPr>
+          <a:xfrm>
+            <a:off x="0" y="0"/>
+            <a:ext cx="12191695" cy="6858000"/>
+          </a:xfrm>
+          <a:prstGeom prst="rect">
+            <a:avLst/>
+          </a:prstGeom>
+          <a:solidFill>
+            <a:srgbClr val="F8FAFC"/>
+          </a:solidFill>
+          <a:ln>
+            <a:noFill/>
+          </a:ln>
+        </p:spPr>
+        <p:style>
+          <a:lnRef idx="1">
+            <a:schemeClr val="accent1"/>
+          </a:lnRef>
+          <a:fillRef idx="3">
+            <a:schemeClr val="accent1"/>
+          </a:fillRef>
+          <a:effectRef idx="2">
+            <a:schemeClr val="accent1"/>
+          </a:effectRef>
+          <a:fontRef idx="minor">
+            <a:schemeClr val="lt1"/>
+          </a:fontRef>
+        </p:style>
+        <p:txBody>
+          <a:bodyPr rtlCol="0" anchor="ctr"/>
+          <a:lstStyle/>
+          <a:p>
+            <a:pPr algn="ctr"/>
+          </a:p>
+        </p:txBody>
+      </p:sp>
+      <p:sp>
+        <p:nvSpPr>
+          <p:cNvPr id="3" name="Rectangle 2"/>
+          <p:cNvSpPr/>
+          <p:nvPr/>
+        </p:nvSpPr>
+        <p:spPr>
+          <a:xfrm>
+            <a:off x="0" y="0"/>
+            <a:ext cx="12191695" cy="868680"/>
+          </a:xfrm>
+          <a:prstGeom prst="rect">
+            <a:avLst/>
+          </a:prstGeom>
+          <a:solidFill>
+            <a:srgbClr val="0F172A"/>
+          </a:solidFill>
+          <a:ln>
+            <a:noFill/>
+          </a:ln>
+        </p:spPr>
+        <p:style>
+          <a:lnRef idx="1">
+            <a:schemeClr val="accent1"/>
+          </a:lnRef>
+          <a:fillRef idx="3">
+            <a:schemeClr val="accent1"/>
+          </a:fillRef>
+          <a:effectRef idx="2">
+            <a:schemeClr val="accent1"/>
+          </a:effectRef>
+          <a:fontRef idx="minor">
+            <a:schemeClr val="lt1"/>
+          </a:fontRef>
+        </p:style>
+        <p:txBody>
+          <a:bodyPr rtlCol="0" anchor="ctr"/>
+          <a:lstStyle/>
+          <a:p>
+            <a:pPr algn="ctr"/>
+          </a:p>
+        </p:txBody>
+      </p:sp>
+      <p:sp>
+        <p:nvSpPr>
+          <p:cNvPr id="4" name="Rectangle 3"/>
+          <p:cNvSpPr/>
+          <p:nvPr/>
+        </p:nvSpPr>
+        <p:spPr>
+          <a:xfrm>
+            <a:off x="0" y="868680"/>
+            <a:ext cx="12191695" cy="54864"/>
+          </a:xfrm>
+          <a:prstGeom prst="rect">
+            <a:avLst/>
+          </a:prstGeom>
+          <a:solidFill>
+            <a:srgbClr val="0D9488"/>
+          </a:solidFill>
+          <a:ln>
+            <a:noFill/>
+          </a:ln>
+        </p:spPr>
+        <p:style>
+          <a:lnRef idx="1">
+            <a:schemeClr val="accent1"/>
+          </a:lnRef>
+          <a:fillRef idx="3">
+            <a:schemeClr val="accent1"/>
+          </a:fillRef>
+          <a:effectRef idx="2">
+            <a:schemeClr val="accent1"/>
+          </a:effectRef>
+          <a:fontRef idx="minor">
+            <a:schemeClr val="lt1"/>
+          </a:fontRef>
+        </p:style>
+        <p:txBody>
+          <a:bodyPr rtlCol="0" anchor="ctr"/>
+          <a:lstStyle/>
+          <a:p>
+            <a:pPr algn="ctr"/>
+          </a:p>
+        </p:txBody>
+      </p:sp>
+      <p:sp>
+        <p:nvSpPr>
+          <p:cNvPr id="5" name="Rounded Rectangle 4"/>
+          <p:cNvSpPr/>
+          <p:nvPr/>
+        </p:nvSpPr>
+        <p:spPr>
+          <a:xfrm>
+            <a:off x="411480" y="201168"/>
+            <a:ext cx="502920" cy="457200"/>
+          </a:xfrm>
+          <a:prstGeom prst="roundRect">
+            <a:avLst>
+              <a:gd name="adj" fmla="val 30000"/>
+            </a:avLst>
+          </a:prstGeom>
+          <a:solidFill>
+            <a:srgbClr val="0D9488"/>
+          </a:solidFill>
+          <a:ln>
+            <a:noFill/>
+          </a:ln>
+        </p:spPr>
+        <p:style>
+          <a:lnRef idx="1">
+            <a:schemeClr val="accent1"/>
+          </a:lnRef>
+          <a:fillRef idx="3">
+            <a:schemeClr val="accent1"/>
+          </a:fillRef>
+          <a:effectRef idx="2">
+            <a:schemeClr val="accent1"/>
+          </a:effectRef>
+          <a:fontRef idx="minor">
+            <a:schemeClr val="lt1"/>
+          </a:fontRef>
+        </p:style>
+        <p:txBody>
+          <a:bodyPr rtlCol="0" anchor="ctr"/>
+          <a:lstStyle/>
+          <a:p>
+            <a:pPr algn="ctr"/>
+            <a:r>
+              <a:rPr sz="1400" b="1">
+                <a:solidFill>
+                  <a:srgbClr val="FFFFFF"/>
+                </a:solidFill>
+                <a:latin typeface="Calibri"/>
+              </a:rPr>
+              <a:t>07</a:t>
+            </a:r>
+          </a:p>
+        </p:txBody>
+      </p:sp>
+      <p:sp>
+        <p:nvSpPr>
+          <p:cNvPr id="6" name="TextBox 5"/>
+          <p:cNvSpPr txBox="1"/>
+          <p:nvPr/>
+        </p:nvSpPr>
+        <p:spPr>
+          <a:xfrm>
+            <a:off x="1051560" y="164592"/>
+            <a:ext cx="10515600" cy="640080"/>
+          </a:xfrm>
+          <a:prstGeom prst="rect">
+            <a:avLst/>
+          </a:prstGeom>
+          <a:noFill/>
+        </p:spPr>
+        <p:txBody>
+          <a:bodyPr wrap="square">
+            <a:spAutoFit/>
+          </a:bodyPr>
+          <a:lstStyle/>
+          <a:p>
+            <a:r>
+              <a:rPr sz="2200" b="1">
+                <a:solidFill>
+                  <a:srgbClr val="FFFFFF"/>
+                </a:solidFill>
+                <a:latin typeface="Calibri"/>
+              </a:rPr>
               <a:t>结论与建议</a:t>
             </a:r>
           </a:p>
@@ -11358,7 +12315,7 @@
                 </a:solidFill>
                 <a:latin typeface="Calibri"/>
               </a:rPr>
-              <a:t>用最少改动打通「对话里看得见的健康报告」</a:t>
+              <a:t>方案 4 作 Web 渲染中台；A 作轻量兜底；B/C 作体验增强</a:t>
             </a:r>
           </a:p>
         </p:txBody>
@@ -11674,7 +12631,7 @@
                 </a:solidFill>
                 <a:latin typeface="Calibri"/>
               </a:rPr>
-              <a:t>能力优先级</a:t>
+              <a:t>方案 4 定位</a:t>
             </a:r>
           </a:p>
         </p:txBody>
@@ -11708,7 +12665,7 @@
                 </a:solidFill>
                 <a:latin typeface="Calibri"/>
               </a:rPr>
-              <a:t>先补渲染 + 安全</a:t>
+              <a:t>云预览服务生成可渲染链接</a:t>
             </a:r>
           </a:p>
           <a:p>
@@ -11724,7 +12681,7 @@
                 </a:solidFill>
                 <a:latin typeface="Calibri"/>
               </a:rPr>
-              <a:t>分享与流式后置</a:t>
+              <a:t>WebView 直接打开——中台主路径</a:t>
             </a:r>
           </a:p>
         </p:txBody>
@@ -11857,7 +12814,7 @@
                 </a:solidFill>
                 <a:latin typeface="Calibri"/>
               </a:rPr>
-              <a:t>竞品对标</a:t>
+              <a:t>与云空间</a:t>
             </a:r>
           </a:p>
         </p:txBody>
@@ -11891,7 +12848,7 @@
                 </a:solidFill>
                 <a:latin typeface="Calibri"/>
               </a:rPr>
-              <a:t>Claude Artifacts / OpenClaw Widget</a:t>
+              <a:t>云空间作源文件仓；预览域作</a:t>
             </a:r>
           </a:p>
           <a:p>
@@ -11907,7 +12864,7 @@
                 </a:solidFill>
                 <a:latin typeface="Calibri"/>
               </a:rPr>
-              <a:t>分享演进参考 Manus</a:t>
+              <a:t>HTTP 渲染入口（可解耦）</a:t>
             </a:r>
           </a:p>
         </p:txBody>
@@ -12040,7 +12997,7 @@
                 </a:solidFill>
                 <a:latin typeface="Calibri"/>
               </a:rPr>
-              <a:t>方案选择</a:t>
+              <a:t>方案组合</a:t>
             </a:r>
           </a:p>
         </p:txBody>
@@ -12074,7 +13031,7 @@
                 </a:solidFill>
                 <a:latin typeface="Calibri"/>
               </a:rPr>
-              <a:t>一期默认 A；报告场景演进 C</a:t>
+              <a:t>主路径 D；兜底 A；长等待用 C</a:t>
             </a:r>
           </a:p>
           <a:p>
@@ -12257,7 +13214,7 @@
                 </a:solidFill>
                 <a:latin typeface="Calibri"/>
               </a:rPr>
-              <a:t>模型 HTML = 不可信</a:t>
+              <a:t>独立预览域 + CSP/TTL</a:t>
             </a:r>
           </a:p>
           <a:p>
@@ -12273,7 +13230,7 @@
                 </a:solidFill>
                 <a:latin typeface="Calibri"/>
               </a:rPr>
-              <a:t>allow-scripts，慎开 same-origin</a:t>
+              <a:t>WebView 仍建议 sandbox 思维</a:t>
             </a:r>
           </a:p>
         </p:txBody>
@@ -12440,7 +13397,7 @@
                 </a:solidFill>
                 <a:latin typeface="Calibri"/>
               </a:rPr>
-              <a:t>元数据 + 预览卡片 + sandbox</a:t>
+              <a:t>预览发布 API + 短链 URL</a:t>
             </a:r>
           </a:p>
           <a:p>
@@ -12456,7 +13413,7 @@
                 </a:solidFill>
                 <a:latin typeface="Calibri"/>
               </a:rPr>
-              <a:t>用健康报告做验收</a:t>
+              <a:t>健康报告验收：会话内 loadUrl</a:t>
             </a:r>
           </a:p>
         </p:txBody>
